--- a/docs/IPA_eBPF_pipelines.pptx
+++ b/docs/IPA_eBPF_pipelines.pptx
@@ -7712,7 +7712,7 @@
                           </a:solidFill>
                           <a:latin typeface="Consolas"/>
                         </a:rPr>
-                        <a:t>1 057</a:t>
+                        <a:t>1 095</a:t>
                       </a:r>
                     </a:p>
                   </a:txBody>
@@ -7735,7 +7735,7 @@
                           </a:solidFill>
                           <a:latin typeface="Consolas"/>
                         </a:rPr>
-                        <a:t>1 968</a:t>
+                        <a:t>2 897</a:t>
                       </a:r>
                     </a:p>
                   </a:txBody>
@@ -7758,7 +7758,7 @@
                           </a:solidFill>
                           <a:latin typeface="Consolas"/>
                         </a:rPr>
-                        <a:t>13 488</a:t>
+                        <a:t>13 645</a:t>
                       </a:r>
                     </a:p>
                   </a:txBody>
@@ -7806,7 +7806,7 @@
                           </a:solidFill>
                           <a:latin typeface="Consolas"/>
                         </a:rPr>
-                        <a:t>5 081</a:t>
+                        <a:t>5 132</a:t>
                       </a:r>
                     </a:p>
                   </a:txBody>
@@ -7829,7 +7829,7 @@
                           </a:solidFill>
                           <a:latin typeface="Consolas"/>
                         </a:rPr>
-                        <a:t>8 766</a:t>
+                        <a:t>12 575</a:t>
                       </a:r>
                     </a:p>
                   </a:txBody>
@@ -7852,7 +7852,7 @@
                           </a:solidFill>
                           <a:latin typeface="Consolas"/>
                         </a:rPr>
-                        <a:t>57 523</a:t>
+                        <a:t>58 146</a:t>
                       </a:r>
                     </a:p>
                   </a:txBody>
@@ -7994,7 +7994,7 @@
                           </a:solidFill>
                           <a:latin typeface="Consolas"/>
                         </a:rPr>
-                        <a:t>~264 †</a:t>
+                        <a:t>264</a:t>
                       </a:r>
                     </a:p>
                   </a:txBody>
@@ -8017,7 +8017,7 @@
                           </a:solidFill>
                           <a:latin typeface="Consolas"/>
                         </a:rPr>
-                        <a:t>15 748</a:t>
+                        <a:t>15 796</a:t>
                       </a:r>
                     </a:p>
                   </a:txBody>
@@ -8040,7 +8040,7 @@
                           </a:solidFill>
                           <a:latin typeface="Consolas"/>
                         </a:rPr>
-                        <a:t>28 420</a:t>
+                        <a:t>28 468</a:t>
                       </a:r>
                     </a:p>
                   </a:txBody>
@@ -8088,7 +8088,7 @@
                           </a:solidFill>
                           <a:latin typeface="Consolas"/>
                         </a:rPr>
-                        <a:t>1030.0</a:t>
+                        <a:t>1109.0</a:t>
                       </a:r>
                     </a:p>
                   </a:txBody>
@@ -8111,7 +8111,7 @@
                           </a:solidFill>
                           <a:latin typeface="Consolas"/>
                         </a:rPr>
-                        <a:t>131.0</a:t>
+                        <a:t>339.0</a:t>
                       </a:r>
                     </a:p>
                   </a:txBody>
@@ -8134,7 +8134,7 @@
                           </a:solidFill>
                           <a:latin typeface="Consolas"/>
                         </a:rPr>
-                        <a:t>562.0</a:t>
+                        <a:t>1291.0</a:t>
                       </a:r>
                     </a:p>
                   </a:txBody>
@@ -8182,7 +8182,7 @@
                           </a:solidFill>
                           <a:latin typeface="Consolas"/>
                         </a:rPr>
-                        <a:t>0.971</a:t>
+                        <a:t>0.902</a:t>
                       </a:r>
                     </a:p>
                   </a:txBody>
@@ -8205,7 +8205,7 @@
                           </a:solidFill>
                           <a:latin typeface="Consolas"/>
                         </a:rPr>
-                        <a:t>7.634</a:t>
+                        <a:t>2.950</a:t>
                       </a:r>
                     </a:p>
                   </a:txBody>
@@ -8228,7 +8228,7 @@
                           </a:solidFill>
                           <a:latin typeface="Consolas"/>
                         </a:rPr>
-                        <a:t>1.779</a:t>
+                        <a:t>0.775</a:t>
                       </a:r>
                     </a:p>
                   </a:txBody>
@@ -8276,7 +8276,7 @@
                           </a:solidFill>
                           <a:latin typeface="Consolas"/>
                         </a:rPr>
-                        <a:t>59</a:t>
+                        <a:t>60</a:t>
                       </a:r>
                     </a:p>
                   </a:txBody>
@@ -8299,7 +8299,7 @@
                           </a:solidFill>
                           <a:latin typeface="Consolas"/>
                         </a:rPr>
-                        <a:t>29</a:t>
+                        <a:t>48</a:t>
                       </a:r>
                     </a:p>
                   </a:txBody>
@@ -8322,7 +8322,7 @@
                           </a:solidFill>
                           <a:latin typeface="Consolas"/>
                         </a:rPr>
-                        <a:t>57</a:t>
+                        <a:t>79</a:t>
                       </a:r>
                     </a:p>
                   </a:txBody>
@@ -8454,7 +8454,7 @@
                 </a:solidFill>
                 <a:latin typeface="Segoe UI"/>
               </a:rPr>
-              <a:t>P2 più veloce (131 ns).</a:t>
+              <a:t>P2 più veloce (339 ns).</a:t>
             </a:r>
           </a:p>
           <a:p>
@@ -8485,7 +8485,7 @@
                 </a:solidFill>
                 <a:latin typeface="Segoe UI"/>
               </a:rPr>
-              <a:t>P1 hardcoded puro: memoria mappe minima.</a:t>
+              <a:t>P1 hardcoded puro: solo 264 B di mappe.</a:t>
             </a:r>
           </a:p>
           <a:p>
@@ -8516,7 +8516,7 @@
                 </a:solidFill>
                 <a:latin typeface="Segoe UI"/>
               </a:rPr>
-              <a:t>P3 ≈13× istruzioni di P1.</a:t>
+              <a:t>P3 ≈12× istruzioni di P1.</a:t>
             </a:r>
           </a:p>
         </p:txBody>
@@ -8561,7 +8561,7 @@
                 </a:solidFill>
                 <a:latin typeface="Segoe UI"/>
               </a:rPr>
-              <a:t>† Rimisurare: </a:t>
+              <a:t>Misurato dopo link_state reale + rimozione di model_cache: </a:t>
             </a:r>
             <a:r>
               <a:rPr sz="1200" b="0">
@@ -8570,7 +8570,7 @@
                 </a:solidFill>
                 <a:latin typeface="Segoe UI"/>
               </a:rPr>
-              <a:t>tabella raccolta prima della rimozione di model_cache (P1 hardcoded puro) e del link_state reale. Memoria P1 attesa 83 KB → ~264 B; +~30–40 istruzioni per i 6 lookup link_state; latenza ~invariata.</a:t>
+              <a:t>la memoria mappe di P1 crolla da 83 KB a 264 B (model_cache era il 99%); il popolamento link_state costa +38 istruzioni su P1, +~930 su P2. Latenza/throughput hanno varianza run-to-run.</a:t>
             </a:r>
           </a:p>
         </p:txBody>

--- a/docs/IPA_eBPF_pipelines.pptx
+++ b/docs/IPA_eBPF_pipelines.pptx
@@ -7581,7 +7581,7 @@
                 <a:gridCol w="1764792"/>
                 <a:gridCol w="1764792"/>
               </a:tblGrid>
-              <a:tr h="422910">
+              <a:tr h="375920">
                 <a:tc>
                   <a:txBody>
                     <a:bodyPr/>
@@ -7675,7 +7675,7 @@
                   </a:tcPr>
                 </a:tc>
               </a:tr>
-              <a:tr h="422910">
+              <a:tr h="375920">
                 <a:tc>
                   <a:txBody>
                     <a:bodyPr/>
@@ -7769,7 +7769,7 @@
                   </a:tcPr>
                 </a:tc>
               </a:tr>
-              <a:tr h="422910">
+              <a:tr h="375920">
                 <a:tc>
                   <a:txBody>
                     <a:bodyPr/>
@@ -7863,7 +7863,7 @@
                   </a:tcPr>
                 </a:tc>
               </a:tr>
-              <a:tr h="422910">
+              <a:tr h="375920">
                 <a:tc>
                   <a:txBody>
                     <a:bodyPr/>
@@ -7957,7 +7957,7 @@
                   </a:tcPr>
                 </a:tc>
               </a:tr>
-              <a:tr h="422910">
+              <a:tr h="375920">
                 <a:tc>
                   <a:txBody>
                     <a:bodyPr/>
@@ -7971,7 +7971,7 @@
                           </a:solidFill>
                           <a:latin typeface="Segoe UI"/>
                         </a:rPr>
-                        <a:t>Memoria mappe (byte)</a:t>
+                        <a:t>Map lookup / pkt (stima)</a:t>
                       </a:r>
                     </a:p>
                   </a:txBody>
@@ -7994,7 +7994,7 @@
                           </a:solidFill>
                           <a:latin typeface="Consolas"/>
                         </a:rPr>
-                        <a:t>264</a:t>
+                        <a:t>8</a:t>
                       </a:r>
                     </a:p>
                   </a:txBody>
@@ -8017,7 +8017,7 @@
                           </a:solidFill>
                           <a:latin typeface="Consolas"/>
                         </a:rPr>
-                        <a:t>15 796</a:t>
+                        <a:t>322</a:t>
                       </a:r>
                     </a:p>
                   </a:txBody>
@@ -8040,7 +8040,7 @@
                           </a:solidFill>
                           <a:latin typeface="Consolas"/>
                         </a:rPr>
-                        <a:t>28 468</a:t>
+                        <a:t>384</a:t>
                       </a:r>
                     </a:p>
                   </a:txBody>
@@ -8051,7 +8051,7 @@
                   </a:tcPr>
                 </a:tc>
               </a:tr>
-              <a:tr h="422910">
+              <a:tr h="375920">
                 <a:tc>
                   <a:txBody>
                     <a:bodyPr/>
@@ -8065,7 +8065,7 @@
                           </a:solidFill>
                           <a:latin typeface="Segoe UI"/>
                         </a:rPr>
-                        <a:t>Latenza (ns / pkt)</a:t>
+                        <a:t>Memoria mappe (byte)</a:t>
                       </a:r>
                     </a:p>
                   </a:txBody>
@@ -8088,7 +8088,7 @@
                           </a:solidFill>
                           <a:latin typeface="Consolas"/>
                         </a:rPr>
-                        <a:t>1109.0</a:t>
+                        <a:t>264</a:t>
                       </a:r>
                     </a:p>
                   </a:txBody>
@@ -8111,7 +8111,7 @@
                           </a:solidFill>
                           <a:latin typeface="Consolas"/>
                         </a:rPr>
-                        <a:t>339.0</a:t>
+                        <a:t>15 796</a:t>
                       </a:r>
                     </a:p>
                   </a:txBody>
@@ -8134,7 +8134,7 @@
                           </a:solidFill>
                           <a:latin typeface="Consolas"/>
                         </a:rPr>
-                        <a:t>1291.0</a:t>
+                        <a:t>28 468</a:t>
                       </a:r>
                     </a:p>
                   </a:txBody>
@@ -8145,7 +8145,7 @@
                   </a:tcPr>
                 </a:tc>
               </a:tr>
-              <a:tr h="422910">
+              <a:tr h="375920">
                 <a:tc>
                   <a:txBody>
                     <a:bodyPr/>
@@ -8159,7 +8159,7 @@
                           </a:solidFill>
                           <a:latin typeface="Segoe UI"/>
                         </a:rPr>
-                        <a:t>Throughput (Mpps)</a:t>
+                        <a:t>Latenza (ns / pkt)</a:t>
                       </a:r>
                     </a:p>
                   </a:txBody>
@@ -8182,7 +8182,7 @@
                           </a:solidFill>
                           <a:latin typeface="Consolas"/>
                         </a:rPr>
-                        <a:t>0.902</a:t>
+                        <a:t>1109.0</a:t>
                       </a:r>
                     </a:p>
                   </a:txBody>
@@ -8205,7 +8205,7 @@
                           </a:solidFill>
                           <a:latin typeface="Consolas"/>
                         </a:rPr>
-                        <a:t>2.950</a:t>
+                        <a:t>339.0</a:t>
                       </a:r>
                     </a:p>
                   </a:txBody>
@@ -8228,7 +8228,7 @@
                           </a:solidFill>
                           <a:latin typeface="Consolas"/>
                         </a:rPr>
-                        <a:t>0.775</a:t>
+                        <a:t>1291.0</a:t>
                       </a:r>
                     </a:p>
                   </a:txBody>
@@ -8239,7 +8239,7 @@
                   </a:tcPr>
                 </a:tc>
               </a:tr>
-              <a:tr h="422910">
+              <a:tr h="375920">
                 <a:tc>
                   <a:txBody>
                     <a:bodyPr/>
@@ -8253,7 +8253,7 @@
                           </a:solidFill>
                           <a:latin typeface="Segoe UI"/>
                         </a:rPr>
-                        <a:t>CPU (%)</a:t>
+                        <a:t>Throughput (Mpps)</a:t>
                       </a:r>
                     </a:p>
                   </a:txBody>
@@ -8276,7 +8276,7 @@
                           </a:solidFill>
                           <a:latin typeface="Consolas"/>
                         </a:rPr>
-                        <a:t>60</a:t>
+                        <a:t>0.902</a:t>
                       </a:r>
                     </a:p>
                   </a:txBody>
@@ -8299,7 +8299,7 @@
                           </a:solidFill>
                           <a:latin typeface="Consolas"/>
                         </a:rPr>
-                        <a:t>48</a:t>
+                        <a:t>2.950</a:t>
                       </a:r>
                     </a:p>
                   </a:txBody>
@@ -8322,13 +8322,107 @@
                           </a:solidFill>
                           <a:latin typeface="Consolas"/>
                         </a:rPr>
+                        <a:t>0.775</a:t>
+                      </a:r>
+                    </a:p>
+                  </a:txBody>
+                  <a:tcPr marL="109728" marR="73152" marT="18288" marB="18288" anchor="ctr">
+                    <a:solidFill>
+                      <a:srgbClr val="1B222E"/>
+                    </a:solidFill>
+                  </a:tcPr>
+                </a:tc>
+              </a:tr>
+              <a:tr h="375920">
+                <a:tc>
+                  <a:txBody>
+                    <a:bodyPr/>
+                    <a:lstStyle/>
+                    <a:p>
+                      <a:pPr algn="l"/>
+                      <a:r>
+                        <a:rPr sz="1250" b="1">
+                          <a:solidFill>
+                            <a:srgbClr val="E6EDF3"/>
+                          </a:solidFill>
+                          <a:latin typeface="Segoe UI"/>
+                        </a:rPr>
+                        <a:t>CPU (%)</a:t>
+                      </a:r>
+                    </a:p>
+                  </a:txBody>
+                  <a:tcPr marL="109728" marR="73152" marT="18288" marB="18288" anchor="ctr">
+                    <a:solidFill>
+                      <a:srgbClr val="0D1117"/>
+                    </a:solidFill>
+                  </a:tcPr>
+                </a:tc>
+                <a:tc>
+                  <a:txBody>
+                    <a:bodyPr/>
+                    <a:lstStyle/>
+                    <a:p>
+                      <a:pPr algn="r"/>
+                      <a:r>
+                        <a:rPr sz="1250" b="0">
+                          <a:solidFill>
+                            <a:srgbClr val="E6EDF3"/>
+                          </a:solidFill>
+                          <a:latin typeface="Consolas"/>
+                        </a:rPr>
+                        <a:t>60</a:t>
+                      </a:r>
+                    </a:p>
+                  </a:txBody>
+                  <a:tcPr marL="109728" marR="73152" marT="18288" marB="18288" anchor="ctr">
+                    <a:solidFill>
+                      <a:srgbClr val="0D1117"/>
+                    </a:solidFill>
+                  </a:tcPr>
+                </a:tc>
+                <a:tc>
+                  <a:txBody>
+                    <a:bodyPr/>
+                    <a:lstStyle/>
+                    <a:p>
+                      <a:pPr algn="r"/>
+                      <a:r>
+                        <a:rPr sz="1250" b="0">
+                          <a:solidFill>
+                            <a:srgbClr val="E6EDF3"/>
+                          </a:solidFill>
+                          <a:latin typeface="Consolas"/>
+                        </a:rPr>
+                        <a:t>48</a:t>
+                      </a:r>
+                    </a:p>
+                  </a:txBody>
+                  <a:tcPr marL="109728" marR="73152" marT="18288" marB="18288" anchor="ctr">
+                    <a:solidFill>
+                      <a:srgbClr val="0D1117"/>
+                    </a:solidFill>
+                  </a:tcPr>
+                </a:tc>
+                <a:tc>
+                  <a:txBody>
+                    <a:bodyPr/>
+                    <a:lstStyle/>
+                    <a:p>
+                      <a:pPr algn="r"/>
+                      <a:r>
+                        <a:rPr sz="1250" b="0">
+                          <a:solidFill>
+                            <a:srgbClr val="E6EDF3"/>
+                          </a:solidFill>
+                          <a:latin typeface="Consolas"/>
+                        </a:rPr>
                         <a:t>79</a:t>
                       </a:r>
                     </a:p>
                   </a:txBody>
                   <a:tcPr marL="109728" marR="73152" marT="18288" marB="18288" anchor="ctr">
                     <a:solidFill>
-                      <a:srgbClr val="1B222E"/>
+                      <a:srgbClr val="0D1117"/>
                     </a:solidFill>
                   </a:tcPr>
                 </a:tc>

--- a/docs/IPA_eBPF_pipelines.pptx
+++ b/docs/IPA_eBPF_pipelines.pptx
@@ -7712,7 +7712,7 @@
                           </a:solidFill>
                           <a:latin typeface="Consolas"/>
                         </a:rPr>
-                        <a:t>1 095</a:t>
+                        <a:t>996</a:t>
                       </a:r>
                     </a:p>
                   </a:txBody>
@@ -7806,7 +7806,7 @@
                           </a:solidFill>
                           <a:latin typeface="Consolas"/>
                         </a:rPr>
-                        <a:t>5 132</a:t>
+                        <a:t>4 658</a:t>
                       </a:r>
                     </a:p>
                   </a:txBody>
@@ -8182,7 +8182,7 @@
                           </a:solidFill>
                           <a:latin typeface="Consolas"/>
                         </a:rPr>
-                        <a:t>1109.0</a:t>
+                        <a:t>72.0</a:t>
                       </a:r>
                     </a:p>
                   </a:txBody>
@@ -8205,7 +8205,7 @@
                           </a:solidFill>
                           <a:latin typeface="Consolas"/>
                         </a:rPr>
-                        <a:t>339.0</a:t>
+                        <a:t>287.0</a:t>
                       </a:r>
                     </a:p>
                   </a:txBody>
@@ -8228,7 +8228,7 @@
                           </a:solidFill>
                           <a:latin typeface="Consolas"/>
                         </a:rPr>
-                        <a:t>1291.0</a:t>
+                        <a:t>1274.0</a:t>
                       </a:r>
                     </a:p>
                   </a:txBody>
@@ -8276,7 +8276,7 @@
                           </a:solidFill>
                           <a:latin typeface="Consolas"/>
                         </a:rPr>
-                        <a:t>0.902</a:t>
+                        <a:t>13.889</a:t>
                       </a:r>
                     </a:p>
                   </a:txBody>
@@ -8299,7 +8299,7 @@
                           </a:solidFill>
                           <a:latin typeface="Consolas"/>
                         </a:rPr>
-                        <a:t>2.950</a:t>
+                        <a:t>3.484</a:t>
                       </a:r>
                     </a:p>
                   </a:txBody>
@@ -8322,7 +8322,7 @@
                           </a:solidFill>
                           <a:latin typeface="Consolas"/>
                         </a:rPr>
-                        <a:t>0.775</a:t>
+                        <a:t>0.785</a:t>
                       </a:r>
                     </a:p>
                   </a:txBody>
@@ -8370,7 +8370,7 @@
                           </a:solidFill>
                           <a:latin typeface="Consolas"/>
                         </a:rPr>
-                        <a:t>60</a:t>
+                        <a:t>58</a:t>
                       </a:r>
                     </a:p>
                   </a:txBody>
@@ -8393,7 +8393,7 @@
                           </a:solidFill>
                           <a:latin typeface="Consolas"/>
                         </a:rPr>
-                        <a:t>48</a:t>
+                        <a:t>61</a:t>
                       </a:r>
                     </a:p>
                   </a:txBody>
@@ -8416,7 +8416,7 @@
                           </a:solidFill>
                           <a:latin typeface="Consolas"/>
                         </a:rPr>
-                        <a:t>79</a:t>
+                        <a:t>80</a:t>
                       </a:r>
                     </a:p>
                   </a:txBody>
@@ -8548,7 +8548,7 @@
                 </a:solidFill>
                 <a:latin typeface="Segoe UI"/>
               </a:rPr>
-              <a:t>P2 più veloce (339 ns).</a:t>
+              <a:t>P1 più veloce: 72 ns, 13.9 Mpps.</a:t>
             </a:r>
           </a:p>
           <a:p>
@@ -8579,7 +8579,38 @@
                 </a:solidFill>
                 <a:latin typeface="Segoe UI"/>
               </a:rPr>
-              <a:t>P1 hardcoded puro: solo 264 B di mappe.</a:t>
+              <a:t>P1 più compatto: 264 B, 996 istr.</a:t>
+            </a:r>
+          </a:p>
+          <a:p>
+            <a:pPr algn="l">
+              <a:lnSpc>
+                <a:spcPct val="105000"/>
+              </a:lnSpc>
+              <a:spcBef>
+                <a:spcPts val="0"/>
+              </a:spcBef>
+              <a:spcAft>
+                <a:spcPts val="500"/>
+              </a:spcAft>
+            </a:pPr>
+            <a:r>
+              <a:rPr sz="1100" b="0">
+                <a:solidFill>
+                  <a:srgbClr val="3FD0C8"/>
+                </a:solidFill>
+                <a:latin typeface="Segoe UI"/>
+              </a:rPr>
+              <a:t>•  </a:t>
+            </a:r>
+            <a:r>
+              <a:rPr sz="1100" b="0">
+                <a:solidFill>
+                  <a:srgbClr val="8B949E"/>
+                </a:solidFill>
+                <a:latin typeface="Segoe UI"/>
+              </a:rPr>
+              <a:t>Ogni costo cresce P1→P2→P3.</a:t>
             </a:r>
           </a:p>
           <a:p>
@@ -8655,7 +8686,7 @@
                 </a:solidFill>
                 <a:latin typeface="Segoe UI"/>
               </a:rPr>
-              <a:t>Misurato dopo link_state reale + rimozione di model_cache: </a:t>
+              <a:t>Confronto pulito: </a:t>
             </a:r>
             <a:r>
               <a:rPr sz="1200" b="0">
@@ -8664,7 +8695,7 @@
                 </a:solidFill>
                 <a:latin typeface="Segoe UI"/>
               </a:rPr>
-              <a:t>la memoria mappe di P1 crolla da 83 KB a 264 B (model_cache era il 99%); il popolamento link_state costa +38 istruzioni su P1, +~930 su P2. Latenza/throughput hanno varianza run-to-run.</a:t>
+              <a:t>P1 è sceso da 1109 a 72 ns rimuovendo 3 bpf_trace_printk per pacchetto (assenti in P2/P3) che falsavano il baseline. L'inferenza è identica nelle 3 (chiave kernel = riferimento Python); differisce solo il design. Ordine coerente con la tassonomia.</a:t>
             </a:r>
           </a:p>
         </p:txBody>
@@ -10955,7 +10986,7 @@
                 </a:solidFill>
                 <a:latin typeface="Segoe UI"/>
               </a:rPr>
-              <a:t>Il più veloce nei nostri test</a:t>
+              <a:t>Prestazioni intermedie (287 ns)</a:t>
             </a:r>
           </a:p>
           <a:p>
@@ -19748,7 +19779,7 @@
                 </a:solidFill>
                 <a:latin typeface="Segoe UI"/>
               </a:rPr>
-              <a:t>Il risultato controintuitivo: il template è anche il più veloce.</a:t>
+              <a:t>Prestazioni intermedie (287 ns): tra P1 hardcoded e P3 modular.</a:t>
             </a:r>
           </a:p>
         </p:txBody>

--- a/docs/IPA_eBPF_pipelines.pptx
+++ b/docs/IPA_eBPF_pipelines.pptx
@@ -7735,7 +7735,7 @@
                           </a:solidFill>
                           <a:latin typeface="Consolas"/>
                         </a:rPr>
-                        <a:t>2 897</a:t>
+                        <a:t>2 668</a:t>
                       </a:r>
                     </a:p>
                   </a:txBody>

--- a/docs/IPA_eBPF_pipelines.pptx
+++ b/docs/IPA_eBPF_pipelines.pptx
@@ -3861,14 +3861,58 @@
       </p:sp>
       <p:sp>
         <p:nvSpPr>
-          <p:cNvPr id="7" name="TextBox 6"/>
+          <p:cNvPr id="7" name="Rounded Rectangle 6"/>
+          <p:cNvSpPr/>
+          <p:nvPr/>
+        </p:nvSpPr>
+        <p:spPr>
+          <a:xfrm>
+            <a:off x="731519" y="2194560"/>
+            <a:ext cx="1691640" cy="64008"/>
+          </a:xfrm>
+          <a:prstGeom prst="roundRect">
+            <a:avLst/>
+          </a:prstGeom>
+          <a:solidFill>
+            <a:srgbClr val="E6EDF3"/>
+          </a:solidFill>
+          <a:ln>
+            <a:noFill/>
+          </a:ln>
+          <a:effectLst/>
+        </p:spPr>
+        <p:style>
+          <a:lnRef idx="1">
+            <a:schemeClr val="accent1"/>
+          </a:lnRef>
+          <a:fillRef idx="3">
+            <a:schemeClr val="accent1"/>
+          </a:fillRef>
+          <a:effectRef idx="2">
+            <a:schemeClr val="accent1"/>
+          </a:effectRef>
+          <a:fontRef idx="minor">
+            <a:schemeClr val="lt1"/>
+          </a:fontRef>
+        </p:style>
+        <p:txBody>
+          <a:bodyPr rtlCol="0" anchor="ctr"/>
+          <a:lstStyle/>
+          <a:p>
+            <a:pPr algn="ctr"/>
+          </a:p>
+        </p:txBody>
+      </p:sp>
+      <p:sp>
+        <p:nvSpPr>
+          <p:cNvPr id="8" name="TextBox 7"/>
           <p:cNvSpPr txBox="1"/>
           <p:nvPr/>
         </p:nvSpPr>
         <p:spPr>
           <a:xfrm>
-            <a:off x="713231" y="2148840"/>
-            <a:ext cx="1728216" cy="1051560"/>
+            <a:off x="713231" y="2203704"/>
+            <a:ext cx="1728216" cy="996695"/>
           </a:xfrm>
           <a:prstGeom prst="rect">
             <a:avLst/>
@@ -3928,7 +3972,7 @@
       </p:sp>
       <p:sp>
         <p:nvSpPr>
-          <p:cNvPr id="8" name="TextBox 7"/>
+          <p:cNvPr id="9" name="TextBox 8"/>
           <p:cNvSpPr txBox="1"/>
           <p:nvPr/>
         </p:nvSpPr>
@@ -3973,7 +4017,7 @@
       </p:sp>
       <p:sp>
         <p:nvSpPr>
-          <p:cNvPr id="9" name="Rounded Rectangle 8"/>
+          <p:cNvPr id="10" name="Rounded Rectangle 9"/>
           <p:cNvSpPr/>
           <p:nvPr/>
         </p:nvSpPr>
@@ -4019,14 +4063,58 @@
       </p:sp>
       <p:sp>
         <p:nvSpPr>
-          <p:cNvPr id="10" name="TextBox 9"/>
+          <p:cNvPr id="11" name="Rounded Rectangle 10"/>
+          <p:cNvSpPr/>
+          <p:nvPr/>
+        </p:nvSpPr>
+        <p:spPr>
+          <a:xfrm>
+            <a:off x="2990088" y="2194560"/>
+            <a:ext cx="1691640" cy="64008"/>
+          </a:xfrm>
+          <a:prstGeom prst="roundRect">
+            <a:avLst/>
+          </a:prstGeom>
+          <a:solidFill>
+            <a:srgbClr val="F85149"/>
+          </a:solidFill>
+          <a:ln>
+            <a:noFill/>
+          </a:ln>
+          <a:effectLst/>
+        </p:spPr>
+        <p:style>
+          <a:lnRef idx="1">
+            <a:schemeClr val="accent1"/>
+          </a:lnRef>
+          <a:fillRef idx="3">
+            <a:schemeClr val="accent1"/>
+          </a:fillRef>
+          <a:effectRef idx="2">
+            <a:schemeClr val="accent1"/>
+          </a:effectRef>
+          <a:fontRef idx="minor">
+            <a:schemeClr val="lt1"/>
+          </a:fontRef>
+        </p:style>
+        <p:txBody>
+          <a:bodyPr rtlCol="0" anchor="ctr"/>
+          <a:lstStyle/>
+          <a:p>
+            <a:pPr algn="ctr"/>
+          </a:p>
+        </p:txBody>
+      </p:sp>
+      <p:sp>
+        <p:nvSpPr>
+          <p:cNvPr id="12" name="TextBox 11"/>
           <p:cNvSpPr txBox="1"/>
           <p:nvPr/>
         </p:nvSpPr>
         <p:spPr>
           <a:xfrm>
-            <a:off x="2971800" y="2148840"/>
-            <a:ext cx="1728216" cy="1051560"/>
+            <a:off x="2971800" y="2203704"/>
+            <a:ext cx="1728216" cy="996695"/>
           </a:xfrm>
           <a:prstGeom prst="rect">
             <a:avLst/>
@@ -4086,7 +4174,7 @@
       </p:sp>
       <p:sp>
         <p:nvSpPr>
-          <p:cNvPr id="11" name="TextBox 10"/>
+          <p:cNvPr id="13" name="TextBox 12"/>
           <p:cNvSpPr txBox="1"/>
           <p:nvPr/>
         </p:nvSpPr>
@@ -4131,7 +4219,7 @@
       </p:sp>
       <p:sp>
         <p:nvSpPr>
-          <p:cNvPr id="12" name="Rounded Rectangle 11"/>
+          <p:cNvPr id="14" name="Rounded Rectangle 13"/>
           <p:cNvSpPr/>
           <p:nvPr/>
         </p:nvSpPr>
@@ -4177,14 +4265,58 @@
       </p:sp>
       <p:sp>
         <p:nvSpPr>
-          <p:cNvPr id="13" name="TextBox 12"/>
+          <p:cNvPr id="15" name="Rounded Rectangle 14"/>
+          <p:cNvSpPr/>
+          <p:nvPr/>
+        </p:nvSpPr>
+        <p:spPr>
+          <a:xfrm>
+            <a:off x="5248656" y="2194560"/>
+            <a:ext cx="1691640" cy="64008"/>
+          </a:xfrm>
+          <a:prstGeom prst="roundRect">
+            <a:avLst/>
+          </a:prstGeom>
+          <a:solidFill>
+            <a:srgbClr val="F85149"/>
+          </a:solidFill>
+          <a:ln>
+            <a:noFill/>
+          </a:ln>
+          <a:effectLst/>
+        </p:spPr>
+        <p:style>
+          <a:lnRef idx="1">
+            <a:schemeClr val="accent1"/>
+          </a:lnRef>
+          <a:fillRef idx="3">
+            <a:schemeClr val="accent1"/>
+          </a:fillRef>
+          <a:effectRef idx="2">
+            <a:schemeClr val="accent1"/>
+          </a:effectRef>
+          <a:fontRef idx="minor">
+            <a:schemeClr val="lt1"/>
+          </a:fontRef>
+        </p:style>
+        <p:txBody>
+          <a:bodyPr rtlCol="0" anchor="ctr"/>
+          <a:lstStyle/>
+          <a:p>
+            <a:pPr algn="ctr"/>
+          </a:p>
+        </p:txBody>
+      </p:sp>
+      <p:sp>
+        <p:nvSpPr>
+          <p:cNvPr id="16" name="TextBox 15"/>
           <p:cNvSpPr txBox="1"/>
           <p:nvPr/>
         </p:nvSpPr>
         <p:spPr>
           <a:xfrm>
-            <a:off x="5230368" y="2148840"/>
-            <a:ext cx="1728216" cy="1051560"/>
+            <a:off x="5230368" y="2203704"/>
+            <a:ext cx="1728216" cy="996695"/>
           </a:xfrm>
           <a:prstGeom prst="rect">
             <a:avLst/>
@@ -4244,7 +4376,7 @@
       </p:sp>
       <p:sp>
         <p:nvSpPr>
-          <p:cNvPr id="14" name="TextBox 13"/>
+          <p:cNvPr id="17" name="TextBox 16"/>
           <p:cNvSpPr txBox="1"/>
           <p:nvPr/>
         </p:nvSpPr>
@@ -4289,7 +4421,7 @@
       </p:sp>
       <p:sp>
         <p:nvSpPr>
-          <p:cNvPr id="15" name="Rounded Rectangle 14"/>
+          <p:cNvPr id="18" name="Rounded Rectangle 17"/>
           <p:cNvSpPr/>
           <p:nvPr/>
         </p:nvSpPr>
@@ -4335,14 +4467,58 @@
       </p:sp>
       <p:sp>
         <p:nvSpPr>
-          <p:cNvPr id="16" name="TextBox 15"/>
+          <p:cNvPr id="19" name="Rounded Rectangle 18"/>
+          <p:cNvSpPr/>
+          <p:nvPr/>
+        </p:nvSpPr>
+        <p:spPr>
+          <a:xfrm>
+            <a:off x="7507224" y="2194560"/>
+            <a:ext cx="1691640" cy="64008"/>
+          </a:xfrm>
+          <a:prstGeom prst="roundRect">
+            <a:avLst/>
+          </a:prstGeom>
+          <a:solidFill>
+            <a:srgbClr val="F85149"/>
+          </a:solidFill>
+          <a:ln>
+            <a:noFill/>
+          </a:ln>
+          <a:effectLst/>
+        </p:spPr>
+        <p:style>
+          <a:lnRef idx="1">
+            <a:schemeClr val="accent1"/>
+          </a:lnRef>
+          <a:fillRef idx="3">
+            <a:schemeClr val="accent1"/>
+          </a:fillRef>
+          <a:effectRef idx="2">
+            <a:schemeClr val="accent1"/>
+          </a:effectRef>
+          <a:fontRef idx="minor">
+            <a:schemeClr val="lt1"/>
+          </a:fontRef>
+        </p:style>
+        <p:txBody>
+          <a:bodyPr rtlCol="0" anchor="ctr"/>
+          <a:lstStyle/>
+          <a:p>
+            <a:pPr algn="ctr"/>
+          </a:p>
+        </p:txBody>
+      </p:sp>
+      <p:sp>
+        <p:nvSpPr>
+          <p:cNvPr id="20" name="TextBox 19"/>
           <p:cNvSpPr txBox="1"/>
           <p:nvPr/>
         </p:nvSpPr>
         <p:spPr>
           <a:xfrm>
-            <a:off x="7488936" y="2148840"/>
-            <a:ext cx="1728216" cy="1051560"/>
+            <a:off x="7488936" y="2203704"/>
+            <a:ext cx="1728216" cy="996695"/>
           </a:xfrm>
           <a:prstGeom prst="rect">
             <a:avLst/>
@@ -4402,7 +4578,7 @@
       </p:sp>
       <p:sp>
         <p:nvSpPr>
-          <p:cNvPr id="17" name="TextBox 16"/>
+          <p:cNvPr id="21" name="TextBox 20"/>
           <p:cNvSpPr txBox="1"/>
           <p:nvPr/>
         </p:nvSpPr>
@@ -4447,7 +4623,7 @@
       </p:sp>
       <p:sp>
         <p:nvSpPr>
-          <p:cNvPr id="18" name="Rounded Rectangle 17"/>
+          <p:cNvPr id="22" name="Rounded Rectangle 21"/>
           <p:cNvSpPr/>
           <p:nvPr/>
         </p:nvSpPr>
@@ -4493,14 +4669,58 @@
       </p:sp>
       <p:sp>
         <p:nvSpPr>
-          <p:cNvPr id="19" name="TextBox 18"/>
+          <p:cNvPr id="23" name="Rounded Rectangle 22"/>
+          <p:cNvSpPr/>
+          <p:nvPr/>
+        </p:nvSpPr>
+        <p:spPr>
+          <a:xfrm>
+            <a:off x="9765792" y="2194560"/>
+            <a:ext cx="1691640" cy="64008"/>
+          </a:xfrm>
+          <a:prstGeom prst="roundRect">
+            <a:avLst/>
+          </a:prstGeom>
+          <a:solidFill>
+            <a:srgbClr val="3FD0C8"/>
+          </a:solidFill>
+          <a:ln>
+            <a:noFill/>
+          </a:ln>
+          <a:effectLst/>
+        </p:spPr>
+        <p:style>
+          <a:lnRef idx="1">
+            <a:schemeClr val="accent1"/>
+          </a:lnRef>
+          <a:fillRef idx="3">
+            <a:schemeClr val="accent1"/>
+          </a:fillRef>
+          <a:effectRef idx="2">
+            <a:schemeClr val="accent1"/>
+          </a:effectRef>
+          <a:fontRef idx="minor">
+            <a:schemeClr val="lt1"/>
+          </a:fontRef>
+        </p:style>
+        <p:txBody>
+          <a:bodyPr rtlCol="0" anchor="ctr"/>
+          <a:lstStyle/>
+          <a:p>
+            <a:pPr algn="ctr"/>
+          </a:p>
+        </p:txBody>
+      </p:sp>
+      <p:sp>
+        <p:nvSpPr>
+          <p:cNvPr id="24" name="TextBox 23"/>
           <p:cNvSpPr txBox="1"/>
           <p:nvPr/>
         </p:nvSpPr>
         <p:spPr>
           <a:xfrm>
-            <a:off x="9747504" y="2148840"/>
-            <a:ext cx="1728216" cy="1051560"/>
+            <a:off x="9747504" y="2203704"/>
+            <a:ext cx="1728216" cy="996695"/>
           </a:xfrm>
           <a:prstGeom prst="rect">
             <a:avLst/>
@@ -4560,14 +4780,378 @@
       </p:sp>
       <p:sp>
         <p:nvSpPr>
-          <p:cNvPr id="20" name="Rounded Rectangle 19"/>
+          <p:cNvPr id="25" name="Rounded Rectangle 24"/>
           <p:cNvSpPr/>
           <p:nvPr/>
         </p:nvSpPr>
         <p:spPr>
           <a:xfrm>
-            <a:off x="640080" y="3794760"/>
-            <a:ext cx="10927080" cy="2331720"/>
+            <a:off x="1917039" y="3364992"/>
+            <a:ext cx="1563624" cy="384048"/>
+          </a:xfrm>
+          <a:prstGeom prst="roundRect">
+            <a:avLst/>
+          </a:prstGeom>
+          <a:solidFill>
+            <a:srgbClr val="161B22"/>
+          </a:solidFill>
+          <a:ln w="12700">
+            <a:solidFill>
+              <a:srgbClr val="30363D"/>
+            </a:solidFill>
+          </a:ln>
+          <a:effectLst/>
+        </p:spPr>
+        <p:style>
+          <a:lnRef idx="1">
+            <a:schemeClr val="accent1"/>
+          </a:lnRef>
+          <a:fillRef idx="3">
+            <a:schemeClr val="accent1"/>
+          </a:fillRef>
+          <a:effectRef idx="2">
+            <a:schemeClr val="accent1"/>
+          </a:effectRef>
+          <a:fontRef idx="minor">
+            <a:schemeClr val="lt1"/>
+          </a:fontRef>
+        </p:style>
+        <p:txBody>
+          <a:bodyPr rtlCol="0" anchor="ctr"/>
+          <a:lstStyle/>
+          <a:p>
+            <a:pPr algn="ctr"/>
+          </a:p>
+        </p:txBody>
+      </p:sp>
+      <p:sp>
+        <p:nvSpPr>
+          <p:cNvPr id="26" name="TextBox 25"/>
+          <p:cNvSpPr txBox="1"/>
+          <p:nvPr/>
+        </p:nvSpPr>
+        <p:spPr>
+          <a:xfrm>
+            <a:off x="1917039" y="3364992"/>
+            <a:ext cx="1563624" cy="384048"/>
+          </a:xfrm>
+          <a:prstGeom prst="rect">
+            <a:avLst/>
+          </a:prstGeom>
+          <a:noFill/>
+        </p:spPr>
+        <p:txBody>
+          <a:bodyPr wrap="square" anchor="ctr" lIns="0" rIns="0" tIns="0" bIns="0">
+            <a:spAutoFit/>
+          </a:bodyPr>
+          <a:lstStyle/>
+          <a:p>
+            <a:pPr algn="ctr">
+              <a:lnSpc>
+                <a:spcPct val="100000"/>
+              </a:lnSpc>
+              <a:spcBef>
+                <a:spcPts val="0"/>
+              </a:spcBef>
+              <a:spcAft>
+                <a:spcPts val="200"/>
+              </a:spcAft>
+            </a:pPr>
+            <a:r>
+              <a:rPr sz="1100" b="1">
+                <a:solidFill>
+                  <a:srgbClr val="F85149"/>
+                </a:solidFill>
+                <a:latin typeface="Consolas"/>
+              </a:rPr>
+              <a:t>3 tail call</a:t>
+            </a:r>
+          </a:p>
+        </p:txBody>
+      </p:sp>
+      <p:sp>
+        <p:nvSpPr>
+          <p:cNvPr id="27" name="Rounded Rectangle 26"/>
+          <p:cNvSpPr/>
+          <p:nvPr/>
+        </p:nvSpPr>
+        <p:spPr>
+          <a:xfrm>
+            <a:off x="3645255" y="3364992"/>
+            <a:ext cx="2167128" cy="384048"/>
+          </a:xfrm>
+          <a:prstGeom prst="roundRect">
+            <a:avLst/>
+          </a:prstGeom>
+          <a:solidFill>
+            <a:srgbClr val="161B22"/>
+          </a:solidFill>
+          <a:ln w="12700">
+            <a:solidFill>
+              <a:srgbClr val="30363D"/>
+            </a:solidFill>
+          </a:ln>
+          <a:effectLst/>
+        </p:spPr>
+        <p:style>
+          <a:lnRef idx="1">
+            <a:schemeClr val="accent1"/>
+          </a:lnRef>
+          <a:fillRef idx="3">
+            <a:schemeClr val="accent1"/>
+          </a:fillRef>
+          <a:effectRef idx="2">
+            <a:schemeClr val="accent1"/>
+          </a:effectRef>
+          <a:fontRef idx="minor">
+            <a:schemeClr val="lt1"/>
+          </a:fontRef>
+        </p:style>
+        <p:txBody>
+          <a:bodyPr rtlCol="0" anchor="ctr"/>
+          <a:lstStyle/>
+          <a:p>
+            <a:pPr algn="ctr"/>
+          </a:p>
+        </p:txBody>
+      </p:sp>
+      <p:sp>
+        <p:nvSpPr>
+          <p:cNvPr id="28" name="TextBox 27"/>
+          <p:cNvSpPr txBox="1"/>
+          <p:nvPr/>
+        </p:nvSpPr>
+        <p:spPr>
+          <a:xfrm>
+            <a:off x="3645255" y="3364992"/>
+            <a:ext cx="2167128" cy="384048"/>
+          </a:xfrm>
+          <a:prstGeom prst="rect">
+            <a:avLst/>
+          </a:prstGeom>
+          <a:noFill/>
+        </p:spPr>
+        <p:txBody>
+          <a:bodyPr wrap="square" anchor="ctr" lIns="0" rIns="0" tIns="0" bIns="0">
+            <a:spAutoFit/>
+          </a:bodyPr>
+          <a:lstStyle/>
+          <a:p>
+            <a:pPr algn="ctr">
+              <a:lnSpc>
+                <a:spcPct val="100000"/>
+              </a:lnSpc>
+              <a:spcBef>
+                <a:spcPts val="0"/>
+              </a:spcBef>
+              <a:spcAft>
+                <a:spcPts val="200"/>
+              </a:spcAft>
+            </a:pPr>
+            <a:r>
+              <a:rPr sz="1100" b="1">
+                <a:solidFill>
+                  <a:srgbClr val="F85149"/>
+                </a:solidFill>
+                <a:latin typeface="Consolas"/>
+              </a:rPr>
+              <a:t>~384 lookup / pkt</a:t>
+            </a:r>
+          </a:p>
+        </p:txBody>
+      </p:sp>
+      <p:sp>
+        <p:nvSpPr>
+          <p:cNvPr id="29" name="Rounded Rectangle 28"/>
+          <p:cNvSpPr/>
+          <p:nvPr/>
+        </p:nvSpPr>
+        <p:spPr>
+          <a:xfrm>
+            <a:off x="5976975" y="3364992"/>
+            <a:ext cx="1764792" cy="384048"/>
+          </a:xfrm>
+          <a:prstGeom prst="roundRect">
+            <a:avLst/>
+          </a:prstGeom>
+          <a:solidFill>
+            <a:srgbClr val="161B22"/>
+          </a:solidFill>
+          <a:ln w="12700">
+            <a:solidFill>
+              <a:srgbClr val="30363D"/>
+            </a:solidFill>
+          </a:ln>
+          <a:effectLst/>
+        </p:spPr>
+        <p:style>
+          <a:lnRef idx="1">
+            <a:schemeClr val="accent1"/>
+          </a:lnRef>
+          <a:fillRef idx="3">
+            <a:schemeClr val="accent1"/>
+          </a:fillRef>
+          <a:effectRef idx="2">
+            <a:schemeClr val="accent1"/>
+          </a:effectRef>
+          <a:fontRef idx="minor">
+            <a:schemeClr val="lt1"/>
+          </a:fontRef>
+        </p:style>
+        <p:txBody>
+          <a:bodyPr rtlCol="0" anchor="ctr"/>
+          <a:lstStyle/>
+          <a:p>
+            <a:pPr algn="ctr"/>
+          </a:p>
+        </p:txBody>
+      </p:sp>
+      <p:sp>
+        <p:nvSpPr>
+          <p:cNvPr id="30" name="TextBox 29"/>
+          <p:cNvSpPr txBox="1"/>
+          <p:nvPr/>
+        </p:nvSpPr>
+        <p:spPr>
+          <a:xfrm>
+            <a:off x="5976975" y="3364992"/>
+            <a:ext cx="1764792" cy="384048"/>
+          </a:xfrm>
+          <a:prstGeom prst="rect">
+            <a:avLst/>
+          </a:prstGeom>
+          <a:noFill/>
+        </p:spPr>
+        <p:txBody>
+          <a:bodyPr wrap="square" anchor="ctr" lIns="0" rIns="0" tIns="0" bIns="0">
+            <a:spAutoFit/>
+          </a:bodyPr>
+          <a:lstStyle/>
+          <a:p>
+            <a:pPr algn="ctr">
+              <a:lnSpc>
+                <a:spcPct val="100000"/>
+              </a:lnSpc>
+              <a:spcBef>
+                <a:spcPts val="0"/>
+              </a:spcBef>
+              <a:spcAft>
+                <a:spcPts val="200"/>
+              </a:spcAft>
+            </a:pPr>
+            <a:r>
+              <a:rPr sz="1100" b="1">
+                <a:solidFill>
+                  <a:srgbClr val="E6EDF3"/>
+                </a:solidFill>
+                <a:latin typeface="Consolas"/>
+              </a:rPr>
+              <a:t>28.5 KB mappe</a:t>
+            </a:r>
+          </a:p>
+        </p:txBody>
+      </p:sp>
+      <p:sp>
+        <p:nvSpPr>
+          <p:cNvPr id="31" name="Rounded Rectangle 30"/>
+          <p:cNvSpPr/>
+          <p:nvPr/>
+        </p:nvSpPr>
+        <p:spPr>
+          <a:xfrm>
+            <a:off x="7906359" y="3364992"/>
+            <a:ext cx="2368296" cy="384048"/>
+          </a:xfrm>
+          <a:prstGeom prst="roundRect">
+            <a:avLst/>
+          </a:prstGeom>
+          <a:solidFill>
+            <a:srgbClr val="161B22"/>
+          </a:solidFill>
+          <a:ln w="12700">
+            <a:solidFill>
+              <a:srgbClr val="30363D"/>
+            </a:solidFill>
+          </a:ln>
+          <a:effectLst/>
+        </p:spPr>
+        <p:style>
+          <a:lnRef idx="1">
+            <a:schemeClr val="accent1"/>
+          </a:lnRef>
+          <a:fillRef idx="3">
+            <a:schemeClr val="accent1"/>
+          </a:fillRef>
+          <a:effectRef idx="2">
+            <a:schemeClr val="accent1"/>
+          </a:effectRef>
+          <a:fontRef idx="minor">
+            <a:schemeClr val="lt1"/>
+          </a:fontRef>
+        </p:style>
+        <p:txBody>
+          <a:bodyPr rtlCol="0" anchor="ctr"/>
+          <a:lstStyle/>
+          <a:p>
+            <a:pPr algn="ctr"/>
+          </a:p>
+        </p:txBody>
+      </p:sp>
+      <p:sp>
+        <p:nvSpPr>
+          <p:cNvPr id="32" name="TextBox 31"/>
+          <p:cNvSpPr txBox="1"/>
+          <p:nvPr/>
+        </p:nvSpPr>
+        <p:spPr>
+          <a:xfrm>
+            <a:off x="7906359" y="3364992"/>
+            <a:ext cx="2368296" cy="384048"/>
+          </a:xfrm>
+          <a:prstGeom prst="rect">
+            <a:avLst/>
+          </a:prstGeom>
+          <a:noFill/>
+        </p:spPr>
+        <p:txBody>
+          <a:bodyPr wrap="square" anchor="ctr" lIns="0" rIns="0" tIns="0" bIns="0">
+            <a:spAutoFit/>
+          </a:bodyPr>
+          <a:lstStyle/>
+          <a:p>
+            <a:pPr algn="ctr">
+              <a:lnSpc>
+                <a:spcPct val="100000"/>
+              </a:lnSpc>
+              <a:spcBef>
+                <a:spcPts val="0"/>
+              </a:spcBef>
+              <a:spcAft>
+                <a:spcPts val="200"/>
+              </a:spcAft>
+            </a:pPr>
+            <a:r>
+              <a:rPr sz="1100" b="1">
+                <a:solidFill>
+                  <a:srgbClr val="F85149"/>
+                </a:solidFill>
+                <a:latin typeface="Consolas"/>
+              </a:rPr>
+              <a:t>1274 ns · 0.79 Mpps</a:t>
+            </a:r>
+          </a:p>
+        </p:txBody>
+      </p:sp>
+      <p:sp>
+        <p:nvSpPr>
+          <p:cNvPr id="33" name="Rounded Rectangle 32"/>
+          <p:cNvSpPr/>
+          <p:nvPr/>
+        </p:nvSpPr>
+        <p:spPr>
+          <a:xfrm>
+            <a:off x="640080" y="3840480"/>
+            <a:ext cx="10927080" cy="2286000"/>
           </a:xfrm>
           <a:prstGeom prst="roundRect">
             <a:avLst/>
@@ -4606,14 +5190,14 @@
       </p:sp>
       <p:sp>
         <p:nvSpPr>
-          <p:cNvPr id="21" name="TextBox 20"/>
+          <p:cNvPr id="34" name="TextBox 33"/>
           <p:cNvSpPr txBox="1"/>
           <p:nvPr/>
         </p:nvSpPr>
         <p:spPr>
           <a:xfrm>
-            <a:off x="896112" y="3995928"/>
-            <a:ext cx="10469880" cy="1965960"/>
+            <a:off x="896112" y="4041648"/>
+            <a:ext cx="10469880" cy="1920240"/>
           </a:xfrm>
           <a:prstGeom prst="rect">
             <a:avLst/>
@@ -5838,14 +6422,58 @@
       </p:sp>
       <p:sp>
         <p:nvSpPr>
-          <p:cNvPr id="7" name="TextBox 6"/>
+          <p:cNvPr id="7" name="Rounded Rectangle 6"/>
+          <p:cNvSpPr/>
+          <p:nvPr/>
+        </p:nvSpPr>
+        <p:spPr>
+          <a:xfrm>
+            <a:off x="731519" y="2240279"/>
+            <a:ext cx="1691640" cy="64008"/>
+          </a:xfrm>
+          <a:prstGeom prst="roundRect">
+            <a:avLst/>
+          </a:prstGeom>
+          <a:solidFill>
+            <a:srgbClr val="58A6FF"/>
+          </a:solidFill>
+          <a:ln>
+            <a:noFill/>
+          </a:ln>
+          <a:effectLst/>
+        </p:spPr>
+        <p:style>
+          <a:lnRef idx="1">
+            <a:schemeClr val="accent1"/>
+          </a:lnRef>
+          <a:fillRef idx="3">
+            <a:schemeClr val="accent1"/>
+          </a:fillRef>
+          <a:effectRef idx="2">
+            <a:schemeClr val="accent1"/>
+          </a:effectRef>
+          <a:fontRef idx="minor">
+            <a:schemeClr val="lt1"/>
+          </a:fontRef>
+        </p:style>
+        <p:txBody>
+          <a:bodyPr rtlCol="0" anchor="ctr"/>
+          <a:lstStyle/>
+          <a:p>
+            <a:pPr algn="ctr"/>
+          </a:p>
+        </p:txBody>
+      </p:sp>
+      <p:sp>
+        <p:nvSpPr>
+          <p:cNvPr id="8" name="TextBox 7"/>
           <p:cNvSpPr txBox="1"/>
           <p:nvPr/>
         </p:nvSpPr>
         <p:spPr>
           <a:xfrm>
-            <a:off x="713231" y="2194560"/>
-            <a:ext cx="1728216" cy="1051560"/>
+            <a:off x="713231" y="2249424"/>
+            <a:ext cx="1728216" cy="996695"/>
           </a:xfrm>
           <a:prstGeom prst="rect">
             <a:avLst/>
@@ -5905,7 +6533,7 @@
       </p:sp>
       <p:sp>
         <p:nvSpPr>
-          <p:cNvPr id="8" name="TextBox 7"/>
+          <p:cNvPr id="9" name="TextBox 8"/>
           <p:cNvSpPr txBox="1"/>
           <p:nvPr/>
         </p:nvSpPr>
@@ -5950,7 +6578,7 @@
       </p:sp>
       <p:sp>
         <p:nvSpPr>
-          <p:cNvPr id="9" name="Rounded Rectangle 8"/>
+          <p:cNvPr id="10" name="Rounded Rectangle 9"/>
           <p:cNvSpPr/>
           <p:nvPr/>
         </p:nvSpPr>
@@ -5996,14 +6624,58 @@
       </p:sp>
       <p:sp>
         <p:nvSpPr>
-          <p:cNvPr id="10" name="TextBox 9"/>
+          <p:cNvPr id="11" name="Rounded Rectangle 10"/>
+          <p:cNvSpPr/>
+          <p:nvPr/>
+        </p:nvSpPr>
+        <p:spPr>
+          <a:xfrm>
+            <a:off x="2990088" y="2240279"/>
+            <a:ext cx="1691640" cy="64008"/>
+          </a:xfrm>
+          <a:prstGeom prst="roundRect">
+            <a:avLst/>
+          </a:prstGeom>
+          <a:solidFill>
+            <a:srgbClr val="E6EDF3"/>
+          </a:solidFill>
+          <a:ln>
+            <a:noFill/>
+          </a:ln>
+          <a:effectLst/>
+        </p:spPr>
+        <p:style>
+          <a:lnRef idx="1">
+            <a:schemeClr val="accent1"/>
+          </a:lnRef>
+          <a:fillRef idx="3">
+            <a:schemeClr val="accent1"/>
+          </a:fillRef>
+          <a:effectRef idx="2">
+            <a:schemeClr val="accent1"/>
+          </a:effectRef>
+          <a:fontRef idx="minor">
+            <a:schemeClr val="lt1"/>
+          </a:fontRef>
+        </p:style>
+        <p:txBody>
+          <a:bodyPr rtlCol="0" anchor="ctr"/>
+          <a:lstStyle/>
+          <a:p>
+            <a:pPr algn="ctr"/>
+          </a:p>
+        </p:txBody>
+      </p:sp>
+      <p:sp>
+        <p:nvSpPr>
+          <p:cNvPr id="12" name="TextBox 11"/>
           <p:cNvSpPr txBox="1"/>
           <p:nvPr/>
         </p:nvSpPr>
         <p:spPr>
           <a:xfrm>
-            <a:off x="2971800" y="2194560"/>
-            <a:ext cx="1728216" cy="1051560"/>
+            <a:off x="2971800" y="2249424"/>
+            <a:ext cx="1728216" cy="996695"/>
           </a:xfrm>
           <a:prstGeom prst="rect">
             <a:avLst/>
@@ -6063,7 +6735,7 @@
       </p:sp>
       <p:sp>
         <p:nvSpPr>
-          <p:cNvPr id="11" name="TextBox 10"/>
+          <p:cNvPr id="13" name="TextBox 12"/>
           <p:cNvSpPr txBox="1"/>
           <p:nvPr/>
         </p:nvSpPr>
@@ -6108,7 +6780,7 @@
       </p:sp>
       <p:sp>
         <p:nvSpPr>
-          <p:cNvPr id="12" name="Rounded Rectangle 11"/>
+          <p:cNvPr id="14" name="Rounded Rectangle 13"/>
           <p:cNvSpPr/>
           <p:nvPr/>
         </p:nvSpPr>
@@ -6154,14 +6826,58 @@
       </p:sp>
       <p:sp>
         <p:nvSpPr>
-          <p:cNvPr id="13" name="TextBox 12"/>
+          <p:cNvPr id="15" name="Rounded Rectangle 14"/>
+          <p:cNvSpPr/>
+          <p:nvPr/>
+        </p:nvSpPr>
+        <p:spPr>
+          <a:xfrm>
+            <a:off x="5248656" y="2240279"/>
+            <a:ext cx="1691640" cy="64008"/>
+          </a:xfrm>
+          <a:prstGeom prst="roundRect">
+            <a:avLst/>
+          </a:prstGeom>
+          <a:solidFill>
+            <a:srgbClr val="F5A623"/>
+          </a:solidFill>
+          <a:ln>
+            <a:noFill/>
+          </a:ln>
+          <a:effectLst/>
+        </p:spPr>
+        <p:style>
+          <a:lnRef idx="1">
+            <a:schemeClr val="accent1"/>
+          </a:lnRef>
+          <a:fillRef idx="3">
+            <a:schemeClr val="accent1"/>
+          </a:fillRef>
+          <a:effectRef idx="2">
+            <a:schemeClr val="accent1"/>
+          </a:effectRef>
+          <a:fontRef idx="minor">
+            <a:schemeClr val="lt1"/>
+          </a:fontRef>
+        </p:style>
+        <p:txBody>
+          <a:bodyPr rtlCol="0" anchor="ctr"/>
+          <a:lstStyle/>
+          <a:p>
+            <a:pPr algn="ctr"/>
+          </a:p>
+        </p:txBody>
+      </p:sp>
+      <p:sp>
+        <p:nvSpPr>
+          <p:cNvPr id="16" name="TextBox 15"/>
           <p:cNvSpPr txBox="1"/>
           <p:nvPr/>
         </p:nvSpPr>
         <p:spPr>
           <a:xfrm>
-            <a:off x="5230368" y="2194560"/>
-            <a:ext cx="1728216" cy="1051560"/>
+            <a:off x="5230368" y="2249424"/>
+            <a:ext cx="1728216" cy="996695"/>
           </a:xfrm>
           <a:prstGeom prst="rect">
             <a:avLst/>
@@ -6221,7 +6937,7 @@
       </p:sp>
       <p:sp>
         <p:nvSpPr>
-          <p:cNvPr id="14" name="TextBox 13"/>
+          <p:cNvPr id="17" name="TextBox 16"/>
           <p:cNvSpPr txBox="1"/>
           <p:nvPr/>
         </p:nvSpPr>
@@ -6266,7 +6982,7 @@
       </p:sp>
       <p:sp>
         <p:nvSpPr>
-          <p:cNvPr id="15" name="Rounded Rectangle 14"/>
+          <p:cNvPr id="18" name="Rounded Rectangle 17"/>
           <p:cNvSpPr/>
           <p:nvPr/>
         </p:nvSpPr>
@@ -6312,14 +7028,58 @@
       </p:sp>
       <p:sp>
         <p:nvSpPr>
-          <p:cNvPr id="16" name="TextBox 15"/>
+          <p:cNvPr id="19" name="Rounded Rectangle 18"/>
+          <p:cNvSpPr/>
+          <p:nvPr/>
+        </p:nvSpPr>
+        <p:spPr>
+          <a:xfrm>
+            <a:off x="7507224" y="2240279"/>
+            <a:ext cx="1691640" cy="64008"/>
+          </a:xfrm>
+          <a:prstGeom prst="roundRect">
+            <a:avLst/>
+          </a:prstGeom>
+          <a:solidFill>
+            <a:srgbClr val="E6EDF3"/>
+          </a:solidFill>
+          <a:ln>
+            <a:noFill/>
+          </a:ln>
+          <a:effectLst/>
+        </p:spPr>
+        <p:style>
+          <a:lnRef idx="1">
+            <a:schemeClr val="accent1"/>
+          </a:lnRef>
+          <a:fillRef idx="3">
+            <a:schemeClr val="accent1"/>
+          </a:fillRef>
+          <a:effectRef idx="2">
+            <a:schemeClr val="accent1"/>
+          </a:effectRef>
+          <a:fontRef idx="minor">
+            <a:schemeClr val="lt1"/>
+          </a:fontRef>
+        </p:style>
+        <p:txBody>
+          <a:bodyPr rtlCol="0" anchor="ctr"/>
+          <a:lstStyle/>
+          <a:p>
+            <a:pPr algn="ctr"/>
+          </a:p>
+        </p:txBody>
+      </p:sp>
+      <p:sp>
+        <p:nvSpPr>
+          <p:cNvPr id="20" name="TextBox 19"/>
           <p:cNvSpPr txBox="1"/>
           <p:nvPr/>
         </p:nvSpPr>
         <p:spPr>
           <a:xfrm>
-            <a:off x="7488936" y="2194560"/>
-            <a:ext cx="1728216" cy="1051560"/>
+            <a:off x="7488936" y="2249424"/>
+            <a:ext cx="1728216" cy="996695"/>
           </a:xfrm>
           <a:prstGeom prst="rect">
             <a:avLst/>
@@ -6379,7 +7139,7 @@
       </p:sp>
       <p:sp>
         <p:nvSpPr>
-          <p:cNvPr id="17" name="TextBox 16"/>
+          <p:cNvPr id="21" name="TextBox 20"/>
           <p:cNvSpPr txBox="1"/>
           <p:nvPr/>
         </p:nvSpPr>
@@ -6424,7 +7184,7 @@
       </p:sp>
       <p:sp>
         <p:nvSpPr>
-          <p:cNvPr id="18" name="Rounded Rectangle 17"/>
+          <p:cNvPr id="22" name="Rounded Rectangle 21"/>
           <p:cNvSpPr/>
           <p:nvPr/>
         </p:nvSpPr>
@@ -6470,14 +7230,58 @@
       </p:sp>
       <p:sp>
         <p:nvSpPr>
-          <p:cNvPr id="19" name="TextBox 18"/>
+          <p:cNvPr id="23" name="Rounded Rectangle 22"/>
+          <p:cNvSpPr/>
+          <p:nvPr/>
+        </p:nvSpPr>
+        <p:spPr>
+          <a:xfrm>
+            <a:off x="9765792" y="2240279"/>
+            <a:ext cx="1691640" cy="64008"/>
+          </a:xfrm>
+          <a:prstGeom prst="roundRect">
+            <a:avLst/>
+          </a:prstGeom>
+          <a:solidFill>
+            <a:srgbClr val="3FD0C8"/>
+          </a:solidFill>
+          <a:ln>
+            <a:noFill/>
+          </a:ln>
+          <a:effectLst/>
+        </p:spPr>
+        <p:style>
+          <a:lnRef idx="1">
+            <a:schemeClr val="accent1"/>
+          </a:lnRef>
+          <a:fillRef idx="3">
+            <a:schemeClr val="accent1"/>
+          </a:fillRef>
+          <a:effectRef idx="2">
+            <a:schemeClr val="accent1"/>
+          </a:effectRef>
+          <a:fontRef idx="minor">
+            <a:schemeClr val="lt1"/>
+          </a:fontRef>
+        </p:style>
+        <p:txBody>
+          <a:bodyPr rtlCol="0" anchor="ctr"/>
+          <a:lstStyle/>
+          <a:p>
+            <a:pPr algn="ctr"/>
+          </a:p>
+        </p:txBody>
+      </p:sp>
+      <p:sp>
+        <p:nvSpPr>
+          <p:cNvPr id="24" name="TextBox 23"/>
           <p:cNvSpPr txBox="1"/>
           <p:nvPr/>
         </p:nvSpPr>
         <p:spPr>
           <a:xfrm>
-            <a:off x="9747504" y="2194560"/>
-            <a:ext cx="1728216" cy="1051560"/>
+            <a:off x="9747504" y="2249424"/>
+            <a:ext cx="1728216" cy="996695"/>
           </a:xfrm>
           <a:prstGeom prst="rect">
             <a:avLst/>
@@ -6537,7 +7341,7 @@
       </p:sp>
       <p:sp>
         <p:nvSpPr>
-          <p:cNvPr id="20" name="Rounded Rectangle 19"/>
+          <p:cNvPr id="25" name="Rounded Rectangle 24"/>
           <p:cNvSpPr/>
           <p:nvPr/>
         </p:nvSpPr>
@@ -6583,7 +7387,7 @@
       </p:sp>
       <p:sp>
         <p:nvSpPr>
-          <p:cNvPr id="21" name="TextBox 20"/>
+          <p:cNvPr id="26" name="TextBox 25"/>
           <p:cNvSpPr txBox="1"/>
           <p:nvPr/>
         </p:nvSpPr>
@@ -6721,7 +7525,7 @@
       </p:sp>
       <p:sp>
         <p:nvSpPr>
-          <p:cNvPr id="22" name="Rounded Rectangle 21"/>
+          <p:cNvPr id="27" name="Rounded Rectangle 26"/>
           <p:cNvSpPr/>
           <p:nvPr/>
         </p:nvSpPr>
@@ -6767,7 +7571,7 @@
       </p:sp>
       <p:sp>
         <p:nvSpPr>
-          <p:cNvPr id="23" name="TextBox 22"/>
+          <p:cNvPr id="28" name="TextBox 27"/>
           <p:cNvSpPr txBox="1"/>
           <p:nvPr/>
         </p:nvSpPr>
@@ -12437,14 +13241,58 @@
       </p:sp>
       <p:sp>
         <p:nvSpPr>
-          <p:cNvPr id="7" name="TextBox 6"/>
+          <p:cNvPr id="7" name="Rounded Rectangle 6"/>
+          <p:cNvSpPr/>
+          <p:nvPr/>
+        </p:nvSpPr>
+        <p:spPr>
+          <a:xfrm>
+            <a:off x="731519" y="2194560"/>
+            <a:ext cx="1691640" cy="64008"/>
+          </a:xfrm>
+          <a:prstGeom prst="roundRect">
+            <a:avLst/>
+          </a:prstGeom>
+          <a:solidFill>
+            <a:srgbClr val="58A6FF"/>
+          </a:solidFill>
+          <a:ln>
+            <a:noFill/>
+          </a:ln>
+          <a:effectLst/>
+        </p:spPr>
+        <p:style>
+          <a:lnRef idx="1">
+            <a:schemeClr val="accent1"/>
+          </a:lnRef>
+          <a:fillRef idx="3">
+            <a:schemeClr val="accent1"/>
+          </a:fillRef>
+          <a:effectRef idx="2">
+            <a:schemeClr val="accent1"/>
+          </a:effectRef>
+          <a:fontRef idx="minor">
+            <a:schemeClr val="lt1"/>
+          </a:fontRef>
+        </p:style>
+        <p:txBody>
+          <a:bodyPr rtlCol="0" anchor="ctr"/>
+          <a:lstStyle/>
+          <a:p>
+            <a:pPr algn="ctr"/>
+          </a:p>
+        </p:txBody>
+      </p:sp>
+      <p:sp>
+        <p:nvSpPr>
+          <p:cNvPr id="8" name="TextBox 7"/>
           <p:cNvSpPr txBox="1"/>
           <p:nvPr/>
         </p:nvSpPr>
         <p:spPr>
           <a:xfrm>
-            <a:off x="713231" y="2148840"/>
-            <a:ext cx="1728216" cy="1051560"/>
+            <a:off x="713231" y="2203704"/>
+            <a:ext cx="1728216" cy="996695"/>
           </a:xfrm>
           <a:prstGeom prst="rect">
             <a:avLst/>
@@ -12504,7 +13352,7 @@
       </p:sp>
       <p:sp>
         <p:nvSpPr>
-          <p:cNvPr id="8" name="TextBox 7"/>
+          <p:cNvPr id="9" name="TextBox 8"/>
           <p:cNvSpPr txBox="1"/>
           <p:nvPr/>
         </p:nvSpPr>
@@ -12549,7 +13397,7 @@
       </p:sp>
       <p:sp>
         <p:nvSpPr>
-          <p:cNvPr id="9" name="Rounded Rectangle 8"/>
+          <p:cNvPr id="10" name="Rounded Rectangle 9"/>
           <p:cNvSpPr/>
           <p:nvPr/>
         </p:nvSpPr>
@@ -12595,14 +13443,58 @@
       </p:sp>
       <p:sp>
         <p:nvSpPr>
-          <p:cNvPr id="10" name="TextBox 9"/>
+          <p:cNvPr id="11" name="Rounded Rectangle 10"/>
+          <p:cNvSpPr/>
+          <p:nvPr/>
+        </p:nvSpPr>
+        <p:spPr>
+          <a:xfrm>
+            <a:off x="2990088" y="2194560"/>
+            <a:ext cx="1691640" cy="64008"/>
+          </a:xfrm>
+          <a:prstGeom prst="roundRect">
+            <a:avLst/>
+          </a:prstGeom>
+          <a:solidFill>
+            <a:srgbClr val="E6EDF3"/>
+          </a:solidFill>
+          <a:ln>
+            <a:noFill/>
+          </a:ln>
+          <a:effectLst/>
+        </p:spPr>
+        <p:style>
+          <a:lnRef idx="1">
+            <a:schemeClr val="accent1"/>
+          </a:lnRef>
+          <a:fillRef idx="3">
+            <a:schemeClr val="accent1"/>
+          </a:fillRef>
+          <a:effectRef idx="2">
+            <a:schemeClr val="accent1"/>
+          </a:effectRef>
+          <a:fontRef idx="minor">
+            <a:schemeClr val="lt1"/>
+          </a:fontRef>
+        </p:style>
+        <p:txBody>
+          <a:bodyPr rtlCol="0" anchor="ctr"/>
+          <a:lstStyle/>
+          <a:p>
+            <a:pPr algn="ctr"/>
+          </a:p>
+        </p:txBody>
+      </p:sp>
+      <p:sp>
+        <p:nvSpPr>
+          <p:cNvPr id="12" name="TextBox 11"/>
           <p:cNvSpPr txBox="1"/>
           <p:nvPr/>
         </p:nvSpPr>
         <p:spPr>
           <a:xfrm>
-            <a:off x="2971800" y="2148840"/>
-            <a:ext cx="1728216" cy="1051560"/>
+            <a:off x="2971800" y="2203704"/>
+            <a:ext cx="1728216" cy="996695"/>
           </a:xfrm>
           <a:prstGeom prst="rect">
             <a:avLst/>
@@ -12662,7 +13554,7 @@
       </p:sp>
       <p:sp>
         <p:nvSpPr>
-          <p:cNvPr id="11" name="TextBox 10"/>
+          <p:cNvPr id="13" name="TextBox 12"/>
           <p:cNvSpPr txBox="1"/>
           <p:nvPr/>
         </p:nvSpPr>
@@ -12707,7 +13599,7 @@
       </p:sp>
       <p:sp>
         <p:nvSpPr>
-          <p:cNvPr id="12" name="Rounded Rectangle 11"/>
+          <p:cNvPr id="14" name="Rounded Rectangle 13"/>
           <p:cNvSpPr/>
           <p:nvPr/>
         </p:nvSpPr>
@@ -12753,14 +13645,58 @@
       </p:sp>
       <p:sp>
         <p:nvSpPr>
-          <p:cNvPr id="13" name="TextBox 12"/>
+          <p:cNvPr id="15" name="Rounded Rectangle 14"/>
+          <p:cNvSpPr/>
+          <p:nvPr/>
+        </p:nvSpPr>
+        <p:spPr>
+          <a:xfrm>
+            <a:off x="5248656" y="2194560"/>
+            <a:ext cx="1691640" cy="64008"/>
+          </a:xfrm>
+          <a:prstGeom prst="roundRect">
+            <a:avLst/>
+          </a:prstGeom>
+          <a:solidFill>
+            <a:srgbClr val="F5A623"/>
+          </a:solidFill>
+          <a:ln>
+            <a:noFill/>
+          </a:ln>
+          <a:effectLst/>
+        </p:spPr>
+        <p:style>
+          <a:lnRef idx="1">
+            <a:schemeClr val="accent1"/>
+          </a:lnRef>
+          <a:fillRef idx="3">
+            <a:schemeClr val="accent1"/>
+          </a:fillRef>
+          <a:effectRef idx="2">
+            <a:schemeClr val="accent1"/>
+          </a:effectRef>
+          <a:fontRef idx="minor">
+            <a:schemeClr val="lt1"/>
+          </a:fontRef>
+        </p:style>
+        <p:txBody>
+          <a:bodyPr rtlCol="0" anchor="ctr"/>
+          <a:lstStyle/>
+          <a:p>
+            <a:pPr algn="ctr"/>
+          </a:p>
+        </p:txBody>
+      </p:sp>
+      <p:sp>
+        <p:nvSpPr>
+          <p:cNvPr id="16" name="TextBox 15"/>
           <p:cNvSpPr txBox="1"/>
           <p:nvPr/>
         </p:nvSpPr>
         <p:spPr>
           <a:xfrm>
-            <a:off x="5230368" y="2148840"/>
-            <a:ext cx="1728216" cy="1051560"/>
+            <a:off x="5230368" y="2203704"/>
+            <a:ext cx="1728216" cy="996695"/>
           </a:xfrm>
           <a:prstGeom prst="rect">
             <a:avLst/>
@@ -12820,7 +13756,7 @@
       </p:sp>
       <p:sp>
         <p:nvSpPr>
-          <p:cNvPr id="14" name="TextBox 13"/>
+          <p:cNvPr id="17" name="TextBox 16"/>
           <p:cNvSpPr txBox="1"/>
           <p:nvPr/>
         </p:nvSpPr>
@@ -12865,7 +13801,7 @@
       </p:sp>
       <p:sp>
         <p:nvSpPr>
-          <p:cNvPr id="15" name="Rounded Rectangle 14"/>
+          <p:cNvPr id="18" name="Rounded Rectangle 17"/>
           <p:cNvSpPr/>
           <p:nvPr/>
         </p:nvSpPr>
@@ -12911,14 +13847,58 @@
       </p:sp>
       <p:sp>
         <p:nvSpPr>
-          <p:cNvPr id="16" name="TextBox 15"/>
+          <p:cNvPr id="19" name="Rounded Rectangle 18"/>
+          <p:cNvSpPr/>
+          <p:nvPr/>
+        </p:nvSpPr>
+        <p:spPr>
+          <a:xfrm>
+            <a:off x="7507224" y="2194560"/>
+            <a:ext cx="1691640" cy="64008"/>
+          </a:xfrm>
+          <a:prstGeom prst="roundRect">
+            <a:avLst/>
+          </a:prstGeom>
+          <a:solidFill>
+            <a:srgbClr val="F5A623"/>
+          </a:solidFill>
+          <a:ln>
+            <a:noFill/>
+          </a:ln>
+          <a:effectLst/>
+        </p:spPr>
+        <p:style>
+          <a:lnRef idx="1">
+            <a:schemeClr val="accent1"/>
+          </a:lnRef>
+          <a:fillRef idx="3">
+            <a:schemeClr val="accent1"/>
+          </a:fillRef>
+          <a:effectRef idx="2">
+            <a:schemeClr val="accent1"/>
+          </a:effectRef>
+          <a:fontRef idx="minor">
+            <a:schemeClr val="lt1"/>
+          </a:fontRef>
+        </p:style>
+        <p:txBody>
+          <a:bodyPr rtlCol="0" anchor="ctr"/>
+          <a:lstStyle/>
+          <a:p>
+            <a:pPr algn="ctr"/>
+          </a:p>
+        </p:txBody>
+      </p:sp>
+      <p:sp>
+        <p:nvSpPr>
+          <p:cNvPr id="20" name="TextBox 19"/>
           <p:cNvSpPr txBox="1"/>
           <p:nvPr/>
         </p:nvSpPr>
         <p:spPr>
           <a:xfrm>
-            <a:off x="7488936" y="2148840"/>
-            <a:ext cx="1728216" cy="1051560"/>
+            <a:off x="7488936" y="2203704"/>
+            <a:ext cx="1728216" cy="996695"/>
           </a:xfrm>
           <a:prstGeom prst="rect">
             <a:avLst/>
@@ -12978,7 +13958,7 @@
       </p:sp>
       <p:sp>
         <p:nvSpPr>
-          <p:cNvPr id="17" name="TextBox 16"/>
+          <p:cNvPr id="21" name="TextBox 20"/>
           <p:cNvSpPr txBox="1"/>
           <p:nvPr/>
         </p:nvSpPr>
@@ -13023,7 +14003,7 @@
       </p:sp>
       <p:sp>
         <p:nvSpPr>
-          <p:cNvPr id="18" name="Rounded Rectangle 17"/>
+          <p:cNvPr id="22" name="Rounded Rectangle 21"/>
           <p:cNvSpPr/>
           <p:nvPr/>
         </p:nvSpPr>
@@ -13069,14 +14049,58 @@
       </p:sp>
       <p:sp>
         <p:nvSpPr>
-          <p:cNvPr id="19" name="TextBox 18"/>
+          <p:cNvPr id="23" name="Rounded Rectangle 22"/>
+          <p:cNvSpPr/>
+          <p:nvPr/>
+        </p:nvSpPr>
+        <p:spPr>
+          <a:xfrm>
+            <a:off x="9765792" y="2194560"/>
+            <a:ext cx="1691640" cy="64008"/>
+          </a:xfrm>
+          <a:prstGeom prst="roundRect">
+            <a:avLst/>
+          </a:prstGeom>
+          <a:solidFill>
+            <a:srgbClr val="3FD0C8"/>
+          </a:solidFill>
+          <a:ln>
+            <a:noFill/>
+          </a:ln>
+          <a:effectLst/>
+        </p:spPr>
+        <p:style>
+          <a:lnRef idx="1">
+            <a:schemeClr val="accent1"/>
+          </a:lnRef>
+          <a:fillRef idx="3">
+            <a:schemeClr val="accent1"/>
+          </a:fillRef>
+          <a:effectRef idx="2">
+            <a:schemeClr val="accent1"/>
+          </a:effectRef>
+          <a:fontRef idx="minor">
+            <a:schemeClr val="lt1"/>
+          </a:fontRef>
+        </p:style>
+        <p:txBody>
+          <a:bodyPr rtlCol="0" anchor="ctr"/>
+          <a:lstStyle/>
+          <a:p>
+            <a:pPr algn="ctr"/>
+          </a:p>
+        </p:txBody>
+      </p:sp>
+      <p:sp>
+        <p:nvSpPr>
+          <p:cNvPr id="24" name="TextBox 23"/>
           <p:cNvSpPr txBox="1"/>
           <p:nvPr/>
         </p:nvSpPr>
         <p:spPr>
           <a:xfrm>
-            <a:off x="9747504" y="2148840"/>
-            <a:ext cx="1728216" cy="1051560"/>
+            <a:off x="9747504" y="2203704"/>
+            <a:ext cx="1728216" cy="996695"/>
           </a:xfrm>
           <a:prstGeom prst="rect">
             <a:avLst/>
@@ -13136,7 +14160,7 @@
       </p:sp>
       <p:sp>
         <p:nvSpPr>
-          <p:cNvPr id="20" name="Rounded Rectangle 19"/>
+          <p:cNvPr id="25" name="Rounded Rectangle 24"/>
           <p:cNvSpPr/>
           <p:nvPr/>
         </p:nvSpPr>
@@ -13182,7 +14206,7 @@
       </p:sp>
       <p:sp>
         <p:nvSpPr>
-          <p:cNvPr id="21" name="TextBox 20"/>
+          <p:cNvPr id="26" name="TextBox 25"/>
           <p:cNvSpPr txBox="1"/>
           <p:nvPr/>
         </p:nvSpPr>
@@ -13320,7 +14344,7 @@
       </p:sp>
       <p:sp>
         <p:nvSpPr>
-          <p:cNvPr id="22" name="Rounded Rectangle 21"/>
+          <p:cNvPr id="27" name="Rounded Rectangle 26"/>
           <p:cNvSpPr/>
           <p:nvPr/>
         </p:nvSpPr>
@@ -13366,7 +14390,7 @@
       </p:sp>
       <p:sp>
         <p:nvSpPr>
-          <p:cNvPr id="23" name="TextBox 22"/>
+          <p:cNvPr id="28" name="TextBox 27"/>
           <p:cNvSpPr txBox="1"/>
           <p:nvPr/>
         </p:nvSpPr>
@@ -14959,14 +15983,58 @@
       </p:sp>
       <p:sp>
         <p:nvSpPr>
-          <p:cNvPr id="8" name="TextBox 7"/>
+          <p:cNvPr id="8" name="Rounded Rectangle 7"/>
+          <p:cNvSpPr/>
+          <p:nvPr/>
+        </p:nvSpPr>
+        <p:spPr>
+          <a:xfrm>
+            <a:off x="731519" y="3246120"/>
+            <a:ext cx="2256282" cy="64008"/>
+          </a:xfrm>
+          <a:prstGeom prst="roundRect">
+            <a:avLst/>
+          </a:prstGeom>
+          <a:solidFill>
+            <a:srgbClr val="58A6FF"/>
+          </a:solidFill>
+          <a:ln>
+            <a:noFill/>
+          </a:ln>
+          <a:effectLst/>
+        </p:spPr>
+        <p:style>
+          <a:lnRef idx="1">
+            <a:schemeClr val="accent1"/>
+          </a:lnRef>
+          <a:fillRef idx="3">
+            <a:schemeClr val="accent1"/>
+          </a:fillRef>
+          <a:effectRef idx="2">
+            <a:schemeClr val="accent1"/>
+          </a:effectRef>
+          <a:fontRef idx="minor">
+            <a:schemeClr val="lt1"/>
+          </a:fontRef>
+        </p:style>
+        <p:txBody>
+          <a:bodyPr rtlCol="0" anchor="ctr"/>
+          <a:lstStyle/>
+          <a:p>
+            <a:pPr algn="ctr"/>
+          </a:p>
+        </p:txBody>
+      </p:sp>
+      <p:sp>
+        <p:nvSpPr>
+          <p:cNvPr id="9" name="TextBox 8"/>
           <p:cNvSpPr txBox="1"/>
           <p:nvPr/>
         </p:nvSpPr>
         <p:spPr>
           <a:xfrm>
-            <a:off x="713231" y="3200400"/>
-            <a:ext cx="2292858" cy="1005840"/>
+            <a:off x="713231" y="3255264"/>
+            <a:ext cx="2292858" cy="950976"/>
           </a:xfrm>
           <a:prstGeom prst="rect">
             <a:avLst/>
@@ -15026,7 +16094,7 @@
       </p:sp>
       <p:sp>
         <p:nvSpPr>
-          <p:cNvPr id="9" name="TextBox 8"/>
+          <p:cNvPr id="10" name="TextBox 9"/>
           <p:cNvSpPr txBox="1"/>
           <p:nvPr/>
         </p:nvSpPr>
@@ -15071,7 +16139,7 @@
       </p:sp>
       <p:sp>
         <p:nvSpPr>
-          <p:cNvPr id="10" name="Rounded Rectangle 9"/>
+          <p:cNvPr id="11" name="Rounded Rectangle 10"/>
           <p:cNvSpPr/>
           <p:nvPr/>
         </p:nvSpPr>
@@ -15117,14 +16185,58 @@
       </p:sp>
       <p:sp>
         <p:nvSpPr>
-          <p:cNvPr id="11" name="TextBox 10"/>
+          <p:cNvPr id="12" name="Rounded Rectangle 11"/>
+          <p:cNvSpPr/>
+          <p:nvPr/>
+        </p:nvSpPr>
+        <p:spPr>
+          <a:xfrm>
+            <a:off x="3554730" y="3246120"/>
+            <a:ext cx="2256282" cy="64008"/>
+          </a:xfrm>
+          <a:prstGeom prst="roundRect">
+            <a:avLst/>
+          </a:prstGeom>
+          <a:solidFill>
+            <a:srgbClr val="E6EDF3"/>
+          </a:solidFill>
+          <a:ln>
+            <a:noFill/>
+          </a:ln>
+          <a:effectLst/>
+        </p:spPr>
+        <p:style>
+          <a:lnRef idx="1">
+            <a:schemeClr val="accent1"/>
+          </a:lnRef>
+          <a:fillRef idx="3">
+            <a:schemeClr val="accent1"/>
+          </a:fillRef>
+          <a:effectRef idx="2">
+            <a:schemeClr val="accent1"/>
+          </a:effectRef>
+          <a:fontRef idx="minor">
+            <a:schemeClr val="lt1"/>
+          </a:fontRef>
+        </p:style>
+        <p:txBody>
+          <a:bodyPr rtlCol="0" anchor="ctr"/>
+          <a:lstStyle/>
+          <a:p>
+            <a:pPr algn="ctr"/>
+          </a:p>
+        </p:txBody>
+      </p:sp>
+      <p:sp>
+        <p:nvSpPr>
+          <p:cNvPr id="13" name="TextBox 12"/>
           <p:cNvSpPr txBox="1"/>
           <p:nvPr/>
         </p:nvSpPr>
         <p:spPr>
           <a:xfrm>
-            <a:off x="3536442" y="3200400"/>
-            <a:ext cx="2292858" cy="1005840"/>
+            <a:off x="3536442" y="3255264"/>
+            <a:ext cx="2292858" cy="950976"/>
           </a:xfrm>
           <a:prstGeom prst="rect">
             <a:avLst/>
@@ -15184,7 +16296,7 @@
       </p:sp>
       <p:sp>
         <p:nvSpPr>
-          <p:cNvPr id="12" name="TextBox 11"/>
+          <p:cNvPr id="14" name="TextBox 13"/>
           <p:cNvSpPr txBox="1"/>
           <p:nvPr/>
         </p:nvSpPr>
@@ -15229,7 +16341,7 @@
       </p:sp>
       <p:sp>
         <p:nvSpPr>
-          <p:cNvPr id="13" name="Rounded Rectangle 12"/>
+          <p:cNvPr id="15" name="Rounded Rectangle 14"/>
           <p:cNvSpPr/>
           <p:nvPr/>
         </p:nvSpPr>
@@ -15275,14 +16387,58 @@
       </p:sp>
       <p:sp>
         <p:nvSpPr>
-          <p:cNvPr id="14" name="TextBox 13"/>
+          <p:cNvPr id="16" name="Rounded Rectangle 15"/>
+          <p:cNvSpPr/>
+          <p:nvPr/>
+        </p:nvSpPr>
+        <p:spPr>
+          <a:xfrm>
+            <a:off x="6377940" y="3246120"/>
+            <a:ext cx="2256282" cy="64008"/>
+          </a:xfrm>
+          <a:prstGeom prst="roundRect">
+            <a:avLst/>
+          </a:prstGeom>
+          <a:solidFill>
+            <a:srgbClr val="3FB950"/>
+          </a:solidFill>
+          <a:ln>
+            <a:noFill/>
+          </a:ln>
+          <a:effectLst/>
+        </p:spPr>
+        <p:style>
+          <a:lnRef idx="1">
+            <a:schemeClr val="accent1"/>
+          </a:lnRef>
+          <a:fillRef idx="3">
+            <a:schemeClr val="accent1"/>
+          </a:fillRef>
+          <a:effectRef idx="2">
+            <a:schemeClr val="accent1"/>
+          </a:effectRef>
+          <a:fontRef idx="minor">
+            <a:schemeClr val="lt1"/>
+          </a:fontRef>
+        </p:style>
+        <p:txBody>
+          <a:bodyPr rtlCol="0" anchor="ctr"/>
+          <a:lstStyle/>
+          <a:p>
+            <a:pPr algn="ctr"/>
+          </a:p>
+        </p:txBody>
+      </p:sp>
+      <p:sp>
+        <p:nvSpPr>
+          <p:cNvPr id="17" name="TextBox 16"/>
           <p:cNvSpPr txBox="1"/>
           <p:nvPr/>
         </p:nvSpPr>
         <p:spPr>
           <a:xfrm>
-            <a:off x="6359652" y="3200400"/>
-            <a:ext cx="2292858" cy="1005840"/>
+            <a:off x="6359652" y="3255264"/>
+            <a:ext cx="2292858" cy="950976"/>
           </a:xfrm>
           <a:prstGeom prst="rect">
             <a:avLst/>
@@ -15342,7 +16498,7 @@
       </p:sp>
       <p:sp>
         <p:nvSpPr>
-          <p:cNvPr id="15" name="TextBox 14"/>
+          <p:cNvPr id="18" name="TextBox 17"/>
           <p:cNvSpPr txBox="1"/>
           <p:nvPr/>
         </p:nvSpPr>
@@ -15387,7 +16543,7 @@
       </p:sp>
       <p:sp>
         <p:nvSpPr>
-          <p:cNvPr id="16" name="Rounded Rectangle 15"/>
+          <p:cNvPr id="19" name="Rounded Rectangle 18"/>
           <p:cNvSpPr/>
           <p:nvPr/>
         </p:nvSpPr>
@@ -15433,14 +16589,58 @@
       </p:sp>
       <p:sp>
         <p:nvSpPr>
-          <p:cNvPr id="17" name="TextBox 16"/>
+          <p:cNvPr id="20" name="Rounded Rectangle 19"/>
+          <p:cNvSpPr/>
+          <p:nvPr/>
+        </p:nvSpPr>
+        <p:spPr>
+          <a:xfrm>
+            <a:off x="9201150" y="3246120"/>
+            <a:ext cx="2256282" cy="64008"/>
+          </a:xfrm>
+          <a:prstGeom prst="roundRect">
+            <a:avLst/>
+          </a:prstGeom>
+          <a:solidFill>
+            <a:srgbClr val="3FD0C8"/>
+          </a:solidFill>
+          <a:ln>
+            <a:noFill/>
+          </a:ln>
+          <a:effectLst/>
+        </p:spPr>
+        <p:style>
+          <a:lnRef idx="1">
+            <a:schemeClr val="accent1"/>
+          </a:lnRef>
+          <a:fillRef idx="3">
+            <a:schemeClr val="accent1"/>
+          </a:fillRef>
+          <a:effectRef idx="2">
+            <a:schemeClr val="accent1"/>
+          </a:effectRef>
+          <a:fontRef idx="minor">
+            <a:schemeClr val="lt1"/>
+          </a:fontRef>
+        </p:style>
+        <p:txBody>
+          <a:bodyPr rtlCol="0" anchor="ctr"/>
+          <a:lstStyle/>
+          <a:p>
+            <a:pPr algn="ctr"/>
+          </a:p>
+        </p:txBody>
+      </p:sp>
+      <p:sp>
+        <p:nvSpPr>
+          <p:cNvPr id="21" name="TextBox 20"/>
           <p:cNvSpPr txBox="1"/>
           <p:nvPr/>
         </p:nvSpPr>
         <p:spPr>
           <a:xfrm>
-            <a:off x="9182862" y="3200400"/>
-            <a:ext cx="2292858" cy="1005840"/>
+            <a:off x="9182862" y="3255264"/>
+            <a:ext cx="2292858" cy="950976"/>
           </a:xfrm>
           <a:prstGeom prst="rect">
             <a:avLst/>
@@ -15500,7 +16700,7 @@
       </p:sp>
       <p:sp>
         <p:nvSpPr>
-          <p:cNvPr id="18" name="Rounded Rectangle 17"/>
+          <p:cNvPr id="22" name="Rounded Rectangle 21"/>
           <p:cNvSpPr/>
           <p:nvPr/>
         </p:nvSpPr>
@@ -15546,7 +16746,7 @@
       </p:sp>
       <p:sp>
         <p:nvSpPr>
-          <p:cNvPr id="19" name="TextBox 18"/>
+          <p:cNvPr id="23" name="TextBox 22"/>
           <p:cNvSpPr txBox="1"/>
           <p:nvPr/>
         </p:nvSpPr>
@@ -15684,7 +16884,7 @@
       </p:sp>
       <p:sp>
         <p:nvSpPr>
-          <p:cNvPr id="20" name="Rounded Rectangle 19"/>
+          <p:cNvPr id="24" name="Rounded Rectangle 23"/>
           <p:cNvSpPr/>
           <p:nvPr/>
         </p:nvSpPr>
@@ -15730,7 +16930,7 @@
       </p:sp>
       <p:sp>
         <p:nvSpPr>
-          <p:cNvPr id="21" name="TextBox 20"/>
+          <p:cNvPr id="25" name="TextBox 24"/>
           <p:cNvSpPr txBox="1"/>
           <p:nvPr/>
         </p:nvSpPr>
@@ -16111,14 +17311,58 @@
       </p:sp>
       <p:sp>
         <p:nvSpPr>
-          <p:cNvPr id="7" name="TextBox 6"/>
+          <p:cNvPr id="7" name="Rounded Rectangle 6"/>
+          <p:cNvSpPr/>
+          <p:nvPr/>
+        </p:nvSpPr>
+        <p:spPr>
+          <a:xfrm>
+            <a:off x="731519" y="2194560"/>
+            <a:ext cx="1691640" cy="64008"/>
+          </a:xfrm>
+          <a:prstGeom prst="roundRect">
+            <a:avLst/>
+          </a:prstGeom>
+          <a:solidFill>
+            <a:srgbClr val="58A6FF"/>
+          </a:solidFill>
+          <a:ln>
+            <a:noFill/>
+          </a:ln>
+          <a:effectLst/>
+        </p:spPr>
+        <p:style>
+          <a:lnRef idx="1">
+            <a:schemeClr val="accent1"/>
+          </a:lnRef>
+          <a:fillRef idx="3">
+            <a:schemeClr val="accent1"/>
+          </a:fillRef>
+          <a:effectRef idx="2">
+            <a:schemeClr val="accent1"/>
+          </a:effectRef>
+          <a:fontRef idx="minor">
+            <a:schemeClr val="lt1"/>
+          </a:fontRef>
+        </p:style>
+        <p:txBody>
+          <a:bodyPr rtlCol="0" anchor="ctr"/>
+          <a:lstStyle/>
+          <a:p>
+            <a:pPr algn="ctr"/>
+          </a:p>
+        </p:txBody>
+      </p:sp>
+      <p:sp>
+        <p:nvSpPr>
+          <p:cNvPr id="8" name="TextBox 7"/>
           <p:cNvSpPr txBox="1"/>
           <p:nvPr/>
         </p:nvSpPr>
         <p:spPr>
           <a:xfrm>
-            <a:off x="713231" y="2148840"/>
-            <a:ext cx="1728216" cy="1051560"/>
+            <a:off x="713231" y="2203704"/>
+            <a:ext cx="1728216" cy="996695"/>
           </a:xfrm>
           <a:prstGeom prst="rect">
             <a:avLst/>
@@ -16156,7 +17400,7 @@
       </p:sp>
       <p:sp>
         <p:nvSpPr>
-          <p:cNvPr id="8" name="TextBox 7"/>
+          <p:cNvPr id="9" name="TextBox 8"/>
           <p:cNvSpPr txBox="1"/>
           <p:nvPr/>
         </p:nvSpPr>
@@ -16201,7 +17445,7 @@
       </p:sp>
       <p:sp>
         <p:nvSpPr>
-          <p:cNvPr id="9" name="Rounded Rectangle 8"/>
+          <p:cNvPr id="10" name="Rounded Rectangle 9"/>
           <p:cNvSpPr/>
           <p:nvPr/>
         </p:nvSpPr>
@@ -16247,14 +17491,58 @@
       </p:sp>
       <p:sp>
         <p:nvSpPr>
-          <p:cNvPr id="10" name="TextBox 9"/>
+          <p:cNvPr id="11" name="Rounded Rectangle 10"/>
+          <p:cNvSpPr/>
+          <p:nvPr/>
+        </p:nvSpPr>
+        <p:spPr>
+          <a:xfrm>
+            <a:off x="2990088" y="2194560"/>
+            <a:ext cx="1691640" cy="64008"/>
+          </a:xfrm>
+          <a:prstGeom prst="roundRect">
+            <a:avLst/>
+          </a:prstGeom>
+          <a:solidFill>
+            <a:srgbClr val="3FB950"/>
+          </a:solidFill>
+          <a:ln>
+            <a:noFill/>
+          </a:ln>
+          <a:effectLst/>
+        </p:spPr>
+        <p:style>
+          <a:lnRef idx="1">
+            <a:schemeClr val="accent1"/>
+          </a:lnRef>
+          <a:fillRef idx="3">
+            <a:schemeClr val="accent1"/>
+          </a:fillRef>
+          <a:effectRef idx="2">
+            <a:schemeClr val="accent1"/>
+          </a:effectRef>
+          <a:fontRef idx="minor">
+            <a:schemeClr val="lt1"/>
+          </a:fontRef>
+        </p:style>
+        <p:txBody>
+          <a:bodyPr rtlCol="0" anchor="ctr"/>
+          <a:lstStyle/>
+          <a:p>
+            <a:pPr algn="ctr"/>
+          </a:p>
+        </p:txBody>
+      </p:sp>
+      <p:sp>
+        <p:nvSpPr>
+          <p:cNvPr id="12" name="TextBox 11"/>
           <p:cNvSpPr txBox="1"/>
           <p:nvPr/>
         </p:nvSpPr>
         <p:spPr>
           <a:xfrm>
-            <a:off x="2971800" y="2148840"/>
-            <a:ext cx="1728216" cy="1051560"/>
+            <a:off x="2971800" y="2203704"/>
+            <a:ext cx="1728216" cy="996695"/>
           </a:xfrm>
           <a:prstGeom prst="rect">
             <a:avLst/>
@@ -16314,7 +17602,7 @@
       </p:sp>
       <p:sp>
         <p:nvSpPr>
-          <p:cNvPr id="11" name="TextBox 10"/>
+          <p:cNvPr id="13" name="TextBox 12"/>
           <p:cNvSpPr txBox="1"/>
           <p:nvPr/>
         </p:nvSpPr>
@@ -16359,7 +17647,7 @@
       </p:sp>
       <p:sp>
         <p:nvSpPr>
-          <p:cNvPr id="12" name="Rounded Rectangle 11"/>
+          <p:cNvPr id="14" name="Rounded Rectangle 13"/>
           <p:cNvSpPr/>
           <p:nvPr/>
         </p:nvSpPr>
@@ -16405,14 +17693,58 @@
       </p:sp>
       <p:sp>
         <p:nvSpPr>
-          <p:cNvPr id="13" name="TextBox 12"/>
+          <p:cNvPr id="15" name="Rounded Rectangle 14"/>
+          <p:cNvSpPr/>
+          <p:nvPr/>
+        </p:nvSpPr>
+        <p:spPr>
+          <a:xfrm>
+            <a:off x="5248656" y="2194560"/>
+            <a:ext cx="1691640" cy="64008"/>
+          </a:xfrm>
+          <a:prstGeom prst="roundRect">
+            <a:avLst/>
+          </a:prstGeom>
+          <a:solidFill>
+            <a:srgbClr val="3FB950"/>
+          </a:solidFill>
+          <a:ln>
+            <a:noFill/>
+          </a:ln>
+          <a:effectLst/>
+        </p:spPr>
+        <p:style>
+          <a:lnRef idx="1">
+            <a:schemeClr val="accent1"/>
+          </a:lnRef>
+          <a:fillRef idx="3">
+            <a:schemeClr val="accent1"/>
+          </a:fillRef>
+          <a:effectRef idx="2">
+            <a:schemeClr val="accent1"/>
+          </a:effectRef>
+          <a:fontRef idx="minor">
+            <a:schemeClr val="lt1"/>
+          </a:fontRef>
+        </p:style>
+        <p:txBody>
+          <a:bodyPr rtlCol="0" anchor="ctr"/>
+          <a:lstStyle/>
+          <a:p>
+            <a:pPr algn="ctr"/>
+          </a:p>
+        </p:txBody>
+      </p:sp>
+      <p:sp>
+        <p:nvSpPr>
+          <p:cNvPr id="16" name="TextBox 15"/>
           <p:cNvSpPr txBox="1"/>
           <p:nvPr/>
         </p:nvSpPr>
         <p:spPr>
           <a:xfrm>
-            <a:off x="5230368" y="2148840"/>
-            <a:ext cx="1728216" cy="1051560"/>
+            <a:off x="5230368" y="2203704"/>
+            <a:ext cx="1728216" cy="996695"/>
           </a:xfrm>
           <a:prstGeom prst="rect">
             <a:avLst/>
@@ -16472,7 +17804,7 @@
       </p:sp>
       <p:sp>
         <p:nvSpPr>
-          <p:cNvPr id="14" name="TextBox 13"/>
+          <p:cNvPr id="17" name="TextBox 16"/>
           <p:cNvSpPr txBox="1"/>
           <p:nvPr/>
         </p:nvSpPr>
@@ -16517,7 +17849,7 @@
       </p:sp>
       <p:sp>
         <p:nvSpPr>
-          <p:cNvPr id="15" name="Rounded Rectangle 14"/>
+          <p:cNvPr id="18" name="Rounded Rectangle 17"/>
           <p:cNvSpPr/>
           <p:nvPr/>
         </p:nvSpPr>
@@ -16563,14 +17895,58 @@
       </p:sp>
       <p:sp>
         <p:nvSpPr>
-          <p:cNvPr id="16" name="TextBox 15"/>
+          <p:cNvPr id="19" name="Rounded Rectangle 18"/>
+          <p:cNvSpPr/>
+          <p:nvPr/>
+        </p:nvSpPr>
+        <p:spPr>
+          <a:xfrm>
+            <a:off x="7507224" y="2194560"/>
+            <a:ext cx="1691640" cy="64008"/>
+          </a:xfrm>
+          <a:prstGeom prst="roundRect">
+            <a:avLst/>
+          </a:prstGeom>
+          <a:solidFill>
+            <a:srgbClr val="3FB950"/>
+          </a:solidFill>
+          <a:ln>
+            <a:noFill/>
+          </a:ln>
+          <a:effectLst/>
+        </p:spPr>
+        <p:style>
+          <a:lnRef idx="1">
+            <a:schemeClr val="accent1"/>
+          </a:lnRef>
+          <a:fillRef idx="3">
+            <a:schemeClr val="accent1"/>
+          </a:fillRef>
+          <a:effectRef idx="2">
+            <a:schemeClr val="accent1"/>
+          </a:effectRef>
+          <a:fontRef idx="minor">
+            <a:schemeClr val="lt1"/>
+          </a:fontRef>
+        </p:style>
+        <p:txBody>
+          <a:bodyPr rtlCol="0" anchor="ctr"/>
+          <a:lstStyle/>
+          <a:p>
+            <a:pPr algn="ctr"/>
+          </a:p>
+        </p:txBody>
+      </p:sp>
+      <p:sp>
+        <p:nvSpPr>
+          <p:cNvPr id="20" name="TextBox 19"/>
           <p:cNvSpPr txBox="1"/>
           <p:nvPr/>
         </p:nvSpPr>
         <p:spPr>
           <a:xfrm>
-            <a:off x="7488936" y="2148840"/>
-            <a:ext cx="1728216" cy="1051560"/>
+            <a:off x="7488936" y="2203704"/>
+            <a:ext cx="1728216" cy="996695"/>
           </a:xfrm>
           <a:prstGeom prst="rect">
             <a:avLst/>
@@ -16630,7 +18006,7 @@
       </p:sp>
       <p:sp>
         <p:nvSpPr>
-          <p:cNvPr id="17" name="TextBox 16"/>
+          <p:cNvPr id="21" name="TextBox 20"/>
           <p:cNvSpPr txBox="1"/>
           <p:nvPr/>
         </p:nvSpPr>
@@ -16675,7 +18051,7 @@
       </p:sp>
       <p:sp>
         <p:nvSpPr>
-          <p:cNvPr id="18" name="Rounded Rectangle 17"/>
+          <p:cNvPr id="22" name="Rounded Rectangle 21"/>
           <p:cNvSpPr/>
           <p:nvPr/>
         </p:nvSpPr>
@@ -16721,14 +18097,58 @@
       </p:sp>
       <p:sp>
         <p:nvSpPr>
-          <p:cNvPr id="19" name="TextBox 18"/>
+          <p:cNvPr id="23" name="Rounded Rectangle 22"/>
+          <p:cNvSpPr/>
+          <p:nvPr/>
+        </p:nvSpPr>
+        <p:spPr>
+          <a:xfrm>
+            <a:off x="9765792" y="2194560"/>
+            <a:ext cx="1691640" cy="64008"/>
+          </a:xfrm>
+          <a:prstGeom prst="roundRect">
+            <a:avLst/>
+          </a:prstGeom>
+          <a:solidFill>
+            <a:srgbClr val="3FD0C8"/>
+          </a:solidFill>
+          <a:ln>
+            <a:noFill/>
+          </a:ln>
+          <a:effectLst/>
+        </p:spPr>
+        <p:style>
+          <a:lnRef idx="1">
+            <a:schemeClr val="accent1"/>
+          </a:lnRef>
+          <a:fillRef idx="3">
+            <a:schemeClr val="accent1"/>
+          </a:fillRef>
+          <a:effectRef idx="2">
+            <a:schemeClr val="accent1"/>
+          </a:effectRef>
+          <a:fontRef idx="minor">
+            <a:schemeClr val="lt1"/>
+          </a:fontRef>
+        </p:style>
+        <p:txBody>
+          <a:bodyPr rtlCol="0" anchor="ctr"/>
+          <a:lstStyle/>
+          <a:p>
+            <a:pPr algn="ctr"/>
+          </a:p>
+        </p:txBody>
+      </p:sp>
+      <p:sp>
+        <p:nvSpPr>
+          <p:cNvPr id="24" name="TextBox 23"/>
           <p:cNvSpPr txBox="1"/>
           <p:nvPr/>
         </p:nvSpPr>
         <p:spPr>
           <a:xfrm>
-            <a:off x="9747504" y="2148840"/>
-            <a:ext cx="1728216" cy="1051560"/>
+            <a:off x="9747504" y="2203704"/>
+            <a:ext cx="1728216" cy="996695"/>
           </a:xfrm>
           <a:prstGeom prst="rect">
             <a:avLst/>
@@ -16788,14 +18208,378 @@
       </p:sp>
       <p:sp>
         <p:nvSpPr>
-          <p:cNvPr id="20" name="Rounded Rectangle 19"/>
+          <p:cNvPr id="25" name="Rounded Rectangle 24"/>
           <p:cNvSpPr/>
           <p:nvPr/>
         </p:nvSpPr>
         <p:spPr>
           <a:xfrm>
-            <a:off x="640080" y="3794760"/>
-            <a:ext cx="10927080" cy="2331720"/>
+            <a:off x="2319375" y="3364992"/>
+            <a:ext cx="1563624" cy="384048"/>
+          </a:xfrm>
+          <a:prstGeom prst="roundRect">
+            <a:avLst/>
+          </a:prstGeom>
+          <a:solidFill>
+            <a:srgbClr val="161B22"/>
+          </a:solidFill>
+          <a:ln w="12700">
+            <a:solidFill>
+              <a:srgbClr val="30363D"/>
+            </a:solidFill>
+          </a:ln>
+          <a:effectLst/>
+        </p:spPr>
+        <p:style>
+          <a:lnRef idx="1">
+            <a:schemeClr val="accent1"/>
+          </a:lnRef>
+          <a:fillRef idx="3">
+            <a:schemeClr val="accent1"/>
+          </a:fillRef>
+          <a:effectRef idx="2">
+            <a:schemeClr val="accent1"/>
+          </a:effectRef>
+          <a:fontRef idx="minor">
+            <a:schemeClr val="lt1"/>
+          </a:fontRef>
+        </p:style>
+        <p:txBody>
+          <a:bodyPr rtlCol="0" anchor="ctr"/>
+          <a:lstStyle/>
+          <a:p>
+            <a:pPr algn="ctr"/>
+          </a:p>
+        </p:txBody>
+      </p:sp>
+      <p:sp>
+        <p:nvSpPr>
+          <p:cNvPr id="26" name="TextBox 25"/>
+          <p:cNvSpPr txBox="1"/>
+          <p:nvPr/>
+        </p:nvSpPr>
+        <p:spPr>
+          <a:xfrm>
+            <a:off x="2319375" y="3364992"/>
+            <a:ext cx="1563624" cy="384048"/>
+          </a:xfrm>
+          <a:prstGeom prst="rect">
+            <a:avLst/>
+          </a:prstGeom>
+          <a:noFill/>
+        </p:spPr>
+        <p:txBody>
+          <a:bodyPr wrap="square" anchor="ctr" lIns="0" rIns="0" tIns="0" bIns="0">
+            <a:spAutoFit/>
+          </a:bodyPr>
+          <a:lstStyle/>
+          <a:p>
+            <a:pPr algn="ctr">
+              <a:lnSpc>
+                <a:spcPct val="100000"/>
+              </a:lnSpc>
+              <a:spcBef>
+                <a:spcPts val="0"/>
+              </a:spcBef>
+              <a:spcAft>
+                <a:spcPts val="200"/>
+              </a:spcAft>
+            </a:pPr>
+            <a:r>
+              <a:rPr sz="1100" b="1">
+                <a:solidFill>
+                  <a:srgbClr val="3FB950"/>
+                </a:solidFill>
+                <a:latin typeface="Consolas"/>
+              </a:rPr>
+              <a:t>0 tail call</a:t>
+            </a:r>
+          </a:p>
+        </p:txBody>
+      </p:sp>
+      <p:sp>
+        <p:nvSpPr>
+          <p:cNvPr id="27" name="Rounded Rectangle 26"/>
+          <p:cNvSpPr/>
+          <p:nvPr/>
+        </p:nvSpPr>
+        <p:spPr>
+          <a:xfrm>
+            <a:off x="4047591" y="3364992"/>
+            <a:ext cx="1764792" cy="384048"/>
+          </a:xfrm>
+          <a:prstGeom prst="roundRect">
+            <a:avLst/>
+          </a:prstGeom>
+          <a:solidFill>
+            <a:srgbClr val="161B22"/>
+          </a:solidFill>
+          <a:ln w="12700">
+            <a:solidFill>
+              <a:srgbClr val="30363D"/>
+            </a:solidFill>
+          </a:ln>
+          <a:effectLst/>
+        </p:spPr>
+        <p:style>
+          <a:lnRef idx="1">
+            <a:schemeClr val="accent1"/>
+          </a:lnRef>
+          <a:fillRef idx="3">
+            <a:schemeClr val="accent1"/>
+          </a:fillRef>
+          <a:effectRef idx="2">
+            <a:schemeClr val="accent1"/>
+          </a:effectRef>
+          <a:fontRef idx="minor">
+            <a:schemeClr val="lt1"/>
+          </a:fontRef>
+        </p:style>
+        <p:txBody>
+          <a:bodyPr rtlCol="0" anchor="ctr"/>
+          <a:lstStyle/>
+          <a:p>
+            <a:pPr algn="ctr"/>
+          </a:p>
+        </p:txBody>
+      </p:sp>
+      <p:sp>
+        <p:nvSpPr>
+          <p:cNvPr id="28" name="TextBox 27"/>
+          <p:cNvSpPr txBox="1"/>
+          <p:nvPr/>
+        </p:nvSpPr>
+        <p:spPr>
+          <a:xfrm>
+            <a:off x="4047591" y="3364992"/>
+            <a:ext cx="1764792" cy="384048"/>
+          </a:xfrm>
+          <a:prstGeom prst="rect">
+            <a:avLst/>
+          </a:prstGeom>
+          <a:noFill/>
+        </p:spPr>
+        <p:txBody>
+          <a:bodyPr wrap="square" anchor="ctr" lIns="0" rIns="0" tIns="0" bIns="0">
+            <a:spAutoFit/>
+          </a:bodyPr>
+          <a:lstStyle/>
+          <a:p>
+            <a:pPr algn="ctr">
+              <a:lnSpc>
+                <a:spcPct val="100000"/>
+              </a:lnSpc>
+              <a:spcBef>
+                <a:spcPts val="0"/>
+              </a:spcBef>
+              <a:spcAft>
+                <a:spcPts val="200"/>
+              </a:spcAft>
+            </a:pPr>
+            <a:r>
+              <a:rPr sz="1100" b="1">
+                <a:solidFill>
+                  <a:srgbClr val="3FB950"/>
+                </a:solidFill>
+                <a:latin typeface="Consolas"/>
+              </a:rPr>
+              <a:t>0 lookup pesi</a:t>
+            </a:r>
+          </a:p>
+        </p:txBody>
+      </p:sp>
+      <p:sp>
+        <p:nvSpPr>
+          <p:cNvPr id="29" name="Rounded Rectangle 28"/>
+          <p:cNvSpPr/>
+          <p:nvPr/>
+        </p:nvSpPr>
+        <p:spPr>
+          <a:xfrm>
+            <a:off x="5976975" y="3364992"/>
+            <a:ext cx="1563624" cy="384048"/>
+          </a:xfrm>
+          <a:prstGeom prst="roundRect">
+            <a:avLst/>
+          </a:prstGeom>
+          <a:solidFill>
+            <a:srgbClr val="161B22"/>
+          </a:solidFill>
+          <a:ln w="12700">
+            <a:solidFill>
+              <a:srgbClr val="30363D"/>
+            </a:solidFill>
+          </a:ln>
+          <a:effectLst/>
+        </p:spPr>
+        <p:style>
+          <a:lnRef idx="1">
+            <a:schemeClr val="accent1"/>
+          </a:lnRef>
+          <a:fillRef idx="3">
+            <a:schemeClr val="accent1"/>
+          </a:fillRef>
+          <a:effectRef idx="2">
+            <a:schemeClr val="accent1"/>
+          </a:effectRef>
+          <a:fontRef idx="minor">
+            <a:schemeClr val="lt1"/>
+          </a:fontRef>
+        </p:style>
+        <p:txBody>
+          <a:bodyPr rtlCol="0" anchor="ctr"/>
+          <a:lstStyle/>
+          <a:p>
+            <a:pPr algn="ctr"/>
+          </a:p>
+        </p:txBody>
+      </p:sp>
+      <p:sp>
+        <p:nvSpPr>
+          <p:cNvPr id="30" name="TextBox 29"/>
+          <p:cNvSpPr txBox="1"/>
+          <p:nvPr/>
+        </p:nvSpPr>
+        <p:spPr>
+          <a:xfrm>
+            <a:off x="5976975" y="3364992"/>
+            <a:ext cx="1563624" cy="384048"/>
+          </a:xfrm>
+          <a:prstGeom prst="rect">
+            <a:avLst/>
+          </a:prstGeom>
+          <a:noFill/>
+        </p:spPr>
+        <p:txBody>
+          <a:bodyPr wrap="square" anchor="ctr" lIns="0" rIns="0" tIns="0" bIns="0">
+            <a:spAutoFit/>
+          </a:bodyPr>
+          <a:lstStyle/>
+          <a:p>
+            <a:pPr algn="ctr">
+              <a:lnSpc>
+                <a:spcPct val="100000"/>
+              </a:lnSpc>
+              <a:spcBef>
+                <a:spcPts val="0"/>
+              </a:spcBef>
+              <a:spcAft>
+                <a:spcPts val="200"/>
+              </a:spcAft>
+            </a:pPr>
+            <a:r>
+              <a:rPr sz="1100" b="1">
+                <a:solidFill>
+                  <a:srgbClr val="3FB950"/>
+                </a:solidFill>
+                <a:latin typeface="Consolas"/>
+              </a:rPr>
+              <a:t>264 B mappe</a:t>
+            </a:r>
+          </a:p>
+        </p:txBody>
+      </p:sp>
+      <p:sp>
+        <p:nvSpPr>
+          <p:cNvPr id="31" name="Rounded Rectangle 30"/>
+          <p:cNvSpPr/>
+          <p:nvPr/>
+        </p:nvSpPr>
+        <p:spPr>
+          <a:xfrm>
+            <a:off x="7705191" y="3364992"/>
+            <a:ext cx="2167128" cy="384048"/>
+          </a:xfrm>
+          <a:prstGeom prst="roundRect">
+            <a:avLst/>
+          </a:prstGeom>
+          <a:solidFill>
+            <a:srgbClr val="161B22"/>
+          </a:solidFill>
+          <a:ln w="12700">
+            <a:solidFill>
+              <a:srgbClr val="30363D"/>
+            </a:solidFill>
+          </a:ln>
+          <a:effectLst/>
+        </p:spPr>
+        <p:style>
+          <a:lnRef idx="1">
+            <a:schemeClr val="accent1"/>
+          </a:lnRef>
+          <a:fillRef idx="3">
+            <a:schemeClr val="accent1"/>
+          </a:fillRef>
+          <a:effectRef idx="2">
+            <a:schemeClr val="accent1"/>
+          </a:effectRef>
+          <a:fontRef idx="minor">
+            <a:schemeClr val="lt1"/>
+          </a:fontRef>
+        </p:style>
+        <p:txBody>
+          <a:bodyPr rtlCol="0" anchor="ctr"/>
+          <a:lstStyle/>
+          <a:p>
+            <a:pPr algn="ctr"/>
+          </a:p>
+        </p:txBody>
+      </p:sp>
+      <p:sp>
+        <p:nvSpPr>
+          <p:cNvPr id="32" name="TextBox 31"/>
+          <p:cNvSpPr txBox="1"/>
+          <p:nvPr/>
+        </p:nvSpPr>
+        <p:spPr>
+          <a:xfrm>
+            <a:off x="7705191" y="3364992"/>
+            <a:ext cx="2167128" cy="384048"/>
+          </a:xfrm>
+          <a:prstGeom prst="rect">
+            <a:avLst/>
+          </a:prstGeom>
+          <a:noFill/>
+        </p:spPr>
+        <p:txBody>
+          <a:bodyPr wrap="square" anchor="ctr" lIns="0" rIns="0" tIns="0" bIns="0">
+            <a:spAutoFit/>
+          </a:bodyPr>
+          <a:lstStyle/>
+          <a:p>
+            <a:pPr algn="ctr">
+              <a:lnSpc>
+                <a:spcPct val="100000"/>
+              </a:lnSpc>
+              <a:spcBef>
+                <a:spcPts val="0"/>
+              </a:spcBef>
+              <a:spcAft>
+                <a:spcPts val="200"/>
+              </a:spcAft>
+            </a:pPr>
+            <a:r>
+              <a:rPr sz="1100" b="1">
+                <a:solidFill>
+                  <a:srgbClr val="3FB950"/>
+                </a:solidFill>
+                <a:latin typeface="Consolas"/>
+              </a:rPr>
+              <a:t>72 ns · 13.9 Mpps</a:t>
+            </a:r>
+          </a:p>
+        </p:txBody>
+      </p:sp>
+      <p:sp>
+        <p:nvSpPr>
+          <p:cNvPr id="33" name="Rounded Rectangle 32"/>
+          <p:cNvSpPr/>
+          <p:nvPr/>
+        </p:nvSpPr>
+        <p:spPr>
+          <a:xfrm>
+            <a:off x="640080" y="3840480"/>
+            <a:ext cx="10927080" cy="2286000"/>
           </a:xfrm>
           <a:prstGeom prst="roundRect">
             <a:avLst/>
@@ -16834,14 +18618,14 @@
       </p:sp>
       <p:sp>
         <p:nvSpPr>
-          <p:cNvPr id="21" name="TextBox 20"/>
+          <p:cNvPr id="34" name="TextBox 33"/>
           <p:cNvSpPr txBox="1"/>
           <p:nvPr/>
         </p:nvSpPr>
         <p:spPr>
           <a:xfrm>
-            <a:off x="896112" y="3995928"/>
-            <a:ext cx="10469880" cy="1965960"/>
+            <a:off x="896112" y="4041648"/>
+            <a:ext cx="10469880" cy="1920240"/>
           </a:xfrm>
           <a:prstGeom prst="rect">
             <a:avLst/>
@@ -18070,14 +19854,58 @@
       </p:sp>
       <p:sp>
         <p:nvSpPr>
-          <p:cNvPr id="7" name="TextBox 6"/>
+          <p:cNvPr id="7" name="Rounded Rectangle 6"/>
+          <p:cNvSpPr/>
+          <p:nvPr/>
+        </p:nvSpPr>
+        <p:spPr>
+          <a:xfrm>
+            <a:off x="731519" y="2194560"/>
+            <a:ext cx="1691640" cy="64008"/>
+          </a:xfrm>
+          <a:prstGeom prst="roundRect">
+            <a:avLst/>
+          </a:prstGeom>
+          <a:solidFill>
+            <a:srgbClr val="58A6FF"/>
+          </a:solidFill>
+          <a:ln>
+            <a:noFill/>
+          </a:ln>
+          <a:effectLst/>
+        </p:spPr>
+        <p:style>
+          <a:lnRef idx="1">
+            <a:schemeClr val="accent1"/>
+          </a:lnRef>
+          <a:fillRef idx="3">
+            <a:schemeClr val="accent1"/>
+          </a:fillRef>
+          <a:effectRef idx="2">
+            <a:schemeClr val="accent1"/>
+          </a:effectRef>
+          <a:fontRef idx="minor">
+            <a:schemeClr val="lt1"/>
+          </a:fontRef>
+        </p:style>
+        <p:txBody>
+          <a:bodyPr rtlCol="0" anchor="ctr"/>
+          <a:lstStyle/>
+          <a:p>
+            <a:pPr algn="ctr"/>
+          </a:p>
+        </p:txBody>
+      </p:sp>
+      <p:sp>
+        <p:nvSpPr>
+          <p:cNvPr id="8" name="TextBox 7"/>
           <p:cNvSpPr txBox="1"/>
           <p:nvPr/>
         </p:nvSpPr>
         <p:spPr>
           <a:xfrm>
-            <a:off x="713231" y="2148840"/>
-            <a:ext cx="1728216" cy="1051560"/>
+            <a:off x="713231" y="2203704"/>
+            <a:ext cx="1728216" cy="996695"/>
           </a:xfrm>
           <a:prstGeom prst="rect">
             <a:avLst/>
@@ -18115,7 +19943,7 @@
       </p:sp>
       <p:sp>
         <p:nvSpPr>
-          <p:cNvPr id="8" name="TextBox 7"/>
+          <p:cNvPr id="9" name="TextBox 8"/>
           <p:cNvSpPr txBox="1"/>
           <p:nvPr/>
         </p:nvSpPr>
@@ -18160,7 +19988,7 @@
       </p:sp>
       <p:sp>
         <p:nvSpPr>
-          <p:cNvPr id="9" name="Rounded Rectangle 8"/>
+          <p:cNvPr id="10" name="Rounded Rectangle 9"/>
           <p:cNvSpPr/>
           <p:nvPr/>
         </p:nvSpPr>
@@ -18206,14 +20034,58 @@
       </p:sp>
       <p:sp>
         <p:nvSpPr>
-          <p:cNvPr id="10" name="TextBox 9"/>
+          <p:cNvPr id="11" name="Rounded Rectangle 10"/>
+          <p:cNvSpPr/>
+          <p:nvPr/>
+        </p:nvSpPr>
+        <p:spPr>
+          <a:xfrm>
+            <a:off x="2990088" y="2194560"/>
+            <a:ext cx="1691640" cy="64008"/>
+          </a:xfrm>
+          <a:prstGeom prst="roundRect">
+            <a:avLst/>
+          </a:prstGeom>
+          <a:solidFill>
+            <a:srgbClr val="E6EDF3"/>
+          </a:solidFill>
+          <a:ln>
+            <a:noFill/>
+          </a:ln>
+          <a:effectLst/>
+        </p:spPr>
+        <p:style>
+          <a:lnRef idx="1">
+            <a:schemeClr val="accent1"/>
+          </a:lnRef>
+          <a:fillRef idx="3">
+            <a:schemeClr val="accent1"/>
+          </a:fillRef>
+          <a:effectRef idx="2">
+            <a:schemeClr val="accent1"/>
+          </a:effectRef>
+          <a:fontRef idx="minor">
+            <a:schemeClr val="lt1"/>
+          </a:fontRef>
+        </p:style>
+        <p:txBody>
+          <a:bodyPr rtlCol="0" anchor="ctr"/>
+          <a:lstStyle/>
+          <a:p>
+            <a:pPr algn="ctr"/>
+          </a:p>
+        </p:txBody>
+      </p:sp>
+      <p:sp>
+        <p:nvSpPr>
+          <p:cNvPr id="12" name="TextBox 11"/>
           <p:cNvSpPr txBox="1"/>
           <p:nvPr/>
         </p:nvSpPr>
         <p:spPr>
           <a:xfrm>
-            <a:off x="2971800" y="2148840"/>
-            <a:ext cx="1728216" cy="1051560"/>
+            <a:off x="2971800" y="2203704"/>
+            <a:ext cx="1728216" cy="996695"/>
           </a:xfrm>
           <a:prstGeom prst="rect">
             <a:avLst/>
@@ -18273,7 +20145,7 @@
       </p:sp>
       <p:sp>
         <p:nvSpPr>
-          <p:cNvPr id="11" name="TextBox 10"/>
+          <p:cNvPr id="13" name="TextBox 12"/>
           <p:cNvSpPr txBox="1"/>
           <p:nvPr/>
         </p:nvSpPr>
@@ -18318,7 +20190,7 @@
       </p:sp>
       <p:sp>
         <p:nvSpPr>
-          <p:cNvPr id="12" name="Rounded Rectangle 11"/>
+          <p:cNvPr id="14" name="Rounded Rectangle 13"/>
           <p:cNvSpPr/>
           <p:nvPr/>
         </p:nvSpPr>
@@ -18364,14 +20236,58 @@
       </p:sp>
       <p:sp>
         <p:nvSpPr>
-          <p:cNvPr id="13" name="TextBox 12"/>
+          <p:cNvPr id="15" name="Rounded Rectangle 14"/>
+          <p:cNvSpPr/>
+          <p:nvPr/>
+        </p:nvSpPr>
+        <p:spPr>
+          <a:xfrm>
+            <a:off x="5248656" y="2194560"/>
+            <a:ext cx="1691640" cy="64008"/>
+          </a:xfrm>
+          <a:prstGeom prst="roundRect">
+            <a:avLst/>
+          </a:prstGeom>
+          <a:solidFill>
+            <a:srgbClr val="F5A623"/>
+          </a:solidFill>
+          <a:ln>
+            <a:noFill/>
+          </a:ln>
+          <a:effectLst/>
+        </p:spPr>
+        <p:style>
+          <a:lnRef idx="1">
+            <a:schemeClr val="accent1"/>
+          </a:lnRef>
+          <a:fillRef idx="3">
+            <a:schemeClr val="accent1"/>
+          </a:fillRef>
+          <a:effectRef idx="2">
+            <a:schemeClr val="accent1"/>
+          </a:effectRef>
+          <a:fontRef idx="minor">
+            <a:schemeClr val="lt1"/>
+          </a:fontRef>
+        </p:style>
+        <p:txBody>
+          <a:bodyPr rtlCol="0" anchor="ctr"/>
+          <a:lstStyle/>
+          <a:p>
+            <a:pPr algn="ctr"/>
+          </a:p>
+        </p:txBody>
+      </p:sp>
+      <p:sp>
+        <p:nvSpPr>
+          <p:cNvPr id="16" name="TextBox 15"/>
           <p:cNvSpPr txBox="1"/>
           <p:nvPr/>
         </p:nvSpPr>
         <p:spPr>
           <a:xfrm>
-            <a:off x="5230368" y="2148840"/>
-            <a:ext cx="1728216" cy="1051560"/>
+            <a:off x="5230368" y="2203704"/>
+            <a:ext cx="1728216" cy="996695"/>
           </a:xfrm>
           <a:prstGeom prst="rect">
             <a:avLst/>
@@ -18431,7 +20347,7 @@
       </p:sp>
       <p:sp>
         <p:nvSpPr>
-          <p:cNvPr id="14" name="TextBox 13"/>
+          <p:cNvPr id="17" name="TextBox 16"/>
           <p:cNvSpPr txBox="1"/>
           <p:nvPr/>
         </p:nvSpPr>
@@ -18476,7 +20392,7 @@
       </p:sp>
       <p:sp>
         <p:nvSpPr>
-          <p:cNvPr id="15" name="Rounded Rectangle 14"/>
+          <p:cNvPr id="18" name="Rounded Rectangle 17"/>
           <p:cNvSpPr/>
           <p:nvPr/>
         </p:nvSpPr>
@@ -18522,14 +20438,58 @@
       </p:sp>
       <p:sp>
         <p:nvSpPr>
-          <p:cNvPr id="16" name="TextBox 15"/>
+          <p:cNvPr id="19" name="Rounded Rectangle 18"/>
+          <p:cNvSpPr/>
+          <p:nvPr/>
+        </p:nvSpPr>
+        <p:spPr>
+          <a:xfrm>
+            <a:off x="7507224" y="2194560"/>
+            <a:ext cx="1691640" cy="64008"/>
+          </a:xfrm>
+          <a:prstGeom prst="roundRect">
+            <a:avLst/>
+          </a:prstGeom>
+          <a:solidFill>
+            <a:srgbClr val="F5A623"/>
+          </a:solidFill>
+          <a:ln>
+            <a:noFill/>
+          </a:ln>
+          <a:effectLst/>
+        </p:spPr>
+        <p:style>
+          <a:lnRef idx="1">
+            <a:schemeClr val="accent1"/>
+          </a:lnRef>
+          <a:fillRef idx="3">
+            <a:schemeClr val="accent1"/>
+          </a:fillRef>
+          <a:effectRef idx="2">
+            <a:schemeClr val="accent1"/>
+          </a:effectRef>
+          <a:fontRef idx="minor">
+            <a:schemeClr val="lt1"/>
+          </a:fontRef>
+        </p:style>
+        <p:txBody>
+          <a:bodyPr rtlCol="0" anchor="ctr"/>
+          <a:lstStyle/>
+          <a:p>
+            <a:pPr algn="ctr"/>
+          </a:p>
+        </p:txBody>
+      </p:sp>
+      <p:sp>
+        <p:nvSpPr>
+          <p:cNvPr id="20" name="TextBox 19"/>
           <p:cNvSpPr txBox="1"/>
           <p:nvPr/>
         </p:nvSpPr>
         <p:spPr>
           <a:xfrm>
-            <a:off x="7488936" y="2148840"/>
-            <a:ext cx="1728216" cy="1051560"/>
+            <a:off x="7488936" y="2203704"/>
+            <a:ext cx="1728216" cy="996695"/>
           </a:xfrm>
           <a:prstGeom prst="rect">
             <a:avLst/>
@@ -18589,7 +20549,7 @@
       </p:sp>
       <p:sp>
         <p:nvSpPr>
-          <p:cNvPr id="17" name="TextBox 16"/>
+          <p:cNvPr id="21" name="TextBox 20"/>
           <p:cNvSpPr txBox="1"/>
           <p:nvPr/>
         </p:nvSpPr>
@@ -18634,7 +20594,7 @@
       </p:sp>
       <p:sp>
         <p:nvSpPr>
-          <p:cNvPr id="18" name="Rounded Rectangle 17"/>
+          <p:cNvPr id="22" name="Rounded Rectangle 21"/>
           <p:cNvSpPr/>
           <p:nvPr/>
         </p:nvSpPr>
@@ -18680,14 +20640,58 @@
       </p:sp>
       <p:sp>
         <p:nvSpPr>
-          <p:cNvPr id="19" name="TextBox 18"/>
+          <p:cNvPr id="23" name="Rounded Rectangle 22"/>
+          <p:cNvSpPr/>
+          <p:nvPr/>
+        </p:nvSpPr>
+        <p:spPr>
+          <a:xfrm>
+            <a:off x="9765792" y="2194560"/>
+            <a:ext cx="1691640" cy="64008"/>
+          </a:xfrm>
+          <a:prstGeom prst="roundRect">
+            <a:avLst/>
+          </a:prstGeom>
+          <a:solidFill>
+            <a:srgbClr val="3FD0C8"/>
+          </a:solidFill>
+          <a:ln>
+            <a:noFill/>
+          </a:ln>
+          <a:effectLst/>
+        </p:spPr>
+        <p:style>
+          <a:lnRef idx="1">
+            <a:schemeClr val="accent1"/>
+          </a:lnRef>
+          <a:fillRef idx="3">
+            <a:schemeClr val="accent1"/>
+          </a:fillRef>
+          <a:effectRef idx="2">
+            <a:schemeClr val="accent1"/>
+          </a:effectRef>
+          <a:fontRef idx="minor">
+            <a:schemeClr val="lt1"/>
+          </a:fontRef>
+        </p:style>
+        <p:txBody>
+          <a:bodyPr rtlCol="0" anchor="ctr"/>
+          <a:lstStyle/>
+          <a:p>
+            <a:pPr algn="ctr"/>
+          </a:p>
+        </p:txBody>
+      </p:sp>
+      <p:sp>
+        <p:nvSpPr>
+          <p:cNvPr id="24" name="TextBox 23"/>
           <p:cNvSpPr txBox="1"/>
           <p:nvPr/>
         </p:nvSpPr>
         <p:spPr>
           <a:xfrm>
-            <a:off x="9747504" y="2148840"/>
-            <a:ext cx="1728216" cy="1051560"/>
+            <a:off x="9747504" y="2203704"/>
+            <a:ext cx="1728216" cy="996695"/>
           </a:xfrm>
           <a:prstGeom prst="rect">
             <a:avLst/>
@@ -18747,14 +20751,378 @@
       </p:sp>
       <p:sp>
         <p:nvSpPr>
-          <p:cNvPr id="20" name="Rounded Rectangle 19"/>
+          <p:cNvPr id="25" name="Rounded Rectangle 24"/>
           <p:cNvSpPr/>
           <p:nvPr/>
         </p:nvSpPr>
         <p:spPr>
           <a:xfrm>
-            <a:off x="640080" y="3794760"/>
-            <a:ext cx="10927080" cy="2331720"/>
+            <a:off x="2017623" y="3364992"/>
+            <a:ext cx="1563624" cy="384048"/>
+          </a:xfrm>
+          <a:prstGeom prst="roundRect">
+            <a:avLst/>
+          </a:prstGeom>
+          <a:solidFill>
+            <a:srgbClr val="161B22"/>
+          </a:solidFill>
+          <a:ln w="12700">
+            <a:solidFill>
+              <a:srgbClr val="30363D"/>
+            </a:solidFill>
+          </a:ln>
+          <a:effectLst/>
+        </p:spPr>
+        <p:style>
+          <a:lnRef idx="1">
+            <a:schemeClr val="accent1"/>
+          </a:lnRef>
+          <a:fillRef idx="3">
+            <a:schemeClr val="accent1"/>
+          </a:fillRef>
+          <a:effectRef idx="2">
+            <a:schemeClr val="accent1"/>
+          </a:effectRef>
+          <a:fontRef idx="minor">
+            <a:schemeClr val="lt1"/>
+          </a:fontRef>
+        </p:style>
+        <p:txBody>
+          <a:bodyPr rtlCol="0" anchor="ctr"/>
+          <a:lstStyle/>
+          <a:p>
+            <a:pPr algn="ctr"/>
+          </a:p>
+        </p:txBody>
+      </p:sp>
+      <p:sp>
+        <p:nvSpPr>
+          <p:cNvPr id="26" name="TextBox 25"/>
+          <p:cNvSpPr txBox="1"/>
+          <p:nvPr/>
+        </p:nvSpPr>
+        <p:spPr>
+          <a:xfrm>
+            <a:off x="2017623" y="3364992"/>
+            <a:ext cx="1563624" cy="384048"/>
+          </a:xfrm>
+          <a:prstGeom prst="rect">
+            <a:avLst/>
+          </a:prstGeom>
+          <a:noFill/>
+        </p:spPr>
+        <p:txBody>
+          <a:bodyPr wrap="square" anchor="ctr" lIns="0" rIns="0" tIns="0" bIns="0">
+            <a:spAutoFit/>
+          </a:bodyPr>
+          <a:lstStyle/>
+          <a:p>
+            <a:pPr algn="ctr">
+              <a:lnSpc>
+                <a:spcPct val="100000"/>
+              </a:lnSpc>
+              <a:spcBef>
+                <a:spcPts val="0"/>
+              </a:spcBef>
+              <a:spcAft>
+                <a:spcPts val="200"/>
+              </a:spcAft>
+            </a:pPr>
+            <a:r>
+              <a:rPr sz="1100" b="1">
+                <a:solidFill>
+                  <a:srgbClr val="F5A623"/>
+                </a:solidFill>
+                <a:latin typeface="Consolas"/>
+              </a:rPr>
+              <a:t>1 tail call</a:t>
+            </a:r>
+          </a:p>
+        </p:txBody>
+      </p:sp>
+      <p:sp>
+        <p:nvSpPr>
+          <p:cNvPr id="27" name="Rounded Rectangle 26"/>
+          <p:cNvSpPr/>
+          <p:nvPr/>
+        </p:nvSpPr>
+        <p:spPr>
+          <a:xfrm>
+            <a:off x="3745839" y="3364992"/>
+            <a:ext cx="2167128" cy="384048"/>
+          </a:xfrm>
+          <a:prstGeom prst="roundRect">
+            <a:avLst/>
+          </a:prstGeom>
+          <a:solidFill>
+            <a:srgbClr val="161B22"/>
+          </a:solidFill>
+          <a:ln w="12700">
+            <a:solidFill>
+              <a:srgbClr val="30363D"/>
+            </a:solidFill>
+          </a:ln>
+          <a:effectLst/>
+        </p:spPr>
+        <p:style>
+          <a:lnRef idx="1">
+            <a:schemeClr val="accent1"/>
+          </a:lnRef>
+          <a:fillRef idx="3">
+            <a:schemeClr val="accent1"/>
+          </a:fillRef>
+          <a:effectRef idx="2">
+            <a:schemeClr val="accent1"/>
+          </a:effectRef>
+          <a:fontRef idx="minor">
+            <a:schemeClr val="lt1"/>
+          </a:fontRef>
+        </p:style>
+        <p:txBody>
+          <a:bodyPr rtlCol="0" anchor="ctr"/>
+          <a:lstStyle/>
+          <a:p>
+            <a:pPr algn="ctr"/>
+          </a:p>
+        </p:txBody>
+      </p:sp>
+      <p:sp>
+        <p:nvSpPr>
+          <p:cNvPr id="28" name="TextBox 27"/>
+          <p:cNvSpPr txBox="1"/>
+          <p:nvPr/>
+        </p:nvSpPr>
+        <p:spPr>
+          <a:xfrm>
+            <a:off x="3745839" y="3364992"/>
+            <a:ext cx="2167128" cy="384048"/>
+          </a:xfrm>
+          <a:prstGeom prst="rect">
+            <a:avLst/>
+          </a:prstGeom>
+          <a:noFill/>
+        </p:spPr>
+        <p:txBody>
+          <a:bodyPr wrap="square" anchor="ctr" lIns="0" rIns="0" tIns="0" bIns="0">
+            <a:spAutoFit/>
+          </a:bodyPr>
+          <a:lstStyle/>
+          <a:p>
+            <a:pPr algn="ctr">
+              <a:lnSpc>
+                <a:spcPct val="100000"/>
+              </a:lnSpc>
+              <a:spcBef>
+                <a:spcPts val="0"/>
+              </a:spcBef>
+              <a:spcAft>
+                <a:spcPts val="200"/>
+              </a:spcAft>
+            </a:pPr>
+            <a:r>
+              <a:rPr sz="1100" b="1">
+                <a:solidFill>
+                  <a:srgbClr val="E6EDF3"/>
+                </a:solidFill>
+                <a:latin typeface="Consolas"/>
+              </a:rPr>
+              <a:t>~322 lookup / pkt</a:t>
+            </a:r>
+          </a:p>
+        </p:txBody>
+      </p:sp>
+      <p:sp>
+        <p:nvSpPr>
+          <p:cNvPr id="29" name="Rounded Rectangle 28"/>
+          <p:cNvSpPr/>
+          <p:nvPr/>
+        </p:nvSpPr>
+        <p:spPr>
+          <a:xfrm>
+            <a:off x="6077559" y="3364992"/>
+            <a:ext cx="1764792" cy="384048"/>
+          </a:xfrm>
+          <a:prstGeom prst="roundRect">
+            <a:avLst/>
+          </a:prstGeom>
+          <a:solidFill>
+            <a:srgbClr val="161B22"/>
+          </a:solidFill>
+          <a:ln w="12700">
+            <a:solidFill>
+              <a:srgbClr val="30363D"/>
+            </a:solidFill>
+          </a:ln>
+          <a:effectLst/>
+        </p:spPr>
+        <p:style>
+          <a:lnRef idx="1">
+            <a:schemeClr val="accent1"/>
+          </a:lnRef>
+          <a:fillRef idx="3">
+            <a:schemeClr val="accent1"/>
+          </a:fillRef>
+          <a:effectRef idx="2">
+            <a:schemeClr val="accent1"/>
+          </a:effectRef>
+          <a:fontRef idx="minor">
+            <a:schemeClr val="lt1"/>
+          </a:fontRef>
+        </p:style>
+        <p:txBody>
+          <a:bodyPr rtlCol="0" anchor="ctr"/>
+          <a:lstStyle/>
+          <a:p>
+            <a:pPr algn="ctr"/>
+          </a:p>
+        </p:txBody>
+      </p:sp>
+      <p:sp>
+        <p:nvSpPr>
+          <p:cNvPr id="30" name="TextBox 29"/>
+          <p:cNvSpPr txBox="1"/>
+          <p:nvPr/>
+        </p:nvSpPr>
+        <p:spPr>
+          <a:xfrm>
+            <a:off x="6077559" y="3364992"/>
+            <a:ext cx="1764792" cy="384048"/>
+          </a:xfrm>
+          <a:prstGeom prst="rect">
+            <a:avLst/>
+          </a:prstGeom>
+          <a:noFill/>
+        </p:spPr>
+        <p:txBody>
+          <a:bodyPr wrap="square" anchor="ctr" lIns="0" rIns="0" tIns="0" bIns="0">
+            <a:spAutoFit/>
+          </a:bodyPr>
+          <a:lstStyle/>
+          <a:p>
+            <a:pPr algn="ctr">
+              <a:lnSpc>
+                <a:spcPct val="100000"/>
+              </a:lnSpc>
+              <a:spcBef>
+                <a:spcPts val="0"/>
+              </a:spcBef>
+              <a:spcAft>
+                <a:spcPts val="200"/>
+              </a:spcAft>
+            </a:pPr>
+            <a:r>
+              <a:rPr sz="1100" b="1">
+                <a:solidFill>
+                  <a:srgbClr val="E6EDF3"/>
+                </a:solidFill>
+                <a:latin typeface="Consolas"/>
+              </a:rPr>
+              <a:t>15.8 KB mappe</a:t>
+            </a:r>
+          </a:p>
+        </p:txBody>
+      </p:sp>
+      <p:sp>
+        <p:nvSpPr>
+          <p:cNvPr id="31" name="Rounded Rectangle 30"/>
+          <p:cNvSpPr/>
+          <p:nvPr/>
+        </p:nvSpPr>
+        <p:spPr>
+          <a:xfrm>
+            <a:off x="8006943" y="3364992"/>
+            <a:ext cx="2167128" cy="384048"/>
+          </a:xfrm>
+          <a:prstGeom prst="roundRect">
+            <a:avLst/>
+          </a:prstGeom>
+          <a:solidFill>
+            <a:srgbClr val="161B22"/>
+          </a:solidFill>
+          <a:ln w="12700">
+            <a:solidFill>
+              <a:srgbClr val="30363D"/>
+            </a:solidFill>
+          </a:ln>
+          <a:effectLst/>
+        </p:spPr>
+        <p:style>
+          <a:lnRef idx="1">
+            <a:schemeClr val="accent1"/>
+          </a:lnRef>
+          <a:fillRef idx="3">
+            <a:schemeClr val="accent1"/>
+          </a:fillRef>
+          <a:effectRef idx="2">
+            <a:schemeClr val="accent1"/>
+          </a:effectRef>
+          <a:fontRef idx="minor">
+            <a:schemeClr val="lt1"/>
+          </a:fontRef>
+        </p:style>
+        <p:txBody>
+          <a:bodyPr rtlCol="0" anchor="ctr"/>
+          <a:lstStyle/>
+          <a:p>
+            <a:pPr algn="ctr"/>
+          </a:p>
+        </p:txBody>
+      </p:sp>
+      <p:sp>
+        <p:nvSpPr>
+          <p:cNvPr id="32" name="TextBox 31"/>
+          <p:cNvSpPr txBox="1"/>
+          <p:nvPr/>
+        </p:nvSpPr>
+        <p:spPr>
+          <a:xfrm>
+            <a:off x="8006943" y="3364992"/>
+            <a:ext cx="2167128" cy="384048"/>
+          </a:xfrm>
+          <a:prstGeom prst="rect">
+            <a:avLst/>
+          </a:prstGeom>
+          <a:noFill/>
+        </p:spPr>
+        <p:txBody>
+          <a:bodyPr wrap="square" anchor="ctr" lIns="0" rIns="0" tIns="0" bIns="0">
+            <a:spAutoFit/>
+          </a:bodyPr>
+          <a:lstStyle/>
+          <a:p>
+            <a:pPr algn="ctr">
+              <a:lnSpc>
+                <a:spcPct val="100000"/>
+              </a:lnSpc>
+              <a:spcBef>
+                <a:spcPts val="0"/>
+              </a:spcBef>
+              <a:spcAft>
+                <a:spcPts val="200"/>
+              </a:spcAft>
+            </a:pPr>
+            <a:r>
+              <a:rPr sz="1100" b="1">
+                <a:solidFill>
+                  <a:srgbClr val="F5A623"/>
+                </a:solidFill>
+                <a:latin typeface="Consolas"/>
+              </a:rPr>
+              <a:t>287 ns · 3.5 Mpps</a:t>
+            </a:r>
+          </a:p>
+        </p:txBody>
+      </p:sp>
+      <p:sp>
+        <p:nvSpPr>
+          <p:cNvPr id="33" name="Rounded Rectangle 32"/>
+          <p:cNvSpPr/>
+          <p:nvPr/>
+        </p:nvSpPr>
+        <p:spPr>
+          <a:xfrm>
+            <a:off x="640080" y="3840480"/>
+            <a:ext cx="10927080" cy="2286000"/>
           </a:xfrm>
           <a:prstGeom prst="roundRect">
             <a:avLst/>
@@ -18793,14 +21161,14 @@
       </p:sp>
       <p:sp>
         <p:nvSpPr>
-          <p:cNvPr id="21" name="TextBox 20"/>
+          <p:cNvPr id="34" name="TextBox 33"/>
           <p:cNvSpPr txBox="1"/>
           <p:nvPr/>
         </p:nvSpPr>
         <p:spPr>
           <a:xfrm>
-            <a:off x="896112" y="3995928"/>
-            <a:ext cx="10469880" cy="1965960"/>
+            <a:off x="896112" y="4041648"/>
+            <a:ext cx="10469880" cy="1920240"/>
           </a:xfrm>
           <a:prstGeom prst="rect">
             <a:avLst/>

--- a/docs/IPA_eBPF_pipelines.pptx
+++ b/docs/IPA_eBPF_pipelines.pptx
@@ -5352,7 +5352,7 @@
                 </a:solidFill>
                 <a:latin typeface="Segoe UI"/>
               </a:rPr>
-              <a:t>3 tail call reali per pacchetto; l'ultimo blocco calcola argmax → key → fwd_table → bpf_redirect.</a:t>
+              <a:t>3 tail call reali per pacchetto; l'ultimo blocco calcola argmax → mac_table[classe] → bpf_redirect.</a:t>
             </a:r>
           </a:p>
           <a:p>
@@ -6369,7 +6369,7 @@
                 </a:solidFill>
                 <a:latin typeface="Segoe UI"/>
               </a:rPr>
-              <a:t>Chiave di forwarding e redirect — comune alle tre pipeline</a:t>
+              <a:t>La NN decide la porta; mac_table risolve il next-hop — comune alle tre pipeline</a:t>
             </a:r>
           </a:p>
         </p:txBody>
@@ -6526,7 +6526,7 @@
                 </a:solidFill>
                 <a:latin typeface="Segoe UI"/>
               </a:rPr>
-              <a:t>best_val</a:t>
+              <a:t>best_cls</a:t>
             </a:r>
           </a:p>
         </p:txBody>
@@ -6706,7 +6706,7 @@
                 </a:solidFill>
                 <a:latin typeface="Consolas"/>
               </a:rPr>
-              <a:t>key</a:t>
+              <a:t>classe 0..5</a:t>
             </a:r>
           </a:p>
           <a:p>
@@ -6728,7 +6728,7 @@
                 </a:solidFill>
                 <a:latin typeface="Segoe UI"/>
               </a:rPr>
-              <a:t>(val + OFF·scale)/scale</a:t>
+              <a:t>porta / DROP</a:t>
             </a:r>
           </a:p>
         </p:txBody>
@@ -6908,7 +6908,7 @@
                 </a:solidFill>
                 <a:latin typeface="Consolas"/>
               </a:rPr>
-              <a:t>fwd_table[key]</a:t>
+              <a:t>mac_table[cls]</a:t>
             </a:r>
           </a:p>
           <a:p>
@@ -6930,7 +6930,7 @@
                 </a:solidFill>
                 <a:latin typeface="Segoe UI"/>
               </a:rPr>
-              <a:t>lookup</a:t>
+              <a:t>ifindex + MAC</a:t>
             </a:r>
           </a:p>
         </p:txBody>
@@ -7425,7 +7425,7 @@
                 </a:solidFill>
                 <a:latin typeface="Segoe UI"/>
               </a:rPr>
-              <a:t>Chiave</a:t>
+              <a:t>La NN decide</a:t>
             </a:r>
           </a:p>
           <a:p>
@@ -7456,7 +7456,7 @@
                 </a:solidFill>
                 <a:latin typeface="Segoe UI"/>
               </a:rPr>
-              <a:t>key = (best_val + OFFSET·scale) / scale (divisione unsigned).</a:t>
+              <a:t>argmax sui 7 output → classe = porta di uscita (cls 6 = DROP).</a:t>
             </a:r>
           </a:p>
           <a:p>
@@ -7487,7 +7487,7 @@
                 </a:solidFill>
                 <a:latin typeface="Segoe UI"/>
               </a:rPr>
-              <a:t>OFFSET mantiene il numeratore positivo (BPF non ha divisione signed 64-bit).</a:t>
+              <a:t>Nessun calcolo di chiave, nessuna validazione dell'output.</a:t>
             </a:r>
           </a:p>
           <a:p>
@@ -7518,7 +7518,7 @@
                 </a:solidFill>
                 <a:latin typeface="Segoe UI"/>
               </a:rPr>
-              <a:t>La stessa formula in P1/P2/P3 rende le tre pipeline confrontabili.</a:t>
+              <a:t>Ci si fida della decisione del modello (è il paradigma IPA).</a:t>
             </a:r>
           </a:p>
         </p:txBody>
@@ -7609,7 +7609,7 @@
                 </a:solidFill>
                 <a:latin typeface="Segoe UI"/>
               </a:rPr>
-              <a:t>Azione</a:t>
+              <a:t>mac_table = dizionario porte</a:t>
             </a:r>
           </a:p>
           <a:p>
@@ -7640,7 +7640,7 @@
                 </a:solidFill>
                 <a:latin typeface="Segoe UI"/>
               </a:rPr>
-              <a:t>HIT: fwd_table[key] trovata e TTL coerente → riscrive MAC → bpf_redirect.</a:t>
+              <a:t>mac_table[classe] → {ifindex, src_mac, dst_mac}: single lookup.</a:t>
             </a:r>
           </a:p>
           <a:p>
@@ -7671,7 +7671,7 @@
                 </a:solidFill>
                 <a:latin typeface="Segoe UI"/>
               </a:rPr>
-              <a:t>FAKE: key presente ma TTL sbagliato → evento verso il control plane.</a:t>
+              <a:t>Riscrive gli header Ethernet e fa bpf_redirect.</a:t>
             </a:r>
           </a:p>
           <a:p>
@@ -7702,7 +7702,7 @@
                 </a:solidFill>
                 <a:latin typeface="Segoe UI"/>
               </a:rPr>
-              <a:t>MISS: nessuna regola → XDP_PASS.</a:t>
+              <a:t>P1: mappa hardcoded in uno switch (0 lookup). P2/P3: mac_table.</a:t>
             </a:r>
           </a:p>
         </p:txBody>
@@ -8006,7 +8006,7 @@
                 </a:solidFill>
                 <a:latin typeface="Segoe UI"/>
               </a:rPr>
-              <a:t>Per P2/P3 la verifica è </a:t>
+              <a:t>Verifica </a:t>
             </a:r>
             <a:r>
               <a:rPr sz="1400" b="1">
@@ -8015,7 +8015,7 @@
                 </a:solidFill>
                 <a:latin typeface="Segoe UI"/>
               </a:rPr>
-              <a:t>a due passate</a:t>
+              <a:t>single-pass e uniforme</a:t>
             </a:r>
             <a:r>
               <a:rPr sz="1400" b="0">
@@ -8024,7 +8024,7 @@
                 </a:solidFill>
                 <a:latin typeface="Segoe UI"/>
               </a:rPr>
-              <a:t>: si cattura la chiave di forwarding emessa dal kernel, la si installa in fwd_table, si ri-esegue e si controlla che il redirect scatti. </a:t>
+              <a:t> sulle 3 pipeline: pre-installa mac_table[0..5], esegue una volta e controlla che la classe scelta dal kernel = classe del riferimento Python. </a:t>
             </a:r>
           </a:p>
           <a:p>
@@ -8046,7 +8046,7 @@
                 </a:solidFill>
                 <a:latin typeface="Segoe UI"/>
               </a:rPr>
-              <a:t>La baseline usa link_state seed a tutti-up, coerente con il modello di riferimento in Python. </a:t>
+              <a:t>Un xdp_md azzerato come contesto pin-a ingress_ifindex=0 (risolve il vecchio drift del template). </a:t>
             </a:r>
           </a:p>
           <a:p>
@@ -8068,7 +8068,7 @@
                 </a:solidFill>
                 <a:latin typeface="Segoe UI"/>
               </a:rPr>
-              <a:t>Criterio di PASS: retval ∈ {0,4} (redirect) e pkt_stats[HIT] &gt; 0.</a:t>
+              <a:t>Criterio di PASS: retval ∈ {0,4} (redirect) e cls_stats[ref_cls] &gt; 0.</a:t>
             </a:r>
           </a:p>
         </p:txBody>
@@ -9499,7 +9499,7 @@
                 </a:solidFill>
                 <a:latin typeface="Segoe UI"/>
               </a:rPr>
-              <a:t>P1 è sceso da 1109 a 72 ns rimuovendo 3 bpf_trace_printk per pacchetto (assenti in P2/P3) che falsavano il baseline. L'inferenza è identica nelle 3 (chiave kernel = riferimento Python); differisce solo il design. Ordine coerente con la tassonomia.</a:t>
+              <a:t>P1 è sceso da 1109 a 72 ns rimuovendo 3 bpf_trace_printk per pacchetto (assenti in P2/P3) che falsavano il baseline. L'inferenza è identica nelle 3 (classe kernel = riferimento Python); differisce solo il design. Ordine coerente con la tassonomia.</a:t>
             </a:r>
           </a:p>
         </p:txBody>

--- a/docs/IPA_eBPF_pipelines.pptx
+++ b/docs/IPA_eBPF_pipelines.pptx
@@ -4786,7 +4786,7 @@
         </p:nvSpPr>
         <p:spPr>
           <a:xfrm>
-            <a:off x="1917039" y="3364992"/>
+            <a:off x="1967331" y="3364992"/>
             <a:ext cx="1563624" cy="384048"/>
           </a:xfrm>
           <a:prstGeom prst="roundRect">
@@ -4832,7 +4832,7 @@
         </p:nvSpPr>
         <p:spPr>
           <a:xfrm>
-            <a:off x="1917039" y="3364992"/>
+            <a:off x="1967331" y="3364992"/>
             <a:ext cx="1563624" cy="384048"/>
           </a:xfrm>
           <a:prstGeom prst="rect">
@@ -4877,7 +4877,7 @@
         </p:nvSpPr>
         <p:spPr>
           <a:xfrm>
-            <a:off x="3645255" y="3364992"/>
+            <a:off x="3695547" y="3364992"/>
             <a:ext cx="2167128" cy="384048"/>
           </a:xfrm>
           <a:prstGeom prst="roundRect">
@@ -4923,7 +4923,7 @@
         </p:nvSpPr>
         <p:spPr>
           <a:xfrm>
-            <a:off x="3645255" y="3364992"/>
+            <a:off x="3695547" y="3364992"/>
             <a:ext cx="2167128" cy="384048"/>
           </a:xfrm>
           <a:prstGeom prst="rect">
@@ -4968,7 +4968,7 @@
         </p:nvSpPr>
         <p:spPr>
           <a:xfrm>
-            <a:off x="5976975" y="3364992"/>
+            <a:off x="6027267" y="3364992"/>
             <a:ext cx="1764792" cy="384048"/>
           </a:xfrm>
           <a:prstGeom prst="roundRect">
@@ -5014,7 +5014,7 @@
         </p:nvSpPr>
         <p:spPr>
           <a:xfrm>
-            <a:off x="5976975" y="3364992"/>
+            <a:off x="6027267" y="3364992"/>
             <a:ext cx="1764792" cy="384048"/>
           </a:xfrm>
           <a:prstGeom prst="rect">
@@ -5046,7 +5046,7 @@
                 </a:solidFill>
                 <a:latin typeface="Consolas"/>
               </a:rPr>
-              <a:t>28.5 KB mappe</a:t>
+              <a:t>19.8 KB mappe</a:t>
             </a:r>
           </a:p>
         </p:txBody>
@@ -5059,8 +5059,8 @@
         </p:nvSpPr>
         <p:spPr>
           <a:xfrm>
-            <a:off x="7906359" y="3364992"/>
-            <a:ext cx="2368296" cy="384048"/>
+            <a:off x="7956651" y="3364992"/>
+            <a:ext cx="2267712" cy="384048"/>
           </a:xfrm>
           <a:prstGeom prst="roundRect">
             <a:avLst/>
@@ -5105,8 +5105,8 @@
         </p:nvSpPr>
         <p:spPr>
           <a:xfrm>
-            <a:off x="7906359" y="3364992"/>
-            <a:ext cx="2368296" cy="384048"/>
+            <a:off x="7956651" y="3364992"/>
+            <a:ext cx="2267712" cy="384048"/>
           </a:xfrm>
           <a:prstGeom prst="rect">
             <a:avLst/>
@@ -5137,7 +5137,7 @@
                 </a:solidFill>
                 <a:latin typeface="Consolas"/>
               </a:rPr>
-              <a:t>1274 ns · 0.79 Mpps</a:t>
+              <a:t>590 ns · 1.70 Mpps</a:t>
             </a:r>
           </a:p>
         </p:txBody>
@@ -8046,7 +8046,7 @@
                 </a:solidFill>
                 <a:latin typeface="Segoe UI"/>
               </a:rPr>
-              <a:t>Un xdp_md azzerato come contesto pin-a ingress_ifindex=0 (risolve il vecchio drift del template). </a:t>
+              <a:t>Nessun ctx custom: sotto TEST_RUN l'ingress_ifindex di sandbox cade fuori dai range attesi di tutte e 3, quindi combaciano allo stesso modo col riferimento Python. </a:t>
             </a:r>
           </a:p>
           <a:p>
@@ -8539,7 +8539,7 @@
                           </a:solidFill>
                           <a:latin typeface="Consolas"/>
                         </a:rPr>
-                        <a:t>2 668</a:t>
+                        <a:t>2 618</a:t>
                       </a:r>
                     </a:p>
                   </a:txBody>
@@ -8562,7 +8562,7 @@
                           </a:solidFill>
                           <a:latin typeface="Consolas"/>
                         </a:rPr>
-                        <a:t>13 645</a:t>
+                        <a:t>13 441</a:t>
                       </a:r>
                     </a:p>
                   </a:txBody>
@@ -8633,7 +8633,7 @@
                           </a:solidFill>
                           <a:latin typeface="Consolas"/>
                         </a:rPr>
-                        <a:t>12 575</a:t>
+                        <a:t>11 464</a:t>
                       </a:r>
                     </a:p>
                   </a:txBody>
@@ -8656,7 +8656,7 @@
                           </a:solidFill>
                           <a:latin typeface="Consolas"/>
                         </a:rPr>
-                        <a:t>58 146</a:t>
+                        <a:t>57 224</a:t>
                       </a:r>
                     </a:p>
                   </a:txBody>
@@ -8915,7 +8915,7 @@
                           </a:solidFill>
                           <a:latin typeface="Consolas"/>
                         </a:rPr>
-                        <a:t>15 796</a:t>
+                        <a:t>7 560</a:t>
                       </a:r>
                     </a:p>
                   </a:txBody>
@@ -8938,7 +8938,7 @@
                           </a:solidFill>
                           <a:latin typeface="Consolas"/>
                         </a:rPr>
-                        <a:t>28 468</a:t>
+                        <a:t>20 232</a:t>
                       </a:r>
                     </a:p>
                   </a:txBody>
@@ -8986,7 +8986,7 @@
                           </a:solidFill>
                           <a:latin typeface="Consolas"/>
                         </a:rPr>
-                        <a:t>72.0</a:t>
+                        <a:t>32.0</a:t>
                       </a:r>
                     </a:p>
                   </a:txBody>
@@ -9009,7 +9009,7 @@
                           </a:solidFill>
                           <a:latin typeface="Consolas"/>
                         </a:rPr>
-                        <a:t>287.0</a:t>
+                        <a:t>125.0</a:t>
                       </a:r>
                     </a:p>
                   </a:txBody>
@@ -9032,7 +9032,7 @@
                           </a:solidFill>
                           <a:latin typeface="Consolas"/>
                         </a:rPr>
-                        <a:t>1274.0</a:t>
+                        <a:t>590.0</a:t>
                       </a:r>
                     </a:p>
                   </a:txBody>
@@ -9080,7 +9080,7 @@
                           </a:solidFill>
                           <a:latin typeface="Consolas"/>
                         </a:rPr>
-                        <a:t>13.889</a:t>
+                        <a:t>31.250</a:t>
                       </a:r>
                     </a:p>
                   </a:txBody>
@@ -9103,7 +9103,7 @@
                           </a:solidFill>
                           <a:latin typeface="Consolas"/>
                         </a:rPr>
-                        <a:t>3.484</a:t>
+                        <a:t>8.000</a:t>
                       </a:r>
                     </a:p>
                   </a:txBody>
@@ -9126,7 +9126,7 @@
                           </a:solidFill>
                           <a:latin typeface="Consolas"/>
                         </a:rPr>
-                        <a:t>0.785</a:t>
+                        <a:t>1.695</a:t>
                       </a:r>
                     </a:p>
                   </a:txBody>
@@ -9174,7 +9174,7 @@
                           </a:solidFill>
                           <a:latin typeface="Consolas"/>
                         </a:rPr>
-                        <a:t>58</a:t>
+                        <a:t>38</a:t>
                       </a:r>
                     </a:p>
                   </a:txBody>
@@ -9197,7 +9197,7 @@
                           </a:solidFill>
                           <a:latin typeface="Consolas"/>
                         </a:rPr>
-                        <a:t>61</a:t>
+                        <a:t>53</a:t>
                       </a:r>
                     </a:p>
                   </a:txBody>
@@ -9220,7 +9220,7 @@
                           </a:solidFill>
                           <a:latin typeface="Consolas"/>
                         </a:rPr>
-                        <a:t>80</a:t>
+                        <a:t>60</a:t>
                       </a:r>
                     </a:p>
                   </a:txBody>
@@ -9352,7 +9352,7 @@
                 </a:solidFill>
                 <a:latin typeface="Segoe UI"/>
               </a:rPr>
-              <a:t>P1 più veloce: 72 ns, 13.9 Mpps.</a:t>
+              <a:t>P1 più veloce: 32 ns, 31.3 Mpps.</a:t>
             </a:r>
           </a:p>
           <a:p>
@@ -9445,7 +9445,7 @@
                 </a:solidFill>
                 <a:latin typeface="Segoe UI"/>
               </a:rPr>
-              <a:t>P3 ≈12× istruzioni di P1.</a:t>
+              <a:t>P3 ≈13× istruzioni di P1.</a:t>
             </a:r>
           </a:p>
         </p:txBody>
@@ -9490,7 +9490,7 @@
                 </a:solidFill>
                 <a:latin typeface="Segoe UI"/>
               </a:rPr>
-              <a:t>Confronto pulito: </a:t>
+              <a:t>mac_table: </a:t>
             </a:r>
             <a:r>
               <a:rPr sz="1200" b="0">
@@ -9499,7 +9499,7 @@
                 </a:solidFill>
                 <a:latin typeface="Segoe UI"/>
               </a:rPr>
-              <a:t>P1 è sceso da 1109 a 72 ns rimuovendo 3 bpf_trace_printk per pacchetto (assenti in P2/P3) che falsavano il baseline. L'inferenza è identica nelle 3 (classe kernel = riferimento Python); differisce solo il design. Ordine coerente con la tassonomia.</a:t>
+              <a:t>argmax → mac_table[classe] → bpf_redirect su tutte e 3 (P1 hardcoded in uno switch, 0 lookup). L'inferenza è identica nelle 3 (classe kernel = riferimento Python); differisce solo il design. Ordine coerente con la tassonomia.</a:t>
             </a:r>
           </a:p>
         </p:txBody>
@@ -18565,7 +18565,7 @@
                 </a:solidFill>
                 <a:latin typeface="Consolas"/>
               </a:rPr>
-              <a:t>72 ns · 13.9 Mpps</a:t>
+              <a:t>32 ns · 31.3 Mpps</a:t>
             </a:r>
           </a:p>
         </p:txBody>
@@ -20757,7 +20757,7 @@
         </p:nvSpPr>
         <p:spPr>
           <a:xfrm>
-            <a:off x="2017623" y="3364992"/>
+            <a:off x="2067915" y="3364992"/>
             <a:ext cx="1563624" cy="384048"/>
           </a:xfrm>
           <a:prstGeom prst="roundRect">
@@ -20803,7 +20803,7 @@
         </p:nvSpPr>
         <p:spPr>
           <a:xfrm>
-            <a:off x="2017623" y="3364992"/>
+            <a:off x="2067915" y="3364992"/>
             <a:ext cx="1563624" cy="384048"/>
           </a:xfrm>
           <a:prstGeom prst="rect">
@@ -20848,7 +20848,7 @@
         </p:nvSpPr>
         <p:spPr>
           <a:xfrm>
-            <a:off x="3745839" y="3364992"/>
+            <a:off x="3796131" y="3364992"/>
             <a:ext cx="2167128" cy="384048"/>
           </a:xfrm>
           <a:prstGeom prst="roundRect">
@@ -20894,7 +20894,7 @@
         </p:nvSpPr>
         <p:spPr>
           <a:xfrm>
-            <a:off x="3745839" y="3364992"/>
+            <a:off x="3796131" y="3364992"/>
             <a:ext cx="2167128" cy="384048"/>
           </a:xfrm>
           <a:prstGeom prst="rect">
@@ -20939,8 +20939,8 @@
         </p:nvSpPr>
         <p:spPr>
           <a:xfrm>
-            <a:off x="6077559" y="3364992"/>
-            <a:ext cx="1764792" cy="384048"/>
+            <a:off x="6127851" y="3364992"/>
+            <a:ext cx="1664208" cy="384048"/>
           </a:xfrm>
           <a:prstGeom prst="roundRect">
             <a:avLst/>
@@ -20985,8 +20985,8 @@
         </p:nvSpPr>
         <p:spPr>
           <a:xfrm>
-            <a:off x="6077559" y="3364992"/>
-            <a:ext cx="1764792" cy="384048"/>
+            <a:off x="6127851" y="3364992"/>
+            <a:ext cx="1664208" cy="384048"/>
           </a:xfrm>
           <a:prstGeom prst="rect">
             <a:avLst/>
@@ -21017,7 +21017,7 @@
                 </a:solidFill>
                 <a:latin typeface="Consolas"/>
               </a:rPr>
-              <a:t>15.8 KB mappe</a:t>
+              <a:t>7.4 KB mappe</a:t>
             </a:r>
           </a:p>
         </p:txBody>
@@ -21030,7 +21030,7 @@
         </p:nvSpPr>
         <p:spPr>
           <a:xfrm>
-            <a:off x="8006943" y="3364992"/>
+            <a:off x="7956651" y="3364992"/>
             <a:ext cx="2167128" cy="384048"/>
           </a:xfrm>
           <a:prstGeom prst="roundRect">
@@ -21076,7 +21076,7 @@
         </p:nvSpPr>
         <p:spPr>
           <a:xfrm>
-            <a:off x="8006943" y="3364992"/>
+            <a:off x="7956651" y="3364992"/>
             <a:ext cx="2167128" cy="384048"/>
           </a:xfrm>
           <a:prstGeom prst="rect">
@@ -21108,7 +21108,7 @@
                 </a:solidFill>
                 <a:latin typeface="Consolas"/>
               </a:rPr>
-              <a:t>287 ns · 3.5 Mpps</a:t>
+              <a:t>125 ns · 8.0 Mpps</a:t>
             </a:r>
           </a:p>
         </p:txBody>
@@ -22147,7 +22147,7 @@
                 </a:solidFill>
                 <a:latin typeface="Segoe UI"/>
               </a:rPr>
-              <a:t>Prestazioni intermedie (287 ns): tra P1 hardcoded e P3 modular.</a:t>
+              <a:t>Prestazioni intermedie (125 ns): tra P1 hardcoded e P3 modular.</a:t>
             </a:r>
           </a:p>
         </p:txBody>

--- a/docs/IPA_eBPF_pipelines.pptx
+++ b/docs/IPA_eBPF_pipelines.pptx
@@ -19,6 +19,7 @@
     <p:sldId id="267" r:id="rId18"/>
     <p:sldId id="268" r:id="rId19"/>
     <p:sldId id="269" r:id="rId20"/>
+    <p:sldId id="273" r:id="rId24"/>
     <p:sldId id="270" r:id="rId21"/>
     <p:sldId id="271" r:id="rId22"/>
     <p:sldId id="272" r:id="rId23"/>
@@ -9651,7 +9652,7 @@
                 </a:solidFill>
                 <a:latin typeface="Georgia"/>
               </a:rPr>
-              <a:t>link_state nelle tre pipeline</a:t>
+              <a:t>Costo reale di aggiunta modello</a:t>
             </a:r>
           </a:p>
         </p:txBody>
@@ -9696,21 +9697,613 @@
                 </a:solidFill>
                 <a:latin typeface="Segoe UI"/>
               </a:rPr>
-              <a:t>Stessa mappa, tre modi di leggerla</a:t>
-            </a:r>
-          </a:p>
-        </p:txBody>
-      </p:sp>
-      <p:sp>
-        <p:nvSpPr>
-          <p:cNvPr id="6" name="Rounded Rectangle 5"/>
+              <a:t>bench_model_add.py — BPF_PROG_LOAD misurato, non stimato</a:t>
+            </a:r>
+          </a:p>
+        </p:txBody>
+      </p:sp>
+      <p:graphicFrame>
+        <p:nvGraphicFramePr>
+          <p:cNvPr id="6" name="Table 5"/>
+          <p:cNvGraphicFramePr>
+            <a:graphicFrameLocks noGrp="1"/>
+          </p:cNvGraphicFramePr>
+          <p:nvPr/>
+        </p:nvGraphicFramePr>
+        <p:xfrm>
+          <a:off x="640080" y="2011680"/>
+          <a:ext cx="8586216" cy="3383280"/>
+        </p:xfrm>
+        <a:graphic>
+          <a:graphicData uri="http://schemas.openxmlformats.org/drawingml/2006/table">
+            <a:tbl>
+              <a:tblPr firstRow="1" bandRow="1">
+                <a:tableStyleId>{5C22544A-7EE6-4342-B048-85BDC9FD1C3A}</a:tableStyleId>
+              </a:tblPr>
+              <a:tblGrid>
+                <a:gridCol w="3291840"/>
+                <a:gridCol w="1764792"/>
+                <a:gridCol w="1764792"/>
+                <a:gridCol w="1764792"/>
+              </a:tblGrid>
+              <a:tr h="375920">
+                <a:tc>
+                  <a:txBody>
+                    <a:bodyPr/>
+                    <a:lstStyle/>
+                    <a:p>
+                      <a:pPr algn="l"/>
+                      <a:r>
+                        <a:rPr sz="1250" b="1">
+                          <a:solidFill>
+                            <a:srgbClr val="8B949E"/>
+                          </a:solidFill>
+                          <a:latin typeface="Segoe UI"/>
+                        </a:rPr>
+                        <a:t>Metrica</a:t>
+                      </a:r>
+                    </a:p>
+                  </a:txBody>
+                  <a:tcPr marL="109728" marR="73152" marT="18288" marB="18288" anchor="ctr">
+                    <a:solidFill>
+                      <a:srgbClr val="161B22"/>
+                    </a:solidFill>
+                  </a:tcPr>
+                </a:tc>
+                <a:tc>
+                  <a:txBody>
+                    <a:bodyPr/>
+                    <a:lstStyle/>
+                    <a:p>
+                      <a:pPr algn="r"/>
+                      <a:r>
+                        <a:rPr sz="1250" b="1">
+                          <a:solidFill>
+                            <a:srgbClr val="8B949E"/>
+                          </a:solidFill>
+                          <a:latin typeface="Consolas"/>
+                        </a:rPr>
+                        <a:t>P1 hardcoded</a:t>
+                      </a:r>
+                    </a:p>
+                  </a:txBody>
+                  <a:tcPr marL="109728" marR="73152" marT="18288" marB="18288" anchor="ctr">
+                    <a:solidFill>
+                      <a:srgbClr val="161B22"/>
+                    </a:solidFill>
+                  </a:tcPr>
+                </a:tc>
+                <a:tc>
+                  <a:txBody>
+                    <a:bodyPr/>
+                    <a:lstStyle/>
+                    <a:p>
+                      <a:pPr algn="r"/>
+                      <a:r>
+                        <a:rPr sz="1250" b="1">
+                          <a:solidFill>
+                            <a:srgbClr val="8B949E"/>
+                          </a:solidFill>
+                          <a:latin typeface="Consolas"/>
+                        </a:rPr>
+                        <a:t>P2 template</a:t>
+                      </a:r>
+                    </a:p>
+                  </a:txBody>
+                  <a:tcPr marL="109728" marR="73152" marT="18288" marB="18288" anchor="ctr">
+                    <a:solidFill>
+                      <a:srgbClr val="161B22"/>
+                    </a:solidFill>
+                  </a:tcPr>
+                </a:tc>
+                <a:tc>
+                  <a:txBody>
+                    <a:bodyPr/>
+                    <a:lstStyle/>
+                    <a:p>
+                      <a:pPr algn="r"/>
+                      <a:r>
+                        <a:rPr sz="1250" b="1">
+                          <a:solidFill>
+                            <a:srgbClr val="8B949E"/>
+                          </a:solidFill>
+                          <a:latin typeface="Consolas"/>
+                        </a:rPr>
+                        <a:t>P3 modular</a:t>
+                      </a:r>
+                    </a:p>
+                  </a:txBody>
+                  <a:tcPr marL="109728" marR="73152" marT="18288" marB="18288" anchor="ctr">
+                    <a:solidFill>
+                      <a:srgbClr val="161B22"/>
+                    </a:solidFill>
+                  </a:tcPr>
+                </a:tc>
+              </a:tr>
+              <a:tr h="375920">
+                <a:tc>
+                  <a:txBody>
+                    <a:bodyPr/>
+                    <a:lstStyle/>
+                    <a:p>
+                      <a:pPr algn="l"/>
+                      <a:r>
+                        <a:rPr sz="1250" b="1">
+                          <a:solidFill>
+                            <a:srgbClr val="E6EDF3"/>
+                          </a:solidFill>
+                          <a:latin typeface="Segoe UI"/>
+                        </a:rPr>
+                        <a:t>Setup one-time (ms)</a:t>
+                      </a:r>
+                    </a:p>
+                  </a:txBody>
+                  <a:tcPr marL="109728" marR="73152" marT="18288" marB="18288" anchor="ctr">
+                    <a:solidFill>
+                      <a:srgbClr val="1B222E"/>
+                    </a:solidFill>
+                  </a:tcPr>
+                </a:tc>
+                <a:tc>
+                  <a:txBody>
+                    <a:bodyPr/>
+                    <a:lstStyle/>
+                    <a:p>
+                      <a:pPr algn="r"/>
+                      <a:r>
+                        <a:rPr sz="1250" b="0">
+                          <a:solidFill>
+                            <a:srgbClr val="E6EDF3"/>
+                          </a:solidFill>
+                          <a:latin typeface="Consolas"/>
+                        </a:rPr>
+                        <a:t>n/d (nel costo add)</a:t>
+                      </a:r>
+                    </a:p>
+                  </a:txBody>
+                  <a:tcPr marL="109728" marR="73152" marT="18288" marB="18288" anchor="ctr">
+                    <a:solidFill>
+                      <a:srgbClr val="1B222E"/>
+                    </a:solidFill>
+                  </a:tcPr>
+                </a:tc>
+                <a:tc>
+                  <a:txBody>
+                    <a:bodyPr/>
+                    <a:lstStyle/>
+                    <a:p>
+                      <a:pPr algn="r"/>
+                      <a:r>
+                        <a:rPr sz="1250" b="0">
+                          <a:solidFill>
+                            <a:srgbClr val="E6EDF3"/>
+                          </a:solidFill>
+                          <a:latin typeface="Consolas"/>
+                        </a:rPr>
+                        <a:t>2 137.812</a:t>
+                      </a:r>
+                    </a:p>
+                  </a:txBody>
+                  <a:tcPr marL="109728" marR="73152" marT="18288" marB="18288" anchor="ctr">
+                    <a:solidFill>
+                      <a:srgbClr val="1B222E"/>
+                    </a:solidFill>
+                  </a:tcPr>
+                </a:tc>
+                <a:tc>
+                  <a:txBody>
+                    <a:bodyPr/>
+                    <a:lstStyle/>
+                    <a:p>
+                      <a:pPr algn="r"/>
+                      <a:r>
+                        <a:rPr sz="1250" b="0">
+                          <a:solidFill>
+                            <a:srgbClr val="E6EDF3"/>
+                          </a:solidFill>
+                          <a:latin typeface="Consolas"/>
+                        </a:rPr>
+                        <a:t>2 425.498</a:t>
+                      </a:r>
+                    </a:p>
+                  </a:txBody>
+                  <a:tcPr marL="109728" marR="73152" marT="18288" marB="18288" anchor="ctr">
+                    <a:solidFill>
+                      <a:srgbClr val="1B222E"/>
+                    </a:solidFill>
+                  </a:tcPr>
+                </a:tc>
+              </a:tr>
+              <a:tr h="375920">
+                <a:tc>
+                  <a:txBody>
+                    <a:bodyPr/>
+                    <a:lstStyle/>
+                    <a:p>
+                      <a:pPr algn="l"/>
+                      <a:r>
+                        <a:rPr sz="1250" b="1">
+                          <a:solidFill>
+                            <a:srgbClr val="E6EDF3"/>
+                          </a:solidFill>
+                          <a:latin typeface="Segoe UI"/>
+                        </a:rPr>
+                        <a:t>Mean add (ms)</a:t>
+                      </a:r>
+                    </a:p>
+                  </a:txBody>
+                  <a:tcPr marL="109728" marR="73152" marT="18288" marB="18288" anchor="ctr">
+                    <a:solidFill>
+                      <a:srgbClr val="0D1117"/>
+                    </a:solidFill>
+                  </a:tcPr>
+                </a:tc>
+                <a:tc>
+                  <a:txBody>
+                    <a:bodyPr/>
+                    <a:lstStyle/>
+                    <a:p>
+                      <a:pPr algn="r"/>
+                      <a:r>
+                        <a:rPr sz="1250" b="0">
+                          <a:solidFill>
+                            <a:srgbClr val="E6EDF3"/>
+                          </a:solidFill>
+                          <a:latin typeface="Consolas"/>
+                        </a:rPr>
+                        <a:t>1 893.448</a:t>
+                      </a:r>
+                    </a:p>
+                  </a:txBody>
+                  <a:tcPr marL="109728" marR="73152" marT="18288" marB="18288" anchor="ctr">
+                    <a:solidFill>
+                      <a:srgbClr val="0D1117"/>
+                    </a:solidFill>
+                  </a:tcPr>
+                </a:tc>
+                <a:tc>
+                  <a:txBody>
+                    <a:bodyPr/>
+                    <a:lstStyle/>
+                    <a:p>
+                      <a:pPr algn="r"/>
+                      <a:r>
+                        <a:rPr sz="1250" b="0">
+                          <a:solidFill>
+                            <a:srgbClr val="E6EDF3"/>
+                          </a:solidFill>
+                          <a:latin typeface="Consolas"/>
+                        </a:rPr>
+                        <a:t>2.143</a:t>
+                      </a:r>
+                    </a:p>
+                  </a:txBody>
+                  <a:tcPr marL="109728" marR="73152" marT="18288" marB="18288" anchor="ctr">
+                    <a:solidFill>
+                      <a:srgbClr val="0D1117"/>
+                    </a:solidFill>
+                  </a:tcPr>
+                </a:tc>
+                <a:tc>
+                  <a:txBody>
+                    <a:bodyPr/>
+                    <a:lstStyle/>
+                    <a:p>
+                      <a:pPr algn="r"/>
+                      <a:r>
+                        <a:rPr sz="1250" b="0">
+                          <a:solidFill>
+                            <a:srgbClr val="E6EDF3"/>
+                          </a:solidFill>
+                          <a:latin typeface="Consolas"/>
+                        </a:rPr>
+                        <a:t>2.801</a:t>
+                      </a:r>
+                    </a:p>
+                  </a:txBody>
+                  <a:tcPr marL="109728" marR="73152" marT="18288" marB="18288" anchor="ctr">
+                    <a:solidFill>
+                      <a:srgbClr val="0D1117"/>
+                    </a:solidFill>
+                  </a:tcPr>
+                </a:tc>
+              </a:tr>
+              <a:tr h="375920">
+                <a:tc>
+                  <a:txBody>
+                    <a:bodyPr/>
+                    <a:lstStyle/>
+                    <a:p>
+                      <a:pPr algn="l"/>
+                      <a:r>
+                        <a:rPr sz="1250" b="1">
+                          <a:solidFill>
+                            <a:srgbClr val="E6EDF3"/>
+                          </a:solidFill>
+                          <a:latin typeface="Segoe UI"/>
+                        </a:rPr>
+                        <a:t>Min add (ms)</a:t>
+                      </a:r>
+                    </a:p>
+                  </a:txBody>
+                  <a:tcPr marL="109728" marR="73152" marT="18288" marB="18288" anchor="ctr">
+                    <a:solidFill>
+                      <a:srgbClr val="1B222E"/>
+                    </a:solidFill>
+                  </a:tcPr>
+                </a:tc>
+                <a:tc>
+                  <a:txBody>
+                    <a:bodyPr/>
+                    <a:lstStyle/>
+                    <a:p>
+                      <a:pPr algn="r"/>
+                      <a:r>
+                        <a:rPr sz="1250" b="0">
+                          <a:solidFill>
+                            <a:srgbClr val="E6EDF3"/>
+                          </a:solidFill>
+                          <a:latin typeface="Consolas"/>
+                        </a:rPr>
+                        <a:t>1 420.993</a:t>
+                      </a:r>
+                    </a:p>
+                  </a:txBody>
+                  <a:tcPr marL="109728" marR="73152" marT="18288" marB="18288" anchor="ctr">
+                    <a:solidFill>
+                      <a:srgbClr val="1B222E"/>
+                    </a:solidFill>
+                  </a:tcPr>
+                </a:tc>
+                <a:tc>
+                  <a:txBody>
+                    <a:bodyPr/>
+                    <a:lstStyle/>
+                    <a:p>
+                      <a:pPr algn="r"/>
+                      <a:r>
+                        <a:rPr sz="1250" b="0">
+                          <a:solidFill>
+                            <a:srgbClr val="E6EDF3"/>
+                          </a:solidFill>
+                          <a:latin typeface="Consolas"/>
+                        </a:rPr>
+                        <a:t>1.395</a:t>
+                      </a:r>
+                    </a:p>
+                  </a:txBody>
+                  <a:tcPr marL="109728" marR="73152" marT="18288" marB="18288" anchor="ctr">
+                    <a:solidFill>
+                      <a:srgbClr val="1B222E"/>
+                    </a:solidFill>
+                  </a:tcPr>
+                </a:tc>
+                <a:tc>
+                  <a:txBody>
+                    <a:bodyPr/>
+                    <a:lstStyle/>
+                    <a:p>
+                      <a:pPr algn="r"/>
+                      <a:r>
+                        <a:rPr sz="1250" b="0">
+                          <a:solidFill>
+                            <a:srgbClr val="E6EDF3"/>
+                          </a:solidFill>
+                          <a:latin typeface="Consolas"/>
+                        </a:rPr>
+                        <a:t>1.802</a:t>
+                      </a:r>
+                    </a:p>
+                  </a:txBody>
+                  <a:tcPr marL="109728" marR="73152" marT="18288" marB="18288" anchor="ctr">
+                    <a:solidFill>
+                      <a:srgbClr val="1B222E"/>
+                    </a:solidFill>
+                  </a:tcPr>
+                </a:tc>
+              </a:tr>
+              <a:tr h="375920">
+                <a:tc>
+                  <a:txBody>
+                    <a:bodyPr/>
+                    <a:lstStyle/>
+                    <a:p>
+                      <a:pPr algn="l"/>
+                      <a:r>
+                        <a:rPr sz="1250" b="1">
+                          <a:solidFill>
+                            <a:srgbClr val="E6EDF3"/>
+                          </a:solidFill>
+                          <a:latin typeface="Segoe UI"/>
+                        </a:rPr>
+                        <a:t>Max add (ms)</a:t>
+                      </a:r>
+                    </a:p>
+                  </a:txBody>
+                  <a:tcPr marL="109728" marR="73152" marT="18288" marB="18288" anchor="ctr">
+                    <a:solidFill>
+                      <a:srgbClr val="0D1117"/>
+                    </a:solidFill>
+                  </a:tcPr>
+                </a:tc>
+                <a:tc>
+                  <a:txBody>
+                    <a:bodyPr/>
+                    <a:lstStyle/>
+                    <a:p>
+                      <a:pPr algn="r"/>
+                      <a:r>
+                        <a:rPr sz="1250" b="0">
+                          <a:solidFill>
+                            <a:srgbClr val="E6EDF3"/>
+                          </a:solidFill>
+                          <a:latin typeface="Consolas"/>
+                        </a:rPr>
+                        <a:t>2 829.601</a:t>
+                      </a:r>
+                    </a:p>
+                  </a:txBody>
+                  <a:tcPr marL="109728" marR="73152" marT="18288" marB="18288" anchor="ctr">
+                    <a:solidFill>
+                      <a:srgbClr val="0D1117"/>
+                    </a:solidFill>
+                  </a:tcPr>
+                </a:tc>
+                <a:tc>
+                  <a:txBody>
+                    <a:bodyPr/>
+                    <a:lstStyle/>
+                    <a:p>
+                      <a:pPr algn="r"/>
+                      <a:r>
+                        <a:rPr sz="1250" b="0">
+                          <a:solidFill>
+                            <a:srgbClr val="E6EDF3"/>
+                          </a:solidFill>
+                          <a:latin typeface="Consolas"/>
+                        </a:rPr>
+                        <a:t>2.656</a:t>
+                      </a:r>
+                    </a:p>
+                  </a:txBody>
+                  <a:tcPr marL="109728" marR="73152" marT="18288" marB="18288" anchor="ctr">
+                    <a:solidFill>
+                      <a:srgbClr val="0D1117"/>
+                    </a:solidFill>
+                  </a:tcPr>
+                </a:tc>
+                <a:tc>
+                  <a:txBody>
+                    <a:bodyPr/>
+                    <a:lstStyle/>
+                    <a:p>
+                      <a:pPr algn="r"/>
+                      <a:r>
+                        <a:rPr sz="1250" b="0">
+                          <a:solidFill>
+                            <a:srgbClr val="E6EDF3"/>
+                          </a:solidFill>
+                          <a:latin typeface="Consolas"/>
+                        </a:rPr>
+                        <a:t>4.454</a:t>
+                      </a:r>
+                    </a:p>
+                  </a:txBody>
+                  <a:tcPr marL="109728" marR="73152" marT="18288" marB="18288" anchor="ctr">
+                    <a:solidFill>
+                      <a:srgbClr val="0D1117"/>
+                    </a:solidFill>
+                  </a:tcPr>
+                </a:tc>
+              </a:tr>
+              <a:tr h="375920">
+                <a:tc>
+                  <a:txBody>
+                    <a:bodyPr/>
+                    <a:lstStyle/>
+                    <a:p>
+                      <a:pPr algn="l"/>
+                      <a:r>
+                        <a:rPr sz="1250" b="1">
+                          <a:solidFill>
+                            <a:srgbClr val="E6EDF3"/>
+                          </a:solidFill>
+                          <a:latin typeface="Segoe UI"/>
+                        </a:rPr>
+                        <a:t>Stdev add (ms)</a:t>
+                      </a:r>
+                    </a:p>
+                  </a:txBody>
+                  <a:tcPr marL="109728" marR="73152" marT="18288" marB="18288" anchor="ctr">
+                    <a:solidFill>
+                      <a:srgbClr val="1B222E"/>
+                    </a:solidFill>
+                  </a:tcPr>
+                </a:tc>
+                <a:tc>
+                  <a:txBody>
+                    <a:bodyPr/>
+                    <a:lstStyle/>
+                    <a:p>
+                      <a:pPr algn="r"/>
+                      <a:r>
+                        <a:rPr sz="1250" b="0">
+                          <a:solidFill>
+                            <a:srgbClr val="E6EDF3"/>
+                          </a:solidFill>
+                          <a:latin typeface="Consolas"/>
+                        </a:rPr>
+                        <a:t>661.970</a:t>
+                      </a:r>
+                    </a:p>
+                  </a:txBody>
+                  <a:tcPr marL="109728" marR="73152" marT="18288" marB="18288" anchor="ctr">
+                    <a:solidFill>
+                      <a:srgbClr val="1B222E"/>
+                    </a:solidFill>
+                  </a:tcPr>
+                </a:tc>
+                <a:tc>
+                  <a:txBody>
+                    <a:bodyPr/>
+                    <a:lstStyle/>
+                    <a:p>
+                      <a:pPr algn="r"/>
+                      <a:r>
+                        <a:rPr sz="1250" b="0">
+                          <a:solidFill>
+                            <a:srgbClr val="E6EDF3"/>
+                          </a:solidFill>
+                          <a:latin typeface="Consolas"/>
+                        </a:rPr>
+                        <a:t>0.540</a:t>
+                      </a:r>
+                    </a:p>
+                  </a:txBody>
+                  <a:tcPr marL="109728" marR="73152" marT="18288" marB="18288" anchor="ctr">
+                    <a:solidFill>
+                      <a:srgbClr val="1B222E"/>
+                    </a:solidFill>
+                  </a:tcPr>
+                </a:tc>
+                <a:tc>
+                  <a:txBody>
+                    <a:bodyPr/>
+                    <a:lstStyle/>
+                    <a:p>
+                      <a:pPr algn="r"/>
+                      <a:r>
+                        <a:rPr sz="1250" b="0">
+                          <a:solidFill>
+                            <a:srgbClr val="E6EDF3"/>
+                          </a:solidFill>
+                          <a:latin typeface="Consolas"/>
+                        </a:rPr>
+                        <a:t>1.177</a:t>
+                      </a:r>
+                    </a:p>
+                  </a:txBody>
+                  <a:tcPr marL="109728" marR="73152" marT="18288" marB="18288" anchor="ctr">
+                    <a:solidFill>
+                      <a:srgbClr val="1B222E"/>
+                    </a:solidFill>
+                  </a:tcPr>
+                </a:tc>
+              </a:tr>
+            </a:tbl>
+          </a:graphicData>
+        </a:graphic>
+      </p:graphicFrame>
+      <p:sp>
+        <p:nvSpPr>
+          <p:cNvPr id="7" name="Rounded Rectangle 6"/>
           <p:cNvSpPr/>
           <p:nvPr/>
         </p:nvSpPr>
         <p:spPr>
           <a:xfrm>
-            <a:off x="640080" y="2103120"/>
-            <a:ext cx="3520440" cy="3200400"/>
+            <a:off x="9509760" y="2011680"/>
+            <a:ext cx="2057400" cy="3383280"/>
           </a:xfrm>
           <a:prstGeom prst="roundRect">
             <a:avLst/>
@@ -9749,14 +10342,14 @@
       </p:sp>
       <p:sp>
         <p:nvSpPr>
-          <p:cNvPr id="7" name="TextBox 6"/>
+          <p:cNvPr id="8" name="TextBox 7"/>
           <p:cNvSpPr txBox="1"/>
           <p:nvPr/>
         </p:nvSpPr>
         <p:spPr>
           <a:xfrm>
-            <a:off x="896112" y="2304288"/>
-            <a:ext cx="3063240" cy="2834640"/>
+            <a:off x="9765792" y="2212848"/>
+            <a:ext cx="1600200" cy="3017520"/>
           </a:xfrm>
           <a:prstGeom prst="rect">
             <a:avLst/>
@@ -9783,11 +10376,11 @@
             <a:r>
               <a:rPr sz="1350" b="1">
                 <a:solidFill>
-                  <a:srgbClr val="3FB950"/>
-                </a:solidFill>
-                <a:latin typeface="Segoe UI"/>
-              </a:rPr>
-              <a:t>P1 — Hardcoded</a:t>
+                  <a:srgbClr val="3FD0C8"/>
+                </a:solidFill>
+                <a:latin typeface="Segoe UI"/>
+              </a:rPr>
+              <a:t>Lettura</a:t>
             </a:r>
           </a:p>
           <a:p>
@@ -9805,7 +10398,7 @@
             <a:r>
               <a:rPr sz="1100" b="0">
                 <a:solidFill>
-                  <a:srgbClr val="3FB950"/>
+                  <a:srgbClr val="3FD0C8"/>
                 </a:solidFill>
                 <a:latin typeface="Segoe UI"/>
               </a:rPr>
@@ -9818,7 +10411,7 @@
                 </a:solidFill>
                 <a:latin typeface="Segoe UI"/>
               </a:rPr>
-              <a:t>6 lookup link_state[i] all'inizio dell'inferenza.</a:t>
+              <a:t>hardcoded ~700–900× più lento per modello aggiunto.</a:t>
             </a:r>
           </a:p>
           <a:p>
@@ -9836,7 +10429,7 @@
             <a:r>
               <a:rPr sz="1100" b="0">
                 <a:solidFill>
-                  <a:srgbClr val="3FB950"/>
+                  <a:srgbClr val="3FD0C8"/>
                 </a:solidFill>
                 <a:latin typeface="Segoe UI"/>
               </a:rPr>
@@ -9849,7 +10442,7 @@
                 </a:solidFill>
                 <a:latin typeface="Segoe UI"/>
               </a:rPr>
-              <a:t>Sommati come ls_i * w[j,i] con w letterali C.</a:t>
+              <a:t>template/modular: solo bpf_map_update_elem.</a:t>
             </a:r>
           </a:p>
           <a:p>
@@ -9867,7 +10460,7 @@
             <a:r>
               <a:rPr sz="1100" b="0">
                 <a:solidFill>
-                  <a:srgbClr val="3FB950"/>
+                  <a:srgbClr val="3FD0C8"/>
                 </a:solidFill>
                 <a:latin typeface="Segoe UI"/>
               </a:rPr>
@@ -9880,7 +10473,7 @@
                 </a:solidFill>
                 <a:latin typeface="Segoe UI"/>
               </a:rPr>
-              <a:t>Unica mappa letta: è input, non peso.</a:t>
+              <a:t>setup one-time pagato una sola volta.</a:t>
             </a:r>
           </a:p>
           <a:p>
@@ -9898,7 +10491,7 @@
             <a:r>
               <a:rPr sz="1100" b="0">
                 <a:solidFill>
-                  <a:srgbClr val="3FB950"/>
+                  <a:srgbClr val="3FD0C8"/>
                 </a:solidFill>
                 <a:latin typeface="Segoe UI"/>
               </a:rPr>
@@ -9911,54 +10504,8 @@
                 </a:solidFill>
                 <a:latin typeface="Segoe UI"/>
               </a:rPr>
-              <a:t>Design hardcoded puro preservato.</a:t>
-            </a:r>
-          </a:p>
-        </p:txBody>
-      </p:sp>
-      <p:sp>
-        <p:nvSpPr>
-          <p:cNvPr id="8" name="Rounded Rectangle 7"/>
-          <p:cNvSpPr/>
-          <p:nvPr/>
-        </p:nvSpPr>
-        <p:spPr>
-          <a:xfrm>
-            <a:off x="4315968" y="2103120"/>
-            <a:ext cx="3520440" cy="3200400"/>
-          </a:xfrm>
-          <a:prstGeom prst="roundRect">
-            <a:avLst/>
-          </a:prstGeom>
-          <a:solidFill>
-            <a:srgbClr val="1B222E"/>
-          </a:solidFill>
-          <a:ln w="12700">
-            <a:solidFill>
-              <a:srgbClr val="30363D"/>
-            </a:solidFill>
-          </a:ln>
-          <a:effectLst/>
-        </p:spPr>
-        <p:style>
-          <a:lnRef idx="1">
-            <a:schemeClr val="accent1"/>
-          </a:lnRef>
-          <a:fillRef idx="3">
-            <a:schemeClr val="accent1"/>
-          </a:fillRef>
-          <a:effectRef idx="2">
-            <a:schemeClr val="accent1"/>
-          </a:effectRef>
-          <a:fontRef idx="minor">
-            <a:schemeClr val="lt1"/>
-          </a:fontRef>
-        </p:style>
-        <p:txBody>
-          <a:bodyPr rtlCol="0" anchor="ctr"/>
-          <a:lstStyle/>
-          <a:p>
-            <a:pPr algn="ctr"/>
+              <a:t>conferma: più flessibilità = update più economico.</a:t>
+            </a:r>
           </a:p>
         </p:txBody>
       </p:sp>
@@ -9970,8 +10517,8 @@
         </p:nvSpPr>
         <p:spPr>
           <a:xfrm>
-            <a:off x="4572000" y="2304288"/>
-            <a:ext cx="3063240" cy="2834640"/>
+            <a:off x="640080" y="5577840"/>
+            <a:ext cx="10927080" cy="914400"/>
           </a:xfrm>
           <a:prstGeom prst="rect">
             <a:avLst/>
@@ -9986,425 +10533,32 @@
           <a:p>
             <a:pPr algn="l">
               <a:lnSpc>
-                <a:spcPct val="105000"/>
-              </a:lnSpc>
-              <a:spcBef>
-                <a:spcPts val="0"/>
-              </a:spcBef>
-              <a:spcAft>
-                <a:spcPts val="500"/>
-              </a:spcAft>
-            </a:pPr>
-            <a:r>
-              <a:rPr sz="1350" b="1">
+                <a:spcPct val="112000"/>
+              </a:lnSpc>
+              <a:spcBef>
+                <a:spcPts val="0"/>
+              </a:spcBef>
+              <a:spcAft>
+                <a:spcPts val="200"/>
+              </a:spcAft>
+            </a:pPr>
+            <a:r>
+              <a:rPr sz="1200" b="1">
                 <a:solidFill>
                   <a:srgbClr val="F5A623"/>
                 </a:solidFill>
                 <a:latin typeface="Segoe UI"/>
               </a:rPr>
-              <a:t>P2 — Template</a:t>
-            </a:r>
-          </a:p>
-          <a:p>
-            <a:pPr algn="l">
-              <a:lnSpc>
-                <a:spcPct val="105000"/>
-              </a:lnSpc>
-              <a:spcBef>
-                <a:spcPts val="0"/>
-              </a:spcBef>
-              <a:spcAft>
-                <a:spcPts val="500"/>
-              </a:spcAft>
-            </a:pPr>
-            <a:r>
-              <a:rPr sz="1100" b="0">
-                <a:solidFill>
-                  <a:srgbClr val="F5A623"/>
-                </a:solidFill>
-                <a:latin typeface="Segoe UI"/>
-              </a:rPr>
-              <a:t>•  </a:t>
-            </a:r>
-            <a:r>
-              <a:rPr sz="1100" b="0">
+              <a:t>Metodologia: </a:t>
+            </a:r>
+            <a:r>
+              <a:rPr sz="1200" b="0">
                 <a:solidFill>
                   <a:srgbClr val="8B949E"/>
                 </a:solidFill>
                 <a:latin typeface="Segoe UI"/>
               </a:rPr>
-              <a:t>Lookup link_state[i] nel loop fc1.</a:t>
-            </a:r>
-          </a:p>
-          <a:p>
-            <a:pPr algn="l">
-              <a:lnSpc>
-                <a:spcPct val="105000"/>
-              </a:lnSpc>
-              <a:spcBef>
-                <a:spcPts val="0"/>
-              </a:spcBef>
-              <a:spcAft>
-                <a:spcPts val="500"/>
-              </a:spcAft>
-            </a:pPr>
-            <a:r>
-              <a:rPr sz="1100" b="0">
-                <a:solidFill>
-                  <a:srgbClr val="F5A623"/>
-                </a:solidFill>
-                <a:latin typeface="Segoe UI"/>
-              </a:rPr>
-              <a:t>•  </a:t>
-            </a:r>
-            <a:r>
-              <a:rPr sz="1100" b="0">
-                <a:solidFill>
-                  <a:srgbClr val="8B949E"/>
-                </a:solidFill>
-                <a:latin typeface="Segoe UI"/>
-              </a:rPr>
-              <a:t>Prodotto con arch_weights[woff + j*65 + i].</a:t>
-            </a:r>
-          </a:p>
-          <a:p>
-            <a:pPr algn="l">
-              <a:lnSpc>
-                <a:spcPct val="105000"/>
-              </a:lnSpc>
-              <a:spcBef>
-                <a:spcPts val="0"/>
-              </a:spcBef>
-              <a:spcAft>
-                <a:spcPts val="500"/>
-              </a:spcAft>
-            </a:pPr>
-            <a:r>
-              <a:rPr sz="1100" b="0">
-                <a:solidFill>
-                  <a:srgbClr val="F5A623"/>
-                </a:solidFill>
-                <a:latin typeface="Segoe UI"/>
-              </a:rPr>
-              <a:t>•  </a:t>
-            </a:r>
-            <a:r>
-              <a:rPr sz="1100" b="0">
-                <a:solidFill>
-                  <a:srgbClr val="8B949E"/>
-                </a:solidFill>
-                <a:latin typeface="Segoe UI"/>
-              </a:rPr>
-              <a:t>Stessa mappa, pesi separati in BPF_ARRAY.</a:t>
-            </a:r>
-          </a:p>
-          <a:p>
-            <a:pPr algn="l">
-              <a:lnSpc>
-                <a:spcPct val="105000"/>
-              </a:lnSpc>
-              <a:spcBef>
-                <a:spcPts val="0"/>
-              </a:spcBef>
-              <a:spcAft>
-                <a:spcPts val="500"/>
-              </a:spcAft>
-            </a:pPr>
-            <a:r>
-              <a:rPr sz="1100" b="0">
-                <a:solidFill>
-                  <a:srgbClr val="F5A623"/>
-                </a:solidFill>
-                <a:latin typeface="Segoe UI"/>
-              </a:rPr>
-              <a:t>•  </a:t>
-            </a:r>
-            <a:r>
-              <a:rPr sz="1100" b="0">
-                <a:solidFill>
-                  <a:srgbClr val="8B949E"/>
-                </a:solidFill>
-                <a:latin typeface="Segoe UI"/>
-              </a:rPr>
-              <a:t>Nessuna ricompilazione per l'update.</a:t>
-            </a:r>
-          </a:p>
-        </p:txBody>
-      </p:sp>
-      <p:sp>
-        <p:nvSpPr>
-          <p:cNvPr id="10" name="Rounded Rectangle 9"/>
-          <p:cNvSpPr/>
-          <p:nvPr/>
-        </p:nvSpPr>
-        <p:spPr>
-          <a:xfrm>
-            <a:off x="8001000" y="2103120"/>
-            <a:ext cx="3566160" cy="3200400"/>
-          </a:xfrm>
-          <a:prstGeom prst="roundRect">
-            <a:avLst/>
-          </a:prstGeom>
-          <a:solidFill>
-            <a:srgbClr val="1B222E"/>
-          </a:solidFill>
-          <a:ln w="12700">
-            <a:solidFill>
-              <a:srgbClr val="30363D"/>
-            </a:solidFill>
-          </a:ln>
-          <a:effectLst/>
-        </p:spPr>
-        <p:style>
-          <a:lnRef idx="1">
-            <a:schemeClr val="accent1"/>
-          </a:lnRef>
-          <a:fillRef idx="3">
-            <a:schemeClr val="accent1"/>
-          </a:fillRef>
-          <a:effectRef idx="2">
-            <a:schemeClr val="accent1"/>
-          </a:effectRef>
-          <a:fontRef idx="minor">
-            <a:schemeClr val="lt1"/>
-          </a:fontRef>
-        </p:style>
-        <p:txBody>
-          <a:bodyPr rtlCol="0" anchor="ctr"/>
-          <a:lstStyle/>
-          <a:p>
-            <a:pPr algn="ctr"/>
-          </a:p>
-        </p:txBody>
-      </p:sp>
-      <p:sp>
-        <p:nvSpPr>
-          <p:cNvPr id="11" name="TextBox 10"/>
-          <p:cNvSpPr txBox="1"/>
-          <p:nvPr/>
-        </p:nvSpPr>
-        <p:spPr>
-          <a:xfrm>
-            <a:off x="8257031" y="2304288"/>
-            <a:ext cx="3108960" cy="2834640"/>
-          </a:xfrm>
-          <a:prstGeom prst="rect">
-            <a:avLst/>
-          </a:prstGeom>
-          <a:noFill/>
-        </p:spPr>
-        <p:txBody>
-          <a:bodyPr wrap="square" anchor="t" lIns="0" rIns="0" tIns="0" bIns="0">
-            <a:spAutoFit/>
-          </a:bodyPr>
-          <a:lstStyle/>
-          <a:p>
-            <a:pPr algn="l">
-              <a:lnSpc>
-                <a:spcPct val="105000"/>
-              </a:lnSpc>
-              <a:spcBef>
-                <a:spcPts val="0"/>
-              </a:spcBef>
-              <a:spcAft>
-                <a:spcPts val="500"/>
-              </a:spcAft>
-            </a:pPr>
-            <a:r>
-              <a:rPr sz="1350" b="1">
-                <a:solidFill>
-                  <a:srgbClr val="F85149"/>
-                </a:solidFill>
-                <a:latin typeface="Segoe UI"/>
-              </a:rPr>
-              <a:t>P3 — Modular</a:t>
-            </a:r>
-          </a:p>
-          <a:p>
-            <a:pPr algn="l">
-              <a:lnSpc>
-                <a:spcPct val="105000"/>
-              </a:lnSpc>
-              <a:spcBef>
-                <a:spcPts val="0"/>
-              </a:spcBef>
-              <a:spcAft>
-                <a:spcPts val="500"/>
-              </a:spcAft>
-            </a:pPr>
-            <a:r>
-              <a:rPr sz="1100" b="0">
-                <a:solidFill>
-                  <a:srgbClr val="F85149"/>
-                </a:solidFill>
-                <a:latin typeface="Segoe UI"/>
-              </a:rPr>
-              <a:t>•  </a:t>
-            </a:r>
-            <a:r>
-              <a:rPr sz="1100" b="0">
-                <a:solidFill>
-                  <a:srgbClr val="8B949E"/>
-                </a:solidFill>
-                <a:latin typeface="Segoe UI"/>
-              </a:rPr>
-              <a:t>Il dispatcher copia link_state[0..5] in scratch_acts.</a:t>
-            </a:r>
-          </a:p>
-          <a:p>
-            <a:pPr algn="l">
-              <a:lnSpc>
-                <a:spcPct val="105000"/>
-              </a:lnSpc>
-              <a:spcBef>
-                <a:spcPts val="0"/>
-              </a:spcBef>
-              <a:spcAft>
-                <a:spcPts val="500"/>
-              </a:spcAft>
-            </a:pPr>
-            <a:r>
-              <a:rPr sz="1100" b="0">
-                <a:solidFill>
-                  <a:srgbClr val="F85149"/>
-                </a:solidFill>
-                <a:latin typeface="Segoe UI"/>
-              </a:rPr>
-              <a:t>•  </a:t>
-            </a:r>
-            <a:r>
-              <a:rPr sz="1100" b="0">
-                <a:solidFill>
-                  <a:srgbClr val="8B949E"/>
-                </a:solidFill>
-                <a:latin typeface="Segoe UI"/>
-              </a:rPr>
-              <a:t>I layer-block la trattano come qualunque attivazione.</a:t>
-            </a:r>
-          </a:p>
-          <a:p>
-            <a:pPr algn="l">
-              <a:lnSpc>
-                <a:spcPct val="105000"/>
-              </a:lnSpc>
-              <a:spcBef>
-                <a:spcPts val="0"/>
-              </a:spcBef>
-              <a:spcAft>
-                <a:spcPts val="500"/>
-              </a:spcAft>
-            </a:pPr>
-            <a:r>
-              <a:rPr sz="1100" b="0">
-                <a:solidFill>
-                  <a:srgbClr val="F85149"/>
-                </a:solidFill>
-                <a:latin typeface="Segoe UI"/>
-              </a:rPr>
-              <a:t>•  </a:t>
-            </a:r>
-            <a:r>
-              <a:rPr sz="1100" b="0">
-                <a:solidFill>
-                  <a:srgbClr val="8B949E"/>
-                </a:solidFill>
-                <a:latin typeface="Segoe UI"/>
-              </a:rPr>
-              <a:t>La feature attraversa la catena di tail call.</a:t>
-            </a:r>
-          </a:p>
-          <a:p>
-            <a:pPr algn="l">
-              <a:lnSpc>
-                <a:spcPct val="105000"/>
-              </a:lnSpc>
-              <a:spcBef>
-                <a:spcPts val="0"/>
-              </a:spcBef>
-              <a:spcAft>
-                <a:spcPts val="500"/>
-              </a:spcAft>
-            </a:pPr>
-            <a:r>
-              <a:rPr sz="1100" b="0">
-                <a:solidFill>
-                  <a:srgbClr val="F85149"/>
-                </a:solidFill>
-                <a:latin typeface="Segoe UI"/>
-              </a:rPr>
-              <a:t>•  </a:t>
-            </a:r>
-            <a:r>
-              <a:rPr sz="1100" b="0">
-                <a:solidFill>
-                  <a:srgbClr val="8B949E"/>
-                </a:solidFill>
-                <a:latin typeface="Segoe UI"/>
-              </a:rPr>
-              <a:t>Massima uniformità del datapath.</a:t>
-            </a:r>
-          </a:p>
-        </p:txBody>
-      </p:sp>
-      <p:sp>
-        <p:nvSpPr>
-          <p:cNvPr id="12" name="TextBox 11"/>
-          <p:cNvSpPr txBox="1"/>
-          <p:nvPr/>
-        </p:nvSpPr>
-        <p:spPr>
-          <a:xfrm>
-            <a:off x="640080" y="5532120"/>
-            <a:ext cx="10927080" cy="822960"/>
-          </a:xfrm>
-          <a:prstGeom prst="rect">
-            <a:avLst/>
-          </a:prstGeom>
-          <a:noFill/>
-        </p:spPr>
-        <p:txBody>
-          <a:bodyPr wrap="square" anchor="t" lIns="0" rIns="0" tIns="0" bIns="0">
-            <a:spAutoFit/>
-          </a:bodyPr>
-          <a:lstStyle/>
-          <a:p>
-            <a:pPr algn="l">
-              <a:lnSpc>
-                <a:spcPct val="115000"/>
-              </a:lnSpc>
-              <a:spcBef>
-                <a:spcPts val="0"/>
-              </a:spcBef>
-              <a:spcAft>
-                <a:spcPts val="200"/>
-              </a:spcAft>
-            </a:pPr>
-            <a:r>
-              <a:rPr sz="1300" b="1">
-                <a:solidFill>
-                  <a:srgbClr val="E6EDF3"/>
-                </a:solidFill>
-                <a:latin typeface="Segoe UI"/>
-              </a:rPr>
-              <a:t>Un unico monitor userspace </a:t>
-            </a:r>
-            <a:r>
-              <a:rPr sz="1300" b="1">
-                <a:solidFill>
-                  <a:srgbClr val="3FD0C8"/>
-                </a:solidFill>
-                <a:latin typeface="Consolas"/>
-              </a:rPr>
-              <a:t>(link_state_monitor.py)</a:t>
-            </a:r>
-            <a:r>
-              <a:rPr sz="1300" b="0">
-                <a:solidFill>
-                  <a:srgbClr val="8B949E"/>
-                </a:solidFill>
-                <a:latin typeface="Segoe UI"/>
-              </a:rPr>
-              <a:t> alimenta la stessa mappa condivisa: il fast-reroute reagisce ai guasti indipendentemente dalla pipeline scelta.</a:t>
+              <a:t>shared/bench_model_add.py registra 3 model_id concorrenti con offset non sovrapposti in arch_weights (template) / layer_weights (modular), eseguito in Kathara con root+BCC. hardcoded rigenera il sorgente C e ricompila/ricarica il programma ad ogni modello (nessuna via incrementale per design); template/modular caricano il programma XDP una sola volta e poi scrivono solo la mappa dei pesi (bpf_map_update_elem).</a:t>
             </a:r>
           </a:p>
         </p:txBody>
@@ -10556,7 +10710,7 @@
                 </a:solidFill>
                 <a:latin typeface="Georgia"/>
               </a:rPr>
-              <a:t>I vincoli del verifier</a:t>
+              <a:t>link_state nelle tre pipeline</a:t>
             </a:r>
           </a:p>
         </p:txBody>
@@ -10601,7 +10755,7 @@
                 </a:solidFill>
                 <a:latin typeface="Segoe UI"/>
               </a:rPr>
-              <a:t>Perché il codice ha questa forma</a:t>
+              <a:t>Stessa mappa, tre modi di leggerla</a:t>
             </a:r>
           </a:p>
         </p:txBody>
@@ -10614,8 +10768,8 @@
         </p:nvSpPr>
         <p:spPr>
           <a:xfrm>
-            <a:off x="640080" y="2148840"/>
-            <a:ext cx="5349240" cy="1874519"/>
+            <a:off x="640080" y="2103120"/>
+            <a:ext cx="3520440" cy="3200400"/>
           </a:xfrm>
           <a:prstGeom prst="roundRect">
             <a:avLst/>
@@ -10660,8 +10814,8 @@
         </p:nvSpPr>
         <p:spPr>
           <a:xfrm>
-            <a:off x="896112" y="2350008"/>
-            <a:ext cx="4892040" cy="1508760"/>
+            <a:off x="896112" y="2304288"/>
+            <a:ext cx="3063240" cy="2834640"/>
           </a:xfrm>
           <a:prstGeom prst="rect">
             <a:avLst/>
@@ -10688,11 +10842,11 @@
             <a:r>
               <a:rPr sz="1350" b="1">
                 <a:solidFill>
-                  <a:srgbClr val="F5A623"/>
-                </a:solidFill>
-                <a:latin typeface="Segoe UI"/>
-              </a:rPr>
-              <a:t>No array statici indicizzati</a:t>
+                  <a:srgbClr val="3FB950"/>
+                </a:solidFill>
+                <a:latin typeface="Segoe UI"/>
+              </a:rPr>
+              <a:t>P1 — Hardcoded</a:t>
             </a:r>
           </a:p>
           <a:p>
@@ -10710,7 +10864,7 @@
             <a:r>
               <a:rPr sz="1100" b="0">
                 <a:solidFill>
-                  <a:srgbClr val="F5A623"/>
+                  <a:srgbClr val="3FB950"/>
                 </a:solidFill>
                 <a:latin typeface="Segoe UI"/>
               </a:rPr>
@@ -10723,7 +10877,7 @@
                 </a:solidFill>
                 <a:latin typeface="Segoe UI"/>
               </a:rPr>
-              <a:t>static const indicizzato da variabile runtime → relocation fallisce, l'accesso collassa a 0.</a:t>
+              <a:t>6 lookup link_state[i] all'inizio dell'inferenza.</a:t>
             </a:r>
           </a:p>
           <a:p>
@@ -10741,7 +10895,7 @@
             <a:r>
               <a:rPr sz="1100" b="0">
                 <a:solidFill>
-                  <a:srgbClr val="F5A623"/>
+                  <a:srgbClr val="3FB950"/>
                 </a:solidFill>
                 <a:latin typeface="Segoe UI"/>
               </a:rPr>
@@ -10754,7 +10908,69 @@
                 </a:solidFill>
                 <a:latin typeface="Segoe UI"/>
               </a:rPr>
-              <a:t>P1: uno switch(iface) e uno switch(node) unici, scalari su stack.</a:t>
+              <a:t>Sommati come ls_i * w[j,i] con w letterali C.</a:t>
+            </a:r>
+          </a:p>
+          <a:p>
+            <a:pPr algn="l">
+              <a:lnSpc>
+                <a:spcPct val="105000"/>
+              </a:lnSpc>
+              <a:spcBef>
+                <a:spcPts val="0"/>
+              </a:spcBef>
+              <a:spcAft>
+                <a:spcPts val="500"/>
+              </a:spcAft>
+            </a:pPr>
+            <a:r>
+              <a:rPr sz="1100" b="0">
+                <a:solidFill>
+                  <a:srgbClr val="3FB950"/>
+                </a:solidFill>
+                <a:latin typeface="Segoe UI"/>
+              </a:rPr>
+              <a:t>•  </a:t>
+            </a:r>
+            <a:r>
+              <a:rPr sz="1100" b="0">
+                <a:solidFill>
+                  <a:srgbClr val="8B949E"/>
+                </a:solidFill>
+                <a:latin typeface="Segoe UI"/>
+              </a:rPr>
+              <a:t>Unica mappa letta: è input, non peso.</a:t>
+            </a:r>
+          </a:p>
+          <a:p>
+            <a:pPr algn="l">
+              <a:lnSpc>
+                <a:spcPct val="105000"/>
+              </a:lnSpc>
+              <a:spcBef>
+                <a:spcPts val="0"/>
+              </a:spcBef>
+              <a:spcAft>
+                <a:spcPts val="500"/>
+              </a:spcAft>
+            </a:pPr>
+            <a:r>
+              <a:rPr sz="1100" b="0">
+                <a:solidFill>
+                  <a:srgbClr val="3FB950"/>
+                </a:solidFill>
+                <a:latin typeface="Segoe UI"/>
+              </a:rPr>
+              <a:t>•  </a:t>
+            </a:r>
+            <a:r>
+              <a:rPr sz="1100" b="0">
+                <a:solidFill>
+                  <a:srgbClr val="8B949E"/>
+                </a:solidFill>
+                <a:latin typeface="Segoe UI"/>
+              </a:rPr>
+              <a:t>Design hardcoded puro preservato.</a:t>
             </a:r>
           </a:p>
         </p:txBody>
@@ -10767,8 +10983,8 @@
         </p:nvSpPr>
         <p:spPr>
           <a:xfrm>
-            <a:off x="6217920" y="2148840"/>
-            <a:ext cx="5349240" cy="1874519"/>
+            <a:off x="4315968" y="2103120"/>
+            <a:ext cx="3520440" cy="3200400"/>
           </a:xfrm>
           <a:prstGeom prst="roundRect">
             <a:avLst/>
@@ -10813,8 +11029,8 @@
         </p:nvSpPr>
         <p:spPr>
           <a:xfrm>
-            <a:off x="6473952" y="2350008"/>
-            <a:ext cx="4892040" cy="1508760"/>
+            <a:off x="4572000" y="2304288"/>
+            <a:ext cx="3063240" cy="2834640"/>
           </a:xfrm>
           <a:prstGeom prst="rect">
             <a:avLst/>
@@ -10845,7 +11061,7 @@
                 </a:solidFill>
                 <a:latin typeface="Segoe UI"/>
               </a:rPr>
-              <a:t>No esplosione dei rami</a:t>
+              <a:t>P2 — Template</a:t>
             </a:r>
           </a:p>
           <a:p>
@@ -10876,7 +11092,7 @@
                 </a:solidFill>
                 <a:latin typeface="Segoe UI"/>
               </a:rPr>
-              <a:t>switch per-neurone → O((7·52)^neuroni) percorsi: il verifier si arrende.</a:t>
+              <a:t>Lookup link_state[i] nel loop fc1.</a:t>
             </a:r>
           </a:p>
           <a:p>
@@ -10907,7 +11123,69 @@
                 </a:solidFill>
                 <a:latin typeface="Segoe UI"/>
               </a:rPr>
-              <a:t>Un solo switch che assegna il contributo di tutti i neuroni insieme: O(7+52).</a:t>
+              <a:t>Prodotto con arch_weights[woff + j*65 + i].</a:t>
+            </a:r>
+          </a:p>
+          <a:p>
+            <a:pPr algn="l">
+              <a:lnSpc>
+                <a:spcPct val="105000"/>
+              </a:lnSpc>
+              <a:spcBef>
+                <a:spcPts val="0"/>
+              </a:spcBef>
+              <a:spcAft>
+                <a:spcPts val="500"/>
+              </a:spcAft>
+            </a:pPr>
+            <a:r>
+              <a:rPr sz="1100" b="0">
+                <a:solidFill>
+                  <a:srgbClr val="F5A623"/>
+                </a:solidFill>
+                <a:latin typeface="Segoe UI"/>
+              </a:rPr>
+              <a:t>•  </a:t>
+            </a:r>
+            <a:r>
+              <a:rPr sz="1100" b="0">
+                <a:solidFill>
+                  <a:srgbClr val="8B949E"/>
+                </a:solidFill>
+                <a:latin typeface="Segoe UI"/>
+              </a:rPr>
+              <a:t>Stessa mappa, pesi separati in BPF_ARRAY.</a:t>
+            </a:r>
+          </a:p>
+          <a:p>
+            <a:pPr algn="l">
+              <a:lnSpc>
+                <a:spcPct val="105000"/>
+              </a:lnSpc>
+              <a:spcBef>
+                <a:spcPts val="0"/>
+              </a:spcBef>
+              <a:spcAft>
+                <a:spcPts val="500"/>
+              </a:spcAft>
+            </a:pPr>
+            <a:r>
+              <a:rPr sz="1100" b="0">
+                <a:solidFill>
+                  <a:srgbClr val="F5A623"/>
+                </a:solidFill>
+                <a:latin typeface="Segoe UI"/>
+              </a:rPr>
+              <a:t>•  </a:t>
+            </a:r>
+            <a:r>
+              <a:rPr sz="1100" b="0">
+                <a:solidFill>
+                  <a:srgbClr val="8B949E"/>
+                </a:solidFill>
+                <a:latin typeface="Segoe UI"/>
+              </a:rPr>
+              <a:t>Nessuna ricompilazione per l'update.</a:t>
             </a:r>
           </a:p>
         </p:txBody>
@@ -10920,8 +11198,8 @@
         </p:nvSpPr>
         <p:spPr>
           <a:xfrm>
-            <a:off x="640080" y="4206240"/>
-            <a:ext cx="5349240" cy="1874519"/>
+            <a:off x="8001000" y="2103120"/>
+            <a:ext cx="3566160" cy="3200400"/>
           </a:xfrm>
           <a:prstGeom prst="roundRect">
             <a:avLst/>
@@ -10966,8 +11244,8 @@
         </p:nvSpPr>
         <p:spPr>
           <a:xfrm>
-            <a:off x="896112" y="4407407"/>
-            <a:ext cx="4892040" cy="1508760"/>
+            <a:off x="8257031" y="2304288"/>
+            <a:ext cx="3108960" cy="2834640"/>
           </a:xfrm>
           <a:prstGeom prst="rect">
             <a:avLst/>
@@ -10994,86 +11272,408 @@
             <a:r>
               <a:rPr sz="1350" b="1">
                 <a:solidFill>
+                  <a:srgbClr val="F85149"/>
+                </a:solidFill>
+                <a:latin typeface="Segoe UI"/>
+              </a:rPr>
+              <a:t>P3 — Modular</a:t>
+            </a:r>
+          </a:p>
+          <a:p>
+            <a:pPr algn="l">
+              <a:lnSpc>
+                <a:spcPct val="105000"/>
+              </a:lnSpc>
+              <a:spcBef>
+                <a:spcPts val="0"/>
+              </a:spcBef>
+              <a:spcAft>
+                <a:spcPts val="500"/>
+              </a:spcAft>
+            </a:pPr>
+            <a:r>
+              <a:rPr sz="1100" b="0">
+                <a:solidFill>
+                  <a:srgbClr val="F85149"/>
+                </a:solidFill>
+                <a:latin typeface="Segoe UI"/>
+              </a:rPr>
+              <a:t>•  </a:t>
+            </a:r>
+            <a:r>
+              <a:rPr sz="1100" b="0">
+                <a:solidFill>
+                  <a:srgbClr val="8B949E"/>
+                </a:solidFill>
+                <a:latin typeface="Segoe UI"/>
+              </a:rPr>
+              <a:t>Il dispatcher copia link_state[0..5] in scratch_acts.</a:t>
+            </a:r>
+          </a:p>
+          <a:p>
+            <a:pPr algn="l">
+              <a:lnSpc>
+                <a:spcPct val="105000"/>
+              </a:lnSpc>
+              <a:spcBef>
+                <a:spcPts val="0"/>
+              </a:spcBef>
+              <a:spcAft>
+                <a:spcPts val="500"/>
+              </a:spcAft>
+            </a:pPr>
+            <a:r>
+              <a:rPr sz="1100" b="0">
+                <a:solidFill>
+                  <a:srgbClr val="F85149"/>
+                </a:solidFill>
+                <a:latin typeface="Segoe UI"/>
+              </a:rPr>
+              <a:t>•  </a:t>
+            </a:r>
+            <a:r>
+              <a:rPr sz="1100" b="0">
+                <a:solidFill>
+                  <a:srgbClr val="8B949E"/>
+                </a:solidFill>
+                <a:latin typeface="Segoe UI"/>
+              </a:rPr>
+              <a:t>I layer-block la trattano come qualunque attivazione.</a:t>
+            </a:r>
+          </a:p>
+          <a:p>
+            <a:pPr algn="l">
+              <a:lnSpc>
+                <a:spcPct val="105000"/>
+              </a:lnSpc>
+              <a:spcBef>
+                <a:spcPts val="0"/>
+              </a:spcBef>
+              <a:spcAft>
+                <a:spcPts val="500"/>
+              </a:spcAft>
+            </a:pPr>
+            <a:r>
+              <a:rPr sz="1100" b="0">
+                <a:solidFill>
+                  <a:srgbClr val="F85149"/>
+                </a:solidFill>
+                <a:latin typeface="Segoe UI"/>
+              </a:rPr>
+              <a:t>•  </a:t>
+            </a:r>
+            <a:r>
+              <a:rPr sz="1100" b="0">
+                <a:solidFill>
+                  <a:srgbClr val="8B949E"/>
+                </a:solidFill>
+                <a:latin typeface="Segoe UI"/>
+              </a:rPr>
+              <a:t>La feature attraversa la catena di tail call.</a:t>
+            </a:r>
+          </a:p>
+          <a:p>
+            <a:pPr algn="l">
+              <a:lnSpc>
+                <a:spcPct val="105000"/>
+              </a:lnSpc>
+              <a:spcBef>
+                <a:spcPts val="0"/>
+              </a:spcBef>
+              <a:spcAft>
+                <a:spcPts val="500"/>
+              </a:spcAft>
+            </a:pPr>
+            <a:r>
+              <a:rPr sz="1100" b="0">
+                <a:solidFill>
+                  <a:srgbClr val="F85149"/>
+                </a:solidFill>
+                <a:latin typeface="Segoe UI"/>
+              </a:rPr>
+              <a:t>•  </a:t>
+            </a:r>
+            <a:r>
+              <a:rPr sz="1100" b="0">
+                <a:solidFill>
+                  <a:srgbClr val="8B949E"/>
+                </a:solidFill>
+                <a:latin typeface="Segoe UI"/>
+              </a:rPr>
+              <a:t>Massima uniformità del datapath.</a:t>
+            </a:r>
+          </a:p>
+        </p:txBody>
+      </p:sp>
+      <p:sp>
+        <p:nvSpPr>
+          <p:cNvPr id="12" name="TextBox 11"/>
+          <p:cNvSpPr txBox="1"/>
+          <p:nvPr/>
+        </p:nvSpPr>
+        <p:spPr>
+          <a:xfrm>
+            <a:off x="640080" y="5532120"/>
+            <a:ext cx="10927080" cy="822960"/>
+          </a:xfrm>
+          <a:prstGeom prst="rect">
+            <a:avLst/>
+          </a:prstGeom>
+          <a:noFill/>
+        </p:spPr>
+        <p:txBody>
+          <a:bodyPr wrap="square" anchor="t" lIns="0" rIns="0" tIns="0" bIns="0">
+            <a:spAutoFit/>
+          </a:bodyPr>
+          <a:lstStyle/>
+          <a:p>
+            <a:pPr algn="l">
+              <a:lnSpc>
+                <a:spcPct val="115000"/>
+              </a:lnSpc>
+              <a:spcBef>
+                <a:spcPts val="0"/>
+              </a:spcBef>
+              <a:spcAft>
+                <a:spcPts val="200"/>
+              </a:spcAft>
+            </a:pPr>
+            <a:r>
+              <a:rPr sz="1300" b="1">
+                <a:solidFill>
+                  <a:srgbClr val="E6EDF3"/>
+                </a:solidFill>
+                <a:latin typeface="Segoe UI"/>
+              </a:rPr>
+              <a:t>Un unico monitor userspace </a:t>
+            </a:r>
+            <a:r>
+              <a:rPr sz="1300" b="1">
+                <a:solidFill>
+                  <a:srgbClr val="3FD0C8"/>
+                </a:solidFill>
+                <a:latin typeface="Consolas"/>
+              </a:rPr>
+              <a:t>(link_state_monitor.py)</a:t>
+            </a:r>
+            <a:r>
+              <a:rPr sz="1300" b="0">
+                <a:solidFill>
+                  <a:srgbClr val="8B949E"/>
+                </a:solidFill>
+                <a:latin typeface="Segoe UI"/>
+              </a:rPr>
+              <a:t> alimenta la stessa mappa condivisa: il fast-reroute reagisce ai guasti indipendentemente dalla pipeline scelta.</a:t>
+            </a:r>
+          </a:p>
+        </p:txBody>
+      </p:sp>
+    </p:spTree>
+  </p:cSld>
+  <p:clrMapOvr>
+    <a:masterClrMapping/>
+  </p:clrMapOvr>
+</p:sld>
+</file>
+
+<file path=ppt/slides/slide17.xml><?xml version="1.0" encoding="utf-8"?>
+<p:sld xmlns:a="http://schemas.openxmlformats.org/drawingml/2006/main" xmlns:p="http://schemas.openxmlformats.org/presentationml/2006/main" xmlns:r="http://schemas.openxmlformats.org/officeDocument/2006/relationships">
+  <p:cSld>
+    <p:spTree>
+      <p:nvGrpSpPr>
+        <p:cNvPr id="1" name=""/>
+        <p:cNvGrpSpPr/>
+        <p:nvPr/>
+      </p:nvGrpSpPr>
+      <p:grpSpPr/>
+      <p:sp>
+        <p:nvSpPr>
+          <p:cNvPr id="2" name="Rectangle 1"/>
+          <p:cNvSpPr/>
+          <p:nvPr/>
+        </p:nvSpPr>
+        <p:spPr>
+          <a:xfrm>
+            <a:off x="0" y="0"/>
+            <a:ext cx="12191695" cy="6858000"/>
+          </a:xfrm>
+          <a:prstGeom prst="rect">
+            <a:avLst/>
+          </a:prstGeom>
+          <a:solidFill>
+            <a:srgbClr val="0D1117"/>
+          </a:solidFill>
+          <a:ln>
+            <a:noFill/>
+          </a:ln>
+          <a:effectLst/>
+        </p:spPr>
+        <p:style>
+          <a:lnRef idx="1">
+            <a:schemeClr val="accent1"/>
+          </a:lnRef>
+          <a:fillRef idx="3">
+            <a:schemeClr val="accent1"/>
+          </a:fillRef>
+          <a:effectRef idx="2">
+            <a:schemeClr val="accent1"/>
+          </a:effectRef>
+          <a:fontRef idx="minor">
+            <a:schemeClr val="lt1"/>
+          </a:fontRef>
+        </p:style>
+        <p:txBody>
+          <a:bodyPr rtlCol="0" anchor="ctr"/>
+          <a:lstStyle/>
+          <a:p>
+            <a:pPr algn="ctr"/>
+          </a:p>
+        </p:txBody>
+      </p:sp>
+      <p:sp>
+        <p:nvSpPr>
+          <p:cNvPr id="3" name="TextBox 2"/>
+          <p:cNvSpPr txBox="1"/>
+          <p:nvPr/>
+        </p:nvSpPr>
+        <p:spPr>
+          <a:xfrm>
+            <a:off x="566928" y="384048"/>
+            <a:ext cx="1097280" cy="914400"/>
+          </a:xfrm>
+          <a:prstGeom prst="rect">
+            <a:avLst/>
+          </a:prstGeom>
+          <a:noFill/>
+        </p:spPr>
+        <p:txBody>
+          <a:bodyPr wrap="square" anchor="t" lIns="0" rIns="0" tIns="0" bIns="0">
+            <a:spAutoFit/>
+          </a:bodyPr>
+          <a:lstStyle/>
+          <a:p>
+            <a:pPr algn="l">
+              <a:lnSpc>
+                <a:spcPct val="100000"/>
+              </a:lnSpc>
+              <a:spcBef>
+                <a:spcPts val="0"/>
+              </a:spcBef>
+              <a:spcAft>
+                <a:spcPts val="200"/>
+              </a:spcAft>
+            </a:pPr>
+            <a:r>
+              <a:rPr sz="4000" b="1">
+                <a:solidFill>
                   <a:srgbClr val="F5A623"/>
                 </a:solidFill>
-                <a:latin typeface="Segoe UI"/>
-              </a:rPr>
-              <a:t>Protocollo per offset assoluto</a:t>
-            </a:r>
-          </a:p>
+                <a:latin typeface="Georgia"/>
+              </a:rPr>
+              <a:t>16</a:t>
+            </a:r>
+          </a:p>
+        </p:txBody>
+      </p:sp>
+      <p:sp>
+        <p:nvSpPr>
+          <p:cNvPr id="4" name="TextBox 3"/>
+          <p:cNvSpPr txBox="1"/>
+          <p:nvPr/>
+        </p:nvSpPr>
+        <p:spPr>
+          <a:xfrm>
+            <a:off x="1600200" y="365760"/>
+            <a:ext cx="9875520" cy="731520"/>
+          </a:xfrm>
+          <a:prstGeom prst="rect">
+            <a:avLst/>
+          </a:prstGeom>
+          <a:noFill/>
+        </p:spPr>
+        <p:txBody>
+          <a:bodyPr wrap="square" anchor="t" lIns="0" rIns="0" tIns="0" bIns="0">
+            <a:spAutoFit/>
+          </a:bodyPr>
+          <a:lstStyle/>
           <a:p>
             <a:pPr algn="l">
               <a:lnSpc>
-                <a:spcPct val="105000"/>
-              </a:lnSpc>
-              <a:spcBef>
-                <a:spcPts val="0"/>
-              </a:spcBef>
-              <a:spcAft>
-                <a:spcPts val="500"/>
-              </a:spcAft>
-            </a:pPr>
-            <a:r>
-              <a:rPr sz="1100" b="0">
-                <a:solidFill>
-                  <a:srgbClr val="F5A623"/>
-                </a:solidFill>
-                <a:latin typeface="Segoe UI"/>
-              </a:rPr>
-              <a:t>•  </a:t>
-            </a:r>
-            <a:r>
-              <a:rPr sz="1100" b="0">
+                <a:spcPct val="100000"/>
+              </a:lnSpc>
+              <a:spcBef>
+                <a:spcPts val="0"/>
+              </a:spcBef>
+              <a:spcAft>
+                <a:spcPts val="200"/>
+              </a:spcAft>
+            </a:pPr>
+            <a:r>
+              <a:rPr sz="3000" b="1">
+                <a:solidFill>
+                  <a:srgbClr val="E6EDF3"/>
+                </a:solidFill>
+                <a:latin typeface="Georgia"/>
+              </a:rPr>
+              <a:t>I vincoli del verifier</a:t>
+            </a:r>
+          </a:p>
+        </p:txBody>
+      </p:sp>
+      <p:sp>
+        <p:nvSpPr>
+          <p:cNvPr id="5" name="TextBox 4"/>
+          <p:cNvSpPr txBox="1"/>
+          <p:nvPr/>
+        </p:nvSpPr>
+        <p:spPr>
+          <a:xfrm>
+            <a:off x="1627632" y="1024128"/>
+            <a:ext cx="9875520" cy="457200"/>
+          </a:xfrm>
+          <a:prstGeom prst="rect">
+            <a:avLst/>
+          </a:prstGeom>
+          <a:noFill/>
+        </p:spPr>
+        <p:txBody>
+          <a:bodyPr wrap="square" anchor="t" lIns="0" rIns="0" tIns="0" bIns="0">
+            <a:spAutoFit/>
+          </a:bodyPr>
+          <a:lstStyle/>
+          <a:p>
+            <a:pPr algn="l">
+              <a:lnSpc>
+                <a:spcPct val="100000"/>
+              </a:lnSpc>
+              <a:spcBef>
+                <a:spcPts val="0"/>
+              </a:spcBef>
+              <a:spcAft>
+                <a:spcPts val="200"/>
+              </a:spcAft>
+            </a:pPr>
+            <a:r>
+              <a:rPr sz="1350" b="0">
                 <a:solidFill>
                   <a:srgbClr val="8B949E"/>
                 </a:solidFill>
                 <a:latin typeface="Segoe UI"/>
               </a:rPr>
-              <a:t>ip-&gt;protocol come bitfield si sballa con header minimali BCC/Kathara.</a:t>
-            </a:r>
-          </a:p>
-          <a:p>
-            <a:pPr algn="l">
-              <a:lnSpc>
-                <a:spcPct val="105000"/>
-              </a:lnSpc>
-              <a:spcBef>
-                <a:spcPts val="0"/>
-              </a:spcBef>
-              <a:spcAft>
-                <a:spcPts val="500"/>
-              </a:spcAft>
-            </a:pPr>
-            <a:r>
-              <a:rPr sz="1100" b="0">
-                <a:solidFill>
-                  <a:srgbClr val="F5A623"/>
-                </a:solidFill>
-                <a:latin typeface="Segoe UI"/>
-              </a:rPr>
-              <a:t>•  </a:t>
-            </a:r>
-            <a:r>
-              <a:rPr sz="1100" b="0">
-                <a:solidFill>
-                  <a:srgbClr val="8B949E"/>
-                </a:solidFill>
-                <a:latin typeface="Segoe UI"/>
-              </a:rPr>
-              <a:t>Letto all'offset RFC 791 (byte 9); UDP header via ihl*4.</a:t>
-            </a:r>
-          </a:p>
-        </p:txBody>
-      </p:sp>
-      <p:sp>
-        <p:nvSpPr>
-          <p:cNvPr id="12" name="Rounded Rectangle 11"/>
+              <a:t>Perché il codice ha questa forma</a:t>
+            </a:r>
+          </a:p>
+        </p:txBody>
+      </p:sp>
+      <p:sp>
+        <p:nvSpPr>
+          <p:cNvPr id="6" name="Rounded Rectangle 5"/>
           <p:cNvSpPr/>
           <p:nvPr/>
         </p:nvSpPr>
         <p:spPr>
           <a:xfrm>
-            <a:off x="6217920" y="4206240"/>
+            <a:off x="640080" y="2148840"/>
             <a:ext cx="5349240" cy="1874519"/>
           </a:xfrm>
           <a:prstGeom prst="roundRect">
@@ -11113,6 +11713,465 @@
       </p:sp>
       <p:sp>
         <p:nvSpPr>
+          <p:cNvPr id="7" name="TextBox 6"/>
+          <p:cNvSpPr txBox="1"/>
+          <p:nvPr/>
+        </p:nvSpPr>
+        <p:spPr>
+          <a:xfrm>
+            <a:off x="896112" y="2350008"/>
+            <a:ext cx="4892040" cy="1508760"/>
+          </a:xfrm>
+          <a:prstGeom prst="rect">
+            <a:avLst/>
+          </a:prstGeom>
+          <a:noFill/>
+        </p:spPr>
+        <p:txBody>
+          <a:bodyPr wrap="square" anchor="t" lIns="0" rIns="0" tIns="0" bIns="0">
+            <a:spAutoFit/>
+          </a:bodyPr>
+          <a:lstStyle/>
+          <a:p>
+            <a:pPr algn="l">
+              <a:lnSpc>
+                <a:spcPct val="105000"/>
+              </a:lnSpc>
+              <a:spcBef>
+                <a:spcPts val="0"/>
+              </a:spcBef>
+              <a:spcAft>
+                <a:spcPts val="500"/>
+              </a:spcAft>
+            </a:pPr>
+            <a:r>
+              <a:rPr sz="1350" b="1">
+                <a:solidFill>
+                  <a:srgbClr val="F5A623"/>
+                </a:solidFill>
+                <a:latin typeface="Segoe UI"/>
+              </a:rPr>
+              <a:t>No array statici indicizzati</a:t>
+            </a:r>
+          </a:p>
+          <a:p>
+            <a:pPr algn="l">
+              <a:lnSpc>
+                <a:spcPct val="105000"/>
+              </a:lnSpc>
+              <a:spcBef>
+                <a:spcPts val="0"/>
+              </a:spcBef>
+              <a:spcAft>
+                <a:spcPts val="500"/>
+              </a:spcAft>
+            </a:pPr>
+            <a:r>
+              <a:rPr sz="1100" b="0">
+                <a:solidFill>
+                  <a:srgbClr val="F5A623"/>
+                </a:solidFill>
+                <a:latin typeface="Segoe UI"/>
+              </a:rPr>
+              <a:t>•  </a:t>
+            </a:r>
+            <a:r>
+              <a:rPr sz="1100" b="0">
+                <a:solidFill>
+                  <a:srgbClr val="8B949E"/>
+                </a:solidFill>
+                <a:latin typeface="Segoe UI"/>
+              </a:rPr>
+              <a:t>static const indicizzato da variabile runtime → relocation fallisce, l'accesso collassa a 0.</a:t>
+            </a:r>
+          </a:p>
+          <a:p>
+            <a:pPr algn="l">
+              <a:lnSpc>
+                <a:spcPct val="105000"/>
+              </a:lnSpc>
+              <a:spcBef>
+                <a:spcPts val="0"/>
+              </a:spcBef>
+              <a:spcAft>
+                <a:spcPts val="500"/>
+              </a:spcAft>
+            </a:pPr>
+            <a:r>
+              <a:rPr sz="1100" b="0">
+                <a:solidFill>
+                  <a:srgbClr val="F5A623"/>
+                </a:solidFill>
+                <a:latin typeface="Segoe UI"/>
+              </a:rPr>
+              <a:t>•  </a:t>
+            </a:r>
+            <a:r>
+              <a:rPr sz="1100" b="0">
+                <a:solidFill>
+                  <a:srgbClr val="8B949E"/>
+                </a:solidFill>
+                <a:latin typeface="Segoe UI"/>
+              </a:rPr>
+              <a:t>P1: uno switch(iface) e uno switch(node) unici, scalari su stack.</a:t>
+            </a:r>
+          </a:p>
+        </p:txBody>
+      </p:sp>
+      <p:sp>
+        <p:nvSpPr>
+          <p:cNvPr id="8" name="Rounded Rectangle 7"/>
+          <p:cNvSpPr/>
+          <p:nvPr/>
+        </p:nvSpPr>
+        <p:spPr>
+          <a:xfrm>
+            <a:off x="6217920" y="2148840"/>
+            <a:ext cx="5349240" cy="1874519"/>
+          </a:xfrm>
+          <a:prstGeom prst="roundRect">
+            <a:avLst/>
+          </a:prstGeom>
+          <a:solidFill>
+            <a:srgbClr val="1B222E"/>
+          </a:solidFill>
+          <a:ln w="12700">
+            <a:solidFill>
+              <a:srgbClr val="30363D"/>
+            </a:solidFill>
+          </a:ln>
+          <a:effectLst/>
+        </p:spPr>
+        <p:style>
+          <a:lnRef idx="1">
+            <a:schemeClr val="accent1"/>
+          </a:lnRef>
+          <a:fillRef idx="3">
+            <a:schemeClr val="accent1"/>
+          </a:fillRef>
+          <a:effectRef idx="2">
+            <a:schemeClr val="accent1"/>
+          </a:effectRef>
+          <a:fontRef idx="minor">
+            <a:schemeClr val="lt1"/>
+          </a:fontRef>
+        </p:style>
+        <p:txBody>
+          <a:bodyPr rtlCol="0" anchor="ctr"/>
+          <a:lstStyle/>
+          <a:p>
+            <a:pPr algn="ctr"/>
+          </a:p>
+        </p:txBody>
+      </p:sp>
+      <p:sp>
+        <p:nvSpPr>
+          <p:cNvPr id="9" name="TextBox 8"/>
+          <p:cNvSpPr txBox="1"/>
+          <p:nvPr/>
+        </p:nvSpPr>
+        <p:spPr>
+          <a:xfrm>
+            <a:off x="6473952" y="2350008"/>
+            <a:ext cx="4892040" cy="1508760"/>
+          </a:xfrm>
+          <a:prstGeom prst="rect">
+            <a:avLst/>
+          </a:prstGeom>
+          <a:noFill/>
+        </p:spPr>
+        <p:txBody>
+          <a:bodyPr wrap="square" anchor="t" lIns="0" rIns="0" tIns="0" bIns="0">
+            <a:spAutoFit/>
+          </a:bodyPr>
+          <a:lstStyle/>
+          <a:p>
+            <a:pPr algn="l">
+              <a:lnSpc>
+                <a:spcPct val="105000"/>
+              </a:lnSpc>
+              <a:spcBef>
+                <a:spcPts val="0"/>
+              </a:spcBef>
+              <a:spcAft>
+                <a:spcPts val="500"/>
+              </a:spcAft>
+            </a:pPr>
+            <a:r>
+              <a:rPr sz="1350" b="1">
+                <a:solidFill>
+                  <a:srgbClr val="F5A623"/>
+                </a:solidFill>
+                <a:latin typeface="Segoe UI"/>
+              </a:rPr>
+              <a:t>No esplosione dei rami</a:t>
+            </a:r>
+          </a:p>
+          <a:p>
+            <a:pPr algn="l">
+              <a:lnSpc>
+                <a:spcPct val="105000"/>
+              </a:lnSpc>
+              <a:spcBef>
+                <a:spcPts val="0"/>
+              </a:spcBef>
+              <a:spcAft>
+                <a:spcPts val="500"/>
+              </a:spcAft>
+            </a:pPr>
+            <a:r>
+              <a:rPr sz="1100" b="0">
+                <a:solidFill>
+                  <a:srgbClr val="F5A623"/>
+                </a:solidFill>
+                <a:latin typeface="Segoe UI"/>
+              </a:rPr>
+              <a:t>•  </a:t>
+            </a:r>
+            <a:r>
+              <a:rPr sz="1100" b="0">
+                <a:solidFill>
+                  <a:srgbClr val="8B949E"/>
+                </a:solidFill>
+                <a:latin typeface="Segoe UI"/>
+              </a:rPr>
+              <a:t>switch per-neurone → O((7·52)^neuroni) percorsi: il verifier si arrende.</a:t>
+            </a:r>
+          </a:p>
+          <a:p>
+            <a:pPr algn="l">
+              <a:lnSpc>
+                <a:spcPct val="105000"/>
+              </a:lnSpc>
+              <a:spcBef>
+                <a:spcPts val="0"/>
+              </a:spcBef>
+              <a:spcAft>
+                <a:spcPts val="500"/>
+              </a:spcAft>
+            </a:pPr>
+            <a:r>
+              <a:rPr sz="1100" b="0">
+                <a:solidFill>
+                  <a:srgbClr val="F5A623"/>
+                </a:solidFill>
+                <a:latin typeface="Segoe UI"/>
+              </a:rPr>
+              <a:t>•  </a:t>
+            </a:r>
+            <a:r>
+              <a:rPr sz="1100" b="0">
+                <a:solidFill>
+                  <a:srgbClr val="8B949E"/>
+                </a:solidFill>
+                <a:latin typeface="Segoe UI"/>
+              </a:rPr>
+              <a:t>Un solo switch che assegna il contributo di tutti i neuroni insieme: O(7+52).</a:t>
+            </a:r>
+          </a:p>
+        </p:txBody>
+      </p:sp>
+      <p:sp>
+        <p:nvSpPr>
+          <p:cNvPr id="10" name="Rounded Rectangle 9"/>
+          <p:cNvSpPr/>
+          <p:nvPr/>
+        </p:nvSpPr>
+        <p:spPr>
+          <a:xfrm>
+            <a:off x="640080" y="4206240"/>
+            <a:ext cx="5349240" cy="1874519"/>
+          </a:xfrm>
+          <a:prstGeom prst="roundRect">
+            <a:avLst/>
+          </a:prstGeom>
+          <a:solidFill>
+            <a:srgbClr val="1B222E"/>
+          </a:solidFill>
+          <a:ln w="12700">
+            <a:solidFill>
+              <a:srgbClr val="30363D"/>
+            </a:solidFill>
+          </a:ln>
+          <a:effectLst/>
+        </p:spPr>
+        <p:style>
+          <a:lnRef idx="1">
+            <a:schemeClr val="accent1"/>
+          </a:lnRef>
+          <a:fillRef idx="3">
+            <a:schemeClr val="accent1"/>
+          </a:fillRef>
+          <a:effectRef idx="2">
+            <a:schemeClr val="accent1"/>
+          </a:effectRef>
+          <a:fontRef idx="minor">
+            <a:schemeClr val="lt1"/>
+          </a:fontRef>
+        </p:style>
+        <p:txBody>
+          <a:bodyPr rtlCol="0" anchor="ctr"/>
+          <a:lstStyle/>
+          <a:p>
+            <a:pPr algn="ctr"/>
+          </a:p>
+        </p:txBody>
+      </p:sp>
+      <p:sp>
+        <p:nvSpPr>
+          <p:cNvPr id="11" name="TextBox 10"/>
+          <p:cNvSpPr txBox="1"/>
+          <p:nvPr/>
+        </p:nvSpPr>
+        <p:spPr>
+          <a:xfrm>
+            <a:off x="896112" y="4407407"/>
+            <a:ext cx="4892040" cy="1508760"/>
+          </a:xfrm>
+          <a:prstGeom prst="rect">
+            <a:avLst/>
+          </a:prstGeom>
+          <a:noFill/>
+        </p:spPr>
+        <p:txBody>
+          <a:bodyPr wrap="square" anchor="t" lIns="0" rIns="0" tIns="0" bIns="0">
+            <a:spAutoFit/>
+          </a:bodyPr>
+          <a:lstStyle/>
+          <a:p>
+            <a:pPr algn="l">
+              <a:lnSpc>
+                <a:spcPct val="105000"/>
+              </a:lnSpc>
+              <a:spcBef>
+                <a:spcPts val="0"/>
+              </a:spcBef>
+              <a:spcAft>
+                <a:spcPts val="500"/>
+              </a:spcAft>
+            </a:pPr>
+            <a:r>
+              <a:rPr sz="1350" b="1">
+                <a:solidFill>
+                  <a:srgbClr val="F5A623"/>
+                </a:solidFill>
+                <a:latin typeface="Segoe UI"/>
+              </a:rPr>
+              <a:t>Protocollo per offset assoluto</a:t>
+            </a:r>
+          </a:p>
+          <a:p>
+            <a:pPr algn="l">
+              <a:lnSpc>
+                <a:spcPct val="105000"/>
+              </a:lnSpc>
+              <a:spcBef>
+                <a:spcPts val="0"/>
+              </a:spcBef>
+              <a:spcAft>
+                <a:spcPts val="500"/>
+              </a:spcAft>
+            </a:pPr>
+            <a:r>
+              <a:rPr sz="1100" b="0">
+                <a:solidFill>
+                  <a:srgbClr val="F5A623"/>
+                </a:solidFill>
+                <a:latin typeface="Segoe UI"/>
+              </a:rPr>
+              <a:t>•  </a:t>
+            </a:r>
+            <a:r>
+              <a:rPr sz="1100" b="0">
+                <a:solidFill>
+                  <a:srgbClr val="8B949E"/>
+                </a:solidFill>
+                <a:latin typeface="Segoe UI"/>
+              </a:rPr>
+              <a:t>ip-&gt;protocol come bitfield si sballa con header minimali BCC/Kathara.</a:t>
+            </a:r>
+          </a:p>
+          <a:p>
+            <a:pPr algn="l">
+              <a:lnSpc>
+                <a:spcPct val="105000"/>
+              </a:lnSpc>
+              <a:spcBef>
+                <a:spcPts val="0"/>
+              </a:spcBef>
+              <a:spcAft>
+                <a:spcPts val="500"/>
+              </a:spcAft>
+            </a:pPr>
+            <a:r>
+              <a:rPr sz="1100" b="0">
+                <a:solidFill>
+                  <a:srgbClr val="F5A623"/>
+                </a:solidFill>
+                <a:latin typeface="Segoe UI"/>
+              </a:rPr>
+              <a:t>•  </a:t>
+            </a:r>
+            <a:r>
+              <a:rPr sz="1100" b="0">
+                <a:solidFill>
+                  <a:srgbClr val="8B949E"/>
+                </a:solidFill>
+                <a:latin typeface="Segoe UI"/>
+              </a:rPr>
+              <a:t>Letto all'offset RFC 791 (byte 9); UDP header via ihl*4.</a:t>
+            </a:r>
+          </a:p>
+        </p:txBody>
+      </p:sp>
+      <p:sp>
+        <p:nvSpPr>
+          <p:cNvPr id="12" name="Rounded Rectangle 11"/>
+          <p:cNvSpPr/>
+          <p:nvPr/>
+        </p:nvSpPr>
+        <p:spPr>
+          <a:xfrm>
+            <a:off x="6217920" y="4206240"/>
+            <a:ext cx="5349240" cy="1874519"/>
+          </a:xfrm>
+          <a:prstGeom prst="roundRect">
+            <a:avLst/>
+          </a:prstGeom>
+          <a:solidFill>
+            <a:srgbClr val="1B222E"/>
+          </a:solidFill>
+          <a:ln w="12700">
+            <a:solidFill>
+              <a:srgbClr val="30363D"/>
+            </a:solidFill>
+          </a:ln>
+          <a:effectLst/>
+        </p:spPr>
+        <p:style>
+          <a:lnRef idx="1">
+            <a:schemeClr val="accent1"/>
+          </a:lnRef>
+          <a:fillRef idx="3">
+            <a:schemeClr val="accent1"/>
+          </a:fillRef>
+          <a:effectRef idx="2">
+            <a:schemeClr val="accent1"/>
+          </a:effectRef>
+          <a:fontRef idx="minor">
+            <a:schemeClr val="lt1"/>
+          </a:fontRef>
+        </p:style>
+        <p:txBody>
+          <a:bodyPr rtlCol="0" anchor="ctr"/>
+          <a:lstStyle/>
+          <a:p>
+            <a:pPr algn="ctr"/>
+          </a:p>
+        </p:txBody>
+      </p:sp>
+      <p:sp>
+        <p:nvSpPr>
           <p:cNvPr id="13" name="TextBox 12"/>
           <p:cNvSpPr txBox="1"/>
           <p:nvPr/>
@@ -11226,7 +12285,7 @@
 </p:sld>
 </file>
 
-<file path=ppt/slides/slide17.xml><?xml version="1.0" encoding="utf-8"?>
+<file path=ppt/slides/slide18.xml><?xml version="1.0" encoding="utf-8"?>
 <p:sld xmlns:a="http://schemas.openxmlformats.org/drawingml/2006/main" xmlns:p="http://schemas.openxmlformats.org/presentationml/2006/main" xmlns:r="http://schemas.openxmlformats.org/officeDocument/2006/relationships">
   <p:cSld>
     <p:spTree>

--- a/docs/IPA_eBPF_pipelines.pptx
+++ b/docs/IPA_eBPF_pipelines.pptx
@@ -4146,7 +4146,7 @@
                 </a:solidFill>
                 <a:latin typeface="Consolas"/>
               </a:rPr>
-              <a:t>layer_65_4</a:t>
+              <a:t>layer_first</a:t>
             </a:r>
           </a:p>
           <a:p>
@@ -4168,7 +4168,7 @@
                 </a:solidFill>
                 <a:latin typeface="Segoe UI"/>
               </a:rPr>
-              <a:t>fc1 + ReLU</a:t>
+              <a:t>sparso, n_out runtime</a:t>
             </a:r>
           </a:p>
         </p:txBody>
@@ -4348,7 +4348,7 @@
                 </a:solidFill>
                 <a:latin typeface="Consolas"/>
               </a:rPr>
-              <a:t>layer_4_4</a:t>
+              <a:t>layer_hidden</a:t>
             </a:r>
           </a:p>
           <a:p>
@@ -4370,7 +4370,7 @@
                 </a:solidFill>
                 <a:latin typeface="Segoe UI"/>
               </a:rPr>
-              <a:t>fc2 + ReLU</a:t>
+              <a:t>denso, n_in/n_out runtime</a:t>
             </a:r>
           </a:p>
         </p:txBody>
@@ -4550,7 +4550,7 @@
                 </a:solidFill>
                 <a:latin typeface="Consolas"/>
               </a:rPr>
-              <a:t>layer_4_7</a:t>
+              <a:t>layer_hidden</a:t>
             </a:r>
           </a:p>
           <a:p>
@@ -4572,7 +4572,7 @@
                 </a:solidFill>
                 <a:latin typeface="Segoe UI"/>
               </a:rPr>
-              <a:t>out + argmax</a:t>
+              <a:t>ultimo layer, argmax</a:t>
             </a:r>
           </a:p>
         </p:txBody>
@@ -5047,7 +5047,7 @@
                 </a:solidFill>
                 <a:latin typeface="Consolas"/>
               </a:rPr>
-              <a:t>19.8 KB mappe</a:t>
+              <a:t>16.5 KB mappe</a:t>
             </a:r>
           </a:p>
         </p:txBody>
@@ -5138,7 +5138,7 @@
                 </a:solidFill>
                 <a:latin typeface="Consolas"/>
               </a:rPr>
-              <a:t>590 ns · 1.70 Mpps</a:t>
+              <a:t>738 ns · 1.36 Mpps</a:t>
             </a:r>
           </a:p>
         </p:txBody>
@@ -5260,7 +5260,7 @@
                 </a:solidFill>
                 <a:latin typeface="Segoe UI"/>
               </a:rPr>
-              <a:t>Ogni layer è un programma eBPF separato; sono concatenati via layer_chain (BPF_PROG_ARRAY) con tail call.</a:t>
+              <a:t>Due soli programmi generici: layer_first (hop 0, lettura sparsa del vettore 65-feature) e layer_hidden (hop 1..N-1, denso n_in-&gt;n_out) -- non uno per layer fisso.</a:t>
             </a:r>
           </a:p>
           <a:p>
@@ -5291,7 +5291,7 @@
                 </a:solidFill>
                 <a:latin typeface="Segoe UI"/>
               </a:rPr>
-              <a:t>Le attivazioni intermedie passano in una BPF_PERCPU_ARRAY (scratch): niente stack, niente contese.</a:t>
+              <a:t>Profondita E larghezza sono dinamiche: layer_registry/layer_shapes dicono a runtime quanti layer ha il modello e la forma di ciascuno.</a:t>
             </a:r>
           </a:p>
           <a:p>
@@ -5322,7 +5322,7 @@
                 </a:solidFill>
                 <a:latin typeface="Segoe UI"/>
               </a:rPr>
-              <a:t>Il dispatcher scrive le feature in scratch — incluse link_state[0..5] nei primi 6 slot — e avvia la catena.</a:t>
+              <a:t>“Ultimo layer” e' deciso dai dati (layer_idx+1==n_layers), non da quale programma occupa lo slot di tail-call -- modelli con profondita diverse condividono lo stesso chain senza conflitti.</a:t>
             </a:r>
           </a:p>
           <a:p>
@@ -5353,7 +5353,7 @@
                 </a:solidFill>
                 <a:latin typeface="Segoe UI"/>
               </a:rPr>
-              <a:t>3 tail call reali per pacchetto; l'ultimo blocco calcola argmax → mac_table[classe] → bpf_redirect.</a:t>
+              <a:t>N tail call reali per pacchetto (dipende dalla profondita del modello); l’ultimo hop calcola argmax -&gt; mac_table[classe] -&gt; bpf_redirect.</a:t>
             </a:r>
           </a:p>
           <a:p>
@@ -5384,7 +5384,7 @@
                 </a:solidFill>
                 <a:latin typeface="Segoe UI"/>
               </a:rPr>
-              <a:t>Aggiornamento = cambia pesi e/o sequenza dei layer; hot-swap di un singolo blocco senza reload.</a:t>
+              <a:t>Aggiornamento = load_modular_weights() scrive pesi + layer_shapes + layer_registry (nuova lista layer): cambia profondita E larghezza senza reload dei 2 programmi eBPF.</a:t>
             </a:r>
           </a:p>
         </p:txBody>
@@ -8509,15 +8509,8 @@
                     <a:bodyPr/>
                     <a:lstStyle/>
                     <a:p>
-                      <a:pPr algn="r"/>
                       <a:r>
-                        <a:rPr sz="1250" b="0">
-                          <a:solidFill>
-                            <a:srgbClr val="E6EDF3"/>
-                          </a:solidFill>
-                          <a:latin typeface="Consolas"/>
-                        </a:rPr>
-                        <a:t>996</a:t>
+                        <a:t>883</a:t>
                       </a:r>
                     </a:p>
                   </a:txBody>
@@ -8532,15 +8525,8 @@
                     <a:bodyPr/>
                     <a:lstStyle/>
                     <a:p>
-                      <a:pPr algn="r"/>
                       <a:r>
-                        <a:rPr sz="1250" b="0">
-                          <a:solidFill>
-                            <a:srgbClr val="E6EDF3"/>
-                          </a:solidFill>
-                          <a:latin typeface="Consolas"/>
-                        </a:rPr>
-                        <a:t>2 618</a:t>
+                        <a:t>5 951</a:t>
                       </a:r>
                     </a:p>
                   </a:txBody>
@@ -8555,15 +8541,8 @@
                     <a:bodyPr/>
                     <a:lstStyle/>
                     <a:p>
-                      <a:pPr algn="r"/>
                       <a:r>
-                        <a:rPr sz="1250" b="0">
-                          <a:solidFill>
-                            <a:srgbClr val="E6EDF3"/>
-                          </a:solidFill>
-                          <a:latin typeface="Consolas"/>
-                        </a:rPr>
-                        <a:t>13 441</a:t>
+                        <a:t>5 931</a:t>
                       </a:r>
                     </a:p>
                   </a:txBody>
@@ -8603,15 +8582,8 @@
                     <a:bodyPr/>
                     <a:lstStyle/>
                     <a:p>
-                      <a:pPr algn="r"/>
                       <a:r>
-                        <a:rPr sz="1250" b="0">
-                          <a:solidFill>
-                            <a:srgbClr val="E6EDF3"/>
-                          </a:solidFill>
-                          <a:latin typeface="Consolas"/>
-                        </a:rPr>
-                        <a:t>4 658</a:t>
+                        <a:t>4 215</a:t>
                       </a:r>
                     </a:p>
                   </a:txBody>
@@ -8626,15 +8598,8 @@
                     <a:bodyPr/>
                     <a:lstStyle/>
                     <a:p>
-                      <a:pPr algn="r"/>
                       <a:r>
-                        <a:rPr sz="1250" b="0">
-                          <a:solidFill>
-                            <a:srgbClr val="E6EDF3"/>
-                          </a:solidFill>
-                          <a:latin typeface="Consolas"/>
-                        </a:rPr>
-                        <a:t>11 464</a:t>
+                        <a:t>27 097</a:t>
                       </a:r>
                     </a:p>
                   </a:txBody>
@@ -8649,15 +8614,8 @@
                     <a:bodyPr/>
                     <a:lstStyle/>
                     <a:p>
-                      <a:pPr algn="r"/>
                       <a:r>
-                        <a:rPr sz="1250" b="0">
-                          <a:solidFill>
-                            <a:srgbClr val="E6EDF3"/>
-                          </a:solidFill>
-                          <a:latin typeface="Consolas"/>
-                        </a:rPr>
-                        <a:t>57 224</a:t>
+                        <a:t>26 823</a:t>
                       </a:r>
                     </a:p>
                   </a:txBody>
@@ -8697,14 +8655,7 @@
                     <a:bodyPr/>
                     <a:lstStyle/>
                     <a:p>
-                      <a:pPr algn="r"/>
                       <a:r>
-                        <a:rPr sz="1250" b="0">
-                          <a:solidFill>
-                            <a:srgbClr val="E6EDF3"/>
-                          </a:solidFill>
-                          <a:latin typeface="Consolas"/>
-                        </a:rPr>
                         <a:t>0 (leaf)</a:t>
                       </a:r>
                     </a:p>
@@ -8720,14 +8671,7 @@
                     <a:bodyPr/>
                     <a:lstStyle/>
                     <a:p>
-                      <a:pPr algn="r"/>
                       <a:r>
-                        <a:rPr sz="1250" b="0">
-                          <a:solidFill>
-                            <a:srgbClr val="E6EDF3"/>
-                          </a:solidFill>
-                          <a:latin typeface="Consolas"/>
-                        </a:rPr>
                         <a:t>1</a:t>
                       </a:r>
                     </a:p>
@@ -8743,14 +8687,7 @@
                     <a:bodyPr/>
                     <a:lstStyle/>
                     <a:p>
-                      <a:pPr algn="r"/>
                       <a:r>
-                        <a:rPr sz="1250" b="0">
-                          <a:solidFill>
-                            <a:srgbClr val="E6EDF3"/>
-                          </a:solidFill>
-                          <a:latin typeface="Consolas"/>
-                        </a:rPr>
                         <a:t>3</a:t>
                       </a:r>
                     </a:p>
@@ -8791,14 +8728,7 @@
                     <a:bodyPr/>
                     <a:lstStyle/>
                     <a:p>
-                      <a:pPr algn="r"/>
                       <a:r>
-                        <a:rPr sz="1250" b="0">
-                          <a:solidFill>
-                            <a:srgbClr val="E6EDF3"/>
-                          </a:solidFill>
-                          <a:latin typeface="Consolas"/>
-                        </a:rPr>
                         <a:t>8</a:t>
                       </a:r>
                     </a:p>
@@ -8814,14 +8744,7 @@
                     <a:bodyPr/>
                     <a:lstStyle/>
                     <a:p>
-                      <a:pPr algn="r"/>
                       <a:r>
-                        <a:rPr sz="1250" b="0">
-                          <a:solidFill>
-                            <a:srgbClr val="E6EDF3"/>
-                          </a:solidFill>
-                          <a:latin typeface="Consolas"/>
-                        </a:rPr>
                         <a:t>322</a:t>
                       </a:r>
                     </a:p>
@@ -8837,14 +8760,7 @@
                     <a:bodyPr/>
                     <a:lstStyle/>
                     <a:p>
-                      <a:pPr algn="r"/>
                       <a:r>
-                        <a:rPr sz="1250" b="0">
-                          <a:solidFill>
-                            <a:srgbClr val="E6EDF3"/>
-                          </a:solidFill>
-                          <a:latin typeface="Consolas"/>
-                        </a:rPr>
                         <a:t>384</a:t>
                       </a:r>
                     </a:p>
@@ -8885,15 +8801,8 @@
                     <a:bodyPr/>
                     <a:lstStyle/>
                     <a:p>
-                      <a:pPr algn="r"/>
                       <a:r>
-                        <a:rPr sz="1250" b="0">
-                          <a:solidFill>
-                            <a:srgbClr val="E6EDF3"/>
-                          </a:solidFill>
-                          <a:latin typeface="Consolas"/>
-                        </a:rPr>
-                        <a:t>264</a:t>
+                        <a:t>168</a:t>
                       </a:r>
                     </a:p>
                   </a:txBody>
@@ -8908,15 +8817,8 @@
                     <a:bodyPr/>
                     <a:lstStyle/>
                     <a:p>
-                      <a:pPr algn="r"/>
                       <a:r>
-                        <a:rPr sz="1250" b="0">
-                          <a:solidFill>
-                            <a:srgbClr val="E6EDF3"/>
-                          </a:solidFill>
-                          <a:latin typeface="Consolas"/>
-                        </a:rPr>
-                        <a:t>7 560</a:t>
+                        <a:t>8 072</a:t>
                       </a:r>
                     </a:p>
                   </a:txBody>
@@ -8931,15 +8833,8 @@
                     <a:bodyPr/>
                     <a:lstStyle/>
                     <a:p>
-                      <a:pPr algn="r"/>
                       <a:r>
-                        <a:rPr sz="1250" b="0">
-                          <a:solidFill>
-                            <a:srgbClr val="E6EDF3"/>
-                          </a:solidFill>
-                          <a:latin typeface="Consolas"/>
-                        </a:rPr>
-                        <a:t>20 232</a:t>
+                        <a:t>16 904</a:t>
                       </a:r>
                     </a:p>
                   </a:txBody>
@@ -8979,15 +8874,8 @@
                     <a:bodyPr/>
                     <a:lstStyle/>
                     <a:p>
-                      <a:pPr algn="r"/>
                       <a:r>
-                        <a:rPr sz="1250" b="0">
-                          <a:solidFill>
-                            <a:srgbClr val="E6EDF3"/>
-                          </a:solidFill>
-                          <a:latin typeface="Consolas"/>
-                        </a:rPr>
-                        <a:t>32.0</a:t>
+                        <a:t>50.0</a:t>
                       </a:r>
                     </a:p>
                   </a:txBody>
@@ -9002,15 +8890,8 @@
                     <a:bodyPr/>
                     <a:lstStyle/>
                     <a:p>
-                      <a:pPr algn="r"/>
                       <a:r>
-                        <a:rPr sz="1250" b="0">
-                          <a:solidFill>
-                            <a:srgbClr val="E6EDF3"/>
-                          </a:solidFill>
-                          <a:latin typeface="Consolas"/>
-                        </a:rPr>
-                        <a:t>125.0</a:t>
+                        <a:t>411.0</a:t>
                       </a:r>
                     </a:p>
                   </a:txBody>
@@ -9025,15 +8906,8 @@
                     <a:bodyPr/>
                     <a:lstStyle/>
                     <a:p>
-                      <a:pPr algn="r"/>
                       <a:r>
-                        <a:rPr sz="1250" b="0">
-                          <a:solidFill>
-                            <a:srgbClr val="E6EDF3"/>
-                          </a:solidFill>
-                          <a:latin typeface="Consolas"/>
-                        </a:rPr>
-                        <a:t>590.0</a:t>
+                        <a:t>738.0</a:t>
                       </a:r>
                     </a:p>
                   </a:txBody>
@@ -9073,15 +8947,8 @@
                     <a:bodyPr/>
                     <a:lstStyle/>
                     <a:p>
-                      <a:pPr algn="r"/>
                       <a:r>
-                        <a:rPr sz="1250" b="0">
-                          <a:solidFill>
-                            <a:srgbClr val="E6EDF3"/>
-                          </a:solidFill>
-                          <a:latin typeface="Consolas"/>
-                        </a:rPr>
-                        <a:t>31.250</a:t>
+                        <a:t>20.000</a:t>
                       </a:r>
                     </a:p>
                   </a:txBody>
@@ -9096,15 +8963,8 @@
                     <a:bodyPr/>
                     <a:lstStyle/>
                     <a:p>
-                      <a:pPr algn="r"/>
                       <a:r>
-                        <a:rPr sz="1250" b="0">
-                          <a:solidFill>
-                            <a:srgbClr val="E6EDF3"/>
-                          </a:solidFill>
-                          <a:latin typeface="Consolas"/>
-                        </a:rPr>
-                        <a:t>8.000</a:t>
+                        <a:t>2.433</a:t>
                       </a:r>
                     </a:p>
                   </a:txBody>
@@ -9119,15 +8979,8 @@
                     <a:bodyPr/>
                     <a:lstStyle/>
                     <a:p>
-                      <a:pPr algn="r"/>
                       <a:r>
-                        <a:rPr sz="1250" b="0">
-                          <a:solidFill>
-                            <a:srgbClr val="E6EDF3"/>
-                          </a:solidFill>
-                          <a:latin typeface="Consolas"/>
-                        </a:rPr>
-                        <a:t>1.695</a:t>
+                        <a:t>1.355</a:t>
                       </a:r>
                     </a:p>
                   </a:txBody>
@@ -9167,15 +9020,8 @@
                     <a:bodyPr/>
                     <a:lstStyle/>
                     <a:p>
-                      <a:pPr algn="r"/>
                       <a:r>
-                        <a:rPr sz="1250" b="0">
-                          <a:solidFill>
-                            <a:srgbClr val="E6EDF3"/>
-                          </a:solidFill>
-                          <a:latin typeface="Consolas"/>
-                        </a:rPr>
-                        <a:t>38</a:t>
+                        <a:t>36</a:t>
                       </a:r>
                     </a:p>
                   </a:txBody>
@@ -9190,15 +9036,8 @@
                     <a:bodyPr/>
                     <a:lstStyle/>
                     <a:p>
-                      <a:pPr algn="r"/>
                       <a:r>
-                        <a:rPr sz="1250" b="0">
-                          <a:solidFill>
-                            <a:srgbClr val="E6EDF3"/>
-                          </a:solidFill>
-                          <a:latin typeface="Consolas"/>
-                        </a:rPr>
-                        <a:t>53</a:t>
+                        <a:t>67</a:t>
                       </a:r>
                     </a:p>
                   </a:txBody>
@@ -9213,15 +9052,8 @@
                     <a:bodyPr/>
                     <a:lstStyle/>
                     <a:p>
-                      <a:pPr algn="r"/>
                       <a:r>
-                        <a:rPr sz="1250" b="0">
-                          <a:solidFill>
-                            <a:srgbClr val="E6EDF3"/>
-                          </a:solidFill>
-                          <a:latin typeface="Consolas"/>
-                        </a:rPr>
-                        <a:t>60</a:t>
+                        <a:t>75</a:t>
                       </a:r>
                     </a:p>
                   </a:txBody>
@@ -9353,7 +9185,7 @@
                 </a:solidFill>
                 <a:latin typeface="Segoe UI"/>
               </a:rPr>
-              <a:t>P1 più veloce: 32 ns, 31.3 Mpps.</a:t>
+              <a:t>P1 più veloce: 50 ns, 20.0 Mpps.</a:t>
             </a:r>
           </a:p>
           <a:p>
@@ -9384,7 +9216,7 @@
                 </a:solidFill>
                 <a:latin typeface="Segoe UI"/>
               </a:rPr>
-              <a:t>P1 più compatto: 264 B, 996 istr.</a:t>
+              <a:t>P1 più compatto: 168 B, 883 istr.</a:t>
             </a:r>
           </a:p>
           <a:p>
@@ -9415,7 +9247,7 @@
                 </a:solidFill>
                 <a:latin typeface="Segoe UI"/>
               </a:rPr>
-              <a:t>Ogni costo cresce P1→P2→P3.</a:t>
+              <a:t>Tail call, memoria e latenza crescono P1→P2→P3.</a:t>
             </a:r>
           </a:p>
           <a:p>
@@ -9446,7 +9278,7 @@
                 </a:solidFill>
                 <a:latin typeface="Segoe UI"/>
               </a:rPr>
-              <a:t>P3 ≈13× istruzioni di P1.</a:t>
+              <a:t>P2/P3 quasi stesse istruzioni statiche (~5.9k): il costo di P3 e' nei tail call extra (3 vs 1), non nel codice.</a:t>
             </a:r>
           </a:p>
         </p:txBody>
@@ -21377,7 +21209,7 @@
                 </a:solidFill>
                 <a:latin typeface="Consolas"/>
               </a:rPr>
-              <a:t>arch_65_4_4_7</a:t>
+              <a:t>arch_generic_2layer</a:t>
             </a:r>
           </a:p>
           <a:p>
@@ -21399,7 +21231,7 @@
                 </a:solidFill>
                 <a:latin typeface="Segoe UI"/>
               </a:rPr>
-              <a:t>1 prog / arch</a:t>
+              <a:t>1 prog / n_h1,n_h2 runtime</a:t>
             </a:r>
           </a:p>
         </p:txBody>
@@ -22076,7 +21908,7 @@
                 </a:solidFill>
                 <a:latin typeface="Consolas"/>
               </a:rPr>
-              <a:t>7.4 KB mappe</a:t>
+              <a:t>7.9 KB mappe</a:t>
             </a:r>
           </a:p>
         </p:txBody>
@@ -22167,7 +21999,7 @@
                 </a:solidFill>
                 <a:latin typeface="Consolas"/>
               </a:rPr>
-              <a:t>125 ns · 8.0 Mpps</a:t>
+              <a:t>411 ns · 2.43 Mpps</a:t>
             </a:r>
           </a:p>
         </p:txBody>
@@ -22289,7 +22121,7 @@
                 </a:solidFill>
                 <a:latin typeface="Segoe UI"/>
               </a:rPr>
-              <a:t>Un solo programma per forma di rete (arch_65_4_4_7): N modelli con la stessa architettura lo riusano.</a:t>
+              <a:t>Un solo programma per l’intera famiglia "2 hidden layer" (arch_generic_2layer): input/output fissi dal protocollo (65/7).</a:t>
             </a:r>
           </a:p>
           <a:p>
@@ -22320,7 +22152,7 @@
                 </a:solidFill>
                 <a:latin typeface="Segoe UI"/>
               </a:rPr>
-              <a:t>Il dispatcher legge arch_registry[model_id] → arch_id e fa una tail call al programma architetturale.</a:t>
+              <a:t>Le larghezze n_h1/n_h2 sono lette a runtime da arch_registry, fino al tetto compilato T2_MAX_H1/T2_MAX_H2 -- nessuna ricompilazione per un modello piu largo o stretto.</a:t>
             </a:r>
           </a:p>
           <a:p>
@@ -22351,7 +22183,7 @@
                 </a:solidFill>
                 <a:latin typeface="Segoe UI"/>
               </a:rPr>
-              <a:t>I pesi int8 stanno in arch_weights (BPF_ARRAY), letti a runtime con lookup su indice aritmetico.</a:t>
+              <a:t>I pesi int8 stanno in arch_weights (BPF_ARRAY), letti a runtime con lookup su offset calcolato da n_h1/n_h2.</a:t>
             </a:r>
           </a:p>
           <a:p>
@@ -22413,7 +22245,7 @@
                 </a:solidFill>
                 <a:latin typeface="Segoe UI"/>
               </a:rPr>
-              <a:t>Aggiornamento del modello = bpf_map_update_elem sui pesi. Nessuna ricompilazione, nessun reload.</a:t>
+              <a:t>Aggiornamento modello/larghezza = load_arch_weights() sui pesi. Nessuna ricompilazione, nessun reload.</a:t>
             </a:r>
           </a:p>
         </p:txBody>

--- a/docs/IPA_eBPF_pipelines.pptx
+++ b/docs/IPA_eBPF_pipelines.pptx
@@ -5,26 +5,26 @@
     <p:sldMasterId id="2147483648" r:id="rId1"/>
   </p:sldMasterIdLst>
   <p:sldIdLst>
-    <p:sldId id="256" r:id="rId7"/>
-    <p:sldId id="257" r:id="rId8"/>
-    <p:sldId id="258" r:id="rId9"/>
-    <p:sldId id="259" r:id="rId10"/>
-    <p:sldId id="260" r:id="rId11"/>
-    <p:sldId id="261" r:id="rId12"/>
-    <p:sldId id="262" r:id="rId13"/>
-    <p:sldId id="263" r:id="rId14"/>
-    <p:sldId id="264" r:id="rId15"/>
-    <p:sldId id="265" r:id="rId16"/>
-    <p:sldId id="266" r:id="rId17"/>
-    <p:sldId id="267" r:id="rId18"/>
-    <p:sldId id="268" r:id="rId19"/>
-    <p:sldId id="269" r:id="rId20"/>
-    <p:sldId id="273" r:id="rId24"/>
-    <p:sldId id="270" r:id="rId21"/>
-    <p:sldId id="271" r:id="rId22"/>
-    <p:sldId id="272" r:id="rId23"/>
+    <p:sldId id="256" r:id="rId2"/>
+    <p:sldId id="257" r:id="rId3"/>
+    <p:sldId id="258" r:id="rId4"/>
+    <p:sldId id="259" r:id="rId5"/>
+    <p:sldId id="260" r:id="rId6"/>
+    <p:sldId id="261" r:id="rId7"/>
+    <p:sldId id="262" r:id="rId8"/>
+    <p:sldId id="263" r:id="rId9"/>
+    <p:sldId id="264" r:id="rId10"/>
+    <p:sldId id="265" r:id="rId11"/>
+    <p:sldId id="266" r:id="rId12"/>
+    <p:sldId id="267" r:id="rId13"/>
+    <p:sldId id="268" r:id="rId14"/>
+    <p:sldId id="269" r:id="rId15"/>
+    <p:sldId id="273" r:id="rId16"/>
+    <p:sldId id="270" r:id="rId17"/>
+    <p:sldId id="271" r:id="rId18"/>
+    <p:sldId id="272" r:id="rId19"/>
   </p:sldIdLst>
-  <p:sldSz cx="12191695" cy="6858000" type="screen4x3"/>
+  <p:sldSz cx="12192000" cy="6858000"/>
   <p:notesSz cx="6858000" cy="9144000"/>
   <p:defaultTextStyle>
     <a:defPPr>
@@ -121,6 +121,22 @@
       </a:defRPr>
     </a:lvl9pPr>
   </p:defaultTextStyle>
+  <p:extLst>
+    <p:ext uri="{EFAFB233-063F-42B5-8137-9DF3F51BA10A}">
+      <p15:sldGuideLst xmlns:p15="http://schemas.microsoft.com/office/powerpoint/2012/main">
+        <p15:guide id="1" orient="horz" pos="2160">
+          <p15:clr>
+            <a:srgbClr val="A4A3A4"/>
+          </p15:clr>
+        </p15:guide>
+        <p15:guide id="2" pos="2880">
+          <p15:clr>
+            <a:srgbClr val="A4A3A4"/>
+          </p15:clr>
+        </p15:guide>
+      </p15:sldGuideLst>
+    </p:ext>
+  </p:extLst>
 </p:presentation>
 </file>
 
@@ -162,10 +178,9 @@
           <a:lstStyle/>
           <a:p>
             <a:r>
-              <a:rPr lang="en-US" smtClean="0"/>
+              <a:rPr lang="en-US"/>
               <a:t>Click to edit Master title style</a:t>
             </a:r>
-            <a:endParaRPr lang="en-US"/>
           </a:p>
         </p:txBody>
       </p:sp>
@@ -281,10 +296,9 @@
           </a:lstStyle>
           <a:p>
             <a:r>
-              <a:rPr lang="en-US" smtClean="0"/>
+              <a:rPr lang="en-US"/>
               <a:t>Click to edit Master subtitle style</a:t>
             </a:r>
-            <a:endParaRPr lang="en-US"/>
           </a:p>
         </p:txBody>
       </p:sp>
@@ -305,7 +319,7 @@
           <a:p>
             <a:fld id="{5BCAD085-E8A6-8845-BD4E-CB4CCA059FC4}" type="datetimeFigureOut">
               <a:rPr lang="en-US" smtClean="0"/>
-              <a:t>1/27/13</a:t>
+              <a:t>7/10/2026</a:t>
             </a:fld>
             <a:endParaRPr lang="en-US"/>
           </a:p>
@@ -347,7 +361,7 @@
           <a:p>
             <a:fld id="{C1FF6DA9-008F-8B48-92A6-B652298478BF}" type="slidenum">
               <a:rPr lang="en-US" smtClean="0"/>
-              <a:t>‹#›</a:t>
+              <a:t>‹N›</a:t>
             </a:fld>
             <a:endParaRPr lang="en-US"/>
           </a:p>
@@ -399,10 +413,9 @@
           <a:lstStyle/>
           <a:p>
             <a:r>
-              <a:rPr lang="en-US" smtClean="0"/>
+              <a:rPr lang="en-US"/>
               <a:t>Click to edit Master title style</a:t>
             </a:r>
-            <a:endParaRPr lang="en-US"/>
           </a:p>
         </p:txBody>
       </p:sp>
@@ -423,38 +436,37 @@
           <a:p>
             <a:pPr lvl="0"/>
             <a:r>
-              <a:rPr lang="en-US" smtClean="0"/>
+              <a:rPr lang="en-US"/>
               <a:t>Click to edit Master text styles</a:t>
             </a:r>
           </a:p>
           <a:p>
             <a:pPr lvl="1"/>
             <a:r>
-              <a:rPr lang="en-US" smtClean="0"/>
+              <a:rPr lang="en-US"/>
               <a:t>Second level</a:t>
             </a:r>
           </a:p>
           <a:p>
             <a:pPr lvl="2"/>
             <a:r>
-              <a:rPr lang="en-US" smtClean="0"/>
+              <a:rPr lang="en-US"/>
               <a:t>Third level</a:t>
             </a:r>
           </a:p>
           <a:p>
             <a:pPr lvl="3"/>
             <a:r>
-              <a:rPr lang="en-US" smtClean="0"/>
+              <a:rPr lang="en-US"/>
               <a:t>Fourth level</a:t>
             </a:r>
           </a:p>
           <a:p>
             <a:pPr lvl="4"/>
             <a:r>
-              <a:rPr lang="en-US" smtClean="0"/>
+              <a:rPr lang="en-US"/>
               <a:t>Fifth level</a:t>
             </a:r>
-            <a:endParaRPr lang="en-US"/>
           </a:p>
         </p:txBody>
       </p:sp>
@@ -475,7 +487,7 @@
           <a:p>
             <a:fld id="{5BCAD085-E8A6-8845-BD4E-CB4CCA059FC4}" type="datetimeFigureOut">
               <a:rPr lang="en-US" smtClean="0"/>
-              <a:t>1/27/13</a:t>
+              <a:t>7/10/2026</a:t>
             </a:fld>
             <a:endParaRPr lang="en-US"/>
           </a:p>
@@ -517,7 +529,7 @@
           <a:p>
             <a:fld id="{C1FF6DA9-008F-8B48-92A6-B652298478BF}" type="slidenum">
               <a:rPr lang="en-US" smtClean="0"/>
-              <a:t>‹#›</a:t>
+              <a:t>‹N›</a:t>
             </a:fld>
             <a:endParaRPr lang="en-US"/>
           </a:p>
@@ -574,10 +586,9 @@
           <a:lstStyle/>
           <a:p>
             <a:r>
-              <a:rPr lang="en-US" smtClean="0"/>
+              <a:rPr lang="en-US"/>
               <a:t>Click to edit Master title style</a:t>
             </a:r>
-            <a:endParaRPr lang="en-US"/>
           </a:p>
         </p:txBody>
       </p:sp>
@@ -603,38 +614,37 @@
           <a:p>
             <a:pPr lvl="0"/>
             <a:r>
-              <a:rPr lang="en-US" smtClean="0"/>
+              <a:rPr lang="en-US"/>
               <a:t>Click to edit Master text styles</a:t>
             </a:r>
           </a:p>
           <a:p>
             <a:pPr lvl="1"/>
             <a:r>
-              <a:rPr lang="en-US" smtClean="0"/>
+              <a:rPr lang="en-US"/>
               <a:t>Second level</a:t>
             </a:r>
           </a:p>
           <a:p>
             <a:pPr lvl="2"/>
             <a:r>
-              <a:rPr lang="en-US" smtClean="0"/>
+              <a:rPr lang="en-US"/>
               <a:t>Third level</a:t>
             </a:r>
           </a:p>
           <a:p>
             <a:pPr lvl="3"/>
             <a:r>
-              <a:rPr lang="en-US" smtClean="0"/>
+              <a:rPr lang="en-US"/>
               <a:t>Fourth level</a:t>
             </a:r>
           </a:p>
           <a:p>
             <a:pPr lvl="4"/>
             <a:r>
-              <a:rPr lang="en-US" smtClean="0"/>
+              <a:rPr lang="en-US"/>
               <a:t>Fifth level</a:t>
             </a:r>
-            <a:endParaRPr lang="en-US"/>
           </a:p>
         </p:txBody>
       </p:sp>
@@ -655,7 +665,7 @@
           <a:p>
             <a:fld id="{5BCAD085-E8A6-8845-BD4E-CB4CCA059FC4}" type="datetimeFigureOut">
               <a:rPr lang="en-US" smtClean="0"/>
-              <a:t>1/27/13</a:t>
+              <a:t>7/10/2026</a:t>
             </a:fld>
             <a:endParaRPr lang="en-US"/>
           </a:p>
@@ -697,7 +707,7 @@
           <a:p>
             <a:fld id="{C1FF6DA9-008F-8B48-92A6-B652298478BF}" type="slidenum">
               <a:rPr lang="en-US" smtClean="0"/>
-              <a:t>‹#›</a:t>
+              <a:t>‹N›</a:t>
             </a:fld>
             <a:endParaRPr lang="en-US"/>
           </a:p>
@@ -749,10 +759,9 @@
           <a:lstStyle/>
           <a:p>
             <a:r>
-              <a:rPr lang="en-US" smtClean="0"/>
+              <a:rPr lang="en-US"/>
               <a:t>Click to edit Master title style</a:t>
             </a:r>
-            <a:endParaRPr lang="en-US"/>
           </a:p>
         </p:txBody>
       </p:sp>
@@ -773,38 +782,37 @@
           <a:p>
             <a:pPr lvl="0"/>
             <a:r>
-              <a:rPr lang="en-US" smtClean="0"/>
+              <a:rPr lang="en-US"/>
               <a:t>Click to edit Master text styles</a:t>
             </a:r>
           </a:p>
           <a:p>
             <a:pPr lvl="1"/>
             <a:r>
-              <a:rPr lang="en-US" smtClean="0"/>
+              <a:rPr lang="en-US"/>
               <a:t>Second level</a:t>
             </a:r>
           </a:p>
           <a:p>
             <a:pPr lvl="2"/>
             <a:r>
-              <a:rPr lang="en-US" smtClean="0"/>
+              <a:rPr lang="en-US"/>
               <a:t>Third level</a:t>
             </a:r>
           </a:p>
           <a:p>
             <a:pPr lvl="3"/>
             <a:r>
-              <a:rPr lang="en-US" smtClean="0"/>
+              <a:rPr lang="en-US"/>
               <a:t>Fourth level</a:t>
             </a:r>
           </a:p>
           <a:p>
             <a:pPr lvl="4"/>
             <a:r>
-              <a:rPr lang="en-US" smtClean="0"/>
+              <a:rPr lang="en-US"/>
               <a:t>Fifth level</a:t>
             </a:r>
-            <a:endParaRPr lang="en-US"/>
           </a:p>
         </p:txBody>
       </p:sp>
@@ -825,7 +833,7 @@
           <a:p>
             <a:fld id="{5BCAD085-E8A6-8845-BD4E-CB4CCA059FC4}" type="datetimeFigureOut">
               <a:rPr lang="en-US" smtClean="0"/>
-              <a:t>1/27/13</a:t>
+              <a:t>7/10/2026</a:t>
             </a:fld>
             <a:endParaRPr lang="en-US"/>
           </a:p>
@@ -867,7 +875,7 @@
           <a:p>
             <a:fld id="{C1FF6DA9-008F-8B48-92A6-B652298478BF}" type="slidenum">
               <a:rPr lang="en-US" smtClean="0"/>
-              <a:t>‹#›</a:t>
+              <a:t>‹N›</a:t>
             </a:fld>
             <a:endParaRPr lang="en-US"/>
           </a:p>
@@ -928,10 +936,9 @@
           </a:lstStyle>
           <a:p>
             <a:r>
-              <a:rPr lang="en-US" smtClean="0"/>
+              <a:rPr lang="en-US"/>
               <a:t>Click to edit Master title style</a:t>
             </a:r>
-            <a:endParaRPr lang="en-US"/>
           </a:p>
         </p:txBody>
       </p:sp>
@@ -1048,7 +1055,7 @@
           <a:p>
             <a:pPr lvl="0"/>
             <a:r>
-              <a:rPr lang="en-US" smtClean="0"/>
+              <a:rPr lang="en-US"/>
               <a:t>Click to edit Master text styles</a:t>
             </a:r>
           </a:p>
@@ -1071,7 +1078,7 @@
           <a:p>
             <a:fld id="{5BCAD085-E8A6-8845-BD4E-CB4CCA059FC4}" type="datetimeFigureOut">
               <a:rPr lang="en-US" smtClean="0"/>
-              <a:t>1/27/13</a:t>
+              <a:t>7/10/2026</a:t>
             </a:fld>
             <a:endParaRPr lang="en-US"/>
           </a:p>
@@ -1113,7 +1120,7 @@
           <a:p>
             <a:fld id="{C1FF6DA9-008F-8B48-92A6-B652298478BF}" type="slidenum">
               <a:rPr lang="en-US" smtClean="0"/>
-              <a:t>‹#›</a:t>
+              <a:t>‹N›</a:t>
             </a:fld>
             <a:endParaRPr lang="en-US"/>
           </a:p>
@@ -1165,10 +1172,9 @@
           <a:lstStyle/>
           <a:p>
             <a:r>
-              <a:rPr lang="en-US" smtClean="0"/>
+              <a:rPr lang="en-US"/>
               <a:t>Click to edit Master title style</a:t>
             </a:r>
-            <a:endParaRPr lang="en-US"/>
           </a:p>
         </p:txBody>
       </p:sp>
@@ -1222,38 +1228,37 @@
           <a:p>
             <a:pPr lvl="0"/>
             <a:r>
-              <a:rPr lang="en-US" smtClean="0"/>
+              <a:rPr lang="en-US"/>
               <a:t>Click to edit Master text styles</a:t>
             </a:r>
           </a:p>
           <a:p>
             <a:pPr lvl="1"/>
             <a:r>
-              <a:rPr lang="en-US" smtClean="0"/>
+              <a:rPr lang="en-US"/>
               <a:t>Second level</a:t>
             </a:r>
           </a:p>
           <a:p>
             <a:pPr lvl="2"/>
             <a:r>
-              <a:rPr lang="en-US" smtClean="0"/>
+              <a:rPr lang="en-US"/>
               <a:t>Third level</a:t>
             </a:r>
           </a:p>
           <a:p>
             <a:pPr lvl="3"/>
             <a:r>
-              <a:rPr lang="en-US" smtClean="0"/>
+              <a:rPr lang="en-US"/>
               <a:t>Fourth level</a:t>
             </a:r>
           </a:p>
           <a:p>
             <a:pPr lvl="4"/>
             <a:r>
-              <a:rPr lang="en-US" smtClean="0"/>
+              <a:rPr lang="en-US"/>
               <a:t>Fifth level</a:t>
             </a:r>
-            <a:endParaRPr lang="en-US"/>
           </a:p>
         </p:txBody>
       </p:sp>
@@ -1307,38 +1312,37 @@
           <a:p>
             <a:pPr lvl="0"/>
             <a:r>
-              <a:rPr lang="en-US" smtClean="0"/>
+              <a:rPr lang="en-US"/>
               <a:t>Click to edit Master text styles</a:t>
             </a:r>
           </a:p>
           <a:p>
             <a:pPr lvl="1"/>
             <a:r>
-              <a:rPr lang="en-US" smtClean="0"/>
+              <a:rPr lang="en-US"/>
               <a:t>Second level</a:t>
             </a:r>
           </a:p>
           <a:p>
             <a:pPr lvl="2"/>
             <a:r>
-              <a:rPr lang="en-US" smtClean="0"/>
+              <a:rPr lang="en-US"/>
               <a:t>Third level</a:t>
             </a:r>
           </a:p>
           <a:p>
             <a:pPr lvl="3"/>
             <a:r>
-              <a:rPr lang="en-US" smtClean="0"/>
+              <a:rPr lang="en-US"/>
               <a:t>Fourth level</a:t>
             </a:r>
           </a:p>
           <a:p>
             <a:pPr lvl="4"/>
             <a:r>
-              <a:rPr lang="en-US" smtClean="0"/>
+              <a:rPr lang="en-US"/>
               <a:t>Fifth level</a:t>
             </a:r>
-            <a:endParaRPr lang="en-US"/>
           </a:p>
         </p:txBody>
       </p:sp>
@@ -1359,7 +1363,7 @@
           <a:p>
             <a:fld id="{5BCAD085-E8A6-8845-BD4E-CB4CCA059FC4}" type="datetimeFigureOut">
               <a:rPr lang="en-US" smtClean="0"/>
-              <a:t>1/27/13</a:t>
+              <a:t>7/10/2026</a:t>
             </a:fld>
             <a:endParaRPr lang="en-US"/>
           </a:p>
@@ -1401,7 +1405,7 @@
           <a:p>
             <a:fld id="{C1FF6DA9-008F-8B48-92A6-B652298478BF}" type="slidenum">
               <a:rPr lang="en-US" smtClean="0"/>
-              <a:t>‹#›</a:t>
+              <a:t>‹N›</a:t>
             </a:fld>
             <a:endParaRPr lang="en-US"/>
           </a:p>
@@ -1457,10 +1461,9 @@
           </a:lstStyle>
           <a:p>
             <a:r>
-              <a:rPr lang="en-US" smtClean="0"/>
+              <a:rPr lang="en-US"/>
               <a:t>Click to edit Master title style</a:t>
             </a:r>
-            <a:endParaRPr lang="en-US"/>
           </a:p>
         </p:txBody>
       </p:sp>
@@ -1523,7 +1526,7 @@
           <a:p>
             <a:pPr lvl="0"/>
             <a:r>
-              <a:rPr lang="en-US" smtClean="0"/>
+              <a:rPr lang="en-US"/>
               <a:t>Click to edit Master text styles</a:t>
             </a:r>
           </a:p>
@@ -1579,38 +1582,37 @@
           <a:p>
             <a:pPr lvl="0"/>
             <a:r>
-              <a:rPr lang="en-US" smtClean="0"/>
+              <a:rPr lang="en-US"/>
               <a:t>Click to edit Master text styles</a:t>
             </a:r>
           </a:p>
           <a:p>
             <a:pPr lvl="1"/>
             <a:r>
-              <a:rPr lang="en-US" smtClean="0"/>
+              <a:rPr lang="en-US"/>
               <a:t>Second level</a:t>
             </a:r>
           </a:p>
           <a:p>
             <a:pPr lvl="2"/>
             <a:r>
-              <a:rPr lang="en-US" smtClean="0"/>
+              <a:rPr lang="en-US"/>
               <a:t>Third level</a:t>
             </a:r>
           </a:p>
           <a:p>
             <a:pPr lvl="3"/>
             <a:r>
-              <a:rPr lang="en-US" smtClean="0"/>
+              <a:rPr lang="en-US"/>
               <a:t>Fourth level</a:t>
             </a:r>
           </a:p>
           <a:p>
             <a:pPr lvl="4"/>
             <a:r>
-              <a:rPr lang="en-US" smtClean="0"/>
+              <a:rPr lang="en-US"/>
               <a:t>Fifth level</a:t>
             </a:r>
-            <a:endParaRPr lang="en-US"/>
           </a:p>
         </p:txBody>
       </p:sp>
@@ -1673,7 +1675,7 @@
           <a:p>
             <a:pPr lvl="0"/>
             <a:r>
-              <a:rPr lang="en-US" smtClean="0"/>
+              <a:rPr lang="en-US"/>
               <a:t>Click to edit Master text styles</a:t>
             </a:r>
           </a:p>
@@ -1729,38 +1731,37 @@
           <a:p>
             <a:pPr lvl="0"/>
             <a:r>
-              <a:rPr lang="en-US" smtClean="0"/>
+              <a:rPr lang="en-US"/>
               <a:t>Click to edit Master text styles</a:t>
             </a:r>
           </a:p>
           <a:p>
             <a:pPr lvl="1"/>
             <a:r>
-              <a:rPr lang="en-US" smtClean="0"/>
+              <a:rPr lang="en-US"/>
               <a:t>Second level</a:t>
             </a:r>
           </a:p>
           <a:p>
             <a:pPr lvl="2"/>
             <a:r>
-              <a:rPr lang="en-US" smtClean="0"/>
+              <a:rPr lang="en-US"/>
               <a:t>Third level</a:t>
             </a:r>
           </a:p>
           <a:p>
             <a:pPr lvl="3"/>
             <a:r>
-              <a:rPr lang="en-US" smtClean="0"/>
+              <a:rPr lang="en-US"/>
               <a:t>Fourth level</a:t>
             </a:r>
           </a:p>
           <a:p>
             <a:pPr lvl="4"/>
             <a:r>
-              <a:rPr lang="en-US" smtClean="0"/>
+              <a:rPr lang="en-US"/>
               <a:t>Fifth level</a:t>
             </a:r>
-            <a:endParaRPr lang="en-US"/>
           </a:p>
         </p:txBody>
       </p:sp>
@@ -1781,7 +1782,7 @@
           <a:p>
             <a:fld id="{5BCAD085-E8A6-8845-BD4E-CB4CCA059FC4}" type="datetimeFigureOut">
               <a:rPr lang="en-US" smtClean="0"/>
-              <a:t>1/27/13</a:t>
+              <a:t>7/10/2026</a:t>
             </a:fld>
             <a:endParaRPr lang="en-US"/>
           </a:p>
@@ -1823,7 +1824,7 @@
           <a:p>
             <a:fld id="{C1FF6DA9-008F-8B48-92A6-B652298478BF}" type="slidenum">
               <a:rPr lang="en-US" smtClean="0"/>
-              <a:t>‹#›</a:t>
+              <a:t>‹N›</a:t>
             </a:fld>
             <a:endParaRPr lang="en-US"/>
           </a:p>
@@ -1875,10 +1876,9 @@
           <a:lstStyle/>
           <a:p>
             <a:r>
-              <a:rPr lang="en-US" smtClean="0"/>
+              <a:rPr lang="en-US"/>
               <a:t>Click to edit Master title style</a:t>
             </a:r>
-            <a:endParaRPr lang="en-US"/>
           </a:p>
         </p:txBody>
       </p:sp>
@@ -1899,7 +1899,7 @@
           <a:p>
             <a:fld id="{5BCAD085-E8A6-8845-BD4E-CB4CCA059FC4}" type="datetimeFigureOut">
               <a:rPr lang="en-US" smtClean="0"/>
-              <a:t>1/27/13</a:t>
+              <a:t>7/10/2026</a:t>
             </a:fld>
             <a:endParaRPr lang="en-US"/>
           </a:p>
@@ -1941,7 +1941,7 @@
           <a:p>
             <a:fld id="{C1FF6DA9-008F-8B48-92A6-B652298478BF}" type="slidenum">
               <a:rPr lang="en-US" smtClean="0"/>
-              <a:t>‹#›</a:t>
+              <a:t>‹N›</a:t>
             </a:fld>
             <a:endParaRPr lang="en-US"/>
           </a:p>
@@ -1994,7 +1994,7 @@
           <a:p>
             <a:fld id="{5BCAD085-E8A6-8845-BD4E-CB4CCA059FC4}" type="datetimeFigureOut">
               <a:rPr lang="en-US" smtClean="0"/>
-              <a:t>1/27/13</a:t>
+              <a:t>7/10/2026</a:t>
             </a:fld>
             <a:endParaRPr lang="en-US"/>
           </a:p>
@@ -2036,7 +2036,7 @@
           <a:p>
             <a:fld id="{C1FF6DA9-008F-8B48-92A6-B652298478BF}" type="slidenum">
               <a:rPr lang="en-US" smtClean="0"/>
-              <a:t>‹#›</a:t>
+              <a:t>‹N›</a:t>
             </a:fld>
             <a:endParaRPr lang="en-US"/>
           </a:p>
@@ -2097,10 +2097,9 @@
           </a:lstStyle>
           <a:p>
             <a:r>
-              <a:rPr lang="en-US" smtClean="0"/>
+              <a:rPr lang="en-US"/>
               <a:t>Click to edit Master title style</a:t>
             </a:r>
-            <a:endParaRPr lang="en-US"/>
           </a:p>
         </p:txBody>
       </p:sp>
@@ -2154,38 +2153,37 @@
           <a:p>
             <a:pPr lvl="0"/>
             <a:r>
-              <a:rPr lang="en-US" smtClean="0"/>
+              <a:rPr lang="en-US"/>
               <a:t>Click to edit Master text styles</a:t>
             </a:r>
           </a:p>
           <a:p>
             <a:pPr lvl="1"/>
             <a:r>
-              <a:rPr lang="en-US" smtClean="0"/>
+              <a:rPr lang="en-US"/>
               <a:t>Second level</a:t>
             </a:r>
           </a:p>
           <a:p>
             <a:pPr lvl="2"/>
             <a:r>
-              <a:rPr lang="en-US" smtClean="0"/>
+              <a:rPr lang="en-US"/>
               <a:t>Third level</a:t>
             </a:r>
           </a:p>
           <a:p>
             <a:pPr lvl="3"/>
             <a:r>
-              <a:rPr lang="en-US" smtClean="0"/>
+              <a:rPr lang="en-US"/>
               <a:t>Fourth level</a:t>
             </a:r>
           </a:p>
           <a:p>
             <a:pPr lvl="4"/>
             <a:r>
-              <a:rPr lang="en-US" smtClean="0"/>
+              <a:rPr lang="en-US"/>
               <a:t>Fifth level</a:t>
             </a:r>
-            <a:endParaRPr lang="en-US"/>
           </a:p>
         </p:txBody>
       </p:sp>
@@ -2248,7 +2246,7 @@
           <a:p>
             <a:pPr lvl="0"/>
             <a:r>
-              <a:rPr lang="en-US" smtClean="0"/>
+              <a:rPr lang="en-US"/>
               <a:t>Click to edit Master text styles</a:t>
             </a:r>
           </a:p>
@@ -2271,7 +2269,7 @@
           <a:p>
             <a:fld id="{5BCAD085-E8A6-8845-BD4E-CB4CCA059FC4}" type="datetimeFigureOut">
               <a:rPr lang="en-US" smtClean="0"/>
-              <a:t>1/27/13</a:t>
+              <a:t>7/10/2026</a:t>
             </a:fld>
             <a:endParaRPr lang="en-US"/>
           </a:p>
@@ -2313,7 +2311,7 @@
           <a:p>
             <a:fld id="{C1FF6DA9-008F-8B48-92A6-B652298478BF}" type="slidenum">
               <a:rPr lang="en-US" smtClean="0"/>
-              <a:t>‹#›</a:t>
+              <a:t>‹N›</a:t>
             </a:fld>
             <a:endParaRPr lang="en-US"/>
           </a:p>
@@ -2374,10 +2372,9 @@
           </a:lstStyle>
           <a:p>
             <a:r>
-              <a:rPr lang="en-US" smtClean="0"/>
+              <a:rPr lang="en-US"/>
               <a:t>Click to edit Master title style</a:t>
             </a:r>
-            <a:endParaRPr lang="en-US"/>
           </a:p>
         </p:txBody>
       </p:sp>
@@ -2501,7 +2498,7 @@
           <a:p>
             <a:pPr lvl="0"/>
             <a:r>
-              <a:rPr lang="en-US" smtClean="0"/>
+              <a:rPr lang="en-US"/>
               <a:t>Click to edit Master text styles</a:t>
             </a:r>
           </a:p>
@@ -2524,7 +2521,7 @@
           <a:p>
             <a:fld id="{5BCAD085-E8A6-8845-BD4E-CB4CCA059FC4}" type="datetimeFigureOut">
               <a:rPr lang="en-US" smtClean="0"/>
-              <a:t>1/27/13</a:t>
+              <a:t>7/10/2026</a:t>
             </a:fld>
             <a:endParaRPr lang="en-US"/>
           </a:p>
@@ -2566,7 +2563,7 @@
           <a:p>
             <a:fld id="{C1FF6DA9-008F-8B48-92A6-B652298478BF}" type="slidenum">
               <a:rPr lang="en-US" smtClean="0"/>
-              <a:t>‹#›</a:t>
+              <a:t>‹N›</a:t>
             </a:fld>
             <a:endParaRPr lang="en-US"/>
           </a:p>
@@ -2633,10 +2630,9 @@
           <a:lstStyle/>
           <a:p>
             <a:r>
-              <a:rPr lang="en-US" smtClean="0"/>
+              <a:rPr lang="en-US"/>
               <a:t>Click to edit Master title style</a:t>
             </a:r>
-            <a:endParaRPr lang="en-US"/>
           </a:p>
         </p:txBody>
       </p:sp>
@@ -2667,38 +2663,37 @@
           <a:p>
             <a:pPr lvl="0"/>
             <a:r>
-              <a:rPr lang="en-US" smtClean="0"/>
+              <a:rPr lang="en-US"/>
               <a:t>Click to edit Master text styles</a:t>
             </a:r>
           </a:p>
           <a:p>
             <a:pPr lvl="1"/>
             <a:r>
-              <a:rPr lang="en-US" smtClean="0"/>
+              <a:rPr lang="en-US"/>
               <a:t>Second level</a:t>
             </a:r>
           </a:p>
           <a:p>
             <a:pPr lvl="2"/>
             <a:r>
-              <a:rPr lang="en-US" smtClean="0"/>
+              <a:rPr lang="en-US"/>
               <a:t>Third level</a:t>
             </a:r>
           </a:p>
           <a:p>
             <a:pPr lvl="3"/>
             <a:r>
-              <a:rPr lang="en-US" smtClean="0"/>
+              <a:rPr lang="en-US"/>
               <a:t>Fourth level</a:t>
             </a:r>
           </a:p>
           <a:p>
             <a:pPr lvl="4"/>
             <a:r>
-              <a:rPr lang="en-US" smtClean="0"/>
+              <a:rPr lang="en-US"/>
               <a:t>Fifth level</a:t>
             </a:r>
-            <a:endParaRPr lang="en-US"/>
           </a:p>
         </p:txBody>
       </p:sp>
@@ -2737,7 +2732,7 @@
           <a:p>
             <a:fld id="{5BCAD085-E8A6-8845-BD4E-CB4CCA059FC4}" type="datetimeFigureOut">
               <a:rPr lang="en-US" smtClean="0"/>
-              <a:t>1/27/13</a:t>
+              <a:t>7/10/2026</a:t>
             </a:fld>
             <a:endParaRPr lang="en-US"/>
           </a:p>
@@ -2815,7 +2810,7 @@
           <a:p>
             <a:fld id="{C1FF6DA9-008F-8B48-92A6-B652298478BF}" type="slidenum">
               <a:rPr lang="en-US" smtClean="0"/>
-              <a:t>‹#›</a:t>
+              <a:t>‹N›</a:t>
             </a:fld>
             <a:endParaRPr lang="en-US"/>
           </a:p>
@@ -3096,7 +3091,7 @@
 </file>
 
 <file path=ppt/slides/slide1.xml><?xml version="1.0" encoding="utf-8"?>
-<p:sld xmlns:a="http://schemas.openxmlformats.org/drawingml/2006/main" xmlns:p="http://schemas.openxmlformats.org/presentationml/2006/main" xmlns:r="http://schemas.openxmlformats.org/officeDocument/2006/relationships">
+<p:sld xmlns:a="http://schemas.openxmlformats.org/drawingml/2006/main" xmlns:r="http://schemas.openxmlformats.org/officeDocument/2006/relationships" xmlns:p="http://schemas.openxmlformats.org/presentationml/2006/main">
   <p:cSld>
     <p:spTree>
       <p:nvGrpSpPr>
@@ -3104,7 +3099,14 @@
         <p:cNvGrpSpPr/>
         <p:nvPr/>
       </p:nvGrpSpPr>
-      <p:grpSpPr/>
+      <p:grpSpPr>
+        <a:xfrm>
+          <a:off x="0" y="0"/>
+          <a:ext cx="0" cy="0"/>
+          <a:chOff x="0" y="0"/>
+          <a:chExt cx="0" cy="0"/>
+        </a:xfrm>
+      </p:grpSpPr>
       <p:sp>
         <p:nvSpPr>
           <p:cNvPr id="2" name="Rectangle 1"/>
@@ -3146,6 +3148,7 @@
           <a:lstStyle/>
           <a:p>
             <a:pPr algn="ctr"/>
+            <a:endParaRPr/>
           </a:p>
         </p:txBody>
       </p:sp>
@@ -3190,6 +3193,7 @@
           <a:lstStyle/>
           <a:p>
             <a:pPr algn="ctr"/>
+            <a:endParaRPr/>
           </a:p>
         </p:txBody>
       </p:sp>
@@ -3234,6 +3238,7 @@
           <a:lstStyle/>
           <a:p>
             <a:pPr algn="ctr"/>
+            <a:endParaRPr/>
           </a:p>
         </p:txBody>
       </p:sp>
@@ -3278,6 +3283,7 @@
           <a:lstStyle/>
           <a:p>
             <a:pPr algn="ctr"/>
+            <a:endParaRPr/>
           </a:p>
         </p:txBody>
       </p:sp>
@@ -3322,6 +3328,7 @@
           <a:lstStyle/>
           <a:p>
             <a:pPr algn="ctr"/>
+            <a:endParaRPr/>
           </a:p>
         </p:txBody>
       </p:sp>
@@ -3342,7 +3349,7 @@
           <a:noFill/>
         </p:spPr>
         <p:txBody>
-          <a:bodyPr wrap="square" anchor="ctr" lIns="0" rIns="0" tIns="0" bIns="0">
+          <a:bodyPr wrap="square" lIns="0" tIns="0" rIns="0" bIns="0" anchor="ctr">
             <a:spAutoFit/>
           </a:bodyPr>
           <a:lstStyle/>
@@ -3387,7 +3394,7 @@
           <a:noFill/>
         </p:spPr>
         <p:txBody>
-          <a:bodyPr wrap="square" anchor="t" lIns="0" rIns="0" tIns="0" bIns="0">
+          <a:bodyPr wrap="square" lIns="0" tIns="0" rIns="0" bIns="0" anchor="t">
             <a:spAutoFit/>
           </a:bodyPr>
           <a:lstStyle/>
@@ -3432,7 +3439,7 @@
           <a:noFill/>
         </p:spPr>
         <p:txBody>
-          <a:bodyPr wrap="square" anchor="t" lIns="0" rIns="0" tIns="0" bIns="0">
+          <a:bodyPr wrap="square" lIns="0" tIns="0" rIns="0" bIns="0" anchor="t">
             <a:spAutoFit/>
           </a:bodyPr>
           <a:lstStyle/>
@@ -3477,7 +3484,7 @@
           <a:noFill/>
         </p:spPr>
         <p:txBody>
-          <a:bodyPr wrap="square" anchor="t" lIns="0" rIns="0" tIns="0" bIns="0">
+          <a:bodyPr wrap="square" lIns="0" tIns="0" rIns="0" bIns="0" anchor="t">
             <a:spAutoFit/>
           </a:bodyPr>
           <a:lstStyle/>
@@ -3544,7 +3551,7 @@
           <a:noFill/>
         </p:spPr>
         <p:txBody>
-          <a:bodyPr wrap="square" anchor="t" lIns="0" rIns="0" tIns="0" bIns="0">
+          <a:bodyPr wrap="square" lIns="0" tIns="0" rIns="0" bIns="0" anchor="t">
             <a:spAutoFit/>
           </a:bodyPr>
           <a:lstStyle/>
@@ -3626,7 +3633,7 @@
 </file>
 
 <file path=ppt/slides/slide10.xml><?xml version="1.0" encoding="utf-8"?>
-<p:sld xmlns:a="http://schemas.openxmlformats.org/drawingml/2006/main" xmlns:p="http://schemas.openxmlformats.org/presentationml/2006/main" xmlns:r="http://schemas.openxmlformats.org/officeDocument/2006/relationships">
+<p:sld xmlns:a="http://schemas.openxmlformats.org/drawingml/2006/main" xmlns:r="http://schemas.openxmlformats.org/officeDocument/2006/relationships" xmlns:p="http://schemas.openxmlformats.org/presentationml/2006/main">
   <p:cSld>
     <p:spTree>
       <p:nvGrpSpPr>
@@ -3634,7 +3641,14 @@
         <p:cNvGrpSpPr/>
         <p:nvPr/>
       </p:nvGrpSpPr>
-      <p:grpSpPr/>
+      <p:grpSpPr>
+        <a:xfrm>
+          <a:off x="0" y="0"/>
+          <a:ext cx="0" cy="0"/>
+          <a:chOff x="0" y="0"/>
+          <a:chExt cx="0" cy="0"/>
+        </a:xfrm>
+      </p:grpSpPr>
       <p:sp>
         <p:nvSpPr>
           <p:cNvPr id="2" name="Rectangle 1"/>
@@ -3676,6 +3690,7 @@
           <a:lstStyle/>
           <a:p>
             <a:pPr algn="ctr"/>
+            <a:endParaRPr/>
           </a:p>
         </p:txBody>
       </p:sp>
@@ -3696,7 +3711,7 @@
           <a:noFill/>
         </p:spPr>
         <p:txBody>
-          <a:bodyPr wrap="square" anchor="t" lIns="0" rIns="0" tIns="0" bIns="0">
+          <a:bodyPr wrap="square" lIns="0" tIns="0" rIns="0" bIns="0" anchor="t">
             <a:spAutoFit/>
           </a:bodyPr>
           <a:lstStyle/>
@@ -3741,7 +3756,7 @@
           <a:noFill/>
         </p:spPr>
         <p:txBody>
-          <a:bodyPr wrap="square" anchor="t" lIns="0" rIns="0" tIns="0" bIns="0">
+          <a:bodyPr wrap="square" lIns="0" tIns="0" rIns="0" bIns="0" anchor="t">
             <a:spAutoFit/>
           </a:bodyPr>
           <a:lstStyle/>
@@ -3786,7 +3801,7 @@
           <a:noFill/>
         </p:spPr>
         <p:txBody>
-          <a:bodyPr wrap="square" anchor="t" lIns="0" rIns="0" tIns="0" bIns="0">
+          <a:bodyPr wrap="square" lIns="0" tIns="0" rIns="0" bIns="0" anchor="t">
             <a:spAutoFit/>
           </a:bodyPr>
           <a:lstStyle/>
@@ -3857,6 +3872,7 @@
           <a:lstStyle/>
           <a:p>
             <a:pPr algn="ctr"/>
+            <a:endParaRPr/>
           </a:p>
         </p:txBody>
       </p:sp>
@@ -3901,6 +3917,7 @@
           <a:lstStyle/>
           <a:p>
             <a:pPr algn="ctr"/>
+            <a:endParaRPr/>
           </a:p>
         </p:txBody>
       </p:sp>
@@ -3921,7 +3938,7 @@
           <a:noFill/>
         </p:spPr>
         <p:txBody>
-          <a:bodyPr wrap="square" anchor="ctr" lIns="0" rIns="0" tIns="0" bIns="0">
+          <a:bodyPr wrap="square" lIns="0" tIns="0" rIns="0" bIns="0" anchor="ctr">
             <a:spAutoFit/>
           </a:bodyPr>
           <a:lstStyle/>
@@ -3988,7 +4005,7 @@
           <a:noFill/>
         </p:spPr>
         <p:txBody>
-          <a:bodyPr wrap="square" anchor="ctr" lIns="0" rIns="0" tIns="0" bIns="0">
+          <a:bodyPr wrap="square" lIns="0" tIns="0" rIns="0" bIns="0" anchor="ctr">
             <a:spAutoFit/>
           </a:bodyPr>
           <a:lstStyle/>
@@ -4059,6 +4076,7 @@
           <a:lstStyle/>
           <a:p>
             <a:pPr algn="ctr"/>
+            <a:endParaRPr/>
           </a:p>
         </p:txBody>
       </p:sp>
@@ -4103,6 +4121,7 @@
           <a:lstStyle/>
           <a:p>
             <a:pPr algn="ctr"/>
+            <a:endParaRPr/>
           </a:p>
         </p:txBody>
       </p:sp>
@@ -4123,7 +4142,7 @@
           <a:noFill/>
         </p:spPr>
         <p:txBody>
-          <a:bodyPr wrap="square" anchor="ctr" lIns="0" rIns="0" tIns="0" bIns="0">
+          <a:bodyPr wrap="square" lIns="0" tIns="0" rIns="0" bIns="0" anchor="ctr">
             <a:spAutoFit/>
           </a:bodyPr>
           <a:lstStyle/>
@@ -4190,7 +4209,7 @@
           <a:noFill/>
         </p:spPr>
         <p:txBody>
-          <a:bodyPr wrap="square" anchor="ctr" lIns="0" rIns="0" tIns="0" bIns="0">
+          <a:bodyPr wrap="square" lIns="0" tIns="0" rIns="0" bIns="0" anchor="ctr">
             <a:spAutoFit/>
           </a:bodyPr>
           <a:lstStyle/>
@@ -4261,6 +4280,7 @@
           <a:lstStyle/>
           <a:p>
             <a:pPr algn="ctr"/>
+            <a:endParaRPr/>
           </a:p>
         </p:txBody>
       </p:sp>
@@ -4305,6 +4325,7 @@
           <a:lstStyle/>
           <a:p>
             <a:pPr algn="ctr"/>
+            <a:endParaRPr/>
           </a:p>
         </p:txBody>
       </p:sp>
@@ -4325,7 +4346,7 @@
           <a:noFill/>
         </p:spPr>
         <p:txBody>
-          <a:bodyPr wrap="square" anchor="ctr" lIns="0" rIns="0" tIns="0" bIns="0">
+          <a:bodyPr wrap="square" lIns="0" tIns="0" rIns="0" bIns="0" anchor="ctr">
             <a:spAutoFit/>
           </a:bodyPr>
           <a:lstStyle/>
@@ -4392,7 +4413,7 @@
           <a:noFill/>
         </p:spPr>
         <p:txBody>
-          <a:bodyPr wrap="square" anchor="ctr" lIns="0" rIns="0" tIns="0" bIns="0">
+          <a:bodyPr wrap="square" lIns="0" tIns="0" rIns="0" bIns="0" anchor="ctr">
             <a:spAutoFit/>
           </a:bodyPr>
           <a:lstStyle/>
@@ -4463,6 +4484,7 @@
           <a:lstStyle/>
           <a:p>
             <a:pPr algn="ctr"/>
+            <a:endParaRPr/>
           </a:p>
         </p:txBody>
       </p:sp>
@@ -4507,6 +4529,7 @@
           <a:lstStyle/>
           <a:p>
             <a:pPr algn="ctr"/>
+            <a:endParaRPr/>
           </a:p>
         </p:txBody>
       </p:sp>
@@ -4527,7 +4550,7 @@
           <a:noFill/>
         </p:spPr>
         <p:txBody>
-          <a:bodyPr wrap="square" anchor="ctr" lIns="0" rIns="0" tIns="0" bIns="0">
+          <a:bodyPr wrap="square" lIns="0" tIns="0" rIns="0" bIns="0" anchor="ctr">
             <a:spAutoFit/>
           </a:bodyPr>
           <a:lstStyle/>
@@ -4594,7 +4617,7 @@
           <a:noFill/>
         </p:spPr>
         <p:txBody>
-          <a:bodyPr wrap="square" anchor="ctr" lIns="0" rIns="0" tIns="0" bIns="0">
+          <a:bodyPr wrap="square" lIns="0" tIns="0" rIns="0" bIns="0" anchor="ctr">
             <a:spAutoFit/>
           </a:bodyPr>
           <a:lstStyle/>
@@ -4665,6 +4688,7 @@
           <a:lstStyle/>
           <a:p>
             <a:pPr algn="ctr"/>
+            <a:endParaRPr/>
           </a:p>
         </p:txBody>
       </p:sp>
@@ -4709,6 +4733,7 @@
           <a:lstStyle/>
           <a:p>
             <a:pPr algn="ctr"/>
+            <a:endParaRPr/>
           </a:p>
         </p:txBody>
       </p:sp>
@@ -4729,7 +4754,7 @@
           <a:noFill/>
         </p:spPr>
         <p:txBody>
-          <a:bodyPr wrap="square" anchor="ctr" lIns="0" rIns="0" tIns="0" bIns="0">
+          <a:bodyPr wrap="square" lIns="0" tIns="0" rIns="0" bIns="0" anchor="ctr">
             <a:spAutoFit/>
           </a:bodyPr>
           <a:lstStyle/>
@@ -4822,6 +4847,7 @@
           <a:lstStyle/>
           <a:p>
             <a:pPr algn="ctr"/>
+            <a:endParaRPr/>
           </a:p>
         </p:txBody>
       </p:sp>
@@ -4842,7 +4868,7 @@
           <a:noFill/>
         </p:spPr>
         <p:txBody>
-          <a:bodyPr wrap="square" anchor="ctr" lIns="0" rIns="0" tIns="0" bIns="0">
+          <a:bodyPr wrap="square" lIns="0" tIns="0" rIns="0" bIns="0" anchor="ctr">
             <a:spAutoFit/>
           </a:bodyPr>
           <a:lstStyle/>
@@ -4913,6 +4939,7 @@
           <a:lstStyle/>
           <a:p>
             <a:pPr algn="ctr"/>
+            <a:endParaRPr/>
           </a:p>
         </p:txBody>
       </p:sp>
@@ -4933,7 +4960,7 @@
           <a:noFill/>
         </p:spPr>
         <p:txBody>
-          <a:bodyPr wrap="square" anchor="ctr" lIns="0" rIns="0" tIns="0" bIns="0">
+          <a:bodyPr wrap="square" lIns="0" tIns="0" rIns="0" bIns="0" anchor="ctr">
             <a:spAutoFit/>
           </a:bodyPr>
           <a:lstStyle/>
@@ -5004,6 +5031,7 @@
           <a:lstStyle/>
           <a:p>
             <a:pPr algn="ctr"/>
+            <a:endParaRPr/>
           </a:p>
         </p:txBody>
       </p:sp>
@@ -5024,7 +5052,7 @@
           <a:noFill/>
         </p:spPr>
         <p:txBody>
-          <a:bodyPr wrap="square" anchor="ctr" lIns="0" rIns="0" tIns="0" bIns="0">
+          <a:bodyPr wrap="square" lIns="0" tIns="0" rIns="0" bIns="0" anchor="ctr">
             <a:spAutoFit/>
           </a:bodyPr>
           <a:lstStyle/>
@@ -5095,6 +5123,7 @@
           <a:lstStyle/>
           <a:p>
             <a:pPr algn="ctr"/>
+            <a:endParaRPr/>
           </a:p>
         </p:txBody>
       </p:sp>
@@ -5115,7 +5144,7 @@
           <a:noFill/>
         </p:spPr>
         <p:txBody>
-          <a:bodyPr wrap="square" anchor="ctr" lIns="0" rIns="0" tIns="0" bIns="0">
+          <a:bodyPr wrap="square" lIns="0" tIns="0" rIns="0" bIns="0" anchor="ctr">
             <a:spAutoFit/>
           </a:bodyPr>
           <a:lstStyle/>
@@ -5186,6 +5215,7 @@
           <a:lstStyle/>
           <a:p>
             <a:pPr algn="ctr"/>
+            <a:endParaRPr/>
           </a:p>
         </p:txBody>
       </p:sp>
@@ -5206,7 +5236,7 @@
           <a:noFill/>
         </p:spPr>
         <p:txBody>
-          <a:bodyPr wrap="square" anchor="t" lIns="0" rIns="0" tIns="0" bIns="0">
+          <a:bodyPr wrap="square" lIns="0" tIns="0" rIns="0" bIns="0" anchor="t">
             <a:spAutoFit/>
           </a:bodyPr>
           <a:lstStyle/>
@@ -5398,7 +5428,7 @@
 </file>
 
 <file path=ppt/slides/slide11.xml><?xml version="1.0" encoding="utf-8"?>
-<p:sld xmlns:a="http://schemas.openxmlformats.org/drawingml/2006/main" xmlns:p="http://schemas.openxmlformats.org/presentationml/2006/main" xmlns:r="http://schemas.openxmlformats.org/officeDocument/2006/relationships">
+<p:sld xmlns:a="http://schemas.openxmlformats.org/drawingml/2006/main" xmlns:r="http://schemas.openxmlformats.org/officeDocument/2006/relationships" xmlns:p="http://schemas.openxmlformats.org/presentationml/2006/main">
   <p:cSld>
     <p:spTree>
       <p:nvGrpSpPr>
@@ -5406,7 +5436,14 @@
         <p:cNvGrpSpPr/>
         <p:nvPr/>
       </p:nvGrpSpPr>
-      <p:grpSpPr/>
+      <p:grpSpPr>
+        <a:xfrm>
+          <a:off x="0" y="0"/>
+          <a:ext cx="0" cy="0"/>
+          <a:chOff x="0" y="0"/>
+          <a:chExt cx="0" cy="0"/>
+        </a:xfrm>
+      </p:grpSpPr>
       <p:sp>
         <p:nvSpPr>
           <p:cNvPr id="2" name="Rectangle 1"/>
@@ -5448,6 +5485,7 @@
           <a:lstStyle/>
           <a:p>
             <a:pPr algn="ctr"/>
+            <a:endParaRPr/>
           </a:p>
         </p:txBody>
       </p:sp>
@@ -5468,7 +5506,7 @@
           <a:noFill/>
         </p:spPr>
         <p:txBody>
-          <a:bodyPr wrap="square" anchor="t" lIns="0" rIns="0" tIns="0" bIns="0">
+          <a:bodyPr wrap="square" lIns="0" tIns="0" rIns="0" bIns="0" anchor="t">
             <a:spAutoFit/>
           </a:bodyPr>
           <a:lstStyle/>
@@ -5513,7 +5551,7 @@
           <a:noFill/>
         </p:spPr>
         <p:txBody>
-          <a:bodyPr wrap="square" anchor="t" lIns="0" rIns="0" tIns="0" bIns="0">
+          <a:bodyPr wrap="square" lIns="0" tIns="0" rIns="0" bIns="0" anchor="t">
             <a:spAutoFit/>
           </a:bodyPr>
           <a:lstStyle/>
@@ -5558,7 +5596,7 @@
           <a:noFill/>
         </p:spPr>
         <p:txBody>
-          <a:bodyPr wrap="square" anchor="t" lIns="0" rIns="0" tIns="0" bIns="0">
+          <a:bodyPr wrap="square" lIns="0" tIns="0" rIns="0" bIns="0" anchor="t">
             <a:spAutoFit/>
           </a:bodyPr>
           <a:lstStyle/>
@@ -5629,6 +5667,7 @@
           <a:lstStyle/>
           <a:p>
             <a:pPr algn="ctr"/>
+            <a:endParaRPr/>
           </a:p>
         </p:txBody>
       </p:sp>
@@ -5649,7 +5688,7 @@
           <a:noFill/>
         </p:spPr>
         <p:txBody>
-          <a:bodyPr wrap="square" anchor="t" lIns="0" rIns="0" tIns="0" bIns="0">
+          <a:bodyPr wrap="square" lIns="0" tIns="0" rIns="0" bIns="0" anchor="t">
             <a:spAutoFit/>
           </a:bodyPr>
           <a:lstStyle/>
@@ -5694,7 +5733,7 @@
           <a:noFill/>
         </p:spPr>
         <p:txBody>
-          <a:bodyPr wrap="square" anchor="t" lIns="0" rIns="0" tIns="0" bIns="0">
+          <a:bodyPr wrap="square" lIns="0" tIns="0" rIns="0" bIns="0" anchor="t">
             <a:spAutoFit/>
           </a:bodyPr>
           <a:lstStyle/>
@@ -5853,6 +5892,7 @@
           <a:lstStyle/>
           <a:p>
             <a:pPr algn="ctr"/>
+            <a:endParaRPr/>
           </a:p>
         </p:txBody>
       </p:sp>
@@ -5873,7 +5913,7 @@
           <a:noFill/>
         </p:spPr>
         <p:txBody>
-          <a:bodyPr wrap="square" anchor="t" lIns="0" rIns="0" tIns="0" bIns="0">
+          <a:bodyPr wrap="square" lIns="0" tIns="0" rIns="0" bIns="0" anchor="t">
             <a:spAutoFit/>
           </a:bodyPr>
           <a:lstStyle/>
@@ -6037,6 +6077,7 @@
           <a:lstStyle/>
           <a:p>
             <a:pPr algn="ctr"/>
+            <a:endParaRPr/>
           </a:p>
         </p:txBody>
       </p:sp>
@@ -6057,7 +6098,7 @@
           <a:noFill/>
         </p:spPr>
         <p:txBody>
-          <a:bodyPr wrap="square" anchor="t" lIns="0" rIns="0" tIns="0" bIns="0">
+          <a:bodyPr wrap="square" lIns="0" tIns="0" rIns="0" bIns="0" anchor="t">
             <a:spAutoFit/>
           </a:bodyPr>
           <a:lstStyle/>
@@ -6187,7 +6228,7 @@
 </file>
 
 <file path=ppt/slides/slide12.xml><?xml version="1.0" encoding="utf-8"?>
-<p:sld xmlns:a="http://schemas.openxmlformats.org/drawingml/2006/main" xmlns:p="http://schemas.openxmlformats.org/presentationml/2006/main" xmlns:r="http://schemas.openxmlformats.org/officeDocument/2006/relationships">
+<p:sld xmlns:a="http://schemas.openxmlformats.org/drawingml/2006/main" xmlns:r="http://schemas.openxmlformats.org/officeDocument/2006/relationships" xmlns:p="http://schemas.openxmlformats.org/presentationml/2006/main">
   <p:cSld>
     <p:spTree>
       <p:nvGrpSpPr>
@@ -6195,7 +6236,14 @@
         <p:cNvGrpSpPr/>
         <p:nvPr/>
       </p:nvGrpSpPr>
-      <p:grpSpPr/>
+      <p:grpSpPr>
+        <a:xfrm>
+          <a:off x="0" y="0"/>
+          <a:ext cx="0" cy="0"/>
+          <a:chOff x="0" y="0"/>
+          <a:chExt cx="0" cy="0"/>
+        </a:xfrm>
+      </p:grpSpPr>
       <p:sp>
         <p:nvSpPr>
           <p:cNvPr id="2" name="Rectangle 1"/>
@@ -6237,6 +6285,7 @@
           <a:lstStyle/>
           <a:p>
             <a:pPr algn="ctr"/>
+            <a:endParaRPr/>
           </a:p>
         </p:txBody>
       </p:sp>
@@ -6257,7 +6306,7 @@
           <a:noFill/>
         </p:spPr>
         <p:txBody>
-          <a:bodyPr wrap="square" anchor="t" lIns="0" rIns="0" tIns="0" bIns="0">
+          <a:bodyPr wrap="square" lIns="0" tIns="0" rIns="0" bIns="0" anchor="t">
             <a:spAutoFit/>
           </a:bodyPr>
           <a:lstStyle/>
@@ -6302,7 +6351,7 @@
           <a:noFill/>
         </p:spPr>
         <p:txBody>
-          <a:bodyPr wrap="square" anchor="t" lIns="0" rIns="0" tIns="0" bIns="0">
+          <a:bodyPr wrap="square" lIns="0" tIns="0" rIns="0" bIns="0" anchor="t">
             <a:spAutoFit/>
           </a:bodyPr>
           <a:lstStyle/>
@@ -6347,7 +6396,7 @@
           <a:noFill/>
         </p:spPr>
         <p:txBody>
-          <a:bodyPr wrap="square" anchor="t" lIns="0" rIns="0" tIns="0" bIns="0">
+          <a:bodyPr wrap="square" lIns="0" tIns="0" rIns="0" bIns="0" anchor="t">
             <a:spAutoFit/>
           </a:bodyPr>
           <a:lstStyle/>
@@ -6418,6 +6467,7 @@
           <a:lstStyle/>
           <a:p>
             <a:pPr algn="ctr"/>
+            <a:endParaRPr/>
           </a:p>
         </p:txBody>
       </p:sp>
@@ -6462,6 +6512,7 @@
           <a:lstStyle/>
           <a:p>
             <a:pPr algn="ctr"/>
+            <a:endParaRPr/>
           </a:p>
         </p:txBody>
       </p:sp>
@@ -6482,7 +6533,7 @@
           <a:noFill/>
         </p:spPr>
         <p:txBody>
-          <a:bodyPr wrap="square" anchor="ctr" lIns="0" rIns="0" tIns="0" bIns="0">
+          <a:bodyPr wrap="square" lIns="0" tIns="0" rIns="0" bIns="0" anchor="ctr">
             <a:spAutoFit/>
           </a:bodyPr>
           <a:lstStyle/>
@@ -6549,7 +6600,7 @@
           <a:noFill/>
         </p:spPr>
         <p:txBody>
-          <a:bodyPr wrap="square" anchor="ctr" lIns="0" rIns="0" tIns="0" bIns="0">
+          <a:bodyPr wrap="square" lIns="0" tIns="0" rIns="0" bIns="0" anchor="ctr">
             <a:spAutoFit/>
           </a:bodyPr>
           <a:lstStyle/>
@@ -6620,6 +6671,7 @@
           <a:lstStyle/>
           <a:p>
             <a:pPr algn="ctr"/>
+            <a:endParaRPr/>
           </a:p>
         </p:txBody>
       </p:sp>
@@ -6664,6 +6716,7 @@
           <a:lstStyle/>
           <a:p>
             <a:pPr algn="ctr"/>
+            <a:endParaRPr/>
           </a:p>
         </p:txBody>
       </p:sp>
@@ -6684,7 +6737,7 @@
           <a:noFill/>
         </p:spPr>
         <p:txBody>
-          <a:bodyPr wrap="square" anchor="ctr" lIns="0" rIns="0" tIns="0" bIns="0">
+          <a:bodyPr wrap="square" lIns="0" tIns="0" rIns="0" bIns="0" anchor="ctr">
             <a:spAutoFit/>
           </a:bodyPr>
           <a:lstStyle/>
@@ -6751,7 +6804,7 @@
           <a:noFill/>
         </p:spPr>
         <p:txBody>
-          <a:bodyPr wrap="square" anchor="ctr" lIns="0" rIns="0" tIns="0" bIns="0">
+          <a:bodyPr wrap="square" lIns="0" tIns="0" rIns="0" bIns="0" anchor="ctr">
             <a:spAutoFit/>
           </a:bodyPr>
           <a:lstStyle/>
@@ -6822,6 +6875,7 @@
           <a:lstStyle/>
           <a:p>
             <a:pPr algn="ctr"/>
+            <a:endParaRPr/>
           </a:p>
         </p:txBody>
       </p:sp>
@@ -6866,6 +6920,7 @@
           <a:lstStyle/>
           <a:p>
             <a:pPr algn="ctr"/>
+            <a:endParaRPr/>
           </a:p>
         </p:txBody>
       </p:sp>
@@ -6886,7 +6941,7 @@
           <a:noFill/>
         </p:spPr>
         <p:txBody>
-          <a:bodyPr wrap="square" anchor="ctr" lIns="0" rIns="0" tIns="0" bIns="0">
+          <a:bodyPr wrap="square" lIns="0" tIns="0" rIns="0" bIns="0" anchor="ctr">
             <a:spAutoFit/>
           </a:bodyPr>
           <a:lstStyle/>
@@ -6953,7 +7008,7 @@
           <a:noFill/>
         </p:spPr>
         <p:txBody>
-          <a:bodyPr wrap="square" anchor="ctr" lIns="0" rIns="0" tIns="0" bIns="0">
+          <a:bodyPr wrap="square" lIns="0" tIns="0" rIns="0" bIns="0" anchor="ctr">
             <a:spAutoFit/>
           </a:bodyPr>
           <a:lstStyle/>
@@ -7024,6 +7079,7 @@
           <a:lstStyle/>
           <a:p>
             <a:pPr algn="ctr"/>
+            <a:endParaRPr/>
           </a:p>
         </p:txBody>
       </p:sp>
@@ -7068,6 +7124,7 @@
           <a:lstStyle/>
           <a:p>
             <a:pPr algn="ctr"/>
+            <a:endParaRPr/>
           </a:p>
         </p:txBody>
       </p:sp>
@@ -7088,7 +7145,7 @@
           <a:noFill/>
         </p:spPr>
         <p:txBody>
-          <a:bodyPr wrap="square" anchor="ctr" lIns="0" rIns="0" tIns="0" bIns="0">
+          <a:bodyPr wrap="square" lIns="0" tIns="0" rIns="0" bIns="0" anchor="ctr">
             <a:spAutoFit/>
           </a:bodyPr>
           <a:lstStyle/>
@@ -7155,7 +7212,7 @@
           <a:noFill/>
         </p:spPr>
         <p:txBody>
-          <a:bodyPr wrap="square" anchor="ctr" lIns="0" rIns="0" tIns="0" bIns="0">
+          <a:bodyPr wrap="square" lIns="0" tIns="0" rIns="0" bIns="0" anchor="ctr">
             <a:spAutoFit/>
           </a:bodyPr>
           <a:lstStyle/>
@@ -7226,6 +7283,7 @@
           <a:lstStyle/>
           <a:p>
             <a:pPr algn="ctr"/>
+            <a:endParaRPr/>
           </a:p>
         </p:txBody>
       </p:sp>
@@ -7270,6 +7328,7 @@
           <a:lstStyle/>
           <a:p>
             <a:pPr algn="ctr"/>
+            <a:endParaRPr/>
           </a:p>
         </p:txBody>
       </p:sp>
@@ -7290,7 +7349,7 @@
           <a:noFill/>
         </p:spPr>
         <p:txBody>
-          <a:bodyPr wrap="square" anchor="ctr" lIns="0" rIns="0" tIns="0" bIns="0">
+          <a:bodyPr wrap="square" lIns="0" tIns="0" rIns="0" bIns="0" anchor="ctr">
             <a:spAutoFit/>
           </a:bodyPr>
           <a:lstStyle/>
@@ -7383,6 +7442,7 @@
           <a:lstStyle/>
           <a:p>
             <a:pPr algn="ctr"/>
+            <a:endParaRPr/>
           </a:p>
         </p:txBody>
       </p:sp>
@@ -7403,7 +7463,7 @@
           <a:noFill/>
         </p:spPr>
         <p:txBody>
-          <a:bodyPr wrap="square" anchor="t" lIns="0" rIns="0" tIns="0" bIns="0">
+          <a:bodyPr wrap="square" lIns="0" tIns="0" rIns="0" bIns="0" anchor="t">
             <a:spAutoFit/>
           </a:bodyPr>
           <a:lstStyle/>
@@ -7567,6 +7627,7 @@
           <a:lstStyle/>
           <a:p>
             <a:pPr algn="ctr"/>
+            <a:endParaRPr/>
           </a:p>
         </p:txBody>
       </p:sp>
@@ -7587,7 +7648,7 @@
           <a:noFill/>
         </p:spPr>
         <p:txBody>
-          <a:bodyPr wrap="square" anchor="t" lIns="0" rIns="0" tIns="0" bIns="0">
+          <a:bodyPr wrap="square" lIns="0" tIns="0" rIns="0" bIns="0" anchor="t">
             <a:spAutoFit/>
           </a:bodyPr>
           <a:lstStyle/>
@@ -7717,7 +7778,7 @@
 </file>
 
 <file path=ppt/slides/slide13.xml><?xml version="1.0" encoding="utf-8"?>
-<p:sld xmlns:a="http://schemas.openxmlformats.org/drawingml/2006/main" xmlns:p="http://schemas.openxmlformats.org/presentationml/2006/main" xmlns:r="http://schemas.openxmlformats.org/officeDocument/2006/relationships">
+<p:sld xmlns:a="http://schemas.openxmlformats.org/drawingml/2006/main" xmlns:r="http://schemas.openxmlformats.org/officeDocument/2006/relationships" xmlns:p="http://schemas.openxmlformats.org/presentationml/2006/main">
   <p:cSld>
     <p:spTree>
       <p:nvGrpSpPr>
@@ -7725,7 +7786,14 @@
         <p:cNvGrpSpPr/>
         <p:nvPr/>
       </p:nvGrpSpPr>
-      <p:grpSpPr/>
+      <p:grpSpPr>
+        <a:xfrm>
+          <a:off x="0" y="0"/>
+          <a:ext cx="0" cy="0"/>
+          <a:chOff x="0" y="0"/>
+          <a:chExt cx="0" cy="0"/>
+        </a:xfrm>
+      </p:grpSpPr>
       <p:sp>
         <p:nvSpPr>
           <p:cNvPr id="2" name="Rectangle 1"/>
@@ -7767,6 +7835,7 @@
           <a:lstStyle/>
           <a:p>
             <a:pPr algn="ctr"/>
+            <a:endParaRPr/>
           </a:p>
         </p:txBody>
       </p:sp>
@@ -7787,7 +7856,7 @@
           <a:noFill/>
         </p:spPr>
         <p:txBody>
-          <a:bodyPr wrap="square" anchor="t" lIns="0" rIns="0" tIns="0" bIns="0">
+          <a:bodyPr wrap="square" lIns="0" tIns="0" rIns="0" bIns="0" anchor="t">
             <a:spAutoFit/>
           </a:bodyPr>
           <a:lstStyle/>
@@ -7832,7 +7901,7 @@
           <a:noFill/>
         </p:spPr>
         <p:txBody>
-          <a:bodyPr wrap="square" anchor="t" lIns="0" rIns="0" tIns="0" bIns="0">
+          <a:bodyPr wrap="square" lIns="0" tIns="0" rIns="0" bIns="0" anchor="t">
             <a:spAutoFit/>
           </a:bodyPr>
           <a:lstStyle/>
@@ -7877,7 +7946,7 @@
           <a:noFill/>
         </p:spPr>
         <p:txBody>
-          <a:bodyPr wrap="square" anchor="t" lIns="0" rIns="0" tIns="0" bIns="0">
+          <a:bodyPr wrap="square" lIns="0" tIns="0" rIns="0" bIns="0" anchor="t">
             <a:spAutoFit/>
           </a:bodyPr>
           <a:lstStyle/>
@@ -7922,7 +7991,7 @@
           <a:noFill/>
         </p:spPr>
         <p:txBody>
-          <a:bodyPr wrap="square" anchor="t" lIns="0" rIns="0" tIns="0" bIns="0">
+          <a:bodyPr wrap="square" lIns="0" tIns="0" rIns="0" bIns="0" anchor="t">
             <a:spAutoFit/>
           </a:bodyPr>
           <a:lstStyle/>
@@ -7978,15 +8047,12 @@
                 <a:spcPts val="200"/>
               </a:spcAft>
             </a:pPr>
-            <a:r>
-              <a:rPr sz="800" b="0">
-                <a:solidFill>
-                  <a:srgbClr val="E6EDF3"/>
-                </a:solidFill>
-                <a:latin typeface="Segoe UI"/>
-              </a:rPr>
-              <a:t/>
-            </a:r>
+            <a:endParaRPr sz="1400" b="0">
+              <a:solidFill>
+                <a:srgbClr val="E6EDF3"/>
+              </a:solidFill>
+              <a:latin typeface="Segoe UI"/>
+            </a:endParaRPr>
           </a:p>
           <a:p>
             <a:pPr algn="l">
@@ -8117,6 +8183,7 @@
           <a:lstStyle/>
           <a:p>
             <a:pPr algn="ctr"/>
+            <a:endParaRPr/>
           </a:p>
         </p:txBody>
       </p:sp>
@@ -8137,7 +8204,7 @@
           <a:noFill/>
         </p:spPr>
         <p:txBody>
-          <a:bodyPr wrap="square" anchor="ctr" lIns="0" rIns="0" tIns="0" bIns="0">
+          <a:bodyPr wrap="square" lIns="0" tIns="0" rIns="0" bIns="0" anchor="ctr">
             <a:spAutoFit/>
           </a:bodyPr>
           <a:lstStyle/>
@@ -8174,7 +8241,7 @@
 </file>
 
 <file path=ppt/slides/slide14.xml><?xml version="1.0" encoding="utf-8"?>
-<p:sld xmlns:a="http://schemas.openxmlformats.org/drawingml/2006/main" xmlns:p="http://schemas.openxmlformats.org/presentationml/2006/main" xmlns:r="http://schemas.openxmlformats.org/officeDocument/2006/relationships">
+<p:sld xmlns:a="http://schemas.openxmlformats.org/drawingml/2006/main" xmlns:r="http://schemas.openxmlformats.org/officeDocument/2006/relationships" xmlns:p="http://schemas.openxmlformats.org/presentationml/2006/main">
   <p:cSld>
     <p:spTree>
       <p:nvGrpSpPr>
@@ -8182,7 +8249,14 @@
         <p:cNvGrpSpPr/>
         <p:nvPr/>
       </p:nvGrpSpPr>
-      <p:grpSpPr/>
+      <p:grpSpPr>
+        <a:xfrm>
+          <a:off x="0" y="0"/>
+          <a:ext cx="0" cy="0"/>
+          <a:chOff x="0" y="0"/>
+          <a:chExt cx="0" cy="0"/>
+        </a:xfrm>
+      </p:grpSpPr>
       <p:sp>
         <p:nvSpPr>
           <p:cNvPr id="2" name="Rectangle 1"/>
@@ -8224,6 +8298,7 @@
           <a:lstStyle/>
           <a:p>
             <a:pPr algn="ctr"/>
+            <a:endParaRPr/>
           </a:p>
         </p:txBody>
       </p:sp>
@@ -8244,7 +8319,7 @@
           <a:noFill/>
         </p:spPr>
         <p:txBody>
-          <a:bodyPr wrap="square" anchor="t" lIns="0" rIns="0" tIns="0" bIns="0">
+          <a:bodyPr wrap="square" lIns="0" tIns="0" rIns="0" bIns="0" anchor="t">
             <a:spAutoFit/>
           </a:bodyPr>
           <a:lstStyle/>
@@ -8289,7 +8364,7 @@
           <a:noFill/>
         </p:spPr>
         <p:txBody>
-          <a:bodyPr wrap="square" anchor="t" lIns="0" rIns="0" tIns="0" bIns="0">
+          <a:bodyPr wrap="square" lIns="0" tIns="0" rIns="0" bIns="0" anchor="t">
             <a:spAutoFit/>
           </a:bodyPr>
           <a:lstStyle/>
@@ -8334,7 +8409,7 @@
           <a:noFill/>
         </p:spPr>
         <p:txBody>
-          <a:bodyPr wrap="square" anchor="t" lIns="0" rIns="0" tIns="0" bIns="0">
+          <a:bodyPr wrap="square" lIns="0" tIns="0" rIns="0" bIns="0" anchor="t">
             <a:spAutoFit/>
           </a:bodyPr>
           <a:lstStyle/>
@@ -8381,10 +8456,34 @@
                 <a:tableStyleId>{5C22544A-7EE6-4342-B048-85BDC9FD1C3A}</a:tableStyleId>
               </a:tblPr>
               <a:tblGrid>
-                <a:gridCol w="3291840"/>
-                <a:gridCol w="1764792"/>
-                <a:gridCol w="1764792"/>
-                <a:gridCol w="1764792"/>
+                <a:gridCol w="3291840">
+                  <a:extLst>
+                    <a:ext uri="{9D8B030D-6E8A-4147-A177-3AD203B41FA5}">
+                      <a16:colId xmlns:a16="http://schemas.microsoft.com/office/drawing/2014/main" val="20000"/>
+                    </a:ext>
+                  </a:extLst>
+                </a:gridCol>
+                <a:gridCol w="1764792">
+                  <a:extLst>
+                    <a:ext uri="{9D8B030D-6E8A-4147-A177-3AD203B41FA5}">
+                      <a16:colId xmlns:a16="http://schemas.microsoft.com/office/drawing/2014/main" val="20001"/>
+                    </a:ext>
+                  </a:extLst>
+                </a:gridCol>
+                <a:gridCol w="1764792">
+                  <a:extLst>
+                    <a:ext uri="{9D8B030D-6E8A-4147-A177-3AD203B41FA5}">
+                      <a16:colId xmlns:a16="http://schemas.microsoft.com/office/drawing/2014/main" val="20002"/>
+                    </a:ext>
+                  </a:extLst>
+                </a:gridCol>
+                <a:gridCol w="1764792">
+                  <a:extLst>
+                    <a:ext uri="{9D8B030D-6E8A-4147-A177-3AD203B41FA5}">
+                      <a16:colId xmlns:a16="http://schemas.microsoft.com/office/drawing/2014/main" val="20003"/>
+                    </a:ext>
+                  </a:extLst>
+                </a:gridCol>
               </a:tblGrid>
               <a:tr h="375920">
                 <a:tc>
@@ -8479,6 +8578,11 @@
                     </a:solidFill>
                   </a:tcPr>
                 </a:tc>
+                <a:extLst>
+                  <a:ext uri="{0D108BD9-81ED-4DB2-BD59-A6C34878D82A}">
+                    <a16:rowId xmlns:a16="http://schemas.microsoft.com/office/drawing/2014/main" val="10000"/>
+                  </a:ext>
+                </a:extLst>
               </a:tr>
               <a:tr h="375920">
                 <a:tc>
@@ -8552,6 +8656,11 @@
                     </a:solidFill>
                   </a:tcPr>
                 </a:tc>
+                <a:extLst>
+                  <a:ext uri="{0D108BD9-81ED-4DB2-BD59-A6C34878D82A}">
+                    <a16:rowId xmlns:a16="http://schemas.microsoft.com/office/drawing/2014/main" val="10001"/>
+                  </a:ext>
+                </a:extLst>
               </a:tr>
               <a:tr h="375920">
                 <a:tc>
@@ -8625,6 +8734,11 @@
                     </a:solidFill>
                   </a:tcPr>
                 </a:tc>
+                <a:extLst>
+                  <a:ext uri="{0D108BD9-81ED-4DB2-BD59-A6C34878D82A}">
+                    <a16:rowId xmlns:a16="http://schemas.microsoft.com/office/drawing/2014/main" val="10002"/>
+                  </a:ext>
+                </a:extLst>
               </a:tr>
               <a:tr h="375920">
                 <a:tc>
@@ -8698,6 +8812,11 @@
                     </a:solidFill>
                   </a:tcPr>
                 </a:tc>
+                <a:extLst>
+                  <a:ext uri="{0D108BD9-81ED-4DB2-BD59-A6C34878D82A}">
+                    <a16:rowId xmlns:a16="http://schemas.microsoft.com/office/drawing/2014/main" val="10003"/>
+                  </a:ext>
+                </a:extLst>
               </a:tr>
               <a:tr h="375920">
                 <a:tc>
@@ -8771,6 +8890,11 @@
                     </a:solidFill>
                   </a:tcPr>
                 </a:tc>
+                <a:extLst>
+                  <a:ext uri="{0D108BD9-81ED-4DB2-BD59-A6C34878D82A}">
+                    <a16:rowId xmlns:a16="http://schemas.microsoft.com/office/drawing/2014/main" val="10004"/>
+                  </a:ext>
+                </a:extLst>
               </a:tr>
               <a:tr h="375920">
                 <a:tc>
@@ -8844,6 +8968,11 @@
                     </a:solidFill>
                   </a:tcPr>
                 </a:tc>
+                <a:extLst>
+                  <a:ext uri="{0D108BD9-81ED-4DB2-BD59-A6C34878D82A}">
+                    <a16:rowId xmlns:a16="http://schemas.microsoft.com/office/drawing/2014/main" val="10005"/>
+                  </a:ext>
+                </a:extLst>
               </a:tr>
               <a:tr h="375920">
                 <a:tc>
@@ -8917,6 +9046,11 @@
                     </a:solidFill>
                   </a:tcPr>
                 </a:tc>
+                <a:extLst>
+                  <a:ext uri="{0D108BD9-81ED-4DB2-BD59-A6C34878D82A}">
+                    <a16:rowId xmlns:a16="http://schemas.microsoft.com/office/drawing/2014/main" val="10006"/>
+                  </a:ext>
+                </a:extLst>
               </a:tr>
               <a:tr h="375920">
                 <a:tc>
@@ -8990,6 +9124,11 @@
                     </a:solidFill>
                   </a:tcPr>
                 </a:tc>
+                <a:extLst>
+                  <a:ext uri="{0D108BD9-81ED-4DB2-BD59-A6C34878D82A}">
+                    <a16:rowId xmlns:a16="http://schemas.microsoft.com/office/drawing/2014/main" val="10007"/>
+                  </a:ext>
+                </a:extLst>
               </a:tr>
               <a:tr h="375920">
                 <a:tc>
@@ -9063,6 +9202,11 @@
                     </a:solidFill>
                   </a:tcPr>
                 </a:tc>
+                <a:extLst>
+                  <a:ext uri="{0D108BD9-81ED-4DB2-BD59-A6C34878D82A}">
+                    <a16:rowId xmlns:a16="http://schemas.microsoft.com/office/drawing/2014/main" val="10008"/>
+                  </a:ext>
+                </a:extLst>
               </a:tr>
             </a:tbl>
           </a:graphicData>
@@ -9111,6 +9255,7 @@
           <a:lstStyle/>
           <a:p>
             <a:pPr algn="ctr"/>
+            <a:endParaRPr/>
           </a:p>
         </p:txBody>
       </p:sp>
@@ -9131,7 +9276,7 @@
           <a:noFill/>
         </p:spPr>
         <p:txBody>
-          <a:bodyPr wrap="square" anchor="t" lIns="0" rIns="0" tIns="0" bIns="0">
+          <a:bodyPr wrap="square" lIns="0" tIns="0" rIns="0" bIns="0" anchor="t">
             <a:spAutoFit/>
           </a:bodyPr>
           <a:lstStyle/>
@@ -9300,7 +9445,7 @@
           <a:noFill/>
         </p:spPr>
         <p:txBody>
-          <a:bodyPr wrap="square" anchor="t" lIns="0" rIns="0" tIns="0" bIns="0">
+          <a:bodyPr wrap="square" lIns="0" tIns="0" rIns="0" bIns="0" anchor="t">
             <a:spAutoFit/>
           </a:bodyPr>
           <a:lstStyle/>
@@ -9346,7 +9491,7 @@
 </file>
 
 <file path=ppt/slides/slide15.xml><?xml version="1.0" encoding="utf-8"?>
-<p:sld xmlns:a="http://schemas.openxmlformats.org/drawingml/2006/main" xmlns:p="http://schemas.openxmlformats.org/presentationml/2006/main" xmlns:r="http://schemas.openxmlformats.org/officeDocument/2006/relationships">
+<p:sld xmlns:a="http://schemas.openxmlformats.org/drawingml/2006/main" xmlns:r="http://schemas.openxmlformats.org/officeDocument/2006/relationships" xmlns:p="http://schemas.openxmlformats.org/presentationml/2006/main">
   <p:cSld>
     <p:spTree>
       <p:nvGrpSpPr>
@@ -9354,7 +9499,14 @@
         <p:cNvGrpSpPr/>
         <p:nvPr/>
       </p:nvGrpSpPr>
-      <p:grpSpPr/>
+      <p:grpSpPr>
+        <a:xfrm>
+          <a:off x="0" y="0"/>
+          <a:ext cx="0" cy="0"/>
+          <a:chOff x="0" y="0"/>
+          <a:chExt cx="0" cy="0"/>
+        </a:xfrm>
+      </p:grpSpPr>
       <p:sp>
         <p:nvSpPr>
           <p:cNvPr id="2" name="Rectangle 1"/>
@@ -9396,6 +9548,7 @@
           <a:lstStyle/>
           <a:p>
             <a:pPr algn="ctr"/>
+            <a:endParaRPr/>
           </a:p>
         </p:txBody>
       </p:sp>
@@ -9416,7 +9569,7 @@
           <a:noFill/>
         </p:spPr>
         <p:txBody>
-          <a:bodyPr wrap="square" anchor="t" lIns="0" rIns="0" tIns="0" bIns="0">
+          <a:bodyPr wrap="square" lIns="0" tIns="0" rIns="0" bIns="0" anchor="t">
             <a:spAutoFit/>
           </a:bodyPr>
           <a:lstStyle/>
@@ -9461,7 +9614,7 @@
           <a:noFill/>
         </p:spPr>
         <p:txBody>
-          <a:bodyPr wrap="square" anchor="t" lIns="0" rIns="0" tIns="0" bIns="0">
+          <a:bodyPr wrap="square" lIns="0" tIns="0" rIns="0" bIns="0" anchor="t">
             <a:spAutoFit/>
           </a:bodyPr>
           <a:lstStyle/>
@@ -9506,7 +9659,7 @@
           <a:noFill/>
         </p:spPr>
         <p:txBody>
-          <a:bodyPr wrap="square" anchor="t" lIns="0" rIns="0" tIns="0" bIns="0">
+          <a:bodyPr wrap="square" lIns="0" tIns="0" rIns="0" bIns="0" anchor="t">
             <a:spAutoFit/>
           </a:bodyPr>
           <a:lstStyle/>
@@ -9544,7 +9697,7 @@
         </p:nvGraphicFramePr>
         <p:xfrm>
           <a:off x="640080" y="2011680"/>
-          <a:ext cx="8586216" cy="3383280"/>
+          <a:ext cx="8586216" cy="2297176"/>
         </p:xfrm>
         <a:graphic>
           <a:graphicData uri="http://schemas.openxmlformats.org/drawingml/2006/table">
@@ -9553,10 +9706,34 @@
                 <a:tableStyleId>{5C22544A-7EE6-4342-B048-85BDC9FD1C3A}</a:tableStyleId>
               </a:tblPr>
               <a:tblGrid>
-                <a:gridCol w="3291840"/>
-                <a:gridCol w="1764792"/>
-                <a:gridCol w="1764792"/>
-                <a:gridCol w="1764792"/>
+                <a:gridCol w="3291840">
+                  <a:extLst>
+                    <a:ext uri="{9D8B030D-6E8A-4147-A177-3AD203B41FA5}">
+                      <a16:colId xmlns:a16="http://schemas.microsoft.com/office/drawing/2014/main" val="20000"/>
+                    </a:ext>
+                  </a:extLst>
+                </a:gridCol>
+                <a:gridCol w="1764792">
+                  <a:extLst>
+                    <a:ext uri="{9D8B030D-6E8A-4147-A177-3AD203B41FA5}">
+                      <a16:colId xmlns:a16="http://schemas.microsoft.com/office/drawing/2014/main" val="20001"/>
+                    </a:ext>
+                  </a:extLst>
+                </a:gridCol>
+                <a:gridCol w="1764792">
+                  <a:extLst>
+                    <a:ext uri="{9D8B030D-6E8A-4147-A177-3AD203B41FA5}">
+                      <a16:colId xmlns:a16="http://schemas.microsoft.com/office/drawing/2014/main" val="20002"/>
+                    </a:ext>
+                  </a:extLst>
+                </a:gridCol>
+                <a:gridCol w="1764792">
+                  <a:extLst>
+                    <a:ext uri="{9D8B030D-6E8A-4147-A177-3AD203B41FA5}">
+                      <a16:colId xmlns:a16="http://schemas.microsoft.com/office/drawing/2014/main" val="20003"/>
+                    </a:ext>
+                  </a:extLst>
+                </a:gridCol>
               </a:tblGrid>
               <a:tr h="375920">
                 <a:tc>
@@ -9651,6 +9828,11 @@
                     </a:solidFill>
                   </a:tcPr>
                 </a:tc>
+                <a:extLst>
+                  <a:ext uri="{0D108BD9-81ED-4DB2-BD59-A6C34878D82A}">
+                    <a16:rowId xmlns:a16="http://schemas.microsoft.com/office/drawing/2014/main" val="10000"/>
+                  </a:ext>
+                </a:extLst>
               </a:tr>
               <a:tr h="375920">
                 <a:tc>
@@ -9745,6 +9927,11 @@
                     </a:solidFill>
                   </a:tcPr>
                 </a:tc>
+                <a:extLst>
+                  <a:ext uri="{0D108BD9-81ED-4DB2-BD59-A6C34878D82A}">
+                    <a16:rowId xmlns:a16="http://schemas.microsoft.com/office/drawing/2014/main" val="10001"/>
+                  </a:ext>
+                </a:extLst>
               </a:tr>
               <a:tr h="375920">
                 <a:tc>
@@ -9839,6 +10026,11 @@
                     </a:solidFill>
                   </a:tcPr>
                 </a:tc>
+                <a:extLst>
+                  <a:ext uri="{0D108BD9-81ED-4DB2-BD59-A6C34878D82A}">
+                    <a16:rowId xmlns:a16="http://schemas.microsoft.com/office/drawing/2014/main" val="10002"/>
+                  </a:ext>
+                </a:extLst>
               </a:tr>
               <a:tr h="375920">
                 <a:tc>
@@ -9933,6 +10125,11 @@
                     </a:solidFill>
                   </a:tcPr>
                 </a:tc>
+                <a:extLst>
+                  <a:ext uri="{0D108BD9-81ED-4DB2-BD59-A6C34878D82A}">
+                    <a16:rowId xmlns:a16="http://schemas.microsoft.com/office/drawing/2014/main" val="10003"/>
+                  </a:ext>
+                </a:extLst>
               </a:tr>
               <a:tr h="375920">
                 <a:tc>
@@ -10027,6 +10224,11 @@
                     </a:solidFill>
                   </a:tcPr>
                 </a:tc>
+                <a:extLst>
+                  <a:ext uri="{0D108BD9-81ED-4DB2-BD59-A6C34878D82A}">
+                    <a16:rowId xmlns:a16="http://schemas.microsoft.com/office/drawing/2014/main" val="10004"/>
+                  </a:ext>
+                </a:extLst>
               </a:tr>
               <a:tr h="375920">
                 <a:tc>
@@ -10121,6 +10323,11 @@
                     </a:solidFill>
                   </a:tcPr>
                 </a:tc>
+                <a:extLst>
+                  <a:ext uri="{0D108BD9-81ED-4DB2-BD59-A6C34878D82A}">
+                    <a16:rowId xmlns:a16="http://schemas.microsoft.com/office/drawing/2014/main" val="10005"/>
+                  </a:ext>
+                </a:extLst>
               </a:tr>
             </a:tbl>
           </a:graphicData>
@@ -10169,6 +10376,7 @@
           <a:lstStyle/>
           <a:p>
             <a:pPr algn="ctr"/>
+            <a:endParaRPr/>
           </a:p>
         </p:txBody>
       </p:sp>
@@ -10189,7 +10397,7 @@
           <a:noFill/>
         </p:spPr>
         <p:txBody>
-          <a:bodyPr wrap="square" anchor="t" lIns="0" rIns="0" tIns="0" bIns="0">
+          <a:bodyPr wrap="square" lIns="0" tIns="0" rIns="0" bIns="0" anchor="t">
             <a:spAutoFit/>
           </a:bodyPr>
           <a:lstStyle/>
@@ -10358,7 +10566,7 @@
           <a:noFill/>
         </p:spPr>
         <p:txBody>
-          <a:bodyPr wrap="square" anchor="t" lIns="0" rIns="0" tIns="0" bIns="0">
+          <a:bodyPr wrap="square" lIns="0" tIns="0" rIns="0" bIns="0" anchor="t">
             <a:spAutoFit/>
           </a:bodyPr>
           <a:lstStyle/>
@@ -10404,7 +10612,7 @@
 </file>
 
 <file path=ppt/slides/slide16.xml><?xml version="1.0" encoding="utf-8"?>
-<p:sld xmlns:a="http://schemas.openxmlformats.org/drawingml/2006/main" xmlns:p="http://schemas.openxmlformats.org/presentationml/2006/main" xmlns:r="http://schemas.openxmlformats.org/officeDocument/2006/relationships">
+<p:sld xmlns:a="http://schemas.openxmlformats.org/drawingml/2006/main" xmlns:r="http://schemas.openxmlformats.org/officeDocument/2006/relationships" xmlns:p="http://schemas.openxmlformats.org/presentationml/2006/main">
   <p:cSld>
     <p:spTree>
       <p:nvGrpSpPr>
@@ -10412,7 +10620,14 @@
         <p:cNvGrpSpPr/>
         <p:nvPr/>
       </p:nvGrpSpPr>
-      <p:grpSpPr/>
+      <p:grpSpPr>
+        <a:xfrm>
+          <a:off x="0" y="0"/>
+          <a:ext cx="0" cy="0"/>
+          <a:chOff x="0" y="0"/>
+          <a:chExt cx="0" cy="0"/>
+        </a:xfrm>
+      </p:grpSpPr>
       <p:sp>
         <p:nvSpPr>
           <p:cNvPr id="2" name="Rectangle 1"/>
@@ -10454,6 +10669,7 @@
           <a:lstStyle/>
           <a:p>
             <a:pPr algn="ctr"/>
+            <a:endParaRPr/>
           </a:p>
         </p:txBody>
       </p:sp>
@@ -10474,7 +10690,7 @@
           <a:noFill/>
         </p:spPr>
         <p:txBody>
-          <a:bodyPr wrap="square" anchor="t" lIns="0" rIns="0" tIns="0" bIns="0">
+          <a:bodyPr wrap="square" lIns="0" tIns="0" rIns="0" bIns="0" anchor="t">
             <a:spAutoFit/>
           </a:bodyPr>
           <a:lstStyle/>
@@ -10519,7 +10735,7 @@
           <a:noFill/>
         </p:spPr>
         <p:txBody>
-          <a:bodyPr wrap="square" anchor="t" lIns="0" rIns="0" tIns="0" bIns="0">
+          <a:bodyPr wrap="square" lIns="0" tIns="0" rIns="0" bIns="0" anchor="t">
             <a:spAutoFit/>
           </a:bodyPr>
           <a:lstStyle/>
@@ -10564,7 +10780,7 @@
           <a:noFill/>
         </p:spPr>
         <p:txBody>
-          <a:bodyPr wrap="square" anchor="t" lIns="0" rIns="0" tIns="0" bIns="0">
+          <a:bodyPr wrap="square" lIns="0" tIns="0" rIns="0" bIns="0" anchor="t">
             <a:spAutoFit/>
           </a:bodyPr>
           <a:lstStyle/>
@@ -10635,6 +10851,7 @@
           <a:lstStyle/>
           <a:p>
             <a:pPr algn="ctr"/>
+            <a:endParaRPr/>
           </a:p>
         </p:txBody>
       </p:sp>
@@ -10655,7 +10872,7 @@
           <a:noFill/>
         </p:spPr>
         <p:txBody>
-          <a:bodyPr wrap="square" anchor="t" lIns="0" rIns="0" tIns="0" bIns="0">
+          <a:bodyPr wrap="square" lIns="0" tIns="0" rIns="0" bIns="0" anchor="t">
             <a:spAutoFit/>
           </a:bodyPr>
           <a:lstStyle/>
@@ -10850,6 +11067,7 @@
           <a:lstStyle/>
           <a:p>
             <a:pPr algn="ctr"/>
+            <a:endParaRPr/>
           </a:p>
         </p:txBody>
       </p:sp>
@@ -10870,7 +11088,7 @@
           <a:noFill/>
         </p:spPr>
         <p:txBody>
-          <a:bodyPr wrap="square" anchor="t" lIns="0" rIns="0" tIns="0" bIns="0">
+          <a:bodyPr wrap="square" lIns="0" tIns="0" rIns="0" bIns="0" anchor="t">
             <a:spAutoFit/>
           </a:bodyPr>
           <a:lstStyle/>
@@ -11065,6 +11283,7 @@
           <a:lstStyle/>
           <a:p>
             <a:pPr algn="ctr"/>
+            <a:endParaRPr/>
           </a:p>
         </p:txBody>
       </p:sp>
@@ -11085,7 +11304,7 @@
           <a:noFill/>
         </p:spPr>
         <p:txBody>
-          <a:bodyPr wrap="square" anchor="t" lIns="0" rIns="0" tIns="0" bIns="0">
+          <a:bodyPr wrap="square" lIns="0" tIns="0" rIns="0" bIns="0" anchor="t">
             <a:spAutoFit/>
           </a:bodyPr>
           <a:lstStyle/>
@@ -11254,7 +11473,7 @@
           <a:noFill/>
         </p:spPr>
         <p:txBody>
-          <a:bodyPr wrap="square" anchor="t" lIns="0" rIns="0" tIns="0" bIns="0">
+          <a:bodyPr wrap="square" lIns="0" tIns="0" rIns="0" bIns="0" anchor="t">
             <a:spAutoFit/>
           </a:bodyPr>
           <a:lstStyle/>
@@ -11309,7 +11528,7 @@
 </file>
 
 <file path=ppt/slides/slide17.xml><?xml version="1.0" encoding="utf-8"?>
-<p:sld xmlns:a="http://schemas.openxmlformats.org/drawingml/2006/main" xmlns:p="http://schemas.openxmlformats.org/presentationml/2006/main" xmlns:r="http://schemas.openxmlformats.org/officeDocument/2006/relationships">
+<p:sld xmlns:a="http://schemas.openxmlformats.org/drawingml/2006/main" xmlns:r="http://schemas.openxmlformats.org/officeDocument/2006/relationships" xmlns:p="http://schemas.openxmlformats.org/presentationml/2006/main">
   <p:cSld>
     <p:spTree>
       <p:nvGrpSpPr>
@@ -11317,7 +11536,14 @@
         <p:cNvGrpSpPr/>
         <p:nvPr/>
       </p:nvGrpSpPr>
-      <p:grpSpPr/>
+      <p:grpSpPr>
+        <a:xfrm>
+          <a:off x="0" y="0"/>
+          <a:ext cx="0" cy="0"/>
+          <a:chOff x="0" y="0"/>
+          <a:chExt cx="0" cy="0"/>
+        </a:xfrm>
+      </p:grpSpPr>
       <p:sp>
         <p:nvSpPr>
           <p:cNvPr id="2" name="Rectangle 1"/>
@@ -11359,6 +11585,7 @@
           <a:lstStyle/>
           <a:p>
             <a:pPr algn="ctr"/>
+            <a:endParaRPr/>
           </a:p>
         </p:txBody>
       </p:sp>
@@ -11379,7 +11606,7 @@
           <a:noFill/>
         </p:spPr>
         <p:txBody>
-          <a:bodyPr wrap="square" anchor="t" lIns="0" rIns="0" tIns="0" bIns="0">
+          <a:bodyPr wrap="square" lIns="0" tIns="0" rIns="0" bIns="0" anchor="t">
             <a:spAutoFit/>
           </a:bodyPr>
           <a:lstStyle/>
@@ -11424,7 +11651,7 @@
           <a:noFill/>
         </p:spPr>
         <p:txBody>
-          <a:bodyPr wrap="square" anchor="t" lIns="0" rIns="0" tIns="0" bIns="0">
+          <a:bodyPr wrap="square" lIns="0" tIns="0" rIns="0" bIns="0" anchor="t">
             <a:spAutoFit/>
           </a:bodyPr>
           <a:lstStyle/>
@@ -11469,7 +11696,7 @@
           <a:noFill/>
         </p:spPr>
         <p:txBody>
-          <a:bodyPr wrap="square" anchor="t" lIns="0" rIns="0" tIns="0" bIns="0">
+          <a:bodyPr wrap="square" lIns="0" tIns="0" rIns="0" bIns="0" anchor="t">
             <a:spAutoFit/>
           </a:bodyPr>
           <a:lstStyle/>
@@ -11540,6 +11767,7 @@
           <a:lstStyle/>
           <a:p>
             <a:pPr algn="ctr"/>
+            <a:endParaRPr/>
           </a:p>
         </p:txBody>
       </p:sp>
@@ -11560,7 +11788,7 @@
           <a:noFill/>
         </p:spPr>
         <p:txBody>
-          <a:bodyPr wrap="square" anchor="t" lIns="0" rIns="0" tIns="0" bIns="0">
+          <a:bodyPr wrap="square" lIns="0" tIns="0" rIns="0" bIns="0" anchor="t">
             <a:spAutoFit/>
           </a:bodyPr>
           <a:lstStyle/>
@@ -11693,6 +11921,7 @@
           <a:lstStyle/>
           <a:p>
             <a:pPr algn="ctr"/>
+            <a:endParaRPr/>
           </a:p>
         </p:txBody>
       </p:sp>
@@ -11713,7 +11942,7 @@
           <a:noFill/>
         </p:spPr>
         <p:txBody>
-          <a:bodyPr wrap="square" anchor="t" lIns="0" rIns="0" tIns="0" bIns="0">
+          <a:bodyPr wrap="square" lIns="0" tIns="0" rIns="0" bIns="0" anchor="t">
             <a:spAutoFit/>
           </a:bodyPr>
           <a:lstStyle/>
@@ -11846,6 +12075,7 @@
           <a:lstStyle/>
           <a:p>
             <a:pPr algn="ctr"/>
+            <a:endParaRPr/>
           </a:p>
         </p:txBody>
       </p:sp>
@@ -11866,7 +12096,7 @@
           <a:noFill/>
         </p:spPr>
         <p:txBody>
-          <a:bodyPr wrap="square" anchor="t" lIns="0" rIns="0" tIns="0" bIns="0">
+          <a:bodyPr wrap="square" lIns="0" tIns="0" rIns="0" bIns="0" anchor="t">
             <a:spAutoFit/>
           </a:bodyPr>
           <a:lstStyle/>
@@ -11999,6 +12229,7 @@
           <a:lstStyle/>
           <a:p>
             <a:pPr algn="ctr"/>
+            <a:endParaRPr/>
           </a:p>
         </p:txBody>
       </p:sp>
@@ -12019,7 +12250,7 @@
           <a:noFill/>
         </p:spPr>
         <p:txBody>
-          <a:bodyPr wrap="square" anchor="t" lIns="0" rIns="0" tIns="0" bIns="0">
+          <a:bodyPr wrap="square" lIns="0" tIns="0" rIns="0" bIns="0" anchor="t">
             <a:spAutoFit/>
           </a:bodyPr>
           <a:lstStyle/>
@@ -12118,7 +12349,7 @@
 </file>
 
 <file path=ppt/slides/slide18.xml><?xml version="1.0" encoding="utf-8"?>
-<p:sld xmlns:a="http://schemas.openxmlformats.org/drawingml/2006/main" xmlns:p="http://schemas.openxmlformats.org/presentationml/2006/main" xmlns:r="http://schemas.openxmlformats.org/officeDocument/2006/relationships">
+<p:sld xmlns:a="http://schemas.openxmlformats.org/drawingml/2006/main" xmlns:r="http://schemas.openxmlformats.org/officeDocument/2006/relationships" xmlns:p="http://schemas.openxmlformats.org/presentationml/2006/main">
   <p:cSld>
     <p:spTree>
       <p:nvGrpSpPr>
@@ -12126,7 +12357,14 @@
         <p:cNvGrpSpPr/>
         <p:nvPr/>
       </p:nvGrpSpPr>
-      <p:grpSpPr/>
+      <p:grpSpPr>
+        <a:xfrm>
+          <a:off x="0" y="0"/>
+          <a:ext cx="0" cy="0"/>
+          <a:chOff x="0" y="0"/>
+          <a:chExt cx="0" cy="0"/>
+        </a:xfrm>
+      </p:grpSpPr>
       <p:sp>
         <p:nvSpPr>
           <p:cNvPr id="2" name="Rectangle 1"/>
@@ -12168,6 +12406,7 @@
           <a:lstStyle/>
           <a:p>
             <a:pPr algn="ctr"/>
+            <a:endParaRPr/>
           </a:p>
         </p:txBody>
       </p:sp>
@@ -12212,6 +12451,7 @@
           <a:lstStyle/>
           <a:p>
             <a:pPr algn="ctr"/>
+            <a:endParaRPr/>
           </a:p>
         </p:txBody>
       </p:sp>
@@ -12256,6 +12496,7 @@
           <a:lstStyle/>
           <a:p>
             <a:pPr algn="ctr"/>
+            <a:endParaRPr/>
           </a:p>
         </p:txBody>
       </p:sp>
@@ -12276,7 +12517,7 @@
           <a:noFill/>
         </p:spPr>
         <p:txBody>
-          <a:bodyPr wrap="square" anchor="t" lIns="0" rIns="0" tIns="0" bIns="0">
+          <a:bodyPr wrap="square" lIns="0" tIns="0" rIns="0" bIns="0" anchor="t">
             <a:spAutoFit/>
           </a:bodyPr>
           <a:lstStyle/>
@@ -12321,7 +12562,7 @@
           <a:noFill/>
         </p:spPr>
         <p:txBody>
-          <a:bodyPr wrap="square" anchor="t" lIns="0" rIns="0" tIns="0" bIns="0">
+          <a:bodyPr wrap="square" lIns="0" tIns="0" rIns="0" bIns="0" anchor="t">
             <a:spAutoFit/>
           </a:bodyPr>
           <a:lstStyle/>
@@ -12392,6 +12633,7 @@
           <a:lstStyle/>
           <a:p>
             <a:pPr algn="ctr"/>
+            <a:endParaRPr/>
           </a:p>
         </p:txBody>
       </p:sp>
@@ -12412,7 +12654,7 @@
           <a:noFill/>
         </p:spPr>
         <p:txBody>
-          <a:bodyPr wrap="square" anchor="t" lIns="0" rIns="0" tIns="0" bIns="0">
+          <a:bodyPr wrap="square" lIns="0" tIns="0" rIns="0" bIns="0" anchor="t">
             <a:spAutoFit/>
           </a:bodyPr>
           <a:lstStyle/>
@@ -12576,6 +12818,7 @@
           <a:lstStyle/>
           <a:p>
             <a:pPr algn="ctr"/>
+            <a:endParaRPr/>
           </a:p>
         </p:txBody>
       </p:sp>
@@ -12596,7 +12839,7 @@
           <a:noFill/>
         </p:spPr>
         <p:txBody>
-          <a:bodyPr wrap="square" anchor="t" lIns="0" rIns="0" tIns="0" bIns="0">
+          <a:bodyPr wrap="square" lIns="0" tIns="0" rIns="0" bIns="0" anchor="t">
             <a:spAutoFit/>
           </a:bodyPr>
           <a:lstStyle/>
@@ -12760,6 +13003,7 @@
           <a:lstStyle/>
           <a:p>
             <a:pPr algn="ctr"/>
+            <a:endParaRPr/>
           </a:p>
         </p:txBody>
       </p:sp>
@@ -12780,7 +13024,7 @@
           <a:noFill/>
         </p:spPr>
         <p:txBody>
-          <a:bodyPr wrap="square" anchor="t" lIns="0" rIns="0" tIns="0" bIns="0">
+          <a:bodyPr wrap="square" lIns="0" tIns="0" rIns="0" bIns="0" anchor="t">
             <a:spAutoFit/>
           </a:bodyPr>
           <a:lstStyle/>
@@ -12942,6 +13186,7 @@
           <a:lstStyle/>
           <a:p>
             <a:pPr algn="ctr"/>
+            <a:endParaRPr/>
           </a:p>
         </p:txBody>
       </p:sp>
@@ -12962,7 +13207,7 @@
           <a:noFill/>
         </p:spPr>
         <p:txBody>
-          <a:bodyPr wrap="square" anchor="ctr" lIns="0" rIns="0" tIns="0" bIns="0">
+          <a:bodyPr wrap="square" lIns="0" tIns="0" rIns="0" bIns="0" anchor="ctr">
             <a:spAutoFit/>
           </a:bodyPr>
           <a:lstStyle/>
@@ -13007,7 +13252,7 @@
           <a:noFill/>
         </p:spPr>
         <p:txBody>
-          <a:bodyPr wrap="square" anchor="t" lIns="0" rIns="0" tIns="0" bIns="0">
+          <a:bodyPr wrap="square" lIns="0" tIns="0" rIns="0" bIns="0" anchor="t">
             <a:spAutoFit/>
           </a:bodyPr>
           <a:lstStyle/>
@@ -13044,7 +13289,7 @@
 </file>
 
 <file path=ppt/slides/slide2.xml><?xml version="1.0" encoding="utf-8"?>
-<p:sld xmlns:a="http://schemas.openxmlformats.org/drawingml/2006/main" xmlns:p="http://schemas.openxmlformats.org/presentationml/2006/main" xmlns:r="http://schemas.openxmlformats.org/officeDocument/2006/relationships">
+<p:sld xmlns:a="http://schemas.openxmlformats.org/drawingml/2006/main" xmlns:r="http://schemas.openxmlformats.org/officeDocument/2006/relationships" xmlns:p="http://schemas.openxmlformats.org/presentationml/2006/main">
   <p:cSld>
     <p:spTree>
       <p:nvGrpSpPr>
@@ -13052,7 +13297,14 @@
         <p:cNvGrpSpPr/>
         <p:nvPr/>
       </p:nvGrpSpPr>
-      <p:grpSpPr/>
+      <p:grpSpPr>
+        <a:xfrm>
+          <a:off x="0" y="0"/>
+          <a:ext cx="0" cy="0"/>
+          <a:chOff x="0" y="0"/>
+          <a:chExt cx="0" cy="0"/>
+        </a:xfrm>
+      </p:grpSpPr>
       <p:sp>
         <p:nvSpPr>
           <p:cNvPr id="2" name="Rectangle 1"/>
@@ -13094,6 +13346,7 @@
           <a:lstStyle/>
           <a:p>
             <a:pPr algn="ctr"/>
+            <a:endParaRPr/>
           </a:p>
         </p:txBody>
       </p:sp>
@@ -13114,7 +13367,7 @@
           <a:noFill/>
         </p:spPr>
         <p:txBody>
-          <a:bodyPr wrap="square" anchor="t" lIns="0" rIns="0" tIns="0" bIns="0">
+          <a:bodyPr wrap="square" lIns="0" tIns="0" rIns="0" bIns="0" anchor="t">
             <a:spAutoFit/>
           </a:bodyPr>
           <a:lstStyle/>
@@ -13159,7 +13412,7 @@
           <a:noFill/>
         </p:spPr>
         <p:txBody>
-          <a:bodyPr wrap="square" anchor="t" lIns="0" rIns="0" tIns="0" bIns="0">
+          <a:bodyPr wrap="square" lIns="0" tIns="0" rIns="0" bIns="0" anchor="t">
             <a:spAutoFit/>
           </a:bodyPr>
           <a:lstStyle/>
@@ -13204,7 +13457,7 @@
           <a:noFill/>
         </p:spPr>
         <p:txBody>
-          <a:bodyPr wrap="square" anchor="t" lIns="0" rIns="0" tIns="0" bIns="0">
+          <a:bodyPr wrap="square" lIns="0" tIns="0" rIns="0" bIns="0" anchor="t">
             <a:spAutoFit/>
           </a:bodyPr>
           <a:lstStyle/>
@@ -13249,7 +13502,7 @@
           <a:noFill/>
         </p:spPr>
         <p:txBody>
-          <a:bodyPr wrap="square" anchor="t" lIns="0" rIns="0" tIns="0" bIns="0">
+          <a:bodyPr wrap="square" lIns="0" tIns="0" rIns="0" bIns="0" anchor="t">
             <a:spAutoFit/>
           </a:bodyPr>
           <a:lstStyle/>
@@ -13305,15 +13558,12 @@
                 <a:spcPts val="200"/>
               </a:spcAft>
             </a:pPr>
-            <a:r>
-              <a:rPr sz="600" b="0">
-                <a:solidFill>
-                  <a:srgbClr val="E6EDF3"/>
-                </a:solidFill>
-                <a:latin typeface="Segoe UI"/>
-              </a:rPr>
-              <a:t/>
-            </a:r>
+            <a:endParaRPr sz="1400" b="0">
+              <a:solidFill>
+                <a:srgbClr val="E6EDF3"/>
+              </a:solidFill>
+              <a:latin typeface="Segoe UI"/>
+            </a:endParaRPr>
           </a:p>
           <a:p>
             <a:pPr algn="l">
@@ -13349,15 +13599,12 @@
                 <a:spcPts val="200"/>
               </a:spcAft>
             </a:pPr>
-            <a:r>
-              <a:rPr sz="600" b="0">
-                <a:solidFill>
-                  <a:srgbClr val="E6EDF3"/>
-                </a:solidFill>
-                <a:latin typeface="Segoe UI"/>
-              </a:rPr>
-              <a:t/>
-            </a:r>
+            <a:endParaRPr sz="1400" b="0">
+              <a:solidFill>
+                <a:srgbClr val="8B949E"/>
+              </a:solidFill>
+              <a:latin typeface="Segoe UI"/>
+            </a:endParaRPr>
           </a:p>
           <a:p>
             <a:pPr algn="l">
@@ -13426,6 +13673,7 @@
           <a:lstStyle/>
           <a:p>
             <a:pPr algn="ctr"/>
+            <a:endParaRPr/>
           </a:p>
         </p:txBody>
       </p:sp>
@@ -13446,7 +13694,7 @@
           <a:noFill/>
         </p:spPr>
         <p:txBody>
-          <a:bodyPr wrap="square" anchor="t" lIns="0" rIns="0" tIns="0" bIns="0">
+          <a:bodyPr wrap="square" lIns="0" tIns="0" rIns="0" bIns="0" anchor="t">
             <a:spAutoFit/>
           </a:bodyPr>
           <a:lstStyle/>
@@ -13579,6 +13827,7 @@
           <a:lstStyle/>
           <a:p>
             <a:pPr algn="ctr"/>
+            <a:endParaRPr/>
           </a:p>
         </p:txBody>
       </p:sp>
@@ -13599,7 +13848,7 @@
           <a:noFill/>
         </p:spPr>
         <p:txBody>
-          <a:bodyPr wrap="square" anchor="t" lIns="0" rIns="0" tIns="0" bIns="0">
+          <a:bodyPr wrap="square" lIns="0" tIns="0" rIns="0" bIns="0" anchor="t">
             <a:spAutoFit/>
           </a:bodyPr>
           <a:lstStyle/>
@@ -13732,6 +13981,7 @@
           <a:lstStyle/>
           <a:p>
             <a:pPr algn="ctr"/>
+            <a:endParaRPr/>
           </a:p>
         </p:txBody>
       </p:sp>
@@ -13752,7 +14002,7 @@
           <a:noFill/>
         </p:spPr>
         <p:txBody>
-          <a:bodyPr wrap="square" anchor="t" lIns="0" rIns="0" tIns="0" bIns="0">
+          <a:bodyPr wrap="square" lIns="0" tIns="0" rIns="0" bIns="0" anchor="t">
             <a:spAutoFit/>
           </a:bodyPr>
           <a:lstStyle/>
@@ -13859,7 +14109,7 @@
           <a:noFill/>
         </p:spPr>
         <p:txBody>
-          <a:bodyPr wrap="square" anchor="t" lIns="0" rIns="0" tIns="0" bIns="0">
+          <a:bodyPr wrap="square" lIns="0" tIns="0" rIns="0" bIns="0" anchor="t">
             <a:spAutoFit/>
           </a:bodyPr>
           <a:lstStyle/>
@@ -13896,7 +14146,7 @@
 </file>
 
 <file path=ppt/slides/slide3.xml><?xml version="1.0" encoding="utf-8"?>
-<p:sld xmlns:a="http://schemas.openxmlformats.org/drawingml/2006/main" xmlns:p="http://schemas.openxmlformats.org/presentationml/2006/main" xmlns:r="http://schemas.openxmlformats.org/officeDocument/2006/relationships">
+<p:sld xmlns:a="http://schemas.openxmlformats.org/drawingml/2006/main" xmlns:r="http://schemas.openxmlformats.org/officeDocument/2006/relationships" xmlns:p="http://schemas.openxmlformats.org/presentationml/2006/main">
   <p:cSld>
     <p:spTree>
       <p:nvGrpSpPr>
@@ -13904,7 +14154,14 @@
         <p:cNvGrpSpPr/>
         <p:nvPr/>
       </p:nvGrpSpPr>
-      <p:grpSpPr/>
+      <p:grpSpPr>
+        <a:xfrm>
+          <a:off x="0" y="0"/>
+          <a:ext cx="0" cy="0"/>
+          <a:chOff x="0" y="0"/>
+          <a:chExt cx="0" cy="0"/>
+        </a:xfrm>
+      </p:grpSpPr>
       <p:sp>
         <p:nvSpPr>
           <p:cNvPr id="2" name="Rectangle 1"/>
@@ -13946,6 +14203,7 @@
           <a:lstStyle/>
           <a:p>
             <a:pPr algn="ctr"/>
+            <a:endParaRPr/>
           </a:p>
         </p:txBody>
       </p:sp>
@@ -13966,7 +14224,7 @@
           <a:noFill/>
         </p:spPr>
         <p:txBody>
-          <a:bodyPr wrap="square" anchor="t" lIns="0" rIns="0" tIns="0" bIns="0">
+          <a:bodyPr wrap="square" lIns="0" tIns="0" rIns="0" bIns="0" anchor="t">
             <a:spAutoFit/>
           </a:bodyPr>
           <a:lstStyle/>
@@ -14011,7 +14269,7 @@
           <a:noFill/>
         </p:spPr>
         <p:txBody>
-          <a:bodyPr wrap="square" anchor="t" lIns="0" rIns="0" tIns="0" bIns="0">
+          <a:bodyPr wrap="square" lIns="0" tIns="0" rIns="0" bIns="0" anchor="t">
             <a:spAutoFit/>
           </a:bodyPr>
           <a:lstStyle/>
@@ -14056,7 +14314,7 @@
           <a:noFill/>
         </p:spPr>
         <p:txBody>
-          <a:bodyPr wrap="square" anchor="t" lIns="0" rIns="0" tIns="0" bIns="0">
+          <a:bodyPr wrap="square" lIns="0" tIns="0" rIns="0" bIns="0" anchor="t">
             <a:spAutoFit/>
           </a:bodyPr>
           <a:lstStyle/>
@@ -14127,6 +14385,7 @@
           <a:lstStyle/>
           <a:p>
             <a:pPr algn="ctr"/>
+            <a:endParaRPr/>
           </a:p>
         </p:txBody>
       </p:sp>
@@ -14171,6 +14430,7 @@
           <a:lstStyle/>
           <a:p>
             <a:pPr algn="ctr"/>
+            <a:endParaRPr/>
           </a:p>
         </p:txBody>
       </p:sp>
@@ -14191,7 +14451,7 @@
           <a:noFill/>
         </p:spPr>
         <p:txBody>
-          <a:bodyPr wrap="square" anchor="ctr" lIns="0" rIns="0" tIns="0" bIns="0">
+          <a:bodyPr wrap="square" lIns="0" tIns="0" rIns="0" bIns="0" anchor="ctr">
             <a:spAutoFit/>
           </a:bodyPr>
           <a:lstStyle/>
@@ -14258,7 +14518,7 @@
           <a:noFill/>
         </p:spPr>
         <p:txBody>
-          <a:bodyPr wrap="square" anchor="ctr" lIns="0" rIns="0" tIns="0" bIns="0">
+          <a:bodyPr wrap="square" lIns="0" tIns="0" rIns="0" bIns="0" anchor="ctr">
             <a:spAutoFit/>
           </a:bodyPr>
           <a:lstStyle/>
@@ -14329,6 +14589,7 @@
           <a:lstStyle/>
           <a:p>
             <a:pPr algn="ctr"/>
+            <a:endParaRPr/>
           </a:p>
         </p:txBody>
       </p:sp>
@@ -14373,6 +14634,7 @@
           <a:lstStyle/>
           <a:p>
             <a:pPr algn="ctr"/>
+            <a:endParaRPr/>
           </a:p>
         </p:txBody>
       </p:sp>
@@ -14393,7 +14655,7 @@
           <a:noFill/>
         </p:spPr>
         <p:txBody>
-          <a:bodyPr wrap="square" anchor="ctr" lIns="0" rIns="0" tIns="0" bIns="0">
+          <a:bodyPr wrap="square" lIns="0" tIns="0" rIns="0" bIns="0" anchor="ctr">
             <a:spAutoFit/>
           </a:bodyPr>
           <a:lstStyle/>
@@ -14460,7 +14722,7 @@
           <a:noFill/>
         </p:spPr>
         <p:txBody>
-          <a:bodyPr wrap="square" anchor="ctr" lIns="0" rIns="0" tIns="0" bIns="0">
+          <a:bodyPr wrap="square" lIns="0" tIns="0" rIns="0" bIns="0" anchor="ctr">
             <a:spAutoFit/>
           </a:bodyPr>
           <a:lstStyle/>
@@ -14531,6 +14793,7 @@
           <a:lstStyle/>
           <a:p>
             <a:pPr algn="ctr"/>
+            <a:endParaRPr/>
           </a:p>
         </p:txBody>
       </p:sp>
@@ -14575,6 +14838,7 @@
           <a:lstStyle/>
           <a:p>
             <a:pPr algn="ctr"/>
+            <a:endParaRPr/>
           </a:p>
         </p:txBody>
       </p:sp>
@@ -14595,7 +14859,7 @@
           <a:noFill/>
         </p:spPr>
         <p:txBody>
-          <a:bodyPr wrap="square" anchor="ctr" lIns="0" rIns="0" tIns="0" bIns="0">
+          <a:bodyPr wrap="square" lIns="0" tIns="0" rIns="0" bIns="0" anchor="ctr">
             <a:spAutoFit/>
           </a:bodyPr>
           <a:lstStyle/>
@@ -14662,7 +14926,7 @@
           <a:noFill/>
         </p:spPr>
         <p:txBody>
-          <a:bodyPr wrap="square" anchor="ctr" lIns="0" rIns="0" tIns="0" bIns="0">
+          <a:bodyPr wrap="square" lIns="0" tIns="0" rIns="0" bIns="0" anchor="ctr">
             <a:spAutoFit/>
           </a:bodyPr>
           <a:lstStyle/>
@@ -14733,6 +14997,7 @@
           <a:lstStyle/>
           <a:p>
             <a:pPr algn="ctr"/>
+            <a:endParaRPr/>
           </a:p>
         </p:txBody>
       </p:sp>
@@ -14777,6 +15042,7 @@
           <a:lstStyle/>
           <a:p>
             <a:pPr algn="ctr"/>
+            <a:endParaRPr/>
           </a:p>
         </p:txBody>
       </p:sp>
@@ -14797,7 +15063,7 @@
           <a:noFill/>
         </p:spPr>
         <p:txBody>
-          <a:bodyPr wrap="square" anchor="ctr" lIns="0" rIns="0" tIns="0" bIns="0">
+          <a:bodyPr wrap="square" lIns="0" tIns="0" rIns="0" bIns="0" anchor="ctr">
             <a:spAutoFit/>
           </a:bodyPr>
           <a:lstStyle/>
@@ -14864,7 +15130,7 @@
           <a:noFill/>
         </p:spPr>
         <p:txBody>
-          <a:bodyPr wrap="square" anchor="ctr" lIns="0" rIns="0" tIns="0" bIns="0">
+          <a:bodyPr wrap="square" lIns="0" tIns="0" rIns="0" bIns="0" anchor="ctr">
             <a:spAutoFit/>
           </a:bodyPr>
           <a:lstStyle/>
@@ -14935,6 +15201,7 @@
           <a:lstStyle/>
           <a:p>
             <a:pPr algn="ctr"/>
+            <a:endParaRPr/>
           </a:p>
         </p:txBody>
       </p:sp>
@@ -14979,6 +15246,7 @@
           <a:lstStyle/>
           <a:p>
             <a:pPr algn="ctr"/>
+            <a:endParaRPr/>
           </a:p>
         </p:txBody>
       </p:sp>
@@ -14999,7 +15267,7 @@
           <a:noFill/>
         </p:spPr>
         <p:txBody>
-          <a:bodyPr wrap="square" anchor="ctr" lIns="0" rIns="0" tIns="0" bIns="0">
+          <a:bodyPr wrap="square" lIns="0" tIns="0" rIns="0" bIns="0" anchor="ctr">
             <a:spAutoFit/>
           </a:bodyPr>
           <a:lstStyle/>
@@ -15092,6 +15360,7 @@
           <a:lstStyle/>
           <a:p>
             <a:pPr algn="ctr"/>
+            <a:endParaRPr/>
           </a:p>
         </p:txBody>
       </p:sp>
@@ -15112,7 +15381,7 @@
           <a:noFill/>
         </p:spPr>
         <p:txBody>
-          <a:bodyPr wrap="square" anchor="t" lIns="0" rIns="0" tIns="0" bIns="0">
+          <a:bodyPr wrap="square" lIns="0" tIns="0" rIns="0" bIns="0" anchor="t">
             <a:spAutoFit/>
           </a:bodyPr>
           <a:lstStyle/>
@@ -15276,6 +15545,7 @@
           <a:lstStyle/>
           <a:p>
             <a:pPr algn="ctr"/>
+            <a:endParaRPr/>
           </a:p>
         </p:txBody>
       </p:sp>
@@ -15296,7 +15566,7 @@
           <a:noFill/>
         </p:spPr>
         <p:txBody>
-          <a:bodyPr wrap="square" anchor="t" lIns="0" rIns="0" tIns="0" bIns="0">
+          <a:bodyPr wrap="square" lIns="0" tIns="0" rIns="0" bIns="0" anchor="t">
             <a:spAutoFit/>
           </a:bodyPr>
           <a:lstStyle/>
@@ -15426,7 +15696,7 @@
 </file>
 
 <file path=ppt/slides/slide4.xml><?xml version="1.0" encoding="utf-8"?>
-<p:sld xmlns:a="http://schemas.openxmlformats.org/drawingml/2006/main" xmlns:p="http://schemas.openxmlformats.org/presentationml/2006/main" xmlns:r="http://schemas.openxmlformats.org/officeDocument/2006/relationships">
+<p:sld xmlns:a="http://schemas.openxmlformats.org/drawingml/2006/main" xmlns:r="http://schemas.openxmlformats.org/officeDocument/2006/relationships" xmlns:p="http://schemas.openxmlformats.org/presentationml/2006/main">
   <p:cSld>
     <p:spTree>
       <p:nvGrpSpPr>
@@ -15434,7 +15704,14 @@
         <p:cNvGrpSpPr/>
         <p:nvPr/>
       </p:nvGrpSpPr>
-      <p:grpSpPr/>
+      <p:grpSpPr>
+        <a:xfrm>
+          <a:off x="0" y="0"/>
+          <a:ext cx="0" cy="0"/>
+          <a:chOff x="0" y="0"/>
+          <a:chExt cx="0" cy="0"/>
+        </a:xfrm>
+      </p:grpSpPr>
       <p:sp>
         <p:nvSpPr>
           <p:cNvPr id="2" name="Rectangle 1"/>
@@ -15476,6 +15753,7 @@
           <a:lstStyle/>
           <a:p>
             <a:pPr algn="ctr"/>
+            <a:endParaRPr/>
           </a:p>
         </p:txBody>
       </p:sp>
@@ -15496,7 +15774,7 @@
           <a:noFill/>
         </p:spPr>
         <p:txBody>
-          <a:bodyPr wrap="square" anchor="t" lIns="0" rIns="0" tIns="0" bIns="0">
+          <a:bodyPr wrap="square" lIns="0" tIns="0" rIns="0" bIns="0" anchor="t">
             <a:spAutoFit/>
           </a:bodyPr>
           <a:lstStyle/>
@@ -15541,7 +15819,7 @@
           <a:noFill/>
         </p:spPr>
         <p:txBody>
-          <a:bodyPr wrap="square" anchor="t" lIns="0" rIns="0" tIns="0" bIns="0">
+          <a:bodyPr wrap="square" lIns="0" tIns="0" rIns="0" bIns="0" anchor="t">
             <a:spAutoFit/>
           </a:bodyPr>
           <a:lstStyle/>
@@ -15586,7 +15864,7 @@
           <a:noFill/>
         </p:spPr>
         <p:txBody>
-          <a:bodyPr wrap="square" anchor="t" lIns="0" rIns="0" tIns="0" bIns="0">
+          <a:bodyPr wrap="square" lIns="0" tIns="0" rIns="0" bIns="0" anchor="t">
             <a:spAutoFit/>
           </a:bodyPr>
           <a:lstStyle/>
@@ -15657,6 +15935,7 @@
           <a:lstStyle/>
           <a:p>
             <a:pPr algn="ctr"/>
+            <a:endParaRPr/>
           </a:p>
         </p:txBody>
       </p:sp>
@@ -15677,7 +15956,7 @@
           <a:noFill/>
         </p:spPr>
         <p:txBody>
-          <a:bodyPr wrap="square" anchor="t" lIns="0" rIns="0" tIns="0" bIns="0">
+          <a:bodyPr wrap="square" lIns="0" tIns="0" rIns="0" bIns="0" anchor="t">
             <a:spAutoFit/>
           </a:bodyPr>
           <a:lstStyle/>
@@ -15722,7 +16001,7 @@
           <a:noFill/>
         </p:spPr>
         <p:txBody>
-          <a:bodyPr wrap="square" anchor="t" lIns="0" rIns="0" tIns="0" bIns="0">
+          <a:bodyPr wrap="square" lIns="0" tIns="0" rIns="0" bIns="0" anchor="t">
             <a:spAutoFit/>
           </a:bodyPr>
           <a:lstStyle/>
@@ -15767,7 +16046,7 @@
           <a:noFill/>
         </p:spPr>
         <p:txBody>
-          <a:bodyPr wrap="square" anchor="t" lIns="0" rIns="0" tIns="0" bIns="0">
+          <a:bodyPr wrap="square" lIns="0" tIns="0" rIns="0" bIns="0" anchor="t">
             <a:spAutoFit/>
           </a:bodyPr>
           <a:lstStyle/>
@@ -15839,6 +16118,7 @@
           <a:lstStyle/>
           <a:p>
             <a:pPr algn="ctr"/>
+            <a:endParaRPr/>
           </a:p>
         </p:txBody>
       </p:sp>
@@ -15859,7 +16139,7 @@
           <a:noFill/>
         </p:spPr>
         <p:txBody>
-          <a:bodyPr wrap="square" anchor="t" lIns="0" rIns="0" tIns="0" bIns="0">
+          <a:bodyPr wrap="square" lIns="0" tIns="0" rIns="0" bIns="0" anchor="t">
             <a:spAutoFit/>
           </a:bodyPr>
           <a:lstStyle/>
@@ -15904,7 +16184,7 @@
           <a:noFill/>
         </p:spPr>
         <p:txBody>
-          <a:bodyPr wrap="square" anchor="t" lIns="0" rIns="0" tIns="0" bIns="0">
+          <a:bodyPr wrap="square" lIns="0" tIns="0" rIns="0" bIns="0" anchor="t">
             <a:spAutoFit/>
           </a:bodyPr>
           <a:lstStyle/>
@@ -15949,7 +16229,7 @@
           <a:noFill/>
         </p:spPr>
         <p:txBody>
-          <a:bodyPr wrap="square" anchor="t" lIns="0" rIns="0" tIns="0" bIns="0">
+          <a:bodyPr wrap="square" lIns="0" tIns="0" rIns="0" bIns="0" anchor="t">
             <a:spAutoFit/>
           </a:bodyPr>
           <a:lstStyle/>
@@ -16021,6 +16301,7 @@
           <a:lstStyle/>
           <a:p>
             <a:pPr algn="ctr"/>
+            <a:endParaRPr/>
           </a:p>
         </p:txBody>
       </p:sp>
@@ -16041,7 +16322,7 @@
           <a:noFill/>
         </p:spPr>
         <p:txBody>
-          <a:bodyPr wrap="square" anchor="t" lIns="0" rIns="0" tIns="0" bIns="0">
+          <a:bodyPr wrap="square" lIns="0" tIns="0" rIns="0" bIns="0" anchor="t">
             <a:spAutoFit/>
           </a:bodyPr>
           <a:lstStyle/>
@@ -16086,7 +16367,7 @@
           <a:noFill/>
         </p:spPr>
         <p:txBody>
-          <a:bodyPr wrap="square" anchor="t" lIns="0" rIns="0" tIns="0" bIns="0">
+          <a:bodyPr wrap="square" lIns="0" tIns="0" rIns="0" bIns="0" anchor="t">
             <a:spAutoFit/>
           </a:bodyPr>
           <a:lstStyle/>
@@ -16131,7 +16412,7 @@
           <a:noFill/>
         </p:spPr>
         <p:txBody>
-          <a:bodyPr wrap="square" anchor="t" lIns="0" rIns="0" tIns="0" bIns="0">
+          <a:bodyPr wrap="square" lIns="0" tIns="0" rIns="0" bIns="0" anchor="t">
             <a:spAutoFit/>
           </a:bodyPr>
           <a:lstStyle/>
@@ -16202,6 +16483,7 @@
           <a:lstStyle/>
           <a:p>
             <a:pPr algn="ctr"/>
+            <a:endParaRPr/>
           </a:p>
         </p:txBody>
       </p:sp>
@@ -16222,7 +16504,7 @@
           <a:noFill/>
         </p:spPr>
         <p:txBody>
-          <a:bodyPr wrap="square" anchor="t" lIns="0" rIns="0" tIns="0" bIns="0">
+          <a:bodyPr wrap="square" lIns="0" tIns="0" rIns="0" bIns="0" anchor="t">
             <a:spAutoFit/>
           </a:bodyPr>
           <a:lstStyle/>
@@ -16267,7 +16549,7 @@
           <a:noFill/>
         </p:spPr>
         <p:txBody>
-          <a:bodyPr wrap="square" anchor="t" lIns="0" rIns="0" tIns="0" bIns="0">
+          <a:bodyPr wrap="square" lIns="0" tIns="0" rIns="0" bIns="0" anchor="t">
             <a:spAutoFit/>
           </a:bodyPr>
           <a:lstStyle/>
@@ -16312,7 +16594,7 @@
           <a:noFill/>
         </p:spPr>
         <p:txBody>
-          <a:bodyPr wrap="square" anchor="t" lIns="0" rIns="0" tIns="0" bIns="0">
+          <a:bodyPr wrap="square" lIns="0" tIns="0" rIns="0" bIns="0" anchor="t">
             <a:spAutoFit/>
           </a:bodyPr>
           <a:lstStyle/>
@@ -16358,7 +16640,7 @@
           <a:noFill/>
         </p:spPr>
         <p:txBody>
-          <a:bodyPr wrap="square" anchor="t" lIns="0" rIns="0" tIns="0" bIns="0">
+          <a:bodyPr wrap="square" lIns="0" tIns="0" rIns="0" bIns="0" anchor="t">
             <a:spAutoFit/>
           </a:bodyPr>
           <a:lstStyle/>
@@ -16465,6 +16747,7 @@
           <a:lstStyle/>
           <a:p>
             <a:pPr algn="ctr"/>
+            <a:endParaRPr/>
           </a:p>
         </p:txBody>
       </p:sp>
@@ -16485,7 +16768,7 @@
           <a:noFill/>
         </p:spPr>
         <p:txBody>
-          <a:bodyPr wrap="square" anchor="t" lIns="0" rIns="0" tIns="0" bIns="0">
+          <a:bodyPr wrap="square" lIns="0" tIns="0" rIns="0" bIns="0" anchor="t">
             <a:spAutoFit/>
           </a:bodyPr>
           <a:lstStyle/>
@@ -16566,7 +16849,7 @@
 </file>
 
 <file path=ppt/slides/slide5.xml><?xml version="1.0" encoding="utf-8"?>
-<p:sld xmlns:a="http://schemas.openxmlformats.org/drawingml/2006/main" xmlns:p="http://schemas.openxmlformats.org/presentationml/2006/main" xmlns:r="http://schemas.openxmlformats.org/officeDocument/2006/relationships">
+<p:sld xmlns:a="http://schemas.openxmlformats.org/drawingml/2006/main" xmlns:r="http://schemas.openxmlformats.org/officeDocument/2006/relationships" xmlns:p="http://schemas.openxmlformats.org/presentationml/2006/main">
   <p:cSld>
     <p:spTree>
       <p:nvGrpSpPr>
@@ -16574,7 +16857,14 @@
         <p:cNvGrpSpPr/>
         <p:nvPr/>
       </p:nvGrpSpPr>
-      <p:grpSpPr/>
+      <p:grpSpPr>
+        <a:xfrm>
+          <a:off x="0" y="0"/>
+          <a:ext cx="0" cy="0"/>
+          <a:chOff x="0" y="0"/>
+          <a:chExt cx="0" cy="0"/>
+        </a:xfrm>
+      </p:grpSpPr>
       <p:sp>
         <p:nvSpPr>
           <p:cNvPr id="2" name="Rectangle 1"/>
@@ -16616,6 +16906,7 @@
           <a:lstStyle/>
           <a:p>
             <a:pPr algn="ctr"/>
+            <a:endParaRPr/>
           </a:p>
         </p:txBody>
       </p:sp>
@@ -16636,7 +16927,7 @@
           <a:noFill/>
         </p:spPr>
         <p:txBody>
-          <a:bodyPr wrap="square" anchor="t" lIns="0" rIns="0" tIns="0" bIns="0">
+          <a:bodyPr wrap="square" lIns="0" tIns="0" rIns="0" bIns="0" anchor="t">
             <a:spAutoFit/>
           </a:bodyPr>
           <a:lstStyle/>
@@ -16681,7 +16972,7 @@
           <a:noFill/>
         </p:spPr>
         <p:txBody>
-          <a:bodyPr wrap="square" anchor="t" lIns="0" rIns="0" tIns="0" bIns="0">
+          <a:bodyPr wrap="square" lIns="0" tIns="0" rIns="0" bIns="0" anchor="t">
             <a:spAutoFit/>
           </a:bodyPr>
           <a:lstStyle/>
@@ -16726,7 +17017,7 @@
           <a:noFill/>
         </p:spPr>
         <p:txBody>
-          <a:bodyPr wrap="square" anchor="t" lIns="0" rIns="0" tIns="0" bIns="0">
+          <a:bodyPr wrap="square" lIns="0" tIns="0" rIns="0" bIns="0" anchor="t">
             <a:spAutoFit/>
           </a:bodyPr>
           <a:lstStyle/>
@@ -16771,7 +17062,7 @@
           <a:noFill/>
         </p:spPr>
         <p:txBody>
-          <a:bodyPr wrap="square" anchor="t" lIns="0" rIns="0" tIns="0" bIns="0">
+          <a:bodyPr wrap="square" lIns="0" tIns="0" rIns="0" bIns="0" anchor="t">
             <a:spAutoFit/>
           </a:bodyPr>
           <a:lstStyle/>
@@ -16869,6 +17160,7 @@
           <a:lstStyle/>
           <a:p>
             <a:pPr algn="ctr"/>
+            <a:endParaRPr/>
           </a:p>
         </p:txBody>
       </p:sp>
@@ -16913,6 +17205,7 @@
           <a:lstStyle/>
           <a:p>
             <a:pPr algn="ctr"/>
+            <a:endParaRPr/>
           </a:p>
         </p:txBody>
       </p:sp>
@@ -16933,7 +17226,7 @@
           <a:noFill/>
         </p:spPr>
         <p:txBody>
-          <a:bodyPr wrap="square" anchor="ctr" lIns="0" rIns="0" tIns="0" bIns="0">
+          <a:bodyPr wrap="square" lIns="0" tIns="0" rIns="0" bIns="0" anchor="ctr">
             <a:spAutoFit/>
           </a:bodyPr>
           <a:lstStyle/>
@@ -17000,7 +17293,7 @@
           <a:noFill/>
         </p:spPr>
         <p:txBody>
-          <a:bodyPr wrap="square" anchor="ctr" lIns="0" rIns="0" tIns="0" bIns="0">
+          <a:bodyPr wrap="square" lIns="0" tIns="0" rIns="0" bIns="0" anchor="ctr">
             <a:spAutoFit/>
           </a:bodyPr>
           <a:lstStyle/>
@@ -17071,6 +17364,7 @@
           <a:lstStyle/>
           <a:p>
             <a:pPr algn="ctr"/>
+            <a:endParaRPr/>
           </a:p>
         </p:txBody>
       </p:sp>
@@ -17115,6 +17409,7 @@
           <a:lstStyle/>
           <a:p>
             <a:pPr algn="ctr"/>
+            <a:endParaRPr/>
           </a:p>
         </p:txBody>
       </p:sp>
@@ -17135,7 +17430,7 @@
           <a:noFill/>
         </p:spPr>
         <p:txBody>
-          <a:bodyPr wrap="square" anchor="ctr" lIns="0" rIns="0" tIns="0" bIns="0">
+          <a:bodyPr wrap="square" lIns="0" tIns="0" rIns="0" bIns="0" anchor="ctr">
             <a:spAutoFit/>
           </a:bodyPr>
           <a:lstStyle/>
@@ -17202,7 +17497,7 @@
           <a:noFill/>
         </p:spPr>
         <p:txBody>
-          <a:bodyPr wrap="square" anchor="ctr" lIns="0" rIns="0" tIns="0" bIns="0">
+          <a:bodyPr wrap="square" lIns="0" tIns="0" rIns="0" bIns="0" anchor="ctr">
             <a:spAutoFit/>
           </a:bodyPr>
           <a:lstStyle/>
@@ -17273,6 +17568,7 @@
           <a:lstStyle/>
           <a:p>
             <a:pPr algn="ctr"/>
+            <a:endParaRPr/>
           </a:p>
         </p:txBody>
       </p:sp>
@@ -17317,6 +17613,7 @@
           <a:lstStyle/>
           <a:p>
             <a:pPr algn="ctr"/>
+            <a:endParaRPr/>
           </a:p>
         </p:txBody>
       </p:sp>
@@ -17337,7 +17634,7 @@
           <a:noFill/>
         </p:spPr>
         <p:txBody>
-          <a:bodyPr wrap="square" anchor="ctr" lIns="0" rIns="0" tIns="0" bIns="0">
+          <a:bodyPr wrap="square" lIns="0" tIns="0" rIns="0" bIns="0" anchor="ctr">
             <a:spAutoFit/>
           </a:bodyPr>
           <a:lstStyle/>
@@ -17404,7 +17701,7 @@
           <a:noFill/>
         </p:spPr>
         <p:txBody>
-          <a:bodyPr wrap="square" anchor="ctr" lIns="0" rIns="0" tIns="0" bIns="0">
+          <a:bodyPr wrap="square" lIns="0" tIns="0" rIns="0" bIns="0" anchor="ctr">
             <a:spAutoFit/>
           </a:bodyPr>
           <a:lstStyle/>
@@ -17475,6 +17772,7 @@
           <a:lstStyle/>
           <a:p>
             <a:pPr algn="ctr"/>
+            <a:endParaRPr/>
           </a:p>
         </p:txBody>
       </p:sp>
@@ -17519,6 +17817,7 @@
           <a:lstStyle/>
           <a:p>
             <a:pPr algn="ctr"/>
+            <a:endParaRPr/>
           </a:p>
         </p:txBody>
       </p:sp>
@@ -17539,7 +17838,7 @@
           <a:noFill/>
         </p:spPr>
         <p:txBody>
-          <a:bodyPr wrap="square" anchor="ctr" lIns="0" rIns="0" tIns="0" bIns="0">
+          <a:bodyPr wrap="square" lIns="0" tIns="0" rIns="0" bIns="0" anchor="ctr">
             <a:spAutoFit/>
           </a:bodyPr>
           <a:lstStyle/>
@@ -17632,6 +17931,7 @@
           <a:lstStyle/>
           <a:p>
             <a:pPr algn="ctr"/>
+            <a:endParaRPr/>
           </a:p>
         </p:txBody>
       </p:sp>
@@ -17652,7 +17952,7 @@
           <a:noFill/>
         </p:spPr>
         <p:txBody>
-          <a:bodyPr wrap="square" anchor="t" lIns="0" rIns="0" tIns="0" bIns="0">
+          <a:bodyPr wrap="square" lIns="0" tIns="0" rIns="0" bIns="0" anchor="t">
             <a:spAutoFit/>
           </a:bodyPr>
           <a:lstStyle/>
@@ -17816,6 +18116,7 @@
           <a:lstStyle/>
           <a:p>
             <a:pPr algn="ctr"/>
+            <a:endParaRPr/>
           </a:p>
         </p:txBody>
       </p:sp>
@@ -17836,7 +18137,7 @@
           <a:noFill/>
         </p:spPr>
         <p:txBody>
-          <a:bodyPr wrap="square" anchor="t" lIns="0" rIns="0" tIns="0" bIns="0">
+          <a:bodyPr wrap="square" lIns="0" tIns="0" rIns="0" bIns="0" anchor="t">
             <a:spAutoFit/>
           </a:bodyPr>
           <a:lstStyle/>
@@ -17966,7 +18267,7 @@
 </file>
 
 <file path=ppt/slides/slide6.xml><?xml version="1.0" encoding="utf-8"?>
-<p:sld xmlns:a="http://schemas.openxmlformats.org/drawingml/2006/main" xmlns:p="http://schemas.openxmlformats.org/presentationml/2006/main" xmlns:r="http://schemas.openxmlformats.org/officeDocument/2006/relationships">
+<p:sld xmlns:a="http://schemas.openxmlformats.org/drawingml/2006/main" xmlns:r="http://schemas.openxmlformats.org/officeDocument/2006/relationships" xmlns:p="http://schemas.openxmlformats.org/presentationml/2006/main">
   <p:cSld>
     <p:spTree>
       <p:nvGrpSpPr>
@@ -17974,7 +18275,14 @@
         <p:cNvGrpSpPr/>
         <p:nvPr/>
       </p:nvGrpSpPr>
-      <p:grpSpPr/>
+      <p:grpSpPr>
+        <a:xfrm>
+          <a:off x="0" y="0"/>
+          <a:ext cx="0" cy="0"/>
+          <a:chOff x="0" y="0"/>
+          <a:chExt cx="0" cy="0"/>
+        </a:xfrm>
+      </p:grpSpPr>
       <p:sp>
         <p:nvSpPr>
           <p:cNvPr id="2" name="Rectangle 1"/>
@@ -18016,6 +18324,7 @@
           <a:lstStyle/>
           <a:p>
             <a:pPr algn="ctr"/>
+            <a:endParaRPr/>
           </a:p>
         </p:txBody>
       </p:sp>
@@ -18036,7 +18345,7 @@
           <a:noFill/>
         </p:spPr>
         <p:txBody>
-          <a:bodyPr wrap="square" anchor="t" lIns="0" rIns="0" tIns="0" bIns="0">
+          <a:bodyPr wrap="square" lIns="0" tIns="0" rIns="0" bIns="0" anchor="t">
             <a:spAutoFit/>
           </a:bodyPr>
           <a:lstStyle/>
@@ -18081,7 +18390,7 @@
           <a:noFill/>
         </p:spPr>
         <p:txBody>
-          <a:bodyPr wrap="square" anchor="t" lIns="0" rIns="0" tIns="0" bIns="0">
+          <a:bodyPr wrap="square" lIns="0" tIns="0" rIns="0" bIns="0" anchor="t">
             <a:spAutoFit/>
           </a:bodyPr>
           <a:lstStyle/>
@@ -18126,7 +18435,7 @@
           <a:noFill/>
         </p:spPr>
         <p:txBody>
-          <a:bodyPr wrap="square" anchor="t" lIns="0" rIns="0" tIns="0" bIns="0">
+          <a:bodyPr wrap="square" lIns="0" tIns="0" rIns="0" bIns="0" anchor="t">
             <a:spAutoFit/>
           </a:bodyPr>
           <a:lstStyle/>
@@ -18197,6 +18506,7 @@
           <a:lstStyle/>
           <a:p>
             <a:pPr algn="ctr"/>
+            <a:endParaRPr/>
           </a:p>
         </p:txBody>
       </p:sp>
@@ -18241,6 +18551,7 @@
           <a:lstStyle/>
           <a:p>
             <a:pPr algn="ctr"/>
+            <a:endParaRPr/>
           </a:p>
         </p:txBody>
       </p:sp>
@@ -18261,7 +18572,7 @@
           <a:noFill/>
         </p:spPr>
         <p:txBody>
-          <a:bodyPr wrap="square" anchor="ctr" lIns="0" rIns="0" tIns="0" bIns="0">
+          <a:bodyPr wrap="square" lIns="0" tIns="0" rIns="0" bIns="0" anchor="ctr">
             <a:spAutoFit/>
           </a:bodyPr>
           <a:lstStyle/>
@@ -18306,7 +18617,7 @@
           <a:noFill/>
         </p:spPr>
         <p:txBody>
-          <a:bodyPr wrap="square" anchor="ctr" lIns="0" rIns="0" tIns="0" bIns="0">
+          <a:bodyPr wrap="square" lIns="0" tIns="0" rIns="0" bIns="0" anchor="ctr">
             <a:spAutoFit/>
           </a:bodyPr>
           <a:lstStyle/>
@@ -18377,6 +18688,7 @@
           <a:lstStyle/>
           <a:p>
             <a:pPr algn="ctr"/>
+            <a:endParaRPr/>
           </a:p>
         </p:txBody>
       </p:sp>
@@ -18421,6 +18733,7 @@
           <a:lstStyle/>
           <a:p>
             <a:pPr algn="ctr"/>
+            <a:endParaRPr/>
           </a:p>
         </p:txBody>
       </p:sp>
@@ -18441,7 +18754,7 @@
           <a:noFill/>
         </p:spPr>
         <p:txBody>
-          <a:bodyPr wrap="square" anchor="ctr" lIns="0" rIns="0" tIns="0" bIns="0">
+          <a:bodyPr wrap="square" lIns="0" tIns="0" rIns="0" bIns="0" anchor="ctr">
             <a:spAutoFit/>
           </a:bodyPr>
           <a:lstStyle/>
@@ -18508,7 +18821,7 @@
           <a:noFill/>
         </p:spPr>
         <p:txBody>
-          <a:bodyPr wrap="square" anchor="ctr" lIns="0" rIns="0" tIns="0" bIns="0">
+          <a:bodyPr wrap="square" lIns="0" tIns="0" rIns="0" bIns="0" anchor="ctr">
             <a:spAutoFit/>
           </a:bodyPr>
           <a:lstStyle/>
@@ -18579,6 +18892,7 @@
           <a:lstStyle/>
           <a:p>
             <a:pPr algn="ctr"/>
+            <a:endParaRPr/>
           </a:p>
         </p:txBody>
       </p:sp>
@@ -18623,6 +18937,7 @@
           <a:lstStyle/>
           <a:p>
             <a:pPr algn="ctr"/>
+            <a:endParaRPr/>
           </a:p>
         </p:txBody>
       </p:sp>
@@ -18643,7 +18958,7 @@
           <a:noFill/>
         </p:spPr>
         <p:txBody>
-          <a:bodyPr wrap="square" anchor="ctr" lIns="0" rIns="0" tIns="0" bIns="0">
+          <a:bodyPr wrap="square" lIns="0" tIns="0" rIns="0" bIns="0" anchor="ctr">
             <a:spAutoFit/>
           </a:bodyPr>
           <a:lstStyle/>
@@ -18710,7 +19025,7 @@
           <a:noFill/>
         </p:spPr>
         <p:txBody>
-          <a:bodyPr wrap="square" anchor="ctr" lIns="0" rIns="0" tIns="0" bIns="0">
+          <a:bodyPr wrap="square" lIns="0" tIns="0" rIns="0" bIns="0" anchor="ctr">
             <a:spAutoFit/>
           </a:bodyPr>
           <a:lstStyle/>
@@ -18781,6 +19096,7 @@
           <a:lstStyle/>
           <a:p>
             <a:pPr algn="ctr"/>
+            <a:endParaRPr/>
           </a:p>
         </p:txBody>
       </p:sp>
@@ -18825,6 +19141,7 @@
           <a:lstStyle/>
           <a:p>
             <a:pPr algn="ctr"/>
+            <a:endParaRPr/>
           </a:p>
         </p:txBody>
       </p:sp>
@@ -18845,7 +19162,7 @@
           <a:noFill/>
         </p:spPr>
         <p:txBody>
-          <a:bodyPr wrap="square" anchor="ctr" lIns="0" rIns="0" tIns="0" bIns="0">
+          <a:bodyPr wrap="square" lIns="0" tIns="0" rIns="0" bIns="0" anchor="ctr">
             <a:spAutoFit/>
           </a:bodyPr>
           <a:lstStyle/>
@@ -18912,7 +19229,7 @@
           <a:noFill/>
         </p:spPr>
         <p:txBody>
-          <a:bodyPr wrap="square" anchor="ctr" lIns="0" rIns="0" tIns="0" bIns="0">
+          <a:bodyPr wrap="square" lIns="0" tIns="0" rIns="0" bIns="0" anchor="ctr">
             <a:spAutoFit/>
           </a:bodyPr>
           <a:lstStyle/>
@@ -18983,6 +19300,7 @@
           <a:lstStyle/>
           <a:p>
             <a:pPr algn="ctr"/>
+            <a:endParaRPr/>
           </a:p>
         </p:txBody>
       </p:sp>
@@ -19027,6 +19345,7 @@
           <a:lstStyle/>
           <a:p>
             <a:pPr algn="ctr"/>
+            <a:endParaRPr/>
           </a:p>
         </p:txBody>
       </p:sp>
@@ -19047,7 +19366,7 @@
           <a:noFill/>
         </p:spPr>
         <p:txBody>
-          <a:bodyPr wrap="square" anchor="ctr" lIns="0" rIns="0" tIns="0" bIns="0">
+          <a:bodyPr wrap="square" lIns="0" tIns="0" rIns="0" bIns="0" anchor="ctr">
             <a:spAutoFit/>
           </a:bodyPr>
           <a:lstStyle/>
@@ -19140,6 +19459,7 @@
           <a:lstStyle/>
           <a:p>
             <a:pPr algn="ctr"/>
+            <a:endParaRPr/>
           </a:p>
         </p:txBody>
       </p:sp>
@@ -19160,7 +19480,7 @@
           <a:noFill/>
         </p:spPr>
         <p:txBody>
-          <a:bodyPr wrap="square" anchor="ctr" lIns="0" rIns="0" tIns="0" bIns="0">
+          <a:bodyPr wrap="square" lIns="0" tIns="0" rIns="0" bIns="0" anchor="ctr">
             <a:spAutoFit/>
           </a:bodyPr>
           <a:lstStyle/>
@@ -19231,6 +19551,7 @@
           <a:lstStyle/>
           <a:p>
             <a:pPr algn="ctr"/>
+            <a:endParaRPr/>
           </a:p>
         </p:txBody>
       </p:sp>
@@ -19251,7 +19572,7 @@
           <a:noFill/>
         </p:spPr>
         <p:txBody>
-          <a:bodyPr wrap="square" anchor="ctr" lIns="0" rIns="0" tIns="0" bIns="0">
+          <a:bodyPr wrap="square" lIns="0" tIns="0" rIns="0" bIns="0" anchor="ctr">
             <a:spAutoFit/>
           </a:bodyPr>
           <a:lstStyle/>
@@ -19322,6 +19643,7 @@
           <a:lstStyle/>
           <a:p>
             <a:pPr algn="ctr"/>
+            <a:endParaRPr/>
           </a:p>
         </p:txBody>
       </p:sp>
@@ -19342,7 +19664,7 @@
           <a:noFill/>
         </p:spPr>
         <p:txBody>
-          <a:bodyPr wrap="square" anchor="ctr" lIns="0" rIns="0" tIns="0" bIns="0">
+          <a:bodyPr wrap="square" lIns="0" tIns="0" rIns="0" bIns="0" anchor="ctr">
             <a:spAutoFit/>
           </a:bodyPr>
           <a:lstStyle/>
@@ -19413,6 +19735,7 @@
           <a:lstStyle/>
           <a:p>
             <a:pPr algn="ctr"/>
+            <a:endParaRPr/>
           </a:p>
         </p:txBody>
       </p:sp>
@@ -19433,7 +19756,7 @@
           <a:noFill/>
         </p:spPr>
         <p:txBody>
-          <a:bodyPr wrap="square" anchor="ctr" lIns="0" rIns="0" tIns="0" bIns="0">
+          <a:bodyPr wrap="square" lIns="0" tIns="0" rIns="0" bIns="0" anchor="ctr">
             <a:spAutoFit/>
           </a:bodyPr>
           <a:lstStyle/>
@@ -19504,6 +19827,7 @@
           <a:lstStyle/>
           <a:p>
             <a:pPr algn="ctr"/>
+            <a:endParaRPr/>
           </a:p>
         </p:txBody>
       </p:sp>
@@ -19524,7 +19848,7 @@
           <a:noFill/>
         </p:spPr>
         <p:txBody>
-          <a:bodyPr wrap="square" anchor="t" lIns="0" rIns="0" tIns="0" bIns="0">
+          <a:bodyPr wrap="square" lIns="0" tIns="0" rIns="0" bIns="0" anchor="t">
             <a:spAutoFit/>
           </a:bodyPr>
           <a:lstStyle/>
@@ -19716,7 +20040,7 @@
 </file>
 
 <file path=ppt/slides/slide7.xml><?xml version="1.0" encoding="utf-8"?>
-<p:sld xmlns:a="http://schemas.openxmlformats.org/drawingml/2006/main" xmlns:p="http://schemas.openxmlformats.org/presentationml/2006/main" xmlns:r="http://schemas.openxmlformats.org/officeDocument/2006/relationships">
+<p:sld xmlns:a="http://schemas.openxmlformats.org/drawingml/2006/main" xmlns:r="http://schemas.openxmlformats.org/officeDocument/2006/relationships" xmlns:p="http://schemas.openxmlformats.org/presentationml/2006/main">
   <p:cSld>
     <p:spTree>
       <p:nvGrpSpPr>
@@ -19724,7 +20048,14 @@
         <p:cNvGrpSpPr/>
         <p:nvPr/>
       </p:nvGrpSpPr>
-      <p:grpSpPr/>
+      <p:grpSpPr>
+        <a:xfrm>
+          <a:off x="0" y="0"/>
+          <a:ext cx="0" cy="0"/>
+          <a:chOff x="0" y="0"/>
+          <a:chExt cx="0" cy="0"/>
+        </a:xfrm>
+      </p:grpSpPr>
       <p:sp>
         <p:nvSpPr>
           <p:cNvPr id="2" name="Rectangle 1"/>
@@ -19766,6 +20097,7 @@
           <a:lstStyle/>
           <a:p>
             <a:pPr algn="ctr"/>
+            <a:endParaRPr/>
           </a:p>
         </p:txBody>
       </p:sp>
@@ -19786,7 +20118,7 @@
           <a:noFill/>
         </p:spPr>
         <p:txBody>
-          <a:bodyPr wrap="square" anchor="t" lIns="0" rIns="0" tIns="0" bIns="0">
+          <a:bodyPr wrap="square" lIns="0" tIns="0" rIns="0" bIns="0" anchor="t">
             <a:spAutoFit/>
           </a:bodyPr>
           <a:lstStyle/>
@@ -19831,7 +20163,7 @@
           <a:noFill/>
         </p:spPr>
         <p:txBody>
-          <a:bodyPr wrap="square" anchor="t" lIns="0" rIns="0" tIns="0" bIns="0">
+          <a:bodyPr wrap="square" lIns="0" tIns="0" rIns="0" bIns="0" anchor="t">
             <a:spAutoFit/>
           </a:bodyPr>
           <a:lstStyle/>
@@ -19876,7 +20208,7 @@
           <a:noFill/>
         </p:spPr>
         <p:txBody>
-          <a:bodyPr wrap="square" anchor="t" lIns="0" rIns="0" tIns="0" bIns="0">
+          <a:bodyPr wrap="square" lIns="0" tIns="0" rIns="0" bIns="0" anchor="t">
             <a:spAutoFit/>
           </a:bodyPr>
           <a:lstStyle/>
@@ -19947,6 +20279,7 @@
           <a:lstStyle/>
           <a:p>
             <a:pPr algn="ctr"/>
+            <a:endParaRPr/>
           </a:p>
         </p:txBody>
       </p:sp>
@@ -19967,7 +20300,7 @@
           <a:noFill/>
         </p:spPr>
         <p:txBody>
-          <a:bodyPr wrap="square" anchor="t" lIns="0" rIns="0" tIns="0" bIns="0">
+          <a:bodyPr wrap="square" lIns="0" tIns="0" rIns="0" bIns="0" anchor="t">
             <a:spAutoFit/>
           </a:bodyPr>
           <a:lstStyle/>
@@ -20003,7 +20336,7 @@
         </p:nvSpPr>
         <p:spPr>
           <a:xfrm>
-            <a:off x="914400" y="2715768"/>
+            <a:off x="918972" y="2583180"/>
             <a:ext cx="10424159" cy="1325880"/>
           </a:xfrm>
           <a:prstGeom prst="rect">
@@ -20012,7 +20345,7 @@
           <a:noFill/>
         </p:spPr>
         <p:txBody>
-          <a:bodyPr wrap="square" anchor="t" lIns="0" rIns="0" tIns="0" bIns="0">
+          <a:bodyPr wrap="square" lIns="0" tIns="0" rIns="0" bIns="0" anchor="t">
             <a:spAutoFit/>
           </a:bodyPr>
           <a:lstStyle/>
@@ -20029,13 +20362,103 @@
               </a:spcAft>
             </a:pPr>
             <a:r>
-              <a:rPr sz="1100" b="0">
+              <a:rPr sz="1100" b="0" dirty="0">
                 <a:solidFill>
                   <a:srgbClr val="484F58"/>
                 </a:solidFill>
                 <a:latin typeface="Consolas"/>
               </a:rPr>
-              <a:t>/* link_state[0..5] letti dalla mappa (feature, non pesi) */</a:t>
+              <a:t>/* </a:t>
+            </a:r>
+            <a:r>
+              <a:rPr sz="1100" b="0" dirty="0" err="1">
+                <a:solidFill>
+                  <a:srgbClr val="484F58"/>
+                </a:solidFill>
+                <a:latin typeface="Consolas"/>
+              </a:rPr>
+              <a:t>link_state</a:t>
+            </a:r>
+            <a:r>
+              <a:rPr sz="1100" b="0" dirty="0">
+                <a:solidFill>
+                  <a:srgbClr val="484F58"/>
+                </a:solidFill>
+                <a:latin typeface="Consolas"/>
+              </a:rPr>
+              <a:t>[0..5] </a:t>
+            </a:r>
+            <a:r>
+              <a:rPr sz="1100" b="0" dirty="0" err="1">
+                <a:solidFill>
+                  <a:srgbClr val="484F58"/>
+                </a:solidFill>
+                <a:latin typeface="Consolas"/>
+              </a:rPr>
+              <a:t>letti</a:t>
+            </a:r>
+            <a:r>
+              <a:rPr sz="1100" b="0" dirty="0">
+                <a:solidFill>
+                  <a:srgbClr val="484F58"/>
+                </a:solidFill>
+                <a:latin typeface="Consolas"/>
+              </a:rPr>
+              <a:t> </a:t>
+            </a:r>
+            <a:r>
+              <a:rPr sz="1100" b="0" dirty="0" err="1">
+                <a:solidFill>
+                  <a:srgbClr val="484F58"/>
+                </a:solidFill>
+                <a:latin typeface="Consolas"/>
+              </a:rPr>
+              <a:t>dalla</a:t>
+            </a:r>
+            <a:r>
+              <a:rPr sz="1100" b="0" dirty="0">
+                <a:solidFill>
+                  <a:srgbClr val="484F58"/>
+                </a:solidFill>
+                <a:latin typeface="Consolas"/>
+              </a:rPr>
+              <a:t> </a:t>
+            </a:r>
+            <a:r>
+              <a:rPr sz="1100" b="0" dirty="0" err="1">
+                <a:solidFill>
+                  <a:srgbClr val="484F58"/>
+                </a:solidFill>
+                <a:latin typeface="Consolas"/>
+              </a:rPr>
+              <a:t>mappa</a:t>
+            </a:r>
+            <a:r>
+              <a:rPr sz="1100" b="0" dirty="0">
+                <a:solidFill>
+                  <a:srgbClr val="484F58"/>
+                </a:solidFill>
+                <a:latin typeface="Consolas"/>
+              </a:rPr>
+              <a:t> (feature, non </a:t>
+            </a:r>
+            <a:r>
+              <a:rPr sz="1100" b="0" dirty="0" err="1">
+                <a:solidFill>
+                  <a:srgbClr val="484F58"/>
+                </a:solidFill>
+                <a:latin typeface="Consolas"/>
+              </a:rPr>
+              <a:t>pesi</a:t>
+            </a:r>
+            <a:r>
+              <a:rPr sz="1100" b="0" dirty="0">
+                <a:solidFill>
+                  <a:srgbClr val="484F58"/>
+                </a:solidFill>
+                <a:latin typeface="Consolas"/>
+              </a:rPr>
+              <a:t>) */</a:t>
             </a:r>
           </a:p>
           <a:p>
@@ -20051,13 +20474,121 @@
               </a:spcAft>
             </a:pPr>
             <a:r>
-              <a:rPr sz="1100" b="0">
+              <a:rPr sz="1100" b="0" dirty="0">
                 <a:solidFill>
                   <a:srgbClr val="E6EDF3"/>
                 </a:solidFill>
                 <a:latin typeface="Consolas"/>
               </a:rPr>
-              <a:t>_lk=0; _lp=link_state.lookup(&amp;_lk); if (_lp) ls0=(long long)(*_lp);</a:t>
+              <a:t>_</a:t>
+            </a:r>
+            <a:r>
+              <a:rPr sz="1100" b="0" dirty="0" err="1">
+                <a:solidFill>
+                  <a:srgbClr val="E6EDF3"/>
+                </a:solidFill>
+                <a:latin typeface="Consolas"/>
+              </a:rPr>
+              <a:t>lk</a:t>
+            </a:r>
+            <a:r>
+              <a:rPr sz="1100" b="0" dirty="0">
+                <a:solidFill>
+                  <a:srgbClr val="E6EDF3"/>
+                </a:solidFill>
+                <a:latin typeface="Consolas"/>
+              </a:rPr>
+              <a:t>=0; _</a:t>
+            </a:r>
+            <a:r>
+              <a:rPr sz="1100" b="0" dirty="0" err="1">
+                <a:solidFill>
+                  <a:srgbClr val="E6EDF3"/>
+                </a:solidFill>
+                <a:latin typeface="Consolas"/>
+              </a:rPr>
+              <a:t>lp</a:t>
+            </a:r>
+            <a:r>
+              <a:rPr sz="1100" b="0" dirty="0">
+                <a:solidFill>
+                  <a:srgbClr val="E6EDF3"/>
+                </a:solidFill>
+                <a:latin typeface="Consolas"/>
+              </a:rPr>
+              <a:t>=</a:t>
+            </a:r>
+            <a:r>
+              <a:rPr sz="1100" b="0" dirty="0" err="1">
+                <a:solidFill>
+                  <a:srgbClr val="E6EDF3"/>
+                </a:solidFill>
+                <a:latin typeface="Consolas"/>
+              </a:rPr>
+              <a:t>link_state.lookup</a:t>
+            </a:r>
+            <a:r>
+              <a:rPr sz="1100" b="0" dirty="0">
+                <a:solidFill>
+                  <a:srgbClr val="E6EDF3"/>
+                </a:solidFill>
+                <a:latin typeface="Consolas"/>
+              </a:rPr>
+              <a:t>(&amp;_</a:t>
+            </a:r>
+            <a:r>
+              <a:rPr sz="1100" b="0" dirty="0" err="1">
+                <a:solidFill>
+                  <a:srgbClr val="E6EDF3"/>
+                </a:solidFill>
+                <a:latin typeface="Consolas"/>
+              </a:rPr>
+              <a:t>lk</a:t>
+            </a:r>
+            <a:r>
+              <a:rPr sz="1100" b="0" dirty="0">
+                <a:solidFill>
+                  <a:srgbClr val="E6EDF3"/>
+                </a:solidFill>
+                <a:latin typeface="Consolas"/>
+              </a:rPr>
+              <a:t>); if (_</a:t>
+            </a:r>
+            <a:r>
+              <a:rPr sz="1100" b="0" dirty="0" err="1">
+                <a:solidFill>
+                  <a:srgbClr val="E6EDF3"/>
+                </a:solidFill>
+                <a:latin typeface="Consolas"/>
+              </a:rPr>
+              <a:t>lp</a:t>
+            </a:r>
+            <a:r>
+              <a:rPr sz="1100" b="0" dirty="0">
+                <a:solidFill>
+                  <a:srgbClr val="E6EDF3"/>
+                </a:solidFill>
+                <a:latin typeface="Consolas"/>
+              </a:rPr>
+              <a:t>) ls0=(long long)(*_</a:t>
+            </a:r>
+            <a:r>
+              <a:rPr sz="1100" b="0" dirty="0" err="1">
+                <a:solidFill>
+                  <a:srgbClr val="E6EDF3"/>
+                </a:solidFill>
+                <a:latin typeface="Consolas"/>
+              </a:rPr>
+              <a:t>lp</a:t>
+            </a:r>
+            <a:r>
+              <a:rPr sz="1100" b="0" dirty="0">
+                <a:solidFill>
+                  <a:srgbClr val="E6EDF3"/>
+                </a:solidFill>
+                <a:latin typeface="Consolas"/>
+              </a:rPr>
+              <a:t>);</a:t>
             </a:r>
           </a:p>
           <a:p>
@@ -20073,13 +20604,31 @@
               </a:spcAft>
             </a:pPr>
             <a:r>
-              <a:rPr sz="1100" b="0">
+              <a:rPr sz="1100" b="0" dirty="0">
                 <a:solidFill>
                   <a:srgbClr val="8B949E"/>
                 </a:solidFill>
                 <a:latin typeface="Consolas"/>
               </a:rPr>
-              <a:t>...  ls5 = link_state[5]</a:t>
+              <a:t>...  ls5 = </a:t>
+            </a:r>
+            <a:r>
+              <a:rPr sz="1100" b="0" dirty="0" err="1">
+                <a:solidFill>
+                  <a:srgbClr val="8B949E"/>
+                </a:solidFill>
+                <a:latin typeface="Consolas"/>
+              </a:rPr>
+              <a:t>link_state</a:t>
+            </a:r>
+            <a:r>
+              <a:rPr sz="1100" b="0" dirty="0">
+                <a:solidFill>
+                  <a:srgbClr val="8B949E"/>
+                </a:solidFill>
+                <a:latin typeface="Consolas"/>
+              </a:rPr>
+              <a:t>[5]</a:t>
             </a:r>
           </a:p>
           <a:p>
@@ -20095,7 +20644,7 @@
               </a:spcAft>
             </a:pPr>
             <a:r>
-              <a:rPr sz="1100" b="0">
+              <a:rPr sz="1100" b="0" dirty="0">
                 <a:solidFill>
                   <a:srgbClr val="E6EDF3"/>
                 </a:solidFill>
@@ -20117,13 +20666,103 @@
               </a:spcAft>
             </a:pPr>
             <a:r>
-              <a:rPr sz="1100" b="0">
+              <a:rPr sz="1100" b="0" dirty="0">
                 <a:solidFill>
                   <a:srgbClr val="484F58"/>
                 </a:solidFill>
                 <a:latin typeface="Consolas"/>
               </a:rPr>
-              <a:t>/* neurone fc1: pesi come letterali C, nessuna lookup pesi */</a:t>
+              <a:t>/* </a:t>
+            </a:r>
+            <a:r>
+              <a:rPr sz="1100" b="0" dirty="0" err="1">
+                <a:solidFill>
+                  <a:srgbClr val="484F58"/>
+                </a:solidFill>
+                <a:latin typeface="Consolas"/>
+              </a:rPr>
+              <a:t>neurone</a:t>
+            </a:r>
+            <a:r>
+              <a:rPr sz="1100" b="0" dirty="0">
+                <a:solidFill>
+                  <a:srgbClr val="484F58"/>
+                </a:solidFill>
+                <a:latin typeface="Consolas"/>
+              </a:rPr>
+              <a:t> fc1: </a:t>
+            </a:r>
+            <a:r>
+              <a:rPr sz="1100" b="0" dirty="0" err="1">
+                <a:solidFill>
+                  <a:srgbClr val="484F58"/>
+                </a:solidFill>
+                <a:latin typeface="Consolas"/>
+              </a:rPr>
+              <a:t>pesi</a:t>
+            </a:r>
+            <a:r>
+              <a:rPr sz="1100" b="0" dirty="0">
+                <a:solidFill>
+                  <a:srgbClr val="484F58"/>
+                </a:solidFill>
+                <a:latin typeface="Consolas"/>
+              </a:rPr>
+              <a:t> come </a:t>
+            </a:r>
+            <a:r>
+              <a:rPr sz="1100" b="0" dirty="0" err="1">
+                <a:solidFill>
+                  <a:srgbClr val="484F58"/>
+                </a:solidFill>
+                <a:latin typeface="Consolas"/>
+              </a:rPr>
+              <a:t>letterali</a:t>
+            </a:r>
+            <a:r>
+              <a:rPr sz="1100" b="0" dirty="0">
+                <a:solidFill>
+                  <a:srgbClr val="484F58"/>
+                </a:solidFill>
+                <a:latin typeface="Consolas"/>
+              </a:rPr>
+              <a:t> C, </a:t>
+            </a:r>
+            <a:r>
+              <a:rPr sz="1100" b="0" dirty="0" err="1">
+                <a:solidFill>
+                  <a:srgbClr val="484F58"/>
+                </a:solidFill>
+                <a:latin typeface="Consolas"/>
+              </a:rPr>
+              <a:t>nessuna</a:t>
+            </a:r>
+            <a:r>
+              <a:rPr sz="1100" b="0" dirty="0">
+                <a:solidFill>
+                  <a:srgbClr val="484F58"/>
+                </a:solidFill>
+                <a:latin typeface="Consolas"/>
+              </a:rPr>
+              <a:t> lookup </a:t>
+            </a:r>
+            <a:r>
+              <a:rPr sz="1100" b="0" dirty="0" err="1">
+                <a:solidFill>
+                  <a:srgbClr val="484F58"/>
+                </a:solidFill>
+                <a:latin typeface="Consolas"/>
+              </a:rPr>
+              <a:t>pesi</a:t>
+            </a:r>
+            <a:r>
+              <a:rPr sz="1100" b="0" dirty="0">
+                <a:solidFill>
+                  <a:srgbClr val="484F58"/>
+                </a:solidFill>
+                <a:latin typeface="Consolas"/>
+              </a:rPr>
+              <a:t> */</a:t>
             </a:r>
           </a:p>
           <a:p>
@@ -20139,13 +20778,49 @@
               </a:spcAft>
             </a:pPr>
             <a:r>
-              <a:rPr sz="1100" b="0">
+              <a:rPr sz="1100" b="0" dirty="0">
                 <a:solidFill>
                   <a:srgbClr val="E6EDF3"/>
                 </a:solidFill>
                 <a:latin typeface="Consolas"/>
               </a:rPr>
-              <a:t>long long h1_0 = RELU_LL( (__s64)_ttl * 12LL + w_iface_0 + w_node_0</a:t>
+              <a:t>long </a:t>
+            </a:r>
+            <a:r>
+              <a:rPr sz="1100" b="0" dirty="0" err="1">
+                <a:solidFill>
+                  <a:srgbClr val="E6EDF3"/>
+                </a:solidFill>
+                <a:latin typeface="Consolas"/>
+              </a:rPr>
+              <a:t>long</a:t>
+            </a:r>
+            <a:r>
+              <a:rPr sz="1100" b="0" dirty="0">
+                <a:solidFill>
+                  <a:srgbClr val="E6EDF3"/>
+                </a:solidFill>
+                <a:latin typeface="Consolas"/>
+              </a:rPr>
+              <a:t> h1_0 = RELU_LL( (__s64)_</a:t>
+            </a:r>
+            <a:r>
+              <a:rPr sz="1100" b="0" dirty="0" err="1">
+                <a:solidFill>
+                  <a:srgbClr val="E6EDF3"/>
+                </a:solidFill>
+                <a:latin typeface="Consolas"/>
+              </a:rPr>
+              <a:t>ttl</a:t>
+            </a:r>
+            <a:r>
+              <a:rPr sz="1100" b="0" dirty="0">
+                <a:solidFill>
+                  <a:srgbClr val="E6EDF3"/>
+                </a:solidFill>
+                <a:latin typeface="Consolas"/>
+              </a:rPr>
+              <a:t> * 12LL + w_iface_0 + w_node_0</a:t>
             </a:r>
           </a:p>
           <a:p>
@@ -20161,7 +20836,7 @@
               </a:spcAft>
             </a:pPr>
             <a:r>
-              <a:rPr sz="1100" b="0">
+              <a:rPr sz="1100" b="0" dirty="0">
                 <a:solidFill>
                   <a:srgbClr val="3FB950"/>
                 </a:solidFill>
@@ -20183,7 +20858,7 @@
               </a:spcAft>
             </a:pPr>
             <a:r>
-              <a:rPr sz="1100" b="0">
+              <a:rPr sz="1100" b="0" dirty="0">
                 <a:solidFill>
                   <a:srgbClr val="E6EDF3"/>
                 </a:solidFill>
@@ -20237,6 +20912,7 @@
           <a:lstStyle/>
           <a:p>
             <a:pPr algn="ctr"/>
+            <a:endParaRPr/>
           </a:p>
         </p:txBody>
       </p:sp>
@@ -20257,7 +20933,7 @@
           <a:noFill/>
         </p:spPr>
         <p:txBody>
-          <a:bodyPr wrap="square" anchor="t" lIns="0" rIns="0" tIns="0" bIns="0">
+          <a:bodyPr wrap="square" lIns="0" tIns="0" rIns="0" bIns="0" anchor="t">
             <a:spAutoFit/>
           </a:bodyPr>
           <a:lstStyle/>
@@ -20390,6 +21066,7 @@
           <a:lstStyle/>
           <a:p>
             <a:pPr algn="ctr"/>
+            <a:endParaRPr/>
           </a:p>
         </p:txBody>
       </p:sp>
@@ -20410,7 +21087,7 @@
           <a:noFill/>
         </p:spPr>
         <p:txBody>
-          <a:bodyPr wrap="square" anchor="t" lIns="0" rIns="0" tIns="0" bIns="0">
+          <a:bodyPr wrap="square" lIns="0" tIns="0" rIns="0" bIns="0" anchor="t">
             <a:spAutoFit/>
           </a:bodyPr>
           <a:lstStyle/>
@@ -20509,7 +21186,7 @@
 </file>
 
 <file path=ppt/slides/slide8.xml><?xml version="1.0" encoding="utf-8"?>
-<p:sld xmlns:a="http://schemas.openxmlformats.org/drawingml/2006/main" xmlns:p="http://schemas.openxmlformats.org/presentationml/2006/main" xmlns:r="http://schemas.openxmlformats.org/officeDocument/2006/relationships">
+<p:sld xmlns:a="http://schemas.openxmlformats.org/drawingml/2006/main" xmlns:r="http://schemas.openxmlformats.org/officeDocument/2006/relationships" xmlns:p="http://schemas.openxmlformats.org/presentationml/2006/main">
   <p:cSld>
     <p:spTree>
       <p:nvGrpSpPr>
@@ -20517,7 +21194,14 @@
         <p:cNvGrpSpPr/>
         <p:nvPr/>
       </p:nvGrpSpPr>
-      <p:grpSpPr/>
+      <p:grpSpPr>
+        <a:xfrm>
+          <a:off x="0" y="0"/>
+          <a:ext cx="0" cy="0"/>
+          <a:chOff x="0" y="0"/>
+          <a:chExt cx="0" cy="0"/>
+        </a:xfrm>
+      </p:grpSpPr>
       <p:sp>
         <p:nvSpPr>
           <p:cNvPr id="2" name="Rectangle 1"/>
@@ -20559,6 +21243,7 @@
           <a:lstStyle/>
           <a:p>
             <a:pPr algn="ctr"/>
+            <a:endParaRPr/>
           </a:p>
         </p:txBody>
       </p:sp>
@@ -20579,7 +21264,7 @@
           <a:noFill/>
         </p:spPr>
         <p:txBody>
-          <a:bodyPr wrap="square" anchor="t" lIns="0" rIns="0" tIns="0" bIns="0">
+          <a:bodyPr wrap="square" lIns="0" tIns="0" rIns="0" bIns="0" anchor="t">
             <a:spAutoFit/>
           </a:bodyPr>
           <a:lstStyle/>
@@ -20624,7 +21309,7 @@
           <a:noFill/>
         </p:spPr>
         <p:txBody>
-          <a:bodyPr wrap="square" anchor="t" lIns="0" rIns="0" tIns="0" bIns="0">
+          <a:bodyPr wrap="square" lIns="0" tIns="0" rIns="0" bIns="0" anchor="t">
             <a:spAutoFit/>
           </a:bodyPr>
           <a:lstStyle/>
@@ -20669,7 +21354,7 @@
           <a:noFill/>
         </p:spPr>
         <p:txBody>
-          <a:bodyPr wrap="square" anchor="t" lIns="0" rIns="0" tIns="0" bIns="0">
+          <a:bodyPr wrap="square" lIns="0" tIns="0" rIns="0" bIns="0" anchor="t">
             <a:spAutoFit/>
           </a:bodyPr>
           <a:lstStyle/>
@@ -20740,6 +21425,7 @@
           <a:lstStyle/>
           <a:p>
             <a:pPr algn="ctr"/>
+            <a:endParaRPr/>
           </a:p>
         </p:txBody>
       </p:sp>
@@ -20784,6 +21470,7 @@
           <a:lstStyle/>
           <a:p>
             <a:pPr algn="ctr"/>
+            <a:endParaRPr/>
           </a:p>
         </p:txBody>
       </p:sp>
@@ -20804,7 +21491,7 @@
           <a:noFill/>
         </p:spPr>
         <p:txBody>
-          <a:bodyPr wrap="square" anchor="ctr" lIns="0" rIns="0" tIns="0" bIns="0">
+          <a:bodyPr wrap="square" lIns="0" tIns="0" rIns="0" bIns="0" anchor="ctr">
             <a:spAutoFit/>
           </a:bodyPr>
           <a:lstStyle/>
@@ -20849,7 +21536,7 @@
           <a:noFill/>
         </p:spPr>
         <p:txBody>
-          <a:bodyPr wrap="square" anchor="ctr" lIns="0" rIns="0" tIns="0" bIns="0">
+          <a:bodyPr wrap="square" lIns="0" tIns="0" rIns="0" bIns="0" anchor="ctr">
             <a:spAutoFit/>
           </a:bodyPr>
           <a:lstStyle/>
@@ -20920,6 +21607,7 @@
           <a:lstStyle/>
           <a:p>
             <a:pPr algn="ctr"/>
+            <a:endParaRPr/>
           </a:p>
         </p:txBody>
       </p:sp>
@@ -20964,6 +21652,7 @@
           <a:lstStyle/>
           <a:p>
             <a:pPr algn="ctr"/>
+            <a:endParaRPr/>
           </a:p>
         </p:txBody>
       </p:sp>
@@ -20984,7 +21673,7 @@
           <a:noFill/>
         </p:spPr>
         <p:txBody>
-          <a:bodyPr wrap="square" anchor="ctr" lIns="0" rIns="0" tIns="0" bIns="0">
+          <a:bodyPr wrap="square" lIns="0" tIns="0" rIns="0" bIns="0" anchor="ctr">
             <a:spAutoFit/>
           </a:bodyPr>
           <a:lstStyle/>
@@ -21051,7 +21740,7 @@
           <a:noFill/>
         </p:spPr>
         <p:txBody>
-          <a:bodyPr wrap="square" anchor="ctr" lIns="0" rIns="0" tIns="0" bIns="0">
+          <a:bodyPr wrap="square" lIns="0" tIns="0" rIns="0" bIns="0" anchor="ctr">
             <a:spAutoFit/>
           </a:bodyPr>
           <a:lstStyle/>
@@ -21122,6 +21811,7 @@
           <a:lstStyle/>
           <a:p>
             <a:pPr algn="ctr"/>
+            <a:endParaRPr/>
           </a:p>
         </p:txBody>
       </p:sp>
@@ -21166,6 +21856,7 @@
           <a:lstStyle/>
           <a:p>
             <a:pPr algn="ctr"/>
+            <a:endParaRPr/>
           </a:p>
         </p:txBody>
       </p:sp>
@@ -21186,7 +21877,7 @@
           <a:noFill/>
         </p:spPr>
         <p:txBody>
-          <a:bodyPr wrap="square" anchor="ctr" lIns="0" rIns="0" tIns="0" bIns="0">
+          <a:bodyPr wrap="square" lIns="0" tIns="0" rIns="0" bIns="0" anchor="ctr">
             <a:spAutoFit/>
           </a:bodyPr>
           <a:lstStyle/>
@@ -21253,7 +21944,7 @@
           <a:noFill/>
         </p:spPr>
         <p:txBody>
-          <a:bodyPr wrap="square" anchor="ctr" lIns="0" rIns="0" tIns="0" bIns="0">
+          <a:bodyPr wrap="square" lIns="0" tIns="0" rIns="0" bIns="0" anchor="ctr">
             <a:spAutoFit/>
           </a:bodyPr>
           <a:lstStyle/>
@@ -21324,6 +22015,7 @@
           <a:lstStyle/>
           <a:p>
             <a:pPr algn="ctr"/>
+            <a:endParaRPr/>
           </a:p>
         </p:txBody>
       </p:sp>
@@ -21368,6 +22060,7 @@
           <a:lstStyle/>
           <a:p>
             <a:pPr algn="ctr"/>
+            <a:endParaRPr/>
           </a:p>
         </p:txBody>
       </p:sp>
@@ -21388,7 +22081,7 @@
           <a:noFill/>
         </p:spPr>
         <p:txBody>
-          <a:bodyPr wrap="square" anchor="ctr" lIns="0" rIns="0" tIns="0" bIns="0">
+          <a:bodyPr wrap="square" lIns="0" tIns="0" rIns="0" bIns="0" anchor="ctr">
             <a:spAutoFit/>
           </a:bodyPr>
           <a:lstStyle/>
@@ -21455,7 +22148,7 @@
           <a:noFill/>
         </p:spPr>
         <p:txBody>
-          <a:bodyPr wrap="square" anchor="ctr" lIns="0" rIns="0" tIns="0" bIns="0">
+          <a:bodyPr wrap="square" lIns="0" tIns="0" rIns="0" bIns="0" anchor="ctr">
             <a:spAutoFit/>
           </a:bodyPr>
           <a:lstStyle/>
@@ -21526,6 +22219,7 @@
           <a:lstStyle/>
           <a:p>
             <a:pPr algn="ctr"/>
+            <a:endParaRPr/>
           </a:p>
         </p:txBody>
       </p:sp>
@@ -21570,6 +22264,7 @@
           <a:lstStyle/>
           <a:p>
             <a:pPr algn="ctr"/>
+            <a:endParaRPr/>
           </a:p>
         </p:txBody>
       </p:sp>
@@ -21590,7 +22285,7 @@
           <a:noFill/>
         </p:spPr>
         <p:txBody>
-          <a:bodyPr wrap="square" anchor="ctr" lIns="0" rIns="0" tIns="0" bIns="0">
+          <a:bodyPr wrap="square" lIns="0" tIns="0" rIns="0" bIns="0" anchor="ctr">
             <a:spAutoFit/>
           </a:bodyPr>
           <a:lstStyle/>
@@ -21683,6 +22378,7 @@
           <a:lstStyle/>
           <a:p>
             <a:pPr algn="ctr"/>
+            <a:endParaRPr/>
           </a:p>
         </p:txBody>
       </p:sp>
@@ -21703,7 +22399,7 @@
           <a:noFill/>
         </p:spPr>
         <p:txBody>
-          <a:bodyPr wrap="square" anchor="ctr" lIns="0" rIns="0" tIns="0" bIns="0">
+          <a:bodyPr wrap="square" lIns="0" tIns="0" rIns="0" bIns="0" anchor="ctr">
             <a:spAutoFit/>
           </a:bodyPr>
           <a:lstStyle/>
@@ -21774,6 +22470,7 @@
           <a:lstStyle/>
           <a:p>
             <a:pPr algn="ctr"/>
+            <a:endParaRPr/>
           </a:p>
         </p:txBody>
       </p:sp>
@@ -21794,7 +22491,7 @@
           <a:noFill/>
         </p:spPr>
         <p:txBody>
-          <a:bodyPr wrap="square" anchor="ctr" lIns="0" rIns="0" tIns="0" bIns="0">
+          <a:bodyPr wrap="square" lIns="0" tIns="0" rIns="0" bIns="0" anchor="ctr">
             <a:spAutoFit/>
           </a:bodyPr>
           <a:lstStyle/>
@@ -21865,6 +22562,7 @@
           <a:lstStyle/>
           <a:p>
             <a:pPr algn="ctr"/>
+            <a:endParaRPr/>
           </a:p>
         </p:txBody>
       </p:sp>
@@ -21885,7 +22583,7 @@
           <a:noFill/>
         </p:spPr>
         <p:txBody>
-          <a:bodyPr wrap="square" anchor="ctr" lIns="0" rIns="0" tIns="0" bIns="0">
+          <a:bodyPr wrap="square" lIns="0" tIns="0" rIns="0" bIns="0" anchor="ctr">
             <a:spAutoFit/>
           </a:bodyPr>
           <a:lstStyle/>
@@ -21956,6 +22654,7 @@
           <a:lstStyle/>
           <a:p>
             <a:pPr algn="ctr"/>
+            <a:endParaRPr/>
           </a:p>
         </p:txBody>
       </p:sp>
@@ -21976,7 +22675,7 @@
           <a:noFill/>
         </p:spPr>
         <p:txBody>
-          <a:bodyPr wrap="square" anchor="ctr" lIns="0" rIns="0" tIns="0" bIns="0">
+          <a:bodyPr wrap="square" lIns="0" tIns="0" rIns="0" bIns="0" anchor="ctr">
             <a:spAutoFit/>
           </a:bodyPr>
           <a:lstStyle/>
@@ -22047,6 +22746,7 @@
           <a:lstStyle/>
           <a:p>
             <a:pPr algn="ctr"/>
+            <a:endParaRPr/>
           </a:p>
         </p:txBody>
       </p:sp>
@@ -22067,7 +22767,7 @@
           <a:noFill/>
         </p:spPr>
         <p:txBody>
-          <a:bodyPr wrap="square" anchor="t" lIns="0" rIns="0" tIns="0" bIns="0">
+          <a:bodyPr wrap="square" lIns="0" tIns="0" rIns="0" bIns="0" anchor="t">
             <a:spAutoFit/>
           </a:bodyPr>
           <a:lstStyle/>
@@ -22259,7 +22959,7 @@
 </file>
 
 <file path=ppt/slides/slide9.xml><?xml version="1.0" encoding="utf-8"?>
-<p:sld xmlns:a="http://schemas.openxmlformats.org/drawingml/2006/main" xmlns:p="http://schemas.openxmlformats.org/presentationml/2006/main" xmlns:r="http://schemas.openxmlformats.org/officeDocument/2006/relationships">
+<p:sld xmlns:a="http://schemas.openxmlformats.org/drawingml/2006/main" xmlns:r="http://schemas.openxmlformats.org/officeDocument/2006/relationships" xmlns:p="http://schemas.openxmlformats.org/presentationml/2006/main">
   <p:cSld>
     <p:spTree>
       <p:nvGrpSpPr>
@@ -22267,7 +22967,14 @@
         <p:cNvGrpSpPr/>
         <p:nvPr/>
       </p:nvGrpSpPr>
-      <p:grpSpPr/>
+      <p:grpSpPr>
+        <a:xfrm>
+          <a:off x="0" y="0"/>
+          <a:ext cx="0" cy="0"/>
+          <a:chOff x="0" y="0"/>
+          <a:chExt cx="0" cy="0"/>
+        </a:xfrm>
+      </p:grpSpPr>
       <p:sp>
         <p:nvSpPr>
           <p:cNvPr id="2" name="Rectangle 1"/>
@@ -22309,6 +23016,7 @@
           <a:lstStyle/>
           <a:p>
             <a:pPr algn="ctr"/>
+            <a:endParaRPr/>
           </a:p>
         </p:txBody>
       </p:sp>
@@ -22329,7 +23037,7 @@
           <a:noFill/>
         </p:spPr>
         <p:txBody>
-          <a:bodyPr wrap="square" anchor="t" lIns="0" rIns="0" tIns="0" bIns="0">
+          <a:bodyPr wrap="square" lIns="0" tIns="0" rIns="0" bIns="0" anchor="t">
             <a:spAutoFit/>
           </a:bodyPr>
           <a:lstStyle/>
@@ -22374,7 +23082,7 @@
           <a:noFill/>
         </p:spPr>
         <p:txBody>
-          <a:bodyPr wrap="square" anchor="t" lIns="0" rIns="0" tIns="0" bIns="0">
+          <a:bodyPr wrap="square" lIns="0" tIns="0" rIns="0" bIns="0" anchor="t">
             <a:spAutoFit/>
           </a:bodyPr>
           <a:lstStyle/>
@@ -22419,7 +23127,7 @@
           <a:noFill/>
         </p:spPr>
         <p:txBody>
-          <a:bodyPr wrap="square" anchor="t" lIns="0" rIns="0" tIns="0" bIns="0">
+          <a:bodyPr wrap="square" lIns="0" tIns="0" rIns="0" bIns="0" anchor="t">
             <a:spAutoFit/>
           </a:bodyPr>
           <a:lstStyle/>
@@ -22490,6 +23198,7 @@
           <a:lstStyle/>
           <a:p>
             <a:pPr algn="ctr"/>
+            <a:endParaRPr/>
           </a:p>
         </p:txBody>
       </p:sp>
@@ -22510,7 +23219,7 @@
           <a:noFill/>
         </p:spPr>
         <p:txBody>
-          <a:bodyPr wrap="square" anchor="t" lIns="0" rIns="0" tIns="0" bIns="0">
+          <a:bodyPr wrap="square" lIns="0" tIns="0" rIns="0" bIns="0" anchor="t">
             <a:spAutoFit/>
           </a:bodyPr>
           <a:lstStyle/>
@@ -22546,7 +23255,7 @@
         </p:nvSpPr>
         <p:spPr>
           <a:xfrm>
-            <a:off x="914400" y="2715768"/>
+            <a:off x="918972" y="2629689"/>
             <a:ext cx="10424159" cy="1325880"/>
           </a:xfrm>
           <a:prstGeom prst="rect">
@@ -22555,7 +23264,7 @@
           <a:noFill/>
         </p:spPr>
         <p:txBody>
-          <a:bodyPr wrap="square" anchor="t" lIns="0" rIns="0" tIns="0" bIns="0">
+          <a:bodyPr wrap="square" lIns="0" tIns="0" rIns="0" bIns="0" anchor="t">
             <a:spAutoFit/>
           </a:bodyPr>
           <a:lstStyle/>
@@ -22572,13 +23281,49 @@
               </a:spcAft>
             </a:pPr>
             <a:r>
-              <a:rPr sz="1100" b="0">
+              <a:rPr sz="1100" b="0" dirty="0">
                 <a:solidFill>
                   <a:srgbClr val="E6EDF3"/>
                 </a:solidFill>
                 <a:latin typeface="Consolas"/>
               </a:rPr>
-              <a:t>for (j = 0; j &lt; 4; j++) {          /* neuroni fc1 */</a:t>
+              <a:t>for (j = 0; j &lt; 4; </a:t>
+            </a:r>
+            <a:r>
+              <a:rPr sz="1100" b="0" dirty="0" err="1">
+                <a:solidFill>
+                  <a:srgbClr val="E6EDF3"/>
+                </a:solidFill>
+                <a:latin typeface="Consolas"/>
+              </a:rPr>
+              <a:t>j++</a:t>
+            </a:r>
+            <a:r>
+              <a:rPr sz="1100" b="0" dirty="0">
+                <a:solidFill>
+                  <a:srgbClr val="E6EDF3"/>
+                </a:solidFill>
+                <a:latin typeface="Consolas"/>
+              </a:rPr>
+              <a:t>) {          /* </a:t>
+            </a:r>
+            <a:r>
+              <a:rPr sz="1100" b="0" dirty="0" err="1">
+                <a:solidFill>
+                  <a:srgbClr val="E6EDF3"/>
+                </a:solidFill>
+                <a:latin typeface="Consolas"/>
+              </a:rPr>
+              <a:t>neuroni</a:t>
+            </a:r>
+            <a:r>
+              <a:rPr sz="1100" b="0" dirty="0">
+                <a:solidFill>
+                  <a:srgbClr val="E6EDF3"/>
+                </a:solidFill>
+                <a:latin typeface="Consolas"/>
+              </a:rPr>
+              <a:t> fc1 */</a:t>
             </a:r>
           </a:p>
           <a:p>
@@ -22594,7 +23339,7 @@
               </a:spcAft>
             </a:pPr>
             <a:r>
-              <a:rPr sz="1100" b="0">
+              <a:rPr sz="1100" b="0" dirty="0">
                 <a:solidFill>
                   <a:srgbClr val="8B949E"/>
                 </a:solidFill>
@@ -22616,13 +23361,49 @@
               </a:spcAft>
             </a:pPr>
             <a:r>
-              <a:rPr sz="1100" b="0">
+              <a:rPr sz="1100" b="0" dirty="0">
                 <a:solidFill>
                   <a:srgbClr val="E6EDF3"/>
                 </a:solidFill>
                 <a:latin typeface="Consolas"/>
               </a:rPr>
-              <a:t>    acc += ttl  * W[woff + j*65 + 12];      /* TTL   */</a:t>
+              <a:t>    acc += </a:t>
+            </a:r>
+            <a:r>
+              <a:rPr sz="1100" b="0" dirty="0" err="1">
+                <a:solidFill>
+                  <a:srgbClr val="E6EDF3"/>
+                </a:solidFill>
+                <a:latin typeface="Consolas"/>
+              </a:rPr>
+              <a:t>ttl</a:t>
+            </a:r>
+            <a:r>
+              <a:rPr sz="1100" b="0" dirty="0">
+                <a:solidFill>
+                  <a:srgbClr val="E6EDF3"/>
+                </a:solidFill>
+                <a:latin typeface="Consolas"/>
+              </a:rPr>
+              <a:t>  * W[</a:t>
+            </a:r>
+            <a:r>
+              <a:rPr sz="1100" b="0" dirty="0" err="1">
+                <a:solidFill>
+                  <a:srgbClr val="E6EDF3"/>
+                </a:solidFill>
+                <a:latin typeface="Consolas"/>
+              </a:rPr>
+              <a:t>woff</a:t>
+            </a:r>
+            <a:r>
+              <a:rPr sz="1100" b="0" dirty="0">
+                <a:solidFill>
+                  <a:srgbClr val="E6EDF3"/>
+                </a:solidFill>
+                <a:latin typeface="Consolas"/>
+              </a:rPr>
+              <a:t> + j*65 + 12];      /* TTL   */</a:t>
             </a:r>
           </a:p>
           <a:p>
@@ -22638,13 +23419,85 @@
               </a:spcAft>
             </a:pPr>
             <a:r>
-              <a:rPr sz="1100" b="0">
+              <a:rPr sz="1100" b="0" dirty="0">
                 <a:solidFill>
                   <a:srgbClr val="3FB950"/>
                 </a:solidFill>
                 <a:latin typeface="Consolas"/>
               </a:rPr>
-              <a:t>    for (i = 0; i &lt; 6; i++)                 /* link_state [0..5] */</a:t>
+              <a:t>    for (</a:t>
+            </a:r>
+            <a:r>
+              <a:rPr sz="1100" b="0" dirty="0" err="1">
+                <a:solidFill>
+                  <a:srgbClr val="3FB950"/>
+                </a:solidFill>
+                <a:latin typeface="Consolas"/>
+              </a:rPr>
+              <a:t>i</a:t>
+            </a:r>
+            <a:r>
+              <a:rPr sz="1100" b="0" dirty="0">
+                <a:solidFill>
+                  <a:srgbClr val="3FB950"/>
+                </a:solidFill>
+                <a:latin typeface="Consolas"/>
+              </a:rPr>
+              <a:t> = 0; </a:t>
+            </a:r>
+            <a:r>
+              <a:rPr sz="1100" b="0" dirty="0" err="1">
+                <a:solidFill>
+                  <a:srgbClr val="3FB950"/>
+                </a:solidFill>
+                <a:latin typeface="Consolas"/>
+              </a:rPr>
+              <a:t>i</a:t>
+            </a:r>
+            <a:r>
+              <a:rPr sz="1100" b="0" dirty="0">
+                <a:solidFill>
+                  <a:srgbClr val="3FB950"/>
+                </a:solidFill>
+                <a:latin typeface="Consolas"/>
+              </a:rPr>
+              <a:t> &lt; 6; </a:t>
+            </a:r>
+            <a:r>
+              <a:rPr sz="1100" b="0" dirty="0" err="1">
+                <a:solidFill>
+                  <a:srgbClr val="3FB950"/>
+                </a:solidFill>
+                <a:latin typeface="Consolas"/>
+              </a:rPr>
+              <a:t>i</a:t>
+            </a:r>
+            <a:r>
+              <a:rPr sz="1100" b="0" dirty="0">
+                <a:solidFill>
+                  <a:srgbClr val="3FB950"/>
+                </a:solidFill>
+                <a:latin typeface="Consolas"/>
+              </a:rPr>
+              <a:t>++)                 /* </a:t>
+            </a:r>
+            <a:r>
+              <a:rPr sz="1100" b="0" dirty="0" err="1">
+                <a:solidFill>
+                  <a:srgbClr val="3FB950"/>
+                </a:solidFill>
+                <a:latin typeface="Consolas"/>
+              </a:rPr>
+              <a:t>link_state</a:t>
+            </a:r>
+            <a:r>
+              <a:rPr sz="1100" b="0" dirty="0">
+                <a:solidFill>
+                  <a:srgbClr val="3FB950"/>
+                </a:solidFill>
+                <a:latin typeface="Consolas"/>
+              </a:rPr>
+              <a:t> [0..5] */</a:t>
             </a:r>
           </a:p>
           <a:p>
@@ -22660,13 +23513,85 @@
               </a:spcAft>
             </a:pPr>
             <a:r>
-              <a:rPr sz="1100" b="0">
+              <a:rPr sz="1100" b="0" dirty="0">
                 <a:solidFill>
                   <a:srgbClr val="3FB950"/>
                 </a:solidFill>
                 <a:latin typeface="Consolas"/>
               </a:rPr>
-              <a:t>        acc += link_state[i] * W[woff + j*65 + i];</a:t>
+              <a:t>        acc += </a:t>
+            </a:r>
+            <a:r>
+              <a:rPr sz="1100" b="0" dirty="0" err="1">
+                <a:solidFill>
+                  <a:srgbClr val="3FB950"/>
+                </a:solidFill>
+                <a:latin typeface="Consolas"/>
+              </a:rPr>
+              <a:t>link_state</a:t>
+            </a:r>
+            <a:r>
+              <a:rPr sz="1100" b="0" dirty="0">
+                <a:solidFill>
+                  <a:srgbClr val="3FB950"/>
+                </a:solidFill>
+                <a:latin typeface="Consolas"/>
+              </a:rPr>
+              <a:t>[</a:t>
+            </a:r>
+            <a:r>
+              <a:rPr sz="1100" b="0" dirty="0" err="1">
+                <a:solidFill>
+                  <a:srgbClr val="3FB950"/>
+                </a:solidFill>
+                <a:latin typeface="Consolas"/>
+              </a:rPr>
+              <a:t>i</a:t>
+            </a:r>
+            <a:r>
+              <a:rPr sz="1100" b="0" dirty="0">
+                <a:solidFill>
+                  <a:srgbClr val="3FB950"/>
+                </a:solidFill>
+                <a:latin typeface="Consolas"/>
+              </a:rPr>
+              <a:t>] * W[</a:t>
+            </a:r>
+            <a:r>
+              <a:rPr sz="1100" b="0" dirty="0" err="1">
+                <a:solidFill>
+                  <a:srgbClr val="3FB950"/>
+                </a:solidFill>
+                <a:latin typeface="Consolas"/>
+              </a:rPr>
+              <a:t>woff</a:t>
+            </a:r>
+            <a:r>
+              <a:rPr sz="1100" b="0" dirty="0">
+                <a:solidFill>
+                  <a:srgbClr val="3FB950"/>
+                </a:solidFill>
+                <a:latin typeface="Consolas"/>
+              </a:rPr>
+              <a:t> + j*65 + </a:t>
+            </a:r>
+            <a:r>
+              <a:rPr sz="1100" b="0" dirty="0" err="1">
+                <a:solidFill>
+                  <a:srgbClr val="3FB950"/>
+                </a:solidFill>
+                <a:latin typeface="Consolas"/>
+              </a:rPr>
+              <a:t>i</a:t>
+            </a:r>
+            <a:r>
+              <a:rPr sz="1100" b="0" dirty="0">
+                <a:solidFill>
+                  <a:srgbClr val="3FB950"/>
+                </a:solidFill>
+                <a:latin typeface="Consolas"/>
+              </a:rPr>
+              <a:t>];</a:t>
             </a:r>
           </a:p>
           <a:p>
@@ -22682,13 +23607,49 @@
               </a:spcAft>
             </a:pPr>
             <a:r>
-              <a:rPr sz="1100" b="0">
+              <a:rPr sz="1100" b="0" dirty="0">
                 <a:solidFill>
                   <a:srgbClr val="E6EDF3"/>
                 </a:solidFill>
                 <a:latin typeface="Consolas"/>
               </a:rPr>
-              <a:t>    acc += W[iface_idx];  acc += W[node_idx];</a:t>
+              <a:t>    acc += W[</a:t>
+            </a:r>
+            <a:r>
+              <a:rPr sz="1100" b="0" dirty="0" err="1">
+                <a:solidFill>
+                  <a:srgbClr val="E6EDF3"/>
+                </a:solidFill>
+                <a:latin typeface="Consolas"/>
+              </a:rPr>
+              <a:t>iface_idx</a:t>
+            </a:r>
+            <a:r>
+              <a:rPr sz="1100" b="0" dirty="0">
+                <a:solidFill>
+                  <a:srgbClr val="E6EDF3"/>
+                </a:solidFill>
+                <a:latin typeface="Consolas"/>
+              </a:rPr>
+              <a:t>];  acc += W[</a:t>
+            </a:r>
+            <a:r>
+              <a:rPr sz="1100" b="0" dirty="0" err="1">
+                <a:solidFill>
+                  <a:srgbClr val="E6EDF3"/>
+                </a:solidFill>
+                <a:latin typeface="Consolas"/>
+              </a:rPr>
+              <a:t>node_idx</a:t>
+            </a:r>
+            <a:r>
+              <a:rPr sz="1100" b="0" dirty="0">
+                <a:solidFill>
+                  <a:srgbClr val="E6EDF3"/>
+                </a:solidFill>
+                <a:latin typeface="Consolas"/>
+              </a:rPr>
+              <a:t>];</a:t>
             </a:r>
           </a:p>
           <a:p>
@@ -22704,7 +23665,7 @@
               </a:spcAft>
             </a:pPr>
             <a:r>
-              <a:rPr sz="1100" b="0">
+              <a:rPr sz="1100" b="0" dirty="0">
                 <a:solidFill>
                   <a:srgbClr val="8B949E"/>
                 </a:solidFill>
@@ -22726,7 +23687,7 @@
               </a:spcAft>
             </a:pPr>
             <a:r>
-              <a:rPr sz="1100" b="0">
+              <a:rPr sz="1100" b="0" dirty="0">
                 <a:solidFill>
                   <a:srgbClr val="E6EDF3"/>
                 </a:solidFill>
@@ -22780,6 +23741,7 @@
           <a:lstStyle/>
           <a:p>
             <a:pPr algn="ctr"/>
+            <a:endParaRPr/>
           </a:p>
         </p:txBody>
       </p:sp>
@@ -22800,7 +23762,7 @@
           <a:noFill/>
         </p:spPr>
         <p:txBody>
-          <a:bodyPr wrap="square" anchor="t" lIns="0" rIns="0" tIns="0" bIns="0">
+          <a:bodyPr wrap="square" lIns="0" tIns="0" rIns="0" bIns="0" anchor="t">
             <a:spAutoFit/>
           </a:bodyPr>
           <a:lstStyle/>
@@ -22933,6 +23895,7 @@
           <a:lstStyle/>
           <a:p>
             <a:pPr algn="ctr"/>
+            <a:endParaRPr/>
           </a:p>
         </p:txBody>
       </p:sp>
@@ -22953,7 +23916,7 @@
           <a:noFill/>
         </p:spPr>
         <p:txBody>
-          <a:bodyPr wrap="square" anchor="t" lIns="0" rIns="0" tIns="0" bIns="0">
+          <a:bodyPr wrap="square" lIns="0" tIns="0" rIns="0" bIns="0" anchor="t">
             <a:spAutoFit/>
           </a:bodyPr>
           <a:lstStyle/>

--- a/docs/IPA_eBPF_pipelines.pptx
+++ b/docs/IPA_eBPF_pipelines.pptx
@@ -5417,6 +5417,37 @@
               <a:t>Aggiornamento = load_modular_weights() scrive pesi + layer_shapes + layer_registry (nuova lista layer): cambia profondita E larghezza senza reload dei 2 programmi eBPF.</a:t>
             </a:r>
           </a:p>
+          <a:p>
+            <a:pPr algn="l">
+              <a:lnSpc>
+                <a:spcPct val="105000"/>
+              </a:lnSpc>
+              <a:spcBef>
+                <a:spcPts val="0"/>
+              </a:spcBef>
+              <a:spcAft>
+                <a:spcPts val="500"/>
+              </a:spcAft>
+            </a:pPr>
+            <a:r>
+              <a:rPr sz="1100" b="0">
+                <a:solidFill>
+                  <a:srgbClr val="F85149"/>
+                </a:solidFill>
+                <a:latin typeface="Segoe UI"/>
+              </a:rPr>
+              <a:t>•  </a:t>
+            </a:r>
+            <a:r>
+              <a:rPr sz="1100" b="0">
+                <a:solidFill>
+                  <a:srgbClr val="8B949E"/>
+                </a:solidFill>
+                <a:latin typeface="Segoe UI"/>
+              </a:rPr>
+              <a:t>Testato: model_id=0 reale 65-4-4-7 (3 layer) + model_id=1 sintetico 65-5-6-4-7 (4 layer, larghezza E profondita diverse) REGISTRATI INSIEME, stessi 2 programmi compilati -- PASS.</a:t>
+            </a:r>
+          </a:p>
         </p:txBody>
       </p:sp>
     </p:spTree>
@@ -8614,7 +8645,7 @@
                     <a:lstStyle/>
                     <a:p>
                       <a:r>
-                        <a:t>883</a:t>
+                        <a:t>912</a:t>
                       </a:r>
                     </a:p>
                   </a:txBody>
@@ -8692,7 +8723,7 @@
                     <a:lstStyle/>
                     <a:p>
                       <a:r>
-                        <a:t>4 215</a:t>
+                        <a:t>4 436</a:t>
                       </a:r>
                     </a:p>
                   </a:txBody>
@@ -8770,7 +8801,7 @@
                     <a:lstStyle/>
                     <a:p>
                       <a:r>
-                        <a:t>0 (leaf)</a:t>
+                        <a:t>1</a:t>
                       </a:r>
                     </a:p>
                   </a:txBody>
@@ -8824,15 +8855,8 @@
                     <a:bodyPr/>
                     <a:lstStyle/>
                     <a:p>
-                      <a:pPr algn="l"/>
                       <a:r>
-                        <a:rPr sz="1250" b="1">
-                          <a:solidFill>
-                            <a:srgbClr val="E6EDF3"/>
-                          </a:solidFill>
-                          <a:latin typeface="Segoe UI"/>
-                        </a:rPr>
-                        <a:t>Map lookup / pkt (stima)</a:t>
+                        <a:t>Map lookup / pkt (reale)</a:t>
                       </a:r>
                     </a:p>
                   </a:txBody>
@@ -8848,7 +8872,7 @@
                     <a:lstStyle/>
                     <a:p>
                       <a:r>
-                        <a:t>8</a:t>
+                        <a:t>8.0</a:t>
                       </a:r>
                     </a:p>
                   </a:txBody>
@@ -8864,7 +8888,7 @@
                     <a:lstStyle/>
                     <a:p>
                       <a:r>
-                        <a:t>322</a:t>
+                        <a:t>150.0</a:t>
                       </a:r>
                     </a:p>
                   </a:txBody>
@@ -8880,7 +8904,7 @@
                     <a:lstStyle/>
                     <a:p>
                       <a:r>
-                        <a:t>384</a:t>
+                        <a:t>163.0</a:t>
                       </a:r>
                     </a:p>
                   </a:txBody>
@@ -9004,7 +9028,7 @@
                     <a:lstStyle/>
                     <a:p>
                       <a:r>
-                        <a:t>50.0</a:t>
+                        <a:t>45.0</a:t>
                       </a:r>
                     </a:p>
                   </a:txBody>
@@ -9020,7 +9044,7 @@
                     <a:lstStyle/>
                     <a:p>
                       <a:r>
-                        <a:t>411.0</a:t>
+                        <a:t>476.0</a:t>
                       </a:r>
                     </a:p>
                   </a:txBody>
@@ -9036,7 +9060,7 @@
                     <a:lstStyle/>
                     <a:p>
                       <a:r>
-                        <a:t>738.0</a:t>
+                        <a:t>772.0</a:t>
                       </a:r>
                     </a:p>
                   </a:txBody>
@@ -9082,7 +9106,7 @@
                     <a:lstStyle/>
                     <a:p>
                       <a:r>
-                        <a:t>20.000</a:t>
+                        <a:t>22.222</a:t>
                       </a:r>
                     </a:p>
                   </a:txBody>
@@ -9098,7 +9122,7 @@
                     <a:lstStyle/>
                     <a:p>
                       <a:r>
-                        <a:t>2.433</a:t>
+                        <a:t>2.101</a:t>
                       </a:r>
                     </a:p>
                   </a:txBody>
@@ -9114,7 +9138,7 @@
                     <a:lstStyle/>
                     <a:p>
                       <a:r>
-                        <a:t>1.355</a:t>
+                        <a:t>1.295</a:t>
                       </a:r>
                     </a:p>
                   </a:txBody>
@@ -9160,7 +9184,7 @@
                     <a:lstStyle/>
                     <a:p>
                       <a:r>
-                        <a:t>36</a:t>
+                        <a:t>42</a:t>
                       </a:r>
                     </a:p>
                   </a:txBody>
@@ -9176,7 +9200,7 @@
                     <a:lstStyle/>
                     <a:p>
                       <a:r>
-                        <a:t>67</a:t>
+                        <a:t>81</a:t>
                       </a:r>
                     </a:p>
                   </a:txBody>
@@ -9192,7 +9216,7 @@
                     <a:lstStyle/>
                     <a:p>
                       <a:r>
-                        <a:t>75</a:t>
+                        <a:t>69</a:t>
                       </a:r>
                     </a:p>
                   </a:txBody>
@@ -9330,7 +9354,7 @@
                 </a:solidFill>
                 <a:latin typeface="Segoe UI"/>
               </a:rPr>
-              <a:t>P1 più veloce: 50 ns, 20.0 Mpps.</a:t>
+              <a:t>P1 piu' veloce: 45 ns, 22.2 Mpps.</a:t>
             </a:r>
           </a:p>
           <a:p>
@@ -9361,7 +9385,7 @@
                 </a:solidFill>
                 <a:latin typeface="Segoe UI"/>
               </a:rPr>
-              <a:t>P1 più compatto: 168 B, 883 istr.</a:t>
+              <a:t>P1 piu' compatto: 168 B, 912 istr.</a:t>
             </a:r>
           </a:p>
           <a:p>
@@ -9392,7 +9416,7 @@
                 </a:solidFill>
                 <a:latin typeface="Segoe UI"/>
               </a:rPr>
-              <a:t>Tail call, memoria e latenza crescono P1→P2→P3.</a:t>
+              <a:t>Tail call, map lookup, memoria e latenza crescono P1-&gt;P2-&gt;P3.</a:t>
             </a:r>
           </a:p>
           <a:p>
@@ -9423,7 +9447,7 @@
                 </a:solidFill>
                 <a:latin typeface="Segoe UI"/>
               </a:rPr>
-              <a:t>P2/P3 quasi stesse istruzioni statiche (~5.9k): il costo di P3 e' nei tail call extra (3 vs 1), non nel codice.</a:t>
+              <a:t>P2/P3 quasi stesse istruzioni statiche (~5.9k): il costo di P3 e' nei tail call (3 vs 1) e nei map lookup extra (163 vs 150), non nel codice.</a:t>
             </a:r>
           </a:p>
         </p:txBody>
@@ -9468,7 +9492,7 @@
                 </a:solidFill>
                 <a:latin typeface="Segoe UI"/>
               </a:rPr>
-              <a:t>mac_table: </a:t>
+              <a:t>mac_table: argmax -&gt; mac_table[classe] -&gt; bpf_redirect su tutte e 3 (P1 hardcoded via dispatcher + 1 tail call, 0 lookup sui pesi). L'inferenza é identica nelle 3 (classe kernel = riferimento Python); differisce solo il design. Ordine coerente con la tassonomia. Verificato anche multi-modello concorrente (2 model_id nello stesso oggetto BPF): P2/P3 con architetture DIVERSE (larghezza per P2, profonditá+larghezza per P3), 6/6 PASS.</a:t>
             </a:r>
             <a:r>
               <a:rPr sz="1200" b="0">
@@ -9477,7 +9501,7 @@
                 </a:solidFill>
                 <a:latin typeface="Segoe UI"/>
               </a:rPr>
-              <a:t>argmax → mac_table[classe] → bpf_redirect su tutte e 3 (P1 hardcoded in uno switch, 0 lookup). L'inferenza è identica nelle 3 (classe kernel = riferimento Python); differisce solo il design. Ordine coerente con la tassonomia.</a:t>
+              <a:t/>
             </a:r>
           </a:p>
         </p:txBody>
@@ -18777,7 +18801,7 @@
                 </a:solidFill>
                 <a:latin typeface="Consolas"/>
               </a:rPr>
-              <a:t>ipa_switch</a:t>
+              <a:t>dispatcher → model_&lt;id&gt;</a:t>
             </a:r>
           </a:p>
           <a:p>
@@ -18799,7 +18823,7 @@
                 </a:solidFill>
                 <a:latin typeface="Segoe UI"/>
               </a:rPr>
-              <a:t>pesi = letterali C</a:t>
+              <a:t>1 tail call, pesi = letterali C</a:t>
             </a:r>
           </a:p>
         </p:txBody>
@@ -19503,7 +19527,7 @@
                 </a:solidFill>
                 <a:latin typeface="Consolas"/>
               </a:rPr>
-              <a:t>0 tail call</a:t>
+              <a:t>1 tail call</a:t>
             </a:r>
           </a:p>
         </p:txBody>
@@ -19687,7 +19711,7 @@
                 </a:solidFill>
                 <a:latin typeface="Consolas"/>
               </a:rPr>
-              <a:t>264 B mappe</a:t>
+              <a:t>168 B mappe</a:t>
             </a:r>
           </a:p>
         </p:txBody>
@@ -19779,7 +19803,7 @@
                 </a:solidFill>
                 <a:latin typeface="Consolas"/>
               </a:rPr>
-              <a:t>32 ns · 31.3 Mpps</a:t>
+              <a:t>45 ns · 22.2 Mpps</a:t>
             </a:r>
           </a:p>
         </p:txBody>
@@ -19902,7 +19926,7 @@
                 </a:solidFill>
                 <a:latin typeface="Segoe UI"/>
               </a:rPr>
-              <a:t>Un programma eBPF dedicato per modello: i pesi int8 sono letterali signed char nel sorgente C.</a:t>
+              <a:t>Un dispatcher leggero estrae model_id ed esegue UNA tail call verso model_&lt;id&gt;: i pesi int8 restano letterali signed char nel sorgente C, zero lookup pesi.</a:t>
             </a:r>
           </a:p>
           <a:p>
@@ -19964,7 +19988,7 @@
                 </a:solidFill>
                 <a:latin typeface="Segoe UI"/>
               </a:rPr>
-              <a:t>Un solo switch(iface) e uno switch(node) per tutto il programma: evita l'esplosione dei rami nel verifier.</a:t>
+              <a:t>Un solo switch(iface) e uno switch(node) per model_&lt;id&gt;: evita l'esplosione dei rami nel verifier.</a:t>
             </a:r>
           </a:p>
           <a:p>
@@ -20027,6 +20051,37 @@
                 <a:latin typeface="Segoe UI"/>
               </a:rPr>
               <a:t>Nessun model_cache: era un residuo (gate is_valid + blob pesi mai usato) — rimosso, ora è hardcoded puro.</a:t>
+            </a:r>
+          </a:p>
+          <a:p>
+            <a:pPr algn="l">
+              <a:lnSpc>
+                <a:spcPct val="105000"/>
+              </a:lnSpc>
+              <a:spcBef>
+                <a:spcPts val="0"/>
+              </a:spcBef>
+              <a:spcAft>
+                <a:spcPts val="500"/>
+              </a:spcAft>
+            </a:pPr>
+            <a:r>
+              <a:rPr sz="1100" b="0">
+                <a:solidFill>
+                  <a:srgbClr val="3FB950"/>
+                </a:solidFill>
+                <a:latin typeface="Segoe UI"/>
+              </a:rPr>
+              <a:t>•  </a:t>
+            </a:r>
+            <a:r>
+              <a:rPr sz="1100" b="0">
+                <a:solidFill>
+                  <a:srgbClr val="8B949E"/>
+                </a:solidFill>
+                <a:latin typeface="Segoe UI"/>
+              </a:rPr>
+              <a:t>Testato: 2 model_id concorrenti REGISTRATI (stessa architettura 65-4-4-7) -- verifica il routing dispatcher-&gt;model_progs[model_id], PASS. Larghezza/profondita NON variano per modello in P1 (generatore C a costanti globali).</a:t>
             </a:r>
           </a:p>
         </p:txBody>
@@ -22946,6 +23001,37 @@
                 <a:latin typeface="Segoe UI"/>
               </a:rPr>
               <a:t>Aggiornamento modello/larghezza = load_arch_weights() sui pesi. Nessuna ricompilazione, nessun reload.</a:t>
+            </a:r>
+          </a:p>
+          <a:p>
+            <a:pPr algn="l">
+              <a:lnSpc>
+                <a:spcPct val="105000"/>
+              </a:lnSpc>
+              <a:spcBef>
+                <a:spcPts val="0"/>
+              </a:spcBef>
+              <a:spcAft>
+                <a:spcPts val="500"/>
+              </a:spcAft>
+            </a:pPr>
+            <a:r>
+              <a:rPr sz="1100" b="0">
+                <a:solidFill>
+                  <a:srgbClr val="F5A623"/>
+                </a:solidFill>
+                <a:latin typeface="Segoe UI"/>
+              </a:rPr>
+              <a:t>•  </a:t>
+            </a:r>
+            <a:r>
+              <a:rPr sz="1100" b="0">
+                <a:solidFill>
+                  <a:srgbClr val="8B949E"/>
+                </a:solidFill>
+                <a:latin typeface="Segoe UI"/>
+              </a:rPr>
+              <a:t>Testato: model_id=0 reale 65-4-4-7 + model_id=1 sintetico 65-6-5-7 (larghezza diversa, stessa profondita 2 hidden layer) REGISTRATI INSIEME, stesso programma compilato -- PASS.</a:t>
             </a:r>
           </a:p>
         </p:txBody>

--- a/docs/IPA_eBPF_pipelines.pptx
+++ b/docs/IPA_eBPF_pipelines.pptx
@@ -319,7 +319,7 @@
           <a:p>
             <a:fld id="{5BCAD085-E8A6-8845-BD4E-CB4CCA059FC4}" type="datetimeFigureOut">
               <a:rPr lang="en-US" smtClean="0"/>
-              <a:t>7/10/2026</a:t>
+              <a:t>7/12/2026</a:t>
             </a:fld>
             <a:endParaRPr lang="en-US"/>
           </a:p>
@@ -487,7 +487,7 @@
           <a:p>
             <a:fld id="{5BCAD085-E8A6-8845-BD4E-CB4CCA059FC4}" type="datetimeFigureOut">
               <a:rPr lang="en-US" smtClean="0"/>
-              <a:t>7/10/2026</a:t>
+              <a:t>7/12/2026</a:t>
             </a:fld>
             <a:endParaRPr lang="en-US"/>
           </a:p>
@@ -665,7 +665,7 @@
           <a:p>
             <a:fld id="{5BCAD085-E8A6-8845-BD4E-CB4CCA059FC4}" type="datetimeFigureOut">
               <a:rPr lang="en-US" smtClean="0"/>
-              <a:t>7/10/2026</a:t>
+              <a:t>7/12/2026</a:t>
             </a:fld>
             <a:endParaRPr lang="en-US"/>
           </a:p>
@@ -833,7 +833,7 @@
           <a:p>
             <a:fld id="{5BCAD085-E8A6-8845-BD4E-CB4CCA059FC4}" type="datetimeFigureOut">
               <a:rPr lang="en-US" smtClean="0"/>
-              <a:t>7/10/2026</a:t>
+              <a:t>7/12/2026</a:t>
             </a:fld>
             <a:endParaRPr lang="en-US"/>
           </a:p>
@@ -1078,7 +1078,7 @@
           <a:p>
             <a:fld id="{5BCAD085-E8A6-8845-BD4E-CB4CCA059FC4}" type="datetimeFigureOut">
               <a:rPr lang="en-US" smtClean="0"/>
-              <a:t>7/10/2026</a:t>
+              <a:t>7/12/2026</a:t>
             </a:fld>
             <a:endParaRPr lang="en-US"/>
           </a:p>
@@ -1363,7 +1363,7 @@
           <a:p>
             <a:fld id="{5BCAD085-E8A6-8845-BD4E-CB4CCA059FC4}" type="datetimeFigureOut">
               <a:rPr lang="en-US" smtClean="0"/>
-              <a:t>7/10/2026</a:t>
+              <a:t>7/12/2026</a:t>
             </a:fld>
             <a:endParaRPr lang="en-US"/>
           </a:p>
@@ -1782,7 +1782,7 @@
           <a:p>
             <a:fld id="{5BCAD085-E8A6-8845-BD4E-CB4CCA059FC4}" type="datetimeFigureOut">
               <a:rPr lang="en-US" smtClean="0"/>
-              <a:t>7/10/2026</a:t>
+              <a:t>7/12/2026</a:t>
             </a:fld>
             <a:endParaRPr lang="en-US"/>
           </a:p>
@@ -1899,7 +1899,7 @@
           <a:p>
             <a:fld id="{5BCAD085-E8A6-8845-BD4E-CB4CCA059FC4}" type="datetimeFigureOut">
               <a:rPr lang="en-US" smtClean="0"/>
-              <a:t>7/10/2026</a:t>
+              <a:t>7/12/2026</a:t>
             </a:fld>
             <a:endParaRPr lang="en-US"/>
           </a:p>
@@ -1994,7 +1994,7 @@
           <a:p>
             <a:fld id="{5BCAD085-E8A6-8845-BD4E-CB4CCA059FC4}" type="datetimeFigureOut">
               <a:rPr lang="en-US" smtClean="0"/>
-              <a:t>7/10/2026</a:t>
+              <a:t>7/12/2026</a:t>
             </a:fld>
             <a:endParaRPr lang="en-US"/>
           </a:p>
@@ -2269,7 +2269,7 @@
           <a:p>
             <a:fld id="{5BCAD085-E8A6-8845-BD4E-CB4CCA059FC4}" type="datetimeFigureOut">
               <a:rPr lang="en-US" smtClean="0"/>
-              <a:t>7/10/2026</a:t>
+              <a:t>7/12/2026</a:t>
             </a:fld>
             <a:endParaRPr lang="en-US"/>
           </a:p>
@@ -2521,7 +2521,7 @@
           <a:p>
             <a:fld id="{5BCAD085-E8A6-8845-BD4E-CB4CCA059FC4}" type="datetimeFigureOut">
               <a:rPr lang="en-US" smtClean="0"/>
-              <a:t>7/10/2026</a:t>
+              <a:t>7/12/2026</a:t>
             </a:fld>
             <a:endParaRPr lang="en-US"/>
           </a:p>
@@ -2732,7 +2732,7 @@
           <a:p>
             <a:fld id="{5BCAD085-E8A6-8845-BD4E-CB4CCA059FC4}" type="datetimeFigureOut">
               <a:rPr lang="en-US" smtClean="0"/>
-              <a:t>7/10/2026</a:t>
+              <a:t>7/12/2026</a:t>
             </a:fld>
             <a:endParaRPr lang="en-US"/>
           </a:p>
@@ -3690,7 +3690,7 @@
           <a:lstStyle/>
           <a:p>
             <a:pPr algn="ctr"/>
-            <a:endParaRPr/>
+            <a:endParaRPr dirty="0"/>
           </a:p>
         </p:txBody>
       </p:sp>
@@ -4983,7 +4983,7 @@
                 </a:solidFill>
                 <a:latin typeface="Consolas"/>
               </a:rPr>
-              <a:t>~384 lookup / pkt</a:t>
+              <a:t>163 lookup / pkt (reale)</a:t>
             </a:r>
           </a:p>
         </p:txBody>
@@ -5180,7 +5180,7 @@
         </p:nvSpPr>
         <p:spPr>
           <a:xfrm>
-            <a:off x="640080" y="3840480"/>
+            <a:off x="713231" y="4050792"/>
             <a:ext cx="10927080" cy="2286000"/>
           </a:xfrm>
           <a:prstGeom prst="roundRect">
@@ -5227,7 +5227,7 @@
         </p:nvSpPr>
         <p:spPr>
           <a:xfrm>
-            <a:off x="896112" y="4041648"/>
+            <a:off x="969263" y="4123944"/>
             <a:ext cx="10469880" cy="1920240"/>
           </a:xfrm>
           <a:prstGeom prst="rect">
@@ -5253,14 +5253,29 @@
               </a:spcAft>
             </a:pPr>
             <a:r>
-              <a:rPr sz="1350" b="1">
+              <a:rPr sz="1350" b="1" dirty="0">
                 <a:solidFill>
                   <a:srgbClr val="F85149"/>
                 </a:solidFill>
                 <a:latin typeface="Segoe UI"/>
               </a:rPr>
-              <a:t>Come è implementata</a:t>
-            </a:r>
+              <a:t>Come è </a:t>
+            </a:r>
+            <a:r>
+              <a:rPr sz="1350" b="1" dirty="0" err="1">
+                <a:solidFill>
+                  <a:srgbClr val="F85149"/>
+                </a:solidFill>
+                <a:latin typeface="Segoe UI"/>
+              </a:rPr>
+              <a:t>implementata</a:t>
+            </a:r>
+            <a:endParaRPr sz="1350" b="1" dirty="0">
+              <a:solidFill>
+                <a:srgbClr val="F85149"/>
+              </a:solidFill>
+              <a:latin typeface="Segoe UI"/>
+            </a:endParaRPr>
           </a:p>
           <a:p>
             <a:pPr algn="l">
@@ -5275,7 +5290,7 @@
               </a:spcAft>
             </a:pPr>
             <a:r>
-              <a:rPr sz="1100" b="0">
+              <a:rPr sz="1100" b="0" dirty="0">
                 <a:solidFill>
                   <a:srgbClr val="F85149"/>
                 </a:solidFill>
@@ -5284,13 +5299,211 @@
               <a:t>•  </a:t>
             </a:r>
             <a:r>
-              <a:rPr sz="1100" b="0">
-                <a:solidFill>
-                  <a:srgbClr val="8B949E"/>
-                </a:solidFill>
-                <a:latin typeface="Segoe UI"/>
-              </a:rPr>
-              <a:t>Due soli programmi generici: layer_first (hop 0, lettura sparsa del vettore 65-feature) e layer_hidden (hop 1..N-1, denso n_in-&gt;n_out) -- non uno per layer fisso.</a:t>
+              <a:rPr sz="1100" b="0" dirty="0">
+                <a:solidFill>
+                  <a:srgbClr val="8B949E"/>
+                </a:solidFill>
+                <a:latin typeface="Segoe UI"/>
+              </a:rPr>
+              <a:t>Due soli </a:t>
+            </a:r>
+            <a:r>
+              <a:rPr sz="1100" b="0" dirty="0" err="1">
+                <a:solidFill>
+                  <a:srgbClr val="8B949E"/>
+                </a:solidFill>
+                <a:latin typeface="Segoe UI"/>
+              </a:rPr>
+              <a:t>programmi</a:t>
+            </a:r>
+            <a:r>
+              <a:rPr sz="1100" b="0" dirty="0">
+                <a:solidFill>
+                  <a:srgbClr val="8B949E"/>
+                </a:solidFill>
+                <a:latin typeface="Segoe UI"/>
+              </a:rPr>
+              <a:t> </a:t>
+            </a:r>
+            <a:r>
+              <a:rPr sz="1100" b="0" dirty="0" err="1">
+                <a:solidFill>
+                  <a:srgbClr val="8B949E"/>
+                </a:solidFill>
+                <a:latin typeface="Segoe UI"/>
+              </a:rPr>
+              <a:t>generici</a:t>
+            </a:r>
+            <a:r>
+              <a:rPr sz="1100" b="0" dirty="0">
+                <a:solidFill>
+                  <a:srgbClr val="8B949E"/>
+                </a:solidFill>
+                <a:latin typeface="Segoe UI"/>
+              </a:rPr>
+              <a:t>: </a:t>
+            </a:r>
+            <a:r>
+              <a:rPr sz="1100" b="0" dirty="0" err="1">
+                <a:solidFill>
+                  <a:srgbClr val="8B949E"/>
+                </a:solidFill>
+                <a:latin typeface="Segoe UI"/>
+              </a:rPr>
+              <a:t>layer_first</a:t>
+            </a:r>
+            <a:r>
+              <a:rPr sz="1100" b="0" dirty="0">
+                <a:solidFill>
+                  <a:srgbClr val="8B949E"/>
+                </a:solidFill>
+                <a:latin typeface="Segoe UI"/>
+              </a:rPr>
+              <a:t> (hop 0, </a:t>
+            </a:r>
+            <a:r>
+              <a:rPr sz="1100" b="0" dirty="0" err="1">
+                <a:solidFill>
+                  <a:srgbClr val="8B949E"/>
+                </a:solidFill>
+                <a:latin typeface="Segoe UI"/>
+              </a:rPr>
+              <a:t>lettura</a:t>
+            </a:r>
+            <a:r>
+              <a:rPr sz="1100" b="0" dirty="0">
+                <a:solidFill>
+                  <a:srgbClr val="8B949E"/>
+                </a:solidFill>
+                <a:latin typeface="Segoe UI"/>
+              </a:rPr>
+              <a:t> </a:t>
+            </a:r>
+            <a:r>
+              <a:rPr sz="1100" b="0" dirty="0" err="1">
+                <a:solidFill>
+                  <a:srgbClr val="8B949E"/>
+                </a:solidFill>
+                <a:latin typeface="Segoe UI"/>
+              </a:rPr>
+              <a:t>sparsa</a:t>
+            </a:r>
+            <a:r>
+              <a:rPr sz="1100" b="0" dirty="0">
+                <a:solidFill>
+                  <a:srgbClr val="8B949E"/>
+                </a:solidFill>
+                <a:latin typeface="Segoe UI"/>
+              </a:rPr>
+              <a:t> del </a:t>
+            </a:r>
+            <a:r>
+              <a:rPr sz="1100" b="0" dirty="0" err="1">
+                <a:solidFill>
+                  <a:srgbClr val="8B949E"/>
+                </a:solidFill>
+                <a:latin typeface="Segoe UI"/>
+              </a:rPr>
+              <a:t>vettore</a:t>
+            </a:r>
+            <a:r>
+              <a:rPr sz="1100" b="0" dirty="0">
+                <a:solidFill>
+                  <a:srgbClr val="8B949E"/>
+                </a:solidFill>
+                <a:latin typeface="Segoe UI"/>
+              </a:rPr>
+              <a:t> 65-feature) e </a:t>
+            </a:r>
+            <a:r>
+              <a:rPr sz="1100" b="0" dirty="0" err="1">
+                <a:solidFill>
+                  <a:srgbClr val="8B949E"/>
+                </a:solidFill>
+                <a:latin typeface="Segoe UI"/>
+              </a:rPr>
+              <a:t>layer_hidden</a:t>
+            </a:r>
+            <a:r>
+              <a:rPr sz="1100" b="0" dirty="0">
+                <a:solidFill>
+                  <a:srgbClr val="8B949E"/>
+                </a:solidFill>
+                <a:latin typeface="Segoe UI"/>
+              </a:rPr>
+              <a:t> (hop 1..N-1, </a:t>
+            </a:r>
+            <a:r>
+              <a:rPr sz="1100" b="0" dirty="0" err="1">
+                <a:solidFill>
+                  <a:srgbClr val="8B949E"/>
+                </a:solidFill>
+                <a:latin typeface="Segoe UI"/>
+              </a:rPr>
+              <a:t>denso</a:t>
+            </a:r>
+            <a:r>
+              <a:rPr sz="1100" b="0" dirty="0">
+                <a:solidFill>
+                  <a:srgbClr val="8B949E"/>
+                </a:solidFill>
+                <a:latin typeface="Segoe UI"/>
+              </a:rPr>
+              <a:t> </a:t>
+            </a:r>
+            <a:r>
+              <a:rPr sz="1100" b="0" dirty="0" err="1">
+                <a:solidFill>
+                  <a:srgbClr val="8B949E"/>
+                </a:solidFill>
+                <a:latin typeface="Segoe UI"/>
+              </a:rPr>
+              <a:t>n_in</a:t>
+            </a:r>
+            <a:r>
+              <a:rPr sz="1100" b="0" dirty="0">
+                <a:solidFill>
+                  <a:srgbClr val="8B949E"/>
+                </a:solidFill>
+                <a:latin typeface="Segoe UI"/>
+              </a:rPr>
+              <a:t>-&gt;</a:t>
+            </a:r>
+            <a:r>
+              <a:rPr sz="1100" b="0" dirty="0" err="1">
+                <a:solidFill>
+                  <a:srgbClr val="8B949E"/>
+                </a:solidFill>
+                <a:latin typeface="Segoe UI"/>
+              </a:rPr>
+              <a:t>n_out</a:t>
+            </a:r>
+            <a:r>
+              <a:rPr sz="1100" b="0" dirty="0">
+                <a:solidFill>
+                  <a:srgbClr val="8B949E"/>
+                </a:solidFill>
+                <a:latin typeface="Segoe UI"/>
+              </a:rPr>
+              <a:t>) -- non uno per layer </a:t>
+            </a:r>
+            <a:r>
+              <a:rPr sz="1100" b="0" dirty="0" err="1">
+                <a:solidFill>
+                  <a:srgbClr val="8B949E"/>
+                </a:solidFill>
+                <a:latin typeface="Segoe UI"/>
+              </a:rPr>
+              <a:t>fisso</a:t>
+            </a:r>
+            <a:r>
+              <a:rPr sz="1100" b="0" dirty="0">
+                <a:solidFill>
+                  <a:srgbClr val="8B949E"/>
+                </a:solidFill>
+                <a:latin typeface="Segoe UI"/>
+              </a:rPr>
+              <a:t>.</a:t>
             </a:r>
           </a:p>
           <a:p>
@@ -5306,7 +5519,7 @@
               </a:spcAft>
             </a:pPr>
             <a:r>
-              <a:rPr sz="1100" b="0">
+              <a:rPr sz="1100" b="0" dirty="0">
                 <a:solidFill>
                   <a:srgbClr val="F85149"/>
                 </a:solidFill>
@@ -5315,13 +5528,184 @@
               <a:t>•  </a:t>
             </a:r>
             <a:r>
-              <a:rPr sz="1100" b="0">
-                <a:solidFill>
-                  <a:srgbClr val="8B949E"/>
-                </a:solidFill>
-                <a:latin typeface="Segoe UI"/>
-              </a:rPr>
-              <a:t>Profondita E larghezza sono dinamiche: layer_registry/layer_shapes dicono a runtime quanti layer ha il modello e la forma di ciascuno.</a:t>
+              <a:rPr sz="1100" b="0" dirty="0" err="1">
+                <a:solidFill>
+                  <a:srgbClr val="8B949E"/>
+                </a:solidFill>
+                <a:latin typeface="Segoe UI"/>
+              </a:rPr>
+              <a:t>Profondita</a:t>
+            </a:r>
+            <a:r>
+              <a:rPr sz="1100" b="0" dirty="0">
+                <a:solidFill>
+                  <a:srgbClr val="8B949E"/>
+                </a:solidFill>
+                <a:latin typeface="Segoe UI"/>
+              </a:rPr>
+              <a:t> E </a:t>
+            </a:r>
+            <a:r>
+              <a:rPr sz="1100" b="0" dirty="0" err="1">
+                <a:solidFill>
+                  <a:srgbClr val="8B949E"/>
+                </a:solidFill>
+                <a:latin typeface="Segoe UI"/>
+              </a:rPr>
+              <a:t>larghezza</a:t>
+            </a:r>
+            <a:r>
+              <a:rPr sz="1100" b="0" dirty="0">
+                <a:solidFill>
+                  <a:srgbClr val="8B949E"/>
+                </a:solidFill>
+                <a:latin typeface="Segoe UI"/>
+              </a:rPr>
+              <a:t> </a:t>
+            </a:r>
+            <a:r>
+              <a:rPr sz="1100" b="0" dirty="0" err="1">
+                <a:solidFill>
+                  <a:srgbClr val="8B949E"/>
+                </a:solidFill>
+                <a:latin typeface="Segoe UI"/>
+              </a:rPr>
+              <a:t>sono</a:t>
+            </a:r>
+            <a:r>
+              <a:rPr sz="1100" b="0" dirty="0">
+                <a:solidFill>
+                  <a:srgbClr val="8B949E"/>
+                </a:solidFill>
+                <a:latin typeface="Segoe UI"/>
+              </a:rPr>
+              <a:t> </a:t>
+            </a:r>
+            <a:r>
+              <a:rPr sz="1100" b="0" dirty="0" err="1">
+                <a:solidFill>
+                  <a:srgbClr val="8B949E"/>
+                </a:solidFill>
+                <a:latin typeface="Segoe UI"/>
+              </a:rPr>
+              <a:t>dinamiche</a:t>
+            </a:r>
+            <a:r>
+              <a:rPr sz="1100" b="0" dirty="0">
+                <a:solidFill>
+                  <a:srgbClr val="8B949E"/>
+                </a:solidFill>
+                <a:latin typeface="Segoe UI"/>
+              </a:rPr>
+              <a:t>: </a:t>
+            </a:r>
+            <a:r>
+              <a:rPr sz="1100" b="0" dirty="0" err="1">
+                <a:solidFill>
+                  <a:srgbClr val="8B949E"/>
+                </a:solidFill>
+                <a:latin typeface="Segoe UI"/>
+              </a:rPr>
+              <a:t>layer_registry</a:t>
+            </a:r>
+            <a:r>
+              <a:rPr sz="1100" b="0" dirty="0">
+                <a:solidFill>
+                  <a:srgbClr val="8B949E"/>
+                </a:solidFill>
+                <a:latin typeface="Segoe UI"/>
+              </a:rPr>
+              <a:t>/</a:t>
+            </a:r>
+            <a:r>
+              <a:rPr sz="1100" b="0" dirty="0" err="1">
+                <a:solidFill>
+                  <a:srgbClr val="8B949E"/>
+                </a:solidFill>
+                <a:latin typeface="Segoe UI"/>
+              </a:rPr>
+              <a:t>layer_shapes</a:t>
+            </a:r>
+            <a:r>
+              <a:rPr sz="1100" b="0" dirty="0">
+                <a:solidFill>
+                  <a:srgbClr val="8B949E"/>
+                </a:solidFill>
+                <a:latin typeface="Segoe UI"/>
+              </a:rPr>
+              <a:t> </a:t>
+            </a:r>
+            <a:r>
+              <a:rPr sz="1100" b="0" dirty="0" err="1">
+                <a:solidFill>
+                  <a:srgbClr val="8B949E"/>
+                </a:solidFill>
+                <a:latin typeface="Segoe UI"/>
+              </a:rPr>
+              <a:t>dicono</a:t>
+            </a:r>
+            <a:r>
+              <a:rPr sz="1100" b="0" dirty="0">
+                <a:solidFill>
+                  <a:srgbClr val="8B949E"/>
+                </a:solidFill>
+                <a:latin typeface="Segoe UI"/>
+              </a:rPr>
+              <a:t> a runtime </a:t>
+            </a:r>
+            <a:r>
+              <a:rPr sz="1100" b="0" dirty="0" err="1">
+                <a:solidFill>
+                  <a:srgbClr val="8B949E"/>
+                </a:solidFill>
+                <a:latin typeface="Segoe UI"/>
+              </a:rPr>
+              <a:t>quanti</a:t>
+            </a:r>
+            <a:r>
+              <a:rPr sz="1100" b="0" dirty="0">
+                <a:solidFill>
+                  <a:srgbClr val="8B949E"/>
+                </a:solidFill>
+                <a:latin typeface="Segoe UI"/>
+              </a:rPr>
+              <a:t> layer ha il </a:t>
+            </a:r>
+            <a:r>
+              <a:rPr sz="1100" b="0" dirty="0" err="1">
+                <a:solidFill>
+                  <a:srgbClr val="8B949E"/>
+                </a:solidFill>
+                <a:latin typeface="Segoe UI"/>
+              </a:rPr>
+              <a:t>modello</a:t>
+            </a:r>
+            <a:r>
+              <a:rPr sz="1100" b="0" dirty="0">
+                <a:solidFill>
+                  <a:srgbClr val="8B949E"/>
+                </a:solidFill>
+                <a:latin typeface="Segoe UI"/>
+              </a:rPr>
+              <a:t> e la forma di </a:t>
+            </a:r>
+            <a:r>
+              <a:rPr sz="1100" b="0" dirty="0" err="1">
+                <a:solidFill>
+                  <a:srgbClr val="8B949E"/>
+                </a:solidFill>
+                <a:latin typeface="Segoe UI"/>
+              </a:rPr>
+              <a:t>ciascuno</a:t>
+            </a:r>
+            <a:r>
+              <a:rPr sz="1100" b="0" dirty="0">
+                <a:solidFill>
+                  <a:srgbClr val="8B949E"/>
+                </a:solidFill>
+                <a:latin typeface="Segoe UI"/>
+              </a:rPr>
+              <a:t>.</a:t>
             </a:r>
           </a:p>
           <a:p>
@@ -5337,7 +5721,7 @@
               </a:spcAft>
             </a:pPr>
             <a:r>
-              <a:rPr sz="1100" b="0">
+              <a:rPr sz="1100" b="0" dirty="0">
                 <a:solidFill>
                   <a:srgbClr val="F85149"/>
                 </a:solidFill>
@@ -5346,13 +5730,211 @@
               <a:t>•  </a:t>
             </a:r>
             <a:r>
-              <a:rPr sz="1100" b="0">
-                <a:solidFill>
-                  <a:srgbClr val="8B949E"/>
-                </a:solidFill>
-                <a:latin typeface="Segoe UI"/>
-              </a:rPr>
-              <a:t>“Ultimo layer” e' deciso dai dati (layer_idx+1==n_layers), non da quale programma occupa lo slot di tail-call -- modelli con profondita diverse condividono lo stesso chain senza conflitti.</a:t>
+              <a:rPr sz="1100" b="0" dirty="0">
+                <a:solidFill>
+                  <a:srgbClr val="8B949E"/>
+                </a:solidFill>
+                <a:latin typeface="Segoe UI"/>
+              </a:rPr>
+              <a:t>“Ultimo layer” e' </a:t>
+            </a:r>
+            <a:r>
+              <a:rPr sz="1100" b="0" dirty="0" err="1">
+                <a:solidFill>
+                  <a:srgbClr val="8B949E"/>
+                </a:solidFill>
+                <a:latin typeface="Segoe UI"/>
+              </a:rPr>
+              <a:t>deciso</a:t>
+            </a:r>
+            <a:r>
+              <a:rPr sz="1100" b="0" dirty="0">
+                <a:solidFill>
+                  <a:srgbClr val="8B949E"/>
+                </a:solidFill>
+                <a:latin typeface="Segoe UI"/>
+              </a:rPr>
+              <a:t> </a:t>
+            </a:r>
+            <a:r>
+              <a:rPr sz="1100" b="0" dirty="0" err="1">
+                <a:solidFill>
+                  <a:srgbClr val="8B949E"/>
+                </a:solidFill>
+                <a:latin typeface="Segoe UI"/>
+              </a:rPr>
+              <a:t>dai</a:t>
+            </a:r>
+            <a:r>
+              <a:rPr sz="1100" b="0" dirty="0">
+                <a:solidFill>
+                  <a:srgbClr val="8B949E"/>
+                </a:solidFill>
+                <a:latin typeface="Segoe UI"/>
+              </a:rPr>
+              <a:t> </a:t>
+            </a:r>
+            <a:r>
+              <a:rPr sz="1100" b="0" dirty="0" err="1">
+                <a:solidFill>
+                  <a:srgbClr val="8B949E"/>
+                </a:solidFill>
+                <a:latin typeface="Segoe UI"/>
+              </a:rPr>
+              <a:t>dati</a:t>
+            </a:r>
+            <a:r>
+              <a:rPr sz="1100" b="0" dirty="0">
+                <a:solidFill>
+                  <a:srgbClr val="8B949E"/>
+                </a:solidFill>
+                <a:latin typeface="Segoe UI"/>
+              </a:rPr>
+              <a:t> (layer_idx+1==</a:t>
+            </a:r>
+            <a:r>
+              <a:rPr sz="1100" b="0" dirty="0" err="1">
+                <a:solidFill>
+                  <a:srgbClr val="8B949E"/>
+                </a:solidFill>
+                <a:latin typeface="Segoe UI"/>
+              </a:rPr>
+              <a:t>n_layers</a:t>
+            </a:r>
+            <a:r>
+              <a:rPr sz="1100" b="0" dirty="0">
+                <a:solidFill>
+                  <a:srgbClr val="8B949E"/>
+                </a:solidFill>
+                <a:latin typeface="Segoe UI"/>
+              </a:rPr>
+              <a:t>), non da quale </a:t>
+            </a:r>
+            <a:r>
+              <a:rPr sz="1100" b="0" dirty="0" err="1">
+                <a:solidFill>
+                  <a:srgbClr val="8B949E"/>
+                </a:solidFill>
+                <a:latin typeface="Segoe UI"/>
+              </a:rPr>
+              <a:t>programma</a:t>
+            </a:r>
+            <a:r>
+              <a:rPr sz="1100" b="0" dirty="0">
+                <a:solidFill>
+                  <a:srgbClr val="8B949E"/>
+                </a:solidFill>
+                <a:latin typeface="Segoe UI"/>
+              </a:rPr>
+              <a:t> </a:t>
+            </a:r>
+            <a:r>
+              <a:rPr sz="1100" b="0" dirty="0" err="1">
+                <a:solidFill>
+                  <a:srgbClr val="8B949E"/>
+                </a:solidFill>
+                <a:latin typeface="Segoe UI"/>
+              </a:rPr>
+              <a:t>occupa</a:t>
+            </a:r>
+            <a:r>
+              <a:rPr sz="1100" b="0" dirty="0">
+                <a:solidFill>
+                  <a:srgbClr val="8B949E"/>
+                </a:solidFill>
+                <a:latin typeface="Segoe UI"/>
+              </a:rPr>
+              <a:t> lo slot di tail-call -- </a:t>
+            </a:r>
+            <a:r>
+              <a:rPr sz="1100" b="0" dirty="0" err="1">
+                <a:solidFill>
+                  <a:srgbClr val="8B949E"/>
+                </a:solidFill>
+                <a:latin typeface="Segoe UI"/>
+              </a:rPr>
+              <a:t>modelli</a:t>
+            </a:r>
+            <a:r>
+              <a:rPr sz="1100" b="0" dirty="0">
+                <a:solidFill>
+                  <a:srgbClr val="8B949E"/>
+                </a:solidFill>
+                <a:latin typeface="Segoe UI"/>
+              </a:rPr>
+              <a:t> con </a:t>
+            </a:r>
+            <a:r>
+              <a:rPr sz="1100" b="0" dirty="0" err="1">
+                <a:solidFill>
+                  <a:srgbClr val="8B949E"/>
+                </a:solidFill>
+                <a:latin typeface="Segoe UI"/>
+              </a:rPr>
+              <a:t>profondita</a:t>
+            </a:r>
+            <a:r>
+              <a:rPr sz="1100" b="0" dirty="0">
+                <a:solidFill>
+                  <a:srgbClr val="8B949E"/>
+                </a:solidFill>
+                <a:latin typeface="Segoe UI"/>
+              </a:rPr>
+              <a:t> diverse </a:t>
+            </a:r>
+            <a:r>
+              <a:rPr sz="1100" b="0" dirty="0" err="1">
+                <a:solidFill>
+                  <a:srgbClr val="8B949E"/>
+                </a:solidFill>
+                <a:latin typeface="Segoe UI"/>
+              </a:rPr>
+              <a:t>condividono</a:t>
+            </a:r>
+            <a:r>
+              <a:rPr sz="1100" b="0" dirty="0">
+                <a:solidFill>
+                  <a:srgbClr val="8B949E"/>
+                </a:solidFill>
+                <a:latin typeface="Segoe UI"/>
+              </a:rPr>
+              <a:t> lo </a:t>
+            </a:r>
+            <a:r>
+              <a:rPr sz="1100" b="0" dirty="0" err="1">
+                <a:solidFill>
+                  <a:srgbClr val="8B949E"/>
+                </a:solidFill>
+                <a:latin typeface="Segoe UI"/>
+              </a:rPr>
+              <a:t>stesso</a:t>
+            </a:r>
+            <a:r>
+              <a:rPr sz="1100" b="0" dirty="0">
+                <a:solidFill>
+                  <a:srgbClr val="8B949E"/>
+                </a:solidFill>
+                <a:latin typeface="Segoe UI"/>
+              </a:rPr>
+              <a:t> chain senza </a:t>
+            </a:r>
+            <a:r>
+              <a:rPr sz="1100" b="0" dirty="0" err="1">
+                <a:solidFill>
+                  <a:srgbClr val="8B949E"/>
+                </a:solidFill>
+                <a:latin typeface="Segoe UI"/>
+              </a:rPr>
+              <a:t>conflitti</a:t>
+            </a:r>
+            <a:r>
+              <a:rPr sz="1100" b="0" dirty="0">
+                <a:solidFill>
+                  <a:srgbClr val="8B949E"/>
+                </a:solidFill>
+                <a:latin typeface="Segoe UI"/>
+              </a:rPr>
+              <a:t>.</a:t>
             </a:r>
           </a:p>
           <a:p>
@@ -5368,7 +5950,7 @@
               </a:spcAft>
             </a:pPr>
             <a:r>
-              <a:rPr sz="1100" b="0">
+              <a:rPr sz="1100" b="0" dirty="0">
                 <a:solidFill>
                   <a:srgbClr val="F85149"/>
                 </a:solidFill>
@@ -5377,13 +5959,211 @@
               <a:t>•  </a:t>
             </a:r>
             <a:r>
-              <a:rPr sz="1100" b="0">
-                <a:solidFill>
-                  <a:srgbClr val="8B949E"/>
-                </a:solidFill>
-                <a:latin typeface="Segoe UI"/>
-              </a:rPr>
-              <a:t>N tail call reali per pacchetto (dipende dalla profondita del modello); l’ultimo hop calcola argmax -&gt; mac_table[classe] -&gt; bpf_redirect.</a:t>
+              <a:rPr sz="1100" b="0" dirty="0">
+                <a:solidFill>
+                  <a:srgbClr val="8B949E"/>
+                </a:solidFill>
+                <a:latin typeface="Segoe UI"/>
+              </a:rPr>
+              <a:t>N tail call </a:t>
+            </a:r>
+            <a:r>
+              <a:rPr sz="1100" b="0" dirty="0" err="1">
+                <a:solidFill>
+                  <a:srgbClr val="8B949E"/>
+                </a:solidFill>
+                <a:latin typeface="Segoe UI"/>
+              </a:rPr>
+              <a:t>reali</a:t>
+            </a:r>
+            <a:r>
+              <a:rPr sz="1100" b="0" dirty="0">
+                <a:solidFill>
+                  <a:srgbClr val="8B949E"/>
+                </a:solidFill>
+                <a:latin typeface="Segoe UI"/>
+              </a:rPr>
+              <a:t> per </a:t>
+            </a:r>
+            <a:r>
+              <a:rPr sz="1100" b="0" dirty="0" err="1">
+                <a:solidFill>
+                  <a:srgbClr val="8B949E"/>
+                </a:solidFill>
+                <a:latin typeface="Segoe UI"/>
+              </a:rPr>
+              <a:t>pacchetto</a:t>
+            </a:r>
+            <a:r>
+              <a:rPr sz="1100" b="0" dirty="0">
+                <a:solidFill>
+                  <a:srgbClr val="8B949E"/>
+                </a:solidFill>
+                <a:latin typeface="Segoe UI"/>
+              </a:rPr>
+              <a:t> (</a:t>
+            </a:r>
+            <a:r>
+              <a:rPr sz="1100" b="0" dirty="0" err="1">
+                <a:solidFill>
+                  <a:srgbClr val="8B949E"/>
+                </a:solidFill>
+                <a:latin typeface="Segoe UI"/>
+              </a:rPr>
+              <a:t>dipende</a:t>
+            </a:r>
+            <a:r>
+              <a:rPr sz="1100" b="0" dirty="0">
+                <a:solidFill>
+                  <a:srgbClr val="8B949E"/>
+                </a:solidFill>
+                <a:latin typeface="Segoe UI"/>
+              </a:rPr>
+              <a:t> </a:t>
+            </a:r>
+            <a:r>
+              <a:rPr sz="1100" b="0" dirty="0" err="1">
+                <a:solidFill>
+                  <a:srgbClr val="8B949E"/>
+                </a:solidFill>
+                <a:latin typeface="Segoe UI"/>
+              </a:rPr>
+              <a:t>dalla</a:t>
+            </a:r>
+            <a:r>
+              <a:rPr sz="1100" b="0" dirty="0">
+                <a:solidFill>
+                  <a:srgbClr val="8B949E"/>
+                </a:solidFill>
+                <a:latin typeface="Segoe UI"/>
+              </a:rPr>
+              <a:t> </a:t>
+            </a:r>
+            <a:r>
+              <a:rPr sz="1100" b="0" dirty="0" err="1">
+                <a:solidFill>
+                  <a:srgbClr val="8B949E"/>
+                </a:solidFill>
+                <a:latin typeface="Segoe UI"/>
+              </a:rPr>
+              <a:t>profondita</a:t>
+            </a:r>
+            <a:r>
+              <a:rPr sz="1100" b="0" dirty="0">
+                <a:solidFill>
+                  <a:srgbClr val="8B949E"/>
+                </a:solidFill>
+                <a:latin typeface="Segoe UI"/>
+              </a:rPr>
+              <a:t> del </a:t>
+            </a:r>
+            <a:r>
+              <a:rPr sz="1100" b="0" dirty="0" err="1">
+                <a:solidFill>
+                  <a:srgbClr val="8B949E"/>
+                </a:solidFill>
+                <a:latin typeface="Segoe UI"/>
+              </a:rPr>
+              <a:t>modello</a:t>
+            </a:r>
+            <a:r>
+              <a:rPr sz="1100" b="0" dirty="0">
+                <a:solidFill>
+                  <a:srgbClr val="8B949E"/>
+                </a:solidFill>
+                <a:latin typeface="Segoe UI"/>
+              </a:rPr>
+              <a:t>); </a:t>
+            </a:r>
+            <a:r>
+              <a:rPr sz="1100" b="0" dirty="0" err="1">
+                <a:solidFill>
+                  <a:srgbClr val="8B949E"/>
+                </a:solidFill>
+                <a:latin typeface="Segoe UI"/>
+              </a:rPr>
+              <a:t>l’ultimo</a:t>
+            </a:r>
+            <a:r>
+              <a:rPr sz="1100" b="0" dirty="0">
+                <a:solidFill>
+                  <a:srgbClr val="8B949E"/>
+                </a:solidFill>
+                <a:latin typeface="Segoe UI"/>
+              </a:rPr>
+              <a:t> hop </a:t>
+            </a:r>
+            <a:r>
+              <a:rPr sz="1100" b="0" dirty="0" err="1">
+                <a:solidFill>
+                  <a:srgbClr val="8B949E"/>
+                </a:solidFill>
+                <a:latin typeface="Segoe UI"/>
+              </a:rPr>
+              <a:t>calcola</a:t>
+            </a:r>
+            <a:r>
+              <a:rPr sz="1100" b="0" dirty="0">
+                <a:solidFill>
+                  <a:srgbClr val="8B949E"/>
+                </a:solidFill>
+                <a:latin typeface="Segoe UI"/>
+              </a:rPr>
+              <a:t> argmax -&gt; </a:t>
+            </a:r>
+            <a:r>
+              <a:rPr sz="1100" b="0" dirty="0" err="1">
+                <a:solidFill>
+                  <a:srgbClr val="8B949E"/>
+                </a:solidFill>
+                <a:latin typeface="Segoe UI"/>
+              </a:rPr>
+              <a:t>mac_table</a:t>
+            </a:r>
+            <a:r>
+              <a:rPr sz="1100" b="0" dirty="0">
+                <a:solidFill>
+                  <a:srgbClr val="8B949E"/>
+                </a:solidFill>
+                <a:latin typeface="Segoe UI"/>
+              </a:rPr>
+              <a:t>[</a:t>
+            </a:r>
+            <a:r>
+              <a:rPr sz="1100" b="0" dirty="0" err="1">
+                <a:solidFill>
+                  <a:srgbClr val="8B949E"/>
+                </a:solidFill>
+                <a:latin typeface="Segoe UI"/>
+              </a:rPr>
+              <a:t>classe</a:t>
+            </a:r>
+            <a:r>
+              <a:rPr sz="1100" b="0" dirty="0">
+                <a:solidFill>
+                  <a:srgbClr val="8B949E"/>
+                </a:solidFill>
+                <a:latin typeface="Segoe UI"/>
+              </a:rPr>
+              <a:t>] -&gt; </a:t>
+            </a:r>
+            <a:r>
+              <a:rPr sz="1100" b="0" dirty="0" err="1">
+                <a:solidFill>
+                  <a:srgbClr val="8B949E"/>
+                </a:solidFill>
+                <a:latin typeface="Segoe UI"/>
+              </a:rPr>
+              <a:t>bpf_redirect</a:t>
+            </a:r>
+            <a:r>
+              <a:rPr sz="1100" b="0" dirty="0">
+                <a:solidFill>
+                  <a:srgbClr val="8B949E"/>
+                </a:solidFill>
+                <a:latin typeface="Segoe UI"/>
+              </a:rPr>
+              <a:t>.</a:t>
             </a:r>
           </a:p>
           <a:p>
@@ -5399,7 +6179,7 @@
               </a:spcAft>
             </a:pPr>
             <a:r>
-              <a:rPr sz="1100" b="0">
+              <a:rPr sz="1100" b="0" dirty="0">
                 <a:solidFill>
                   <a:srgbClr val="F85149"/>
                 </a:solidFill>
@@ -5408,13 +6188,211 @@
               <a:t>•  </a:t>
             </a:r>
             <a:r>
-              <a:rPr sz="1100" b="0">
-                <a:solidFill>
-                  <a:srgbClr val="8B949E"/>
-                </a:solidFill>
-                <a:latin typeface="Segoe UI"/>
-              </a:rPr>
-              <a:t>Aggiornamento = load_modular_weights() scrive pesi + layer_shapes + layer_registry (nuova lista layer): cambia profondita E larghezza senza reload dei 2 programmi eBPF.</a:t>
+              <a:rPr sz="1100" b="0" dirty="0">
+                <a:solidFill>
+                  <a:srgbClr val="8B949E"/>
+                </a:solidFill>
+                <a:latin typeface="Segoe UI"/>
+              </a:rPr>
+              <a:t>Aggiornamento = </a:t>
+            </a:r>
+            <a:r>
+              <a:rPr sz="1100" b="0" dirty="0" err="1">
+                <a:solidFill>
+                  <a:srgbClr val="8B949E"/>
+                </a:solidFill>
+                <a:latin typeface="Segoe UI"/>
+              </a:rPr>
+              <a:t>load_modular_weights</a:t>
+            </a:r>
+            <a:r>
+              <a:rPr sz="1100" b="0" dirty="0">
+                <a:solidFill>
+                  <a:srgbClr val="8B949E"/>
+                </a:solidFill>
+                <a:latin typeface="Segoe UI"/>
+              </a:rPr>
+              <a:t>() scrive </a:t>
+            </a:r>
+            <a:r>
+              <a:rPr sz="1100" b="0" dirty="0" err="1">
+                <a:solidFill>
+                  <a:srgbClr val="8B949E"/>
+                </a:solidFill>
+                <a:latin typeface="Segoe UI"/>
+              </a:rPr>
+              <a:t>pesi</a:t>
+            </a:r>
+            <a:r>
+              <a:rPr sz="1100" b="0" dirty="0">
+                <a:solidFill>
+                  <a:srgbClr val="8B949E"/>
+                </a:solidFill>
+                <a:latin typeface="Segoe UI"/>
+              </a:rPr>
+              <a:t> + </a:t>
+            </a:r>
+            <a:r>
+              <a:rPr sz="1100" b="0" dirty="0" err="1">
+                <a:solidFill>
+                  <a:srgbClr val="8B949E"/>
+                </a:solidFill>
+                <a:latin typeface="Segoe UI"/>
+              </a:rPr>
+              <a:t>layer_shapes</a:t>
+            </a:r>
+            <a:r>
+              <a:rPr sz="1100" b="0" dirty="0">
+                <a:solidFill>
+                  <a:srgbClr val="8B949E"/>
+                </a:solidFill>
+                <a:latin typeface="Segoe UI"/>
+              </a:rPr>
+              <a:t> + </a:t>
+            </a:r>
+            <a:r>
+              <a:rPr sz="1100" b="0" dirty="0" err="1">
+                <a:solidFill>
+                  <a:srgbClr val="8B949E"/>
+                </a:solidFill>
+                <a:latin typeface="Segoe UI"/>
+              </a:rPr>
+              <a:t>layer_registry</a:t>
+            </a:r>
+            <a:r>
+              <a:rPr sz="1100" b="0" dirty="0">
+                <a:solidFill>
+                  <a:srgbClr val="8B949E"/>
+                </a:solidFill>
+                <a:latin typeface="Segoe UI"/>
+              </a:rPr>
+              <a:t> (</a:t>
+            </a:r>
+            <a:r>
+              <a:rPr sz="1100" b="0" dirty="0" err="1">
+                <a:solidFill>
+                  <a:srgbClr val="8B949E"/>
+                </a:solidFill>
+                <a:latin typeface="Segoe UI"/>
+              </a:rPr>
+              <a:t>nuova</a:t>
+            </a:r>
+            <a:r>
+              <a:rPr sz="1100" b="0" dirty="0">
+                <a:solidFill>
+                  <a:srgbClr val="8B949E"/>
+                </a:solidFill>
+                <a:latin typeface="Segoe UI"/>
+              </a:rPr>
+              <a:t> </a:t>
+            </a:r>
+            <a:r>
+              <a:rPr sz="1100" b="0" dirty="0" err="1">
+                <a:solidFill>
+                  <a:srgbClr val="8B949E"/>
+                </a:solidFill>
+                <a:latin typeface="Segoe UI"/>
+              </a:rPr>
+              <a:t>lista</a:t>
+            </a:r>
+            <a:r>
+              <a:rPr sz="1100" b="0" dirty="0">
+                <a:solidFill>
+                  <a:srgbClr val="8B949E"/>
+                </a:solidFill>
+                <a:latin typeface="Segoe UI"/>
+              </a:rPr>
+              <a:t> layer): cambia </a:t>
+            </a:r>
+            <a:r>
+              <a:rPr sz="1100" b="0" dirty="0" err="1">
+                <a:solidFill>
+                  <a:srgbClr val="8B949E"/>
+                </a:solidFill>
+                <a:latin typeface="Segoe UI"/>
+              </a:rPr>
+              <a:t>profondita</a:t>
+            </a:r>
+            <a:r>
+              <a:rPr sz="1100" b="0" dirty="0">
+                <a:solidFill>
+                  <a:srgbClr val="8B949E"/>
+                </a:solidFill>
+                <a:latin typeface="Segoe UI"/>
+              </a:rPr>
+              <a:t> E </a:t>
+            </a:r>
+            <a:r>
+              <a:rPr sz="1100" b="0" dirty="0" err="1">
+                <a:solidFill>
+                  <a:srgbClr val="8B949E"/>
+                </a:solidFill>
+                <a:latin typeface="Segoe UI"/>
+              </a:rPr>
+              <a:t>larghezza</a:t>
+            </a:r>
+            <a:r>
+              <a:rPr sz="1100" b="0" dirty="0">
+                <a:solidFill>
+                  <a:srgbClr val="8B949E"/>
+                </a:solidFill>
+                <a:latin typeface="Segoe UI"/>
+              </a:rPr>
+              <a:t> senza reload </a:t>
+            </a:r>
+            <a:r>
+              <a:rPr sz="1100" b="0" dirty="0" err="1">
+                <a:solidFill>
+                  <a:srgbClr val="8B949E"/>
+                </a:solidFill>
+                <a:latin typeface="Segoe UI"/>
+              </a:rPr>
+              <a:t>dei</a:t>
+            </a:r>
+            <a:r>
+              <a:rPr sz="1100" b="0" dirty="0">
+                <a:solidFill>
+                  <a:srgbClr val="8B949E"/>
+                </a:solidFill>
+                <a:latin typeface="Segoe UI"/>
+              </a:rPr>
+              <a:t> 2 </a:t>
+            </a:r>
+            <a:r>
+              <a:rPr sz="1100" b="0" dirty="0" err="1">
+                <a:solidFill>
+                  <a:srgbClr val="8B949E"/>
+                </a:solidFill>
+                <a:latin typeface="Segoe UI"/>
+              </a:rPr>
+              <a:t>programmi</a:t>
+            </a:r>
+            <a:r>
+              <a:rPr sz="1100" b="0" dirty="0">
+                <a:solidFill>
+                  <a:srgbClr val="8B949E"/>
+                </a:solidFill>
+                <a:latin typeface="Segoe UI"/>
+              </a:rPr>
+              <a:t> </a:t>
+            </a:r>
+            <a:r>
+              <a:rPr sz="1100" b="0" dirty="0" err="1">
+                <a:solidFill>
+                  <a:srgbClr val="8B949E"/>
+                </a:solidFill>
+                <a:latin typeface="Segoe UI"/>
+              </a:rPr>
+              <a:t>eBPF</a:t>
+            </a:r>
+            <a:r>
+              <a:rPr sz="1100" b="0" dirty="0">
+                <a:solidFill>
+                  <a:srgbClr val="8B949E"/>
+                </a:solidFill>
+                <a:latin typeface="Segoe UI"/>
+              </a:rPr>
+              <a:t>.</a:t>
             </a:r>
           </a:p>
           <a:p>
@@ -5430,7 +6408,7 @@
               </a:spcAft>
             </a:pPr>
             <a:r>
-              <a:rPr sz="1100" b="0">
+              <a:rPr sz="1100" b="0" dirty="0">
                 <a:solidFill>
                   <a:srgbClr val="F85149"/>
                 </a:solidFill>
@@ -5439,13 +6417,184 @@
               <a:t>•  </a:t>
             </a:r>
             <a:r>
-              <a:rPr sz="1100" b="0">
-                <a:solidFill>
-                  <a:srgbClr val="8B949E"/>
-                </a:solidFill>
-                <a:latin typeface="Segoe UI"/>
-              </a:rPr>
-              <a:t>Testato: model_id=0 reale 65-4-4-7 (3 layer) + model_id=1 sintetico 65-5-6-4-7 (4 layer, larghezza E profondita diverse) REGISTRATI INSIEME, stessi 2 programmi compilati -- PASS.</a:t>
+              <a:rPr sz="1100" b="0" dirty="0" err="1">
+                <a:solidFill>
+                  <a:srgbClr val="8B949E"/>
+                </a:solidFill>
+                <a:latin typeface="Segoe UI"/>
+              </a:rPr>
+              <a:t>Testato</a:t>
+            </a:r>
+            <a:r>
+              <a:rPr sz="1100" b="0" dirty="0">
+                <a:solidFill>
+                  <a:srgbClr val="8B949E"/>
+                </a:solidFill>
+                <a:latin typeface="Segoe UI"/>
+              </a:rPr>
+              <a:t>: </a:t>
+            </a:r>
+            <a:r>
+              <a:rPr sz="1100" b="0" dirty="0" err="1">
+                <a:solidFill>
+                  <a:srgbClr val="8B949E"/>
+                </a:solidFill>
+                <a:latin typeface="Segoe UI"/>
+              </a:rPr>
+              <a:t>model_id</a:t>
+            </a:r>
+            <a:r>
+              <a:rPr sz="1100" b="0" dirty="0">
+                <a:solidFill>
+                  <a:srgbClr val="8B949E"/>
+                </a:solidFill>
+                <a:latin typeface="Segoe UI"/>
+              </a:rPr>
+              <a:t>=0 </a:t>
+            </a:r>
+            <a:r>
+              <a:rPr sz="1100" b="0" dirty="0" err="1">
+                <a:solidFill>
+                  <a:srgbClr val="8B949E"/>
+                </a:solidFill>
+                <a:latin typeface="Segoe UI"/>
+              </a:rPr>
+              <a:t>reale</a:t>
+            </a:r>
+            <a:r>
+              <a:rPr sz="1100" b="0" dirty="0">
+                <a:solidFill>
+                  <a:srgbClr val="8B949E"/>
+                </a:solidFill>
+                <a:latin typeface="Segoe UI"/>
+              </a:rPr>
+              <a:t> 65-4-4-7 (3 layer) + </a:t>
+            </a:r>
+            <a:r>
+              <a:rPr sz="1100" b="0" dirty="0" err="1">
+                <a:solidFill>
+                  <a:srgbClr val="8B949E"/>
+                </a:solidFill>
+                <a:latin typeface="Segoe UI"/>
+              </a:rPr>
+              <a:t>model_id</a:t>
+            </a:r>
+            <a:r>
+              <a:rPr sz="1100" b="0" dirty="0">
+                <a:solidFill>
+                  <a:srgbClr val="8B949E"/>
+                </a:solidFill>
+                <a:latin typeface="Segoe UI"/>
+              </a:rPr>
+              <a:t>=1 </a:t>
+            </a:r>
+            <a:r>
+              <a:rPr sz="1100" b="0" dirty="0" err="1">
+                <a:solidFill>
+                  <a:srgbClr val="8B949E"/>
+                </a:solidFill>
+                <a:latin typeface="Segoe UI"/>
+              </a:rPr>
+              <a:t>sintetico</a:t>
+            </a:r>
+            <a:r>
+              <a:rPr sz="1100" b="0" dirty="0">
+                <a:solidFill>
+                  <a:srgbClr val="8B949E"/>
+                </a:solidFill>
+                <a:latin typeface="Segoe UI"/>
+              </a:rPr>
+              <a:t> 65-5-6-4-7 (4 layer, </a:t>
+            </a:r>
+            <a:r>
+              <a:rPr sz="1100" b="0" dirty="0" err="1">
+                <a:solidFill>
+                  <a:srgbClr val="8B949E"/>
+                </a:solidFill>
+                <a:latin typeface="Segoe UI"/>
+              </a:rPr>
+              <a:t>larghezza</a:t>
+            </a:r>
+            <a:r>
+              <a:rPr sz="1100" b="0" dirty="0">
+                <a:solidFill>
+                  <a:srgbClr val="8B949E"/>
+                </a:solidFill>
+                <a:latin typeface="Segoe UI"/>
+              </a:rPr>
+              <a:t> E </a:t>
+            </a:r>
+            <a:r>
+              <a:rPr sz="1100" b="0" dirty="0" err="1">
+                <a:solidFill>
+                  <a:srgbClr val="8B949E"/>
+                </a:solidFill>
+                <a:latin typeface="Segoe UI"/>
+              </a:rPr>
+              <a:t>profondita</a:t>
+            </a:r>
+            <a:r>
+              <a:rPr sz="1100" b="0" dirty="0">
+                <a:solidFill>
+                  <a:srgbClr val="8B949E"/>
+                </a:solidFill>
+                <a:latin typeface="Segoe UI"/>
+              </a:rPr>
+              <a:t> diverse) REGISTRATI INSIEME, </a:t>
+            </a:r>
+            <a:r>
+              <a:rPr sz="1100" b="0" dirty="0" err="1">
+                <a:solidFill>
+                  <a:srgbClr val="8B949E"/>
+                </a:solidFill>
+                <a:latin typeface="Segoe UI"/>
+              </a:rPr>
+              <a:t>stessi</a:t>
+            </a:r>
+            <a:r>
+              <a:rPr sz="1100" b="0" dirty="0">
+                <a:solidFill>
+                  <a:srgbClr val="8B949E"/>
+                </a:solidFill>
+                <a:latin typeface="Segoe UI"/>
+              </a:rPr>
+              <a:t> 2 </a:t>
+            </a:r>
+            <a:r>
+              <a:rPr sz="1100" b="0" dirty="0" err="1">
+                <a:solidFill>
+                  <a:srgbClr val="8B949E"/>
+                </a:solidFill>
+                <a:latin typeface="Segoe UI"/>
+              </a:rPr>
+              <a:t>programmi</a:t>
+            </a:r>
+            <a:r>
+              <a:rPr sz="1100" b="0" dirty="0">
+                <a:solidFill>
+                  <a:srgbClr val="8B949E"/>
+                </a:solidFill>
+                <a:latin typeface="Segoe UI"/>
+              </a:rPr>
+              <a:t> </a:t>
+            </a:r>
+            <a:r>
+              <a:rPr sz="1100" b="0" dirty="0" err="1">
+                <a:solidFill>
+                  <a:srgbClr val="8B949E"/>
+                </a:solidFill>
+                <a:latin typeface="Segoe UI"/>
+              </a:rPr>
+              <a:t>compilati</a:t>
+            </a:r>
+            <a:r>
+              <a:rPr sz="1100" b="0" dirty="0">
+                <a:solidFill>
+                  <a:srgbClr val="8B949E"/>
+                </a:solidFill>
+                <a:latin typeface="Segoe UI"/>
+              </a:rPr>
+              <a:t> -- PASS.</a:t>
             </a:r>
           </a:p>
         </p:txBody>
@@ -5742,7 +6891,7 @@
                 </a:solidFill>
                 <a:latin typeface="Segoe UI"/>
               </a:rPr>
-              <a:t>modular_dispatcher (ebpf_modular.py)</a:t>
+              <a:t>modular_dispatcher + layer_first (ebpf_modular.py)</a:t>
             </a:r>
           </a:p>
         </p:txBody>
@@ -5755,7 +6904,7 @@
         </p:nvSpPr>
         <p:spPr>
           <a:xfrm>
-            <a:off x="914400" y="2715768"/>
+            <a:off x="883767" y="2583181"/>
             <a:ext cx="10424159" cy="1188720"/>
           </a:xfrm>
           <a:prstGeom prst="rect">
@@ -5781,13 +6930,49 @@
               </a:spcAft>
             </a:pPr>
             <a:r>
-              <a:rPr sz="1100" b="0">
+              <a:rPr sz="1100" b="0" dirty="0">
                 <a:solidFill>
                   <a:srgbClr val="8B949E"/>
                 </a:solidFill>
                 <a:latin typeface="Consolas"/>
               </a:rPr>
-              <a:t>for (i = 0; i &lt; 65; i++) scratch_acts[i] = 0;    /* azzera */</a:t>
+              <a:t>/* </a:t>
+            </a:r>
+            <a:r>
+              <a:rPr sz="1100" b="0" dirty="0" err="1">
+                <a:solidFill>
+                  <a:srgbClr val="8B949E"/>
+                </a:solidFill>
+                <a:latin typeface="Consolas"/>
+              </a:rPr>
+              <a:t>modular_dispatcher</a:t>
+            </a:r>
+            <a:r>
+              <a:rPr sz="1100" b="0" dirty="0">
+                <a:solidFill>
+                  <a:srgbClr val="8B949E"/>
+                </a:solidFill>
+                <a:latin typeface="Consolas"/>
+              </a:rPr>
+              <a:t>: niente array </a:t>
+            </a:r>
+            <a:r>
+              <a:rPr sz="1100" b="0" dirty="0" err="1">
+                <a:solidFill>
+                  <a:srgbClr val="8B949E"/>
+                </a:solidFill>
+                <a:latin typeface="Consolas"/>
+              </a:rPr>
+              <a:t>denso</a:t>
+            </a:r>
+            <a:r>
+              <a:rPr sz="1100" b="0" dirty="0">
+                <a:solidFill>
+                  <a:srgbClr val="8B949E"/>
+                </a:solidFill>
+                <a:latin typeface="Consolas"/>
+              </a:rPr>
+              <a:t>, solo 5 slot meta */</a:t>
             </a:r>
           </a:p>
           <a:p>
@@ -5803,13 +6988,76 @@
               </a:spcAft>
             </a:pPr>
             <a:r>
-              <a:rPr sz="1100" b="0">
+              <a:rPr sz="1100" b="0" dirty="0" err="1">
                 <a:solidFill>
                   <a:srgbClr val="3FB950"/>
                 </a:solidFill>
                 <a:latin typeface="Consolas"/>
               </a:rPr>
-              <a:t>for (i = 0; i &lt; 6;  i++)                          /* link_state [0..5] */</a:t>
+              <a:t>scratch_meta</a:t>
+            </a:r>
+            <a:r>
+              <a:rPr sz="1100" b="0" dirty="0">
+                <a:solidFill>
+                  <a:srgbClr val="3FB950"/>
+                </a:solidFill>
+                <a:latin typeface="Consolas"/>
+              </a:rPr>
+              <a:t>[MODEL_ID]=</a:t>
+            </a:r>
+            <a:r>
+              <a:rPr sz="1100" b="0" dirty="0" err="1">
+                <a:solidFill>
+                  <a:srgbClr val="3FB950"/>
+                </a:solidFill>
+                <a:latin typeface="Consolas"/>
+              </a:rPr>
+              <a:t>model_id</a:t>
+            </a:r>
+            <a:r>
+              <a:rPr sz="1100" b="0" dirty="0">
+                <a:solidFill>
+                  <a:srgbClr val="3FB950"/>
+                </a:solidFill>
+                <a:latin typeface="Consolas"/>
+              </a:rPr>
+              <a:t>; </a:t>
+            </a:r>
+            <a:r>
+              <a:rPr sz="1100" b="0" dirty="0" err="1">
+                <a:solidFill>
+                  <a:srgbClr val="3FB950"/>
+                </a:solidFill>
+                <a:latin typeface="Consolas"/>
+              </a:rPr>
+              <a:t>scratch_meta</a:t>
+            </a:r>
+            <a:r>
+              <a:rPr sz="1100" b="0" dirty="0">
+                <a:solidFill>
+                  <a:srgbClr val="3FB950"/>
+                </a:solidFill>
+                <a:latin typeface="Consolas"/>
+              </a:rPr>
+              <a:t>[SCALE]=scale; </a:t>
+            </a:r>
+            <a:r>
+              <a:rPr sz="1100" b="0" dirty="0" err="1">
+                <a:solidFill>
+                  <a:srgbClr val="3FB950"/>
+                </a:solidFill>
+                <a:latin typeface="Consolas"/>
+              </a:rPr>
+              <a:t>scratch_meta</a:t>
+            </a:r>
+            <a:r>
+              <a:rPr sz="1100" b="0" dirty="0">
+                <a:solidFill>
+                  <a:srgbClr val="3FB950"/>
+                </a:solidFill>
+                <a:latin typeface="Consolas"/>
+              </a:rPr>
+              <a:t>[LAYER_IDX]=0;</a:t>
             </a:r>
           </a:p>
           <a:p>
@@ -5825,13 +7073,76 @@
               </a:spcAft>
             </a:pPr>
             <a:r>
-              <a:rPr sz="1100" b="0">
+              <a:rPr sz="1100" b="0" dirty="0" err="1">
                 <a:solidFill>
                   <a:srgbClr val="3FB950"/>
                 </a:solidFill>
                 <a:latin typeface="Consolas"/>
               </a:rPr>
-              <a:t>    scratch_acts[i] = link_state[i];</a:t>
+              <a:t>scratch_meta</a:t>
+            </a:r>
+            <a:r>
+              <a:rPr sz="1100" b="0" dirty="0">
+                <a:solidFill>
+                  <a:srgbClr val="3FB950"/>
+                </a:solidFill>
+                <a:latin typeface="Consolas"/>
+              </a:rPr>
+              <a:t>[INGRESS_IF]=</a:t>
+            </a:r>
+            <a:r>
+              <a:rPr sz="1100" b="0" dirty="0" err="1">
+                <a:solidFill>
+                  <a:srgbClr val="3FB950"/>
+                </a:solidFill>
+                <a:latin typeface="Consolas"/>
+              </a:rPr>
+              <a:t>ifidx</a:t>
+            </a:r>
+            <a:r>
+              <a:rPr sz="1100" b="0" dirty="0">
+                <a:solidFill>
+                  <a:srgbClr val="3FB950"/>
+                </a:solidFill>
+                <a:latin typeface="Consolas"/>
+              </a:rPr>
+              <a:t>; </a:t>
+            </a:r>
+            <a:r>
+              <a:rPr sz="1100" b="0" dirty="0" err="1">
+                <a:solidFill>
+                  <a:srgbClr val="3FB950"/>
+                </a:solidFill>
+                <a:latin typeface="Consolas"/>
+              </a:rPr>
+              <a:t>scratch_meta</a:t>
+            </a:r>
+            <a:r>
+              <a:rPr sz="1100" b="0" dirty="0">
+                <a:solidFill>
+                  <a:srgbClr val="3FB950"/>
+                </a:solidFill>
+                <a:latin typeface="Consolas"/>
+              </a:rPr>
+              <a:t>[TTL]=</a:t>
+            </a:r>
+            <a:r>
+              <a:rPr sz="1100" b="0" dirty="0" err="1">
+                <a:solidFill>
+                  <a:srgbClr val="3FB950"/>
+                </a:solidFill>
+                <a:latin typeface="Consolas"/>
+              </a:rPr>
+              <a:t>ttl</a:t>
+            </a:r>
+            <a:r>
+              <a:rPr sz="1100" b="0" dirty="0">
+                <a:solidFill>
+                  <a:srgbClr val="3FB950"/>
+                </a:solidFill>
+                <a:latin typeface="Consolas"/>
+              </a:rPr>
+              <a:t>;</a:t>
             </a:r>
           </a:p>
           <a:p>
@@ -5847,13 +7158,58 @@
               </a:spcAft>
             </a:pPr>
             <a:r>
-              <a:rPr sz="1100" b="0">
+              <a:rPr sz="1100" b="0" dirty="0" err="1">
                 <a:solidFill>
                   <a:srgbClr val="E6EDF3"/>
                 </a:solidFill>
                 <a:latin typeface="Consolas"/>
               </a:rPr>
-              <a:t>scratch_acts[12] = ttl;  scratch_acts[6+iface] = 1;  scratch_acts[13+node] = 1;</a:t>
+              <a:t>layer_chain.call</a:t>
+            </a:r>
+            <a:r>
+              <a:rPr sz="1100" b="0" dirty="0">
+                <a:solidFill>
+                  <a:srgbClr val="E6EDF3"/>
+                </a:solidFill>
+                <a:latin typeface="Consolas"/>
+              </a:rPr>
+              <a:t>(</a:t>
+            </a:r>
+            <a:r>
+              <a:rPr sz="1100" b="0" dirty="0" err="1">
+                <a:solidFill>
+                  <a:srgbClr val="E6EDF3"/>
+                </a:solidFill>
+                <a:latin typeface="Consolas"/>
+              </a:rPr>
+              <a:t>ctx</a:t>
+            </a:r>
+            <a:r>
+              <a:rPr sz="1100" b="0" dirty="0">
+                <a:solidFill>
+                  <a:srgbClr val="E6EDF3"/>
+                </a:solidFill>
+                <a:latin typeface="Consolas"/>
+              </a:rPr>
+              <a:t>, 0);              /* tail call -&gt; </a:t>
+            </a:r>
+            <a:r>
+              <a:rPr sz="1100" b="0" dirty="0" err="1">
+                <a:solidFill>
+                  <a:srgbClr val="E6EDF3"/>
+                </a:solidFill>
+                <a:latin typeface="Consolas"/>
+              </a:rPr>
+              <a:t>layer_first</a:t>
+            </a:r>
+            <a:r>
+              <a:rPr sz="1100" b="0" dirty="0">
+                <a:solidFill>
+                  <a:srgbClr val="E6EDF3"/>
+                </a:solidFill>
+                <a:latin typeface="Consolas"/>
+              </a:rPr>
+              <a:t> */</a:t>
             </a:r>
           </a:p>
           <a:p>
@@ -5869,13 +7225,309 @@
               </a:spcAft>
             </a:pPr>
             <a:r>
-              <a:rPr sz="1100" b="0">
+              <a:rPr sz="1100" b="0" dirty="0">
                 <a:solidFill>
                   <a:srgbClr val="F5A623"/>
                 </a:solidFill>
                 <a:latin typeface="Consolas"/>
               </a:rPr>
-              <a:t>layer_chain.call(ctx, 0);        /* tail call -&gt; layer_65_4 */</a:t>
+              <a:t>/* </a:t>
+            </a:r>
+            <a:r>
+              <a:rPr sz="1100" b="0" dirty="0" err="1">
+                <a:solidFill>
+                  <a:srgbClr val="F5A623"/>
+                </a:solidFill>
+                <a:latin typeface="Consolas"/>
+              </a:rPr>
+              <a:t>layer_first</a:t>
+            </a:r>
+            <a:r>
+              <a:rPr sz="1100" b="0" dirty="0">
+                <a:solidFill>
+                  <a:srgbClr val="F5A623"/>
+                </a:solidFill>
+                <a:latin typeface="Consolas"/>
+              </a:rPr>
+              <a:t>: </a:t>
+            </a:r>
+            <a:r>
+              <a:rPr sz="1100" b="0" dirty="0" err="1">
+                <a:solidFill>
+                  <a:srgbClr val="F5A623"/>
+                </a:solidFill>
+                <a:latin typeface="Consolas"/>
+              </a:rPr>
+              <a:t>lettura</a:t>
+            </a:r>
+            <a:r>
+              <a:rPr sz="1100" b="0" dirty="0">
+                <a:solidFill>
+                  <a:srgbClr val="F5A623"/>
+                </a:solidFill>
+                <a:latin typeface="Consolas"/>
+              </a:rPr>
+              <a:t> </a:t>
+            </a:r>
+            <a:r>
+              <a:rPr sz="1100" b="0" dirty="0" err="1">
+                <a:solidFill>
+                  <a:srgbClr val="F5A623"/>
+                </a:solidFill>
+                <a:latin typeface="Consolas"/>
+              </a:rPr>
+              <a:t>sparsa</a:t>
+            </a:r>
+            <a:r>
+              <a:rPr sz="1100" b="0" dirty="0">
+                <a:solidFill>
+                  <a:srgbClr val="F5A623"/>
+                </a:solidFill>
+                <a:latin typeface="Consolas"/>
+              </a:rPr>
+              <a:t> (come P2), NON </a:t>
+            </a:r>
+            <a:r>
+              <a:rPr sz="1100" b="0" dirty="0" err="1">
+                <a:solidFill>
+                  <a:srgbClr val="F5A623"/>
+                </a:solidFill>
+                <a:latin typeface="Consolas"/>
+              </a:rPr>
+              <a:t>denso</a:t>
+            </a:r>
+            <a:r>
+              <a:rPr sz="1100" b="0" dirty="0">
+                <a:solidFill>
+                  <a:srgbClr val="F5A623"/>
+                </a:solidFill>
+                <a:latin typeface="Consolas"/>
+              </a:rPr>
+              <a:t> </a:t>
+            </a:r>
+            <a:r>
+              <a:rPr sz="1100" b="0" dirty="0" err="1">
+                <a:solidFill>
+                  <a:srgbClr val="F5A623"/>
+                </a:solidFill>
+                <a:latin typeface="Consolas"/>
+              </a:rPr>
+              <a:t>su</a:t>
+            </a:r>
+            <a:r>
+              <a:rPr sz="1100" b="0" dirty="0">
+                <a:solidFill>
+                  <a:srgbClr val="F5A623"/>
+                </a:solidFill>
+                <a:latin typeface="Consolas"/>
+              </a:rPr>
+              <a:t> 65 */</a:t>
+            </a:r>
+          </a:p>
+          <a:p>
+            <a:pPr algn="l">
+              <a:lnSpc>
+                <a:spcPct val="102000"/>
+              </a:lnSpc>
+              <a:spcBef>
+                <a:spcPts val="0"/>
+              </a:spcBef>
+              <a:spcAft>
+                <a:spcPts val="100"/>
+              </a:spcAft>
+            </a:pPr>
+            <a:r>
+              <a:rPr sz="1100" b="0" dirty="0">
+                <a:solidFill>
+                  <a:srgbClr val="F5A623"/>
+                </a:solidFill>
+                <a:latin typeface="Consolas"/>
+              </a:rPr>
+              <a:t>acc = bias(j)+</a:t>
+            </a:r>
+            <a:r>
+              <a:rPr sz="1100" b="0" dirty="0" err="1">
+                <a:solidFill>
+                  <a:srgbClr val="F5A623"/>
+                </a:solidFill>
+                <a:latin typeface="Consolas"/>
+              </a:rPr>
+              <a:t>ttl</a:t>
+            </a:r>
+            <a:r>
+              <a:rPr sz="1100" b="0" dirty="0">
+                <a:solidFill>
+                  <a:srgbClr val="F5A623"/>
+                </a:solidFill>
+                <a:latin typeface="Consolas"/>
+              </a:rPr>
+              <a:t>*W[..+12]+sum(</a:t>
+            </a:r>
+            <a:r>
+              <a:rPr sz="1100" b="0" dirty="0" err="1">
+                <a:solidFill>
+                  <a:srgbClr val="F5A623"/>
+                </a:solidFill>
+                <a:latin typeface="Consolas"/>
+              </a:rPr>
+              <a:t>link_state</a:t>
+            </a:r>
+            <a:r>
+              <a:rPr sz="1100" b="0" dirty="0">
+                <a:solidFill>
+                  <a:srgbClr val="F5A623"/>
+                </a:solidFill>
+                <a:latin typeface="Consolas"/>
+              </a:rPr>
+              <a:t>[</a:t>
+            </a:r>
+            <a:r>
+              <a:rPr sz="1100" b="0" dirty="0" err="1">
+                <a:solidFill>
+                  <a:srgbClr val="F5A623"/>
+                </a:solidFill>
+                <a:latin typeface="Consolas"/>
+              </a:rPr>
+              <a:t>i</a:t>
+            </a:r>
+            <a:r>
+              <a:rPr sz="1100" b="0" dirty="0">
+                <a:solidFill>
+                  <a:srgbClr val="F5A623"/>
+                </a:solidFill>
+                <a:latin typeface="Consolas"/>
+              </a:rPr>
+              <a:t>]*W[..+</a:t>
+            </a:r>
+            <a:r>
+              <a:rPr sz="1100" b="0" dirty="0" err="1">
+                <a:solidFill>
+                  <a:srgbClr val="F5A623"/>
+                </a:solidFill>
+                <a:latin typeface="Consolas"/>
+              </a:rPr>
+              <a:t>i</a:t>
+            </a:r>
+            <a:r>
+              <a:rPr sz="1100" b="0" dirty="0">
+                <a:solidFill>
+                  <a:srgbClr val="F5A623"/>
+                </a:solidFill>
+                <a:latin typeface="Consolas"/>
+              </a:rPr>
+              <a:t>])+W[</a:t>
+            </a:r>
+            <a:r>
+              <a:rPr sz="1100" b="0" dirty="0" err="1">
+                <a:solidFill>
+                  <a:srgbClr val="F5A623"/>
+                </a:solidFill>
+                <a:latin typeface="Consolas"/>
+              </a:rPr>
+              <a:t>iface_idx</a:t>
+            </a:r>
+            <a:r>
+              <a:rPr sz="1100" b="0" dirty="0">
+                <a:solidFill>
+                  <a:srgbClr val="F5A623"/>
+                </a:solidFill>
+                <a:latin typeface="Consolas"/>
+              </a:rPr>
+              <a:t>]+W[</a:t>
+            </a:r>
+            <a:r>
+              <a:rPr sz="1100" b="0" dirty="0" err="1">
+                <a:solidFill>
+                  <a:srgbClr val="F5A623"/>
+                </a:solidFill>
+                <a:latin typeface="Consolas"/>
+              </a:rPr>
+              <a:t>node_idx</a:t>
+            </a:r>
+            <a:r>
+              <a:rPr sz="1100" b="0" dirty="0">
+                <a:solidFill>
+                  <a:srgbClr val="F5A623"/>
+                </a:solidFill>
+                <a:latin typeface="Consolas"/>
+              </a:rPr>
+              <a:t>];</a:t>
+            </a:r>
+          </a:p>
+          <a:p>
+            <a:pPr algn="l">
+              <a:lnSpc>
+                <a:spcPct val="102000"/>
+              </a:lnSpc>
+              <a:spcBef>
+                <a:spcPts val="0"/>
+              </a:spcBef>
+              <a:spcAft>
+                <a:spcPts val="100"/>
+              </a:spcAft>
+            </a:pPr>
+            <a:r>
+              <a:rPr sz="1100" b="0" dirty="0">
+                <a:solidFill>
+                  <a:srgbClr val="F5A623"/>
+                </a:solidFill>
+                <a:latin typeface="Consolas"/>
+              </a:rPr>
+              <a:t>if(</a:t>
+            </a:r>
+            <a:r>
+              <a:rPr sz="1100" b="0" dirty="0" err="1">
+                <a:solidFill>
+                  <a:srgbClr val="F5A623"/>
+                </a:solidFill>
+                <a:latin typeface="Consolas"/>
+              </a:rPr>
+              <a:t>n_layers</a:t>
+            </a:r>
+            <a:r>
+              <a:rPr sz="1100" b="0" dirty="0">
+                <a:solidFill>
+                  <a:srgbClr val="F5A623"/>
+                </a:solidFill>
+                <a:latin typeface="Consolas"/>
+              </a:rPr>
+              <a:t>==1) argmax(acc); else { </a:t>
+            </a:r>
+            <a:r>
+              <a:rPr sz="1100" b="0" dirty="0" err="1">
+                <a:solidFill>
+                  <a:srgbClr val="F5A623"/>
+                </a:solidFill>
+                <a:latin typeface="Consolas"/>
+              </a:rPr>
+              <a:t>scratch_acts</a:t>
+            </a:r>
+            <a:r>
+              <a:rPr sz="1100" b="0" dirty="0">
+                <a:solidFill>
+                  <a:srgbClr val="F5A623"/>
+                </a:solidFill>
+                <a:latin typeface="Consolas"/>
+              </a:rPr>
+              <a:t>[j]=RELU(acc); </a:t>
+            </a:r>
+            <a:r>
+              <a:rPr sz="1100" b="0" dirty="0" err="1">
+                <a:solidFill>
+                  <a:srgbClr val="F5A623"/>
+                </a:solidFill>
+                <a:latin typeface="Consolas"/>
+              </a:rPr>
+              <a:t>layer_chain.call</a:t>
+            </a:r>
+            <a:r>
+              <a:rPr sz="1100" b="0" dirty="0">
+                <a:solidFill>
+                  <a:srgbClr val="F5A623"/>
+                </a:solidFill>
+                <a:latin typeface="Consolas"/>
+              </a:rPr>
+              <a:t>(ctx,1); }</a:t>
             </a:r>
           </a:p>
         </p:txBody>
@@ -6183,7 +7835,7 @@
                 </a:solidFill>
                 <a:latin typeface="Segoe UI"/>
               </a:rPr>
-              <a:t>dispatcher → layer_65_4 → layer_4_4 → layer_4_7_argmax.</a:t>
+              <a:t>dispatcher -&gt; layer_first (hop 0, sparso) -&gt; layer_hidden x (n_layers-1) (denso).</a:t>
             </a:r>
           </a:p>
           <a:p>
@@ -6214,7 +7866,7 @@
                 </a:solidFill>
                 <a:latin typeface="Segoe UI"/>
               </a:rPr>
-              <a:t>Cambiare architettura = cambiare la sequenza in layer_chain.</a:t>
+              <a:t>Cambiare architettura = cambiare layer_shapes/layer_registry (pesi + forma), MAI la sequenza dei tail-call: slot0=layer_first, slot1..15=layer_hidden sempre uguali.</a:t>
             </a:r>
           </a:p>
           <a:p>
@@ -6245,7 +7897,7 @@
                 </a:solidFill>
                 <a:latin typeface="Segoe UI"/>
               </a:rPr>
-              <a:t>Massima flessibilità, al costo di 3 salti per pacchetto.</a:t>
+              <a:t>Massima flessibilita (profondita E larghezza dinamiche), al costo di N tail call per pacchetto (dipende dalla profondita del modello).</a:t>
             </a:r>
           </a:p>
         </p:txBody>
@@ -8144,7 +9796,7 @@
                 </a:solidFill>
                 <a:latin typeface="Segoe UI"/>
               </a:rPr>
-              <a:t>Nessun ctx custom: sotto TEST_RUN l'ingress_ifindex di sandbox cade fuori dai range attesi di tutte e 3, quindi combaciano allo stesso modo col riferimento Python. </a:t>
+              <a:t>Nessun ctx custom: sotto TEST_RUN il riferimento Python assume ingress_ifindex=0 per P1 (la sua ifindex_table non mappa il valore reale) e =1 per P2/P3 (clamp diretto sul valore osservato realmente dal kernel in sandbox). </a:t>
             </a:r>
           </a:p>
           <a:p>
@@ -8474,7 +10126,13 @@
           <p:cNvGraphicFramePr>
             <a:graphicFrameLocks noGrp="1"/>
           </p:cNvGraphicFramePr>
-          <p:nvPr/>
+          <p:nvPr>
+            <p:extLst>
+              <p:ext uri="{D42A27DB-BD31-4B8C-83A1-F6EECF244321}">
+                <p14:modId xmlns:p14="http://schemas.microsoft.com/office/powerpoint/2010/main" val="2567701619"/>
+              </p:ext>
+            </p:extLst>
+          </p:nvPr>
         </p:nvGraphicFramePr>
         <p:xfrm>
           <a:off x="640080" y="2011680"/>
@@ -8645,6 +10303,11 @@
                     <a:lstStyle/>
                     <a:p>
                       <a:r>
+                        <a:rPr dirty="0">
+                          <a:solidFill>
+                            <a:schemeClr val="bg1"/>
+                          </a:solidFill>
+                        </a:rPr>
                         <a:t>912</a:t>
                       </a:r>
                     </a:p>
@@ -8661,6 +10324,11 @@
                     <a:lstStyle/>
                     <a:p>
                       <a:r>
+                        <a:rPr>
+                          <a:solidFill>
+                            <a:schemeClr val="bg1"/>
+                          </a:solidFill>
+                        </a:rPr>
                         <a:t>5 951</a:t>
                       </a:r>
                     </a:p>
@@ -8677,6 +10345,11 @@
                     <a:lstStyle/>
                     <a:p>
                       <a:r>
+                        <a:rPr>
+                          <a:solidFill>
+                            <a:schemeClr val="bg1"/>
+                          </a:solidFill>
+                        </a:rPr>
                         <a:t>5 931</a:t>
                       </a:r>
                     </a:p>
@@ -8723,6 +10396,11 @@
                     <a:lstStyle/>
                     <a:p>
                       <a:r>
+                        <a:rPr dirty="0">
+                          <a:solidFill>
+                            <a:schemeClr val="bg1"/>
+                          </a:solidFill>
+                        </a:rPr>
                         <a:t>4 436</a:t>
                       </a:r>
                     </a:p>
@@ -8739,6 +10417,11 @@
                     <a:lstStyle/>
                     <a:p>
                       <a:r>
+                        <a:rPr>
+                          <a:solidFill>
+                            <a:schemeClr val="bg1"/>
+                          </a:solidFill>
+                        </a:rPr>
                         <a:t>27 097</a:t>
                       </a:r>
                     </a:p>
@@ -8755,6 +10438,11 @@
                     <a:lstStyle/>
                     <a:p>
                       <a:r>
+                        <a:rPr>
+                          <a:solidFill>
+                            <a:schemeClr val="bg1"/>
+                          </a:solidFill>
+                        </a:rPr>
                         <a:t>26 823</a:t>
                       </a:r>
                     </a:p>
@@ -8801,6 +10489,11 @@
                     <a:lstStyle/>
                     <a:p>
                       <a:r>
+                        <a:rPr>
+                          <a:solidFill>
+                            <a:schemeClr val="bg1"/>
+                          </a:solidFill>
+                        </a:rPr>
                         <a:t>1</a:t>
                       </a:r>
                     </a:p>
@@ -8817,6 +10510,11 @@
                     <a:lstStyle/>
                     <a:p>
                       <a:r>
+                        <a:rPr dirty="0">
+                          <a:solidFill>
+                            <a:schemeClr val="bg1"/>
+                          </a:solidFill>
+                        </a:rPr>
                         <a:t>1</a:t>
                       </a:r>
                     </a:p>
@@ -8833,6 +10531,11 @@
                     <a:lstStyle/>
                     <a:p>
                       <a:r>
+                        <a:rPr>
+                          <a:solidFill>
+                            <a:schemeClr val="bg1"/>
+                          </a:solidFill>
+                        </a:rPr>
                         <a:t>3</a:t>
                       </a:r>
                     </a:p>
@@ -8856,7 +10559,28 @@
                     <a:lstStyle/>
                     <a:p>
                       <a:r>
-                        <a:t>Map lookup / pkt (reale)</a:t>
+                        <a:rPr dirty="0">
+                          <a:solidFill>
+                            <a:schemeClr val="bg1"/>
+                          </a:solidFill>
+                        </a:rPr>
+                        <a:t>Map lookup / pkt (</a:t>
+                      </a:r>
+                      <a:r>
+                        <a:rPr dirty="0" err="1">
+                          <a:solidFill>
+                            <a:schemeClr val="bg1"/>
+                          </a:solidFill>
+                        </a:rPr>
+                        <a:t>reale</a:t>
+                      </a:r>
+                      <a:r>
+                        <a:rPr dirty="0">
+                          <a:solidFill>
+                            <a:schemeClr val="bg1"/>
+                          </a:solidFill>
+                        </a:rPr>
+                        <a:t>)</a:t>
                       </a:r>
                     </a:p>
                   </a:txBody>
@@ -8872,6 +10596,11 @@
                     <a:lstStyle/>
                     <a:p>
                       <a:r>
+                        <a:rPr>
+                          <a:solidFill>
+                            <a:schemeClr val="bg1"/>
+                          </a:solidFill>
+                        </a:rPr>
                         <a:t>8.0</a:t>
                       </a:r>
                     </a:p>
@@ -8888,6 +10617,11 @@
                     <a:lstStyle/>
                     <a:p>
                       <a:r>
+                        <a:rPr dirty="0">
+                          <a:solidFill>
+                            <a:schemeClr val="bg1"/>
+                          </a:solidFill>
+                        </a:rPr>
                         <a:t>150.0</a:t>
                       </a:r>
                     </a:p>
@@ -8904,6 +10638,11 @@
                     <a:lstStyle/>
                     <a:p>
                       <a:r>
+                        <a:rPr>
+                          <a:solidFill>
+                            <a:schemeClr val="bg1"/>
+                          </a:solidFill>
+                        </a:rPr>
                         <a:t>163.0</a:t>
                       </a:r>
                     </a:p>
@@ -8950,6 +10689,11 @@
                     <a:lstStyle/>
                     <a:p>
                       <a:r>
+                        <a:rPr>
+                          <a:solidFill>
+                            <a:schemeClr val="bg1"/>
+                          </a:solidFill>
+                        </a:rPr>
                         <a:t>168</a:t>
                       </a:r>
                     </a:p>
@@ -8966,6 +10710,11 @@
                     <a:lstStyle/>
                     <a:p>
                       <a:r>
+                        <a:rPr dirty="0">
+                          <a:solidFill>
+                            <a:schemeClr val="bg1"/>
+                          </a:solidFill>
+                        </a:rPr>
                         <a:t>8 072</a:t>
                       </a:r>
                     </a:p>
@@ -8982,6 +10731,11 @@
                     <a:lstStyle/>
                     <a:p>
                       <a:r>
+                        <a:rPr>
+                          <a:solidFill>
+                            <a:schemeClr val="bg1"/>
+                          </a:solidFill>
+                        </a:rPr>
                         <a:t>16 904</a:t>
                       </a:r>
                     </a:p>
@@ -9028,6 +10782,11 @@
                     <a:lstStyle/>
                     <a:p>
                       <a:r>
+                        <a:rPr>
+                          <a:solidFill>
+                            <a:schemeClr val="bg1"/>
+                          </a:solidFill>
+                        </a:rPr>
                         <a:t>45.0</a:t>
                       </a:r>
                     </a:p>
@@ -9044,6 +10803,11 @@
                     <a:lstStyle/>
                     <a:p>
                       <a:r>
+                        <a:rPr dirty="0">
+                          <a:solidFill>
+                            <a:schemeClr val="bg1"/>
+                          </a:solidFill>
+                        </a:rPr>
                         <a:t>476.0</a:t>
                       </a:r>
                     </a:p>
@@ -9060,6 +10824,11 @@
                     <a:lstStyle/>
                     <a:p>
                       <a:r>
+                        <a:rPr>
+                          <a:solidFill>
+                            <a:schemeClr val="bg1"/>
+                          </a:solidFill>
+                        </a:rPr>
                         <a:t>772.0</a:t>
                       </a:r>
                     </a:p>
@@ -9106,6 +10875,11 @@
                     <a:lstStyle/>
                     <a:p>
                       <a:r>
+                        <a:rPr>
+                          <a:solidFill>
+                            <a:schemeClr val="bg1"/>
+                          </a:solidFill>
+                        </a:rPr>
                         <a:t>22.222</a:t>
                       </a:r>
                     </a:p>
@@ -9122,6 +10896,11 @@
                     <a:lstStyle/>
                     <a:p>
                       <a:r>
+                        <a:rPr>
+                          <a:solidFill>
+                            <a:schemeClr val="bg1"/>
+                          </a:solidFill>
+                        </a:rPr>
                         <a:t>2.101</a:t>
                       </a:r>
                     </a:p>
@@ -9138,6 +10917,11 @@
                     <a:lstStyle/>
                     <a:p>
                       <a:r>
+                        <a:rPr dirty="0">
+                          <a:solidFill>
+                            <a:schemeClr val="bg1"/>
+                          </a:solidFill>
+                        </a:rPr>
                         <a:t>1.295</a:t>
                       </a:r>
                     </a:p>
@@ -9184,6 +10968,11 @@
                     <a:lstStyle/>
                     <a:p>
                       <a:r>
+                        <a:rPr>
+                          <a:solidFill>
+                            <a:schemeClr val="bg1"/>
+                          </a:solidFill>
+                        </a:rPr>
                         <a:t>42</a:t>
                       </a:r>
                     </a:p>
@@ -9200,6 +10989,11 @@
                     <a:lstStyle/>
                     <a:p>
                       <a:r>
+                        <a:rPr>
+                          <a:solidFill>
+                            <a:schemeClr val="bg1"/>
+                          </a:solidFill>
+                        </a:rPr>
                         <a:t>81</a:t>
                       </a:r>
                     </a:p>
@@ -9216,6 +11010,11 @@
                     <a:lstStyle/>
                     <a:p>
                       <a:r>
+                        <a:rPr dirty="0">
+                          <a:solidFill>
+                            <a:schemeClr val="bg1"/>
+                          </a:solidFill>
+                        </a:rPr>
                         <a:t>69</a:t>
                       </a:r>
                     </a:p>
@@ -9493,15 +11292,6 @@
                 <a:latin typeface="Segoe UI"/>
               </a:rPr>
               <a:t>mac_table: argmax -&gt; mac_table[classe] -&gt; bpf_redirect su tutte e 3 (P1 hardcoded via dispatcher + 1 tail call, 0 lookup sui pesi). L'inferenza é identica nelle 3 (classe kernel = riferimento Python); differisce solo il design. Ordine coerente con la tassonomia. Verificato anche multi-modello concorrente (2 model_id nello stesso oggetto BPF): P2/P3 con architetture DIVERSE (larghezza per P2, profonditá+larghezza per P3), 6/6 PASS.</a:t>
-            </a:r>
-            <a:r>
-              <a:rPr sz="1200" b="0">
-                <a:solidFill>
-                  <a:srgbClr val="8B949E"/>
-                </a:solidFill>
-                <a:latin typeface="Segoe UI"/>
-              </a:rPr>
-              <a:t/>
             </a:r>
           </a:p>
         </p:txBody>
@@ -13517,7 +15307,7 @@
         </p:nvSpPr>
         <p:spPr>
           <a:xfrm>
-            <a:off x="640080" y="2103120"/>
+            <a:off x="687902" y="2494263"/>
             <a:ext cx="4846320" cy="2926080"/>
           </a:xfrm>
           <a:prstGeom prst="rect">
@@ -13543,25 +15333,169 @@
               </a:spcAft>
             </a:pPr>
             <a:r>
-              <a:rPr sz="1400" b="0">
+              <a:rPr sz="1400" b="0" dirty="0">
                 <a:solidFill>
                   <a:srgbClr val="E6EDF3"/>
                 </a:solidFill>
                 <a:latin typeface="Segoe UI"/>
               </a:rPr>
-              <a:t>Lo stesso modello neurale può vivere nel datapath eBPF in </a:t>
-            </a:r>
-            <a:r>
-              <a:rPr sz="1400" b="1">
+              <a:t>Lo </a:t>
+            </a:r>
+            <a:r>
+              <a:rPr sz="1400" b="0" dirty="0" err="1">
+                <a:solidFill>
+                  <a:srgbClr val="E6EDF3"/>
+                </a:solidFill>
+                <a:latin typeface="Segoe UI"/>
+              </a:rPr>
+              <a:t>stesso</a:t>
+            </a:r>
+            <a:r>
+              <a:rPr sz="1400" b="0" dirty="0">
+                <a:solidFill>
+                  <a:srgbClr val="E6EDF3"/>
+                </a:solidFill>
+                <a:latin typeface="Segoe UI"/>
+              </a:rPr>
+              <a:t> </a:t>
+            </a:r>
+            <a:r>
+              <a:rPr sz="1400" b="0" dirty="0" err="1">
+                <a:solidFill>
+                  <a:srgbClr val="E6EDF3"/>
+                </a:solidFill>
+                <a:latin typeface="Segoe UI"/>
+              </a:rPr>
+              <a:t>modello</a:t>
+            </a:r>
+            <a:r>
+              <a:rPr sz="1400" b="0" dirty="0">
+                <a:solidFill>
+                  <a:srgbClr val="E6EDF3"/>
+                </a:solidFill>
+                <a:latin typeface="Segoe UI"/>
+              </a:rPr>
+              <a:t> </a:t>
+            </a:r>
+            <a:r>
+              <a:rPr sz="1400" b="0" dirty="0" err="1">
+                <a:solidFill>
+                  <a:srgbClr val="E6EDF3"/>
+                </a:solidFill>
+                <a:latin typeface="Segoe UI"/>
+              </a:rPr>
+              <a:t>neurale</a:t>
+            </a:r>
+            <a:r>
+              <a:rPr sz="1400" b="0" dirty="0">
+                <a:solidFill>
+                  <a:srgbClr val="E6EDF3"/>
+                </a:solidFill>
+                <a:latin typeface="Segoe UI"/>
+              </a:rPr>
+              <a:t> </a:t>
+            </a:r>
+            <a:r>
+              <a:rPr sz="1400" b="0" dirty="0" err="1">
+                <a:solidFill>
+                  <a:srgbClr val="E6EDF3"/>
+                </a:solidFill>
+                <a:latin typeface="Segoe UI"/>
+              </a:rPr>
+              <a:t>può</a:t>
+            </a:r>
+            <a:r>
+              <a:rPr sz="1400" b="0" dirty="0">
+                <a:solidFill>
+                  <a:srgbClr val="E6EDF3"/>
+                </a:solidFill>
+                <a:latin typeface="Segoe UI"/>
+              </a:rPr>
+              <a:t> vivere </a:t>
+            </a:r>
+            <a:r>
+              <a:rPr sz="1400" b="0" dirty="0" err="1">
+                <a:solidFill>
+                  <a:srgbClr val="E6EDF3"/>
+                </a:solidFill>
+                <a:latin typeface="Segoe UI"/>
+              </a:rPr>
+              <a:t>nel</a:t>
+            </a:r>
+            <a:r>
+              <a:rPr sz="1400" b="0" dirty="0">
+                <a:solidFill>
+                  <a:srgbClr val="E6EDF3"/>
+                </a:solidFill>
+                <a:latin typeface="Segoe UI"/>
+              </a:rPr>
+              <a:t> </a:t>
+            </a:r>
+            <a:r>
+              <a:rPr sz="1400" b="0" dirty="0" err="1">
+                <a:solidFill>
+                  <a:srgbClr val="E6EDF3"/>
+                </a:solidFill>
+                <a:latin typeface="Segoe UI"/>
+              </a:rPr>
+              <a:t>datapath</a:t>
+            </a:r>
+            <a:r>
+              <a:rPr sz="1400" b="0" dirty="0">
+                <a:solidFill>
+                  <a:srgbClr val="E6EDF3"/>
+                </a:solidFill>
+                <a:latin typeface="Segoe UI"/>
+              </a:rPr>
+              <a:t> </a:t>
+            </a:r>
+            <a:r>
+              <a:rPr sz="1400" b="0" dirty="0" err="1">
+                <a:solidFill>
+                  <a:srgbClr val="E6EDF3"/>
+                </a:solidFill>
+                <a:latin typeface="Segoe UI"/>
+              </a:rPr>
+              <a:t>eBPF</a:t>
+            </a:r>
+            <a:r>
+              <a:rPr sz="1400" b="0" dirty="0">
+                <a:solidFill>
+                  <a:srgbClr val="E6EDF3"/>
+                </a:solidFill>
+                <a:latin typeface="Segoe UI"/>
+              </a:rPr>
+              <a:t> in </a:t>
+            </a:r>
+            <a:r>
+              <a:rPr sz="1400" b="1" dirty="0" err="1">
                 <a:solidFill>
                   <a:srgbClr val="F5A623"/>
                 </a:solidFill>
                 <a:latin typeface="Segoe UI"/>
               </a:rPr>
-              <a:t>tre modi</a:t>
-            </a:r>
-            <a:r>
-              <a:rPr sz="1400" b="0">
+              <a:t>tre</a:t>
+            </a:r>
+            <a:r>
+              <a:rPr sz="1400" b="1" dirty="0">
+                <a:solidFill>
+                  <a:srgbClr val="F5A623"/>
+                </a:solidFill>
+                <a:latin typeface="Segoe UI"/>
+              </a:rPr>
+              <a:t> </a:t>
+            </a:r>
+            <a:r>
+              <a:rPr sz="1400" b="1" dirty="0" err="1">
+                <a:solidFill>
+                  <a:srgbClr val="F5A623"/>
+                </a:solidFill>
+                <a:latin typeface="Segoe UI"/>
+              </a:rPr>
+              <a:t>modi</a:t>
+            </a:r>
+            <a:r>
+              <a:rPr sz="1400" b="0" dirty="0">
                 <a:solidFill>
                   <a:srgbClr val="E6EDF3"/>
                 </a:solidFill>
@@ -13582,7 +15516,7 @@
                 <a:spcPts val="200"/>
               </a:spcAft>
             </a:pPr>
-            <a:endParaRPr sz="1400" b="0">
+            <a:endParaRPr sz="1400" b="0" dirty="0">
               <a:solidFill>
                 <a:srgbClr val="E6EDF3"/>
               </a:solidFill>
@@ -13602,13 +15536,184 @@
               </a:spcAft>
             </a:pPr>
             <a:r>
-              <a:rPr sz="1400" b="0">
-                <a:solidFill>
-                  <a:srgbClr val="8B949E"/>
-                </a:solidFill>
-                <a:latin typeface="Segoe UI"/>
-              </a:rPr>
-              <a:t>Più si specializza il codice, più aumenta la velocità di picco ma diminuisce la flessibilità a runtime.</a:t>
+              <a:rPr sz="1400" b="0" dirty="0" err="1">
+                <a:solidFill>
+                  <a:srgbClr val="8B949E"/>
+                </a:solidFill>
+                <a:latin typeface="Segoe UI"/>
+              </a:rPr>
+              <a:t>Più</a:t>
+            </a:r>
+            <a:r>
+              <a:rPr sz="1400" b="0" dirty="0">
+                <a:solidFill>
+                  <a:srgbClr val="8B949E"/>
+                </a:solidFill>
+                <a:latin typeface="Segoe UI"/>
+              </a:rPr>
+              <a:t> </a:t>
+            </a:r>
+            <a:r>
+              <a:rPr sz="1400" b="0" dirty="0" err="1">
+                <a:solidFill>
+                  <a:srgbClr val="8B949E"/>
+                </a:solidFill>
+                <a:latin typeface="Segoe UI"/>
+              </a:rPr>
+              <a:t>si</a:t>
+            </a:r>
+            <a:r>
+              <a:rPr sz="1400" b="0" dirty="0">
+                <a:solidFill>
+                  <a:srgbClr val="8B949E"/>
+                </a:solidFill>
+                <a:latin typeface="Segoe UI"/>
+              </a:rPr>
+              <a:t> </a:t>
+            </a:r>
+            <a:r>
+              <a:rPr sz="1400" b="0" dirty="0" err="1">
+                <a:solidFill>
+                  <a:srgbClr val="8B949E"/>
+                </a:solidFill>
+                <a:latin typeface="Segoe UI"/>
+              </a:rPr>
+              <a:t>specializza</a:t>
+            </a:r>
+            <a:r>
+              <a:rPr sz="1400" b="0" dirty="0">
+                <a:solidFill>
+                  <a:srgbClr val="8B949E"/>
+                </a:solidFill>
+                <a:latin typeface="Segoe UI"/>
+              </a:rPr>
+              <a:t> il </a:t>
+            </a:r>
+            <a:r>
+              <a:rPr sz="1400" b="0" dirty="0" err="1">
+                <a:solidFill>
+                  <a:srgbClr val="8B949E"/>
+                </a:solidFill>
+                <a:latin typeface="Segoe UI"/>
+              </a:rPr>
+              <a:t>codice</a:t>
+            </a:r>
+            <a:r>
+              <a:rPr sz="1400" b="0" dirty="0">
+                <a:solidFill>
+                  <a:srgbClr val="8B949E"/>
+                </a:solidFill>
+                <a:latin typeface="Segoe UI"/>
+              </a:rPr>
+              <a:t>, </a:t>
+            </a:r>
+            <a:r>
+              <a:rPr sz="1400" b="0" dirty="0" err="1">
+                <a:solidFill>
+                  <a:srgbClr val="8B949E"/>
+                </a:solidFill>
+                <a:latin typeface="Segoe UI"/>
+              </a:rPr>
+              <a:t>più</a:t>
+            </a:r>
+            <a:r>
+              <a:rPr sz="1400" b="0" dirty="0">
+                <a:solidFill>
+                  <a:srgbClr val="8B949E"/>
+                </a:solidFill>
+                <a:latin typeface="Segoe UI"/>
+              </a:rPr>
+              <a:t> </a:t>
+            </a:r>
+            <a:r>
+              <a:rPr sz="1400" b="0" dirty="0" err="1">
+                <a:solidFill>
+                  <a:srgbClr val="8B949E"/>
+                </a:solidFill>
+                <a:latin typeface="Segoe UI"/>
+              </a:rPr>
+              <a:t>aumenta</a:t>
+            </a:r>
+            <a:r>
+              <a:rPr sz="1400" b="0" dirty="0">
+                <a:solidFill>
+                  <a:srgbClr val="8B949E"/>
+                </a:solidFill>
+                <a:latin typeface="Segoe UI"/>
+              </a:rPr>
+              <a:t> la </a:t>
+            </a:r>
+            <a:r>
+              <a:rPr sz="1400" b="0" dirty="0" err="1">
+                <a:solidFill>
+                  <a:srgbClr val="8B949E"/>
+                </a:solidFill>
+                <a:latin typeface="Segoe UI"/>
+              </a:rPr>
+              <a:t>velocità</a:t>
+            </a:r>
+            <a:r>
+              <a:rPr sz="1400" b="0" dirty="0">
+                <a:solidFill>
+                  <a:srgbClr val="8B949E"/>
+                </a:solidFill>
+                <a:latin typeface="Segoe UI"/>
+              </a:rPr>
+              <a:t> di </a:t>
+            </a:r>
+            <a:r>
+              <a:rPr sz="1400" b="0" dirty="0" err="1">
+                <a:solidFill>
+                  <a:srgbClr val="8B949E"/>
+                </a:solidFill>
+                <a:latin typeface="Segoe UI"/>
+              </a:rPr>
+              <a:t>picco</a:t>
+            </a:r>
+            <a:r>
+              <a:rPr sz="1400" b="0" dirty="0">
+                <a:solidFill>
+                  <a:srgbClr val="8B949E"/>
+                </a:solidFill>
+                <a:latin typeface="Segoe UI"/>
+              </a:rPr>
+              <a:t> ma </a:t>
+            </a:r>
+            <a:r>
+              <a:rPr sz="1400" b="0" dirty="0" err="1">
+                <a:solidFill>
+                  <a:srgbClr val="8B949E"/>
+                </a:solidFill>
+                <a:latin typeface="Segoe UI"/>
+              </a:rPr>
+              <a:t>diminuisce</a:t>
+            </a:r>
+            <a:r>
+              <a:rPr sz="1400" b="0" dirty="0">
+                <a:solidFill>
+                  <a:srgbClr val="8B949E"/>
+                </a:solidFill>
+                <a:latin typeface="Segoe UI"/>
+              </a:rPr>
+              <a:t> la </a:t>
+            </a:r>
+            <a:r>
+              <a:rPr sz="1400" b="0" dirty="0" err="1">
+                <a:solidFill>
+                  <a:srgbClr val="8B949E"/>
+                </a:solidFill>
+                <a:latin typeface="Segoe UI"/>
+              </a:rPr>
+              <a:t>flessibilità</a:t>
+            </a:r>
+            <a:r>
+              <a:rPr sz="1400" b="0" dirty="0">
+                <a:solidFill>
+                  <a:srgbClr val="8B949E"/>
+                </a:solidFill>
+                <a:latin typeface="Segoe UI"/>
+              </a:rPr>
+              <a:t> a runtime.</a:t>
             </a:r>
           </a:p>
           <a:p>
@@ -13623,7 +15728,7 @@
                 <a:spcPts val="200"/>
               </a:spcAft>
             </a:pPr>
-            <a:endParaRPr sz="1400" b="0">
+            <a:endParaRPr sz="1400" b="0" dirty="0">
               <a:solidFill>
                 <a:srgbClr val="8B949E"/>
               </a:solidFill>
@@ -13643,13 +15748,112 @@
               </a:spcAft>
             </a:pPr>
             <a:r>
-              <a:rPr sz="1300" b="0">
-                <a:solidFill>
-                  <a:srgbClr val="8B949E"/>
-                </a:solidFill>
-                <a:latin typeface="Segoe UI"/>
-              </a:rPr>
-              <a:t>Aumentando la flessibilità crescono tail call, map lookup e istruzioni eBPF; cala il throughput massimo.</a:t>
+              <a:rPr sz="1300" b="0" dirty="0" err="1">
+                <a:solidFill>
+                  <a:srgbClr val="8B949E"/>
+                </a:solidFill>
+                <a:latin typeface="Segoe UI"/>
+              </a:rPr>
+              <a:t>Aumentando</a:t>
+            </a:r>
+            <a:r>
+              <a:rPr sz="1300" b="0" dirty="0">
+                <a:solidFill>
+                  <a:srgbClr val="8B949E"/>
+                </a:solidFill>
+                <a:latin typeface="Segoe UI"/>
+              </a:rPr>
+              <a:t> la </a:t>
+            </a:r>
+            <a:r>
+              <a:rPr sz="1300" b="0" dirty="0" err="1">
+                <a:solidFill>
+                  <a:srgbClr val="8B949E"/>
+                </a:solidFill>
+                <a:latin typeface="Segoe UI"/>
+              </a:rPr>
+              <a:t>flessibilità</a:t>
+            </a:r>
+            <a:r>
+              <a:rPr sz="1300" b="0" dirty="0">
+                <a:solidFill>
+                  <a:srgbClr val="8B949E"/>
+                </a:solidFill>
+                <a:latin typeface="Segoe UI"/>
+              </a:rPr>
+              <a:t> </a:t>
+            </a:r>
+            <a:r>
+              <a:rPr sz="1300" b="0" dirty="0" err="1">
+                <a:solidFill>
+                  <a:srgbClr val="8B949E"/>
+                </a:solidFill>
+                <a:latin typeface="Segoe UI"/>
+              </a:rPr>
+              <a:t>crescono</a:t>
+            </a:r>
+            <a:r>
+              <a:rPr sz="1300" b="0" dirty="0">
+                <a:solidFill>
+                  <a:srgbClr val="8B949E"/>
+                </a:solidFill>
+                <a:latin typeface="Segoe UI"/>
+              </a:rPr>
+              <a:t> tail call, map lookup e </a:t>
+            </a:r>
+            <a:r>
+              <a:rPr sz="1300" b="0" dirty="0" err="1">
+                <a:solidFill>
+                  <a:srgbClr val="8B949E"/>
+                </a:solidFill>
+                <a:latin typeface="Segoe UI"/>
+              </a:rPr>
+              <a:t>istruzioni</a:t>
+            </a:r>
+            <a:r>
+              <a:rPr sz="1300" b="0" dirty="0">
+                <a:solidFill>
+                  <a:srgbClr val="8B949E"/>
+                </a:solidFill>
+                <a:latin typeface="Segoe UI"/>
+              </a:rPr>
+              <a:t> </a:t>
+            </a:r>
+            <a:r>
+              <a:rPr sz="1300" b="0" dirty="0" err="1">
+                <a:solidFill>
+                  <a:srgbClr val="8B949E"/>
+                </a:solidFill>
+                <a:latin typeface="Segoe UI"/>
+              </a:rPr>
+              <a:t>eBPF</a:t>
+            </a:r>
+            <a:r>
+              <a:rPr sz="1300" b="0" dirty="0">
+                <a:solidFill>
+                  <a:srgbClr val="8B949E"/>
+                </a:solidFill>
+                <a:latin typeface="Segoe UI"/>
+              </a:rPr>
+              <a:t>; cala il throughput </a:t>
+            </a:r>
+            <a:r>
+              <a:rPr sz="1300" b="0" dirty="0" err="1">
+                <a:solidFill>
+                  <a:srgbClr val="8B949E"/>
+                </a:solidFill>
+                <a:latin typeface="Segoe UI"/>
+              </a:rPr>
+              <a:t>massimo</a:t>
+            </a:r>
+            <a:r>
+              <a:rPr sz="1300" b="0" dirty="0">
+                <a:solidFill>
+                  <a:srgbClr val="8B949E"/>
+                </a:solidFill>
+                <a:latin typeface="Segoe UI"/>
+              </a:rPr>
+              <a:t>.</a:t>
             </a:r>
           </a:p>
         </p:txBody>
@@ -13662,7 +15866,7 @@
         </p:nvSpPr>
         <p:spPr>
           <a:xfrm>
-            <a:off x="5806440" y="1965960"/>
+            <a:off x="5869502" y="1624006"/>
             <a:ext cx="5760720" cy="1325880"/>
           </a:xfrm>
           <a:prstGeom prst="roundRect">
@@ -13709,7 +15913,7 @@
         </p:nvSpPr>
         <p:spPr>
           <a:xfrm>
-            <a:off x="6062472" y="2167128"/>
+            <a:off x="6125534" y="1825174"/>
             <a:ext cx="5303520" cy="960119"/>
           </a:xfrm>
           <a:prstGeom prst="rect">
@@ -13816,7 +16020,7 @@
         </p:nvSpPr>
         <p:spPr>
           <a:xfrm>
-            <a:off x="5806440" y="3429000"/>
+            <a:off x="5869502" y="3087046"/>
             <a:ext cx="5760720" cy="1325880"/>
           </a:xfrm>
           <a:prstGeom prst="roundRect">
@@ -13863,7 +16067,7 @@
         </p:nvSpPr>
         <p:spPr>
           <a:xfrm>
-            <a:off x="6062472" y="3630168"/>
+            <a:off x="6125534" y="3288214"/>
             <a:ext cx="5303520" cy="960119"/>
           </a:xfrm>
           <a:prstGeom prst="rect">
@@ -13970,7 +16174,7 @@
         </p:nvSpPr>
         <p:spPr>
           <a:xfrm>
-            <a:off x="5806440" y="4892040"/>
+            <a:off x="5869502" y="4550086"/>
             <a:ext cx="5760720" cy="1325880"/>
           </a:xfrm>
           <a:prstGeom prst="roundRect">
@@ -14017,7 +16221,7 @@
         </p:nvSpPr>
         <p:spPr>
           <a:xfrm>
-            <a:off x="6062472" y="5093207"/>
+            <a:off x="6125534" y="4751253"/>
             <a:ext cx="5303520" cy="960119"/>
           </a:xfrm>
           <a:prstGeom prst="rect">
@@ -22569,7 +24773,7 @@
                 </a:solidFill>
                 <a:latin typeface="Consolas"/>
               </a:rPr>
-              <a:t>~322 lookup / pkt</a:t>
+              <a:t>150 lookup / pkt (reale)</a:t>
             </a:r>
           </a:p>
         </p:txBody>
@@ -23328,7 +25532,7 @@
                 </a:solidFill>
                 <a:latin typeface="Segoe UI"/>
               </a:rPr>
-              <a:t>arch_65_4_4_7 (ebpf_template_arch.py)</a:t>
+              <a:t>arch_generic_2layer (ebpf_template_arch.py) -- semplificato, n_h1/n_h2 runtime fino a 8</a:t>
             </a:r>
           </a:p>
         </p:txBody>
@@ -24087,7 +26291,7 @@
                 </a:solidFill>
                 <a:latin typeface="Segoe UI"/>
               </a:rPr>
-              <a:t>Prestazioni intermedie (125 ns): tra P1 hardcoded e P3 modular.</a:t>
+              <a:t>Prestazioni intermedie (476 ns): tra P1 hardcoded e P3 modular.</a:t>
             </a:r>
           </a:p>
         </p:txBody>

--- a/docs/IPA_eBPF_pipelines.pptx
+++ b/docs/IPA_eBPF_pipelines.pptx
@@ -7587,7 +7587,7 @@
         </p:nvSpPr>
         <p:spPr>
           <a:xfrm>
-            <a:off x="896112" y="4407407"/>
+            <a:off x="896112" y="4325112"/>
             <a:ext cx="4892040" cy="1508760"/>
           </a:xfrm>
           <a:prstGeom prst="rect">
@@ -7613,7 +7613,7 @@
               </a:spcAft>
             </a:pPr>
             <a:r>
-              <a:rPr sz="1350" b="1">
+              <a:rPr sz="1350" b="1" dirty="0">
                 <a:solidFill>
                   <a:srgbClr val="3FD0C8"/>
                 </a:solidFill>
@@ -7635,7 +7635,7 @@
               </a:spcAft>
             </a:pPr>
             <a:r>
-              <a:rPr sz="1100" b="0">
+              <a:rPr sz="1100" b="0" dirty="0">
                 <a:solidFill>
                   <a:srgbClr val="3FD0C8"/>
                 </a:solidFill>
@@ -7644,13 +7644,112 @@
               <a:t>•  </a:t>
             </a:r>
             <a:r>
-              <a:rPr sz="1100" b="0">
-                <a:solidFill>
-                  <a:srgbClr val="8B949E"/>
-                </a:solidFill>
-                <a:latin typeface="Segoe UI"/>
-              </a:rPr>
-              <a:t>Ogni CPU ha la sua copia: nessun lock, nessuna contesa.</a:t>
+              <a:rPr sz="1100" b="0" dirty="0" err="1">
+                <a:solidFill>
+                  <a:srgbClr val="8B949E"/>
+                </a:solidFill>
+                <a:latin typeface="Segoe UI"/>
+              </a:rPr>
+              <a:t>Ogni</a:t>
+            </a:r>
+            <a:r>
+              <a:rPr sz="1100" b="0" dirty="0">
+                <a:solidFill>
+                  <a:srgbClr val="8B949E"/>
+                </a:solidFill>
+                <a:latin typeface="Segoe UI"/>
+              </a:rPr>
+              <a:t> CPU ha la </a:t>
+            </a:r>
+            <a:r>
+              <a:rPr sz="1100" b="0" dirty="0" err="1">
+                <a:solidFill>
+                  <a:srgbClr val="8B949E"/>
+                </a:solidFill>
+                <a:latin typeface="Segoe UI"/>
+              </a:rPr>
+              <a:t>sua</a:t>
+            </a:r>
+            <a:r>
+              <a:rPr sz="1100" b="0" dirty="0">
+                <a:solidFill>
+                  <a:srgbClr val="8B949E"/>
+                </a:solidFill>
+                <a:latin typeface="Segoe UI"/>
+              </a:rPr>
+              <a:t> </a:t>
+            </a:r>
+            <a:r>
+              <a:rPr sz="1100" b="0" dirty="0" err="1">
+                <a:solidFill>
+                  <a:srgbClr val="8B949E"/>
+                </a:solidFill>
+                <a:latin typeface="Segoe UI"/>
+              </a:rPr>
+              <a:t>copia</a:t>
+            </a:r>
+            <a:r>
+              <a:rPr sz="1100" b="0" dirty="0">
+                <a:solidFill>
+                  <a:srgbClr val="8B949E"/>
+                </a:solidFill>
+                <a:latin typeface="Segoe UI"/>
+              </a:rPr>
+              <a:t>: </a:t>
+            </a:r>
+            <a:r>
+              <a:rPr sz="1100" b="0" dirty="0" err="1">
+                <a:solidFill>
+                  <a:srgbClr val="8B949E"/>
+                </a:solidFill>
+                <a:latin typeface="Segoe UI"/>
+              </a:rPr>
+              <a:t>nessun</a:t>
+            </a:r>
+            <a:r>
+              <a:rPr sz="1100" b="0" dirty="0">
+                <a:solidFill>
+                  <a:srgbClr val="8B949E"/>
+                </a:solidFill>
+                <a:latin typeface="Segoe UI"/>
+              </a:rPr>
+              <a:t> lock, </a:t>
+            </a:r>
+            <a:r>
+              <a:rPr sz="1100" b="0" dirty="0" err="1">
+                <a:solidFill>
+                  <a:srgbClr val="8B949E"/>
+                </a:solidFill>
+                <a:latin typeface="Segoe UI"/>
+              </a:rPr>
+              <a:t>nessuna</a:t>
+            </a:r>
+            <a:r>
+              <a:rPr sz="1100" b="0" dirty="0">
+                <a:solidFill>
+                  <a:srgbClr val="8B949E"/>
+                </a:solidFill>
+                <a:latin typeface="Segoe UI"/>
+              </a:rPr>
+              <a:t> </a:t>
+            </a:r>
+            <a:r>
+              <a:rPr sz="1100" b="0" dirty="0" err="1">
+                <a:solidFill>
+                  <a:srgbClr val="8B949E"/>
+                </a:solidFill>
+                <a:latin typeface="Segoe UI"/>
+              </a:rPr>
+              <a:t>contesa</a:t>
+            </a:r>
+            <a:r>
+              <a:rPr sz="1100" b="0" dirty="0">
+                <a:solidFill>
+                  <a:srgbClr val="8B949E"/>
+                </a:solidFill>
+                <a:latin typeface="Segoe UI"/>
+              </a:rPr>
+              <a:t>.</a:t>
             </a:r>
           </a:p>
           <a:p>
@@ -7666,7 +7765,7 @@
               </a:spcAft>
             </a:pPr>
             <a:r>
-              <a:rPr sz="1100" b="0">
+              <a:rPr sz="1100" b="0" dirty="0">
                 <a:solidFill>
                   <a:srgbClr val="3FD0C8"/>
                 </a:solidFill>
@@ -7675,13 +7774,85 @@
               <a:t>•  </a:t>
             </a:r>
             <a:r>
-              <a:rPr sz="1100" b="0">
-                <a:solidFill>
-                  <a:srgbClr val="8B949E"/>
-                </a:solidFill>
-                <a:latin typeface="Segoe UI"/>
-              </a:rPr>
-              <a:t>I layer leggono/scrivono le attivazioni intermedie qui.</a:t>
+              <a:rPr sz="1100" b="0" dirty="0">
+                <a:solidFill>
+                  <a:srgbClr val="8B949E"/>
+                </a:solidFill>
+                <a:latin typeface="Segoe UI"/>
+              </a:rPr>
+              <a:t>I layer </a:t>
+            </a:r>
+            <a:r>
+              <a:rPr sz="1100" b="0" dirty="0" err="1">
+                <a:solidFill>
+                  <a:srgbClr val="8B949E"/>
+                </a:solidFill>
+                <a:latin typeface="Segoe UI"/>
+              </a:rPr>
+              <a:t>leggono</a:t>
+            </a:r>
+            <a:r>
+              <a:rPr sz="1100" b="0" dirty="0">
+                <a:solidFill>
+                  <a:srgbClr val="8B949E"/>
+                </a:solidFill>
+                <a:latin typeface="Segoe UI"/>
+              </a:rPr>
+              <a:t>/</a:t>
+            </a:r>
+            <a:r>
+              <a:rPr sz="1100" b="0" dirty="0" err="1">
+                <a:solidFill>
+                  <a:srgbClr val="8B949E"/>
+                </a:solidFill>
+                <a:latin typeface="Segoe UI"/>
+              </a:rPr>
+              <a:t>scrivono</a:t>
+            </a:r>
+            <a:r>
+              <a:rPr sz="1100" b="0" dirty="0">
+                <a:solidFill>
+                  <a:srgbClr val="8B949E"/>
+                </a:solidFill>
+                <a:latin typeface="Segoe UI"/>
+              </a:rPr>
+              <a:t> le </a:t>
+            </a:r>
+            <a:r>
+              <a:rPr sz="1100" b="0" dirty="0" err="1">
+                <a:solidFill>
+                  <a:srgbClr val="8B949E"/>
+                </a:solidFill>
+                <a:latin typeface="Segoe UI"/>
+              </a:rPr>
+              <a:t>attivazioni</a:t>
+            </a:r>
+            <a:r>
+              <a:rPr sz="1100" b="0" dirty="0">
+                <a:solidFill>
+                  <a:srgbClr val="8B949E"/>
+                </a:solidFill>
+                <a:latin typeface="Segoe UI"/>
+              </a:rPr>
+              <a:t> </a:t>
+            </a:r>
+            <a:r>
+              <a:rPr sz="1100" b="0" dirty="0" err="1">
+                <a:solidFill>
+                  <a:srgbClr val="8B949E"/>
+                </a:solidFill>
+                <a:latin typeface="Segoe UI"/>
+              </a:rPr>
+              <a:t>intermedie</a:t>
+            </a:r>
+            <a:r>
+              <a:rPr sz="1100" b="0" dirty="0">
+                <a:solidFill>
+                  <a:srgbClr val="8B949E"/>
+                </a:solidFill>
+                <a:latin typeface="Segoe UI"/>
+              </a:rPr>
+              <a:t> qui.</a:t>
             </a:r>
           </a:p>
           <a:p>
@@ -7697,7 +7868,7 @@
               </a:spcAft>
             </a:pPr>
             <a:r>
-              <a:rPr sz="1100" b="0">
+              <a:rPr sz="1100" b="0" dirty="0">
                 <a:solidFill>
                   <a:srgbClr val="3FD0C8"/>
                 </a:solidFill>
@@ -7706,13 +7877,31 @@
               <a:t>•  </a:t>
             </a:r>
             <a:r>
-              <a:rPr sz="1100" b="0">
-                <a:solidFill>
-                  <a:srgbClr val="8B949E"/>
-                </a:solidFill>
-                <a:latin typeface="Segoe UI"/>
-              </a:rPr>
-              <a:t>Il layout 65 feature è identico a P1/P2.</a:t>
+              <a:rPr sz="1100" b="0" dirty="0">
+                <a:solidFill>
+                  <a:srgbClr val="8B949E"/>
+                </a:solidFill>
+                <a:latin typeface="Segoe UI"/>
+              </a:rPr>
+              <a:t>Il layout 65 feature è </a:t>
+            </a:r>
+            <a:r>
+              <a:rPr sz="1100" b="0" dirty="0" err="1">
+                <a:solidFill>
+                  <a:srgbClr val="8B949E"/>
+                </a:solidFill>
+                <a:latin typeface="Segoe UI"/>
+              </a:rPr>
+              <a:t>identico</a:t>
+            </a:r>
+            <a:r>
+              <a:rPr sz="1100" b="0" dirty="0">
+                <a:solidFill>
+                  <a:srgbClr val="8B949E"/>
+                </a:solidFill>
+                <a:latin typeface="Segoe UI"/>
+              </a:rPr>
+              <a:t> a P1/P2.</a:t>
             </a:r>
           </a:p>
         </p:txBody>
@@ -7772,7 +7961,7 @@
         </p:nvSpPr>
         <p:spPr>
           <a:xfrm>
-            <a:off x="6473952" y="4407407"/>
+            <a:off x="6473952" y="4325112"/>
             <a:ext cx="4892040" cy="1508760"/>
           </a:xfrm>
           <a:prstGeom prst="rect">
@@ -7798,7 +7987,7 @@
               </a:spcAft>
             </a:pPr>
             <a:r>
-              <a:rPr sz="1350" b="1">
+              <a:rPr sz="1350" b="1" dirty="0">
                 <a:solidFill>
                   <a:srgbClr val="3FD0C8"/>
                 </a:solidFill>
@@ -7820,7 +8009,7 @@
               </a:spcAft>
             </a:pPr>
             <a:r>
-              <a:rPr sz="1100" b="0">
+              <a:rPr sz="1100" b="0" dirty="0">
                 <a:solidFill>
                   <a:srgbClr val="3FD0C8"/>
                 </a:solidFill>
@@ -7829,13 +8018,85 @@
               <a:t>•  </a:t>
             </a:r>
             <a:r>
-              <a:rPr sz="1100" b="0">
-                <a:solidFill>
-                  <a:srgbClr val="8B949E"/>
-                </a:solidFill>
-                <a:latin typeface="Segoe UI"/>
-              </a:rPr>
-              <a:t>dispatcher -&gt; layer_first (hop 0, sparso) -&gt; layer_hidden x (n_layers-1) (denso).</a:t>
+              <a:rPr sz="1100" b="0" dirty="0">
+                <a:solidFill>
+                  <a:srgbClr val="8B949E"/>
+                </a:solidFill>
+                <a:latin typeface="Segoe UI"/>
+              </a:rPr>
+              <a:t>dispatcher -&gt; </a:t>
+            </a:r>
+            <a:r>
+              <a:rPr sz="1100" b="0" dirty="0" err="1">
+                <a:solidFill>
+                  <a:srgbClr val="8B949E"/>
+                </a:solidFill>
+                <a:latin typeface="Segoe UI"/>
+              </a:rPr>
+              <a:t>layer_first</a:t>
+            </a:r>
+            <a:r>
+              <a:rPr sz="1100" b="0" dirty="0">
+                <a:solidFill>
+                  <a:srgbClr val="8B949E"/>
+                </a:solidFill>
+                <a:latin typeface="Segoe UI"/>
+              </a:rPr>
+              <a:t> (hop 0, </a:t>
+            </a:r>
+            <a:r>
+              <a:rPr sz="1100" b="0" dirty="0" err="1">
+                <a:solidFill>
+                  <a:srgbClr val="8B949E"/>
+                </a:solidFill>
+                <a:latin typeface="Segoe UI"/>
+              </a:rPr>
+              <a:t>sparso</a:t>
+            </a:r>
+            <a:r>
+              <a:rPr sz="1100" b="0" dirty="0">
+                <a:solidFill>
+                  <a:srgbClr val="8B949E"/>
+                </a:solidFill>
+                <a:latin typeface="Segoe UI"/>
+              </a:rPr>
+              <a:t>) -&gt; </a:t>
+            </a:r>
+            <a:r>
+              <a:rPr sz="1100" b="0" dirty="0" err="1">
+                <a:solidFill>
+                  <a:srgbClr val="8B949E"/>
+                </a:solidFill>
+                <a:latin typeface="Segoe UI"/>
+              </a:rPr>
+              <a:t>layer_hidden</a:t>
+            </a:r>
+            <a:r>
+              <a:rPr sz="1100" b="0" dirty="0">
+                <a:solidFill>
+                  <a:srgbClr val="8B949E"/>
+                </a:solidFill>
+                <a:latin typeface="Segoe UI"/>
+              </a:rPr>
+              <a:t> x (n_layers-1) (</a:t>
+            </a:r>
+            <a:r>
+              <a:rPr sz="1100" b="0" dirty="0" err="1">
+                <a:solidFill>
+                  <a:srgbClr val="8B949E"/>
+                </a:solidFill>
+                <a:latin typeface="Segoe UI"/>
+              </a:rPr>
+              <a:t>denso</a:t>
+            </a:r>
+            <a:r>
+              <a:rPr sz="1100" b="0" dirty="0">
+                <a:solidFill>
+                  <a:srgbClr val="8B949E"/>
+                </a:solidFill>
+                <a:latin typeface="Segoe UI"/>
+              </a:rPr>
+              <a:t>).</a:t>
             </a:r>
           </a:p>
           <a:p>
@@ -7851,7 +8112,7 @@
               </a:spcAft>
             </a:pPr>
             <a:r>
-              <a:rPr sz="1100" b="0">
+              <a:rPr sz="1100" b="0" dirty="0">
                 <a:solidFill>
                   <a:srgbClr val="3FD0C8"/>
                 </a:solidFill>
@@ -7860,13 +8121,202 @@
               <a:t>•  </a:t>
             </a:r>
             <a:r>
-              <a:rPr sz="1100" b="0">
-                <a:solidFill>
-                  <a:srgbClr val="8B949E"/>
-                </a:solidFill>
-                <a:latin typeface="Segoe UI"/>
-              </a:rPr>
-              <a:t>Cambiare architettura = cambiare layer_shapes/layer_registry (pesi + forma), MAI la sequenza dei tail-call: slot0=layer_first, slot1..15=layer_hidden sempre uguali.</a:t>
+              <a:rPr sz="1100" b="0" dirty="0" err="1">
+                <a:solidFill>
+                  <a:srgbClr val="8B949E"/>
+                </a:solidFill>
+                <a:latin typeface="Segoe UI"/>
+              </a:rPr>
+              <a:t>Cambiare</a:t>
+            </a:r>
+            <a:r>
+              <a:rPr sz="1100" b="0" dirty="0">
+                <a:solidFill>
+                  <a:srgbClr val="8B949E"/>
+                </a:solidFill>
+                <a:latin typeface="Segoe UI"/>
+              </a:rPr>
+              <a:t> </a:t>
+            </a:r>
+            <a:r>
+              <a:rPr sz="1100" b="0" dirty="0" err="1">
+                <a:solidFill>
+                  <a:srgbClr val="8B949E"/>
+                </a:solidFill>
+                <a:latin typeface="Segoe UI"/>
+              </a:rPr>
+              <a:t>architettura</a:t>
+            </a:r>
+            <a:r>
+              <a:rPr sz="1100" b="0" dirty="0">
+                <a:solidFill>
+                  <a:srgbClr val="8B949E"/>
+                </a:solidFill>
+                <a:latin typeface="Segoe UI"/>
+              </a:rPr>
+              <a:t> = </a:t>
+            </a:r>
+            <a:r>
+              <a:rPr sz="1100" b="0" dirty="0" err="1">
+                <a:solidFill>
+                  <a:srgbClr val="8B949E"/>
+                </a:solidFill>
+                <a:latin typeface="Segoe UI"/>
+              </a:rPr>
+              <a:t>cambiare</a:t>
+            </a:r>
+            <a:r>
+              <a:rPr sz="1100" b="0" dirty="0">
+                <a:solidFill>
+                  <a:srgbClr val="8B949E"/>
+                </a:solidFill>
+                <a:latin typeface="Segoe UI"/>
+              </a:rPr>
+              <a:t> </a:t>
+            </a:r>
+            <a:r>
+              <a:rPr sz="1100" b="0" dirty="0" err="1">
+                <a:solidFill>
+                  <a:srgbClr val="8B949E"/>
+                </a:solidFill>
+                <a:latin typeface="Segoe UI"/>
+              </a:rPr>
+              <a:t>layer_shapes</a:t>
+            </a:r>
+            <a:r>
+              <a:rPr sz="1100" b="0" dirty="0">
+                <a:solidFill>
+                  <a:srgbClr val="8B949E"/>
+                </a:solidFill>
+                <a:latin typeface="Segoe UI"/>
+              </a:rPr>
+              <a:t>/</a:t>
+            </a:r>
+            <a:r>
+              <a:rPr sz="1100" b="0" dirty="0" err="1">
+                <a:solidFill>
+                  <a:srgbClr val="8B949E"/>
+                </a:solidFill>
+                <a:latin typeface="Segoe UI"/>
+              </a:rPr>
+              <a:t>layer_registry</a:t>
+            </a:r>
+            <a:r>
+              <a:rPr sz="1100" b="0" dirty="0">
+                <a:solidFill>
+                  <a:srgbClr val="8B949E"/>
+                </a:solidFill>
+                <a:latin typeface="Segoe UI"/>
+              </a:rPr>
+              <a:t> (</a:t>
+            </a:r>
+            <a:r>
+              <a:rPr sz="1100" b="0" dirty="0" err="1">
+                <a:solidFill>
+                  <a:srgbClr val="8B949E"/>
+                </a:solidFill>
+                <a:latin typeface="Segoe UI"/>
+              </a:rPr>
+              <a:t>pesi</a:t>
+            </a:r>
+            <a:r>
+              <a:rPr sz="1100" b="0" dirty="0">
+                <a:solidFill>
+                  <a:srgbClr val="8B949E"/>
+                </a:solidFill>
+                <a:latin typeface="Segoe UI"/>
+              </a:rPr>
+              <a:t> + forma), MAI la </a:t>
+            </a:r>
+            <a:r>
+              <a:rPr sz="1100" b="0" dirty="0" err="1">
+                <a:solidFill>
+                  <a:srgbClr val="8B949E"/>
+                </a:solidFill>
+                <a:latin typeface="Segoe UI"/>
+              </a:rPr>
+              <a:t>sequenza</a:t>
+            </a:r>
+            <a:r>
+              <a:rPr sz="1100" b="0" dirty="0">
+                <a:solidFill>
+                  <a:srgbClr val="8B949E"/>
+                </a:solidFill>
+                <a:latin typeface="Segoe UI"/>
+              </a:rPr>
+              <a:t> </a:t>
+            </a:r>
+            <a:r>
+              <a:rPr sz="1100" b="0" dirty="0" err="1">
+                <a:solidFill>
+                  <a:srgbClr val="8B949E"/>
+                </a:solidFill>
+                <a:latin typeface="Segoe UI"/>
+              </a:rPr>
+              <a:t>dei</a:t>
+            </a:r>
+            <a:r>
+              <a:rPr sz="1100" b="0" dirty="0">
+                <a:solidFill>
+                  <a:srgbClr val="8B949E"/>
+                </a:solidFill>
+                <a:latin typeface="Segoe UI"/>
+              </a:rPr>
+              <a:t> tail-call: slot0=</a:t>
+            </a:r>
+            <a:r>
+              <a:rPr sz="1100" b="0" dirty="0" err="1">
+                <a:solidFill>
+                  <a:srgbClr val="8B949E"/>
+                </a:solidFill>
+                <a:latin typeface="Segoe UI"/>
+              </a:rPr>
+              <a:t>layer_first</a:t>
+            </a:r>
+            <a:r>
+              <a:rPr sz="1100" b="0" dirty="0">
+                <a:solidFill>
+                  <a:srgbClr val="8B949E"/>
+                </a:solidFill>
+                <a:latin typeface="Segoe UI"/>
+              </a:rPr>
+              <a:t>, slot1..15=</a:t>
+            </a:r>
+            <a:r>
+              <a:rPr sz="1100" b="0" dirty="0" err="1">
+                <a:solidFill>
+                  <a:srgbClr val="8B949E"/>
+                </a:solidFill>
+                <a:latin typeface="Segoe UI"/>
+              </a:rPr>
+              <a:t>layer_hidden</a:t>
+            </a:r>
+            <a:r>
+              <a:rPr sz="1100" b="0" dirty="0">
+                <a:solidFill>
+                  <a:srgbClr val="8B949E"/>
+                </a:solidFill>
+                <a:latin typeface="Segoe UI"/>
+              </a:rPr>
+              <a:t> sempre </a:t>
+            </a:r>
+            <a:r>
+              <a:rPr sz="1100" b="0" dirty="0" err="1">
+                <a:solidFill>
+                  <a:srgbClr val="8B949E"/>
+                </a:solidFill>
+                <a:latin typeface="Segoe UI"/>
+              </a:rPr>
+              <a:t>uguali</a:t>
+            </a:r>
+            <a:r>
+              <a:rPr sz="1100" b="0" dirty="0">
+                <a:solidFill>
+                  <a:srgbClr val="8B949E"/>
+                </a:solidFill>
+                <a:latin typeface="Segoe UI"/>
+              </a:rPr>
+              <a:t>.</a:t>
             </a:r>
           </a:p>
           <a:p>
@@ -7882,7 +8332,7 @@
               </a:spcAft>
             </a:pPr>
             <a:r>
-              <a:rPr sz="1100" b="0">
+              <a:rPr sz="1100" b="0" dirty="0">
                 <a:solidFill>
                   <a:srgbClr val="3FD0C8"/>
                 </a:solidFill>
@@ -7891,13 +8341,202 @@
               <a:t>•  </a:t>
             </a:r>
             <a:r>
-              <a:rPr sz="1100" b="0">
-                <a:solidFill>
-                  <a:srgbClr val="8B949E"/>
-                </a:solidFill>
-                <a:latin typeface="Segoe UI"/>
-              </a:rPr>
-              <a:t>Massima flessibilita (profondita E larghezza dinamiche), al costo di N tail call per pacchetto (dipende dalla profondita del modello).</a:t>
+              <a:rPr sz="1100" b="0" dirty="0" err="1">
+                <a:solidFill>
+                  <a:srgbClr val="8B949E"/>
+                </a:solidFill>
+                <a:latin typeface="Segoe UI"/>
+              </a:rPr>
+              <a:t>Massima</a:t>
+            </a:r>
+            <a:r>
+              <a:rPr sz="1100" b="0" dirty="0">
+                <a:solidFill>
+                  <a:srgbClr val="8B949E"/>
+                </a:solidFill>
+                <a:latin typeface="Segoe UI"/>
+              </a:rPr>
+              <a:t> </a:t>
+            </a:r>
+            <a:r>
+              <a:rPr sz="1100" b="0" dirty="0" err="1">
+                <a:solidFill>
+                  <a:srgbClr val="8B949E"/>
+                </a:solidFill>
+                <a:latin typeface="Segoe UI"/>
+              </a:rPr>
+              <a:t>flessibilita</a:t>
+            </a:r>
+            <a:r>
+              <a:rPr sz="1100" b="0" dirty="0">
+                <a:solidFill>
+                  <a:srgbClr val="8B949E"/>
+                </a:solidFill>
+                <a:latin typeface="Segoe UI"/>
+              </a:rPr>
+              <a:t> (</a:t>
+            </a:r>
+            <a:r>
+              <a:rPr sz="1100" b="0" dirty="0" err="1">
+                <a:solidFill>
+                  <a:srgbClr val="8B949E"/>
+                </a:solidFill>
+                <a:latin typeface="Segoe UI"/>
+              </a:rPr>
+              <a:t>profondita</a:t>
+            </a:r>
+            <a:r>
+              <a:rPr sz="1100" b="0" dirty="0">
+                <a:solidFill>
+                  <a:srgbClr val="8B949E"/>
+                </a:solidFill>
+                <a:latin typeface="Segoe UI"/>
+              </a:rPr>
+              <a:t> E </a:t>
+            </a:r>
+            <a:r>
+              <a:rPr sz="1100" b="0" dirty="0" err="1">
+                <a:solidFill>
+                  <a:srgbClr val="8B949E"/>
+                </a:solidFill>
+                <a:latin typeface="Segoe UI"/>
+              </a:rPr>
+              <a:t>larghezza</a:t>
+            </a:r>
+            <a:r>
+              <a:rPr sz="1100" b="0" dirty="0">
+                <a:solidFill>
+                  <a:srgbClr val="8B949E"/>
+                </a:solidFill>
+                <a:latin typeface="Segoe UI"/>
+              </a:rPr>
+              <a:t> </a:t>
+            </a:r>
+            <a:r>
+              <a:rPr sz="1100" b="0" dirty="0" err="1">
+                <a:solidFill>
+                  <a:srgbClr val="8B949E"/>
+                </a:solidFill>
+                <a:latin typeface="Segoe UI"/>
+              </a:rPr>
+              <a:t>dinamiche</a:t>
+            </a:r>
+            <a:r>
+              <a:rPr sz="1100" b="0" dirty="0">
+                <a:solidFill>
+                  <a:srgbClr val="8B949E"/>
+                </a:solidFill>
+                <a:latin typeface="Segoe UI"/>
+              </a:rPr>
+              <a:t>), al </a:t>
+            </a:r>
+            <a:r>
+              <a:rPr sz="1100" b="0" dirty="0" err="1">
+                <a:solidFill>
+                  <a:srgbClr val="8B949E"/>
+                </a:solidFill>
+                <a:latin typeface="Segoe UI"/>
+              </a:rPr>
+              <a:t>costo</a:t>
+            </a:r>
+            <a:r>
+              <a:rPr sz="1100" b="0" dirty="0">
+                <a:solidFill>
+                  <a:srgbClr val="8B949E"/>
+                </a:solidFill>
+                <a:latin typeface="Segoe UI"/>
+              </a:rPr>
+              <a:t> di N tail call per </a:t>
+            </a:r>
+            <a:r>
+              <a:rPr sz="1100" b="0" dirty="0" err="1">
+                <a:solidFill>
+                  <a:srgbClr val="8B949E"/>
+                </a:solidFill>
+                <a:latin typeface="Segoe UI"/>
+              </a:rPr>
+              <a:t>pacchetto</a:t>
+            </a:r>
+            <a:r>
+              <a:rPr sz="1100" b="0" dirty="0">
+                <a:solidFill>
+                  <a:srgbClr val="8B949E"/>
+                </a:solidFill>
+                <a:latin typeface="Segoe UI"/>
+              </a:rPr>
+              <a:t> (</a:t>
+            </a:r>
+            <a:r>
+              <a:rPr sz="1100" b="0" dirty="0" err="1">
+                <a:solidFill>
+                  <a:srgbClr val="8B949E"/>
+                </a:solidFill>
+                <a:latin typeface="Segoe UI"/>
+              </a:rPr>
+              <a:t>dipende</a:t>
+            </a:r>
+            <a:r>
+              <a:rPr sz="1100" b="0" dirty="0">
+                <a:solidFill>
+                  <a:srgbClr val="8B949E"/>
+                </a:solidFill>
+                <a:latin typeface="Segoe UI"/>
+              </a:rPr>
+              <a:t> </a:t>
+            </a:r>
+            <a:r>
+              <a:rPr sz="1100" b="0" dirty="0" err="1">
+                <a:solidFill>
+                  <a:srgbClr val="8B949E"/>
+                </a:solidFill>
+                <a:latin typeface="Segoe UI"/>
+              </a:rPr>
+              <a:t>dalla</a:t>
+            </a:r>
+            <a:r>
+              <a:rPr sz="1100" b="0" dirty="0">
+                <a:solidFill>
+                  <a:srgbClr val="8B949E"/>
+                </a:solidFill>
+                <a:latin typeface="Segoe UI"/>
+              </a:rPr>
+              <a:t> </a:t>
+            </a:r>
+            <a:r>
+              <a:rPr sz="1100" b="0" dirty="0" err="1">
+                <a:solidFill>
+                  <a:srgbClr val="8B949E"/>
+                </a:solidFill>
+                <a:latin typeface="Segoe UI"/>
+              </a:rPr>
+              <a:t>profondita</a:t>
+            </a:r>
+            <a:r>
+              <a:rPr sz="1100" b="0" dirty="0">
+                <a:solidFill>
+                  <a:srgbClr val="8B949E"/>
+                </a:solidFill>
+                <a:latin typeface="Segoe UI"/>
+              </a:rPr>
+              <a:t> del </a:t>
+            </a:r>
+            <a:r>
+              <a:rPr sz="1100" b="0" dirty="0" err="1">
+                <a:solidFill>
+                  <a:srgbClr val="8B949E"/>
+                </a:solidFill>
+                <a:latin typeface="Segoe UI"/>
+              </a:rPr>
+              <a:t>modello</a:t>
+            </a:r>
+            <a:r>
+              <a:rPr sz="1100" b="0" dirty="0">
+                <a:solidFill>
+                  <a:srgbClr val="8B949E"/>
+                </a:solidFill>
+                <a:latin typeface="Segoe UI"/>
+              </a:rPr>
+              <a:t>).</a:t>
             </a:r>
           </a:p>
         </p:txBody>
@@ -10596,7 +11235,7 @@
                     <a:lstStyle/>
                     <a:p>
                       <a:r>
-                        <a:rPr>
+                        <a:rPr dirty="0">
                           <a:solidFill>
                             <a:schemeClr val="bg1"/>
                           </a:solidFill>
@@ -11507,11 +12146,17 @@
           <p:cNvGraphicFramePr>
             <a:graphicFrameLocks noGrp="1"/>
           </p:cNvGraphicFramePr>
-          <p:nvPr/>
+          <p:nvPr>
+            <p:extLst>
+              <p:ext uri="{D42A27DB-BD31-4B8C-83A1-F6EECF244321}">
+                <p14:modId xmlns:p14="http://schemas.microsoft.com/office/powerpoint/2010/main" val="142994494"/>
+              </p:ext>
+            </p:extLst>
+          </p:nvPr>
         </p:nvGraphicFramePr>
         <p:xfrm>
           <a:off x="640080" y="2011680"/>
-          <a:ext cx="8586216" cy="2297176"/>
+          <a:ext cx="8586216" cy="2464816"/>
         </p:xfrm>
         <a:graphic>
           <a:graphicData uri="http://schemas.openxmlformats.org/drawingml/2006/table">
@@ -11677,13 +12322,11 @@
                     <a:bodyPr/>
                     <a:lstStyle/>
                     <a:p>
-                      <a:pPr algn="r"/>
                       <a:r>
-                        <a:rPr sz="1250" b="0">
+                        <a:rPr>
                           <a:solidFill>
-                            <a:srgbClr val="E6EDF3"/>
+                            <a:schemeClr val="bg1"/>
                           </a:solidFill>
-                          <a:latin typeface="Consolas"/>
                         </a:rPr>
                         <a:t>n/d (nel costo add)</a:t>
                       </a:r>
@@ -11700,15 +12343,13 @@
                     <a:bodyPr/>
                     <a:lstStyle/>
                     <a:p>
-                      <a:pPr algn="r"/>
                       <a:r>
-                        <a:rPr sz="1250" b="0">
+                        <a:rPr>
                           <a:solidFill>
-                            <a:srgbClr val="E6EDF3"/>
+                            <a:schemeClr val="bg1"/>
                           </a:solidFill>
-                          <a:latin typeface="Consolas"/>
                         </a:rPr>
-                        <a:t>2 137.812</a:t>
+                        <a:t>1 332.624</a:t>
                       </a:r>
                     </a:p>
                   </a:txBody>
@@ -11723,15 +12364,13 @@
                     <a:bodyPr/>
                     <a:lstStyle/>
                     <a:p>
-                      <a:pPr algn="r"/>
                       <a:r>
-                        <a:rPr sz="1250" b="0">
+                        <a:rPr>
                           <a:solidFill>
-                            <a:srgbClr val="E6EDF3"/>
+                            <a:schemeClr val="bg1"/>
                           </a:solidFill>
-                          <a:latin typeface="Consolas"/>
                         </a:rPr>
-                        <a:t>2 425.498</a:t>
+                        <a:t>1 165.954</a:t>
                       </a:r>
                     </a:p>
                   </a:txBody>
@@ -11776,15 +12415,13 @@
                     <a:bodyPr/>
                     <a:lstStyle/>
                     <a:p>
-                      <a:pPr algn="r"/>
                       <a:r>
-                        <a:rPr sz="1250" b="0">
+                        <a:rPr>
                           <a:solidFill>
-                            <a:srgbClr val="E6EDF3"/>
+                            <a:schemeClr val="bg1"/>
                           </a:solidFill>
-                          <a:latin typeface="Consolas"/>
                         </a:rPr>
-                        <a:t>1 893.448</a:t>
+                        <a:t>1 122.082</a:t>
                       </a:r>
                     </a:p>
                   </a:txBody>
@@ -11799,15 +12436,13 @@
                     <a:bodyPr/>
                     <a:lstStyle/>
                     <a:p>
-                      <a:pPr algn="r"/>
                       <a:r>
-                        <a:rPr sz="1250" b="0">
+                        <a:rPr>
                           <a:solidFill>
-                            <a:srgbClr val="E6EDF3"/>
+                            <a:schemeClr val="bg1"/>
                           </a:solidFill>
-                          <a:latin typeface="Consolas"/>
                         </a:rPr>
-                        <a:t>2.143</a:t>
+                        <a:t>1.629</a:t>
                       </a:r>
                     </a:p>
                   </a:txBody>
@@ -11822,15 +12457,13 @@
                     <a:bodyPr/>
                     <a:lstStyle/>
                     <a:p>
-                      <a:pPr algn="r"/>
                       <a:r>
-                        <a:rPr sz="1250" b="0">
+                        <a:rPr>
                           <a:solidFill>
-                            <a:srgbClr val="E6EDF3"/>
+                            <a:schemeClr val="bg1"/>
                           </a:solidFill>
-                          <a:latin typeface="Consolas"/>
                         </a:rPr>
-                        <a:t>2.801</a:t>
+                        <a:t>1.100</a:t>
                       </a:r>
                     </a:p>
                   </a:txBody>
@@ -11875,15 +12508,13 @@
                     <a:bodyPr/>
                     <a:lstStyle/>
                     <a:p>
-                      <a:pPr algn="r"/>
                       <a:r>
-                        <a:rPr sz="1250" b="0">
+                        <a:rPr>
                           <a:solidFill>
-                            <a:srgbClr val="E6EDF3"/>
+                            <a:schemeClr val="bg1"/>
                           </a:solidFill>
-                          <a:latin typeface="Consolas"/>
                         </a:rPr>
-                        <a:t>1 420.993</a:t>
+                        <a:t>886.545</a:t>
                       </a:r>
                     </a:p>
                   </a:txBody>
@@ -11898,15 +12529,13 @@
                     <a:bodyPr/>
                     <a:lstStyle/>
                     <a:p>
-                      <a:pPr algn="r"/>
                       <a:r>
-                        <a:rPr sz="1250" b="0">
+                        <a:rPr>
                           <a:solidFill>
-                            <a:srgbClr val="E6EDF3"/>
+                            <a:schemeClr val="bg1"/>
                           </a:solidFill>
-                          <a:latin typeface="Consolas"/>
                         </a:rPr>
-                        <a:t>1.395</a:t>
+                        <a:t>1.032</a:t>
                       </a:r>
                     </a:p>
                   </a:txBody>
@@ -11921,15 +12550,13 @@
                     <a:bodyPr/>
                     <a:lstStyle/>
                     <a:p>
-                      <a:pPr algn="r"/>
                       <a:r>
-                        <a:rPr sz="1250" b="0">
+                        <a:rPr>
                           <a:solidFill>
-                            <a:srgbClr val="E6EDF3"/>
+                            <a:schemeClr val="bg1"/>
                           </a:solidFill>
-                          <a:latin typeface="Consolas"/>
                         </a:rPr>
-                        <a:t>1.802</a:t>
+                        <a:t>0.850</a:t>
                       </a:r>
                     </a:p>
                   </a:txBody>
@@ -11974,15 +12601,13 @@
                     <a:bodyPr/>
                     <a:lstStyle/>
                     <a:p>
-                      <a:pPr algn="r"/>
                       <a:r>
-                        <a:rPr sz="1250" b="0">
+                        <a:rPr>
                           <a:solidFill>
-                            <a:srgbClr val="E6EDF3"/>
+                            <a:schemeClr val="bg1"/>
                           </a:solidFill>
-                          <a:latin typeface="Consolas"/>
                         </a:rPr>
-                        <a:t>2 829.601</a:t>
+                        <a:t>1 498.204</a:t>
                       </a:r>
                     </a:p>
                   </a:txBody>
@@ -11997,15 +12622,13 @@
                     <a:bodyPr/>
                     <a:lstStyle/>
                     <a:p>
-                      <a:pPr algn="r"/>
                       <a:r>
-                        <a:rPr sz="1250" b="0">
+                        <a:rPr>
                           <a:solidFill>
-                            <a:srgbClr val="E6EDF3"/>
+                            <a:schemeClr val="bg1"/>
                           </a:solidFill>
-                          <a:latin typeface="Consolas"/>
                         </a:rPr>
-                        <a:t>2.656</a:t>
+                        <a:t>2.002</a:t>
                       </a:r>
                     </a:p>
                   </a:txBody>
@@ -12020,15 +12643,13 @@
                     <a:bodyPr/>
                     <a:lstStyle/>
                     <a:p>
-                      <a:pPr algn="r"/>
                       <a:r>
-                        <a:rPr sz="1250" b="0">
+                        <a:rPr>
                           <a:solidFill>
-                            <a:srgbClr val="E6EDF3"/>
+                            <a:schemeClr val="bg1"/>
                           </a:solidFill>
-                          <a:latin typeface="Consolas"/>
                         </a:rPr>
-                        <a:t>4.454</a:t>
+                        <a:t>1.553</a:t>
                       </a:r>
                     </a:p>
                   </a:txBody>
@@ -12073,15 +12694,13 @@
                     <a:bodyPr/>
                     <a:lstStyle/>
                     <a:p>
-                      <a:pPr algn="r"/>
                       <a:r>
-                        <a:rPr sz="1250" b="0">
+                        <a:rPr>
                           <a:solidFill>
-                            <a:srgbClr val="E6EDF3"/>
+                            <a:schemeClr val="bg1"/>
                           </a:solidFill>
-                          <a:latin typeface="Consolas"/>
                         </a:rPr>
-                        <a:t>661.970</a:t>
+                        <a:t>268.769</a:t>
                       </a:r>
                     </a:p>
                   </a:txBody>
@@ -12096,15 +12715,13 @@
                     <a:bodyPr/>
                     <a:lstStyle/>
                     <a:p>
-                      <a:pPr algn="r"/>
                       <a:r>
-                        <a:rPr sz="1250" b="0">
+                        <a:rPr>
                           <a:solidFill>
-                            <a:srgbClr val="E6EDF3"/>
+                            <a:schemeClr val="bg1"/>
                           </a:solidFill>
-                          <a:latin typeface="Consolas"/>
                         </a:rPr>
-                        <a:t>0.540</a:t>
+                        <a:t>0.427</a:t>
                       </a:r>
                     </a:p>
                   </a:txBody>
@@ -12119,15 +12736,13 @@
                     <a:bodyPr/>
                     <a:lstStyle/>
                     <a:p>
-                      <a:pPr algn="r"/>
                       <a:r>
-                        <a:rPr sz="1250" b="0">
+                        <a:rPr dirty="0">
                           <a:solidFill>
-                            <a:srgbClr val="E6EDF3"/>
+                            <a:schemeClr val="bg1"/>
                           </a:solidFill>
-                          <a:latin typeface="Consolas"/>
                         </a:rPr>
-                        <a:t>1.177</a:t>
+                        <a:t>0.321</a:t>
                       </a:r>
                     </a:p>
                   </a:txBody>
@@ -12228,7 +12843,7 @@
               </a:spcAft>
             </a:pPr>
             <a:r>
-              <a:rPr sz="1350" b="1">
+              <a:rPr sz="1350" b="1" dirty="0" err="1">
                 <a:solidFill>
                   <a:srgbClr val="3FD0C8"/>
                 </a:solidFill>
@@ -12236,6 +12851,12 @@
               </a:rPr>
               <a:t>Lettura</a:t>
             </a:r>
+            <a:endParaRPr sz="1350" b="1" dirty="0">
+              <a:solidFill>
+                <a:srgbClr val="3FD0C8"/>
+              </a:solidFill>
+              <a:latin typeface="Segoe UI"/>
+            </a:endParaRPr>
           </a:p>
           <a:p>
             <a:pPr algn="l">
@@ -12250,7 +12871,7 @@
               </a:spcAft>
             </a:pPr>
             <a:r>
-              <a:rPr sz="1100" b="0">
+              <a:rPr sz="1100" b="0" dirty="0">
                 <a:solidFill>
                   <a:srgbClr val="3FD0C8"/>
                 </a:solidFill>
@@ -12259,13 +12880,67 @@
               <a:t>•  </a:t>
             </a:r>
             <a:r>
-              <a:rPr sz="1100" b="0">
-                <a:solidFill>
-                  <a:srgbClr val="8B949E"/>
-                </a:solidFill>
-                <a:latin typeface="Segoe UI"/>
-              </a:rPr>
-              <a:t>hardcoded ~700–900× più lento per modello aggiunto.</a:t>
+              <a:rPr sz="1100" b="0" dirty="0">
+                <a:solidFill>
+                  <a:srgbClr val="8B949E"/>
+                </a:solidFill>
+                <a:latin typeface="Segoe UI"/>
+              </a:rPr>
+              <a:t>~690-1020x </a:t>
+            </a:r>
+            <a:r>
+              <a:rPr sz="1100" b="0" dirty="0" err="1">
+                <a:solidFill>
+                  <a:srgbClr val="8B949E"/>
+                </a:solidFill>
+                <a:latin typeface="Segoe UI"/>
+              </a:rPr>
+              <a:t>più</a:t>
+            </a:r>
+            <a:r>
+              <a:rPr sz="1100" b="0" dirty="0">
+                <a:solidFill>
+                  <a:srgbClr val="8B949E"/>
+                </a:solidFill>
+                <a:latin typeface="Segoe UI"/>
+              </a:rPr>
+              <a:t> lento per </a:t>
+            </a:r>
+            <a:r>
+              <a:rPr sz="1100" b="0" dirty="0" err="1">
+                <a:solidFill>
+                  <a:srgbClr val="8B949E"/>
+                </a:solidFill>
+                <a:latin typeface="Segoe UI"/>
+              </a:rPr>
+              <a:t>modello</a:t>
+            </a:r>
+            <a:r>
+              <a:rPr sz="1100" b="0" dirty="0">
+                <a:solidFill>
+                  <a:srgbClr val="8B949E"/>
+                </a:solidFill>
+                <a:latin typeface="Segoe UI"/>
+              </a:rPr>
+              <a:t> </a:t>
+            </a:r>
+            <a:r>
+              <a:rPr sz="1100" b="0" dirty="0" err="1">
+                <a:solidFill>
+                  <a:srgbClr val="8B949E"/>
+                </a:solidFill>
+                <a:latin typeface="Segoe UI"/>
+              </a:rPr>
+              <a:t>aggiunto</a:t>
+            </a:r>
+            <a:r>
+              <a:rPr sz="1100" b="0" dirty="0">
+                <a:solidFill>
+                  <a:srgbClr val="8B949E"/>
+                </a:solidFill>
+                <a:latin typeface="Segoe UI"/>
+              </a:rPr>
+              <a:t>.</a:t>
             </a:r>
           </a:p>
           <a:p>
@@ -12281,7 +12956,7 @@
               </a:spcAft>
             </a:pPr>
             <a:r>
-              <a:rPr sz="1100" b="0">
+              <a:rPr sz="1100" b="0" dirty="0">
                 <a:solidFill>
                   <a:srgbClr val="3FD0C8"/>
                 </a:solidFill>
@@ -12290,13 +12965,31 @@
               <a:t>•  </a:t>
             </a:r>
             <a:r>
-              <a:rPr sz="1100" b="0">
-                <a:solidFill>
-                  <a:srgbClr val="8B949E"/>
-                </a:solidFill>
-                <a:latin typeface="Segoe UI"/>
-              </a:rPr>
-              <a:t>template/modular: solo bpf_map_update_elem.</a:t>
+              <a:rPr sz="1100" b="0" dirty="0">
+                <a:solidFill>
+                  <a:srgbClr val="8B949E"/>
+                </a:solidFill>
+                <a:latin typeface="Segoe UI"/>
+              </a:rPr>
+              <a:t>template/modular: solo </a:t>
+            </a:r>
+            <a:r>
+              <a:rPr sz="1100" b="0" dirty="0" err="1">
+                <a:solidFill>
+                  <a:srgbClr val="8B949E"/>
+                </a:solidFill>
+                <a:latin typeface="Segoe UI"/>
+              </a:rPr>
+              <a:t>bpf_map_update_elem</a:t>
+            </a:r>
+            <a:r>
+              <a:rPr sz="1100" b="0" dirty="0">
+                <a:solidFill>
+                  <a:srgbClr val="8B949E"/>
+                </a:solidFill>
+                <a:latin typeface="Segoe UI"/>
+              </a:rPr>
+              <a:t>.</a:t>
             </a:r>
           </a:p>
           <a:p>
@@ -12312,7 +13005,7 @@
               </a:spcAft>
             </a:pPr>
             <a:r>
-              <a:rPr sz="1100" b="0">
+              <a:rPr sz="1100" b="0" dirty="0">
                 <a:solidFill>
                   <a:srgbClr val="3FD0C8"/>
                 </a:solidFill>
@@ -12321,13 +13014,49 @@
               <a:t>•  </a:t>
             </a:r>
             <a:r>
-              <a:rPr sz="1100" b="0">
-                <a:solidFill>
-                  <a:srgbClr val="8B949E"/>
-                </a:solidFill>
-                <a:latin typeface="Segoe UI"/>
-              </a:rPr>
-              <a:t>setup one-time pagato una sola volta.</a:t>
+              <a:rPr sz="1100" b="0" dirty="0">
+                <a:solidFill>
+                  <a:srgbClr val="8B949E"/>
+                </a:solidFill>
+                <a:latin typeface="Segoe UI"/>
+              </a:rPr>
+              <a:t>setup one-time </a:t>
+            </a:r>
+            <a:r>
+              <a:rPr sz="1100" b="0" dirty="0" err="1">
+                <a:solidFill>
+                  <a:srgbClr val="8B949E"/>
+                </a:solidFill>
+                <a:latin typeface="Segoe UI"/>
+              </a:rPr>
+              <a:t>pagato</a:t>
+            </a:r>
+            <a:r>
+              <a:rPr sz="1100" b="0" dirty="0">
+                <a:solidFill>
+                  <a:srgbClr val="8B949E"/>
+                </a:solidFill>
+                <a:latin typeface="Segoe UI"/>
+              </a:rPr>
+              <a:t> </a:t>
+            </a:r>
+            <a:r>
+              <a:rPr sz="1100" b="0" dirty="0" err="1">
+                <a:solidFill>
+                  <a:srgbClr val="8B949E"/>
+                </a:solidFill>
+                <a:latin typeface="Segoe UI"/>
+              </a:rPr>
+              <a:t>una</a:t>
+            </a:r>
+            <a:r>
+              <a:rPr sz="1100" b="0" dirty="0">
+                <a:solidFill>
+                  <a:srgbClr val="8B949E"/>
+                </a:solidFill>
+                <a:latin typeface="Segoe UI"/>
+              </a:rPr>
+              <a:t> sola volta.</a:t>
             </a:r>
           </a:p>
           <a:p>
@@ -12343,7 +13072,7 @@
               </a:spcAft>
             </a:pPr>
             <a:r>
-              <a:rPr sz="1100" b="0">
+              <a:rPr sz="1100" b="0" dirty="0">
                 <a:solidFill>
                   <a:srgbClr val="3FD0C8"/>
                 </a:solidFill>
@@ -12352,13 +13081,94 @@
               <a:t>•  </a:t>
             </a:r>
             <a:r>
-              <a:rPr sz="1100" b="0">
-                <a:solidFill>
-                  <a:srgbClr val="8B949E"/>
-                </a:solidFill>
-                <a:latin typeface="Segoe UI"/>
-              </a:rPr>
-              <a:t>conferma: più flessibilità = update più economico.</a:t>
+              <a:rPr sz="1100" b="0" dirty="0" err="1">
+                <a:solidFill>
+                  <a:srgbClr val="8B949E"/>
+                </a:solidFill>
+                <a:latin typeface="Segoe UI"/>
+              </a:rPr>
+              <a:t>conferma</a:t>
+            </a:r>
+            <a:r>
+              <a:rPr sz="1100" b="0" dirty="0">
+                <a:solidFill>
+                  <a:srgbClr val="8B949E"/>
+                </a:solidFill>
+                <a:latin typeface="Segoe UI"/>
+              </a:rPr>
+              <a:t>: </a:t>
+            </a:r>
+            <a:r>
+              <a:rPr sz="1100" b="0" dirty="0" err="1">
+                <a:solidFill>
+                  <a:srgbClr val="8B949E"/>
+                </a:solidFill>
+                <a:latin typeface="Segoe UI"/>
+              </a:rPr>
+              <a:t>più</a:t>
+            </a:r>
+            <a:r>
+              <a:rPr sz="1100" b="0" dirty="0">
+                <a:solidFill>
+                  <a:srgbClr val="8B949E"/>
+                </a:solidFill>
+                <a:latin typeface="Segoe UI"/>
+              </a:rPr>
+              <a:t> </a:t>
+            </a:r>
+            <a:r>
+              <a:rPr sz="1100" b="0" dirty="0" err="1">
+                <a:solidFill>
+                  <a:srgbClr val="8B949E"/>
+                </a:solidFill>
+                <a:latin typeface="Segoe UI"/>
+              </a:rPr>
+              <a:t>flessibilità</a:t>
+            </a:r>
+            <a:r>
+              <a:rPr sz="1100" b="0" dirty="0">
+                <a:solidFill>
+                  <a:srgbClr val="8B949E"/>
+                </a:solidFill>
+                <a:latin typeface="Segoe UI"/>
+              </a:rPr>
+              <a:t> = update </a:t>
+            </a:r>
+            <a:r>
+              <a:rPr sz="1100" b="0" dirty="0" err="1">
+                <a:solidFill>
+                  <a:srgbClr val="8B949E"/>
+                </a:solidFill>
+                <a:latin typeface="Segoe UI"/>
+              </a:rPr>
+              <a:t>più</a:t>
+            </a:r>
+            <a:r>
+              <a:rPr sz="1100" b="0" dirty="0">
+                <a:solidFill>
+                  <a:srgbClr val="8B949E"/>
+                </a:solidFill>
+                <a:latin typeface="Segoe UI"/>
+              </a:rPr>
+              <a:t> </a:t>
+            </a:r>
+            <a:r>
+              <a:rPr sz="1100" b="0" dirty="0" err="1">
+                <a:solidFill>
+                  <a:srgbClr val="8B949E"/>
+                </a:solidFill>
+                <a:latin typeface="Segoe UI"/>
+              </a:rPr>
+              <a:t>economico</a:t>
+            </a:r>
+            <a:r>
+              <a:rPr sz="1100" b="0" dirty="0">
+                <a:solidFill>
+                  <a:srgbClr val="8B949E"/>
+                </a:solidFill>
+                <a:latin typeface="Segoe UI"/>
+              </a:rPr>
+              <a:t>.</a:t>
             </a:r>
           </a:p>
         </p:txBody>
@@ -13172,7 +13982,7 @@
                 </a:solidFill>
                 <a:latin typeface="Segoe UI"/>
               </a:rPr>
-              <a:t>Il dispatcher copia link_state[0..5] in scratch_acts.</a:t>
+              <a:t>Solo layer_first (hop 0) legge link_state[0..5], lettura sparsa come P1/P2.</a:t>
             </a:r>
           </a:p>
           <a:p>
@@ -13203,7 +14013,7 @@
                 </a:solidFill>
                 <a:latin typeface="Segoe UI"/>
               </a:rPr>
-              <a:t>I layer-block la trattano come qualunque attivazione.</a:t>
+              <a:t>layer_hidden (hop successivi) non la vede mai: riceve solo scratch_acts gia' calcolato.</a:t>
             </a:r>
           </a:p>
           <a:p>
@@ -13234,7 +14044,7 @@
                 </a:solidFill>
                 <a:latin typeface="Segoe UI"/>
               </a:rPr>
-              <a:t>La feature attraversa la catena di tail call.</a:t>
+              <a:t>Il dispatcher NON tocca link_state: scrive solo 5 slot di meta (model_id, scale, layer_idx, ingress_if, ttl).</a:t>
             </a:r>
           </a:p>
           <a:p>
@@ -13265,7 +14075,7 @@
                 </a:solidFill>
                 <a:latin typeface="Segoe UI"/>
               </a:rPr>
-              <a:t>Massima uniformità del datapath.</a:t>
+              <a:t>Stessa lettura sparsa di P1/P2, non un array denso da 65 slot.</a:t>
             </a:r>
           </a:p>
         </p:txBody>
@@ -13844,6 +14654,37 @@
               <a:t>Un solo switch che assegna il contributo di tutti i neuroni insieme: O(7+52).</a:t>
             </a:r>
           </a:p>
+          <a:p>
+            <a:pPr algn="l">
+              <a:lnSpc>
+                <a:spcPct val="105000"/>
+              </a:lnSpc>
+              <a:spcBef>
+                <a:spcPts val="0"/>
+              </a:spcBef>
+              <a:spcAft>
+                <a:spcPts val="500"/>
+              </a:spcAft>
+            </a:pPr>
+            <a:r>
+              <a:rPr sz="1100" b="0">
+                <a:solidFill>
+                  <a:srgbClr val="F5A623"/>
+                </a:solidFill>
+                <a:latin typeface="Segoe UI"/>
+              </a:rPr>
+              <a:t>•  </a:t>
+            </a:r>
+            <a:r>
+              <a:rPr sz="1100" b="0">
+                <a:solidFill>
+                  <a:srgbClr val="8B949E"/>
+                </a:solidFill>
+                <a:latin typeface="Segoe UI"/>
+              </a:rPr>
+              <a:t>P3 reale: un blocco denso unico compilava a 19983 istr. (limite 4096 su questo kernel) -- split in layer_first (sparso) + layer_hidden (denso).</a:t>
+            </a:r>
+          </a:p>
         </p:txBody>
       </p:sp>
       <p:sp>
@@ -14738,7 +15579,7 @@
                 </a:solidFill>
                 <a:latin typeface="Segoe UI"/>
               </a:rPr>
-              <a:t>Prestazioni intermedie (287 ns)</a:t>
+              <a:t>Prestazioni intermedie (476 ns)</a:t>
             </a:r>
           </a:p>
           <a:p>
@@ -14892,7 +15733,7 @@
                 </a:solidFill>
                 <a:latin typeface="Segoe UI"/>
               </a:rPr>
-              <a:t>Update = hot-swap di un layer</a:t>
+              <a:t>Update = scrivi pesi + layer_shapes/registry (no reload programmi)</a:t>
             </a:r>
           </a:p>
           <a:p>
@@ -16315,7 +17156,7 @@
                 </a:solidFill>
                 <a:latin typeface="Segoe UI"/>
               </a:rPr>
-              <a:t>1 programma per layer, stato in scratch map</a:t>
+              <a:t>2 programmi generici (layer_first + layer_hidden), stato in scratch map</a:t>
             </a:r>
           </a:p>
         </p:txBody>
@@ -20999,7 +21840,7 @@
               </a:spcAft>
             </a:pPr>
             <a:r>
-              <a:rPr sz="1300" b="1">
+              <a:rPr sz="1300" b="1" dirty="0">
                 <a:solidFill>
                   <a:srgbClr val="3FB950"/>
                 </a:solidFill>
@@ -21021,13 +21862,49 @@
               </a:spcAft>
             </a:pPr>
             <a:r>
-              <a:rPr sz="950" b="0">
-                <a:solidFill>
-                  <a:srgbClr val="8B949E"/>
-                </a:solidFill>
-                <a:latin typeface="Segoe UI"/>
-              </a:rPr>
-              <a:t>1 tail call, pesi = letterali C</a:t>
+              <a:rPr sz="950" b="0" dirty="0">
+                <a:solidFill>
+                  <a:srgbClr val="8B949E"/>
+                </a:solidFill>
+                <a:latin typeface="Segoe UI"/>
+              </a:rPr>
+              <a:t>1 tail call, </a:t>
+            </a:r>
+            <a:r>
+              <a:rPr sz="950" b="0" dirty="0" err="1">
+                <a:solidFill>
+                  <a:srgbClr val="8B949E"/>
+                </a:solidFill>
+                <a:latin typeface="Segoe UI"/>
+              </a:rPr>
+              <a:t>pesi</a:t>
+            </a:r>
+            <a:r>
+              <a:rPr sz="950" b="0" dirty="0">
+                <a:solidFill>
+                  <a:srgbClr val="8B949E"/>
+                </a:solidFill>
+                <a:latin typeface="Segoe UI"/>
+              </a:rPr>
+              <a:t> = </a:t>
+            </a:r>
+            <a:r>
+              <a:rPr sz="950" b="0" dirty="0" err="1">
+                <a:solidFill>
+                  <a:srgbClr val="8B949E"/>
+                </a:solidFill>
+                <a:latin typeface="Segoe UI"/>
+              </a:rPr>
+              <a:t>letterali</a:t>
+            </a:r>
+            <a:r>
+              <a:rPr sz="950" b="0" dirty="0">
+                <a:solidFill>
+                  <a:srgbClr val="8B949E"/>
+                </a:solidFill>
+                <a:latin typeface="Segoe UI"/>
+              </a:rPr>
+              <a:t> C</a:t>
             </a:r>
           </a:p>
         </p:txBody>
@@ -21203,7 +22080,7 @@
               </a:spcAft>
             </a:pPr>
             <a:r>
-              <a:rPr sz="1300" b="1">
+              <a:rPr sz="1300" b="1" dirty="0">
                 <a:solidFill>
                   <a:srgbClr val="3FB950"/>
                 </a:solidFill>
@@ -21225,7 +22102,7 @@
               </a:spcAft>
             </a:pPr>
             <a:r>
-              <a:rPr sz="950" b="0">
+              <a:rPr sz="950" b="0" dirty="0">
                 <a:solidFill>
                   <a:srgbClr val="8B949E"/>
                 </a:solidFill>
@@ -22093,14 +22970,29 @@
               </a:spcAft>
             </a:pPr>
             <a:r>
-              <a:rPr sz="1350" b="1">
+              <a:rPr sz="1350" b="1" dirty="0">
                 <a:solidFill>
                   <a:srgbClr val="3FB950"/>
                 </a:solidFill>
                 <a:latin typeface="Segoe UI"/>
               </a:rPr>
-              <a:t>Come è implementata</a:t>
-            </a:r>
+              <a:t>Come è </a:t>
+            </a:r>
+            <a:r>
+              <a:rPr sz="1350" b="1" dirty="0" err="1">
+                <a:solidFill>
+                  <a:srgbClr val="3FB950"/>
+                </a:solidFill>
+                <a:latin typeface="Segoe UI"/>
+              </a:rPr>
+              <a:t>implementata</a:t>
+            </a:r>
+            <a:endParaRPr sz="1350" b="1" dirty="0">
+              <a:solidFill>
+                <a:srgbClr val="3FB950"/>
+              </a:solidFill>
+              <a:latin typeface="Segoe UI"/>
+            </a:endParaRPr>
           </a:p>
           <a:p>
             <a:pPr algn="l">
@@ -22115,7 +23007,7 @@
               </a:spcAft>
             </a:pPr>
             <a:r>
-              <a:rPr sz="1100" b="0">
+              <a:rPr sz="1100" b="0" dirty="0">
                 <a:solidFill>
                   <a:srgbClr val="3FB950"/>
                 </a:solidFill>
@@ -22124,13 +23016,193 @@
               <a:t>•  </a:t>
             </a:r>
             <a:r>
-              <a:rPr sz="1100" b="0">
-                <a:solidFill>
-                  <a:srgbClr val="8B949E"/>
-                </a:solidFill>
-                <a:latin typeface="Segoe UI"/>
-              </a:rPr>
-              <a:t>Un dispatcher leggero estrae model_id ed esegue UNA tail call verso model_&lt;id&gt;: i pesi int8 restano letterali signed char nel sorgente C, zero lookup pesi.</a:t>
+              <a:rPr sz="1100" b="0" dirty="0">
+                <a:solidFill>
+                  <a:srgbClr val="8B949E"/>
+                </a:solidFill>
+                <a:latin typeface="Segoe UI"/>
+              </a:rPr>
+              <a:t>Un dispatcher leggero </a:t>
+            </a:r>
+            <a:r>
+              <a:rPr sz="1100" b="0" dirty="0" err="1">
+                <a:solidFill>
+                  <a:srgbClr val="8B949E"/>
+                </a:solidFill>
+                <a:latin typeface="Segoe UI"/>
+              </a:rPr>
+              <a:t>estrae</a:t>
+            </a:r>
+            <a:r>
+              <a:rPr sz="1100" b="0" dirty="0">
+                <a:solidFill>
+                  <a:srgbClr val="8B949E"/>
+                </a:solidFill>
+                <a:latin typeface="Segoe UI"/>
+              </a:rPr>
+              <a:t> </a:t>
+            </a:r>
+            <a:r>
+              <a:rPr sz="1100" b="0" dirty="0" err="1">
+                <a:solidFill>
+                  <a:srgbClr val="8B949E"/>
+                </a:solidFill>
+                <a:latin typeface="Segoe UI"/>
+              </a:rPr>
+              <a:t>model_id</a:t>
+            </a:r>
+            <a:r>
+              <a:rPr sz="1100" b="0" dirty="0">
+                <a:solidFill>
+                  <a:srgbClr val="8B949E"/>
+                </a:solidFill>
+                <a:latin typeface="Segoe UI"/>
+              </a:rPr>
+              <a:t> ed </a:t>
+            </a:r>
+            <a:r>
+              <a:rPr sz="1100" b="0" dirty="0" err="1">
+                <a:solidFill>
+                  <a:srgbClr val="8B949E"/>
+                </a:solidFill>
+                <a:latin typeface="Segoe UI"/>
+              </a:rPr>
+              <a:t>esegue</a:t>
+            </a:r>
+            <a:r>
+              <a:rPr sz="1100" b="0" dirty="0">
+                <a:solidFill>
+                  <a:srgbClr val="8B949E"/>
+                </a:solidFill>
+                <a:latin typeface="Segoe UI"/>
+              </a:rPr>
+              <a:t> UNA tail call verso model_&lt;id&gt;: </a:t>
+            </a:r>
+            <a:r>
+              <a:rPr sz="1100" b="0" dirty="0" err="1">
+                <a:solidFill>
+                  <a:srgbClr val="8B949E"/>
+                </a:solidFill>
+                <a:latin typeface="Segoe UI"/>
+              </a:rPr>
+              <a:t>i</a:t>
+            </a:r>
+            <a:r>
+              <a:rPr sz="1100" b="0" dirty="0">
+                <a:solidFill>
+                  <a:srgbClr val="8B949E"/>
+                </a:solidFill>
+                <a:latin typeface="Segoe UI"/>
+              </a:rPr>
+              <a:t> </a:t>
+            </a:r>
+            <a:r>
+              <a:rPr sz="1100" b="0" dirty="0" err="1">
+                <a:solidFill>
+                  <a:srgbClr val="8B949E"/>
+                </a:solidFill>
+                <a:latin typeface="Segoe UI"/>
+              </a:rPr>
+              <a:t>pesi</a:t>
+            </a:r>
+            <a:r>
+              <a:rPr sz="1100" b="0" dirty="0">
+                <a:solidFill>
+                  <a:srgbClr val="8B949E"/>
+                </a:solidFill>
+                <a:latin typeface="Segoe UI"/>
+              </a:rPr>
+              <a:t> int8 </a:t>
+            </a:r>
+            <a:r>
+              <a:rPr sz="1100" b="0" dirty="0" err="1">
+                <a:solidFill>
+                  <a:srgbClr val="8B949E"/>
+                </a:solidFill>
+                <a:latin typeface="Segoe UI"/>
+              </a:rPr>
+              <a:t>restano</a:t>
+            </a:r>
+            <a:r>
+              <a:rPr sz="1100" b="0" dirty="0">
+                <a:solidFill>
+                  <a:srgbClr val="8B949E"/>
+                </a:solidFill>
+                <a:latin typeface="Segoe UI"/>
+              </a:rPr>
+              <a:t> </a:t>
+            </a:r>
+            <a:r>
+              <a:rPr sz="1100" b="0" dirty="0" err="1">
+                <a:solidFill>
+                  <a:srgbClr val="8B949E"/>
+                </a:solidFill>
+                <a:latin typeface="Segoe UI"/>
+              </a:rPr>
+              <a:t>letterali</a:t>
+            </a:r>
+            <a:r>
+              <a:rPr sz="1100" b="0" dirty="0">
+                <a:solidFill>
+                  <a:srgbClr val="8B949E"/>
+                </a:solidFill>
+                <a:latin typeface="Segoe UI"/>
+              </a:rPr>
+              <a:t> signed char </a:t>
+            </a:r>
+            <a:r>
+              <a:rPr sz="1100" b="0" dirty="0" err="1">
+                <a:solidFill>
+                  <a:srgbClr val="8B949E"/>
+                </a:solidFill>
+                <a:latin typeface="Segoe UI"/>
+              </a:rPr>
+              <a:t>nel</a:t>
+            </a:r>
+            <a:r>
+              <a:rPr sz="1100" b="0" dirty="0">
+                <a:solidFill>
+                  <a:srgbClr val="8B949E"/>
+                </a:solidFill>
+                <a:latin typeface="Segoe UI"/>
+              </a:rPr>
+              <a:t> </a:t>
+            </a:r>
+            <a:r>
+              <a:rPr sz="1100" b="0" dirty="0" err="1">
+                <a:solidFill>
+                  <a:srgbClr val="8B949E"/>
+                </a:solidFill>
+                <a:latin typeface="Segoe UI"/>
+              </a:rPr>
+              <a:t>sorgente</a:t>
+            </a:r>
+            <a:r>
+              <a:rPr sz="1100" b="0" dirty="0">
+                <a:solidFill>
+                  <a:srgbClr val="8B949E"/>
+                </a:solidFill>
+                <a:latin typeface="Segoe UI"/>
+              </a:rPr>
+              <a:t> C, zero lookup </a:t>
+            </a:r>
+            <a:r>
+              <a:rPr sz="1100" b="0" dirty="0" err="1">
+                <a:solidFill>
+                  <a:srgbClr val="8B949E"/>
+                </a:solidFill>
+                <a:latin typeface="Segoe UI"/>
+              </a:rPr>
+              <a:t>pesi</a:t>
+            </a:r>
+            <a:r>
+              <a:rPr sz="1100" b="0" dirty="0">
+                <a:solidFill>
+                  <a:srgbClr val="8B949E"/>
+                </a:solidFill>
+                <a:latin typeface="Segoe UI"/>
+              </a:rPr>
+              <a:t>.</a:t>
             </a:r>
           </a:p>
           <a:p>
@@ -22146,7 +23218,7 @@
               </a:spcAft>
             </a:pPr>
             <a:r>
-              <a:rPr sz="1100" b="0">
+              <a:rPr sz="1100" b="0" dirty="0">
                 <a:solidFill>
                   <a:srgbClr val="3FB950"/>
                 </a:solidFill>
@@ -22155,13 +23227,130 @@
               <a:t>•  </a:t>
             </a:r>
             <a:r>
-              <a:rPr sz="1100" b="0">
-                <a:solidFill>
-                  <a:srgbClr val="8B949E"/>
-                </a:solidFill>
-                <a:latin typeface="Segoe UI"/>
-              </a:rPr>
-              <a:t>Inferenza 65→4→4→7 completamente srotolata (nessun loop), nessuna map lookup per i pesi.</a:t>
+              <a:rPr sz="1100" b="0" dirty="0" err="1">
+                <a:solidFill>
+                  <a:srgbClr val="8B949E"/>
+                </a:solidFill>
+                <a:latin typeface="Segoe UI"/>
+              </a:rPr>
+              <a:t>Inferenza</a:t>
+            </a:r>
+            <a:r>
+              <a:rPr sz="1100" b="0" dirty="0">
+                <a:solidFill>
+                  <a:srgbClr val="8B949E"/>
+                </a:solidFill>
+                <a:latin typeface="Segoe UI"/>
+              </a:rPr>
+              <a:t> 65→4→4→7 </a:t>
+            </a:r>
+            <a:r>
+              <a:rPr sz="1100" b="0" dirty="0" err="1">
+                <a:solidFill>
+                  <a:srgbClr val="8B949E"/>
+                </a:solidFill>
+                <a:latin typeface="Segoe UI"/>
+              </a:rPr>
+              <a:t>completamente</a:t>
+            </a:r>
+            <a:r>
+              <a:rPr sz="1100" b="0" dirty="0">
+                <a:solidFill>
+                  <a:srgbClr val="8B949E"/>
+                </a:solidFill>
+                <a:latin typeface="Segoe UI"/>
+              </a:rPr>
+              <a:t> </a:t>
+            </a:r>
+            <a:r>
+              <a:rPr sz="1100" b="0" dirty="0" err="1">
+                <a:solidFill>
+                  <a:srgbClr val="8B949E"/>
+                </a:solidFill>
+                <a:latin typeface="Segoe UI"/>
+              </a:rPr>
+              <a:t>srotolata</a:t>
+            </a:r>
+            <a:r>
+              <a:rPr sz="1100" b="0" dirty="0">
+                <a:solidFill>
+                  <a:srgbClr val="8B949E"/>
+                </a:solidFill>
+                <a:latin typeface="Segoe UI"/>
+              </a:rPr>
+              <a:t> (</a:t>
+            </a:r>
+            <a:r>
+              <a:rPr sz="1100" b="0" dirty="0" err="1">
+                <a:solidFill>
+                  <a:srgbClr val="8B949E"/>
+                </a:solidFill>
+                <a:latin typeface="Segoe UI"/>
+              </a:rPr>
+              <a:t>nessun</a:t>
+            </a:r>
+            <a:r>
+              <a:rPr sz="1100" b="0" dirty="0">
+                <a:solidFill>
+                  <a:srgbClr val="8B949E"/>
+                </a:solidFill>
+                <a:latin typeface="Segoe UI"/>
+              </a:rPr>
+              <a:t> loop), </a:t>
+            </a:r>
+            <a:r>
+              <a:rPr sz="1100" b="0" dirty="0" err="1">
+                <a:solidFill>
+                  <a:srgbClr val="8B949E"/>
+                </a:solidFill>
+                <a:latin typeface="Segoe UI"/>
+              </a:rPr>
+              <a:t>nessuna</a:t>
+            </a:r>
+            <a:r>
+              <a:rPr sz="1100" b="0" dirty="0">
+                <a:solidFill>
+                  <a:srgbClr val="8B949E"/>
+                </a:solidFill>
+                <a:latin typeface="Segoe UI"/>
+              </a:rPr>
+              <a:t> map lookup per </a:t>
+            </a:r>
+            <a:r>
+              <a:rPr sz="1100" b="0" dirty="0" err="1">
+                <a:solidFill>
+                  <a:srgbClr val="8B949E"/>
+                </a:solidFill>
+                <a:latin typeface="Segoe UI"/>
+              </a:rPr>
+              <a:t>i</a:t>
+            </a:r>
+            <a:r>
+              <a:rPr sz="1100" b="0" dirty="0">
+                <a:solidFill>
+                  <a:srgbClr val="8B949E"/>
+                </a:solidFill>
+                <a:latin typeface="Segoe UI"/>
+              </a:rPr>
+              <a:t> </a:t>
+            </a:r>
+            <a:r>
+              <a:rPr sz="1100" b="0" dirty="0" err="1">
+                <a:solidFill>
+                  <a:srgbClr val="8B949E"/>
+                </a:solidFill>
+                <a:latin typeface="Segoe UI"/>
+              </a:rPr>
+              <a:t>pesi</a:t>
+            </a:r>
+            <a:r>
+              <a:rPr sz="1100" b="0" dirty="0">
+                <a:solidFill>
+                  <a:srgbClr val="8B949E"/>
+                </a:solidFill>
+                <a:latin typeface="Segoe UI"/>
+              </a:rPr>
+              <a:t>.</a:t>
             </a:r>
           </a:p>
           <a:p>
@@ -22177,7 +23366,7 @@
               </a:spcAft>
             </a:pPr>
             <a:r>
-              <a:rPr sz="1100" b="0">
+              <a:rPr sz="1100" b="0" dirty="0">
                 <a:solidFill>
                   <a:srgbClr val="3FB950"/>
                 </a:solidFill>
@@ -22186,13 +23375,103 @@
               <a:t>•  </a:t>
             </a:r>
             <a:r>
-              <a:rPr sz="1100" b="0">
-                <a:solidFill>
-                  <a:srgbClr val="8B949E"/>
-                </a:solidFill>
-                <a:latin typeface="Segoe UI"/>
-              </a:rPr>
-              <a:t>Un solo switch(iface) e uno switch(node) per model_&lt;id&gt;: evita l'esplosione dei rami nel verifier.</a:t>
+              <a:rPr sz="1100" b="0" dirty="0">
+                <a:solidFill>
+                  <a:srgbClr val="8B949E"/>
+                </a:solidFill>
+                <a:latin typeface="Segoe UI"/>
+              </a:rPr>
+              <a:t>Un solo switch(</a:t>
+            </a:r>
+            <a:r>
+              <a:rPr sz="1100" b="0" dirty="0" err="1">
+                <a:solidFill>
+                  <a:srgbClr val="8B949E"/>
+                </a:solidFill>
+                <a:latin typeface="Segoe UI"/>
+              </a:rPr>
+              <a:t>iface</a:t>
+            </a:r>
+            <a:r>
+              <a:rPr sz="1100" b="0" dirty="0">
+                <a:solidFill>
+                  <a:srgbClr val="8B949E"/>
+                </a:solidFill>
+                <a:latin typeface="Segoe UI"/>
+              </a:rPr>
+              <a:t>) e uno switch(node) per model_&lt;id&gt;: </a:t>
+            </a:r>
+            <a:r>
+              <a:rPr sz="1100" b="0" dirty="0" err="1">
+                <a:solidFill>
+                  <a:srgbClr val="8B949E"/>
+                </a:solidFill>
+                <a:latin typeface="Segoe UI"/>
+              </a:rPr>
+              <a:t>evita</a:t>
+            </a:r>
+            <a:r>
+              <a:rPr sz="1100" b="0" dirty="0">
+                <a:solidFill>
+                  <a:srgbClr val="8B949E"/>
+                </a:solidFill>
+                <a:latin typeface="Segoe UI"/>
+              </a:rPr>
+              <a:t> </a:t>
+            </a:r>
+            <a:r>
+              <a:rPr sz="1100" b="0" dirty="0" err="1">
+                <a:solidFill>
+                  <a:srgbClr val="8B949E"/>
+                </a:solidFill>
+                <a:latin typeface="Segoe UI"/>
+              </a:rPr>
+              <a:t>l'esplosione</a:t>
+            </a:r>
+            <a:r>
+              <a:rPr sz="1100" b="0" dirty="0">
+                <a:solidFill>
+                  <a:srgbClr val="8B949E"/>
+                </a:solidFill>
+                <a:latin typeface="Segoe UI"/>
+              </a:rPr>
+              <a:t> </a:t>
+            </a:r>
+            <a:r>
+              <a:rPr sz="1100" b="0" dirty="0" err="1">
+                <a:solidFill>
+                  <a:srgbClr val="8B949E"/>
+                </a:solidFill>
+                <a:latin typeface="Segoe UI"/>
+              </a:rPr>
+              <a:t>dei</a:t>
+            </a:r>
+            <a:r>
+              <a:rPr sz="1100" b="0" dirty="0">
+                <a:solidFill>
+                  <a:srgbClr val="8B949E"/>
+                </a:solidFill>
+                <a:latin typeface="Segoe UI"/>
+              </a:rPr>
+              <a:t> rami </a:t>
+            </a:r>
+            <a:r>
+              <a:rPr sz="1100" b="0" dirty="0" err="1">
+                <a:solidFill>
+                  <a:srgbClr val="8B949E"/>
+                </a:solidFill>
+                <a:latin typeface="Segoe UI"/>
+              </a:rPr>
+              <a:t>nel</a:t>
+            </a:r>
+            <a:r>
+              <a:rPr sz="1100" b="0" dirty="0">
+                <a:solidFill>
+                  <a:srgbClr val="8B949E"/>
+                </a:solidFill>
+                <a:latin typeface="Segoe UI"/>
+              </a:rPr>
+              <a:t> verifier.</a:t>
             </a:r>
           </a:p>
           <a:p>
@@ -22208,7 +23487,7 @@
               </a:spcAft>
             </a:pPr>
             <a:r>
-              <a:rPr sz="1100" b="0">
+              <a:rPr sz="1100" b="0" dirty="0">
                 <a:solidFill>
                   <a:srgbClr val="3FB950"/>
                 </a:solidFill>
@@ -22217,13 +23496,166 @@
               <a:t>•  </a:t>
             </a:r>
             <a:r>
-              <a:rPr sz="1100" b="0">
-                <a:solidFill>
-                  <a:srgbClr val="8B949E"/>
-                </a:solidFill>
-                <a:latin typeface="Segoe UI"/>
-              </a:rPr>
-              <a:t>link_state[0..5] letto dalla mappa e sommato come ls_i * w[j,i] nei neuroni fc1.</a:t>
+              <a:rPr sz="1100" b="0" dirty="0" err="1">
+                <a:solidFill>
+                  <a:srgbClr val="8B949E"/>
+                </a:solidFill>
+                <a:latin typeface="Segoe UI"/>
+              </a:rPr>
+              <a:t>link_state</a:t>
+            </a:r>
+            <a:r>
+              <a:rPr sz="1100" b="0" dirty="0">
+                <a:solidFill>
+                  <a:srgbClr val="8B949E"/>
+                </a:solidFill>
+                <a:latin typeface="Segoe UI"/>
+              </a:rPr>
+              <a:t>[0..5] </a:t>
+            </a:r>
+            <a:r>
+              <a:rPr sz="1100" b="0" dirty="0" err="1">
+                <a:solidFill>
+                  <a:srgbClr val="8B949E"/>
+                </a:solidFill>
+                <a:latin typeface="Segoe UI"/>
+              </a:rPr>
+              <a:t>letto</a:t>
+            </a:r>
+            <a:r>
+              <a:rPr sz="1100" b="0" dirty="0">
+                <a:solidFill>
+                  <a:srgbClr val="8B949E"/>
+                </a:solidFill>
+                <a:latin typeface="Segoe UI"/>
+              </a:rPr>
+              <a:t> </a:t>
+            </a:r>
+            <a:r>
+              <a:rPr sz="1100" b="0" dirty="0" err="1">
+                <a:solidFill>
+                  <a:srgbClr val="8B949E"/>
+                </a:solidFill>
+                <a:latin typeface="Segoe UI"/>
+              </a:rPr>
+              <a:t>dalla</a:t>
+            </a:r>
+            <a:r>
+              <a:rPr sz="1100" b="0" dirty="0">
+                <a:solidFill>
+                  <a:srgbClr val="8B949E"/>
+                </a:solidFill>
+                <a:latin typeface="Segoe UI"/>
+              </a:rPr>
+              <a:t> </a:t>
+            </a:r>
+            <a:r>
+              <a:rPr sz="1100" b="0" dirty="0" err="1">
+                <a:solidFill>
+                  <a:srgbClr val="8B949E"/>
+                </a:solidFill>
+                <a:latin typeface="Segoe UI"/>
+              </a:rPr>
+              <a:t>mappa</a:t>
+            </a:r>
+            <a:r>
+              <a:rPr sz="1100" b="0" dirty="0">
+                <a:solidFill>
+                  <a:srgbClr val="8B949E"/>
+                </a:solidFill>
+                <a:latin typeface="Segoe UI"/>
+              </a:rPr>
+              <a:t> e </a:t>
+            </a:r>
+            <a:r>
+              <a:rPr sz="1100" b="0" dirty="0" err="1">
+                <a:solidFill>
+                  <a:srgbClr val="8B949E"/>
+                </a:solidFill>
+                <a:latin typeface="Segoe UI"/>
+              </a:rPr>
+              <a:t>sommato</a:t>
+            </a:r>
+            <a:r>
+              <a:rPr sz="1100" b="0" dirty="0">
+                <a:solidFill>
+                  <a:srgbClr val="8B949E"/>
+                </a:solidFill>
+                <a:latin typeface="Segoe UI"/>
+              </a:rPr>
+              <a:t> come </a:t>
+            </a:r>
+            <a:r>
+              <a:rPr sz="1100" b="0" dirty="0" err="1">
+                <a:solidFill>
+                  <a:srgbClr val="8B949E"/>
+                </a:solidFill>
+                <a:latin typeface="Segoe UI"/>
+              </a:rPr>
+              <a:t>ls_i</a:t>
+            </a:r>
+            <a:r>
+              <a:rPr sz="1100" b="0" dirty="0">
+                <a:solidFill>
+                  <a:srgbClr val="8B949E"/>
+                </a:solidFill>
+                <a:latin typeface="Segoe UI"/>
+              </a:rPr>
+              <a:t> * w[</a:t>
+            </a:r>
+            <a:r>
+              <a:rPr sz="1100" b="0" dirty="0" err="1">
+                <a:solidFill>
+                  <a:srgbClr val="8B949E"/>
+                </a:solidFill>
+                <a:latin typeface="Segoe UI"/>
+              </a:rPr>
+              <a:t>j,i</a:t>
+            </a:r>
+            <a:r>
+              <a:rPr sz="1100" b="0" dirty="0">
+                <a:solidFill>
+                  <a:srgbClr val="8B949E"/>
+                </a:solidFill>
+                <a:latin typeface="Segoe UI"/>
+              </a:rPr>
+              <a:t>] </a:t>
+            </a:r>
+            <a:r>
+              <a:rPr sz="1100" b="0" dirty="0" err="1">
+                <a:solidFill>
+                  <a:srgbClr val="8B949E"/>
+                </a:solidFill>
+                <a:latin typeface="Segoe UI"/>
+              </a:rPr>
+              <a:t>nei</a:t>
+            </a:r>
+            <a:r>
+              <a:rPr sz="1100" b="0" dirty="0">
+                <a:solidFill>
+                  <a:srgbClr val="8B949E"/>
+                </a:solidFill>
+                <a:latin typeface="Segoe UI"/>
+              </a:rPr>
+              <a:t> </a:t>
+            </a:r>
+            <a:r>
+              <a:rPr sz="1100" b="0" dirty="0" err="1">
+                <a:solidFill>
+                  <a:srgbClr val="8B949E"/>
+                </a:solidFill>
+                <a:latin typeface="Segoe UI"/>
+              </a:rPr>
+              <a:t>neuroni</a:t>
+            </a:r>
+            <a:r>
+              <a:rPr sz="1100" b="0" dirty="0">
+                <a:solidFill>
+                  <a:srgbClr val="8B949E"/>
+                </a:solidFill>
+                <a:latin typeface="Segoe UI"/>
+              </a:rPr>
+              <a:t> fc1.</a:t>
             </a:r>
           </a:p>
           <a:p>
@@ -22239,7 +23671,7 @@
               </a:spcAft>
             </a:pPr>
             <a:r>
-              <a:rPr sz="1100" b="0">
+              <a:rPr sz="1100" b="0" dirty="0">
                 <a:solidFill>
                   <a:srgbClr val="3FB950"/>
                 </a:solidFill>
@@ -22248,13 +23680,157 @@
               <a:t>•  </a:t>
             </a:r>
             <a:r>
-              <a:rPr sz="1100" b="0">
-                <a:solidFill>
-                  <a:srgbClr val="8B949E"/>
-                </a:solidFill>
-                <a:latin typeface="Segoe UI"/>
-              </a:rPr>
-              <a:t>Nessun model_cache: era un residuo (gate is_valid + blob pesi mai usato) — rimosso, ora è hardcoded puro.</a:t>
+              <a:rPr sz="1100" b="0" dirty="0">
+                <a:solidFill>
+                  <a:srgbClr val="8B949E"/>
+                </a:solidFill>
+                <a:latin typeface="Segoe UI"/>
+              </a:rPr>
+              <a:t>Nessun </a:t>
+            </a:r>
+            <a:r>
+              <a:rPr sz="1100" b="0" dirty="0" err="1">
+                <a:solidFill>
+                  <a:srgbClr val="8B949E"/>
+                </a:solidFill>
+                <a:latin typeface="Segoe UI"/>
+              </a:rPr>
+              <a:t>model_cache</a:t>
+            </a:r>
+            <a:r>
+              <a:rPr sz="1100" b="0" dirty="0">
+                <a:solidFill>
+                  <a:srgbClr val="8B949E"/>
+                </a:solidFill>
+                <a:latin typeface="Segoe UI"/>
+              </a:rPr>
+              <a:t>: era un </a:t>
+            </a:r>
+            <a:r>
+              <a:rPr sz="1100" b="0" dirty="0" err="1">
+                <a:solidFill>
+                  <a:srgbClr val="8B949E"/>
+                </a:solidFill>
+                <a:latin typeface="Segoe UI"/>
+              </a:rPr>
+              <a:t>residuo</a:t>
+            </a:r>
+            <a:r>
+              <a:rPr sz="1100" b="0" dirty="0">
+                <a:solidFill>
+                  <a:srgbClr val="8B949E"/>
+                </a:solidFill>
+                <a:latin typeface="Segoe UI"/>
+              </a:rPr>
+              <a:t> (gate </a:t>
+            </a:r>
+            <a:r>
+              <a:rPr sz="1100" b="0" dirty="0" err="1">
+                <a:solidFill>
+                  <a:srgbClr val="8B949E"/>
+                </a:solidFill>
+                <a:latin typeface="Segoe UI"/>
+              </a:rPr>
+              <a:t>is_valid</a:t>
+            </a:r>
+            <a:r>
+              <a:rPr sz="1100" b="0" dirty="0">
+                <a:solidFill>
+                  <a:srgbClr val="8B949E"/>
+                </a:solidFill>
+                <a:latin typeface="Segoe UI"/>
+              </a:rPr>
+              <a:t> + blob </a:t>
+            </a:r>
+            <a:r>
+              <a:rPr sz="1100" b="0" dirty="0" err="1">
+                <a:solidFill>
+                  <a:srgbClr val="8B949E"/>
+                </a:solidFill>
+                <a:latin typeface="Segoe UI"/>
+              </a:rPr>
+              <a:t>pesi</a:t>
+            </a:r>
+            <a:r>
+              <a:rPr sz="1100" b="0" dirty="0">
+                <a:solidFill>
+                  <a:srgbClr val="8B949E"/>
+                </a:solidFill>
+                <a:latin typeface="Segoe UI"/>
+              </a:rPr>
+              <a:t> </a:t>
+            </a:r>
+            <a:r>
+              <a:rPr sz="1100" b="0" dirty="0" err="1">
+                <a:solidFill>
+                  <a:srgbClr val="8B949E"/>
+                </a:solidFill>
+                <a:latin typeface="Segoe UI"/>
+              </a:rPr>
+              <a:t>mai</a:t>
+            </a:r>
+            <a:r>
+              <a:rPr sz="1100" b="0" dirty="0">
+                <a:solidFill>
+                  <a:srgbClr val="8B949E"/>
+                </a:solidFill>
+                <a:latin typeface="Segoe UI"/>
+              </a:rPr>
+              <a:t> </a:t>
+            </a:r>
+            <a:r>
+              <a:rPr sz="1100" b="0" dirty="0" err="1">
+                <a:solidFill>
+                  <a:srgbClr val="8B949E"/>
+                </a:solidFill>
+                <a:latin typeface="Segoe UI"/>
+              </a:rPr>
+              <a:t>usato</a:t>
+            </a:r>
+            <a:r>
+              <a:rPr sz="1100" b="0" dirty="0">
+                <a:solidFill>
+                  <a:srgbClr val="8B949E"/>
+                </a:solidFill>
+                <a:latin typeface="Segoe UI"/>
+              </a:rPr>
+              <a:t>) — </a:t>
+            </a:r>
+            <a:r>
+              <a:rPr sz="1100" b="0" dirty="0" err="1">
+                <a:solidFill>
+                  <a:srgbClr val="8B949E"/>
+                </a:solidFill>
+                <a:latin typeface="Segoe UI"/>
+              </a:rPr>
+              <a:t>rimosso</a:t>
+            </a:r>
+            <a:r>
+              <a:rPr sz="1100" b="0" dirty="0">
+                <a:solidFill>
+                  <a:srgbClr val="8B949E"/>
+                </a:solidFill>
+                <a:latin typeface="Segoe UI"/>
+              </a:rPr>
+              <a:t>, </a:t>
+            </a:r>
+            <a:r>
+              <a:rPr sz="1100" b="0" dirty="0" err="1">
+                <a:solidFill>
+                  <a:srgbClr val="8B949E"/>
+                </a:solidFill>
+                <a:latin typeface="Segoe UI"/>
+              </a:rPr>
+              <a:t>ora</a:t>
+            </a:r>
+            <a:r>
+              <a:rPr sz="1100" b="0" dirty="0">
+                <a:solidFill>
+                  <a:srgbClr val="8B949E"/>
+                </a:solidFill>
+                <a:latin typeface="Segoe UI"/>
+              </a:rPr>
+              <a:t> è hardcoded puro.</a:t>
             </a:r>
           </a:p>
           <a:p>
@@ -22270,7 +23846,7 @@
               </a:spcAft>
             </a:pPr>
             <a:r>
-              <a:rPr sz="1100" b="0">
+              <a:rPr sz="1100" b="0" dirty="0">
                 <a:solidFill>
                   <a:srgbClr val="3FB950"/>
                 </a:solidFill>
@@ -22279,13 +23855,274 @@
               <a:t>•  </a:t>
             </a:r>
             <a:r>
-              <a:rPr sz="1100" b="0">
-                <a:solidFill>
-                  <a:srgbClr val="8B949E"/>
-                </a:solidFill>
-                <a:latin typeface="Segoe UI"/>
-              </a:rPr>
-              <a:t>Testato: 2 model_id concorrenti REGISTRATI (stessa architettura 65-4-4-7) -- verifica il routing dispatcher-&gt;model_progs[model_id], PASS. Larghezza/profondita NON variano per modello in P1 (generatore C a costanti globali).</a:t>
+              <a:rPr sz="1100" b="0" dirty="0" err="1">
+                <a:solidFill>
+                  <a:srgbClr val="8B949E"/>
+                </a:solidFill>
+                <a:latin typeface="Segoe UI"/>
+              </a:rPr>
+              <a:t>Testato</a:t>
+            </a:r>
+            <a:r>
+              <a:rPr sz="1100" b="0" dirty="0">
+                <a:solidFill>
+                  <a:srgbClr val="8B949E"/>
+                </a:solidFill>
+                <a:latin typeface="Segoe UI"/>
+              </a:rPr>
+              <a:t>: 2 </a:t>
+            </a:r>
+            <a:r>
+              <a:rPr sz="1100" b="0" dirty="0" err="1">
+                <a:solidFill>
+                  <a:srgbClr val="8B949E"/>
+                </a:solidFill>
+                <a:latin typeface="Segoe UI"/>
+              </a:rPr>
+              <a:t>model_id</a:t>
+            </a:r>
+            <a:r>
+              <a:rPr sz="1100" b="0" dirty="0">
+                <a:solidFill>
+                  <a:srgbClr val="8B949E"/>
+                </a:solidFill>
+                <a:latin typeface="Segoe UI"/>
+              </a:rPr>
+              <a:t> </a:t>
+            </a:r>
+            <a:r>
+              <a:rPr sz="1100" b="0" dirty="0" err="1">
+                <a:solidFill>
+                  <a:srgbClr val="8B949E"/>
+                </a:solidFill>
+                <a:latin typeface="Segoe UI"/>
+              </a:rPr>
+              <a:t>concorrenti</a:t>
+            </a:r>
+            <a:r>
+              <a:rPr sz="1100" b="0" dirty="0">
+                <a:solidFill>
+                  <a:srgbClr val="8B949E"/>
+                </a:solidFill>
+                <a:latin typeface="Segoe UI"/>
+              </a:rPr>
+              <a:t> REGISTRATI (</a:t>
+            </a:r>
+            <a:r>
+              <a:rPr sz="1100" b="0" dirty="0" err="1">
+                <a:solidFill>
+                  <a:srgbClr val="8B949E"/>
+                </a:solidFill>
+                <a:latin typeface="Segoe UI"/>
+              </a:rPr>
+              <a:t>stessa</a:t>
+            </a:r>
+            <a:r>
+              <a:rPr sz="1100" b="0" dirty="0">
+                <a:solidFill>
+                  <a:srgbClr val="8B949E"/>
+                </a:solidFill>
+                <a:latin typeface="Segoe UI"/>
+              </a:rPr>
+              <a:t> </a:t>
+            </a:r>
+            <a:r>
+              <a:rPr sz="1100" b="0" dirty="0" err="1">
+                <a:solidFill>
+                  <a:srgbClr val="8B949E"/>
+                </a:solidFill>
+                <a:latin typeface="Segoe UI"/>
+              </a:rPr>
+              <a:t>architettura</a:t>
+            </a:r>
+            <a:r>
+              <a:rPr sz="1100" b="0" dirty="0">
+                <a:solidFill>
+                  <a:srgbClr val="8B949E"/>
+                </a:solidFill>
+                <a:latin typeface="Segoe UI"/>
+              </a:rPr>
+              <a:t> 65-4-4-7) -- </a:t>
+            </a:r>
+            <a:r>
+              <a:rPr sz="1100" b="0" dirty="0" err="1">
+                <a:solidFill>
+                  <a:srgbClr val="8B949E"/>
+                </a:solidFill>
+                <a:latin typeface="Segoe UI"/>
+              </a:rPr>
+              <a:t>verifica</a:t>
+            </a:r>
+            <a:r>
+              <a:rPr sz="1100" b="0" dirty="0">
+                <a:solidFill>
+                  <a:srgbClr val="8B949E"/>
+                </a:solidFill>
+                <a:latin typeface="Segoe UI"/>
+              </a:rPr>
+              <a:t> il routing dispatcher-&gt;</a:t>
+            </a:r>
+            <a:r>
+              <a:rPr sz="1100" b="0" dirty="0" err="1">
+                <a:solidFill>
+                  <a:srgbClr val="8B949E"/>
+                </a:solidFill>
+                <a:latin typeface="Segoe UI"/>
+              </a:rPr>
+              <a:t>model_progs</a:t>
+            </a:r>
+            <a:r>
+              <a:rPr sz="1100" b="0" dirty="0">
+                <a:solidFill>
+                  <a:srgbClr val="8B949E"/>
+                </a:solidFill>
+                <a:latin typeface="Segoe UI"/>
+              </a:rPr>
+              <a:t>[</a:t>
+            </a:r>
+            <a:r>
+              <a:rPr sz="1100" b="0" dirty="0" err="1">
+                <a:solidFill>
+                  <a:srgbClr val="8B949E"/>
+                </a:solidFill>
+                <a:latin typeface="Segoe UI"/>
+              </a:rPr>
+              <a:t>model_id</a:t>
+            </a:r>
+            <a:r>
+              <a:rPr sz="1100" b="0" dirty="0">
+                <a:solidFill>
+                  <a:srgbClr val="8B949E"/>
+                </a:solidFill>
+                <a:latin typeface="Segoe UI"/>
+              </a:rPr>
+              <a:t>], PASS. </a:t>
+            </a:r>
+            <a:r>
+              <a:rPr sz="1100" b="0" dirty="0" err="1">
+                <a:solidFill>
+                  <a:srgbClr val="8B949E"/>
+                </a:solidFill>
+                <a:latin typeface="Segoe UI"/>
+              </a:rPr>
+              <a:t>Larghezza</a:t>
+            </a:r>
+            <a:r>
+              <a:rPr sz="1100" b="0" dirty="0">
+                <a:solidFill>
+                  <a:srgbClr val="8B949E"/>
+                </a:solidFill>
+                <a:latin typeface="Segoe UI"/>
+              </a:rPr>
+              <a:t>/</a:t>
+            </a:r>
+            <a:r>
+              <a:rPr sz="1100" b="0" dirty="0" err="1">
+                <a:solidFill>
+                  <a:srgbClr val="8B949E"/>
+                </a:solidFill>
+                <a:latin typeface="Segoe UI"/>
+              </a:rPr>
+              <a:t>profondita</a:t>
+            </a:r>
+            <a:r>
+              <a:rPr sz="1100" b="0" dirty="0">
+                <a:solidFill>
+                  <a:srgbClr val="8B949E"/>
+                </a:solidFill>
+                <a:latin typeface="Segoe UI"/>
+              </a:rPr>
+              <a:t> NON </a:t>
+            </a:r>
+            <a:r>
+              <a:rPr sz="1100" b="0" dirty="0" err="1">
+                <a:solidFill>
+                  <a:srgbClr val="8B949E"/>
+                </a:solidFill>
+                <a:latin typeface="Segoe UI"/>
+              </a:rPr>
+              <a:t>variano</a:t>
+            </a:r>
+            <a:r>
+              <a:rPr sz="1100" b="0" dirty="0">
+                <a:solidFill>
+                  <a:srgbClr val="8B949E"/>
+                </a:solidFill>
+                <a:latin typeface="Segoe UI"/>
+              </a:rPr>
+              <a:t> per </a:t>
+            </a:r>
+            <a:r>
+              <a:rPr sz="1100" b="0" dirty="0" err="1">
+                <a:solidFill>
+                  <a:srgbClr val="8B949E"/>
+                </a:solidFill>
+                <a:latin typeface="Segoe UI"/>
+              </a:rPr>
+              <a:t>modello</a:t>
+            </a:r>
+            <a:r>
+              <a:rPr sz="1100" b="0" dirty="0">
+                <a:solidFill>
+                  <a:srgbClr val="8B949E"/>
+                </a:solidFill>
+                <a:latin typeface="Segoe UI"/>
+              </a:rPr>
+              <a:t> in P1 (</a:t>
+            </a:r>
+            <a:r>
+              <a:rPr sz="1100" b="0" dirty="0" err="1">
+                <a:solidFill>
+                  <a:srgbClr val="8B949E"/>
+                </a:solidFill>
+                <a:latin typeface="Segoe UI"/>
+              </a:rPr>
+              <a:t>generatore</a:t>
+            </a:r>
+            <a:r>
+              <a:rPr sz="1100" b="0" dirty="0">
+                <a:solidFill>
+                  <a:srgbClr val="8B949E"/>
+                </a:solidFill>
+                <a:latin typeface="Segoe UI"/>
+              </a:rPr>
+              <a:t> C a </a:t>
+            </a:r>
+            <a:r>
+              <a:rPr sz="1100" b="0" dirty="0" err="1">
+                <a:solidFill>
+                  <a:srgbClr val="8B949E"/>
+                </a:solidFill>
+                <a:latin typeface="Segoe UI"/>
+              </a:rPr>
+              <a:t>costanti</a:t>
+            </a:r>
+            <a:r>
+              <a:rPr sz="1100" b="0" dirty="0">
+                <a:solidFill>
+                  <a:srgbClr val="8B949E"/>
+                </a:solidFill>
+                <a:latin typeface="Segoe UI"/>
+              </a:rPr>
+              <a:t> </a:t>
+            </a:r>
+            <a:r>
+              <a:rPr sz="1100" b="0" dirty="0" err="1">
+                <a:solidFill>
+                  <a:srgbClr val="8B949E"/>
+                </a:solidFill>
+                <a:latin typeface="Segoe UI"/>
+              </a:rPr>
+              <a:t>globali</a:t>
+            </a:r>
+            <a:r>
+              <a:rPr sz="1100" b="0" dirty="0">
+                <a:solidFill>
+                  <a:srgbClr val="8B949E"/>
+                </a:solidFill>
+                <a:latin typeface="Segoe UI"/>
+              </a:rPr>
+              <a:t>).</a:t>
             </a:r>
           </a:p>
         </p:txBody>
@@ -22596,7 +24433,7 @@
         <p:spPr>
           <a:xfrm>
             <a:off x="918972" y="2583180"/>
-            <a:ext cx="10424159" cy="1325880"/>
+            <a:ext cx="10424159" cy="1464312"/>
           </a:xfrm>
           <a:prstGeom prst="rect">
             <a:avLst/>
@@ -22623,7 +24460,10 @@
             <a:r>
               <a:rPr sz="1100" b="0" dirty="0">
                 <a:solidFill>
-                  <a:srgbClr val="484F58"/>
+                  <a:schemeClr val="tx1">
+                    <a:lumMod val="50000"/>
+                    <a:lumOff val="50000"/>
+                  </a:schemeClr>
                 </a:solidFill>
                 <a:latin typeface="Consolas"/>
               </a:rPr>
@@ -22632,7 +24472,10 @@
             <a:r>
               <a:rPr sz="1100" b="0" dirty="0" err="1">
                 <a:solidFill>
-                  <a:srgbClr val="484F58"/>
+                  <a:schemeClr val="tx1">
+                    <a:lumMod val="50000"/>
+                    <a:lumOff val="50000"/>
+                  </a:schemeClr>
                 </a:solidFill>
                 <a:latin typeface="Consolas"/>
               </a:rPr>
@@ -22641,7 +24484,10 @@
             <a:r>
               <a:rPr sz="1100" b="0" dirty="0">
                 <a:solidFill>
-                  <a:srgbClr val="484F58"/>
+                  <a:schemeClr val="tx1">
+                    <a:lumMod val="50000"/>
+                    <a:lumOff val="50000"/>
+                  </a:schemeClr>
                 </a:solidFill>
                 <a:latin typeface="Consolas"/>
               </a:rPr>
@@ -22650,7 +24496,10 @@
             <a:r>
               <a:rPr sz="1100" b="0" dirty="0" err="1">
                 <a:solidFill>
-                  <a:srgbClr val="484F58"/>
+                  <a:schemeClr val="tx1">
+                    <a:lumMod val="50000"/>
+                    <a:lumOff val="50000"/>
+                  </a:schemeClr>
                 </a:solidFill>
                 <a:latin typeface="Consolas"/>
               </a:rPr>
@@ -22659,7 +24508,10 @@
             <a:r>
               <a:rPr sz="1100" b="0" dirty="0">
                 <a:solidFill>
-                  <a:srgbClr val="484F58"/>
+                  <a:schemeClr val="tx1">
+                    <a:lumMod val="50000"/>
+                    <a:lumOff val="50000"/>
+                  </a:schemeClr>
                 </a:solidFill>
                 <a:latin typeface="Consolas"/>
               </a:rPr>
@@ -22668,7 +24520,10 @@
             <a:r>
               <a:rPr sz="1100" b="0" dirty="0" err="1">
                 <a:solidFill>
-                  <a:srgbClr val="484F58"/>
+                  <a:schemeClr val="tx1">
+                    <a:lumMod val="50000"/>
+                    <a:lumOff val="50000"/>
+                  </a:schemeClr>
                 </a:solidFill>
                 <a:latin typeface="Consolas"/>
               </a:rPr>
@@ -22677,7 +24532,10 @@
             <a:r>
               <a:rPr sz="1100" b="0" dirty="0">
                 <a:solidFill>
-                  <a:srgbClr val="484F58"/>
+                  <a:schemeClr val="tx1">
+                    <a:lumMod val="50000"/>
+                    <a:lumOff val="50000"/>
+                  </a:schemeClr>
                 </a:solidFill>
                 <a:latin typeface="Consolas"/>
               </a:rPr>
@@ -22686,7 +24544,10 @@
             <a:r>
               <a:rPr sz="1100" b="0" dirty="0" err="1">
                 <a:solidFill>
-                  <a:srgbClr val="484F58"/>
+                  <a:schemeClr val="tx1">
+                    <a:lumMod val="50000"/>
+                    <a:lumOff val="50000"/>
+                  </a:schemeClr>
                 </a:solidFill>
                 <a:latin typeface="Consolas"/>
               </a:rPr>
@@ -22695,7 +24556,10 @@
             <a:r>
               <a:rPr sz="1100" b="0" dirty="0">
                 <a:solidFill>
-                  <a:srgbClr val="484F58"/>
+                  <a:schemeClr val="tx1">
+                    <a:lumMod val="50000"/>
+                    <a:lumOff val="50000"/>
+                  </a:schemeClr>
                 </a:solidFill>
                 <a:latin typeface="Consolas"/>
               </a:rPr>
@@ -22704,7 +24568,10 @@
             <a:r>
               <a:rPr sz="1100" b="0" dirty="0" err="1">
                 <a:solidFill>
-                  <a:srgbClr val="484F58"/>
+                  <a:schemeClr val="tx1">
+                    <a:lumMod val="50000"/>
+                    <a:lumOff val="50000"/>
+                  </a:schemeClr>
                 </a:solidFill>
                 <a:latin typeface="Consolas"/>
               </a:rPr>
@@ -22713,7 +24580,10 @@
             <a:r>
               <a:rPr sz="1100" b="0" dirty="0">
                 <a:solidFill>
-                  <a:srgbClr val="484F58"/>
+                  <a:schemeClr val="tx1">
+                    <a:lumMod val="50000"/>
+                    <a:lumOff val="50000"/>
+                  </a:schemeClr>
                 </a:solidFill>
                 <a:latin typeface="Consolas"/>
               </a:rPr>
@@ -22911,6 +24781,15 @@
               </a:rPr>
               <a:t> </a:t>
             </a:r>
+            <a:endParaRPr sz="1100" b="0" dirty="0">
+              <a:solidFill>
+                <a:schemeClr val="tx1">
+                  <a:lumMod val="50000"/>
+                  <a:lumOff val="50000"/>
+                </a:schemeClr>
+              </a:solidFill>
+              <a:latin typeface="Consolas"/>
+            </a:endParaRPr>
           </a:p>
           <a:p>
             <a:pPr algn="l">
@@ -22927,7 +24806,10 @@
             <a:r>
               <a:rPr sz="1100" b="0" dirty="0">
                 <a:solidFill>
-                  <a:srgbClr val="484F58"/>
+                  <a:schemeClr val="tx1">
+                    <a:lumMod val="50000"/>
+                    <a:lumOff val="50000"/>
+                  </a:schemeClr>
                 </a:solidFill>
                 <a:latin typeface="Consolas"/>
               </a:rPr>
@@ -22936,7 +24818,10 @@
             <a:r>
               <a:rPr sz="1100" b="0" dirty="0" err="1">
                 <a:solidFill>
-                  <a:srgbClr val="484F58"/>
+                  <a:schemeClr val="tx1">
+                    <a:lumMod val="50000"/>
+                    <a:lumOff val="50000"/>
+                  </a:schemeClr>
                 </a:solidFill>
                 <a:latin typeface="Consolas"/>
               </a:rPr>
@@ -22945,7 +24830,10 @@
             <a:r>
               <a:rPr sz="1100" b="0" dirty="0">
                 <a:solidFill>
-                  <a:srgbClr val="484F58"/>
+                  <a:schemeClr val="tx1">
+                    <a:lumMod val="50000"/>
+                    <a:lumOff val="50000"/>
+                  </a:schemeClr>
                 </a:solidFill>
                 <a:latin typeface="Consolas"/>
               </a:rPr>
@@ -22954,7 +24842,10 @@
             <a:r>
               <a:rPr sz="1100" b="0" dirty="0" err="1">
                 <a:solidFill>
-                  <a:srgbClr val="484F58"/>
+                  <a:schemeClr val="tx1">
+                    <a:lumMod val="50000"/>
+                    <a:lumOff val="50000"/>
+                  </a:schemeClr>
                 </a:solidFill>
                 <a:latin typeface="Consolas"/>
               </a:rPr>
@@ -22963,7 +24854,10 @@
             <a:r>
               <a:rPr sz="1100" b="0" dirty="0">
                 <a:solidFill>
-                  <a:srgbClr val="484F58"/>
+                  <a:schemeClr val="tx1">
+                    <a:lumMod val="50000"/>
+                    <a:lumOff val="50000"/>
+                  </a:schemeClr>
                 </a:solidFill>
                 <a:latin typeface="Consolas"/>
               </a:rPr>
@@ -22972,7 +24866,10 @@
             <a:r>
               <a:rPr sz="1100" b="0" dirty="0" err="1">
                 <a:solidFill>
-                  <a:srgbClr val="484F58"/>
+                  <a:schemeClr val="tx1">
+                    <a:lumMod val="50000"/>
+                    <a:lumOff val="50000"/>
+                  </a:schemeClr>
                 </a:solidFill>
                 <a:latin typeface="Consolas"/>
               </a:rPr>
@@ -22981,7 +24878,10 @@
             <a:r>
               <a:rPr sz="1100" b="0" dirty="0">
                 <a:solidFill>
-                  <a:srgbClr val="484F58"/>
+                  <a:schemeClr val="tx1">
+                    <a:lumMod val="50000"/>
+                    <a:lumOff val="50000"/>
+                  </a:schemeClr>
                 </a:solidFill>
                 <a:latin typeface="Consolas"/>
               </a:rPr>
@@ -22990,7 +24890,10 @@
             <a:r>
               <a:rPr sz="1100" b="0" dirty="0" err="1">
                 <a:solidFill>
-                  <a:srgbClr val="484F58"/>
+                  <a:schemeClr val="tx1">
+                    <a:lumMod val="50000"/>
+                    <a:lumOff val="50000"/>
+                  </a:schemeClr>
                 </a:solidFill>
                 <a:latin typeface="Consolas"/>
               </a:rPr>
@@ -22999,7 +24902,10 @@
             <a:r>
               <a:rPr sz="1100" b="0" dirty="0">
                 <a:solidFill>
-                  <a:srgbClr val="484F58"/>
+                  <a:schemeClr val="tx1">
+                    <a:lumMod val="50000"/>
+                    <a:lumOff val="50000"/>
+                  </a:schemeClr>
                 </a:solidFill>
                 <a:latin typeface="Consolas"/>
               </a:rPr>
@@ -23008,7 +24914,10 @@
             <a:r>
               <a:rPr sz="1100" b="0" dirty="0" err="1">
                 <a:solidFill>
-                  <a:srgbClr val="484F58"/>
+                  <a:schemeClr val="tx1">
+                    <a:lumMod val="50000"/>
+                    <a:lumOff val="50000"/>
+                  </a:schemeClr>
                 </a:solidFill>
                 <a:latin typeface="Consolas"/>
               </a:rPr>
@@ -23017,7 +24926,10 @@
             <a:r>
               <a:rPr sz="1100" b="0" dirty="0">
                 <a:solidFill>
-                  <a:srgbClr val="484F58"/>
+                  <a:schemeClr val="tx1">
+                    <a:lumMod val="50000"/>
+                    <a:lumOff val="50000"/>
+                  </a:schemeClr>
                 </a:solidFill>
                 <a:latin typeface="Consolas"/>
               </a:rPr>
@@ -23209,14 +25121,38 @@
               </a:spcAft>
             </a:pPr>
             <a:r>
-              <a:rPr sz="1350" b="1">
+              <a:rPr sz="1350" b="1" dirty="0" err="1">
                 <a:solidFill>
                   <a:srgbClr val="F5A623"/>
                 </a:solidFill>
                 <a:latin typeface="Segoe UI"/>
               </a:rPr>
-              <a:t>Perché così</a:t>
-            </a:r>
+              <a:t>Perché</a:t>
+            </a:r>
+            <a:r>
+              <a:rPr sz="1350" b="1" dirty="0">
+                <a:solidFill>
+                  <a:srgbClr val="F5A623"/>
+                </a:solidFill>
+                <a:latin typeface="Segoe UI"/>
+              </a:rPr>
+              <a:t> </a:t>
+            </a:r>
+            <a:r>
+              <a:rPr sz="1350" b="1" dirty="0" err="1">
+                <a:solidFill>
+                  <a:srgbClr val="F5A623"/>
+                </a:solidFill>
+                <a:latin typeface="Segoe UI"/>
+              </a:rPr>
+              <a:t>così</a:t>
+            </a:r>
+            <a:endParaRPr sz="1350" b="1" dirty="0">
+              <a:solidFill>
+                <a:srgbClr val="F5A623"/>
+              </a:solidFill>
+              <a:latin typeface="Segoe UI"/>
+            </a:endParaRPr>
           </a:p>
           <a:p>
             <a:pPr algn="l">
@@ -23231,7 +25167,7 @@
               </a:spcAft>
             </a:pPr>
             <a:r>
-              <a:rPr sz="1100" b="0">
+              <a:rPr sz="1100" b="0" dirty="0">
                 <a:solidFill>
                   <a:srgbClr val="F5A623"/>
                 </a:solidFill>
@@ -23240,13 +25176,67 @@
               <a:t>•  </a:t>
             </a:r>
             <a:r>
-              <a:rPr sz="1100" b="0">
-                <a:solidFill>
-                  <a:srgbClr val="8B949E"/>
-                </a:solidFill>
-                <a:latin typeface="Segoe UI"/>
-              </a:rPr>
-              <a:t>static const array indicizzati da variabili runtime: il verifier rifiuta (relocation → 0).</a:t>
+              <a:rPr sz="1100" b="0" dirty="0">
+                <a:solidFill>
+                  <a:srgbClr val="8B949E"/>
+                </a:solidFill>
+                <a:latin typeface="Segoe UI"/>
+              </a:rPr>
+              <a:t>static const array </a:t>
+            </a:r>
+            <a:r>
+              <a:rPr sz="1100" b="0" dirty="0" err="1">
+                <a:solidFill>
+                  <a:srgbClr val="8B949E"/>
+                </a:solidFill>
+                <a:latin typeface="Segoe UI"/>
+              </a:rPr>
+              <a:t>indicizzati</a:t>
+            </a:r>
+            <a:r>
+              <a:rPr sz="1100" b="0" dirty="0">
+                <a:solidFill>
+                  <a:srgbClr val="8B949E"/>
+                </a:solidFill>
+                <a:latin typeface="Segoe UI"/>
+              </a:rPr>
+              <a:t> da </a:t>
+            </a:r>
+            <a:r>
+              <a:rPr sz="1100" b="0" dirty="0" err="1">
+                <a:solidFill>
+                  <a:srgbClr val="8B949E"/>
+                </a:solidFill>
+                <a:latin typeface="Segoe UI"/>
+              </a:rPr>
+              <a:t>variabili</a:t>
+            </a:r>
+            <a:r>
+              <a:rPr sz="1100" b="0" dirty="0">
+                <a:solidFill>
+                  <a:srgbClr val="8B949E"/>
+                </a:solidFill>
+                <a:latin typeface="Segoe UI"/>
+              </a:rPr>
+              <a:t> runtime: il verifier </a:t>
+            </a:r>
+            <a:r>
+              <a:rPr sz="1100" b="0" dirty="0" err="1">
+                <a:solidFill>
+                  <a:srgbClr val="8B949E"/>
+                </a:solidFill>
+                <a:latin typeface="Segoe UI"/>
+              </a:rPr>
+              <a:t>rifiuta</a:t>
+            </a:r>
+            <a:r>
+              <a:rPr sz="1100" b="0" dirty="0">
+                <a:solidFill>
+                  <a:srgbClr val="8B949E"/>
+                </a:solidFill>
+                <a:latin typeface="Segoe UI"/>
+              </a:rPr>
+              <a:t> (relocation → 0).</a:t>
             </a:r>
           </a:p>
           <a:p>
@@ -23262,7 +25252,7 @@
               </a:spcAft>
             </a:pPr>
             <a:r>
-              <a:rPr sz="1100" b="0">
+              <a:rPr sz="1100" b="0" dirty="0">
                 <a:solidFill>
                   <a:srgbClr val="F5A623"/>
                 </a:solidFill>
@@ -23271,13 +25261,94 @@
               <a:t>•  </a:t>
             </a:r>
             <a:r>
-              <a:rPr sz="1100" b="0">
-                <a:solidFill>
-                  <a:srgbClr val="8B949E"/>
-                </a:solidFill>
-                <a:latin typeface="Segoe UI"/>
-              </a:rPr>
-              <a:t>Soluzione: uno switch unico per iface e per node, scalari su stack.</a:t>
+              <a:rPr sz="1100" b="0" dirty="0" err="1">
+                <a:solidFill>
+                  <a:srgbClr val="8B949E"/>
+                </a:solidFill>
+                <a:latin typeface="Segoe UI"/>
+              </a:rPr>
+              <a:t>Soluzione</a:t>
+            </a:r>
+            <a:r>
+              <a:rPr sz="1100" b="0" dirty="0">
+                <a:solidFill>
+                  <a:srgbClr val="8B949E"/>
+                </a:solidFill>
+                <a:latin typeface="Segoe UI"/>
+              </a:rPr>
+              <a:t>: uno switch </a:t>
+            </a:r>
+            <a:r>
+              <a:rPr sz="1100" b="0" dirty="0" err="1">
+                <a:solidFill>
+                  <a:srgbClr val="8B949E"/>
+                </a:solidFill>
+                <a:latin typeface="Segoe UI"/>
+              </a:rPr>
+              <a:t>unico</a:t>
+            </a:r>
+            <a:r>
+              <a:rPr sz="1100" b="0" dirty="0">
+                <a:solidFill>
+                  <a:srgbClr val="8B949E"/>
+                </a:solidFill>
+                <a:latin typeface="Segoe UI"/>
+              </a:rPr>
+              <a:t> per </a:t>
+            </a:r>
+            <a:r>
+              <a:rPr sz="1100" b="0" dirty="0" err="1">
+                <a:solidFill>
+                  <a:srgbClr val="8B949E"/>
+                </a:solidFill>
+                <a:latin typeface="Segoe UI"/>
+              </a:rPr>
+              <a:t>iface</a:t>
+            </a:r>
+            <a:r>
+              <a:rPr sz="1100" b="0" dirty="0">
+                <a:solidFill>
+                  <a:srgbClr val="8B949E"/>
+                </a:solidFill>
+                <a:latin typeface="Segoe UI"/>
+              </a:rPr>
+              <a:t> e per node, </a:t>
+            </a:r>
+            <a:r>
+              <a:rPr sz="1100" b="0" dirty="0" err="1">
+                <a:solidFill>
+                  <a:srgbClr val="8B949E"/>
+                </a:solidFill>
+                <a:latin typeface="Segoe UI"/>
+              </a:rPr>
+              <a:t>scalari</a:t>
+            </a:r>
+            <a:r>
+              <a:rPr sz="1100" b="0" dirty="0">
+                <a:solidFill>
+                  <a:srgbClr val="8B949E"/>
+                </a:solidFill>
+                <a:latin typeface="Segoe UI"/>
+              </a:rPr>
+              <a:t> </a:t>
+            </a:r>
+            <a:r>
+              <a:rPr sz="1100" b="0" dirty="0" err="1">
+                <a:solidFill>
+                  <a:srgbClr val="8B949E"/>
+                </a:solidFill>
+                <a:latin typeface="Segoe UI"/>
+              </a:rPr>
+              <a:t>su</a:t>
+            </a:r>
+            <a:r>
+              <a:rPr sz="1100" b="0" dirty="0">
+                <a:solidFill>
+                  <a:srgbClr val="8B949E"/>
+                </a:solidFill>
+                <a:latin typeface="Segoe UI"/>
+              </a:rPr>
+              <a:t> stack.</a:t>
             </a:r>
           </a:p>
         </p:txBody>
@@ -23363,14 +25434,29 @@
               </a:spcAft>
             </a:pPr>
             <a:r>
-              <a:rPr sz="1350" b="1">
+              <a:rPr sz="1350" b="1" dirty="0">
                 <a:solidFill>
                   <a:srgbClr val="F5A623"/>
                 </a:solidFill>
                 <a:latin typeface="Segoe UI"/>
               </a:rPr>
-              <a:t>Costo dell'update</a:t>
-            </a:r>
+              <a:t>Costo </a:t>
+            </a:r>
+            <a:r>
+              <a:rPr sz="1350" b="1" dirty="0" err="1">
+                <a:solidFill>
+                  <a:srgbClr val="F5A623"/>
+                </a:solidFill>
+                <a:latin typeface="Segoe UI"/>
+              </a:rPr>
+              <a:t>dell'update</a:t>
+            </a:r>
+            <a:endParaRPr sz="1350" b="1" dirty="0">
+              <a:solidFill>
+                <a:srgbClr val="F5A623"/>
+              </a:solidFill>
+              <a:latin typeface="Segoe UI"/>
+            </a:endParaRPr>
           </a:p>
           <a:p>
             <a:pPr algn="l">
@@ -23385,7 +25471,7 @@
               </a:spcAft>
             </a:pPr>
             <a:r>
-              <a:rPr sz="1100" b="0">
+              <a:rPr sz="1100" b="0" dirty="0">
                 <a:solidFill>
                   <a:srgbClr val="F5A623"/>
                 </a:solidFill>
@@ -23394,13 +25480,94 @@
               <a:t>•  </a:t>
             </a:r>
             <a:r>
-              <a:rPr sz="1100" b="0">
-                <a:solidFill>
-                  <a:srgbClr val="8B949E"/>
-                </a:solidFill>
-                <a:latin typeface="Segoe UI"/>
-              </a:rPr>
-              <a:t>Cambiare modello = rigenera il C, ricompila con LLVM, ricarica XDP.</a:t>
+              <a:rPr sz="1100" b="0" dirty="0" err="1">
+                <a:solidFill>
+                  <a:srgbClr val="8B949E"/>
+                </a:solidFill>
+                <a:latin typeface="Segoe UI"/>
+              </a:rPr>
+              <a:t>Cambiare</a:t>
+            </a:r>
+            <a:r>
+              <a:rPr sz="1100" b="0" dirty="0">
+                <a:solidFill>
+                  <a:srgbClr val="8B949E"/>
+                </a:solidFill>
+                <a:latin typeface="Segoe UI"/>
+              </a:rPr>
+              <a:t> </a:t>
+            </a:r>
+            <a:r>
+              <a:rPr sz="1100" b="0" dirty="0" err="1">
+                <a:solidFill>
+                  <a:srgbClr val="8B949E"/>
+                </a:solidFill>
+                <a:latin typeface="Segoe UI"/>
+              </a:rPr>
+              <a:t>modello</a:t>
+            </a:r>
+            <a:r>
+              <a:rPr sz="1100" b="0" dirty="0">
+                <a:solidFill>
+                  <a:srgbClr val="8B949E"/>
+                </a:solidFill>
+                <a:latin typeface="Segoe UI"/>
+              </a:rPr>
+              <a:t> = </a:t>
+            </a:r>
+            <a:r>
+              <a:rPr sz="1100" b="0" dirty="0" err="1">
+                <a:solidFill>
+                  <a:srgbClr val="8B949E"/>
+                </a:solidFill>
+                <a:latin typeface="Segoe UI"/>
+              </a:rPr>
+              <a:t>rigenera</a:t>
+            </a:r>
+            <a:r>
+              <a:rPr sz="1100" b="0" dirty="0">
+                <a:solidFill>
+                  <a:srgbClr val="8B949E"/>
+                </a:solidFill>
+                <a:latin typeface="Segoe UI"/>
+              </a:rPr>
+              <a:t> il C, </a:t>
+            </a:r>
+            <a:r>
+              <a:rPr sz="1100" b="0" dirty="0" err="1">
+                <a:solidFill>
+                  <a:srgbClr val="8B949E"/>
+                </a:solidFill>
+                <a:latin typeface="Segoe UI"/>
+              </a:rPr>
+              <a:t>ricompila</a:t>
+            </a:r>
+            <a:r>
+              <a:rPr sz="1100" b="0" dirty="0">
+                <a:solidFill>
+                  <a:srgbClr val="8B949E"/>
+                </a:solidFill>
+                <a:latin typeface="Segoe UI"/>
+              </a:rPr>
+              <a:t> con LLVM, </a:t>
+            </a:r>
+            <a:r>
+              <a:rPr sz="1100" b="0" dirty="0" err="1">
+                <a:solidFill>
+                  <a:srgbClr val="8B949E"/>
+                </a:solidFill>
+                <a:latin typeface="Segoe UI"/>
+              </a:rPr>
+              <a:t>ricarica</a:t>
+            </a:r>
+            <a:r>
+              <a:rPr sz="1100" b="0" dirty="0">
+                <a:solidFill>
+                  <a:srgbClr val="8B949E"/>
+                </a:solidFill>
+                <a:latin typeface="Segoe UI"/>
+              </a:rPr>
+              <a:t> XDP.</a:t>
             </a:r>
           </a:p>
           <a:p>
@@ -23416,7 +25583,7 @@
               </a:spcAft>
             </a:pPr>
             <a:r>
-              <a:rPr sz="1100" b="0">
+              <a:rPr sz="1100" b="0" dirty="0">
                 <a:solidFill>
                   <a:srgbClr val="F5A623"/>
                 </a:solidFill>
@@ -23425,13 +25592,67 @@
               <a:t>•  </a:t>
             </a:r>
             <a:r>
-              <a:rPr sz="1100" b="0">
-                <a:solidFill>
-                  <a:srgbClr val="8B949E"/>
-                </a:solidFill>
-                <a:latin typeface="Segoe UI"/>
-              </a:rPr>
-              <a:t>Nessun hot-swap: massima specializzazione, minima flessibilità.</a:t>
+              <a:rPr sz="1100" b="0" dirty="0">
+                <a:solidFill>
+                  <a:srgbClr val="8B949E"/>
+                </a:solidFill>
+                <a:latin typeface="Segoe UI"/>
+              </a:rPr>
+              <a:t>Nessun hot-swap: </a:t>
+            </a:r>
+            <a:r>
+              <a:rPr sz="1100" b="0" dirty="0" err="1">
+                <a:solidFill>
+                  <a:srgbClr val="8B949E"/>
+                </a:solidFill>
+                <a:latin typeface="Segoe UI"/>
+              </a:rPr>
+              <a:t>massima</a:t>
+            </a:r>
+            <a:r>
+              <a:rPr sz="1100" b="0" dirty="0">
+                <a:solidFill>
+                  <a:srgbClr val="8B949E"/>
+                </a:solidFill>
+                <a:latin typeface="Segoe UI"/>
+              </a:rPr>
+              <a:t> </a:t>
+            </a:r>
+            <a:r>
+              <a:rPr sz="1100" b="0" dirty="0" err="1">
+                <a:solidFill>
+                  <a:srgbClr val="8B949E"/>
+                </a:solidFill>
+                <a:latin typeface="Segoe UI"/>
+              </a:rPr>
+              <a:t>specializzazione</a:t>
+            </a:r>
+            <a:r>
+              <a:rPr sz="1100" b="0" dirty="0">
+                <a:solidFill>
+                  <a:srgbClr val="8B949E"/>
+                </a:solidFill>
+                <a:latin typeface="Segoe UI"/>
+              </a:rPr>
+              <a:t>, minima </a:t>
+            </a:r>
+            <a:r>
+              <a:rPr sz="1100" b="0" dirty="0" err="1">
+                <a:solidFill>
+                  <a:srgbClr val="8B949E"/>
+                </a:solidFill>
+                <a:latin typeface="Segoe UI"/>
+              </a:rPr>
+              <a:t>flessibilità</a:t>
+            </a:r>
+            <a:r>
+              <a:rPr sz="1100" b="0" dirty="0">
+                <a:solidFill>
+                  <a:srgbClr val="8B949E"/>
+                </a:solidFill>
+                <a:latin typeface="Segoe UI"/>
+              </a:rPr>
+              <a:t>.</a:t>
             </a:r>
           </a:p>
         </p:txBody>
@@ -25017,7 +27238,7 @@
         </p:nvSpPr>
         <p:spPr>
           <a:xfrm>
-            <a:off x="896112" y="4041648"/>
+            <a:off x="896112" y="3977641"/>
             <a:ext cx="10469880" cy="1920240"/>
           </a:xfrm>
           <a:prstGeom prst="rect">
@@ -25043,14 +27264,29 @@
               </a:spcAft>
             </a:pPr>
             <a:r>
-              <a:rPr sz="1350" b="1">
+              <a:rPr sz="1350" b="1" dirty="0">
                 <a:solidFill>
                   <a:srgbClr val="F5A623"/>
                 </a:solidFill>
                 <a:latin typeface="Segoe UI"/>
               </a:rPr>
-              <a:t>Come è implementata</a:t>
-            </a:r>
+              <a:t>Come è </a:t>
+            </a:r>
+            <a:r>
+              <a:rPr sz="1350" b="1" dirty="0" err="1">
+                <a:solidFill>
+                  <a:srgbClr val="F5A623"/>
+                </a:solidFill>
+                <a:latin typeface="Segoe UI"/>
+              </a:rPr>
+              <a:t>implementata</a:t>
+            </a:r>
+            <a:endParaRPr sz="1350" b="1" dirty="0">
+              <a:solidFill>
+                <a:srgbClr val="F5A623"/>
+              </a:solidFill>
+              <a:latin typeface="Segoe UI"/>
+            </a:endParaRPr>
           </a:p>
           <a:p>
             <a:pPr algn="l">
@@ -25065,7 +27301,7 @@
               </a:spcAft>
             </a:pPr>
             <a:r>
-              <a:rPr sz="1100" b="0">
+              <a:rPr sz="1100" b="0" dirty="0">
                 <a:solidFill>
                   <a:srgbClr val="F5A623"/>
                 </a:solidFill>
@@ -25074,13 +27310,103 @@
               <a:t>•  </a:t>
             </a:r>
             <a:r>
-              <a:rPr sz="1100" b="0">
-                <a:solidFill>
-                  <a:srgbClr val="8B949E"/>
-                </a:solidFill>
-                <a:latin typeface="Segoe UI"/>
-              </a:rPr>
-              <a:t>Un solo programma per l’intera famiglia "2 hidden layer" (arch_generic_2layer): input/output fissi dal protocollo (65/7).</a:t>
+              <a:rPr sz="1100" b="0" dirty="0">
+                <a:solidFill>
+                  <a:srgbClr val="8B949E"/>
+                </a:solidFill>
+                <a:latin typeface="Segoe UI"/>
+              </a:rPr>
+              <a:t>Un solo </a:t>
+            </a:r>
+            <a:r>
+              <a:rPr sz="1100" b="0" dirty="0" err="1">
+                <a:solidFill>
+                  <a:srgbClr val="8B949E"/>
+                </a:solidFill>
+                <a:latin typeface="Segoe UI"/>
+              </a:rPr>
+              <a:t>programma</a:t>
+            </a:r>
+            <a:r>
+              <a:rPr sz="1100" b="0" dirty="0">
+                <a:solidFill>
+                  <a:srgbClr val="8B949E"/>
+                </a:solidFill>
+                <a:latin typeface="Segoe UI"/>
+              </a:rPr>
+              <a:t> per </a:t>
+            </a:r>
+            <a:r>
+              <a:rPr sz="1100" b="0" dirty="0" err="1">
+                <a:solidFill>
+                  <a:srgbClr val="8B949E"/>
+                </a:solidFill>
+                <a:latin typeface="Segoe UI"/>
+              </a:rPr>
+              <a:t>l’intera</a:t>
+            </a:r>
+            <a:r>
+              <a:rPr sz="1100" b="0" dirty="0">
+                <a:solidFill>
+                  <a:srgbClr val="8B949E"/>
+                </a:solidFill>
+                <a:latin typeface="Segoe UI"/>
+              </a:rPr>
+              <a:t> </a:t>
+            </a:r>
+            <a:r>
+              <a:rPr sz="1100" b="0" dirty="0" err="1">
+                <a:solidFill>
+                  <a:srgbClr val="8B949E"/>
+                </a:solidFill>
+                <a:latin typeface="Segoe UI"/>
+              </a:rPr>
+              <a:t>famiglia</a:t>
+            </a:r>
+            <a:r>
+              <a:rPr sz="1100" b="0" dirty="0">
+                <a:solidFill>
+                  <a:srgbClr val="8B949E"/>
+                </a:solidFill>
+                <a:latin typeface="Segoe UI"/>
+              </a:rPr>
+              <a:t> "2 hidden layer" (arch_generic_2layer): input/output </a:t>
+            </a:r>
+            <a:r>
+              <a:rPr sz="1100" b="0" dirty="0" err="1">
+                <a:solidFill>
+                  <a:srgbClr val="8B949E"/>
+                </a:solidFill>
+                <a:latin typeface="Segoe UI"/>
+              </a:rPr>
+              <a:t>fissi</a:t>
+            </a:r>
+            <a:r>
+              <a:rPr sz="1100" b="0" dirty="0">
+                <a:solidFill>
+                  <a:srgbClr val="8B949E"/>
+                </a:solidFill>
+                <a:latin typeface="Segoe UI"/>
+              </a:rPr>
+              <a:t> dal </a:t>
+            </a:r>
+            <a:r>
+              <a:rPr sz="1100" b="0" dirty="0" err="1">
+                <a:solidFill>
+                  <a:srgbClr val="8B949E"/>
+                </a:solidFill>
+                <a:latin typeface="Segoe UI"/>
+              </a:rPr>
+              <a:t>protocollo</a:t>
+            </a:r>
+            <a:r>
+              <a:rPr sz="1100" b="0" dirty="0">
+                <a:solidFill>
+                  <a:srgbClr val="8B949E"/>
+                </a:solidFill>
+                <a:latin typeface="Segoe UI"/>
+              </a:rPr>
+              <a:t> (65/7).</a:t>
             </a:r>
           </a:p>
           <a:p>
@@ -25096,7 +27422,7 @@
               </a:spcAft>
             </a:pPr>
             <a:r>
-              <a:rPr sz="1100" b="0">
+              <a:rPr sz="1100" b="0" dirty="0">
                 <a:solidFill>
                   <a:srgbClr val="F5A623"/>
                 </a:solidFill>
@@ -25105,13 +27431,193 @@
               <a:t>•  </a:t>
             </a:r>
             <a:r>
-              <a:rPr sz="1100" b="0">
-                <a:solidFill>
-                  <a:srgbClr val="8B949E"/>
-                </a:solidFill>
-                <a:latin typeface="Segoe UI"/>
-              </a:rPr>
-              <a:t>Le larghezze n_h1/n_h2 sono lette a runtime da arch_registry, fino al tetto compilato T2_MAX_H1/T2_MAX_H2 -- nessuna ricompilazione per un modello piu largo o stretto.</a:t>
+              <a:rPr sz="1100" b="0" dirty="0">
+                <a:solidFill>
+                  <a:srgbClr val="8B949E"/>
+                </a:solidFill>
+                <a:latin typeface="Segoe UI"/>
+              </a:rPr>
+              <a:t>Le </a:t>
+            </a:r>
+            <a:r>
+              <a:rPr sz="1100" b="0" dirty="0" err="1">
+                <a:solidFill>
+                  <a:srgbClr val="8B949E"/>
+                </a:solidFill>
+                <a:latin typeface="Segoe UI"/>
+              </a:rPr>
+              <a:t>larghezze</a:t>
+            </a:r>
+            <a:r>
+              <a:rPr sz="1100" b="0" dirty="0">
+                <a:solidFill>
+                  <a:srgbClr val="8B949E"/>
+                </a:solidFill>
+                <a:latin typeface="Segoe UI"/>
+              </a:rPr>
+              <a:t> n_h1/n_h2 </a:t>
+            </a:r>
+            <a:r>
+              <a:rPr sz="1100" b="0" dirty="0" err="1">
+                <a:solidFill>
+                  <a:srgbClr val="8B949E"/>
+                </a:solidFill>
+                <a:latin typeface="Segoe UI"/>
+              </a:rPr>
+              <a:t>sono</a:t>
+            </a:r>
+            <a:r>
+              <a:rPr sz="1100" b="0" dirty="0">
+                <a:solidFill>
+                  <a:srgbClr val="8B949E"/>
+                </a:solidFill>
+                <a:latin typeface="Segoe UI"/>
+              </a:rPr>
+              <a:t> </a:t>
+            </a:r>
+            <a:r>
+              <a:rPr sz="1100" b="0" dirty="0" err="1">
+                <a:solidFill>
+                  <a:srgbClr val="8B949E"/>
+                </a:solidFill>
+                <a:latin typeface="Segoe UI"/>
+              </a:rPr>
+              <a:t>lette</a:t>
+            </a:r>
+            <a:r>
+              <a:rPr sz="1100" b="0" dirty="0">
+                <a:solidFill>
+                  <a:srgbClr val="8B949E"/>
+                </a:solidFill>
+                <a:latin typeface="Segoe UI"/>
+              </a:rPr>
+              <a:t> a runtime da </a:t>
+            </a:r>
+            <a:r>
+              <a:rPr sz="1100" b="0" dirty="0" err="1">
+                <a:solidFill>
+                  <a:srgbClr val="8B949E"/>
+                </a:solidFill>
+                <a:latin typeface="Segoe UI"/>
+              </a:rPr>
+              <a:t>arch_registry</a:t>
+            </a:r>
+            <a:r>
+              <a:rPr sz="1100" b="0" dirty="0">
+                <a:solidFill>
+                  <a:srgbClr val="8B949E"/>
+                </a:solidFill>
+                <a:latin typeface="Segoe UI"/>
+              </a:rPr>
+              <a:t>, </a:t>
+            </a:r>
+            <a:r>
+              <a:rPr sz="1100" b="0" dirty="0" err="1">
+                <a:solidFill>
+                  <a:srgbClr val="8B949E"/>
+                </a:solidFill>
+                <a:latin typeface="Segoe UI"/>
+              </a:rPr>
+              <a:t>fino</a:t>
+            </a:r>
+            <a:r>
+              <a:rPr sz="1100" b="0" dirty="0">
+                <a:solidFill>
+                  <a:srgbClr val="8B949E"/>
+                </a:solidFill>
+                <a:latin typeface="Segoe UI"/>
+              </a:rPr>
+              <a:t> al </a:t>
+            </a:r>
+            <a:r>
+              <a:rPr sz="1100" b="0" dirty="0" err="1">
+                <a:solidFill>
+                  <a:srgbClr val="8B949E"/>
+                </a:solidFill>
+                <a:latin typeface="Segoe UI"/>
+              </a:rPr>
+              <a:t>tetto</a:t>
+            </a:r>
+            <a:r>
+              <a:rPr sz="1100" b="0" dirty="0">
+                <a:solidFill>
+                  <a:srgbClr val="8B949E"/>
+                </a:solidFill>
+                <a:latin typeface="Segoe UI"/>
+              </a:rPr>
+              <a:t> </a:t>
+            </a:r>
+            <a:r>
+              <a:rPr sz="1100" b="0" dirty="0" err="1">
+                <a:solidFill>
+                  <a:srgbClr val="8B949E"/>
+                </a:solidFill>
+                <a:latin typeface="Segoe UI"/>
+              </a:rPr>
+              <a:t>compilato</a:t>
+            </a:r>
+            <a:r>
+              <a:rPr sz="1100" b="0" dirty="0">
+                <a:solidFill>
+                  <a:srgbClr val="8B949E"/>
+                </a:solidFill>
+                <a:latin typeface="Segoe UI"/>
+              </a:rPr>
+              <a:t> T2_MAX_H1/T2_MAX_H2 -- </a:t>
+            </a:r>
+            <a:r>
+              <a:rPr sz="1100" b="0" dirty="0" err="1">
+                <a:solidFill>
+                  <a:srgbClr val="8B949E"/>
+                </a:solidFill>
+                <a:latin typeface="Segoe UI"/>
+              </a:rPr>
+              <a:t>nessuna</a:t>
+            </a:r>
+            <a:r>
+              <a:rPr sz="1100" b="0" dirty="0">
+                <a:solidFill>
+                  <a:srgbClr val="8B949E"/>
+                </a:solidFill>
+                <a:latin typeface="Segoe UI"/>
+              </a:rPr>
+              <a:t> </a:t>
+            </a:r>
+            <a:r>
+              <a:rPr sz="1100" b="0" dirty="0" err="1">
+                <a:solidFill>
+                  <a:srgbClr val="8B949E"/>
+                </a:solidFill>
+                <a:latin typeface="Segoe UI"/>
+              </a:rPr>
+              <a:t>ricompilazione</a:t>
+            </a:r>
+            <a:r>
+              <a:rPr sz="1100" b="0" dirty="0">
+                <a:solidFill>
+                  <a:srgbClr val="8B949E"/>
+                </a:solidFill>
+                <a:latin typeface="Segoe UI"/>
+              </a:rPr>
+              <a:t> per un </a:t>
+            </a:r>
+            <a:r>
+              <a:rPr sz="1100" b="0" dirty="0" err="1">
+                <a:solidFill>
+                  <a:srgbClr val="8B949E"/>
+                </a:solidFill>
+                <a:latin typeface="Segoe UI"/>
+              </a:rPr>
+              <a:t>modello</a:t>
+            </a:r>
+            <a:r>
+              <a:rPr sz="1100" b="0" dirty="0">
+                <a:solidFill>
+                  <a:srgbClr val="8B949E"/>
+                </a:solidFill>
+                <a:latin typeface="Segoe UI"/>
+              </a:rPr>
+              <a:t> piu largo o stretto.</a:t>
             </a:r>
           </a:p>
           <a:p>
@@ -25127,7 +27633,7 @@
               </a:spcAft>
             </a:pPr>
             <a:r>
-              <a:rPr sz="1100" b="0">
+              <a:rPr sz="1100" b="0" dirty="0">
                 <a:solidFill>
                   <a:srgbClr val="F5A623"/>
                 </a:solidFill>
@@ -25136,13 +27642,121 @@
               <a:t>•  </a:t>
             </a:r>
             <a:r>
-              <a:rPr sz="1100" b="0">
-                <a:solidFill>
-                  <a:srgbClr val="8B949E"/>
-                </a:solidFill>
-                <a:latin typeface="Segoe UI"/>
-              </a:rPr>
-              <a:t>I pesi int8 stanno in arch_weights (BPF_ARRAY), letti a runtime con lookup su offset calcolato da n_h1/n_h2.</a:t>
+              <a:rPr sz="1100" b="0" dirty="0">
+                <a:solidFill>
+                  <a:srgbClr val="8B949E"/>
+                </a:solidFill>
+                <a:latin typeface="Segoe UI"/>
+              </a:rPr>
+              <a:t>I </a:t>
+            </a:r>
+            <a:r>
+              <a:rPr sz="1100" b="0" dirty="0" err="1">
+                <a:solidFill>
+                  <a:srgbClr val="8B949E"/>
+                </a:solidFill>
+                <a:latin typeface="Segoe UI"/>
+              </a:rPr>
+              <a:t>pesi</a:t>
+            </a:r>
+            <a:r>
+              <a:rPr sz="1100" b="0" dirty="0">
+                <a:solidFill>
+                  <a:srgbClr val="8B949E"/>
+                </a:solidFill>
+                <a:latin typeface="Segoe UI"/>
+              </a:rPr>
+              <a:t> int8 </a:t>
+            </a:r>
+            <a:r>
+              <a:rPr sz="1100" b="0" dirty="0" err="1">
+                <a:solidFill>
+                  <a:srgbClr val="8B949E"/>
+                </a:solidFill>
+                <a:latin typeface="Segoe UI"/>
+              </a:rPr>
+              <a:t>stanno</a:t>
+            </a:r>
+            <a:r>
+              <a:rPr sz="1100" b="0" dirty="0">
+                <a:solidFill>
+                  <a:srgbClr val="8B949E"/>
+                </a:solidFill>
+                <a:latin typeface="Segoe UI"/>
+              </a:rPr>
+              <a:t> in </a:t>
+            </a:r>
+            <a:r>
+              <a:rPr sz="1100" b="0" dirty="0" err="1">
+                <a:solidFill>
+                  <a:srgbClr val="8B949E"/>
+                </a:solidFill>
+                <a:latin typeface="Segoe UI"/>
+              </a:rPr>
+              <a:t>arch_weights</a:t>
+            </a:r>
+            <a:r>
+              <a:rPr sz="1100" b="0" dirty="0">
+                <a:solidFill>
+                  <a:srgbClr val="8B949E"/>
+                </a:solidFill>
+                <a:latin typeface="Segoe UI"/>
+              </a:rPr>
+              <a:t> (BPF_ARRAY), </a:t>
+            </a:r>
+            <a:r>
+              <a:rPr sz="1100" b="0" dirty="0" err="1">
+                <a:solidFill>
+                  <a:srgbClr val="8B949E"/>
+                </a:solidFill>
+                <a:latin typeface="Segoe UI"/>
+              </a:rPr>
+              <a:t>letti</a:t>
+            </a:r>
+            <a:r>
+              <a:rPr sz="1100" b="0" dirty="0">
+                <a:solidFill>
+                  <a:srgbClr val="8B949E"/>
+                </a:solidFill>
+                <a:latin typeface="Segoe UI"/>
+              </a:rPr>
+              <a:t> a runtime con lookup </a:t>
+            </a:r>
+            <a:r>
+              <a:rPr sz="1100" b="0" dirty="0" err="1">
+                <a:solidFill>
+                  <a:srgbClr val="8B949E"/>
+                </a:solidFill>
+                <a:latin typeface="Segoe UI"/>
+              </a:rPr>
+              <a:t>su</a:t>
+            </a:r>
+            <a:r>
+              <a:rPr sz="1100" b="0" dirty="0">
+                <a:solidFill>
+                  <a:srgbClr val="8B949E"/>
+                </a:solidFill>
+                <a:latin typeface="Segoe UI"/>
+              </a:rPr>
+              <a:t> offset </a:t>
+            </a:r>
+            <a:r>
+              <a:rPr sz="1100" b="0" dirty="0" err="1">
+                <a:solidFill>
+                  <a:srgbClr val="8B949E"/>
+                </a:solidFill>
+                <a:latin typeface="Segoe UI"/>
+              </a:rPr>
+              <a:t>calcolato</a:t>
+            </a:r>
+            <a:r>
+              <a:rPr sz="1100" b="0" dirty="0">
+                <a:solidFill>
+                  <a:srgbClr val="8B949E"/>
+                </a:solidFill>
+                <a:latin typeface="Segoe UI"/>
+              </a:rPr>
+              <a:t> da n_h1/n_h2.</a:t>
             </a:r>
           </a:p>
           <a:p>
@@ -25158,7 +27772,7 @@
               </a:spcAft>
             </a:pPr>
             <a:r>
-              <a:rPr sz="1100" b="0">
+              <a:rPr sz="1100" b="0" dirty="0">
                 <a:solidFill>
                   <a:srgbClr val="F5A623"/>
                 </a:solidFill>
@@ -25167,13 +27781,148 @@
               <a:t>•  </a:t>
             </a:r>
             <a:r>
-              <a:rPr sz="1100" b="0">
-                <a:solidFill>
-                  <a:srgbClr val="8B949E"/>
-                </a:solidFill>
-                <a:latin typeface="Segoe UI"/>
-              </a:rPr>
-              <a:t>link_state[0..5] letto nel loop fc1: acc += link_state[i] * arch_weights[woff + j*65 + i].</a:t>
+              <a:rPr sz="1100" b="0" dirty="0" err="1">
+                <a:solidFill>
+                  <a:srgbClr val="8B949E"/>
+                </a:solidFill>
+                <a:latin typeface="Segoe UI"/>
+              </a:rPr>
+              <a:t>link_state</a:t>
+            </a:r>
+            <a:r>
+              <a:rPr sz="1100" b="0" dirty="0">
+                <a:solidFill>
+                  <a:srgbClr val="8B949E"/>
+                </a:solidFill>
+                <a:latin typeface="Segoe UI"/>
+              </a:rPr>
+              <a:t>[0..5] </a:t>
+            </a:r>
+            <a:r>
+              <a:rPr sz="1100" b="0" dirty="0" err="1">
+                <a:solidFill>
+                  <a:srgbClr val="8B949E"/>
+                </a:solidFill>
+                <a:latin typeface="Segoe UI"/>
+              </a:rPr>
+              <a:t>letto</a:t>
+            </a:r>
+            <a:r>
+              <a:rPr sz="1100" b="0" dirty="0">
+                <a:solidFill>
+                  <a:srgbClr val="8B949E"/>
+                </a:solidFill>
+                <a:latin typeface="Segoe UI"/>
+              </a:rPr>
+              <a:t> </a:t>
+            </a:r>
+            <a:r>
+              <a:rPr sz="1100" b="0" dirty="0" err="1">
+                <a:solidFill>
+                  <a:srgbClr val="8B949E"/>
+                </a:solidFill>
+                <a:latin typeface="Segoe UI"/>
+              </a:rPr>
+              <a:t>nel</a:t>
+            </a:r>
+            <a:r>
+              <a:rPr sz="1100" b="0" dirty="0">
+                <a:solidFill>
+                  <a:srgbClr val="8B949E"/>
+                </a:solidFill>
+                <a:latin typeface="Segoe UI"/>
+              </a:rPr>
+              <a:t> loop fc1: acc += </a:t>
+            </a:r>
+            <a:r>
+              <a:rPr sz="1100" b="0" dirty="0" err="1">
+                <a:solidFill>
+                  <a:srgbClr val="8B949E"/>
+                </a:solidFill>
+                <a:latin typeface="Segoe UI"/>
+              </a:rPr>
+              <a:t>link_state</a:t>
+            </a:r>
+            <a:r>
+              <a:rPr sz="1100" b="0" dirty="0">
+                <a:solidFill>
+                  <a:srgbClr val="8B949E"/>
+                </a:solidFill>
+                <a:latin typeface="Segoe UI"/>
+              </a:rPr>
+              <a:t>[</a:t>
+            </a:r>
+            <a:r>
+              <a:rPr sz="1100" b="0" dirty="0" err="1">
+                <a:solidFill>
+                  <a:srgbClr val="8B949E"/>
+                </a:solidFill>
+                <a:latin typeface="Segoe UI"/>
+              </a:rPr>
+              <a:t>i</a:t>
+            </a:r>
+            <a:r>
+              <a:rPr sz="1100" b="0" dirty="0">
+                <a:solidFill>
+                  <a:srgbClr val="8B949E"/>
+                </a:solidFill>
+                <a:latin typeface="Segoe UI"/>
+              </a:rPr>
+              <a:t>] * </a:t>
+            </a:r>
+            <a:r>
+              <a:rPr sz="1100" b="0" dirty="0" err="1">
+                <a:solidFill>
+                  <a:srgbClr val="8B949E"/>
+                </a:solidFill>
+                <a:latin typeface="Segoe UI"/>
+              </a:rPr>
+              <a:t>arch_weights</a:t>
+            </a:r>
+            <a:r>
+              <a:rPr sz="1100" b="0" dirty="0">
+                <a:solidFill>
+                  <a:srgbClr val="8B949E"/>
+                </a:solidFill>
+                <a:latin typeface="Segoe UI"/>
+              </a:rPr>
+              <a:t>[</a:t>
+            </a:r>
+            <a:r>
+              <a:rPr sz="1100" b="0" dirty="0" err="1">
+                <a:solidFill>
+                  <a:srgbClr val="8B949E"/>
+                </a:solidFill>
+                <a:latin typeface="Segoe UI"/>
+              </a:rPr>
+              <a:t>woff</a:t>
+            </a:r>
+            <a:r>
+              <a:rPr sz="1100" b="0" dirty="0">
+                <a:solidFill>
+                  <a:srgbClr val="8B949E"/>
+                </a:solidFill>
+                <a:latin typeface="Segoe UI"/>
+              </a:rPr>
+              <a:t> + j*65 + </a:t>
+            </a:r>
+            <a:r>
+              <a:rPr sz="1100" b="0" dirty="0" err="1">
+                <a:solidFill>
+                  <a:srgbClr val="8B949E"/>
+                </a:solidFill>
+                <a:latin typeface="Segoe UI"/>
+              </a:rPr>
+              <a:t>i</a:t>
+            </a:r>
+            <a:r>
+              <a:rPr sz="1100" b="0" dirty="0">
+                <a:solidFill>
+                  <a:srgbClr val="8B949E"/>
+                </a:solidFill>
+                <a:latin typeface="Segoe UI"/>
+              </a:rPr>
+              <a:t>].</a:t>
             </a:r>
           </a:p>
           <a:p>
@@ -25189,7 +27938,7 @@
               </a:spcAft>
             </a:pPr>
             <a:r>
-              <a:rPr sz="1100" b="0">
+              <a:rPr sz="1100" b="0" dirty="0">
                 <a:solidFill>
                   <a:srgbClr val="F5A623"/>
                 </a:solidFill>
@@ -25198,13 +27947,139 @@
               <a:t>•  </a:t>
             </a:r>
             <a:r>
-              <a:rPr sz="1100" b="0">
-                <a:solidFill>
-                  <a:srgbClr val="8B949E"/>
-                </a:solidFill>
-                <a:latin typeface="Segoe UI"/>
-              </a:rPr>
-              <a:t>Aggiornamento modello/larghezza = load_arch_weights() sui pesi. Nessuna ricompilazione, nessun reload.</a:t>
+              <a:rPr sz="1100" b="0" dirty="0">
+                <a:solidFill>
+                  <a:srgbClr val="8B949E"/>
+                </a:solidFill>
+                <a:latin typeface="Segoe UI"/>
+              </a:rPr>
+              <a:t>Aggiornamento </a:t>
+            </a:r>
+            <a:r>
+              <a:rPr sz="1100" b="0" dirty="0" err="1">
+                <a:solidFill>
+                  <a:srgbClr val="8B949E"/>
+                </a:solidFill>
+                <a:latin typeface="Segoe UI"/>
+              </a:rPr>
+              <a:t>modello</a:t>
+            </a:r>
+            <a:r>
+              <a:rPr sz="1100" b="0" dirty="0">
+                <a:solidFill>
+                  <a:srgbClr val="8B949E"/>
+                </a:solidFill>
+                <a:latin typeface="Segoe UI"/>
+              </a:rPr>
+              <a:t>/</a:t>
+            </a:r>
+            <a:r>
+              <a:rPr sz="1100" b="0" dirty="0" err="1">
+                <a:solidFill>
+                  <a:srgbClr val="8B949E"/>
+                </a:solidFill>
+                <a:latin typeface="Segoe UI"/>
+              </a:rPr>
+              <a:t>larghezza</a:t>
+            </a:r>
+            <a:r>
+              <a:rPr sz="1100" b="0" dirty="0">
+                <a:solidFill>
+                  <a:srgbClr val="8B949E"/>
+                </a:solidFill>
+                <a:latin typeface="Segoe UI"/>
+              </a:rPr>
+              <a:t> = </a:t>
+            </a:r>
+            <a:r>
+              <a:rPr sz="1100" b="0" dirty="0" err="1">
+                <a:solidFill>
+                  <a:srgbClr val="8B949E"/>
+                </a:solidFill>
+                <a:latin typeface="Segoe UI"/>
+              </a:rPr>
+              <a:t>load_arch_weights</a:t>
+            </a:r>
+            <a:r>
+              <a:rPr sz="1100" b="0" dirty="0">
+                <a:solidFill>
+                  <a:srgbClr val="8B949E"/>
+                </a:solidFill>
+                <a:latin typeface="Segoe UI"/>
+              </a:rPr>
+              <a:t>() sui </a:t>
+            </a:r>
+            <a:r>
+              <a:rPr sz="1100" b="0" dirty="0" err="1">
+                <a:solidFill>
+                  <a:srgbClr val="8B949E"/>
+                </a:solidFill>
+                <a:latin typeface="Segoe UI"/>
+              </a:rPr>
+              <a:t>pesi</a:t>
+            </a:r>
+            <a:r>
+              <a:rPr sz="1100" b="0" dirty="0">
+                <a:solidFill>
+                  <a:srgbClr val="8B949E"/>
+                </a:solidFill>
+                <a:latin typeface="Segoe UI"/>
+              </a:rPr>
+              <a:t>. </a:t>
+            </a:r>
+            <a:r>
+              <a:rPr sz="1100" b="0" dirty="0" err="1">
+                <a:solidFill>
+                  <a:srgbClr val="8B949E"/>
+                </a:solidFill>
+                <a:latin typeface="Segoe UI"/>
+              </a:rPr>
+              <a:t>Nessuna</a:t>
+            </a:r>
+            <a:r>
+              <a:rPr sz="1100" b="0" dirty="0">
+                <a:solidFill>
+                  <a:srgbClr val="8B949E"/>
+                </a:solidFill>
+                <a:latin typeface="Segoe UI"/>
+              </a:rPr>
+              <a:t> </a:t>
+            </a:r>
+            <a:r>
+              <a:rPr sz="1100" b="0" dirty="0" err="1">
+                <a:solidFill>
+                  <a:srgbClr val="8B949E"/>
+                </a:solidFill>
+                <a:latin typeface="Segoe UI"/>
+              </a:rPr>
+              <a:t>ricompilazione</a:t>
+            </a:r>
+            <a:r>
+              <a:rPr sz="1100" b="0" dirty="0">
+                <a:solidFill>
+                  <a:srgbClr val="8B949E"/>
+                </a:solidFill>
+                <a:latin typeface="Segoe UI"/>
+              </a:rPr>
+              <a:t>, </a:t>
+            </a:r>
+            <a:r>
+              <a:rPr sz="1100" b="0" dirty="0" err="1">
+                <a:solidFill>
+                  <a:srgbClr val="8B949E"/>
+                </a:solidFill>
+                <a:latin typeface="Segoe UI"/>
+              </a:rPr>
+              <a:t>nessun</a:t>
+            </a:r>
+            <a:r>
+              <a:rPr sz="1100" b="0" dirty="0">
+                <a:solidFill>
+                  <a:srgbClr val="8B949E"/>
+                </a:solidFill>
+                <a:latin typeface="Segoe UI"/>
+              </a:rPr>
+              <a:t> reload.</a:t>
             </a:r>
           </a:p>
           <a:p>
@@ -25220,7 +28095,7 @@
               </a:spcAft>
             </a:pPr>
             <a:r>
-              <a:rPr sz="1100" b="0">
+              <a:rPr sz="1100" b="0" dirty="0">
                 <a:solidFill>
                   <a:srgbClr val="F5A623"/>
                 </a:solidFill>
@@ -25229,13 +28104,220 @@
               <a:t>•  </a:t>
             </a:r>
             <a:r>
-              <a:rPr sz="1100" b="0">
-                <a:solidFill>
-                  <a:srgbClr val="8B949E"/>
-                </a:solidFill>
-                <a:latin typeface="Segoe UI"/>
-              </a:rPr>
-              <a:t>Testato: model_id=0 reale 65-4-4-7 + model_id=1 sintetico 65-6-5-7 (larghezza diversa, stessa profondita 2 hidden layer) REGISTRATI INSIEME, stesso programma compilato -- PASS.</a:t>
+              <a:rPr sz="1100" b="0" dirty="0" err="1">
+                <a:solidFill>
+                  <a:srgbClr val="8B949E"/>
+                </a:solidFill>
+                <a:latin typeface="Segoe UI"/>
+              </a:rPr>
+              <a:t>Testato</a:t>
+            </a:r>
+            <a:r>
+              <a:rPr sz="1100" b="0" dirty="0">
+                <a:solidFill>
+                  <a:srgbClr val="8B949E"/>
+                </a:solidFill>
+                <a:latin typeface="Segoe UI"/>
+              </a:rPr>
+              <a:t>: </a:t>
+            </a:r>
+            <a:r>
+              <a:rPr sz="1100" b="0" dirty="0" err="1">
+                <a:solidFill>
+                  <a:srgbClr val="8B949E"/>
+                </a:solidFill>
+                <a:latin typeface="Segoe UI"/>
+              </a:rPr>
+              <a:t>model_id</a:t>
+            </a:r>
+            <a:r>
+              <a:rPr sz="1100" b="0" dirty="0">
+                <a:solidFill>
+                  <a:srgbClr val="8B949E"/>
+                </a:solidFill>
+                <a:latin typeface="Segoe UI"/>
+              </a:rPr>
+              <a:t>=0 </a:t>
+            </a:r>
+            <a:r>
+              <a:rPr sz="1100" b="0" dirty="0" err="1">
+                <a:solidFill>
+                  <a:srgbClr val="8B949E"/>
+                </a:solidFill>
+                <a:latin typeface="Segoe UI"/>
+              </a:rPr>
+              <a:t>reale</a:t>
+            </a:r>
+            <a:r>
+              <a:rPr sz="1100" b="0" dirty="0">
+                <a:solidFill>
+                  <a:srgbClr val="8B949E"/>
+                </a:solidFill>
+                <a:latin typeface="Segoe UI"/>
+              </a:rPr>
+              <a:t> 65-4-4-7 + </a:t>
+            </a:r>
+            <a:r>
+              <a:rPr sz="1100" b="0" dirty="0" err="1">
+                <a:solidFill>
+                  <a:srgbClr val="8B949E"/>
+                </a:solidFill>
+                <a:latin typeface="Segoe UI"/>
+              </a:rPr>
+              <a:t>model_id</a:t>
+            </a:r>
+            <a:r>
+              <a:rPr sz="1100" b="0" dirty="0">
+                <a:solidFill>
+                  <a:srgbClr val="8B949E"/>
+                </a:solidFill>
+                <a:latin typeface="Segoe UI"/>
+              </a:rPr>
+              <a:t>=1 </a:t>
+            </a:r>
+            <a:r>
+              <a:rPr sz="1100" b="0" dirty="0" err="1">
+                <a:solidFill>
+                  <a:srgbClr val="8B949E"/>
+                </a:solidFill>
+                <a:latin typeface="Segoe UI"/>
+              </a:rPr>
+              <a:t>sintetico</a:t>
+            </a:r>
+            <a:r>
+              <a:rPr sz="1100" b="0" dirty="0">
+                <a:solidFill>
+                  <a:srgbClr val="8B949E"/>
+                </a:solidFill>
+                <a:latin typeface="Segoe UI"/>
+              </a:rPr>
+              <a:t> 65-6-5-7 (</a:t>
+            </a:r>
+            <a:r>
+              <a:rPr sz="1100" b="0" dirty="0" err="1">
+                <a:solidFill>
+                  <a:srgbClr val="8B949E"/>
+                </a:solidFill>
+                <a:latin typeface="Segoe UI"/>
+              </a:rPr>
+              <a:t>larghezza</a:t>
+            </a:r>
+            <a:r>
+              <a:rPr sz="1100" b="0" dirty="0">
+                <a:solidFill>
+                  <a:srgbClr val="8B949E"/>
+                </a:solidFill>
+                <a:latin typeface="Segoe UI"/>
+              </a:rPr>
+              <a:t> </a:t>
+            </a:r>
+            <a:r>
+              <a:rPr sz="1100" b="0" dirty="0" err="1">
+                <a:solidFill>
+                  <a:srgbClr val="8B949E"/>
+                </a:solidFill>
+                <a:latin typeface="Segoe UI"/>
+              </a:rPr>
+              <a:t>diversa</a:t>
+            </a:r>
+            <a:r>
+              <a:rPr sz="1100" b="0" dirty="0">
+                <a:solidFill>
+                  <a:srgbClr val="8B949E"/>
+                </a:solidFill>
+                <a:latin typeface="Segoe UI"/>
+              </a:rPr>
+              <a:t>, </a:t>
+            </a:r>
+            <a:r>
+              <a:rPr sz="1100" b="0" dirty="0" err="1">
+                <a:solidFill>
+                  <a:srgbClr val="8B949E"/>
+                </a:solidFill>
+                <a:latin typeface="Segoe UI"/>
+              </a:rPr>
+              <a:t>stessa</a:t>
+            </a:r>
+            <a:r>
+              <a:rPr sz="1100" b="0" dirty="0">
+                <a:solidFill>
+                  <a:srgbClr val="8B949E"/>
+                </a:solidFill>
+                <a:latin typeface="Segoe UI"/>
+              </a:rPr>
+              <a:t> </a:t>
+            </a:r>
+            <a:r>
+              <a:rPr sz="1100" b="0" dirty="0" err="1">
+                <a:solidFill>
+                  <a:srgbClr val="8B949E"/>
+                </a:solidFill>
+                <a:latin typeface="Segoe UI"/>
+              </a:rPr>
+              <a:t>profondita</a:t>
+            </a:r>
+            <a:r>
+              <a:rPr sz="1100" b="0" dirty="0">
+                <a:solidFill>
+                  <a:srgbClr val="8B949E"/>
+                </a:solidFill>
+                <a:latin typeface="Segoe UI"/>
+              </a:rPr>
+              <a:t> 2 hidden layer) REGISTRATI INSIEME, </a:t>
+            </a:r>
+            <a:r>
+              <a:rPr sz="1100" b="0" dirty="0" err="1">
+                <a:solidFill>
+                  <a:srgbClr val="8B949E"/>
+                </a:solidFill>
+                <a:latin typeface="Segoe UI"/>
+              </a:rPr>
+              <a:t>stesso</a:t>
+            </a:r>
+            <a:r>
+              <a:rPr sz="1100" b="0" dirty="0">
+                <a:solidFill>
+                  <a:srgbClr val="8B949E"/>
+                </a:solidFill>
+                <a:latin typeface="Segoe UI"/>
+              </a:rPr>
+              <a:t> </a:t>
+            </a:r>
+            <a:r>
+              <a:rPr sz="1100" b="0" dirty="0" err="1">
+                <a:solidFill>
+                  <a:srgbClr val="8B949E"/>
+                </a:solidFill>
+                <a:latin typeface="Segoe UI"/>
+              </a:rPr>
+              <a:t>programma</a:t>
+            </a:r>
+            <a:r>
+              <a:rPr sz="1100" b="0" dirty="0">
+                <a:solidFill>
+                  <a:srgbClr val="8B949E"/>
+                </a:solidFill>
+                <a:latin typeface="Segoe UI"/>
+              </a:rPr>
+              <a:t> </a:t>
+            </a:r>
+            <a:r>
+              <a:rPr sz="1100" b="0" dirty="0" err="1">
+                <a:solidFill>
+                  <a:srgbClr val="8B949E"/>
+                </a:solidFill>
+                <a:latin typeface="Segoe UI"/>
+              </a:rPr>
+              <a:t>compilato</a:t>
+            </a:r>
+            <a:r>
+              <a:rPr sz="1100" b="0" dirty="0">
+                <a:solidFill>
+                  <a:srgbClr val="8B949E"/>
+                </a:solidFill>
+                <a:latin typeface="Segoe UI"/>
+              </a:rPr>
+              <a:t> -- PASS.</a:t>
             </a:r>
           </a:p>
         </p:txBody>

--- a/docs/IPA_eBPF_pipelines.pptx
+++ b/docs/IPA_eBPF_pipelines.pptx
@@ -10942,12 +10942,7 @@
                     <a:lstStyle/>
                     <a:p>
                       <a:r>
-                        <a:rPr dirty="0">
-                          <a:solidFill>
-                            <a:schemeClr val="bg1"/>
-                          </a:solidFill>
-                        </a:rPr>
-                        <a:t>912</a:t>
+                        <a:t>963</a:t>
                       </a:r>
                     </a:p>
                   </a:txBody>
@@ -10963,11 +10958,6 @@
                     <a:lstStyle/>
                     <a:p>
                       <a:r>
-                        <a:rPr>
-                          <a:solidFill>
-                            <a:schemeClr val="bg1"/>
-                          </a:solidFill>
-                        </a:rPr>
                         <a:t>5 951</a:t>
                       </a:r>
                     </a:p>
@@ -10984,11 +10974,6 @@
                     <a:lstStyle/>
                     <a:p>
                       <a:r>
-                        <a:rPr>
-                          <a:solidFill>
-                            <a:schemeClr val="bg1"/>
-                          </a:solidFill>
-                        </a:rPr>
                         <a:t>5 931</a:t>
                       </a:r>
                     </a:p>
@@ -11035,12 +11020,7 @@
                     <a:lstStyle/>
                     <a:p>
                       <a:r>
-                        <a:rPr dirty="0">
-                          <a:solidFill>
-                            <a:schemeClr val="bg1"/>
-                          </a:solidFill>
-                        </a:rPr>
-                        <a:t>4 436</a:t>
+                        <a:t>4 591</a:t>
                       </a:r>
                     </a:p>
                   </a:txBody>
@@ -11056,11 +11036,6 @@
                     <a:lstStyle/>
                     <a:p>
                       <a:r>
-                        <a:rPr>
-                          <a:solidFill>
-                            <a:schemeClr val="bg1"/>
-                          </a:solidFill>
-                        </a:rPr>
                         <a:t>27 097</a:t>
                       </a:r>
                     </a:p>
@@ -11077,11 +11052,6 @@
                     <a:lstStyle/>
                     <a:p>
                       <a:r>
-                        <a:rPr>
-                          <a:solidFill>
-                            <a:schemeClr val="bg1"/>
-                          </a:solidFill>
-                        </a:rPr>
                         <a:t>26 823</a:t>
                       </a:r>
                     </a:p>
@@ -11235,12 +11205,7 @@
                     <a:lstStyle/>
                     <a:p>
                       <a:r>
-                        <a:rPr dirty="0">
-                          <a:solidFill>
-                            <a:schemeClr val="bg1"/>
-                          </a:solidFill>
-                        </a:rPr>
-                        <a:t>8.0</a:t>
+                        <a:t>9.0</a:t>
                       </a:r>
                     </a:p>
                   </a:txBody>
@@ -11256,11 +11221,6 @@
                     <a:lstStyle/>
                     <a:p>
                       <a:r>
-                        <a:rPr dirty="0">
-                          <a:solidFill>
-                            <a:schemeClr val="bg1"/>
-                          </a:solidFill>
-                        </a:rPr>
                         <a:t>150.0</a:t>
                       </a:r>
                     </a:p>
@@ -11277,11 +11237,6 @@
                     <a:lstStyle/>
                     <a:p>
                       <a:r>
-                        <a:rPr>
-                          <a:solidFill>
-                            <a:schemeClr val="bg1"/>
-                          </a:solidFill>
-                        </a:rPr>
                         <a:t>163.0</a:t>
                       </a:r>
                     </a:p>
@@ -11328,12 +11283,7 @@
                     <a:lstStyle/>
                     <a:p>
                       <a:r>
-                        <a:rPr>
-                          <a:solidFill>
-                            <a:schemeClr val="bg1"/>
-                          </a:solidFill>
-                        </a:rPr>
-                        <a:t>168</a:t>
+                        <a:t>328</a:t>
                       </a:r>
                     </a:p>
                   </a:txBody>
@@ -11349,11 +11299,6 @@
                     <a:lstStyle/>
                     <a:p>
                       <a:r>
-                        <a:rPr dirty="0">
-                          <a:solidFill>
-                            <a:schemeClr val="bg1"/>
-                          </a:solidFill>
-                        </a:rPr>
                         <a:t>8 072</a:t>
                       </a:r>
                     </a:p>
@@ -11370,11 +11315,6 @@
                     <a:lstStyle/>
                     <a:p>
                       <a:r>
-                        <a:rPr>
-                          <a:solidFill>
-                            <a:schemeClr val="bg1"/>
-                          </a:solidFill>
-                        </a:rPr>
                         <a:t>16 904</a:t>
                       </a:r>
                     </a:p>
@@ -11421,12 +11361,7 @@
                     <a:lstStyle/>
                     <a:p>
                       <a:r>
-                        <a:rPr>
-                          <a:solidFill>
-                            <a:schemeClr val="bg1"/>
-                          </a:solidFill>
-                        </a:rPr>
-                        <a:t>45.0</a:t>
+                        <a:t>85.0</a:t>
                       </a:r>
                     </a:p>
                   </a:txBody>
@@ -11442,11 +11377,6 @@
                     <a:lstStyle/>
                     <a:p>
                       <a:r>
-                        <a:rPr dirty="0">
-                          <a:solidFill>
-                            <a:schemeClr val="bg1"/>
-                          </a:solidFill>
-                        </a:rPr>
                         <a:t>476.0</a:t>
                       </a:r>
                     </a:p>
@@ -11463,11 +11393,6 @@
                     <a:lstStyle/>
                     <a:p>
                       <a:r>
-                        <a:rPr>
-                          <a:solidFill>
-                            <a:schemeClr val="bg1"/>
-                          </a:solidFill>
-                        </a:rPr>
                         <a:t>772.0</a:t>
                       </a:r>
                     </a:p>
@@ -11514,12 +11439,7 @@
                     <a:lstStyle/>
                     <a:p>
                       <a:r>
-                        <a:rPr>
-                          <a:solidFill>
-                            <a:schemeClr val="bg1"/>
-                          </a:solidFill>
-                        </a:rPr>
-                        <a:t>22.222</a:t>
+                        <a:t>11.765</a:t>
                       </a:r>
                     </a:p>
                   </a:txBody>
@@ -11535,11 +11455,6 @@
                     <a:lstStyle/>
                     <a:p>
                       <a:r>
-                        <a:rPr>
-                          <a:solidFill>
-                            <a:schemeClr val="bg1"/>
-                          </a:solidFill>
-                        </a:rPr>
                         <a:t>2.101</a:t>
                       </a:r>
                     </a:p>
@@ -11556,11 +11471,6 @@
                     <a:lstStyle/>
                     <a:p>
                       <a:r>
-                        <a:rPr dirty="0">
-                          <a:solidFill>
-                            <a:schemeClr val="bg1"/>
-                          </a:solidFill>
-                        </a:rPr>
                         <a:t>1.295</a:t>
                       </a:r>
                     </a:p>
@@ -11607,12 +11517,7 @@
                     <a:lstStyle/>
                     <a:p>
                       <a:r>
-                        <a:rPr>
-                          <a:solidFill>
-                            <a:schemeClr val="bg1"/>
-                          </a:solidFill>
-                        </a:rPr>
-                        <a:t>42</a:t>
+                        <a:t>57</a:t>
                       </a:r>
                     </a:p>
                   </a:txBody>
@@ -11628,11 +11533,6 @@
                     <a:lstStyle/>
                     <a:p>
                       <a:r>
-                        <a:rPr>
-                          <a:solidFill>
-                            <a:schemeClr val="bg1"/>
-                          </a:solidFill>
-                        </a:rPr>
                         <a:t>81</a:t>
                       </a:r>
                     </a:p>
@@ -11649,11 +11549,6 @@
                     <a:lstStyle/>
                     <a:p>
                       <a:r>
-                        <a:rPr dirty="0">
-                          <a:solidFill>
-                            <a:schemeClr val="bg1"/>
-                          </a:solidFill>
-                        </a:rPr>
                         <a:t>69</a:t>
                       </a:r>
                     </a:p>
@@ -11792,7 +11687,7 @@
                 </a:solidFill>
                 <a:latin typeface="Segoe UI"/>
               </a:rPr>
-              <a:t>P1 piu' veloce: 45 ns, 22.2 Mpps.</a:t>
+              <a:t>P1 piu' veloce: 85 ns, 11.8 Mpps.</a:t>
             </a:r>
           </a:p>
           <a:p>
@@ -11823,7 +11718,7 @@
                 </a:solidFill>
                 <a:latin typeface="Segoe UI"/>
               </a:rPr>
-              <a:t>P1 piu' compatto: 168 B, 912 istr.</a:t>
+              <a:t>P1 piu' compatto: 328 B, 963 istr.</a:t>
             </a:r>
           </a:p>
           <a:p>
@@ -22290,7 +22185,7 @@
                 </a:solidFill>
                 <a:latin typeface="Consolas"/>
               </a:rPr>
-              <a:t>switch(cls)</a:t>
+              <a:t>mac_table[cls]</a:t>
             </a:r>
           </a:p>
           <a:p>
@@ -22312,7 +22207,7 @@
                 </a:solidFill>
                 <a:latin typeface="Segoe UI"/>
               </a:rPr>
-              <a:t>ifindex</a:t>
+              <a:t>ifindex + MAC rewrite</a:t>
             </a:r>
           </a:p>
         </p:txBody>
@@ -22792,7 +22687,7 @@
                 </a:solidFill>
                 <a:latin typeface="Consolas"/>
               </a:rPr>
-              <a:t>168 B mappe</a:t>
+              <a:t>328 B mappe</a:t>
             </a:r>
           </a:p>
         </p:txBody>
@@ -22884,7 +22779,7 @@
                 </a:solidFill>
                 <a:latin typeface="Consolas"/>
               </a:rPr>
-              <a:t>45 ns · 22.2 Mpps</a:t>
+              <a:t>85 ns · 11.8 Mpps</a:t>
             </a:r>
           </a:p>
         </p:txBody>
@@ -24123,6 +24018,298 @@
                 <a:latin typeface="Segoe UI"/>
               </a:rPr>
               <a:t>).</a:t>
+            </a:r>
+          </a:p>
+          <a:p>
+            <a:pPr algn="l">
+              <a:lnSpc>
+                <a:spcPct val="105000"/>
+              </a:lnSpc>
+              <a:spcBef>
+                <a:spcPts val="0"/>
+              </a:spcBef>
+              <a:spcAft>
+                <a:spcPts val="500"/>
+              </a:spcAft>
+            </a:pPr>
+            <a:r>
+              <a:rPr sz="1100" b="0" dirty="0">
+                <a:solidFill>
+                  <a:srgbClr val="3FB950"/>
+                </a:solidFill>
+                <a:latin typeface="Segoe UI"/>
+              </a:rPr>
+              <a:t>•  </a:t>
+            </a:r>
+            <a:r>
+              <a:rPr sz="1100" b="0" dirty="0" err="1">
+                <a:solidFill>
+                  <a:srgbClr val="8B949E"/>
+                </a:solidFill>
+                <a:latin typeface="Segoe UI"/>
+              </a:rPr>
+              <a:t>Azione ora via mac_table[cls] (stesso pattern di P2/P3): riscrive i MAC src/dst reali prima del redirect (era solo switch(cls)-&gt;ifindex, senza MAC rewrite).</a:t>
+            </a:r>
+            <a:r>
+              <a:rPr sz="1100" b="0" dirty="0">
+                <a:solidFill>
+                  <a:srgbClr val="8B949E"/>
+                </a:solidFill>
+                <a:latin typeface="Segoe UI"/>
+              </a:rPr>
+              <a:t/>
+            </a:r>
+            <a:r>
+              <a:rPr sz="1100" b="0" dirty="0" err="1">
+                <a:solidFill>
+                  <a:srgbClr val="8B949E"/>
+                </a:solidFill>
+                <a:latin typeface="Segoe UI"/>
+              </a:rPr>
+              <a:t/>
+            </a:r>
+            <a:r>
+              <a:rPr sz="1100" b="0" dirty="0">
+                <a:solidFill>
+                  <a:srgbClr val="8B949E"/>
+                </a:solidFill>
+                <a:latin typeface="Segoe UI"/>
+              </a:rPr>
+              <a:t/>
+            </a:r>
+            <a:r>
+              <a:rPr sz="1100" b="0" dirty="0" err="1">
+                <a:solidFill>
+                  <a:srgbClr val="8B949E"/>
+                </a:solidFill>
+                <a:latin typeface="Segoe UI"/>
+              </a:rPr>
+              <a:t/>
+            </a:r>
+            <a:r>
+              <a:rPr sz="1100" b="0" dirty="0">
+                <a:solidFill>
+                  <a:srgbClr val="8B949E"/>
+                </a:solidFill>
+                <a:latin typeface="Segoe UI"/>
+              </a:rPr>
+              <a:t/>
+            </a:r>
+            <a:r>
+              <a:rPr sz="1100" b="0" dirty="0" err="1">
+                <a:solidFill>
+                  <a:srgbClr val="8B949E"/>
+                </a:solidFill>
+                <a:latin typeface="Segoe UI"/>
+              </a:rPr>
+              <a:t/>
+            </a:r>
+            <a:r>
+              <a:rPr sz="1100" b="0" dirty="0">
+                <a:solidFill>
+                  <a:srgbClr val="8B949E"/>
+                </a:solidFill>
+                <a:latin typeface="Segoe UI"/>
+              </a:rPr>
+              <a:t/>
+            </a:r>
+            <a:r>
+              <a:rPr sz="1100" b="0" dirty="0" err="1">
+                <a:solidFill>
+                  <a:srgbClr val="8B949E"/>
+                </a:solidFill>
+                <a:latin typeface="Segoe UI"/>
+              </a:rPr>
+              <a:t/>
+            </a:r>
+            <a:r>
+              <a:rPr sz="1100" b="0" dirty="0">
+                <a:solidFill>
+                  <a:srgbClr val="8B949E"/>
+                </a:solidFill>
+                <a:latin typeface="Segoe UI"/>
+              </a:rPr>
+              <a:t/>
+            </a:r>
+            <a:r>
+              <a:rPr sz="1100" b="0" dirty="0" err="1">
+                <a:solidFill>
+                  <a:srgbClr val="8B949E"/>
+                </a:solidFill>
+                <a:latin typeface="Segoe UI"/>
+              </a:rPr>
+              <a:t/>
+            </a:r>
+            <a:r>
+              <a:rPr sz="1100" b="0" dirty="0">
+                <a:solidFill>
+                  <a:srgbClr val="8B949E"/>
+                </a:solidFill>
+                <a:latin typeface="Segoe UI"/>
+              </a:rPr>
+              <a:t/>
+            </a:r>
+            <a:r>
+              <a:rPr sz="1100" b="0" dirty="0" err="1">
+                <a:solidFill>
+                  <a:srgbClr val="8B949E"/>
+                </a:solidFill>
+                <a:latin typeface="Segoe UI"/>
+              </a:rPr>
+              <a:t/>
+            </a:r>
+            <a:r>
+              <a:rPr sz="1100" b="0" dirty="0">
+                <a:solidFill>
+                  <a:srgbClr val="8B949E"/>
+                </a:solidFill>
+                <a:latin typeface="Segoe UI"/>
+              </a:rPr>
+              <a:t/>
+            </a:r>
+            <a:r>
+              <a:rPr sz="1100" b="0" dirty="0" err="1">
+                <a:solidFill>
+                  <a:srgbClr val="8B949E"/>
+                </a:solidFill>
+                <a:latin typeface="Segoe UI"/>
+              </a:rPr>
+              <a:t/>
+            </a:r>
+            <a:r>
+              <a:rPr sz="1100" b="0" dirty="0">
+                <a:solidFill>
+                  <a:srgbClr val="8B949E"/>
+                </a:solidFill>
+                <a:latin typeface="Segoe UI"/>
+              </a:rPr>
+              <a:t/>
+            </a:r>
+            <a:r>
+              <a:rPr sz="1100" b="0" dirty="0" err="1">
+                <a:solidFill>
+                  <a:srgbClr val="8B949E"/>
+                </a:solidFill>
+                <a:latin typeface="Segoe UI"/>
+              </a:rPr>
+              <a:t/>
+            </a:r>
+            <a:r>
+              <a:rPr sz="1100" b="0" dirty="0">
+                <a:solidFill>
+                  <a:srgbClr val="8B949E"/>
+                </a:solidFill>
+                <a:latin typeface="Segoe UI"/>
+              </a:rPr>
+              <a:t/>
+            </a:r>
+            <a:r>
+              <a:rPr sz="1100" b="0" dirty="0" err="1">
+                <a:solidFill>
+                  <a:srgbClr val="8B949E"/>
+                </a:solidFill>
+                <a:latin typeface="Segoe UI"/>
+              </a:rPr>
+              <a:t/>
+            </a:r>
+            <a:r>
+              <a:rPr sz="1100" b="0" dirty="0">
+                <a:solidFill>
+                  <a:srgbClr val="8B949E"/>
+                </a:solidFill>
+                <a:latin typeface="Segoe UI"/>
+              </a:rPr>
+              <a:t/>
+            </a:r>
+            <a:r>
+              <a:rPr sz="1100" b="0" dirty="0" err="1">
+                <a:solidFill>
+                  <a:srgbClr val="8B949E"/>
+                </a:solidFill>
+                <a:latin typeface="Segoe UI"/>
+              </a:rPr>
+              <a:t/>
+            </a:r>
+            <a:r>
+              <a:rPr sz="1100" b="0" dirty="0">
+                <a:solidFill>
+                  <a:srgbClr val="8B949E"/>
+                </a:solidFill>
+                <a:latin typeface="Segoe UI"/>
+              </a:rPr>
+              <a:t/>
+            </a:r>
+            <a:r>
+              <a:rPr sz="1100" b="0" dirty="0" err="1">
+                <a:solidFill>
+                  <a:srgbClr val="8B949E"/>
+                </a:solidFill>
+                <a:latin typeface="Segoe UI"/>
+              </a:rPr>
+              <a:t/>
+            </a:r>
+            <a:r>
+              <a:rPr sz="1100" b="0" dirty="0">
+                <a:solidFill>
+                  <a:srgbClr val="8B949E"/>
+                </a:solidFill>
+                <a:latin typeface="Segoe UI"/>
+              </a:rPr>
+              <a:t/>
+            </a:r>
+            <a:r>
+              <a:rPr sz="1100" b="0" dirty="0" err="1">
+                <a:solidFill>
+                  <a:srgbClr val="8B949E"/>
+                </a:solidFill>
+                <a:latin typeface="Segoe UI"/>
+              </a:rPr>
+              <a:t/>
+            </a:r>
+            <a:r>
+              <a:rPr sz="1100" b="0" dirty="0">
+                <a:solidFill>
+                  <a:srgbClr val="8B949E"/>
+                </a:solidFill>
+                <a:latin typeface="Segoe UI"/>
+              </a:rPr>
+              <a:t/>
+            </a:r>
+            <a:r>
+              <a:rPr sz="1100" b="0" dirty="0" err="1">
+                <a:solidFill>
+                  <a:srgbClr val="8B949E"/>
+                </a:solidFill>
+                <a:latin typeface="Segoe UI"/>
+              </a:rPr>
+              <a:t/>
+            </a:r>
+            <a:r>
+              <a:rPr sz="1100" b="0" dirty="0">
+                <a:solidFill>
+                  <a:srgbClr val="8B949E"/>
+                </a:solidFill>
+                <a:latin typeface="Segoe UI"/>
+              </a:rPr>
+              <a:t/>
+            </a:r>
+            <a:r>
+              <a:rPr sz="1100" b="0" dirty="0" err="1">
+                <a:solidFill>
+                  <a:srgbClr val="8B949E"/>
+                </a:solidFill>
+                <a:latin typeface="Segoe UI"/>
+              </a:rPr>
+              <a:t/>
+            </a:r>
+            <a:r>
+              <a:rPr sz="1100" b="0" dirty="0">
+                <a:solidFill>
+                  <a:srgbClr val="8B949E"/>
+                </a:solidFill>
+                <a:latin typeface="Segoe UI"/>
+              </a:rPr>
+              <a:t/>
             </a:r>
           </a:p>
         </p:txBody>

--- a/docs/IPA_eBPF_pipelines.pptx
+++ b/docs/IPA_eBPF_pipelines.pptx
@@ -10768,7 +10768,7 @@
           <p:nvPr>
             <p:extLst>
               <p:ext uri="{D42A27DB-BD31-4B8C-83A1-F6EECF244321}">
-                <p14:modId xmlns:p14="http://schemas.microsoft.com/office/powerpoint/2010/main" val="2567701619"/>
+                <p14:modId xmlns:p14="http://schemas.microsoft.com/office/powerpoint/2010/main" val="3469319689"/>
               </p:ext>
             </p:extLst>
           </p:nvPr>
@@ -10942,6 +10942,11 @@
                     <a:lstStyle/>
                     <a:p>
                       <a:r>
+                        <a:rPr>
+                          <a:solidFill>
+                            <a:schemeClr val="bg1"/>
+                          </a:solidFill>
+                        </a:rPr>
                         <a:t>963</a:t>
                       </a:r>
                     </a:p>
@@ -10958,6 +10963,11 @@
                     <a:lstStyle/>
                     <a:p>
                       <a:r>
+                        <a:rPr>
+                          <a:solidFill>
+                            <a:schemeClr val="bg1"/>
+                          </a:solidFill>
+                        </a:rPr>
                         <a:t>5 951</a:t>
                       </a:r>
                     </a:p>
@@ -10974,6 +10984,11 @@
                     <a:lstStyle/>
                     <a:p>
                       <a:r>
+                        <a:rPr>
+                          <a:solidFill>
+                            <a:schemeClr val="bg1"/>
+                          </a:solidFill>
+                        </a:rPr>
                         <a:t>5 931</a:t>
                       </a:r>
                     </a:p>
@@ -11020,6 +11035,11 @@
                     <a:lstStyle/>
                     <a:p>
                       <a:r>
+                        <a:rPr>
+                          <a:solidFill>
+                            <a:schemeClr val="bg1"/>
+                          </a:solidFill>
+                        </a:rPr>
                         <a:t>4 591</a:t>
                       </a:r>
                     </a:p>
@@ -11036,6 +11056,11 @@
                     <a:lstStyle/>
                     <a:p>
                       <a:r>
+                        <a:rPr>
+                          <a:solidFill>
+                            <a:schemeClr val="bg1"/>
+                          </a:solidFill>
+                        </a:rPr>
                         <a:t>27 097</a:t>
                       </a:r>
                     </a:p>
@@ -11052,6 +11077,11 @@
                     <a:lstStyle/>
                     <a:p>
                       <a:r>
+                        <a:rPr>
+                          <a:solidFill>
+                            <a:schemeClr val="bg1"/>
+                          </a:solidFill>
+                        </a:rPr>
                         <a:t>26 823</a:t>
                       </a:r>
                     </a:p>
@@ -11205,6 +11235,11 @@
                     <a:lstStyle/>
                     <a:p>
                       <a:r>
+                        <a:rPr>
+                          <a:solidFill>
+                            <a:schemeClr val="bg1"/>
+                          </a:solidFill>
+                        </a:rPr>
                         <a:t>9.0</a:t>
                       </a:r>
                     </a:p>
@@ -11221,6 +11256,11 @@
                     <a:lstStyle/>
                     <a:p>
                       <a:r>
+                        <a:rPr>
+                          <a:solidFill>
+                            <a:schemeClr val="bg1"/>
+                          </a:solidFill>
+                        </a:rPr>
                         <a:t>150.0</a:t>
                       </a:r>
                     </a:p>
@@ -11237,6 +11277,11 @@
                     <a:lstStyle/>
                     <a:p>
                       <a:r>
+                        <a:rPr>
+                          <a:solidFill>
+                            <a:schemeClr val="bg1"/>
+                          </a:solidFill>
+                        </a:rPr>
                         <a:t>163.0</a:t>
                       </a:r>
                     </a:p>
@@ -11283,6 +11328,11 @@
                     <a:lstStyle/>
                     <a:p>
                       <a:r>
+                        <a:rPr>
+                          <a:solidFill>
+                            <a:schemeClr val="bg1"/>
+                          </a:solidFill>
+                        </a:rPr>
                         <a:t>328</a:t>
                       </a:r>
                     </a:p>
@@ -11299,6 +11349,11 @@
                     <a:lstStyle/>
                     <a:p>
                       <a:r>
+                        <a:rPr>
+                          <a:solidFill>
+                            <a:schemeClr val="bg1"/>
+                          </a:solidFill>
+                        </a:rPr>
                         <a:t>8 072</a:t>
                       </a:r>
                     </a:p>
@@ -11315,6 +11370,11 @@
                     <a:lstStyle/>
                     <a:p>
                       <a:r>
+                        <a:rPr>
+                          <a:solidFill>
+                            <a:schemeClr val="bg1"/>
+                          </a:solidFill>
+                        </a:rPr>
                         <a:t>16 904</a:t>
                       </a:r>
                     </a:p>
@@ -11361,6 +11421,11 @@
                     <a:lstStyle/>
                     <a:p>
                       <a:r>
+                        <a:rPr>
+                          <a:solidFill>
+                            <a:schemeClr val="bg1"/>
+                          </a:solidFill>
+                        </a:rPr>
                         <a:t>85.0</a:t>
                       </a:r>
                     </a:p>
@@ -11377,6 +11442,11 @@
                     <a:lstStyle/>
                     <a:p>
                       <a:r>
+                        <a:rPr>
+                          <a:solidFill>
+                            <a:schemeClr val="bg1"/>
+                          </a:solidFill>
+                        </a:rPr>
                         <a:t>476.0</a:t>
                       </a:r>
                     </a:p>
@@ -11393,6 +11463,11 @@
                     <a:lstStyle/>
                     <a:p>
                       <a:r>
+                        <a:rPr>
+                          <a:solidFill>
+                            <a:schemeClr val="bg1"/>
+                          </a:solidFill>
+                        </a:rPr>
                         <a:t>772.0</a:t>
                       </a:r>
                     </a:p>
@@ -11439,6 +11514,11 @@
                     <a:lstStyle/>
                     <a:p>
                       <a:r>
+                        <a:rPr>
+                          <a:solidFill>
+                            <a:schemeClr val="bg1"/>
+                          </a:solidFill>
+                        </a:rPr>
                         <a:t>11.765</a:t>
                       </a:r>
                     </a:p>
@@ -11455,6 +11535,11 @@
                     <a:lstStyle/>
                     <a:p>
                       <a:r>
+                        <a:rPr>
+                          <a:solidFill>
+                            <a:schemeClr val="bg1"/>
+                          </a:solidFill>
+                        </a:rPr>
                         <a:t>2.101</a:t>
                       </a:r>
                     </a:p>
@@ -11471,6 +11556,11 @@
                     <a:lstStyle/>
                     <a:p>
                       <a:r>
+                        <a:rPr>
+                          <a:solidFill>
+                            <a:schemeClr val="bg1"/>
+                          </a:solidFill>
+                        </a:rPr>
                         <a:t>1.295</a:t>
                       </a:r>
                     </a:p>
@@ -11517,6 +11607,11 @@
                     <a:lstStyle/>
                     <a:p>
                       <a:r>
+                        <a:rPr>
+                          <a:solidFill>
+                            <a:schemeClr val="bg1"/>
+                          </a:solidFill>
+                        </a:rPr>
                         <a:t>57</a:t>
                       </a:r>
                     </a:p>
@@ -11533,6 +11628,11 @@
                     <a:lstStyle/>
                     <a:p>
                       <a:r>
+                        <a:rPr>
+                          <a:solidFill>
+                            <a:schemeClr val="bg1"/>
+                          </a:solidFill>
+                        </a:rPr>
                         <a:t>81</a:t>
                       </a:r>
                     </a:p>
@@ -11549,6 +11649,11 @@
                     <a:lstStyle/>
                     <a:p>
                       <a:r>
+                        <a:rPr dirty="0">
+                          <a:solidFill>
+                            <a:schemeClr val="bg1"/>
+                          </a:solidFill>
+                        </a:rPr>
                         <a:t>69</a:t>
                       </a:r>
                     </a:p>
@@ -24050,267 +24155,6 @@
               </a:rPr>
               <a:t>Azione ora via mac_table[cls] (stesso pattern di P2/P3): riscrive i MAC src/dst reali prima del redirect (era solo switch(cls)-&gt;ifindex, senza MAC rewrite).</a:t>
             </a:r>
-            <a:r>
-              <a:rPr sz="1100" b="0" dirty="0">
-                <a:solidFill>
-                  <a:srgbClr val="8B949E"/>
-                </a:solidFill>
-                <a:latin typeface="Segoe UI"/>
-              </a:rPr>
-              <a:t/>
-            </a:r>
-            <a:r>
-              <a:rPr sz="1100" b="0" dirty="0" err="1">
-                <a:solidFill>
-                  <a:srgbClr val="8B949E"/>
-                </a:solidFill>
-                <a:latin typeface="Segoe UI"/>
-              </a:rPr>
-              <a:t/>
-            </a:r>
-            <a:r>
-              <a:rPr sz="1100" b="0" dirty="0">
-                <a:solidFill>
-                  <a:srgbClr val="8B949E"/>
-                </a:solidFill>
-                <a:latin typeface="Segoe UI"/>
-              </a:rPr>
-              <a:t/>
-            </a:r>
-            <a:r>
-              <a:rPr sz="1100" b="0" dirty="0" err="1">
-                <a:solidFill>
-                  <a:srgbClr val="8B949E"/>
-                </a:solidFill>
-                <a:latin typeface="Segoe UI"/>
-              </a:rPr>
-              <a:t/>
-            </a:r>
-            <a:r>
-              <a:rPr sz="1100" b="0" dirty="0">
-                <a:solidFill>
-                  <a:srgbClr val="8B949E"/>
-                </a:solidFill>
-                <a:latin typeface="Segoe UI"/>
-              </a:rPr>
-              <a:t/>
-            </a:r>
-            <a:r>
-              <a:rPr sz="1100" b="0" dirty="0" err="1">
-                <a:solidFill>
-                  <a:srgbClr val="8B949E"/>
-                </a:solidFill>
-                <a:latin typeface="Segoe UI"/>
-              </a:rPr>
-              <a:t/>
-            </a:r>
-            <a:r>
-              <a:rPr sz="1100" b="0" dirty="0">
-                <a:solidFill>
-                  <a:srgbClr val="8B949E"/>
-                </a:solidFill>
-                <a:latin typeface="Segoe UI"/>
-              </a:rPr>
-              <a:t/>
-            </a:r>
-            <a:r>
-              <a:rPr sz="1100" b="0" dirty="0" err="1">
-                <a:solidFill>
-                  <a:srgbClr val="8B949E"/>
-                </a:solidFill>
-                <a:latin typeface="Segoe UI"/>
-              </a:rPr>
-              <a:t/>
-            </a:r>
-            <a:r>
-              <a:rPr sz="1100" b="0" dirty="0">
-                <a:solidFill>
-                  <a:srgbClr val="8B949E"/>
-                </a:solidFill>
-                <a:latin typeface="Segoe UI"/>
-              </a:rPr>
-              <a:t/>
-            </a:r>
-            <a:r>
-              <a:rPr sz="1100" b="0" dirty="0" err="1">
-                <a:solidFill>
-                  <a:srgbClr val="8B949E"/>
-                </a:solidFill>
-                <a:latin typeface="Segoe UI"/>
-              </a:rPr>
-              <a:t/>
-            </a:r>
-            <a:r>
-              <a:rPr sz="1100" b="0" dirty="0">
-                <a:solidFill>
-                  <a:srgbClr val="8B949E"/>
-                </a:solidFill>
-                <a:latin typeface="Segoe UI"/>
-              </a:rPr>
-              <a:t/>
-            </a:r>
-            <a:r>
-              <a:rPr sz="1100" b="0" dirty="0" err="1">
-                <a:solidFill>
-                  <a:srgbClr val="8B949E"/>
-                </a:solidFill>
-                <a:latin typeface="Segoe UI"/>
-              </a:rPr>
-              <a:t/>
-            </a:r>
-            <a:r>
-              <a:rPr sz="1100" b="0" dirty="0">
-                <a:solidFill>
-                  <a:srgbClr val="8B949E"/>
-                </a:solidFill>
-                <a:latin typeface="Segoe UI"/>
-              </a:rPr>
-              <a:t/>
-            </a:r>
-            <a:r>
-              <a:rPr sz="1100" b="0" dirty="0" err="1">
-                <a:solidFill>
-                  <a:srgbClr val="8B949E"/>
-                </a:solidFill>
-                <a:latin typeface="Segoe UI"/>
-              </a:rPr>
-              <a:t/>
-            </a:r>
-            <a:r>
-              <a:rPr sz="1100" b="0" dirty="0">
-                <a:solidFill>
-                  <a:srgbClr val="8B949E"/>
-                </a:solidFill>
-                <a:latin typeface="Segoe UI"/>
-              </a:rPr>
-              <a:t/>
-            </a:r>
-            <a:r>
-              <a:rPr sz="1100" b="0" dirty="0" err="1">
-                <a:solidFill>
-                  <a:srgbClr val="8B949E"/>
-                </a:solidFill>
-                <a:latin typeface="Segoe UI"/>
-              </a:rPr>
-              <a:t/>
-            </a:r>
-            <a:r>
-              <a:rPr sz="1100" b="0" dirty="0">
-                <a:solidFill>
-                  <a:srgbClr val="8B949E"/>
-                </a:solidFill>
-                <a:latin typeface="Segoe UI"/>
-              </a:rPr>
-              <a:t/>
-            </a:r>
-            <a:r>
-              <a:rPr sz="1100" b="0" dirty="0" err="1">
-                <a:solidFill>
-                  <a:srgbClr val="8B949E"/>
-                </a:solidFill>
-                <a:latin typeface="Segoe UI"/>
-              </a:rPr>
-              <a:t/>
-            </a:r>
-            <a:r>
-              <a:rPr sz="1100" b="0" dirty="0">
-                <a:solidFill>
-                  <a:srgbClr val="8B949E"/>
-                </a:solidFill>
-                <a:latin typeface="Segoe UI"/>
-              </a:rPr>
-              <a:t/>
-            </a:r>
-            <a:r>
-              <a:rPr sz="1100" b="0" dirty="0" err="1">
-                <a:solidFill>
-                  <a:srgbClr val="8B949E"/>
-                </a:solidFill>
-                <a:latin typeface="Segoe UI"/>
-              </a:rPr>
-              <a:t/>
-            </a:r>
-            <a:r>
-              <a:rPr sz="1100" b="0" dirty="0">
-                <a:solidFill>
-                  <a:srgbClr val="8B949E"/>
-                </a:solidFill>
-                <a:latin typeface="Segoe UI"/>
-              </a:rPr>
-              <a:t/>
-            </a:r>
-            <a:r>
-              <a:rPr sz="1100" b="0" dirty="0" err="1">
-                <a:solidFill>
-                  <a:srgbClr val="8B949E"/>
-                </a:solidFill>
-                <a:latin typeface="Segoe UI"/>
-              </a:rPr>
-              <a:t/>
-            </a:r>
-            <a:r>
-              <a:rPr sz="1100" b="0" dirty="0">
-                <a:solidFill>
-                  <a:srgbClr val="8B949E"/>
-                </a:solidFill>
-                <a:latin typeface="Segoe UI"/>
-              </a:rPr>
-              <a:t/>
-            </a:r>
-            <a:r>
-              <a:rPr sz="1100" b="0" dirty="0" err="1">
-                <a:solidFill>
-                  <a:srgbClr val="8B949E"/>
-                </a:solidFill>
-                <a:latin typeface="Segoe UI"/>
-              </a:rPr>
-              <a:t/>
-            </a:r>
-            <a:r>
-              <a:rPr sz="1100" b="0" dirty="0">
-                <a:solidFill>
-                  <a:srgbClr val="8B949E"/>
-                </a:solidFill>
-                <a:latin typeface="Segoe UI"/>
-              </a:rPr>
-              <a:t/>
-            </a:r>
-            <a:r>
-              <a:rPr sz="1100" b="0" dirty="0" err="1">
-                <a:solidFill>
-                  <a:srgbClr val="8B949E"/>
-                </a:solidFill>
-                <a:latin typeface="Segoe UI"/>
-              </a:rPr>
-              <a:t/>
-            </a:r>
-            <a:r>
-              <a:rPr sz="1100" b="0" dirty="0">
-                <a:solidFill>
-                  <a:srgbClr val="8B949E"/>
-                </a:solidFill>
-                <a:latin typeface="Segoe UI"/>
-              </a:rPr>
-              <a:t/>
-            </a:r>
-            <a:r>
-              <a:rPr sz="1100" b="0" dirty="0" err="1">
-                <a:solidFill>
-                  <a:srgbClr val="8B949E"/>
-                </a:solidFill>
-                <a:latin typeface="Segoe UI"/>
-              </a:rPr>
-              <a:t/>
-            </a:r>
-            <a:r>
-              <a:rPr sz="1100" b="0" dirty="0">
-                <a:solidFill>
-                  <a:srgbClr val="8B949E"/>
-                </a:solidFill>
-                <a:latin typeface="Segoe UI"/>
-              </a:rPr>
-              <a:t/>
-            </a:r>
           </a:p>
         </p:txBody>
       </p:sp>

--- a/docs/IPA_eBPF_pipelines.pptx
+++ b/docs/IPA_eBPF_pipelines.pptx
@@ -319,7 +319,7 @@
           <a:p>
             <a:fld id="{5BCAD085-E8A6-8845-BD4E-CB4CCA059FC4}" type="datetimeFigureOut">
               <a:rPr lang="en-US" smtClean="0"/>
-              <a:t>7/12/2026</a:t>
+              <a:t>7/13/2026</a:t>
             </a:fld>
             <a:endParaRPr lang="en-US"/>
           </a:p>
@@ -487,7 +487,7 @@
           <a:p>
             <a:fld id="{5BCAD085-E8A6-8845-BD4E-CB4CCA059FC4}" type="datetimeFigureOut">
               <a:rPr lang="en-US" smtClean="0"/>
-              <a:t>7/12/2026</a:t>
+              <a:t>7/13/2026</a:t>
             </a:fld>
             <a:endParaRPr lang="en-US"/>
           </a:p>
@@ -665,7 +665,7 @@
           <a:p>
             <a:fld id="{5BCAD085-E8A6-8845-BD4E-CB4CCA059FC4}" type="datetimeFigureOut">
               <a:rPr lang="en-US" smtClean="0"/>
-              <a:t>7/12/2026</a:t>
+              <a:t>7/13/2026</a:t>
             </a:fld>
             <a:endParaRPr lang="en-US"/>
           </a:p>
@@ -833,7 +833,7 @@
           <a:p>
             <a:fld id="{5BCAD085-E8A6-8845-BD4E-CB4CCA059FC4}" type="datetimeFigureOut">
               <a:rPr lang="en-US" smtClean="0"/>
-              <a:t>7/12/2026</a:t>
+              <a:t>7/13/2026</a:t>
             </a:fld>
             <a:endParaRPr lang="en-US"/>
           </a:p>
@@ -1078,7 +1078,7 @@
           <a:p>
             <a:fld id="{5BCAD085-E8A6-8845-BD4E-CB4CCA059FC4}" type="datetimeFigureOut">
               <a:rPr lang="en-US" smtClean="0"/>
-              <a:t>7/12/2026</a:t>
+              <a:t>7/13/2026</a:t>
             </a:fld>
             <a:endParaRPr lang="en-US"/>
           </a:p>
@@ -1363,7 +1363,7 @@
           <a:p>
             <a:fld id="{5BCAD085-E8A6-8845-BD4E-CB4CCA059FC4}" type="datetimeFigureOut">
               <a:rPr lang="en-US" smtClean="0"/>
-              <a:t>7/12/2026</a:t>
+              <a:t>7/13/2026</a:t>
             </a:fld>
             <a:endParaRPr lang="en-US"/>
           </a:p>
@@ -1782,7 +1782,7 @@
           <a:p>
             <a:fld id="{5BCAD085-E8A6-8845-BD4E-CB4CCA059FC4}" type="datetimeFigureOut">
               <a:rPr lang="en-US" smtClean="0"/>
-              <a:t>7/12/2026</a:t>
+              <a:t>7/13/2026</a:t>
             </a:fld>
             <a:endParaRPr lang="en-US"/>
           </a:p>
@@ -1899,7 +1899,7 @@
           <a:p>
             <a:fld id="{5BCAD085-E8A6-8845-BD4E-CB4CCA059FC4}" type="datetimeFigureOut">
               <a:rPr lang="en-US" smtClean="0"/>
-              <a:t>7/12/2026</a:t>
+              <a:t>7/13/2026</a:t>
             </a:fld>
             <a:endParaRPr lang="en-US"/>
           </a:p>
@@ -1994,7 +1994,7 @@
           <a:p>
             <a:fld id="{5BCAD085-E8A6-8845-BD4E-CB4CCA059FC4}" type="datetimeFigureOut">
               <a:rPr lang="en-US" smtClean="0"/>
-              <a:t>7/12/2026</a:t>
+              <a:t>7/13/2026</a:t>
             </a:fld>
             <a:endParaRPr lang="en-US"/>
           </a:p>
@@ -2269,7 +2269,7 @@
           <a:p>
             <a:fld id="{5BCAD085-E8A6-8845-BD4E-CB4CCA059FC4}" type="datetimeFigureOut">
               <a:rPr lang="en-US" smtClean="0"/>
-              <a:t>7/12/2026</a:t>
+              <a:t>7/13/2026</a:t>
             </a:fld>
             <a:endParaRPr lang="en-US"/>
           </a:p>
@@ -2521,7 +2521,7 @@
           <a:p>
             <a:fld id="{5BCAD085-E8A6-8845-BD4E-CB4CCA059FC4}" type="datetimeFigureOut">
               <a:rPr lang="en-US" smtClean="0"/>
-              <a:t>7/12/2026</a:t>
+              <a:t>7/13/2026</a:t>
             </a:fld>
             <a:endParaRPr lang="en-US"/>
           </a:p>
@@ -2732,7 +2732,7 @@
           <a:p>
             <a:fld id="{5BCAD085-E8A6-8845-BD4E-CB4CCA059FC4}" type="datetimeFigureOut">
               <a:rPr lang="en-US" smtClean="0"/>
-              <a:t>7/12/2026</a:t>
+              <a:t>7/13/2026</a:t>
             </a:fld>
             <a:endParaRPr lang="en-US"/>
           </a:p>
@@ -10195,7 +10195,7 @@
               </a:spcAft>
             </a:pPr>
             <a:r>
-              <a:rPr sz="4000" b="1">
+              <a:rPr sz="4000" b="1" dirty="0">
                 <a:solidFill>
                   <a:srgbClr val="F5A623"/>
                 </a:solidFill>
@@ -10330,16 +10330,214 @@
               </a:spcAft>
             </a:pPr>
             <a:r>
-              <a:rPr sz="1400" b="0">
+              <a:rPr sz="1400" b="0" dirty="0">
                 <a:solidFill>
                   <a:srgbClr val="E6EDF3"/>
                 </a:solidFill>
                 <a:latin typeface="Segoe UI"/>
               </a:rPr>
-              <a:t>Il fabric Kathara non consegna UDP:9999 end-to-end, quindi la correttezza si verifica caricando i programmi XDP reali ed eseguendo </a:t>
-            </a:r>
-            <a:r>
-              <a:rPr sz="1400" b="1">
+              <a:t>Il fabric </a:t>
+            </a:r>
+            <a:r>
+              <a:rPr sz="1400" b="0" dirty="0" err="1">
+                <a:solidFill>
+                  <a:srgbClr val="E6EDF3"/>
+                </a:solidFill>
+                <a:latin typeface="Segoe UI"/>
+              </a:rPr>
+              <a:t>Kathara</a:t>
+            </a:r>
+            <a:r>
+              <a:rPr sz="1400" b="0" dirty="0">
+                <a:solidFill>
+                  <a:srgbClr val="E6EDF3"/>
+                </a:solidFill>
+                <a:latin typeface="Segoe UI"/>
+              </a:rPr>
+              <a:t> non </a:t>
+            </a:r>
+            <a:r>
+              <a:rPr sz="1400" b="0" dirty="0" err="1">
+                <a:solidFill>
+                  <a:srgbClr val="E6EDF3"/>
+                </a:solidFill>
+                <a:latin typeface="Segoe UI"/>
+              </a:rPr>
+              <a:t>consegna</a:t>
+            </a:r>
+            <a:r>
+              <a:rPr sz="1400" b="0" dirty="0">
+                <a:solidFill>
+                  <a:srgbClr val="E6EDF3"/>
+                </a:solidFill>
+                <a:latin typeface="Segoe UI"/>
+              </a:rPr>
+              <a:t> UDP:9999 end-to-end, </a:t>
+            </a:r>
+            <a:r>
+              <a:rPr sz="1400" b="0" dirty="0" err="1">
+                <a:solidFill>
+                  <a:srgbClr val="E6EDF3"/>
+                </a:solidFill>
+                <a:latin typeface="Segoe UI"/>
+              </a:rPr>
+              <a:t>quindi</a:t>
+            </a:r>
+            <a:r>
+              <a:rPr sz="1400" b="0" dirty="0">
+                <a:solidFill>
+                  <a:srgbClr val="E6EDF3"/>
+                </a:solidFill>
+                <a:latin typeface="Segoe UI"/>
+              </a:rPr>
+              <a:t> la </a:t>
+            </a:r>
+            <a:r>
+              <a:rPr sz="1400" b="0" dirty="0" err="1">
+                <a:solidFill>
+                  <a:srgbClr val="E6EDF3"/>
+                </a:solidFill>
+                <a:latin typeface="Segoe UI"/>
+              </a:rPr>
+              <a:t>correttezza</a:t>
+            </a:r>
+            <a:r>
+              <a:rPr sz="1400" b="0" dirty="0">
+                <a:solidFill>
+                  <a:srgbClr val="E6EDF3"/>
+                </a:solidFill>
+                <a:latin typeface="Segoe UI"/>
+              </a:rPr>
+              <a:t> </a:t>
+            </a:r>
+            <a:r>
+              <a:rPr sz="1400" b="0" dirty="0" err="1">
+                <a:solidFill>
+                  <a:srgbClr val="E6EDF3"/>
+                </a:solidFill>
+                <a:latin typeface="Segoe UI"/>
+              </a:rPr>
+              <a:t>si</a:t>
+            </a:r>
+            <a:r>
+              <a:rPr sz="1400" b="0" dirty="0">
+                <a:solidFill>
+                  <a:srgbClr val="E6EDF3"/>
+                </a:solidFill>
+                <a:latin typeface="Segoe UI"/>
+              </a:rPr>
+              <a:t> </a:t>
+            </a:r>
+            <a:r>
+              <a:rPr sz="1400" b="0" dirty="0" err="1">
+                <a:solidFill>
+                  <a:srgbClr val="E6EDF3"/>
+                </a:solidFill>
+                <a:latin typeface="Segoe UI"/>
+              </a:rPr>
+              <a:t>verifica</a:t>
+            </a:r>
+            <a:r>
+              <a:rPr sz="1400" b="0" dirty="0">
+                <a:solidFill>
+                  <a:srgbClr val="E6EDF3"/>
+                </a:solidFill>
+                <a:latin typeface="Segoe UI"/>
+              </a:rPr>
+              <a:t> </a:t>
+            </a:r>
+            <a:r>
+              <a:rPr sz="1400" b="0" dirty="0" err="1">
+                <a:solidFill>
+                  <a:srgbClr val="E6EDF3"/>
+                </a:solidFill>
+                <a:latin typeface="Segoe UI"/>
+              </a:rPr>
+              <a:t>caricando</a:t>
+            </a:r>
+            <a:r>
+              <a:rPr sz="1400" b="0" dirty="0">
+                <a:solidFill>
+                  <a:srgbClr val="E6EDF3"/>
+                </a:solidFill>
+                <a:latin typeface="Segoe UI"/>
+              </a:rPr>
+              <a:t> </a:t>
+            </a:r>
+            <a:r>
+              <a:rPr sz="1400" b="0" dirty="0" err="1">
+                <a:solidFill>
+                  <a:srgbClr val="E6EDF3"/>
+                </a:solidFill>
+                <a:latin typeface="Segoe UI"/>
+              </a:rPr>
+              <a:t>i</a:t>
+            </a:r>
+            <a:r>
+              <a:rPr sz="1400" b="0" dirty="0">
+                <a:solidFill>
+                  <a:srgbClr val="E6EDF3"/>
+                </a:solidFill>
+                <a:latin typeface="Segoe UI"/>
+              </a:rPr>
+              <a:t> </a:t>
+            </a:r>
+            <a:r>
+              <a:rPr sz="1400" b="0" dirty="0" err="1">
+                <a:solidFill>
+                  <a:srgbClr val="E6EDF3"/>
+                </a:solidFill>
+                <a:latin typeface="Segoe UI"/>
+              </a:rPr>
+              <a:t>programmi</a:t>
+            </a:r>
+            <a:r>
+              <a:rPr sz="1400" b="0" dirty="0">
+                <a:solidFill>
+                  <a:srgbClr val="E6EDF3"/>
+                </a:solidFill>
+                <a:latin typeface="Segoe UI"/>
+              </a:rPr>
+              <a:t> XDP </a:t>
+            </a:r>
+            <a:r>
+              <a:rPr sz="1400" b="0" dirty="0" err="1">
+                <a:solidFill>
+                  <a:srgbClr val="E6EDF3"/>
+                </a:solidFill>
+                <a:latin typeface="Segoe UI"/>
+              </a:rPr>
+              <a:t>reali</a:t>
+            </a:r>
+            <a:r>
+              <a:rPr sz="1400" b="0" dirty="0">
+                <a:solidFill>
+                  <a:srgbClr val="E6EDF3"/>
+                </a:solidFill>
+                <a:latin typeface="Segoe UI"/>
+              </a:rPr>
+              <a:t> ed </a:t>
+            </a:r>
+            <a:r>
+              <a:rPr sz="1400" b="0" dirty="0" err="1">
+                <a:solidFill>
+                  <a:srgbClr val="E6EDF3"/>
+                </a:solidFill>
+                <a:latin typeface="Segoe UI"/>
+              </a:rPr>
+              <a:t>eseguendo</a:t>
+            </a:r>
+            <a:r>
+              <a:rPr sz="1400" b="0" dirty="0">
+                <a:solidFill>
+                  <a:srgbClr val="E6EDF3"/>
+                </a:solidFill>
+                <a:latin typeface="Segoe UI"/>
+              </a:rPr>
+              <a:t> </a:t>
+            </a:r>
+            <a:r>
+              <a:rPr sz="1400" b="1" dirty="0">
                 <a:solidFill>
                   <a:srgbClr val="F5A623"/>
                 </a:solidFill>
@@ -10348,7 +10546,7 @@
               <a:t>BPF_PROG_TEST_RUN</a:t>
             </a:r>
             <a:r>
-              <a:rPr sz="1400" b="0">
+              <a:rPr sz="1400" b="0" dirty="0">
                 <a:solidFill>
                   <a:srgbClr val="E6EDF3"/>
                 </a:solidFill>
@@ -10369,7 +10567,7 @@
                 <a:spcPts val="200"/>
               </a:spcAft>
             </a:pPr>
-            <a:endParaRPr sz="1400" b="0">
+            <a:endParaRPr sz="1400" b="0" dirty="0">
               <a:solidFill>
                 <a:srgbClr val="E6EDF3"/>
               </a:solidFill>
@@ -10389,31 +10587,247 @@
               </a:spcAft>
             </a:pPr>
             <a:r>
-              <a:rPr sz="1400" b="0">
-                <a:solidFill>
-                  <a:srgbClr val="8B949E"/>
-                </a:solidFill>
-                <a:latin typeface="Segoe UI"/>
-              </a:rPr>
-              <a:t>Verifica </a:t>
-            </a:r>
-            <a:r>
-              <a:rPr sz="1400" b="1">
+              <a:rPr sz="1400" b="0" dirty="0" err="1">
+                <a:solidFill>
+                  <a:srgbClr val="8B949E"/>
+                </a:solidFill>
+                <a:latin typeface="Segoe UI"/>
+              </a:rPr>
+              <a:t>Verifica</a:t>
+            </a:r>
+            <a:r>
+              <a:rPr sz="1400" b="0" dirty="0">
+                <a:solidFill>
+                  <a:srgbClr val="8B949E"/>
+                </a:solidFill>
+                <a:latin typeface="Segoe UI"/>
+              </a:rPr>
+              <a:t> </a:t>
+            </a:r>
+            <a:r>
+              <a:rPr sz="1400" b="1" dirty="0">
                 <a:solidFill>
                   <a:srgbClr val="3FD0C8"/>
                 </a:solidFill>
                 <a:latin typeface="Segoe UI"/>
               </a:rPr>
-              <a:t>single-pass e uniforme</a:t>
-            </a:r>
-            <a:r>
-              <a:rPr sz="1400" b="0">
-                <a:solidFill>
-                  <a:srgbClr val="8B949E"/>
-                </a:solidFill>
-                <a:latin typeface="Segoe UI"/>
-              </a:rPr>
-              <a:t> sulle 3 pipeline: pre-installa mac_table[0..5], esegue una volta e controlla che la classe scelta dal kernel = classe del riferimento Python. </a:t>
+              <a:t>single-pass e </a:t>
+            </a:r>
+            <a:r>
+              <a:rPr sz="1400" b="1" dirty="0" err="1">
+                <a:solidFill>
+                  <a:srgbClr val="3FD0C8"/>
+                </a:solidFill>
+                <a:latin typeface="Segoe UI"/>
+              </a:rPr>
+              <a:t>uniforme</a:t>
+            </a:r>
+            <a:r>
+              <a:rPr sz="1400" b="0" dirty="0">
+                <a:solidFill>
+                  <a:srgbClr val="8B949E"/>
+                </a:solidFill>
+                <a:latin typeface="Segoe UI"/>
+              </a:rPr>
+              <a:t> </a:t>
+            </a:r>
+            <a:r>
+              <a:rPr sz="1400" b="0" dirty="0" err="1">
+                <a:solidFill>
+                  <a:srgbClr val="8B949E"/>
+                </a:solidFill>
+                <a:latin typeface="Segoe UI"/>
+              </a:rPr>
+              <a:t>sulle</a:t>
+            </a:r>
+            <a:r>
+              <a:rPr sz="1400" b="0" dirty="0">
+                <a:solidFill>
+                  <a:srgbClr val="8B949E"/>
+                </a:solidFill>
+                <a:latin typeface="Segoe UI"/>
+              </a:rPr>
+              <a:t> 3 pipeline: pre-</a:t>
+            </a:r>
+            <a:r>
+              <a:rPr sz="1400" b="0" dirty="0" err="1">
+                <a:solidFill>
+                  <a:srgbClr val="8B949E"/>
+                </a:solidFill>
+                <a:latin typeface="Segoe UI"/>
+              </a:rPr>
+              <a:t>installa</a:t>
+            </a:r>
+            <a:r>
+              <a:rPr sz="1400" b="0" dirty="0">
+                <a:solidFill>
+                  <a:srgbClr val="8B949E"/>
+                </a:solidFill>
+                <a:latin typeface="Segoe UI"/>
+              </a:rPr>
+              <a:t> </a:t>
+            </a:r>
+            <a:r>
+              <a:rPr sz="1400" b="0" dirty="0" err="1">
+                <a:solidFill>
+                  <a:srgbClr val="8B949E"/>
+                </a:solidFill>
+                <a:latin typeface="Segoe UI"/>
+              </a:rPr>
+              <a:t>mac_table</a:t>
+            </a:r>
+            <a:r>
+              <a:rPr sz="1400" b="0" dirty="0">
+                <a:solidFill>
+                  <a:srgbClr val="8B949E"/>
+                </a:solidFill>
+                <a:latin typeface="Segoe UI"/>
+              </a:rPr>
+              <a:t>[0..5], </a:t>
+            </a:r>
+            <a:r>
+              <a:rPr sz="1400" b="0" dirty="0" err="1">
+                <a:solidFill>
+                  <a:srgbClr val="8B949E"/>
+                </a:solidFill>
+                <a:latin typeface="Segoe UI"/>
+              </a:rPr>
+              <a:t>esegue</a:t>
+            </a:r>
+            <a:r>
+              <a:rPr sz="1400" b="0" dirty="0">
+                <a:solidFill>
+                  <a:srgbClr val="8B949E"/>
+                </a:solidFill>
+                <a:latin typeface="Segoe UI"/>
+              </a:rPr>
+              <a:t> </a:t>
+            </a:r>
+            <a:r>
+              <a:rPr sz="1400" b="0" dirty="0" err="1">
+                <a:solidFill>
+                  <a:srgbClr val="8B949E"/>
+                </a:solidFill>
+                <a:latin typeface="Segoe UI"/>
+              </a:rPr>
+              <a:t>una</a:t>
+            </a:r>
+            <a:r>
+              <a:rPr sz="1400" b="0" dirty="0">
+                <a:solidFill>
+                  <a:srgbClr val="8B949E"/>
+                </a:solidFill>
+                <a:latin typeface="Segoe UI"/>
+              </a:rPr>
+              <a:t> volta e </a:t>
+            </a:r>
+            <a:r>
+              <a:rPr sz="1400" b="0" dirty="0" err="1">
+                <a:solidFill>
+                  <a:srgbClr val="8B949E"/>
+                </a:solidFill>
+                <a:latin typeface="Segoe UI"/>
+              </a:rPr>
+              <a:t>controlla</a:t>
+            </a:r>
+            <a:r>
+              <a:rPr sz="1400" b="0" dirty="0">
+                <a:solidFill>
+                  <a:srgbClr val="8B949E"/>
+                </a:solidFill>
+                <a:latin typeface="Segoe UI"/>
+              </a:rPr>
+              <a:t> </a:t>
+            </a:r>
+            <a:r>
+              <a:rPr sz="1400" b="0" dirty="0" err="1">
+                <a:solidFill>
+                  <a:srgbClr val="8B949E"/>
+                </a:solidFill>
+                <a:latin typeface="Segoe UI"/>
+              </a:rPr>
+              <a:t>che</a:t>
+            </a:r>
+            <a:r>
+              <a:rPr sz="1400" b="0" dirty="0">
+                <a:solidFill>
+                  <a:srgbClr val="8B949E"/>
+                </a:solidFill>
+                <a:latin typeface="Segoe UI"/>
+              </a:rPr>
+              <a:t> la </a:t>
+            </a:r>
+            <a:r>
+              <a:rPr sz="1400" b="0" dirty="0" err="1">
+                <a:solidFill>
+                  <a:srgbClr val="8B949E"/>
+                </a:solidFill>
+                <a:latin typeface="Segoe UI"/>
+              </a:rPr>
+              <a:t>classe</a:t>
+            </a:r>
+            <a:r>
+              <a:rPr sz="1400" b="0" dirty="0">
+                <a:solidFill>
+                  <a:srgbClr val="8B949E"/>
+                </a:solidFill>
+                <a:latin typeface="Segoe UI"/>
+              </a:rPr>
+              <a:t> </a:t>
+            </a:r>
+            <a:r>
+              <a:rPr sz="1400" b="0" dirty="0" err="1">
+                <a:solidFill>
+                  <a:srgbClr val="8B949E"/>
+                </a:solidFill>
+                <a:latin typeface="Segoe UI"/>
+              </a:rPr>
+              <a:t>scelta</a:t>
+            </a:r>
+            <a:r>
+              <a:rPr sz="1400" b="0" dirty="0">
+                <a:solidFill>
+                  <a:srgbClr val="8B949E"/>
+                </a:solidFill>
+                <a:latin typeface="Segoe UI"/>
+              </a:rPr>
+              <a:t> dal kernel = </a:t>
+            </a:r>
+            <a:r>
+              <a:rPr sz="1400" b="0" dirty="0" err="1">
+                <a:solidFill>
+                  <a:srgbClr val="8B949E"/>
+                </a:solidFill>
+                <a:latin typeface="Segoe UI"/>
+              </a:rPr>
+              <a:t>classe</a:t>
+            </a:r>
+            <a:r>
+              <a:rPr sz="1400" b="0" dirty="0">
+                <a:solidFill>
+                  <a:srgbClr val="8B949E"/>
+                </a:solidFill>
+                <a:latin typeface="Segoe UI"/>
+              </a:rPr>
+              <a:t> del </a:t>
+            </a:r>
+            <a:r>
+              <a:rPr sz="1400" b="0" dirty="0" err="1">
+                <a:solidFill>
+                  <a:srgbClr val="8B949E"/>
+                </a:solidFill>
+                <a:latin typeface="Segoe UI"/>
+              </a:rPr>
+              <a:t>riferimento</a:t>
+            </a:r>
+            <a:r>
+              <a:rPr sz="1400" b="0" dirty="0">
+                <a:solidFill>
+                  <a:srgbClr val="8B949E"/>
+                </a:solidFill>
+                <a:latin typeface="Segoe UI"/>
+              </a:rPr>
+              <a:t> Python. </a:t>
             </a:r>
           </a:p>
           <a:p>
@@ -10429,13 +10843,247 @@
               </a:spcAft>
             </a:pPr>
             <a:r>
-              <a:rPr sz="1400" b="0">
-                <a:solidFill>
-                  <a:srgbClr val="8B949E"/>
-                </a:solidFill>
-                <a:latin typeface="Segoe UI"/>
-              </a:rPr>
-              <a:t>Nessun ctx custom: sotto TEST_RUN il riferimento Python assume ingress_ifindex=0 per P1 (la sua ifindex_table non mappa il valore reale) e =1 per P2/P3 (clamp diretto sul valore osservato realmente dal kernel in sandbox). </a:t>
+              <a:rPr sz="1400" b="0" dirty="0">
+                <a:solidFill>
+                  <a:srgbClr val="8B949E"/>
+                </a:solidFill>
+                <a:latin typeface="Segoe UI"/>
+              </a:rPr>
+              <a:t>Nessun </a:t>
+            </a:r>
+            <a:r>
+              <a:rPr sz="1400" b="0" dirty="0" err="1">
+                <a:solidFill>
+                  <a:srgbClr val="8B949E"/>
+                </a:solidFill>
+                <a:latin typeface="Segoe UI"/>
+              </a:rPr>
+              <a:t>ctx</a:t>
+            </a:r>
+            <a:r>
+              <a:rPr sz="1400" b="0" dirty="0">
+                <a:solidFill>
+                  <a:srgbClr val="8B949E"/>
+                </a:solidFill>
+                <a:latin typeface="Segoe UI"/>
+              </a:rPr>
+              <a:t> custom: sotto TEST_RUN il </a:t>
+            </a:r>
+            <a:r>
+              <a:rPr sz="1400" b="0" dirty="0" err="1">
+                <a:solidFill>
+                  <a:srgbClr val="8B949E"/>
+                </a:solidFill>
+                <a:latin typeface="Segoe UI"/>
+              </a:rPr>
+              <a:t>riferimento</a:t>
+            </a:r>
+            <a:r>
+              <a:rPr sz="1400" b="0" dirty="0">
+                <a:solidFill>
+                  <a:srgbClr val="8B949E"/>
+                </a:solidFill>
+                <a:latin typeface="Segoe UI"/>
+              </a:rPr>
+              <a:t> Python assume </a:t>
+            </a:r>
+            <a:r>
+              <a:rPr sz="1400" b="0" dirty="0" err="1">
+                <a:solidFill>
+                  <a:srgbClr val="8B949E"/>
+                </a:solidFill>
+                <a:latin typeface="Segoe UI"/>
+              </a:rPr>
+              <a:t>ingress_ifindex</a:t>
+            </a:r>
+            <a:r>
+              <a:rPr sz="1400" b="0" dirty="0">
+                <a:solidFill>
+                  <a:srgbClr val="8B949E"/>
+                </a:solidFill>
+                <a:latin typeface="Segoe UI"/>
+              </a:rPr>
+              <a:t>=0 per P1 (la </a:t>
+            </a:r>
+            <a:r>
+              <a:rPr sz="1400" b="0" dirty="0" err="1">
+                <a:solidFill>
+                  <a:srgbClr val="8B949E"/>
+                </a:solidFill>
+                <a:latin typeface="Segoe UI"/>
+              </a:rPr>
+              <a:t>sua</a:t>
+            </a:r>
+            <a:r>
+              <a:rPr sz="1400" b="0" dirty="0">
+                <a:solidFill>
+                  <a:srgbClr val="8B949E"/>
+                </a:solidFill>
+                <a:latin typeface="Segoe UI"/>
+              </a:rPr>
+              <a:t> </a:t>
+            </a:r>
+            <a:r>
+              <a:rPr sz="1400" b="0" dirty="0" err="1">
+                <a:solidFill>
+                  <a:srgbClr val="8B949E"/>
+                </a:solidFill>
+                <a:latin typeface="Segoe UI"/>
+              </a:rPr>
+              <a:t>ifindex_table</a:t>
+            </a:r>
+            <a:r>
+              <a:rPr sz="1400" b="0" dirty="0">
+                <a:solidFill>
+                  <a:srgbClr val="8B949E"/>
+                </a:solidFill>
+                <a:latin typeface="Segoe UI"/>
+              </a:rPr>
+              <a:t> non </a:t>
+            </a:r>
+            <a:r>
+              <a:rPr sz="1400" b="0" dirty="0" err="1">
+                <a:solidFill>
+                  <a:srgbClr val="8B949E"/>
+                </a:solidFill>
+                <a:latin typeface="Segoe UI"/>
+              </a:rPr>
+              <a:t>mappa</a:t>
+            </a:r>
+            <a:r>
+              <a:rPr sz="1400" b="0" dirty="0">
+                <a:solidFill>
+                  <a:srgbClr val="8B949E"/>
+                </a:solidFill>
+                <a:latin typeface="Segoe UI"/>
+              </a:rPr>
+              <a:t> il </a:t>
+            </a:r>
+            <a:r>
+              <a:rPr sz="1400" b="0" dirty="0" err="1">
+                <a:solidFill>
+                  <a:srgbClr val="8B949E"/>
+                </a:solidFill>
+                <a:latin typeface="Segoe UI"/>
+              </a:rPr>
+              <a:t>valore</a:t>
+            </a:r>
+            <a:r>
+              <a:rPr sz="1400" b="0" dirty="0">
+                <a:solidFill>
+                  <a:srgbClr val="8B949E"/>
+                </a:solidFill>
+                <a:latin typeface="Segoe UI"/>
+              </a:rPr>
+              <a:t> </a:t>
+            </a:r>
+            <a:r>
+              <a:rPr sz="1400" b="0" dirty="0" err="1">
+                <a:solidFill>
+                  <a:srgbClr val="8B949E"/>
+                </a:solidFill>
+                <a:latin typeface="Segoe UI"/>
+              </a:rPr>
+              <a:t>reale</a:t>
+            </a:r>
+            <a:r>
+              <a:rPr sz="1400" b="0" dirty="0">
+                <a:solidFill>
+                  <a:srgbClr val="8B949E"/>
+                </a:solidFill>
+                <a:latin typeface="Segoe UI"/>
+              </a:rPr>
+              <a:t>) e =1 per P2/P3 (clamp </a:t>
+            </a:r>
+            <a:r>
+              <a:rPr sz="1400" b="0" dirty="0" err="1">
+                <a:solidFill>
+                  <a:srgbClr val="8B949E"/>
+                </a:solidFill>
+                <a:latin typeface="Segoe UI"/>
+              </a:rPr>
+              <a:t>diretto</a:t>
+            </a:r>
+            <a:r>
+              <a:rPr sz="1400" b="0" dirty="0">
+                <a:solidFill>
+                  <a:srgbClr val="8B949E"/>
+                </a:solidFill>
+                <a:latin typeface="Segoe UI"/>
+              </a:rPr>
+              <a:t> </a:t>
+            </a:r>
+            <a:r>
+              <a:rPr sz="1400" b="0" dirty="0" err="1">
+                <a:solidFill>
+                  <a:srgbClr val="8B949E"/>
+                </a:solidFill>
+                <a:latin typeface="Segoe UI"/>
+              </a:rPr>
+              <a:t>sul</a:t>
+            </a:r>
+            <a:r>
+              <a:rPr sz="1400" b="0" dirty="0">
+                <a:solidFill>
+                  <a:srgbClr val="8B949E"/>
+                </a:solidFill>
+                <a:latin typeface="Segoe UI"/>
+              </a:rPr>
+              <a:t> </a:t>
+            </a:r>
+            <a:r>
+              <a:rPr sz="1400" b="0" dirty="0" err="1">
+                <a:solidFill>
+                  <a:srgbClr val="8B949E"/>
+                </a:solidFill>
+                <a:latin typeface="Segoe UI"/>
+              </a:rPr>
+              <a:t>valore</a:t>
+            </a:r>
+            <a:r>
+              <a:rPr sz="1400" b="0" dirty="0">
+                <a:solidFill>
+                  <a:srgbClr val="8B949E"/>
+                </a:solidFill>
+                <a:latin typeface="Segoe UI"/>
+              </a:rPr>
+              <a:t> </a:t>
+            </a:r>
+            <a:r>
+              <a:rPr sz="1400" b="0" dirty="0" err="1">
+                <a:solidFill>
+                  <a:srgbClr val="8B949E"/>
+                </a:solidFill>
+                <a:latin typeface="Segoe UI"/>
+              </a:rPr>
+              <a:t>osservato</a:t>
+            </a:r>
+            <a:r>
+              <a:rPr sz="1400" b="0" dirty="0">
+                <a:solidFill>
+                  <a:srgbClr val="8B949E"/>
+                </a:solidFill>
+                <a:latin typeface="Segoe UI"/>
+              </a:rPr>
+              <a:t> </a:t>
+            </a:r>
+            <a:r>
+              <a:rPr sz="1400" b="0" dirty="0" err="1">
+                <a:solidFill>
+                  <a:srgbClr val="8B949E"/>
+                </a:solidFill>
+                <a:latin typeface="Segoe UI"/>
+              </a:rPr>
+              <a:t>realmente</a:t>
+            </a:r>
+            <a:r>
+              <a:rPr sz="1400" b="0" dirty="0">
+                <a:solidFill>
+                  <a:srgbClr val="8B949E"/>
+                </a:solidFill>
+                <a:latin typeface="Segoe UI"/>
+              </a:rPr>
+              <a:t> dal kernel in sandbox). </a:t>
             </a:r>
           </a:p>
           <a:p>
@@ -10451,13 +11099,76 @@
               </a:spcAft>
             </a:pPr>
             <a:r>
-              <a:rPr sz="1400" b="0">
-                <a:solidFill>
-                  <a:srgbClr val="8B949E"/>
-                </a:solidFill>
-                <a:latin typeface="Segoe UI"/>
-              </a:rPr>
-              <a:t>Criterio di PASS: retval ∈ {0,4} (redirect) e cls_stats[ref_cls] &gt; 0.</a:t>
+              <a:rPr sz="1400" b="0" dirty="0" err="1">
+                <a:solidFill>
+                  <a:srgbClr val="8B949E"/>
+                </a:solidFill>
+                <a:latin typeface="Segoe UI"/>
+              </a:rPr>
+              <a:t>Criterio</a:t>
+            </a:r>
+            <a:r>
+              <a:rPr sz="1400" b="0" dirty="0">
+                <a:solidFill>
+                  <a:srgbClr val="8B949E"/>
+                </a:solidFill>
+                <a:latin typeface="Segoe UI"/>
+              </a:rPr>
+              <a:t> di PASS: </a:t>
+            </a:r>
+            <a:r>
+              <a:rPr sz="1400" b="0" dirty="0" err="1">
+                <a:solidFill>
+                  <a:srgbClr val="8B949E"/>
+                </a:solidFill>
+                <a:latin typeface="Segoe UI"/>
+              </a:rPr>
+              <a:t>retval</a:t>
+            </a:r>
+            <a:r>
+              <a:rPr sz="1400" b="0" dirty="0">
+                <a:solidFill>
+                  <a:srgbClr val="8B949E"/>
+                </a:solidFill>
+                <a:latin typeface="Segoe UI"/>
+              </a:rPr>
+              <a:t> ∈ {0,4} (redirect) e </a:t>
+            </a:r>
+            <a:r>
+              <a:rPr sz="1400" b="0" dirty="0" err="1">
+                <a:solidFill>
+                  <a:srgbClr val="8B949E"/>
+                </a:solidFill>
+                <a:latin typeface="Segoe UI"/>
+              </a:rPr>
+              <a:t>cls_stats</a:t>
+            </a:r>
+            <a:r>
+              <a:rPr sz="1400" b="0" dirty="0">
+                <a:solidFill>
+                  <a:srgbClr val="8B949E"/>
+                </a:solidFill>
+                <a:latin typeface="Segoe UI"/>
+              </a:rPr>
+              <a:t>[</a:t>
+            </a:r>
+            <a:r>
+              <a:rPr sz="1400" b="0" dirty="0" err="1">
+                <a:solidFill>
+                  <a:srgbClr val="8B949E"/>
+                </a:solidFill>
+                <a:latin typeface="Segoe UI"/>
+              </a:rPr>
+              <a:t>ref_cls</a:t>
+            </a:r>
+            <a:r>
+              <a:rPr sz="1400" b="0" dirty="0">
+                <a:solidFill>
+                  <a:srgbClr val="8B949E"/>
+                </a:solidFill>
+                <a:latin typeface="Segoe UI"/>
+              </a:rPr>
+              <a:t>] &gt; 0.</a:t>
             </a:r>
           </a:p>
         </p:txBody>
@@ -10543,13 +11254,49 @@
               </a:spcAft>
             </a:pPr>
             <a:r>
-              <a:rPr sz="1600" b="1">
+              <a:rPr sz="1600" b="1" dirty="0">
                 <a:solidFill>
                   <a:srgbClr val="3FB950"/>
                 </a:solidFill>
                 <a:latin typeface="Consolas"/>
               </a:rPr>
-              <a:t>✓  3 pipeline · TTL 1–5 · 5/5 PASS ciascuna · pkt_stats HIT · kernel suite: PASS</a:t>
+              <a:t>✓  3 pipeline · TTL 1–5 · 5/5 PASS </a:t>
+            </a:r>
+            <a:r>
+              <a:rPr sz="1600" b="1" dirty="0" err="1">
+                <a:solidFill>
+                  <a:srgbClr val="3FB950"/>
+                </a:solidFill>
+                <a:latin typeface="Consolas"/>
+              </a:rPr>
+              <a:t>ciascuna</a:t>
+            </a:r>
+            <a:r>
+              <a:rPr sz="1600" b="1" dirty="0">
+                <a:solidFill>
+                  <a:srgbClr val="3FB950"/>
+                </a:solidFill>
+                <a:latin typeface="Consolas"/>
+              </a:rPr>
+              <a:t> · </a:t>
+            </a:r>
+            <a:r>
+              <a:rPr sz="1600" b="1" dirty="0" err="1">
+                <a:solidFill>
+                  <a:srgbClr val="3FB950"/>
+                </a:solidFill>
+                <a:latin typeface="Consolas"/>
+              </a:rPr>
+              <a:t>pkt_stats</a:t>
+            </a:r>
+            <a:r>
+              <a:rPr sz="1600" b="1" dirty="0">
+                <a:solidFill>
+                  <a:srgbClr val="3FB950"/>
+                </a:solidFill>
+                <a:latin typeface="Consolas"/>
+              </a:rPr>
+              <a:t> HIT · kernel suite: PASS</a:t>
             </a:r>
           </a:p>
         </p:txBody>
@@ -18149,7 +18896,7 @@
               </a:spcAft>
             </a:pPr>
             <a:r>
-              <a:rPr sz="1300" b="1">
+              <a:rPr sz="1300" b="1" dirty="0">
                 <a:solidFill>
                   <a:srgbClr val="F5A623"/>
                 </a:solidFill>
@@ -18171,7 +18918,7 @@
               </a:spcAft>
             </a:pPr>
             <a:r>
-              <a:rPr sz="950" b="0">
+              <a:rPr sz="950" b="0" dirty="0">
                 <a:solidFill>
                   <a:srgbClr val="8B949E"/>
                 </a:solidFill>
@@ -18652,14 +19399,29 @@
               </a:spcAft>
             </a:pPr>
             <a:r>
-              <a:rPr sz="1350" b="1">
+              <a:rPr sz="1350" b="1" dirty="0">
                 <a:solidFill>
                   <a:srgbClr val="3FD0C8"/>
                 </a:solidFill>
                 <a:latin typeface="Segoe UI"/>
               </a:rPr>
-              <a:t>Il modello</a:t>
-            </a:r>
+              <a:t>Il </a:t>
+            </a:r>
+            <a:r>
+              <a:rPr sz="1350" b="1" dirty="0" err="1">
+                <a:solidFill>
+                  <a:srgbClr val="3FD0C8"/>
+                </a:solidFill>
+                <a:latin typeface="Segoe UI"/>
+              </a:rPr>
+              <a:t>modello</a:t>
+            </a:r>
+            <a:endParaRPr sz="1350" b="1" dirty="0">
+              <a:solidFill>
+                <a:srgbClr val="3FD0C8"/>
+              </a:solidFill>
+              <a:latin typeface="Segoe UI"/>
+            </a:endParaRPr>
           </a:p>
           <a:p>
             <a:pPr algn="l">
@@ -18674,7 +19436,7 @@
               </a:spcAft>
             </a:pPr>
             <a:r>
-              <a:rPr sz="1100" b="0">
+              <a:rPr sz="1100" b="0" dirty="0">
                 <a:solidFill>
                   <a:srgbClr val="3FD0C8"/>
                 </a:solidFill>
@@ -18683,13 +19445,49 @@
               <a:t>•  </a:t>
             </a:r>
             <a:r>
-              <a:rPr sz="1100" b="0">
-                <a:solidFill>
-                  <a:srgbClr val="8B949E"/>
-                </a:solidFill>
-                <a:latin typeface="Segoe UI"/>
-              </a:rPr>
-              <a:t>MLP 65→4→4→7 quantizzato int8 (post-training), scale factor potenza di 2.</a:t>
+              <a:rPr sz="1100" b="0" dirty="0">
+                <a:solidFill>
+                  <a:srgbClr val="8B949E"/>
+                </a:solidFill>
+                <a:latin typeface="Segoe UI"/>
+              </a:rPr>
+              <a:t>MLP 65→4→4→7 </a:t>
+            </a:r>
+            <a:r>
+              <a:rPr sz="1100" b="0" dirty="0" err="1">
+                <a:solidFill>
+                  <a:srgbClr val="8B949E"/>
+                </a:solidFill>
+                <a:latin typeface="Segoe UI"/>
+              </a:rPr>
+              <a:t>quantizzato</a:t>
+            </a:r>
+            <a:r>
+              <a:rPr sz="1100" b="0" dirty="0">
+                <a:solidFill>
+                  <a:srgbClr val="8B949E"/>
+                </a:solidFill>
+                <a:latin typeface="Segoe UI"/>
+              </a:rPr>
+              <a:t> int8 (post-training), scale factor </a:t>
+            </a:r>
+            <a:r>
+              <a:rPr sz="1100" b="0" dirty="0" err="1">
+                <a:solidFill>
+                  <a:srgbClr val="8B949E"/>
+                </a:solidFill>
+                <a:latin typeface="Segoe UI"/>
+              </a:rPr>
+              <a:t>potenza</a:t>
+            </a:r>
+            <a:r>
+              <a:rPr sz="1100" b="0" dirty="0">
+                <a:solidFill>
+                  <a:srgbClr val="8B949E"/>
+                </a:solidFill>
+                <a:latin typeface="Segoe UI"/>
+              </a:rPr>
+              <a:t> di 2.</a:t>
             </a:r>
           </a:p>
           <a:p>
@@ -18705,7 +19503,7 @@
               </a:spcAft>
             </a:pPr>
             <a:r>
-              <a:rPr sz="1100" b="0">
+              <a:rPr sz="1100" b="0" dirty="0">
                 <a:solidFill>
                   <a:srgbClr val="3FD0C8"/>
                 </a:solidFill>
@@ -18714,13 +19512,76 @@
               <a:t>•  </a:t>
             </a:r>
             <a:r>
-              <a:rPr sz="1100" b="0">
-                <a:solidFill>
-                  <a:srgbClr val="8B949E"/>
-                </a:solidFill>
-                <a:latin typeface="Segoe UI"/>
-              </a:rPr>
-              <a:t>Aritmetica intera pura: nessun float nel kernel.</a:t>
+              <a:rPr sz="1100" b="0" dirty="0" err="1">
+                <a:solidFill>
+                  <a:srgbClr val="8B949E"/>
+                </a:solidFill>
+                <a:latin typeface="Segoe UI"/>
+              </a:rPr>
+              <a:t>Aritmetica</a:t>
+            </a:r>
+            <a:r>
+              <a:rPr sz="1100" b="0" dirty="0">
+                <a:solidFill>
+                  <a:srgbClr val="8B949E"/>
+                </a:solidFill>
+                <a:latin typeface="Segoe UI"/>
+              </a:rPr>
+              <a:t> </a:t>
+            </a:r>
+            <a:r>
+              <a:rPr sz="1100" b="0" dirty="0" err="1">
+                <a:solidFill>
+                  <a:srgbClr val="8B949E"/>
+                </a:solidFill>
+                <a:latin typeface="Segoe UI"/>
+              </a:rPr>
+              <a:t>intera</a:t>
+            </a:r>
+            <a:r>
+              <a:rPr sz="1100" b="0" dirty="0">
+                <a:solidFill>
+                  <a:srgbClr val="8B949E"/>
+                </a:solidFill>
+                <a:latin typeface="Segoe UI"/>
+              </a:rPr>
+              <a:t> pura: </a:t>
+            </a:r>
+            <a:r>
+              <a:rPr sz="1100" b="0" dirty="0" err="1">
+                <a:solidFill>
+                  <a:srgbClr val="8B949E"/>
+                </a:solidFill>
+                <a:latin typeface="Segoe UI"/>
+              </a:rPr>
+              <a:t>nessun</a:t>
+            </a:r>
+            <a:r>
+              <a:rPr sz="1100" b="0" dirty="0">
+                <a:solidFill>
+                  <a:srgbClr val="8B949E"/>
+                </a:solidFill>
+                <a:latin typeface="Segoe UI"/>
+              </a:rPr>
+              <a:t> float </a:t>
+            </a:r>
+            <a:r>
+              <a:rPr sz="1100" b="0" dirty="0" err="1">
+                <a:solidFill>
+                  <a:srgbClr val="8B949E"/>
+                </a:solidFill>
+                <a:latin typeface="Segoe UI"/>
+              </a:rPr>
+              <a:t>nel</a:t>
+            </a:r>
+            <a:r>
+              <a:rPr sz="1100" b="0" dirty="0">
+                <a:solidFill>
+                  <a:srgbClr val="8B949E"/>
+                </a:solidFill>
+                <a:latin typeface="Segoe UI"/>
+              </a:rPr>
+              <a:t> kernel.</a:t>
             </a:r>
           </a:p>
           <a:p>
@@ -18736,7 +19597,7 @@
               </a:spcAft>
             </a:pPr>
             <a:r>
-              <a:rPr sz="1100" b="0">
+              <a:rPr sz="1100" b="0" dirty="0">
                 <a:solidFill>
                   <a:srgbClr val="3FD0C8"/>
                 </a:solidFill>
@@ -18745,13 +19606,85 @@
               <a:t>•  </a:t>
             </a:r>
             <a:r>
-              <a:rPr sz="1100" b="0">
-                <a:solidFill>
-                  <a:srgbClr val="8B949E"/>
-                </a:solidFill>
-                <a:latin typeface="Segoe UI"/>
-              </a:rPr>
-              <a:t>Output = argmax su 7 classi (6 interfacce di uscita + DROP).</a:t>
+              <a:rPr sz="1100" b="0" dirty="0">
+                <a:solidFill>
+                  <a:srgbClr val="8B949E"/>
+                </a:solidFill>
+                <a:latin typeface="Segoe UI"/>
+              </a:rPr>
+              <a:t>Output = argmax </a:t>
+            </a:r>
+            <a:r>
+              <a:rPr sz="1100" b="0" dirty="0" err="1">
+                <a:solidFill>
+                  <a:srgbClr val="8B949E"/>
+                </a:solidFill>
+                <a:latin typeface="Segoe UI"/>
+              </a:rPr>
+              <a:t>su</a:t>
+            </a:r>
+            <a:r>
+              <a:rPr sz="1100" b="0" dirty="0">
+                <a:solidFill>
+                  <a:srgbClr val="8B949E"/>
+                </a:solidFill>
+                <a:latin typeface="Segoe UI"/>
+              </a:rPr>
+              <a:t> 7 </a:t>
+            </a:r>
+            <a:r>
+              <a:rPr sz="1100" b="0" dirty="0" err="1">
+                <a:solidFill>
+                  <a:srgbClr val="8B949E"/>
+                </a:solidFill>
+                <a:latin typeface="Segoe UI"/>
+              </a:rPr>
+              <a:t>classi</a:t>
+            </a:r>
+            <a:r>
+              <a:rPr sz="1100" b="0" dirty="0">
+                <a:solidFill>
+                  <a:srgbClr val="8B949E"/>
+                </a:solidFill>
+                <a:latin typeface="Segoe UI"/>
+              </a:rPr>
+              <a:t> (6 </a:t>
+            </a:r>
+            <a:r>
+              <a:rPr sz="1100" b="0" dirty="0" err="1">
+                <a:solidFill>
+                  <a:srgbClr val="8B949E"/>
+                </a:solidFill>
+                <a:latin typeface="Segoe UI"/>
+              </a:rPr>
+              <a:t>interfacce</a:t>
+            </a:r>
+            <a:r>
+              <a:rPr sz="1100" b="0" dirty="0">
+                <a:solidFill>
+                  <a:srgbClr val="8B949E"/>
+                </a:solidFill>
+                <a:latin typeface="Segoe UI"/>
+              </a:rPr>
+              <a:t> di </a:t>
+            </a:r>
+            <a:r>
+              <a:rPr sz="1100" b="0" dirty="0" err="1">
+                <a:solidFill>
+                  <a:srgbClr val="8B949E"/>
+                </a:solidFill>
+                <a:latin typeface="Segoe UI"/>
+              </a:rPr>
+              <a:t>uscita</a:t>
+            </a:r>
+            <a:r>
+              <a:rPr sz="1100" b="0" dirty="0">
+                <a:solidFill>
+                  <a:srgbClr val="8B949E"/>
+                </a:solidFill>
+                <a:latin typeface="Segoe UI"/>
+              </a:rPr>
+              <a:t> + DROP).</a:t>
             </a:r>
           </a:p>
         </p:txBody>
@@ -19315,14 +20248,50 @@
               </a:spcAft>
             </a:pPr>
             <a:r>
-              <a:rPr sz="1050" b="0">
-                <a:solidFill>
-                  <a:srgbClr val="8B949E"/>
-                </a:solidFill>
-                <a:latin typeface="Segoe UI"/>
-              </a:rPr>
-              <a:t>porta d'ingresso
-(6 valori)</a:t>
+              <a:rPr sz="1050" b="0" dirty="0">
+                <a:solidFill>
+                  <a:srgbClr val="8B949E"/>
+                </a:solidFill>
+                <a:latin typeface="Segoe UI"/>
+              </a:rPr>
+              <a:t>porta </a:t>
+            </a:r>
+            <a:r>
+              <a:rPr sz="1050" b="0" dirty="0" err="1">
+                <a:solidFill>
+                  <a:srgbClr val="8B949E"/>
+                </a:solidFill>
+                <a:latin typeface="Segoe UI"/>
+              </a:rPr>
+              <a:t>d'ingresso</a:t>
+            </a:r>
+            <a:r>
+              <a:rPr sz="1050" b="0" dirty="0">
+                <a:solidFill>
+                  <a:srgbClr val="8B949E"/>
+                </a:solidFill>
+                <a:latin typeface="Segoe UI"/>
+              </a:rPr>
+              <a:t>
+(6 </a:t>
+            </a:r>
+            <a:r>
+              <a:rPr sz="1050" b="0" dirty="0" err="1">
+                <a:solidFill>
+                  <a:srgbClr val="8B949E"/>
+                </a:solidFill>
+                <a:latin typeface="Segoe UI"/>
+              </a:rPr>
+              <a:t>valori</a:t>
+            </a:r>
+            <a:r>
+              <a:rPr sz="1050" b="0" dirty="0">
+                <a:solidFill>
+                  <a:srgbClr val="8B949E"/>
+                </a:solidFill>
+                <a:latin typeface="Segoe UI"/>
+              </a:rPr>
+              <a:t>)</a:t>
             </a:r>
           </a:p>
         </p:txBody>
@@ -19635,7 +20604,7 @@
               </a:spcAft>
             </a:pPr>
             <a:r>
-              <a:rPr sz="1450" b="1">
+              <a:rPr sz="1450" b="1" dirty="0">
                 <a:solidFill>
                   <a:srgbClr val="E6EDF3"/>
                 </a:solidFill>
@@ -20312,7 +21281,7 @@
               </a:spcAft>
             </a:pPr>
             <a:r>
-              <a:rPr sz="1300" b="1">
+              <a:rPr sz="1300" b="1" dirty="0">
                 <a:solidFill>
                   <a:srgbClr val="58A6FF"/>
                 </a:solidFill>
@@ -20334,7 +21303,7 @@
               </a:spcAft>
             </a:pPr>
             <a:r>
-              <a:rPr sz="950" b="0">
+              <a:rPr sz="950" b="0" dirty="0">
                 <a:solidFill>
                   <a:srgbClr val="8B949E"/>
                 </a:solidFill>
@@ -20516,7 +21485,7 @@
               </a:spcAft>
             </a:pPr>
             <a:r>
-              <a:rPr sz="1300" b="1">
+              <a:rPr sz="1300" b="1" dirty="0">
                 <a:solidFill>
                   <a:srgbClr val="E6EDF3"/>
                 </a:solidFill>
@@ -20538,14 +21507,29 @@
               </a:spcAft>
             </a:pPr>
             <a:r>
-              <a:rPr sz="950" b="0">
-                <a:solidFill>
-                  <a:srgbClr val="8B949E"/>
-                </a:solidFill>
-                <a:latin typeface="Segoe UI"/>
-              </a:rPr>
-              <a:t>polling userspace</a:t>
-            </a:r>
+              <a:rPr sz="950" b="0" dirty="0">
+                <a:solidFill>
+                  <a:srgbClr val="8B949E"/>
+                </a:solidFill>
+                <a:latin typeface="Segoe UI"/>
+              </a:rPr>
+              <a:t>polling </a:t>
+            </a:r>
+            <a:r>
+              <a:rPr sz="950" b="0" dirty="0" err="1">
+                <a:solidFill>
+                  <a:srgbClr val="8B949E"/>
+                </a:solidFill>
+                <a:latin typeface="Segoe UI"/>
+              </a:rPr>
+              <a:t>userspace</a:t>
+            </a:r>
+            <a:endParaRPr sz="950" b="0" dirty="0">
+              <a:solidFill>
+                <a:srgbClr val="8B949E"/>
+              </a:solidFill>
+              <a:latin typeface="Segoe UI"/>
+            </a:endParaRPr>
           </a:p>
         </p:txBody>
       </p:sp>
@@ -21223,14 +22207,38 @@
               </a:spcAft>
             </a:pPr>
             <a:r>
-              <a:rPr sz="1350" b="1">
+              <a:rPr sz="1350" b="1" dirty="0" err="1">
                 <a:solidFill>
                   <a:srgbClr val="3FB950"/>
                 </a:solidFill>
                 <a:latin typeface="Segoe UI"/>
               </a:rPr>
-              <a:t>Effetto sull'inferenza</a:t>
-            </a:r>
+              <a:t>Effetto</a:t>
+            </a:r>
+            <a:r>
+              <a:rPr sz="1350" b="1" dirty="0">
+                <a:solidFill>
+                  <a:srgbClr val="3FB950"/>
+                </a:solidFill>
+                <a:latin typeface="Segoe UI"/>
+              </a:rPr>
+              <a:t> </a:t>
+            </a:r>
+            <a:r>
+              <a:rPr sz="1350" b="1" dirty="0" err="1">
+                <a:solidFill>
+                  <a:srgbClr val="3FB950"/>
+                </a:solidFill>
+                <a:latin typeface="Segoe UI"/>
+              </a:rPr>
+              <a:t>sull'inferenza</a:t>
+            </a:r>
+            <a:endParaRPr sz="1350" b="1" dirty="0">
+              <a:solidFill>
+                <a:srgbClr val="3FB950"/>
+              </a:solidFill>
+              <a:latin typeface="Segoe UI"/>
+            </a:endParaRPr>
           </a:p>
           <a:p>
             <a:pPr algn="l">
@@ -21245,7 +22253,7 @@
               </a:spcAft>
             </a:pPr>
             <a:r>
-              <a:rPr sz="1100" b="0">
+              <a:rPr sz="1100" b="0" dirty="0">
                 <a:solidFill>
                   <a:srgbClr val="3FB950"/>
                 </a:solidFill>
@@ -21254,13 +22262,157 @@
               <a:t>•  </a:t>
             </a:r>
             <a:r>
-              <a:rPr sz="1100" b="0">
-                <a:solidFill>
-                  <a:srgbClr val="8B949E"/>
-                </a:solidFill>
-                <a:latin typeface="Segoe UI"/>
-              </a:rPr>
-              <a:t>Link che cade → la sua feature va a 0 → l'argmax può scegliere un'altra uscita.</a:t>
+              <a:rPr sz="1100" b="0" dirty="0">
+                <a:solidFill>
+                  <a:srgbClr val="8B949E"/>
+                </a:solidFill>
+                <a:latin typeface="Segoe UI"/>
+              </a:rPr>
+              <a:t>Link </a:t>
+            </a:r>
+            <a:r>
+              <a:rPr sz="1100" b="0" dirty="0" err="1">
+                <a:solidFill>
+                  <a:srgbClr val="8B949E"/>
+                </a:solidFill>
+                <a:latin typeface="Segoe UI"/>
+              </a:rPr>
+              <a:t>che</a:t>
+            </a:r>
+            <a:r>
+              <a:rPr sz="1100" b="0" dirty="0">
+                <a:solidFill>
+                  <a:srgbClr val="8B949E"/>
+                </a:solidFill>
+                <a:latin typeface="Segoe UI"/>
+              </a:rPr>
+              <a:t> cade → la </a:t>
+            </a:r>
+            <a:r>
+              <a:rPr sz="1100" b="0" dirty="0" err="1">
+                <a:solidFill>
+                  <a:srgbClr val="8B949E"/>
+                </a:solidFill>
+                <a:latin typeface="Segoe UI"/>
+              </a:rPr>
+              <a:t>sua</a:t>
+            </a:r>
+            <a:r>
+              <a:rPr sz="1100" b="0" dirty="0">
+                <a:solidFill>
+                  <a:srgbClr val="8B949E"/>
+                </a:solidFill>
+                <a:latin typeface="Segoe UI"/>
+              </a:rPr>
+              <a:t> feature </a:t>
+            </a:r>
+            <a:r>
+              <a:rPr sz="1100" b="0" dirty="0" err="1">
+                <a:solidFill>
+                  <a:srgbClr val="8B949E"/>
+                </a:solidFill>
+                <a:latin typeface="Segoe UI"/>
+              </a:rPr>
+              <a:t>va</a:t>
+            </a:r>
+            <a:r>
+              <a:rPr sz="1100" b="0" dirty="0">
+                <a:solidFill>
+                  <a:srgbClr val="8B949E"/>
+                </a:solidFill>
+                <a:latin typeface="Segoe UI"/>
+              </a:rPr>
+              <a:t> a 0 → </a:t>
+            </a:r>
+            <a:r>
+              <a:rPr sz="1100" b="0" dirty="0" err="1">
+                <a:solidFill>
+                  <a:srgbClr val="8B949E"/>
+                </a:solidFill>
+                <a:latin typeface="Segoe UI"/>
+              </a:rPr>
+              <a:t>l'argmax</a:t>
+            </a:r>
+            <a:r>
+              <a:rPr sz="1100" b="0" dirty="0">
+                <a:solidFill>
+                  <a:srgbClr val="8B949E"/>
+                </a:solidFill>
+                <a:latin typeface="Segoe UI"/>
+              </a:rPr>
+              <a:t> </a:t>
+            </a:r>
+            <a:r>
+              <a:rPr sz="1100" b="0" dirty="0" err="1">
+                <a:solidFill>
+                  <a:srgbClr val="8B949E"/>
+                </a:solidFill>
+                <a:latin typeface="Segoe UI"/>
+              </a:rPr>
+              <a:t>può</a:t>
+            </a:r>
+            <a:r>
+              <a:rPr sz="1100" b="0" dirty="0">
+                <a:solidFill>
+                  <a:srgbClr val="8B949E"/>
+                </a:solidFill>
+                <a:latin typeface="Segoe UI"/>
+              </a:rPr>
+              <a:t> </a:t>
+            </a:r>
+            <a:r>
+              <a:rPr sz="1100" b="0" dirty="0" err="1">
+                <a:solidFill>
+                  <a:srgbClr val="8B949E"/>
+                </a:solidFill>
+                <a:latin typeface="Segoe UI"/>
+              </a:rPr>
+              <a:t>scegliere</a:t>
+            </a:r>
+            <a:r>
+              <a:rPr sz="1100" b="0" dirty="0">
+                <a:solidFill>
+                  <a:srgbClr val="8B949E"/>
+                </a:solidFill>
+                <a:latin typeface="Segoe UI"/>
+              </a:rPr>
+              <a:t> </a:t>
+            </a:r>
+            <a:r>
+              <a:rPr sz="1100" b="0" dirty="0" err="1">
+                <a:solidFill>
+                  <a:srgbClr val="8B949E"/>
+                </a:solidFill>
+                <a:latin typeface="Segoe UI"/>
+              </a:rPr>
+              <a:t>un'altra</a:t>
+            </a:r>
+            <a:r>
+              <a:rPr sz="1100" b="0" dirty="0">
+                <a:solidFill>
+                  <a:srgbClr val="8B949E"/>
+                </a:solidFill>
+                <a:latin typeface="Segoe UI"/>
+              </a:rPr>
+              <a:t> </a:t>
+            </a:r>
+            <a:r>
+              <a:rPr sz="1100" b="0" dirty="0" err="1">
+                <a:solidFill>
+                  <a:srgbClr val="8B949E"/>
+                </a:solidFill>
+                <a:latin typeface="Segoe UI"/>
+              </a:rPr>
+              <a:t>uscita</a:t>
+            </a:r>
+            <a:r>
+              <a:rPr sz="1100" b="0" dirty="0">
+                <a:solidFill>
+                  <a:srgbClr val="8B949E"/>
+                </a:solidFill>
+                <a:latin typeface="Segoe UI"/>
+              </a:rPr>
+              <a:t>.</a:t>
             </a:r>
           </a:p>
           <a:p>
@@ -21276,7 +22428,7 @@
               </a:spcAft>
             </a:pPr>
             <a:r>
-              <a:rPr sz="1100" b="0">
+              <a:rPr sz="1100" b="0" dirty="0">
                 <a:solidFill>
                   <a:srgbClr val="3FB950"/>
                 </a:solidFill>
@@ -21285,13 +22437,40 @@
               <a:t>•  </a:t>
             </a:r>
             <a:r>
-              <a:rPr sz="1100" b="0">
-                <a:solidFill>
-                  <a:srgbClr val="8B949E"/>
-                </a:solidFill>
-                <a:latin typeface="Segoe UI"/>
-              </a:rPr>
-              <a:t>All'avvio la mappa è seed a tutti-up (baseline sana).</a:t>
+              <a:rPr sz="1100" b="0" dirty="0" err="1">
+                <a:solidFill>
+                  <a:srgbClr val="8B949E"/>
+                </a:solidFill>
+                <a:latin typeface="Segoe UI"/>
+              </a:rPr>
+              <a:t>All'avvio</a:t>
+            </a:r>
+            <a:r>
+              <a:rPr sz="1100" b="0" dirty="0">
+                <a:solidFill>
+                  <a:srgbClr val="8B949E"/>
+                </a:solidFill>
+                <a:latin typeface="Segoe UI"/>
+              </a:rPr>
+              <a:t> la </a:t>
+            </a:r>
+            <a:r>
+              <a:rPr sz="1100" b="0" dirty="0" err="1">
+                <a:solidFill>
+                  <a:srgbClr val="8B949E"/>
+                </a:solidFill>
+                <a:latin typeface="Segoe UI"/>
+              </a:rPr>
+              <a:t>mappa</a:t>
+            </a:r>
+            <a:r>
+              <a:rPr sz="1100" b="0" dirty="0">
+                <a:solidFill>
+                  <a:srgbClr val="8B949E"/>
+                </a:solidFill>
+                <a:latin typeface="Segoe UI"/>
+              </a:rPr>
+              <a:t> è seed a tutti-up (baseline sana).</a:t>
             </a:r>
           </a:p>
           <a:p>
@@ -21307,7 +22486,7 @@
               </a:spcAft>
             </a:pPr>
             <a:r>
-              <a:rPr sz="1100" b="0">
+              <a:rPr sz="1100" b="0" dirty="0">
                 <a:solidFill>
                   <a:srgbClr val="3FB950"/>
                 </a:solidFill>
@@ -21316,13 +22495,49 @@
               <a:t>•  </a:t>
             </a:r>
             <a:r>
-              <a:rPr sz="1100" b="0">
-                <a:solidFill>
-                  <a:srgbClr val="8B949E"/>
-                </a:solidFill>
-                <a:latin typeface="Segoe UI"/>
-              </a:rPr>
-              <a:t>Unica map letta nell'inferenza di P1 (feature, non peso).</a:t>
+              <a:rPr sz="1100" b="0" dirty="0">
+                <a:solidFill>
+                  <a:srgbClr val="8B949E"/>
+                </a:solidFill>
+                <a:latin typeface="Segoe UI"/>
+              </a:rPr>
+              <a:t>Unica map </a:t>
+            </a:r>
+            <a:r>
+              <a:rPr sz="1100" b="0" dirty="0" err="1">
+                <a:solidFill>
+                  <a:srgbClr val="8B949E"/>
+                </a:solidFill>
+                <a:latin typeface="Segoe UI"/>
+              </a:rPr>
+              <a:t>letta</a:t>
+            </a:r>
+            <a:r>
+              <a:rPr sz="1100" b="0" dirty="0">
+                <a:solidFill>
+                  <a:srgbClr val="8B949E"/>
+                </a:solidFill>
+                <a:latin typeface="Segoe UI"/>
+              </a:rPr>
+              <a:t> </a:t>
+            </a:r>
+            <a:r>
+              <a:rPr sz="1100" b="0" dirty="0" err="1">
+                <a:solidFill>
+                  <a:srgbClr val="8B949E"/>
+                </a:solidFill>
+                <a:latin typeface="Segoe UI"/>
+              </a:rPr>
+              <a:t>nell'inferenza</a:t>
+            </a:r>
+            <a:r>
+              <a:rPr sz="1100" b="0" dirty="0">
+                <a:solidFill>
+                  <a:srgbClr val="8B949E"/>
+                </a:solidFill>
+                <a:latin typeface="Segoe UI"/>
+              </a:rPr>
+              <a:t> di P1 (feature, non peso).</a:t>
             </a:r>
           </a:p>
         </p:txBody>
@@ -22284,13 +23499,40 @@
               </a:spcAft>
             </a:pPr>
             <a:r>
-              <a:rPr sz="1300" b="1">
+              <a:rPr sz="1300" b="1" dirty="0" err="1">
                 <a:solidFill>
                   <a:srgbClr val="3FB950"/>
                 </a:solidFill>
                 <a:latin typeface="Consolas"/>
               </a:rPr>
-              <a:t>mac_table[cls]</a:t>
+              <a:t>mac_table</a:t>
+            </a:r>
+            <a:r>
+              <a:rPr sz="1300" b="1" dirty="0">
+                <a:solidFill>
+                  <a:srgbClr val="3FB950"/>
+                </a:solidFill>
+                <a:latin typeface="Consolas"/>
+              </a:rPr>
+              <a:t>[</a:t>
+            </a:r>
+            <a:r>
+              <a:rPr sz="1300" b="1" dirty="0" err="1">
+                <a:solidFill>
+                  <a:srgbClr val="3FB950"/>
+                </a:solidFill>
+                <a:latin typeface="Consolas"/>
+              </a:rPr>
+              <a:t>cls</a:t>
+            </a:r>
+            <a:r>
+              <a:rPr sz="1300" b="1" dirty="0">
+                <a:solidFill>
+                  <a:srgbClr val="3FB950"/>
+                </a:solidFill>
+                <a:latin typeface="Consolas"/>
+              </a:rPr>
+              <a:t>]</a:t>
             </a:r>
           </a:p>
           <a:p>
@@ -22306,13 +23548,22 @@
               </a:spcAft>
             </a:pPr>
             <a:r>
-              <a:rPr sz="950" b="0">
-                <a:solidFill>
-                  <a:srgbClr val="8B949E"/>
-                </a:solidFill>
-                <a:latin typeface="Segoe UI"/>
-              </a:rPr>
-              <a:t>ifindex + MAC rewrite</a:t>
+              <a:rPr sz="950" b="0" dirty="0" err="1">
+                <a:solidFill>
+                  <a:srgbClr val="8B949E"/>
+                </a:solidFill>
+                <a:latin typeface="Segoe UI"/>
+              </a:rPr>
+              <a:t>ifindex</a:t>
+            </a:r>
+            <a:r>
+              <a:rPr sz="950" b="0" dirty="0">
+                <a:solidFill>
+                  <a:srgbClr val="8B949E"/>
+                </a:solidFill>
+                <a:latin typeface="Segoe UI"/>
+              </a:rPr>
+              <a:t> + MAC rewrite</a:t>
             </a:r>
           </a:p>
         </p:txBody>
@@ -22944,7 +24195,7 @@
         </p:nvSpPr>
         <p:spPr>
           <a:xfrm>
-            <a:off x="896112" y="4041648"/>
+            <a:off x="896112" y="3991199"/>
             <a:ext cx="10469880" cy="1920240"/>
           </a:xfrm>
           <a:prstGeom prst="rect">
@@ -26433,7 +27684,7 @@
                 </a:solidFill>
                 <a:latin typeface="Segoe UI"/>
               </a:rPr>
-              <a:t>1 prog / n_h1,n_h2 runtime</a:t>
+              <a:t>legge arch_weights + argmax</a:t>
             </a:r>
           </a:p>
         </p:txBody>
@@ -26615,7 +27866,7 @@
                 </a:solidFill>
                 <a:latin typeface="Consolas"/>
               </a:rPr>
-              <a:t>arch_weights</a:t>
+              <a:t>mac_table[cls]</a:t>
             </a:r>
           </a:p>
           <a:p>
@@ -26637,7 +27888,7 @@
                 </a:solidFill>
                 <a:latin typeface="Segoe UI"/>
               </a:rPr>
-              <a:t>BPF_ARRAY int8</a:t>
+              <a:t>ifindex + MAC rewrite</a:t>
             </a:r>
           </a:p>
         </p:txBody>

--- a/docs/IPA_eBPF_pipelines.pptx
+++ b/docs/IPA_eBPF_pipelines.pptx
@@ -12,6 +12,7 @@
     <p:sldId id="260" r:id="rId6"/>
     <p:sldId id="261" r:id="rId7"/>
     <p:sldId id="262" r:id="rId8"/>
+    <p:sldId id="274" r:id="rId24"/>
     <p:sldId id="263" r:id="rId9"/>
     <p:sldId id="264" r:id="rId10"/>
     <p:sldId id="265" r:id="rId11"/>
@@ -16690,6 +16691,1189 @@
 </p:sld>
 </file>
 
+<file path=ppt/slides/slide19.xml><?xml version="1.0" encoding="utf-8"?>
+<p:sld xmlns:a="http://schemas.openxmlformats.org/drawingml/2006/main" xmlns:p="http://schemas.openxmlformats.org/presentationml/2006/main" xmlns:r="http://schemas.openxmlformats.org/officeDocument/2006/relationships">
+  <p:cSld>
+    <p:spTree>
+      <p:nvGrpSpPr>
+        <p:cNvPr id="1" name=""/>
+        <p:cNvGrpSpPr/>
+        <p:nvPr/>
+      </p:nvGrpSpPr>
+      <p:grpSpPr/>
+      <p:sp>
+        <p:nvSpPr>
+          <p:cNvPr id="2" name="Rectangle 1"/>
+          <p:cNvSpPr/>
+          <p:nvPr/>
+        </p:nvSpPr>
+        <p:spPr>
+          <a:xfrm>
+            <a:off x="0" y="0"/>
+            <a:ext cx="12191695" cy="6858000"/>
+          </a:xfrm>
+          <a:prstGeom prst="rect">
+            <a:avLst/>
+          </a:prstGeom>
+          <a:solidFill>
+            <a:srgbClr val="0D1117"/>
+          </a:solidFill>
+          <a:ln>
+            <a:noFill/>
+          </a:ln>
+          <a:effectLst/>
+        </p:spPr>
+        <p:style>
+          <a:lnRef idx="1">
+            <a:schemeClr val="accent1"/>
+          </a:lnRef>
+          <a:fillRef idx="3">
+            <a:schemeClr val="accent1"/>
+          </a:fillRef>
+          <a:effectRef idx="2">
+            <a:schemeClr val="accent1"/>
+          </a:effectRef>
+          <a:fontRef idx="minor">
+            <a:schemeClr val="lt1"/>
+          </a:fontRef>
+        </p:style>
+        <p:txBody>
+          <a:bodyPr rtlCol="0" anchor="ctr"/>
+          <a:lstStyle/>
+          <a:p>
+            <a:pPr algn="ctr"/>
+            <a:endParaRPr/>
+          </a:p>
+        </p:txBody>
+      </p:sp>
+      <p:sp>
+        <p:nvSpPr>
+          <p:cNvPr id="3" name="TextBox 2"/>
+          <p:cNvSpPr txBox="1"/>
+          <p:nvPr/>
+        </p:nvSpPr>
+        <p:spPr>
+          <a:xfrm>
+            <a:off x="566928" y="384048"/>
+            <a:ext cx="1097280" cy="914400"/>
+          </a:xfrm>
+          <a:prstGeom prst="rect">
+            <a:avLst/>
+          </a:prstGeom>
+          <a:noFill/>
+        </p:spPr>
+        <p:txBody>
+          <a:bodyPr wrap="square" lIns="0" tIns="0" rIns="0" bIns="0" anchor="t">
+            <a:spAutoFit/>
+          </a:bodyPr>
+          <a:lstStyle/>
+          <a:p>
+            <a:pPr algn="l">
+              <a:lnSpc>
+                <a:spcPct val="100000"/>
+              </a:lnSpc>
+              <a:spcBef>
+                <a:spcPts val="0"/>
+              </a:spcBef>
+              <a:spcAft>
+                <a:spcPts val="200"/>
+              </a:spcAft>
+            </a:pPr>
+            <a:r>
+              <a:rPr sz="4000" b="1">
+                <a:solidFill>
+                  <a:srgbClr val="F5A623"/>
+                </a:solidFill>
+                <a:latin typeface="Georgia"/>
+              </a:rPr>
+              <a:t>06b</a:t>
+            </a:r>
+          </a:p>
+        </p:txBody>
+      </p:sp>
+      <p:sp>
+        <p:nvSpPr>
+          <p:cNvPr id="4" name="TextBox 3"/>
+          <p:cNvSpPr txBox="1"/>
+          <p:nvPr/>
+        </p:nvSpPr>
+        <p:spPr>
+          <a:xfrm>
+            <a:off x="1600200" y="365760"/>
+            <a:ext cx="9875520" cy="731520"/>
+          </a:xfrm>
+          <a:prstGeom prst="rect">
+            <a:avLst/>
+          </a:prstGeom>
+          <a:noFill/>
+        </p:spPr>
+        <p:txBody>
+          <a:bodyPr wrap="square" lIns="0" tIns="0" rIns="0" bIns="0" anchor="t">
+            <a:spAutoFit/>
+          </a:bodyPr>
+          <a:lstStyle/>
+          <a:p>
+            <a:pPr algn="l">
+              <a:lnSpc>
+                <a:spcPct val="100000"/>
+              </a:lnSpc>
+              <a:spcBef>
+                <a:spcPts val="0"/>
+              </a:spcBef>
+              <a:spcAft>
+                <a:spcPts val="200"/>
+              </a:spcAft>
+            </a:pPr>
+            <a:r>
+              <a:rPr sz="3000" b="1">
+                <a:solidFill>
+                  <a:srgbClr val="E6EDF3"/>
+                </a:solidFill>
+                <a:latin typeface="Georgia"/>
+              </a:rPr>
+              <a:t>Pipeline 1 — input/output generalizzati</a:t>
+            </a:r>
+          </a:p>
+        </p:txBody>
+      </p:sp>
+      <p:sp>
+        <p:nvSpPr>
+          <p:cNvPr id="5" name="TextBox 4"/>
+          <p:cNvSpPr txBox="1"/>
+          <p:nvPr/>
+        </p:nvSpPr>
+        <p:spPr>
+          <a:xfrm>
+            <a:off x="1627632" y="1024128"/>
+            <a:ext cx="9875520" cy="457200"/>
+          </a:xfrm>
+          <a:prstGeom prst="rect">
+            <a:avLst/>
+          </a:prstGeom>
+          <a:noFill/>
+        </p:spPr>
+        <p:txBody>
+          <a:bodyPr wrap="square" lIns="0" tIns="0" rIns="0" bIns="0" anchor="t">
+            <a:spAutoFit/>
+          </a:bodyPr>
+          <a:lstStyle/>
+          <a:p>
+            <a:pPr algn="l">
+              <a:lnSpc>
+                <a:spcPct val="100000"/>
+              </a:lnSpc>
+              <a:spcBef>
+                <a:spcPts val="0"/>
+              </a:spcBef>
+              <a:spcAft>
+                <a:spcPts val="200"/>
+              </a:spcAft>
+            </a:pPr>
+            <a:r>
+              <a:rPr sz="1350" b="0">
+                <a:solidFill>
+                  <a:srgbClr val="8B949E"/>
+                </a:solidFill>
+                <a:latin typeface="Segoe UI"/>
+              </a:rPr>
+              <a:t>Dal 65-4-4-7 fisso a un vettore parametrico per scenario</a:t>
+            </a:r>
+          </a:p>
+        </p:txBody>
+      </p:sp>
+      <p:sp>
+        <p:nvSpPr>
+          <p:cNvPr id="6" name="Rounded Rectangle 5"/>
+          <p:cNvSpPr/>
+          <p:nvPr/>
+        </p:nvSpPr>
+        <p:spPr>
+          <a:xfrm>
+            <a:off x="640080" y="2194560"/>
+            <a:ext cx="2880360" cy="1737360"/>
+          </a:xfrm>
+          <a:prstGeom prst="roundRect">
+            <a:avLst/>
+          </a:prstGeom>
+          <a:solidFill>
+            <a:srgbClr val="1B222E"/>
+          </a:solidFill>
+          <a:ln w="19050">
+            <a:solidFill>
+              <a:srgbClr val="3FB950"/>
+            </a:solidFill>
+          </a:ln>
+          <a:effectLst/>
+        </p:spPr>
+        <p:style>
+          <a:lnRef idx="1">
+            <a:schemeClr val="accent1"/>
+          </a:lnRef>
+          <a:fillRef idx="3">
+            <a:schemeClr val="accent1"/>
+          </a:fillRef>
+          <a:effectRef idx="2">
+            <a:schemeClr val="accent1"/>
+          </a:effectRef>
+          <a:fontRef idx="minor">
+            <a:schemeClr val="lt1"/>
+          </a:fontRef>
+        </p:style>
+        <p:txBody>
+          <a:bodyPr rtlCol="0" anchor="ctr"/>
+          <a:lstStyle/>
+          <a:p>
+            <a:pPr algn="ctr"/>
+            <a:endParaRPr/>
+          </a:p>
+        </p:txBody>
+      </p:sp>
+      <p:sp>
+        <p:nvSpPr>
+          <p:cNvPr id="7" name="TextBox 6"/>
+          <p:cNvSpPr txBox="1"/>
+          <p:nvPr/>
+        </p:nvSpPr>
+        <p:spPr>
+          <a:xfrm>
+            <a:off x="777240" y="2331720"/>
+            <a:ext cx="2606040" cy="365760"/>
+          </a:xfrm>
+          <a:prstGeom prst="rect">
+            <a:avLst/>
+          </a:prstGeom>
+          <a:noFill/>
+        </p:spPr>
+        <p:txBody>
+          <a:bodyPr wrap="square" lIns="0" tIns="0" rIns="0" bIns="0" anchor="t">
+            <a:spAutoFit/>
+          </a:bodyPr>
+          <a:lstStyle/>
+          <a:p>
+            <a:pPr algn="l">
+              <a:lnSpc>
+                <a:spcPct val="100000"/>
+              </a:lnSpc>
+              <a:spcBef>
+                <a:spcPts val="0"/>
+              </a:spcBef>
+              <a:spcAft>
+                <a:spcPts val="200"/>
+              </a:spcAft>
+            </a:pPr>
+            <a:r>
+              <a:rPr sz="1300" b="1">
+                <a:solidFill>
+                  <a:srgbClr val="3FB950"/>
+                </a:solidFill>
+                <a:latin typeface="Consolas"/>
+              </a:rPr>
+              <a:t>sparse</a:t>
+            </a:r>
+          </a:p>
+        </p:txBody>
+      </p:sp>
+      <p:sp>
+        <p:nvSpPr>
+          <p:cNvPr id="8" name="TextBox 7"/>
+          <p:cNvSpPr txBox="1"/>
+          <p:nvPr/>
+        </p:nvSpPr>
+        <p:spPr>
+          <a:xfrm>
+            <a:off x="777240" y="2761488"/>
+            <a:ext cx="2606040" cy="457200"/>
+          </a:xfrm>
+          <a:prstGeom prst="rect">
+            <a:avLst/>
+          </a:prstGeom>
+          <a:noFill/>
+        </p:spPr>
+        <p:txBody>
+          <a:bodyPr wrap="square" lIns="0" tIns="0" rIns="0" bIns="0" anchor="t">
+            <a:spAutoFit/>
+          </a:bodyPr>
+          <a:lstStyle/>
+          <a:p>
+            <a:pPr algn="l">
+              <a:lnSpc>
+                <a:spcPct val="100000"/>
+              </a:lnSpc>
+              <a:spcBef>
+                <a:spcPts val="0"/>
+              </a:spcBef>
+              <a:spcAft>
+                <a:spcPts val="200"/>
+              </a:spcAft>
+            </a:pPr>
+            <a:r>
+              <a:rPr sz="1450" b="1">
+                <a:solidFill>
+                  <a:srgbClr val="E6EDF3"/>
+                </a:solidFill>
+                <a:latin typeface="Consolas"/>
+              </a:rPr>
+              <a:t>N_IN generico</a:t>
+            </a:r>
+          </a:p>
+        </p:txBody>
+      </p:sp>
+      <p:sp>
+        <p:nvSpPr>
+          <p:cNvPr id="9" name="TextBox 8"/>
+          <p:cNvSpPr txBox="1"/>
+          <p:nvPr/>
+        </p:nvSpPr>
+        <p:spPr>
+          <a:xfrm>
+            <a:off x="777240" y="3246120"/>
+            <a:ext cx="2606040" cy="640080"/>
+          </a:xfrm>
+          <a:prstGeom prst="rect">
+            <a:avLst/>
+          </a:prstGeom>
+          <a:noFill/>
+        </p:spPr>
+        <p:txBody>
+          <a:bodyPr wrap="square" lIns="0" tIns="0" rIns="0" bIns="0" anchor="t">
+            <a:spAutoFit/>
+          </a:bodyPr>
+          <a:lstStyle/>
+          <a:p>
+            <a:pPr algn="l">
+              <a:lnSpc>
+                <a:spcPct val="105000"/>
+              </a:lnSpc>
+              <a:spcBef>
+                <a:spcPts val="0"/>
+              </a:spcBef>
+              <a:spcAft>
+                <a:spcPts val="200"/>
+              </a:spcAft>
+            </a:pPr>
+            <a:r>
+              <a:rPr sz="1050" b="0">
+                <a:solidFill>
+                  <a:srgbClr val="8B949E"/>
+                </a:solidFill>
+                <a:latin typeface="Segoe UI"/>
+              </a:rPr>
+              <a:t>2·n_if+1+n_nodes
+(era fisso 65)</a:t>
+            </a:r>
+          </a:p>
+        </p:txBody>
+      </p:sp>
+      <p:sp>
+        <p:nvSpPr>
+          <p:cNvPr id="10" name="Rounded Rectangle 9"/>
+          <p:cNvSpPr/>
+          <p:nvPr/>
+        </p:nvSpPr>
+        <p:spPr>
+          <a:xfrm>
+            <a:off x="3703320" y="2194560"/>
+            <a:ext cx="2880360" cy="1737360"/>
+          </a:xfrm>
+          <a:prstGeom prst="roundRect">
+            <a:avLst/>
+          </a:prstGeom>
+          <a:solidFill>
+            <a:srgbClr val="1B222E"/>
+          </a:solidFill>
+          <a:ln w="19050">
+            <a:solidFill>
+              <a:srgbClr val="F5A623"/>
+            </a:solidFill>
+          </a:ln>
+          <a:effectLst/>
+        </p:spPr>
+        <p:style>
+          <a:lnRef idx="1">
+            <a:schemeClr val="accent1"/>
+          </a:lnRef>
+          <a:fillRef idx="3">
+            <a:schemeClr val="accent1"/>
+          </a:fillRef>
+          <a:effectRef idx="2">
+            <a:schemeClr val="accent1"/>
+          </a:effectRef>
+          <a:fontRef idx="minor">
+            <a:schemeClr val="lt1"/>
+          </a:fontRef>
+        </p:style>
+        <p:txBody>
+          <a:bodyPr rtlCol="0" anchor="ctr"/>
+          <a:lstStyle/>
+          <a:p>
+            <a:pPr algn="ctr"/>
+            <a:endParaRPr/>
+          </a:p>
+        </p:txBody>
+      </p:sp>
+      <p:sp>
+        <p:nvSpPr>
+          <p:cNvPr id="11" name="TextBox 10"/>
+          <p:cNvSpPr txBox="1"/>
+          <p:nvPr/>
+        </p:nvSpPr>
+        <p:spPr>
+          <a:xfrm>
+            <a:off x="3840480" y="2331720"/>
+            <a:ext cx="2606040" cy="365760"/>
+          </a:xfrm>
+          <a:prstGeom prst="rect">
+            <a:avLst/>
+          </a:prstGeom>
+          <a:noFill/>
+        </p:spPr>
+        <p:txBody>
+          <a:bodyPr wrap="square" lIns="0" tIns="0" rIns="0" bIns="0" anchor="t">
+            <a:spAutoFit/>
+          </a:bodyPr>
+          <a:lstStyle/>
+          <a:p>
+            <a:pPr algn="l">
+              <a:lnSpc>
+                <a:spcPct val="100000"/>
+              </a:lnSpc>
+              <a:spcBef>
+                <a:spcPts val="0"/>
+              </a:spcBef>
+              <a:spcAft>
+                <a:spcPts val="200"/>
+              </a:spcAft>
+            </a:pPr>
+            <a:r>
+              <a:rPr sz="1300" b="1">
+                <a:solidFill>
+                  <a:srgbClr val="F5A623"/>
+                </a:solidFill>
+                <a:latin typeface="Consolas"/>
+              </a:rPr>
+              <a:t>dense</a:t>
+            </a:r>
+          </a:p>
+        </p:txBody>
+      </p:sp>
+      <p:sp>
+        <p:nvSpPr>
+          <p:cNvPr id="12" name="TextBox 11"/>
+          <p:cNvSpPr txBox="1"/>
+          <p:nvPr/>
+        </p:nvSpPr>
+        <p:spPr>
+          <a:xfrm>
+            <a:off x="3840480" y="2761488"/>
+            <a:ext cx="2606040" cy="457200"/>
+          </a:xfrm>
+          <a:prstGeom prst="rect">
+            <a:avLst/>
+          </a:prstGeom>
+          <a:noFill/>
+        </p:spPr>
+        <p:txBody>
+          <a:bodyPr wrap="square" lIns="0" tIns="0" rIns="0" bIns="0" anchor="t">
+            <a:spAutoFit/>
+          </a:bodyPr>
+          <a:lstStyle/>
+          <a:p>
+            <a:pPr algn="l">
+              <a:lnSpc>
+                <a:spcPct val="100000"/>
+              </a:lnSpc>
+              <a:spcBef>
+                <a:spcPts val="0"/>
+              </a:spcBef>
+              <a:spcAft>
+                <a:spcPts val="200"/>
+              </a:spcAft>
+            </a:pPr>
+            <a:r>
+              <a:rPr sz="1450" b="1">
+                <a:solidFill>
+                  <a:srgbClr val="E6EDF3"/>
+                </a:solidFill>
+                <a:latin typeface="Consolas"/>
+              </a:rPr>
+              <a:t>payload reale</a:t>
+            </a:r>
+          </a:p>
+        </p:txBody>
+      </p:sp>
+      <p:sp>
+        <p:nvSpPr>
+          <p:cNvPr id="13" name="TextBox 12"/>
+          <p:cNvSpPr txBox="1"/>
+          <p:nvPr/>
+        </p:nvSpPr>
+        <p:spPr>
+          <a:xfrm>
+            <a:off x="3840480" y="3246120"/>
+            <a:ext cx="2606040" cy="640080"/>
+          </a:xfrm>
+          <a:prstGeom prst="rect">
+            <a:avLst/>
+          </a:prstGeom>
+          <a:noFill/>
+        </p:spPr>
+        <p:txBody>
+          <a:bodyPr wrap="square" lIns="0" tIns="0" rIns="0" bIns="0" anchor="t">
+            <a:spAutoFit/>
+          </a:bodyPr>
+          <a:lstStyle/>
+          <a:p>
+            <a:pPr algn="l">
+              <a:lnSpc>
+                <a:spcPct val="105000"/>
+              </a:lnSpc>
+              <a:spcBef>
+                <a:spcPts val="0"/>
+              </a:spcBef>
+              <a:spcAft>
+                <a:spcPts val="200"/>
+              </a:spcAft>
+            </a:pPr>
+            <a:r>
+              <a:rPr sz="1050" b="0" dirty="0">
+                <a:solidFill>
+                  <a:srgbClr val="8B949E"/>
+                </a:solidFill>
+                <a:latin typeface="Segoe UI"/>
+              </a:rPr>
+              <a:t>feature nel pacchetto,
+</a:t>
+            </a:r>
+            <a:r>
+              <a:rPr sz="1050" b="0" dirty="0" err="1">
+                <a:solidFill>
+                  <a:srgbClr val="8B949E"/>
+                </a:solidFill>
+                <a:latin typeface="Segoe UI"/>
+              </a:rPr>
+              <a:t>n_in/n_out</a:t>
+            </a:r>
+            <a:r>
+              <a:rPr sz="1050" b="0" dirty="0">
+                <a:solidFill>
+                  <a:srgbClr val="8B949E"/>
+                </a:solidFill>
+                <a:latin typeface="Segoe UI"/>
+              </a:rPr>
+              <a:t> liberi</a:t>
+            </a:r>
+            <a:r>
+              <a:rPr sz="1050" b="0" dirty="0" err="1">
+                <a:solidFill>
+                  <a:srgbClr val="8B949E"/>
+                </a:solidFill>
+                <a:latin typeface="Segoe UI"/>
+              </a:rPr>
+              <a:t/>
+            </a:r>
+            <a:r>
+              <a:rPr sz="1050" b="0" dirty="0">
+                <a:solidFill>
+                  <a:srgbClr val="8B949E"/>
+                </a:solidFill>
+                <a:latin typeface="Segoe UI"/>
+              </a:rPr>
+              <a:t/>
+            </a:r>
+          </a:p>
+        </p:txBody>
+      </p:sp>
+      <p:sp>
+        <p:nvSpPr>
+          <p:cNvPr id="14" name="Rounded Rectangle 13"/>
+          <p:cNvSpPr/>
+          <p:nvPr/>
+        </p:nvSpPr>
+        <p:spPr>
+          <a:xfrm>
+            <a:off x="6766560" y="2194560"/>
+            <a:ext cx="1325880" cy="1737360"/>
+          </a:xfrm>
+          <a:prstGeom prst="roundRect">
+            <a:avLst/>
+          </a:prstGeom>
+          <a:solidFill>
+            <a:srgbClr val="1B222E"/>
+          </a:solidFill>
+          <a:ln w="19050">
+            <a:solidFill>
+              <a:srgbClr val="58A6FF"/>
+            </a:solidFill>
+          </a:ln>
+          <a:effectLst/>
+        </p:spPr>
+        <p:style>
+          <a:lnRef idx="1">
+            <a:schemeClr val="accent1"/>
+          </a:lnRef>
+          <a:fillRef idx="3">
+            <a:schemeClr val="accent1"/>
+          </a:fillRef>
+          <a:effectRef idx="2">
+            <a:schemeClr val="accent1"/>
+          </a:effectRef>
+          <a:fontRef idx="minor">
+            <a:schemeClr val="lt1"/>
+          </a:fontRef>
+        </p:style>
+        <p:txBody>
+          <a:bodyPr rtlCol="0" anchor="ctr"/>
+          <a:lstStyle/>
+          <a:p>
+            <a:pPr algn="ctr"/>
+            <a:endParaRPr/>
+          </a:p>
+        </p:txBody>
+      </p:sp>
+      <p:sp>
+        <p:nvSpPr>
+          <p:cNvPr id="15" name="TextBox 14"/>
+          <p:cNvSpPr txBox="1"/>
+          <p:nvPr/>
+        </p:nvSpPr>
+        <p:spPr>
+          <a:xfrm>
+            <a:off x="6903720" y="2331720"/>
+            <a:ext cx="1051560" cy="365760"/>
+          </a:xfrm>
+          <a:prstGeom prst="rect">
+            <a:avLst/>
+          </a:prstGeom>
+          <a:noFill/>
+        </p:spPr>
+        <p:txBody>
+          <a:bodyPr wrap="square" lIns="0" tIns="0" rIns="0" bIns="0" anchor="t">
+            <a:spAutoFit/>
+          </a:bodyPr>
+          <a:lstStyle/>
+          <a:p>
+            <a:pPr algn="l">
+              <a:lnSpc>
+                <a:spcPct val="100000"/>
+              </a:lnSpc>
+              <a:spcBef>
+                <a:spcPts val="0"/>
+              </a:spcBef>
+              <a:spcAft>
+                <a:spcPts val="200"/>
+              </a:spcAft>
+            </a:pPr>
+            <a:r>
+              <a:rPr sz="1300" b="1">
+                <a:solidFill>
+                  <a:srgbClr val="58A6FF"/>
+                </a:solidFill>
+                <a:latin typeface="Consolas"/>
+              </a:rPr>
+              <a:t>meta.json</a:t>
+            </a:r>
+          </a:p>
+        </p:txBody>
+      </p:sp>
+      <p:sp>
+        <p:nvSpPr>
+          <p:cNvPr id="16" name="TextBox 15"/>
+          <p:cNvSpPr txBox="1"/>
+          <p:nvPr/>
+        </p:nvSpPr>
+        <p:spPr>
+          <a:xfrm>
+            <a:off x="6903720" y="2761488"/>
+            <a:ext cx="1051560" cy="457200"/>
+          </a:xfrm>
+          <a:prstGeom prst="rect">
+            <a:avLst/>
+          </a:prstGeom>
+          <a:noFill/>
+        </p:spPr>
+        <p:txBody>
+          <a:bodyPr wrap="square" lIns="0" tIns="0" rIns="0" bIns="0" anchor="t">
+            <a:spAutoFit/>
+          </a:bodyPr>
+          <a:lstStyle/>
+          <a:p>
+            <a:pPr algn="l">
+              <a:lnSpc>
+                <a:spcPct val="100000"/>
+              </a:lnSpc>
+              <a:spcBef>
+                <a:spcPts val="0"/>
+              </a:spcBef>
+              <a:spcAft>
+                <a:spcPts val="200"/>
+              </a:spcAft>
+            </a:pPr>
+            <a:r>
+              <a:rPr sz="1450" b="1">
+                <a:solidFill>
+                  <a:srgbClr val="E6EDF3"/>
+                </a:solidFill>
+                <a:latin typeface="Consolas"/>
+              </a:rPr>
+              <a:t>per modello</a:t>
+            </a:r>
+          </a:p>
+        </p:txBody>
+      </p:sp>
+      <p:sp>
+        <p:nvSpPr>
+          <p:cNvPr id="17" name="TextBox 16"/>
+          <p:cNvSpPr txBox="1"/>
+          <p:nvPr/>
+        </p:nvSpPr>
+        <p:spPr>
+          <a:xfrm>
+            <a:off x="6903720" y="3246120"/>
+            <a:ext cx="1051560" cy="640080"/>
+          </a:xfrm>
+          <a:prstGeom prst="rect">
+            <a:avLst/>
+          </a:prstGeom>
+          <a:noFill/>
+        </p:spPr>
+        <p:txBody>
+          <a:bodyPr wrap="square" lIns="0" tIns="0" rIns="0" bIns="0" anchor="t">
+            <a:spAutoFit/>
+          </a:bodyPr>
+          <a:lstStyle/>
+          <a:p>
+            <a:pPr algn="l">
+              <a:lnSpc>
+                <a:spcPct val="105000"/>
+              </a:lnSpc>
+              <a:spcBef>
+                <a:spcPts val="0"/>
+              </a:spcBef>
+              <a:spcAft>
+                <a:spcPts val="200"/>
+              </a:spcAft>
+            </a:pPr>
+            <a:r>
+              <a:rPr sz="1050" b="0">
+                <a:solidFill>
+                  <a:srgbClr val="8B949E"/>
+                </a:solidFill>
+                <a:latin typeface="Segoe UI"/>
+              </a:rPr>
+              <a:t>scenario + shape
+dichiarati</a:t>
+            </a:r>
+          </a:p>
+        </p:txBody>
+      </p:sp>
+      <p:sp>
+        <p:nvSpPr>
+          <p:cNvPr id="18" name="Rounded Rectangle 17"/>
+          <p:cNvSpPr/>
+          <p:nvPr/>
+        </p:nvSpPr>
+        <p:spPr>
+          <a:xfrm>
+            <a:off x="8275320" y="2194560"/>
+            <a:ext cx="3246120" cy="1737360"/>
+          </a:xfrm>
+          <a:prstGeom prst="roundRect">
+            <a:avLst/>
+          </a:prstGeom>
+          <a:solidFill>
+            <a:srgbClr val="1B222E"/>
+          </a:solidFill>
+          <a:ln w="19050">
+            <a:solidFill>
+              <a:srgbClr val="F85149"/>
+            </a:solidFill>
+          </a:ln>
+          <a:effectLst/>
+        </p:spPr>
+        <p:style>
+          <a:lnRef idx="1">
+            <a:schemeClr val="accent1"/>
+          </a:lnRef>
+          <a:fillRef idx="3">
+            <a:schemeClr val="accent1"/>
+          </a:fillRef>
+          <a:effectRef idx="2">
+            <a:schemeClr val="accent1"/>
+          </a:effectRef>
+          <a:fontRef idx="minor">
+            <a:schemeClr val="lt1"/>
+          </a:fontRef>
+        </p:style>
+        <p:txBody>
+          <a:bodyPr rtlCol="0" anchor="ctr"/>
+          <a:lstStyle/>
+          <a:p>
+            <a:pPr algn="ctr"/>
+            <a:endParaRPr/>
+          </a:p>
+        </p:txBody>
+      </p:sp>
+      <p:sp>
+        <p:nvSpPr>
+          <p:cNvPr id="19" name="TextBox 18"/>
+          <p:cNvSpPr txBox="1"/>
+          <p:nvPr/>
+        </p:nvSpPr>
+        <p:spPr>
+          <a:xfrm>
+            <a:off x="8412480" y="2331720"/>
+            <a:ext cx="2971800" cy="365760"/>
+          </a:xfrm>
+          <a:prstGeom prst="rect">
+            <a:avLst/>
+          </a:prstGeom>
+          <a:noFill/>
+        </p:spPr>
+        <p:txBody>
+          <a:bodyPr wrap="square" lIns="0" tIns="0" rIns="0" bIns="0" anchor="t">
+            <a:spAutoFit/>
+          </a:bodyPr>
+          <a:lstStyle/>
+          <a:p>
+            <a:pPr algn="l">
+              <a:lnSpc>
+                <a:spcPct val="100000"/>
+              </a:lnSpc>
+              <a:spcBef>
+                <a:spcPts val="0"/>
+              </a:spcBef>
+              <a:spcAft>
+                <a:spcPts val="200"/>
+              </a:spcAft>
+            </a:pPr>
+            <a:r>
+              <a:rPr sz="1300" b="1">
+                <a:solidFill>
+                  <a:srgbClr val="F85149"/>
+                </a:solidFill>
+                <a:latin typeface="Consolas"/>
+              </a:rPr>
+              <a:t>6/52</a:t>
+            </a:r>
+          </a:p>
+        </p:txBody>
+      </p:sp>
+      <p:sp>
+        <p:nvSpPr>
+          <p:cNvPr id="20" name="TextBox 19"/>
+          <p:cNvSpPr txBox="1"/>
+          <p:nvPr/>
+        </p:nvSpPr>
+        <p:spPr>
+          <a:xfrm>
+            <a:off x="8412480" y="2761488"/>
+            <a:ext cx="2971800" cy="457200"/>
+          </a:xfrm>
+          <a:prstGeom prst="rect">
+            <a:avLst/>
+          </a:prstGeom>
+          <a:noFill/>
+        </p:spPr>
+        <p:txBody>
+          <a:bodyPr wrap="square" lIns="0" tIns="0" rIns="0" bIns="0" anchor="t">
+            <a:spAutoFit/>
+          </a:bodyPr>
+          <a:lstStyle/>
+          <a:p>
+            <a:pPr algn="l">
+              <a:lnSpc>
+                <a:spcPct val="100000"/>
+              </a:lnSpc>
+              <a:spcBef>
+                <a:spcPts val="0"/>
+              </a:spcBef>
+              <a:spcAft>
+                <a:spcPts val="200"/>
+              </a:spcAft>
+            </a:pPr>
+            <a:r>
+              <a:rPr sz="1450" b="1" dirty="0">
+                <a:solidFill>
+                  <a:srgbClr val="E6EDF3"/>
+                </a:solidFill>
+                <a:latin typeface="Consolas"/>
+              </a:rPr>
+              <a:t>default</a:t>
+            </a:r>
+          </a:p>
+        </p:txBody>
+      </p:sp>
+      <p:sp>
+        <p:nvSpPr>
+          <p:cNvPr id="21" name="TextBox 20"/>
+          <p:cNvSpPr txBox="1"/>
+          <p:nvPr/>
+        </p:nvSpPr>
+        <p:spPr>
+          <a:xfrm>
+            <a:off x="8412480" y="3246120"/>
+            <a:ext cx="2971800" cy="640080"/>
+          </a:xfrm>
+          <a:prstGeom prst="rect">
+            <a:avLst/>
+          </a:prstGeom>
+          <a:noFill/>
+        </p:spPr>
+        <p:txBody>
+          <a:bodyPr wrap="square" lIns="0" tIns="0" rIns="0" bIns="0" anchor="t">
+            <a:spAutoFit/>
+          </a:bodyPr>
+          <a:lstStyle/>
+          <a:p>
+            <a:pPr algn="l">
+              <a:lnSpc>
+                <a:spcPct val="105000"/>
+              </a:lnSpc>
+              <a:spcBef>
+                <a:spcPts val="0"/>
+              </a:spcBef>
+              <a:spcAft>
+                <a:spcPts val="200"/>
+              </a:spcAft>
+            </a:pPr>
+            <a:r>
+              <a:rPr sz="1050" b="0">
+                <a:solidFill>
+                  <a:srgbClr val="8B949E"/>
+                </a:solidFill>
+                <a:latin typeface="Segoe UI"/>
+              </a:rPr>
+              <a:t>shape storica
+identica a prima</a:t>
+            </a:r>
+          </a:p>
+        </p:txBody>
+      </p:sp>
+      <p:sp>
+        <p:nvSpPr>
+          <p:cNvPr id="22" name="TextBox 21"/>
+          <p:cNvSpPr txBox="1"/>
+          <p:nvPr/>
+        </p:nvSpPr>
+        <p:spPr>
+          <a:xfrm>
+            <a:off x="640080" y="4206240"/>
+            <a:ext cx="10927080" cy="914400"/>
+          </a:xfrm>
+          <a:prstGeom prst="rect">
+            <a:avLst/>
+          </a:prstGeom>
+          <a:noFill/>
+        </p:spPr>
+        <p:txBody>
+          <a:bodyPr wrap="square" lIns="0" tIns="0" rIns="0" bIns="0" anchor="t">
+            <a:spAutoFit/>
+          </a:bodyPr>
+          <a:lstStyle/>
+          <a:p>
+            <a:pPr algn="l">
+              <a:lnSpc>
+                <a:spcPct val="120000"/>
+              </a:lnSpc>
+              <a:spcBef>
+                <a:spcPts val="0"/>
+              </a:spcBef>
+              <a:spcAft>
+                <a:spcPts val="200"/>
+              </a:spcAft>
+            </a:pPr>
+            <a:r>
+              <a:rPr sz="1350" b="0">
+                <a:solidFill>
+                  <a:srgbClr val="E6EDF3"/>
+                </a:solidFill>
+                <a:latin typeface="Segoe UI"/>
+              </a:rPr>
+              <a:t>Prima: </a:t>
+            </a:r>
+            <a:r>
+              <a:rPr sz="1350" b="1">
+                <a:solidFill>
+                  <a:srgbClr val="F5A623"/>
+                </a:solidFill>
+                <a:latin typeface="Segoe UI"/>
+              </a:rPr>
+              <a:t>N_IN=65 e N_OUT=7</a:t>
+            </a:r>
+            <a:r>
+              <a:rPr sz="1350" b="0">
+                <a:solidFill>
+                  <a:srgbClr val="8B949E"/>
+                </a:solidFill>
+                <a:latin typeface="Segoe UI"/>
+              </a:rPr>
+              <a:t> erano costanti Python e letterali C hardcoded nelle 3 pipeline. Ora (P1): due generatori, </a:t>
+            </a:r>
+            <a:r>
+              <a:rPr sz="1350" b="1">
+                <a:solidFill>
+                  <a:srgbClr val="3FB950"/>
+                </a:solidFill>
+                <a:latin typeface="Segoe UI"/>
+              </a:rPr>
+              <a:t>sparse e dense</a:t>
+            </a:r>
+            <a:r>
+              <a:rPr sz="1350" b="0">
+                <a:solidFill>
+                  <a:srgbClr val="8B949E"/>
+                </a:solidFill>
+                <a:latin typeface="Segoe UI"/>
+              </a:rPr>
+              <a:t>, derivano lo shape da model_meta.json — stesso datapath zero-lookup, nessuna perdita di prestazioni sul default 65-4-4-7.</a:t>
+            </a:r>
+          </a:p>
+        </p:txBody>
+      </p:sp>
+      <p:sp>
+        <p:nvSpPr>
+          <p:cNvPr id="23" name="Rounded Rectangle 22"/>
+          <p:cNvSpPr/>
+          <p:nvPr/>
+        </p:nvSpPr>
+        <p:spPr>
+          <a:xfrm>
+            <a:off x="640080" y="5074920"/>
+            <a:ext cx="10927080" cy="1051560"/>
+          </a:xfrm>
+          <a:prstGeom prst="roundRect">
+            <a:avLst/>
+          </a:prstGeom>
+          <a:solidFill>
+            <a:srgbClr val="0A0E14"/>
+          </a:solidFill>
+          <a:ln w="12700">
+            <a:solidFill>
+              <a:srgbClr val="30363D"/>
+            </a:solidFill>
+          </a:ln>
+          <a:effectLst/>
+        </p:spPr>
+        <p:style>
+          <a:lnRef idx="1">
+            <a:schemeClr val="accent1"/>
+          </a:lnRef>
+          <a:fillRef idx="3">
+            <a:schemeClr val="accent1"/>
+          </a:fillRef>
+          <a:effectRef idx="2">
+            <a:schemeClr val="accent1"/>
+          </a:effectRef>
+          <a:fontRef idx="minor">
+            <a:schemeClr val="lt1"/>
+          </a:fontRef>
+        </p:style>
+        <p:txBody>
+          <a:bodyPr rtlCol="0" anchor="ctr"/>
+          <a:lstStyle/>
+          <a:p>
+            <a:pPr algn="ctr"/>
+            <a:endParaRPr/>
+          </a:p>
+        </p:txBody>
+      </p:sp>
+      <p:sp>
+        <p:nvSpPr>
+          <p:cNvPr id="24" name="TextBox 23"/>
+          <p:cNvSpPr txBox="1"/>
+          <p:nvPr/>
+        </p:nvSpPr>
+        <p:spPr>
+          <a:xfrm>
+            <a:off x="914400" y="5276088"/>
+            <a:ext cx="10424159" cy="411479"/>
+          </a:xfrm>
+          <a:prstGeom prst="rect">
+            <a:avLst/>
+          </a:prstGeom>
+          <a:noFill/>
+        </p:spPr>
+        <p:txBody>
+          <a:bodyPr wrap="square" lIns="0" tIns="0" rIns="0" bIns="0" anchor="t">
+            <a:spAutoFit/>
+          </a:bodyPr>
+          <a:lstStyle/>
+          <a:p>
+            <a:pPr algn="l">
+              <a:lnSpc>
+                <a:spcPct val="102000"/>
+              </a:lnSpc>
+              <a:spcBef>
+                <a:spcPts val="0"/>
+              </a:spcBef>
+              <a:spcAft>
+                <a:spcPts val="100"/>
+              </a:spcAft>
+            </a:pPr>
+            <a:r>
+              <a:rPr sz="1100" b="0">
+                <a:solidFill>
+                  <a:srgbClr val="8B949E"/>
+                </a:solidFill>
+                <a:latin typeface="Consolas"/>
+              </a:rPr>
+              <a:t>generate_ebpf_hardcoded(w, scale, n_interfaces=4, n_nodes=10,  # sparse: N_IN=29 N_OUT=5</a:t>
+            </a:r>
+          </a:p>
+          <a:p>
+            <a:pPr algn="l">
+              <a:lnSpc>
+                <a:spcPct val="102000"/>
+              </a:lnSpc>
+              <a:spcBef>
+                <a:spcPts val="0"/>
+              </a:spcBef>
+              <a:spcAft>
+                <a:spcPts val="100"/>
+              </a:spcAft>
+            </a:pPr>
+            <a:r>
+              <a:rPr sz="1100" b="0">
+                <a:solidFill>
+                  <a:srgbClr val="8B949E"/>
+                </a:solidFill>
+                <a:latin typeface="Consolas"/>
+              </a:rPr>
+              <a:t>                        hidden_dims=(3,3))                    # stesso zero-lookup, shape diversa</a:t>
+            </a:r>
+          </a:p>
+          <a:p>
+            <a:pPr algn="l">
+              <a:lnSpc>
+                <a:spcPct val="102000"/>
+              </a:lnSpc>
+              <a:spcBef>
+                <a:spcPts val="0"/>
+              </a:spcBef>
+              <a:spcAft>
+                <a:spcPts val="100"/>
+              </a:spcAft>
+            </a:pPr>
+            <a:r>
+              <a:rPr sz="1100" b="0">
+                <a:solidFill>
+                  <a:srgbClr val="8B949E"/>
+                </a:solidFill>
+                <a:latin typeface="Consolas"/>
+              </a:rPr>
+              <a:t>generate_ebpf_hardcoded_dense(w, scale, n_in=10, n_out=4)      # dense: feature lette dal payload</a:t>
+            </a:r>
+          </a:p>
+        </p:txBody>
+      </p:sp>
+    </p:spTree>
+  </p:cSld>
+  <p:clrMapOvr>
+    <a:masterClrMapping/>
+  </p:clrMapOvr>
+</p:sld>
+</file>
+
 <file path=ppt/slides/slide2.xml><?xml version="1.0" encoding="utf-8"?>
 <p:sld xmlns:a="http://schemas.openxmlformats.org/drawingml/2006/main" xmlns:r="http://schemas.openxmlformats.org/officeDocument/2006/relationships" xmlns:p="http://schemas.openxmlformats.org/presentationml/2006/main">
   <p:cSld>
@@ -24195,7 +25379,7 @@
         </p:nvSpPr>
         <p:spPr>
           <a:xfrm>
-            <a:off x="896112" y="3991199"/>
+            <a:off x="896112" y="3964399"/>
             <a:ext cx="10469880" cy="1920240"/>
           </a:xfrm>
           <a:prstGeom prst="rect">
